--- a/第五週(10-08)/第五週_第3節_簡報.pptx
+++ b/第五週(10-08)/第五週_第3節_簡報.pptx
@@ -2691,106 +2691,7 @@
                 <a:ea typeface="Arial Unicode MS"/>
                 <a:cs typeface="Arial Unicode MS"/>
               </a:rPr>
-              <a:t>AT128：三個情境都過。</a:t>
-            </a:r>
-            <a:r>
-              <a:rPr sz="1000" lang="zh-TW" dirty="0">
-                <a:solidFill>
-                  <a:srgbClr val="000000"/>
-                </a:solidFill>
-                <a:latin typeface="Arial Unicode MS"/>
-                <a:ea typeface="Arial Unicode MS"/>
-                <a:cs typeface="Arial Unicode MS"/>
-              </a:rPr>
-              <a:t>
-</a:t>
-            </a:r>
-          </a:p>
-          <a:p>
-            <a:pPr algn="l">
-              <a:lnSpc>
-                <a:spcPct val="115000"/>
-              </a:lnSpc>
-              <a:spcAft>
-                <a:spcPts val="500"/>
-              </a:spcAft>
-            </a:pPr>
-            <a:r>
-              <a:rPr sz="1000" b="1" lang="zh-TW" dirty="0">
-                <a:solidFill>
-                  <a:srgbClr val="000000"/>
-                </a:solidFill>
-                <a:latin typeface="Arial Unicode MS"/>
-                <a:ea typeface="Arial Unicode MS"/>
-                <a:cs typeface="Arial Unicode MS"/>
-              </a:rPr>
-              <a:t>相機：校園和河內過，國道不過。</a:t>
-            </a:r>
-            <a:r>
-              <a:rPr sz="1000" lang="zh-TW" dirty="0">
-                <a:solidFill>
-                  <a:srgbClr val="000000"/>
-                </a:solidFill>
-                <a:latin typeface="Arial Unicode MS"/>
-                <a:ea typeface="Arial Unicode MS"/>
-                <a:cs typeface="Arial Unicode MS"/>
-              </a:rPr>
-              <a:t>
-</a:t>
-            </a:r>
-          </a:p>
-          <a:p>
-            <a:pPr algn="l">
-              <a:lnSpc>
-                <a:spcPct val="115000"/>
-              </a:lnSpc>
-              <a:spcAft>
-                <a:spcPts val="500"/>
-              </a:spcAft>
-            </a:pPr>
-            <a:r>
-              <a:rPr sz="1000" b="1" lang="zh-TW" dirty="0">
-                <a:solidFill>
-                  <a:srgbClr val="000000"/>
-                </a:solidFill>
-                <a:latin typeface="Arial Unicode MS"/>
-                <a:ea typeface="Arial Unicode MS"/>
-                <a:cs typeface="Arial Unicode MS"/>
-              </a:rPr>
-              <a:t>OS1：校園不過，河內換模式之後過，國道不過。</a:t>
-            </a:r>
-            <a:r>
-              <a:rPr sz="1000" lang="zh-TW" dirty="0">
-                <a:solidFill>
-                  <a:srgbClr val="000000"/>
-                </a:solidFill>
-                <a:latin typeface="Arial Unicode MS"/>
-                <a:ea typeface="Arial Unicode MS"/>
-                <a:cs typeface="Arial Unicode MS"/>
-              </a:rPr>
-              <a:t>
-</a:t>
-            </a:r>
-          </a:p>
-          <a:p>
-            <a:pPr algn="l">
-              <a:lnSpc>
-                <a:spcPct val="115000"/>
-              </a:lnSpc>
-              <a:spcAft>
-                <a:spcPts val="500"/>
-              </a:spcAft>
-            </a:pPr>
-            <a:r>
-              <a:rPr sz="1000" b="1" lang="zh-TW" dirty="0">
-                <a:solidFill>
-                  <a:srgbClr val="000000"/>
-                </a:solidFill>
-                <a:latin typeface="Arial Unicode MS"/>
-                <a:ea typeface="Arial Unicode MS"/>
-                <a:cs typeface="Arial Unicode MS"/>
-              </a:rPr>
-              <a:t>LD-16：一個都沒過。</a:t>
+              <a:t>AT128 三個情境都過。相機是校園和河內過、國道不過。OS1 校園不過、河內換模式之後過、國道不過。LD-16 一個都沒過。</a:t>
             </a:r>
             <a:r>
               <a:rPr sz="1000" lang="zh-TW" dirty="0">
@@ -3351,7 +3252,7 @@
                 <a:ea typeface="Arial Unicode MS"/>
                 <a:cs typeface="Arial Unicode MS"/>
               </a:rPr>
-              <a:t>我給四個提示詞：</a:t>
+              <a:t>我給四個提示詞，分別是</a:t>
             </a:r>
             <a:r>
               <a:rPr sz="1200" b="1" lang="zh-TW" dirty="0">

--- a/第五週(10-08)/第五週_第3節_簡報.pptx
+++ b/第五週(10-08)/第五週_第3節_簡報.pptx
@@ -4460,8 +4460,8 @@
         </p:nvSpPr>
         <p:spPr>
           <a:xfrm>
-            <a:off x="6766560" y="-1371600"/>
-            <a:ext cx="4206240" cy="4206240"/>
+            <a:off x="6130753" y="-947729"/>
+            <a:ext cx="2987610" cy="2987610"/>
           </a:xfrm>
           <a:prstGeom prst="ellipse">
             <a:avLst/>
@@ -4485,8 +4485,8 @@
         </p:nvSpPr>
         <p:spPr>
           <a:xfrm>
-            <a:off x="7863840" y="3108960"/>
-            <a:ext cx="2560320" cy="2560320"/>
+            <a:off x="7104973" y="1520297"/>
+            <a:ext cx="1688649" cy="1688649"/>
           </a:xfrm>
           <a:prstGeom prst="ellipse">
             <a:avLst/>
@@ -4507,8 +4507,8 @@
         </p:nvSpPr>
         <p:spPr>
           <a:xfrm>
-            <a:off x="502920" y="1207008"/>
-            <a:ext cx="6949440" cy="274320"/>
+            <a:off x="1681812" y="883806"/>
+            <a:ext cx="4936051" cy="194844"/>
           </a:xfrm>
           <a:prstGeom prst="rect">
             <a:avLst/>
@@ -4524,7 +4524,7 @@
               <a:buNone/>
             </a:pPr>
             <a:r>
-              <a:rPr lang="en-US" sz="1250" b="1" dirty="0">
+              <a:rPr lang="en-US" sz="890" b="1" dirty="0">
                 <a:solidFill>
                   <a:srgbClr val="00A896"/>
                 </a:solidFill>
@@ -4534,7 +4534,7 @@
               </a:rPr>
               <a:t>MITUST · Nguyên lý xe tự lái · Tuần 5</a:t>
             </a:r>
-            <a:endParaRPr lang="en-US" sz="1250" dirty="0"/>
+            <a:endParaRPr lang="en-US" sz="890" dirty="0"/>
           </a:p>
         </p:txBody>
       </p:sp>
@@ -4546,8 +4546,8 @@
         </p:nvSpPr>
         <p:spPr>
           <a:xfrm>
-            <a:off x="502920" y="1572768"/>
-            <a:ext cx="7498080" cy="1394896"/>
+            <a:off x="1681812" y="1143598"/>
+            <a:ext cx="5325739" cy="990767"/>
           </a:xfrm>
           <a:prstGeom prst="rect">
             <a:avLst/>
@@ -4566,7 +4566,7 @@
               <a:buNone/>
             </a:pPr>
             <a:r>
-              <a:rPr lang="en-US" sz="3400" b="1" dirty="0">
+              <a:rPr lang="en-US" sz="2410" b="1" dirty="0">
                 <a:solidFill>
                   <a:srgbClr val="FFFFFF"/>
                 </a:solidFill>
@@ -4576,7 +4576,7 @@
               </a:rPr>
               <a:t>Chọn cảm biến cho một chiếc xe cụ thể</a:t>
             </a:r>
-            <a:endParaRPr lang="en-US" sz="3400" dirty="0"/>
+            <a:endParaRPr lang="en-US" sz="2410" dirty="0"/>
           </a:p>
           <a:p>
             <a:pPr indent="0" marL="0">
@@ -4586,7 +4586,7 @@
               <a:buNone/>
             </a:pPr>
             <a:r>
-              <a:rPr lang="en-US" sz="1900" dirty="0">
+              <a:rPr lang="en-US" sz="1350" dirty="0">
                 <a:solidFill>
                   <a:srgbClr val="C8D6E2"/>
                 </a:solidFill>
@@ -4596,7 +4596,7 @@
               </a:rPr>
               <a:t>替一台指定的車選感測器</a:t>
             </a:r>
-            <a:endParaRPr lang="en-US" sz="3400" dirty="0"/>
+            <a:endParaRPr lang="en-US" sz="2410" dirty="0"/>
           </a:p>
         </p:txBody>
       </p:sp>
@@ -4608,8 +4608,8 @@
         </p:nvSpPr>
         <p:spPr>
           <a:xfrm>
-            <a:off x="502920" y="3008479"/>
-            <a:ext cx="1371600" cy="41148"/>
+            <a:off x="1681812" y="2163355"/>
+            <a:ext cx="974221" cy="29227"/>
           </a:xfrm>
           <a:prstGeom prst="rect">
             <a:avLst/>
@@ -4628,8 +4628,8 @@
         </p:nvSpPr>
         <p:spPr>
           <a:xfrm>
-            <a:off x="502920" y="3209647"/>
-            <a:ext cx="7132320" cy="612545"/>
+            <a:off x="1681812" y="2306241"/>
+            <a:ext cx="5065947" cy="435079"/>
           </a:xfrm>
           <a:prstGeom prst="rect">
             <a:avLst/>
@@ -4648,7 +4648,7 @@
               <a:buNone/>
             </a:pPr>
             <a:r>
-              <a:rPr lang="en-US" sz="1450" dirty="0">
+              <a:rPr lang="en-US" sz="1030" dirty="0">
                 <a:solidFill>
                   <a:srgbClr val="C8D6E2"/>
                 </a:solidFill>
@@ -4658,7 +4658,7 @@
               </a:rPr>
               <a:t>Bốn model, ba tình huống, mỗi người nộp một tờ</a:t>
             </a:r>
-            <a:endParaRPr lang="en-US" sz="1450" dirty="0"/>
+            <a:endParaRPr lang="en-US" sz="1030" dirty="0"/>
           </a:p>
           <a:p>
             <a:pPr indent="0" marL="0">
@@ -4668,7 +4668,7 @@
               <a:buNone/>
             </a:pPr>
             <a:r>
-              <a:rPr lang="en-US" sz="1250" dirty="0">
+              <a:rPr lang="en-US" sz="890" dirty="0">
                 <a:solidFill>
                   <a:srgbClr val="8AA0B4"/>
                 </a:solidFill>
@@ -4678,7 +4678,7 @@
               </a:rPr>
               <a:t>四個型號、三個情境，每個人交一張</a:t>
             </a:r>
-            <a:endParaRPr lang="en-US" sz="1450" dirty="0"/>
+            <a:endParaRPr lang="en-US" sz="1030" dirty="0"/>
           </a:p>
         </p:txBody>
       </p:sp>
@@ -4690,8 +4690,8 @@
         </p:nvSpPr>
         <p:spPr>
           <a:xfrm>
-            <a:off x="502920" y="3895344"/>
-            <a:ext cx="5943600" cy="384048"/>
+            <a:off x="1681812" y="2793278"/>
+            <a:ext cx="4221622" cy="272782"/>
           </a:xfrm>
           <a:prstGeom prst="roundRect">
             <a:avLst>
@@ -4712,8 +4712,8 @@
         </p:nvSpPr>
         <p:spPr>
           <a:xfrm>
-            <a:off x="630936" y="3941064"/>
-            <a:ext cx="5687568" cy="292608"/>
+            <a:off x="1772740" y="2825752"/>
+            <a:ext cx="4039768" cy="207834"/>
           </a:xfrm>
           <a:prstGeom prst="rect">
             <a:avLst/>
@@ -4729,7 +4729,7 @@
               <a:buNone/>
             </a:pPr>
             <a:r>
-              <a:rPr lang="en-US" sz="1050" b="1" dirty="0">
+              <a:rPr lang="en-US" sz="750" b="1" dirty="0">
                 <a:solidFill>
                   <a:srgbClr val="9FD6CE"/>
                 </a:solidFill>
@@ -4739,7 +4739,7 @@
               </a:rPr>
               <a:t>工具｜Công cụ： ch-neural.github.io/MITUST-Principles-of-Self-Driving-Cars/week5/spec/</a:t>
             </a:r>
-            <a:endParaRPr lang="en-US" sz="1050" dirty="0"/>
+            <a:endParaRPr lang="en-US" sz="750" dirty="0"/>
           </a:p>
         </p:txBody>
       </p:sp>
@@ -4751,8 +4751,8 @@
         </p:nvSpPr>
         <p:spPr>
           <a:xfrm>
-            <a:off x="502920" y="4370832"/>
-            <a:ext cx="6949440" cy="274320"/>
+            <a:off x="1681812" y="3131008"/>
+            <a:ext cx="4936051" cy="194844"/>
           </a:xfrm>
           <a:prstGeom prst="rect">
             <a:avLst/>
@@ -4768,7 +4768,7 @@
               <a:buNone/>
             </a:pPr>
             <a:r>
-              <a:rPr lang="en-US" sz="1150" dirty="0">
+              <a:rPr lang="en-US" sz="820" dirty="0">
                 <a:solidFill>
                   <a:srgbClr val="8AA0B4"/>
                 </a:solidFill>
@@ -4778,7 +4778,7 @@
               </a:rPr>
               <a:t>第五週 第 3 節　2026/10/08（四）11:10–12:00　CH Tseng</a:t>
             </a:r>
-            <a:endParaRPr lang="en-US" sz="1150" dirty="0"/>
+            <a:endParaRPr lang="en-US" sz="820" dirty="0"/>
           </a:p>
         </p:txBody>
       </p:sp>
@@ -4790,8 +4790,8 @@
         </p:nvSpPr>
         <p:spPr>
           <a:xfrm>
-            <a:off x="356616" y="310896"/>
-            <a:ext cx="2212848" cy="749808"/>
+            <a:off x="1577895" y="247315"/>
+            <a:ext cx="1571743" cy="532574"/>
           </a:xfrm>
           <a:prstGeom prst="roundRect">
             <a:avLst>
@@ -4820,8 +4820,8 @@
         </p:blipFill>
         <p:spPr>
           <a:xfrm>
-            <a:off x="502920" y="475488"/>
-            <a:ext cx="1920240" cy="424269"/>
+            <a:off x="1681812" y="364222"/>
+            <a:ext cx="1363909" cy="301350"/>
           </a:xfrm>
           <a:prstGeom prst="rect">
             <a:avLst/>
@@ -4861,8 +4861,8 @@
         </p:nvSpPr>
         <p:spPr>
           <a:xfrm>
-            <a:off x="502920" y="292608"/>
-            <a:ext cx="8138160" cy="841248"/>
+            <a:off x="1681812" y="234326"/>
+            <a:ext cx="5780375" cy="597522"/>
           </a:xfrm>
           <a:prstGeom prst="rect">
             <a:avLst/>
@@ -4881,7 +4881,7 @@
               <a:buNone/>
             </a:pPr>
             <a:r>
-              <a:rPr lang="en-US" sz="2200" b="1" dirty="0">
+              <a:rPr lang="en-US" sz="1560" b="1" dirty="0">
                 <a:solidFill>
                   <a:srgbClr val="0B1F3A"/>
                 </a:solidFill>
@@ -4891,7 +4891,7 @@
               </a:rPr>
               <a:t>Bốn bước, mỗi bước đều có con số phải chép</a:t>
             </a:r>
-            <a:endParaRPr lang="en-US" sz="2200" dirty="0"/>
+            <a:endParaRPr lang="en-US" sz="1560" dirty="0"/>
           </a:p>
           <a:p>
             <a:pPr indent="0" marL="0">
@@ -4901,7 +4901,7 @@
               <a:buNone/>
             </a:pPr>
             <a:r>
-              <a:rPr lang="en-US" sz="1350" dirty="0">
+              <a:rPr lang="en-US" sz="960" dirty="0">
                 <a:solidFill>
                   <a:srgbClr val="5F7183"/>
                 </a:solidFill>
@@ -4911,7 +4911,7 @@
               </a:rPr>
               <a:t>四個步驟，每一步都有要抄下來的數字</a:t>
             </a:r>
-            <a:endParaRPr lang="en-US" sz="2200" dirty="0"/>
+            <a:endParaRPr lang="en-US" sz="1560" dirty="0"/>
           </a:p>
         </p:txBody>
       </p:sp>
@@ -4923,8 +4923,8 @@
         </p:nvSpPr>
         <p:spPr>
           <a:xfrm>
-            <a:off x="502920" y="1133856"/>
-            <a:ext cx="1828800" cy="2724912"/>
+            <a:off x="1681812" y="831848"/>
+            <a:ext cx="1298961" cy="1935452"/>
           </a:xfrm>
           <a:prstGeom prst="roundRect">
             <a:avLst>
@@ -4957,8 +4957,8 @@
         </p:nvSpPr>
         <p:spPr>
           <a:xfrm>
-            <a:off x="1179576" y="1316736"/>
-            <a:ext cx="475488" cy="475488"/>
+            <a:off x="2162428" y="961744"/>
+            <a:ext cx="337730" cy="337730"/>
           </a:xfrm>
           <a:prstGeom prst="ellipse">
             <a:avLst/>
@@ -4977,8 +4977,8 @@
         </p:nvSpPr>
         <p:spPr>
           <a:xfrm>
-            <a:off x="1179576" y="1417320"/>
-            <a:ext cx="475488" cy="274320"/>
+            <a:off x="2162428" y="1033187"/>
+            <a:ext cx="337730" cy="194844"/>
           </a:xfrm>
           <a:prstGeom prst="rect">
             <a:avLst/>
@@ -4994,7 +4994,7 @@
               <a:buNone/>
             </a:pPr>
             <a:r>
-              <a:rPr lang="en-US" sz="1500" b="1" dirty="0">
+              <a:rPr lang="en-US" sz="1070" b="1" dirty="0">
                 <a:solidFill>
                   <a:srgbClr val="FFFFFF"/>
                 </a:solidFill>
@@ -5004,7 +5004,7 @@
               </a:rPr>
               <a:t>1</a:t>
             </a:r>
-            <a:endParaRPr lang="en-US" sz="1500" dirty="0"/>
+            <a:endParaRPr lang="en-US" sz="1070" dirty="0"/>
           </a:p>
         </p:txBody>
       </p:sp>
@@ -5016,8 +5016,8 @@
         </p:nvSpPr>
         <p:spPr>
           <a:xfrm>
-            <a:off x="630936" y="1883664"/>
-            <a:ext cx="1572768" cy="658368"/>
+            <a:off x="1772740" y="1364422"/>
+            <a:ext cx="1117106" cy="467626"/>
           </a:xfrm>
           <a:prstGeom prst="rect">
             <a:avLst/>
@@ -5036,7 +5036,7 @@
               <a:buNone/>
             </a:pPr>
             <a:r>
-              <a:rPr lang="en-US" sz="1400" b="1" dirty="0">
+              <a:rPr lang="en-US" sz="990" b="1" dirty="0">
                 <a:solidFill>
                   <a:srgbClr val="0B1F3A"/>
                 </a:solidFill>
@@ -5046,7 +5046,7 @@
               </a:rPr>
               <a:t>Chọn model</a:t>
             </a:r>
-            <a:endParaRPr lang="en-US" sz="1400" dirty="0"/>
+            <a:endParaRPr lang="en-US" sz="990" dirty="0"/>
           </a:p>
           <a:p>
             <a:pPr algn="ctr" indent="0" marL="0">
@@ -5056,7 +5056,7 @@
               <a:buNone/>
             </a:pPr>
             <a:r>
-              <a:rPr lang="en-US" sz="1200" dirty="0">
+              <a:rPr lang="en-US" sz="850" dirty="0">
                 <a:solidFill>
                   <a:srgbClr val="007F72"/>
                 </a:solidFill>
@@ -5066,7 +5066,7 @@
               </a:rPr>
               <a:t>選型號</a:t>
             </a:r>
-            <a:endParaRPr lang="en-US" sz="1400" dirty="0"/>
+            <a:endParaRPr lang="en-US" sz="990" dirty="0"/>
           </a:p>
         </p:txBody>
       </p:sp>
@@ -5078,8 +5078,8 @@
         </p:nvSpPr>
         <p:spPr>
           <a:xfrm>
-            <a:off x="630936" y="2578608"/>
-            <a:ext cx="1572768" cy="1170432"/>
+            <a:off x="1772740" y="1858027"/>
+            <a:ext cx="1117106" cy="831335"/>
           </a:xfrm>
           <a:prstGeom prst="rect">
             <a:avLst/>
@@ -5098,7 +5098,7 @@
               <a:buNone/>
             </a:pPr>
             <a:r>
-              <a:rPr lang="en-US" sz="1050" dirty="0">
+              <a:rPr lang="en-US" sz="750" dirty="0">
                 <a:solidFill>
                   <a:srgbClr val="5F7183"/>
                 </a:solidFill>
@@ -5108,7 +5108,7 @@
               </a:rPr>
               <a:t>Đọc bảng</a:t>
             </a:r>
-            <a:endParaRPr lang="en-US" sz="1050" dirty="0"/>
+            <a:endParaRPr lang="en-US" sz="750" dirty="0"/>
           </a:p>
           <a:p>
             <a:pPr algn="ctr" indent="0" marL="0">
@@ -5118,7 +5118,7 @@
               <a:buNone/>
             </a:pPr>
             <a:r>
-              <a:rPr lang="en-US" sz="1050" dirty="0">
+              <a:rPr lang="en-US" sz="750" dirty="0">
                 <a:solidFill>
                   <a:srgbClr val="5F7183"/>
                 </a:solidFill>
@@ -5128,7 +5128,7 @@
               </a:rPr>
               <a:t>Tắt phần dịch</a:t>
             </a:r>
-            <a:endParaRPr lang="en-US" sz="1050" dirty="0"/>
+            <a:endParaRPr lang="en-US" sz="750" dirty="0"/>
           </a:p>
           <a:p>
             <a:pPr algn="ctr" indent="0" marL="0">
@@ -5138,7 +5138,7 @@
               <a:buNone/>
             </a:pPr>
             <a:r>
-              <a:rPr lang="en-US" sz="950" dirty="0">
+              <a:rPr lang="en-US" sz="670" dirty="0">
                 <a:solidFill>
                   <a:srgbClr val="5F7183"/>
                 </a:solidFill>
@@ -5148,7 +5148,7 @@
               </a:rPr>
               <a:t>讀規格表</a:t>
             </a:r>
-            <a:endParaRPr lang="en-US" sz="1050" dirty="0"/>
+            <a:endParaRPr lang="en-US" sz="750" dirty="0"/>
           </a:p>
           <a:p>
             <a:pPr algn="ctr" indent="0" marL="0">
@@ -5158,7 +5158,7 @@
               <a:buNone/>
             </a:pPr>
             <a:r>
-              <a:rPr lang="en-US" sz="950" dirty="0">
+              <a:rPr lang="en-US" sz="670" dirty="0">
                 <a:solidFill>
                   <a:srgbClr val="5F7183"/>
                 </a:solidFill>
@@ -5168,7 +5168,7 @@
               </a:rPr>
               <a:t>把對照關掉</a:t>
             </a:r>
-            <a:endParaRPr lang="en-US" sz="1050" dirty="0"/>
+            <a:endParaRPr lang="en-US" sz="750" dirty="0"/>
           </a:p>
         </p:txBody>
       </p:sp>
@@ -5180,8 +5180,8 @@
         </p:nvSpPr>
         <p:spPr>
           <a:xfrm>
-            <a:off x="2331720" y="2048256"/>
-            <a:ext cx="274320" cy="365760"/>
+            <a:off x="2980773" y="1481328"/>
+            <a:ext cx="194844" cy="259792"/>
           </a:xfrm>
           <a:prstGeom prst="rect">
             <a:avLst/>
@@ -5197,7 +5197,7 @@
               <a:buNone/>
             </a:pPr>
             <a:r>
-              <a:rPr lang="en-US" sz="1900" b="1" dirty="0">
+              <a:rPr lang="en-US" sz="1350" b="1" dirty="0">
                 <a:solidFill>
                   <a:srgbClr val="00A896"/>
                 </a:solidFill>
@@ -5207,7 +5207,7 @@
               </a:rPr>
               <a:t>→</a:t>
             </a:r>
-            <a:endParaRPr lang="en-US" sz="1900" dirty="0"/>
+            <a:endParaRPr lang="en-US" sz="1350" dirty="0"/>
           </a:p>
         </p:txBody>
       </p:sp>
@@ -5219,8 +5219,8 @@
         </p:nvSpPr>
         <p:spPr>
           <a:xfrm>
-            <a:off x="2606040" y="1133856"/>
-            <a:ext cx="1828800" cy="2724912"/>
+            <a:off x="3175617" y="831848"/>
+            <a:ext cx="1298961" cy="1935452"/>
           </a:xfrm>
           <a:prstGeom prst="roundRect">
             <a:avLst>
@@ -5253,8 +5253,8 @@
         </p:nvSpPr>
         <p:spPr>
           <a:xfrm>
-            <a:off x="3282696" y="1316736"/>
-            <a:ext cx="475488" cy="475488"/>
+            <a:off x="3656233" y="961744"/>
+            <a:ext cx="337730" cy="337730"/>
           </a:xfrm>
           <a:prstGeom prst="ellipse">
             <a:avLst/>
@@ -5273,8 +5273,8 @@
         </p:nvSpPr>
         <p:spPr>
           <a:xfrm>
-            <a:off x="3282696" y="1417320"/>
-            <a:ext cx="475488" cy="274320"/>
+            <a:off x="3656233" y="1033187"/>
+            <a:ext cx="337730" cy="194844"/>
           </a:xfrm>
           <a:prstGeom prst="rect">
             <a:avLst/>
@@ -5290,7 +5290,7 @@
               <a:buNone/>
             </a:pPr>
             <a:r>
-              <a:rPr lang="en-US" sz="1500" b="1" dirty="0">
+              <a:rPr lang="en-US" sz="1070" b="1" dirty="0">
                 <a:solidFill>
                   <a:srgbClr val="FFFFFF"/>
                 </a:solidFill>
@@ -5300,7 +5300,7 @@
               </a:rPr>
               <a:t>2</a:t>
             </a:r>
-            <a:endParaRPr lang="en-US" sz="1500" dirty="0"/>
+            <a:endParaRPr lang="en-US" sz="1070" dirty="0"/>
           </a:p>
         </p:txBody>
       </p:sp>
@@ -5312,8 +5312,8 @@
         </p:nvSpPr>
         <p:spPr>
           <a:xfrm>
-            <a:off x="2734056" y="1883664"/>
-            <a:ext cx="1572768" cy="658368"/>
+            <a:off x="3266544" y="1364422"/>
+            <a:ext cx="1117106" cy="467626"/>
           </a:xfrm>
           <a:prstGeom prst="rect">
             <a:avLst/>
@@ -5332,7 +5332,7 @@
               <a:buNone/>
             </a:pPr>
             <a:r>
-              <a:rPr lang="en-US" sz="1400" b="1" dirty="0">
+              <a:rPr lang="en-US" sz="990" b="1" dirty="0">
                 <a:solidFill>
                   <a:srgbClr val="0B1F3A"/>
                 </a:solidFill>
@@ -5342,7 +5342,7 @@
               </a:rPr>
               <a:t>Tìm bốn số</a:t>
             </a:r>
-            <a:endParaRPr lang="en-US" sz="1400" dirty="0"/>
+            <a:endParaRPr lang="en-US" sz="990" dirty="0"/>
           </a:p>
           <a:p>
             <a:pPr algn="ctr" indent="0" marL="0">
@@ -5352,7 +5352,7 @@
               <a:buNone/>
             </a:pPr>
             <a:r>
-              <a:rPr lang="en-US" sz="1200" dirty="0">
+              <a:rPr lang="en-US" sz="850" dirty="0">
                 <a:solidFill>
                   <a:srgbClr val="007F72"/>
                 </a:solidFill>
@@ -5362,7 +5362,7 @@
               </a:rPr>
               <a:t>找四個數字</a:t>
             </a:r>
-            <a:endParaRPr lang="en-US" sz="1400" dirty="0"/>
+            <a:endParaRPr lang="en-US" sz="990" dirty="0"/>
           </a:p>
         </p:txBody>
       </p:sp>
@@ -5374,8 +5374,8 @@
         </p:nvSpPr>
         <p:spPr>
           <a:xfrm>
-            <a:off x="2734056" y="2578608"/>
-            <a:ext cx="1572768" cy="1170432"/>
+            <a:off x="3266544" y="1858027"/>
+            <a:ext cx="1117106" cy="831335"/>
           </a:xfrm>
           <a:prstGeom prst="rect">
             <a:avLst/>
@@ -5394,7 +5394,7 @@
               <a:buNone/>
             </a:pPr>
             <a:r>
-              <a:rPr lang="en-US" sz="1050" dirty="0">
+              <a:rPr lang="en-US" sz="750" dirty="0">
                 <a:solidFill>
                   <a:srgbClr val="5F7183"/>
                 </a:solidFill>
@@ -5404,7 +5404,7 @@
               </a:rPr>
               <a:t>Góc nhìn · tầm đo</a:t>
             </a:r>
-            <a:endParaRPr lang="en-US" sz="1050" dirty="0"/>
+            <a:endParaRPr lang="en-US" sz="750" dirty="0"/>
           </a:p>
           <a:p>
             <a:pPr algn="ctr" indent="0" marL="0">
@@ -5414,7 +5414,7 @@
               <a:buNone/>
             </a:pPr>
             <a:r>
-              <a:rPr lang="en-US" sz="1050" dirty="0">
+              <a:rPr lang="en-US" sz="750" dirty="0">
                 <a:solidFill>
                   <a:srgbClr val="5F7183"/>
                 </a:solidFill>
@@ -5424,7 +5424,7 @@
               </a:rPr>
               <a:t>phân giải · tốc độ</a:t>
             </a:r>
-            <a:endParaRPr lang="en-US" sz="1050" dirty="0"/>
+            <a:endParaRPr lang="en-US" sz="750" dirty="0"/>
           </a:p>
           <a:p>
             <a:pPr algn="ctr" indent="0" marL="0">
@@ -5434,7 +5434,7 @@
               <a:buNone/>
             </a:pPr>
             <a:r>
-              <a:rPr lang="en-US" sz="950" dirty="0">
+              <a:rPr lang="en-US" sz="670" dirty="0">
                 <a:solidFill>
                   <a:srgbClr val="5F7183"/>
                 </a:solidFill>
@@ -5444,7 +5444,7 @@
               </a:rPr>
               <a:t>視野・測距</a:t>
             </a:r>
-            <a:endParaRPr lang="en-US" sz="1050" dirty="0"/>
+            <a:endParaRPr lang="en-US" sz="750" dirty="0"/>
           </a:p>
           <a:p>
             <a:pPr algn="ctr" indent="0" marL="0">
@@ -5454,7 +5454,7 @@
               <a:buNone/>
             </a:pPr>
             <a:r>
-              <a:rPr lang="en-US" sz="950" dirty="0">
+              <a:rPr lang="en-US" sz="670" dirty="0">
                 <a:solidFill>
                   <a:srgbClr val="5F7183"/>
                 </a:solidFill>
@@ -5464,7 +5464,7 @@
               </a:rPr>
               <a:t>解析度・更新率</a:t>
             </a:r>
-            <a:endParaRPr lang="en-US" sz="1050" dirty="0"/>
+            <a:endParaRPr lang="en-US" sz="750" dirty="0"/>
           </a:p>
         </p:txBody>
       </p:sp>
@@ -5476,8 +5476,8 @@
         </p:nvSpPr>
         <p:spPr>
           <a:xfrm>
-            <a:off x="4434840" y="2048256"/>
-            <a:ext cx="274320" cy="365760"/>
+            <a:off x="4474578" y="1481328"/>
+            <a:ext cx="194844" cy="259792"/>
           </a:xfrm>
           <a:prstGeom prst="rect">
             <a:avLst/>
@@ -5493,7 +5493,7 @@
               <a:buNone/>
             </a:pPr>
             <a:r>
-              <a:rPr lang="en-US" sz="1900" b="1" dirty="0">
+              <a:rPr lang="en-US" sz="1350" b="1" dirty="0">
                 <a:solidFill>
                   <a:srgbClr val="00A896"/>
                 </a:solidFill>
@@ -5503,7 +5503,7 @@
               </a:rPr>
               <a:t>→</a:t>
             </a:r>
-            <a:endParaRPr lang="en-US" sz="1900" dirty="0"/>
+            <a:endParaRPr lang="en-US" sz="1350" dirty="0"/>
           </a:p>
         </p:txBody>
       </p:sp>
@@ -5515,8 +5515,8 @@
         </p:nvSpPr>
         <p:spPr>
           <a:xfrm>
-            <a:off x="4709160" y="1133856"/>
-            <a:ext cx="1828800" cy="2724912"/>
+            <a:off x="4669422" y="831848"/>
+            <a:ext cx="1298961" cy="1935452"/>
           </a:xfrm>
           <a:prstGeom prst="roundRect">
             <a:avLst>
@@ -5549,8 +5549,8 @@
         </p:nvSpPr>
         <p:spPr>
           <a:xfrm>
-            <a:off x="5385816" y="1316736"/>
-            <a:ext cx="475488" cy="475488"/>
+            <a:off x="5150038" y="961744"/>
+            <a:ext cx="337730" cy="337730"/>
           </a:xfrm>
           <a:prstGeom prst="ellipse">
             <a:avLst/>
@@ -5569,8 +5569,8 @@
         </p:nvSpPr>
         <p:spPr>
           <a:xfrm>
-            <a:off x="5385816" y="1417320"/>
-            <a:ext cx="475488" cy="274320"/>
+            <a:off x="5150038" y="1033187"/>
+            <a:ext cx="337730" cy="194844"/>
           </a:xfrm>
           <a:prstGeom prst="rect">
             <a:avLst/>
@@ -5586,7 +5586,7 @@
               <a:buNone/>
             </a:pPr>
             <a:r>
-              <a:rPr lang="en-US" sz="1500" b="1" dirty="0">
+              <a:rPr lang="en-US" sz="1070" b="1" dirty="0">
                 <a:solidFill>
                   <a:srgbClr val="FFFFFF"/>
                 </a:solidFill>
@@ -5596,7 +5596,7 @@
               </a:rPr>
               <a:t>3</a:t>
             </a:r>
-            <a:endParaRPr lang="en-US" sz="1500" dirty="0"/>
+            <a:endParaRPr lang="en-US" sz="1070" dirty="0"/>
           </a:p>
         </p:txBody>
       </p:sp>
@@ -5608,8 +5608,8 @@
         </p:nvSpPr>
         <p:spPr>
           <a:xfrm>
-            <a:off x="4837176" y="1883664"/>
-            <a:ext cx="1572768" cy="658368"/>
+            <a:off x="4760349" y="1364422"/>
+            <a:ext cx="1117106" cy="467626"/>
           </a:xfrm>
           <a:prstGeom prst="rect">
             <a:avLst/>
@@ -5628,7 +5628,7 @@
               <a:buNone/>
             </a:pPr>
             <a:r>
-              <a:rPr lang="en-US" sz="1400" b="1" dirty="0">
+              <a:rPr lang="en-US" sz="990" b="1" dirty="0">
                 <a:solidFill>
                   <a:srgbClr val="0B1F3A"/>
                 </a:solidFill>
@@ -5638,7 +5638,7 @@
               </a:rPr>
               <a:t>Chọn tình huống</a:t>
             </a:r>
-            <a:endParaRPr lang="en-US" sz="1400" dirty="0"/>
+            <a:endParaRPr lang="en-US" sz="990" dirty="0"/>
           </a:p>
           <a:p>
             <a:pPr algn="ctr" indent="0" marL="0">
@@ -5648,7 +5648,7 @@
               <a:buNone/>
             </a:pPr>
             <a:r>
-              <a:rPr lang="en-US" sz="1200" dirty="0">
+              <a:rPr lang="en-US" sz="850" dirty="0">
                 <a:solidFill>
                   <a:srgbClr val="007F72"/>
                 </a:solidFill>
@@ -5658,7 +5658,7 @@
               </a:rPr>
               <a:t>選情境</a:t>
             </a:r>
-            <a:endParaRPr lang="en-US" sz="1400" dirty="0"/>
+            <a:endParaRPr lang="en-US" sz="990" dirty="0"/>
           </a:p>
         </p:txBody>
       </p:sp>
@@ -5670,8 +5670,8 @@
         </p:nvSpPr>
         <p:spPr>
           <a:xfrm>
-            <a:off x="4837176" y="2578608"/>
-            <a:ext cx="1572768" cy="1170432"/>
+            <a:off x="4760349" y="1858027"/>
+            <a:ext cx="1117106" cy="831335"/>
           </a:xfrm>
           <a:prstGeom prst="rect">
             <a:avLst/>
@@ -5690,7 +5690,7 @@
               <a:buNone/>
             </a:pPr>
             <a:r>
-              <a:rPr lang="en-US" sz="1050" dirty="0">
+              <a:rPr lang="en-US" sz="750" dirty="0">
                 <a:solidFill>
                   <a:srgbClr val="5F7183"/>
                 </a:solidFill>
@@ -5700,7 +5700,7 @@
               </a:rPr>
               <a:t>Trường học · Hà Nội</a:t>
             </a:r>
-            <a:endParaRPr lang="en-US" sz="1050" dirty="0"/>
+            <a:endParaRPr lang="en-US" sz="750" dirty="0"/>
           </a:p>
           <a:p>
             <a:pPr algn="ctr" indent="0" marL="0">
@@ -5710,7 +5710,7 @@
               <a:buNone/>
             </a:pPr>
             <a:r>
-              <a:rPr lang="en-US" sz="1050" dirty="0">
+              <a:rPr lang="en-US" sz="750" dirty="0">
                 <a:solidFill>
                   <a:srgbClr val="5F7183"/>
                 </a:solidFill>
@@ -5720,7 +5720,7 @@
               </a:rPr>
               <a:t>Cao tốc</a:t>
             </a:r>
-            <a:endParaRPr lang="en-US" sz="1050" dirty="0"/>
+            <a:endParaRPr lang="en-US" sz="750" dirty="0"/>
           </a:p>
           <a:p>
             <a:pPr algn="ctr" indent="0" marL="0">
@@ -5730,7 +5730,7 @@
               <a:buNone/>
             </a:pPr>
             <a:r>
-              <a:rPr lang="en-US" sz="950" dirty="0">
+              <a:rPr lang="en-US" sz="670" dirty="0">
                 <a:solidFill>
                   <a:srgbClr val="5F7183"/>
                 </a:solidFill>
@@ -5740,7 +5740,7 @@
               </a:rPr>
               <a:t>校園・河內</a:t>
             </a:r>
-            <a:endParaRPr lang="en-US" sz="1050" dirty="0"/>
+            <a:endParaRPr lang="en-US" sz="750" dirty="0"/>
           </a:p>
           <a:p>
             <a:pPr algn="ctr" indent="0" marL="0">
@@ -5750,7 +5750,7 @@
               <a:buNone/>
             </a:pPr>
             <a:r>
-              <a:rPr lang="en-US" sz="950" dirty="0">
+              <a:rPr lang="en-US" sz="670" dirty="0">
                 <a:solidFill>
                   <a:srgbClr val="5F7183"/>
                 </a:solidFill>
@@ -5760,7 +5760,7 @@
               </a:rPr>
               <a:t>國道</a:t>
             </a:r>
-            <a:endParaRPr lang="en-US" sz="1050" dirty="0"/>
+            <a:endParaRPr lang="en-US" sz="750" dirty="0"/>
           </a:p>
         </p:txBody>
       </p:sp>
@@ -5772,8 +5772,8 @@
         </p:nvSpPr>
         <p:spPr>
           <a:xfrm>
-            <a:off x="6537960" y="2048256"/>
-            <a:ext cx="274320" cy="365760"/>
+            <a:off x="5968383" y="1481328"/>
+            <a:ext cx="194844" cy="259792"/>
           </a:xfrm>
           <a:prstGeom prst="rect">
             <a:avLst/>
@@ -5789,7 +5789,7 @@
               <a:buNone/>
             </a:pPr>
             <a:r>
-              <a:rPr lang="en-US" sz="1900" b="1" dirty="0">
+              <a:rPr lang="en-US" sz="1350" b="1" dirty="0">
                 <a:solidFill>
                   <a:srgbClr val="00A896"/>
                 </a:solidFill>
@@ -5799,7 +5799,7 @@
               </a:rPr>
               <a:t>→</a:t>
             </a:r>
-            <a:endParaRPr lang="en-US" sz="1900" dirty="0"/>
+            <a:endParaRPr lang="en-US" sz="1350" dirty="0"/>
           </a:p>
         </p:txBody>
       </p:sp>
@@ -5811,8 +5811,8 @@
         </p:nvSpPr>
         <p:spPr>
           <a:xfrm>
-            <a:off x="6812280" y="1133856"/>
-            <a:ext cx="1828800" cy="2724912"/>
+            <a:off x="6163227" y="831848"/>
+            <a:ext cx="1298961" cy="1935452"/>
           </a:xfrm>
           <a:prstGeom prst="roundRect">
             <a:avLst>
@@ -5845,8 +5845,8 @@
         </p:nvSpPr>
         <p:spPr>
           <a:xfrm>
-            <a:off x="7488936" y="1316736"/>
-            <a:ext cx="475488" cy="475488"/>
+            <a:off x="6643842" y="961744"/>
+            <a:ext cx="337730" cy="337730"/>
           </a:xfrm>
           <a:prstGeom prst="ellipse">
             <a:avLst/>
@@ -5865,8 +5865,8 @@
         </p:nvSpPr>
         <p:spPr>
           <a:xfrm>
-            <a:off x="7488936" y="1417320"/>
-            <a:ext cx="475488" cy="274320"/>
+            <a:off x="6643842" y="1033187"/>
+            <a:ext cx="337730" cy="194844"/>
           </a:xfrm>
           <a:prstGeom prst="rect">
             <a:avLst/>
@@ -5882,7 +5882,7 @@
               <a:buNone/>
             </a:pPr>
             <a:r>
-              <a:rPr lang="en-US" sz="1500" b="1" dirty="0">
+              <a:rPr lang="en-US" sz="1070" b="1" dirty="0">
                 <a:solidFill>
                   <a:srgbClr val="FFFFFF"/>
                 </a:solidFill>
@@ -5892,7 +5892,7 @@
               </a:rPr>
               <a:t>4</a:t>
             </a:r>
-            <a:endParaRPr lang="en-US" sz="1500" dirty="0"/>
+            <a:endParaRPr lang="en-US" sz="1070" dirty="0"/>
           </a:p>
         </p:txBody>
       </p:sp>
@@ -5904,8 +5904,8 @@
         </p:nvSpPr>
         <p:spPr>
           <a:xfrm>
-            <a:off x="6940296" y="1883664"/>
-            <a:ext cx="1572768" cy="658368"/>
+            <a:off x="6254154" y="1364422"/>
+            <a:ext cx="1117106" cy="467626"/>
           </a:xfrm>
           <a:prstGeom prst="rect">
             <a:avLst/>
@@ -5924,7 +5924,7 @@
               <a:buNone/>
             </a:pPr>
             <a:r>
-              <a:rPr lang="en-US" sz="1400" b="1" dirty="0">
+              <a:rPr lang="en-US" sz="990" b="1" dirty="0">
                 <a:solidFill>
                   <a:srgbClr val="0B1F3A"/>
                 </a:solidFill>
@@ -5934,7 +5934,7 @@
               </a:rPr>
               <a:t>Viết kết luận</a:t>
             </a:r>
-            <a:endParaRPr lang="en-US" sz="1400" dirty="0"/>
+            <a:endParaRPr lang="en-US" sz="990" dirty="0"/>
           </a:p>
           <a:p>
             <a:pPr algn="ctr" indent="0" marL="0">
@@ -5944,7 +5944,7 @@
               <a:buNone/>
             </a:pPr>
             <a:r>
-              <a:rPr lang="en-US" sz="1200" dirty="0">
+              <a:rPr lang="en-US" sz="850" dirty="0">
                 <a:solidFill>
                   <a:srgbClr val="007F72"/>
                 </a:solidFill>
@@ -5954,7 +5954,7 @@
               </a:rPr>
               <a:t>寫結論</a:t>
             </a:r>
-            <a:endParaRPr lang="en-US" sz="1400" dirty="0"/>
+            <a:endParaRPr lang="en-US" sz="990" dirty="0"/>
           </a:p>
         </p:txBody>
       </p:sp>
@@ -5966,8 +5966,8 @@
         </p:nvSpPr>
         <p:spPr>
           <a:xfrm>
-            <a:off x="6940296" y="2578608"/>
-            <a:ext cx="1572768" cy="1170432"/>
+            <a:off x="6254154" y="1858027"/>
+            <a:ext cx="1117106" cy="831335"/>
           </a:xfrm>
           <a:prstGeom prst="rect">
             <a:avLst/>
@@ -5986,7 +5986,7 @@
               <a:buNone/>
             </a:pPr>
             <a:r>
-              <a:rPr lang="en-US" sz="1050" dirty="0">
+              <a:rPr lang="en-US" sz="750" dirty="0">
                 <a:solidFill>
                   <a:srgbClr val="5F7183"/>
                 </a:solidFill>
@@ -5996,7 +5996,7 @@
               </a:rPr>
               <a:t>Đủ hay không</a:t>
             </a:r>
-            <a:endParaRPr lang="en-US" sz="1050" dirty="0"/>
+            <a:endParaRPr lang="en-US" sz="750" dirty="0"/>
           </a:p>
           <a:p>
             <a:pPr algn="ctr" indent="0" marL="0">
@@ -6006,7 +6006,7 @@
               <a:buNone/>
             </a:pPr>
             <a:r>
-              <a:rPr lang="en-US" sz="1050" dirty="0">
+              <a:rPr lang="en-US" sz="750" dirty="0">
                 <a:solidFill>
                   <a:srgbClr val="5F7183"/>
                 </a:solidFill>
@@ -6016,7 +6016,7 @@
               </a:rPr>
               <a:t>Tắc ở dòng nào</a:t>
             </a:r>
-            <a:endParaRPr lang="en-US" sz="1050" dirty="0"/>
+            <a:endParaRPr lang="en-US" sz="750" dirty="0"/>
           </a:p>
           <a:p>
             <a:pPr algn="ctr" indent="0" marL="0">
@@ -6026,7 +6026,7 @@
               <a:buNone/>
             </a:pPr>
             <a:r>
-              <a:rPr lang="en-US" sz="950" dirty="0">
+              <a:rPr lang="en-US" sz="670" dirty="0">
                 <a:solidFill>
                   <a:srgbClr val="5F7183"/>
                 </a:solidFill>
@@ -6036,7 +6036,7 @@
               </a:rPr>
               <a:t>夠或不夠</a:t>
             </a:r>
-            <a:endParaRPr lang="en-US" sz="1050" dirty="0"/>
+            <a:endParaRPr lang="en-US" sz="750" dirty="0"/>
           </a:p>
           <a:p>
             <a:pPr algn="ctr" indent="0" marL="0">
@@ -6046,7 +6046,7 @@
               <a:buNone/>
             </a:pPr>
             <a:r>
-              <a:rPr lang="en-US" sz="950" dirty="0">
+              <a:rPr lang="en-US" sz="670" dirty="0">
                 <a:solidFill>
                   <a:srgbClr val="5F7183"/>
                 </a:solidFill>
@@ -6056,7 +6056,7 @@
               </a:rPr>
               <a:t>卡在哪一行</a:t>
             </a:r>
-            <a:endParaRPr lang="en-US" sz="1050" dirty="0"/>
+            <a:endParaRPr lang="en-US" sz="750" dirty="0"/>
           </a:p>
         </p:txBody>
       </p:sp>
@@ -6068,8 +6068,8 @@
         </p:nvSpPr>
         <p:spPr>
           <a:xfrm>
-            <a:off x="502920" y="4005072"/>
-            <a:ext cx="8138160" cy="566928"/>
+            <a:off x="1681812" y="2871216"/>
+            <a:ext cx="5780375" cy="402678"/>
           </a:xfrm>
           <a:prstGeom prst="rect">
             <a:avLst/>
@@ -6088,7 +6088,7 @@
               <a:buNone/>
             </a:pPr>
             <a:r>
-              <a:rPr lang="en-US" sz="1250" b="1" dirty="0">
+              <a:rPr lang="en-US" sz="890" b="1" dirty="0">
                 <a:solidFill>
                   <a:srgbClr val="0B1F3A"/>
                 </a:solidFill>
@@ -6098,7 +6098,7 @@
               </a:rPr>
               <a:t>Bước 4 mới là phần chấm điểm: «không đủ» mà không nói được tắc ở đâu thì không tính.</a:t>
             </a:r>
-            <a:endParaRPr lang="en-US" sz="1250" dirty="0"/>
+            <a:endParaRPr lang="en-US" sz="890" dirty="0"/>
           </a:p>
           <a:p>
             <a:pPr indent="0" marL="0">
@@ -6108,7 +6108,7 @@
               <a:buNone/>
             </a:pPr>
             <a:r>
-              <a:rPr lang="en-US" sz="1150" dirty="0">
+              <a:rPr lang="en-US" sz="820" dirty="0">
                 <a:solidFill>
                   <a:srgbClr val="007F72"/>
                 </a:solidFill>
@@ -6118,7 +6118,7 @@
               </a:rPr>
               <a:t>第 4 步才是計分的地方：只寫「不夠」卻說不出卡在哪，不算。</a:t>
             </a:r>
-            <a:endParaRPr lang="en-US" sz="1250" dirty="0"/>
+            <a:endParaRPr lang="en-US" sz="890" dirty="0"/>
           </a:p>
         </p:txBody>
       </p:sp>
@@ -6138,8 +6138,8 @@
         </p:blipFill>
         <p:spPr>
           <a:xfrm>
-            <a:off x="7516368" y="4718304"/>
-            <a:ext cx="1097280" cy="242439"/>
+            <a:off x="6663327" y="3338842"/>
+            <a:ext cx="779376" cy="172200"/>
           </a:xfrm>
           <a:prstGeom prst="rect">
             <a:avLst/>
@@ -6154,8 +6154,8 @@
         </p:nvSpPr>
         <p:spPr>
           <a:xfrm>
-            <a:off x="109728" y="4791456"/>
-            <a:ext cx="822960" cy="256032"/>
+            <a:off x="1402536" y="3390800"/>
+            <a:ext cx="584532" cy="181855"/>
           </a:xfrm>
           <a:prstGeom prst="rect">
             <a:avLst/>
@@ -6171,7 +6171,7 @@
               <a:buNone/>
             </a:pPr>
             <a:r>
-              <a:rPr lang="en-US" sz="900" dirty="0">
+              <a:rPr lang="en-US" sz="640" dirty="0">
                 <a:solidFill>
                   <a:srgbClr val="5F7183"/>
                 </a:solidFill>
@@ -6181,7 +6181,7 @@
               </a:rPr>
               <a:t>2 / 9</a:t>
             </a:r>
-            <a:endParaRPr lang="en-US" sz="900" dirty="0"/>
+            <a:endParaRPr lang="en-US" sz="640" dirty="0"/>
           </a:p>
         </p:txBody>
       </p:sp>
@@ -6193,8 +6193,8 @@
         </p:nvSpPr>
         <p:spPr>
           <a:xfrm>
-            <a:off x="960120" y="4791456"/>
-            <a:ext cx="2011680" cy="256032"/>
+            <a:off x="2006553" y="3390800"/>
+            <a:ext cx="1428857" cy="181855"/>
           </a:xfrm>
           <a:prstGeom prst="rect">
             <a:avLst/>
@@ -6210,7 +6210,7 @@
               <a:buNone/>
             </a:pPr>
             <a:r>
-              <a:rPr lang="en-US" sz="900" dirty="0">
+              <a:rPr lang="en-US" sz="640" dirty="0">
                 <a:solidFill>
                   <a:srgbClr val="5F7183"/>
                 </a:solidFill>
@@ -6220,7 +6220,7 @@
               </a:rPr>
               <a:t>Tiết 3 · 第 3 節</a:t>
             </a:r>
-            <a:endParaRPr lang="en-US" sz="900" dirty="0"/>
+            <a:endParaRPr lang="en-US" sz="640" dirty="0"/>
           </a:p>
         </p:txBody>
       </p:sp>
@@ -6264,8 +6264,8 @@
         </p:nvSpPr>
         <p:spPr>
           <a:xfrm>
-            <a:off x="6766560" y="-1371600"/>
-            <a:ext cx="4206240" cy="4206240"/>
+            <a:off x="6130753" y="-947729"/>
+            <a:ext cx="2987610" cy="2987610"/>
           </a:xfrm>
           <a:prstGeom prst="ellipse">
             <a:avLst/>
@@ -6289,8 +6289,8 @@
         </p:nvSpPr>
         <p:spPr>
           <a:xfrm>
-            <a:off x="7863840" y="3108960"/>
-            <a:ext cx="2560320" cy="2560320"/>
+            <a:off x="7104973" y="1520297"/>
+            <a:ext cx="1688649" cy="1688649"/>
           </a:xfrm>
           <a:prstGeom prst="ellipse">
             <a:avLst/>
@@ -6311,8 +6311,8 @@
         </p:nvSpPr>
         <p:spPr>
           <a:xfrm>
-            <a:off x="502920" y="475488"/>
-            <a:ext cx="6766560" cy="274320"/>
+            <a:off x="1681812" y="364222"/>
+            <a:ext cx="4806155" cy="194844"/>
           </a:xfrm>
           <a:prstGeom prst="rect">
             <a:avLst/>
@@ -6328,7 +6328,7 @@
               <a:buNone/>
             </a:pPr>
             <a:r>
-              <a:rPr lang="en-US" sz="1250" b="1" dirty="0">
+              <a:rPr lang="en-US" sz="890" b="1" dirty="0">
                 <a:solidFill>
                   <a:srgbClr val="FFB020"/>
                 </a:solidFill>
@@ -6338,7 +6338,7 @@
               </a:rPr>
               <a:t>Nhiệm vụ 1 · 第一題（10 分鐘）</a:t>
             </a:r>
-            <a:endParaRPr lang="en-US" sz="1250" dirty="0"/>
+            <a:endParaRPr lang="en-US" sz="890" dirty="0"/>
           </a:p>
         </p:txBody>
       </p:sp>
@@ -6350,8 +6350,8 @@
         </p:nvSpPr>
         <p:spPr>
           <a:xfrm>
-            <a:off x="502920" y="786384"/>
-            <a:ext cx="8046720" cy="1225296"/>
+            <a:off x="1681812" y="585045"/>
+            <a:ext cx="5715427" cy="870304"/>
           </a:xfrm>
           <a:prstGeom prst="rect">
             <a:avLst/>
@@ -6370,7 +6370,7 @@
               <a:buNone/>
             </a:pPr>
             <a:r>
-              <a:rPr lang="en-US" sz="2300" b="1" dirty="0">
+              <a:rPr lang="en-US" sz="1630" b="1" dirty="0">
                 <a:solidFill>
                   <a:srgbClr val="FFFFFF"/>
                 </a:solidFill>
@@ -6380,7 +6380,7 @@
               </a:rPr>
               <a:t>Xe buýt nhỏ trong trường, 20 km/h. Thử cả bốn model.</a:t>
             </a:r>
-            <a:endParaRPr lang="en-US" sz="2300" dirty="0"/>
+            <a:endParaRPr lang="en-US" sz="1630" dirty="0"/>
           </a:p>
           <a:p>
             <a:pPr indent="0" marL="0">
@@ -6390,7 +6390,7 @@
               <a:buNone/>
             </a:pPr>
             <a:r>
-              <a:rPr lang="en-US" sz="1500" dirty="0">
+              <a:rPr lang="en-US" sz="1070" dirty="0">
                 <a:solidFill>
                   <a:srgbClr val="AFC3D4"/>
                 </a:solidFill>
@@ -6400,7 +6400,7 @@
               </a:rPr>
               <a:t>校園接駁小巴，時速 20。四個型號都試一次。</a:t>
             </a:r>
-            <a:endParaRPr lang="en-US" sz="2300" dirty="0"/>
+            <a:endParaRPr lang="en-US" sz="1630" dirty="0"/>
           </a:p>
         </p:txBody>
       </p:sp>
@@ -6412,8 +6412,8 @@
         </p:nvSpPr>
         <p:spPr>
           <a:xfrm>
-            <a:off x="502920" y="1737360"/>
-            <a:ext cx="8138160" cy="621792"/>
+            <a:off x="1681812" y="1260505"/>
+            <a:ext cx="5780375" cy="441647"/>
           </a:xfrm>
           <a:prstGeom prst="roundRect">
             <a:avLst>
@@ -6434,8 +6434,8 @@
         </p:nvSpPr>
         <p:spPr>
           <a:xfrm>
-            <a:off x="667512" y="1883664"/>
-            <a:ext cx="329184" cy="329184"/>
+            <a:off x="1798719" y="1364422"/>
+            <a:ext cx="233813" cy="233813"/>
           </a:xfrm>
           <a:prstGeom prst="ellipse">
             <a:avLst/>
@@ -6454,8 +6454,8 @@
         </p:nvSpPr>
         <p:spPr>
           <a:xfrm>
-            <a:off x="667512" y="1911096"/>
-            <a:ext cx="329184" cy="274320"/>
+            <a:off x="1798719" y="1383906"/>
+            <a:ext cx="233813" cy="194844"/>
           </a:xfrm>
           <a:prstGeom prst="rect">
             <a:avLst/>
@@ -6471,7 +6471,7 @@
               <a:buNone/>
             </a:pPr>
             <a:r>
-              <a:rPr lang="en-US" sz="1200" b="1" dirty="0">
+              <a:rPr lang="en-US" sz="850" b="1" dirty="0">
                 <a:solidFill>
                   <a:srgbClr val="FFFFFF"/>
                 </a:solidFill>
@@ -6481,7 +6481,7 @@
               </a:rPr>
               <a:t>1</a:t>
             </a:r>
-            <a:endParaRPr lang="en-US" sz="1200" dirty="0"/>
+            <a:endParaRPr lang="en-US" sz="850" dirty="0"/>
           </a:p>
         </p:txBody>
       </p:sp>
@@ -6493,8 +6493,8 @@
         </p:nvSpPr>
         <p:spPr>
           <a:xfrm>
-            <a:off x="1161288" y="1783080"/>
-            <a:ext cx="7296912" cy="548640"/>
+            <a:off x="2149438" y="1292979"/>
+            <a:ext cx="5182853" cy="389688"/>
           </a:xfrm>
           <a:prstGeom prst="rect">
             <a:avLst/>
@@ -6513,7 +6513,7 @@
               <a:buNone/>
             </a:pPr>
             <a:r>
-              <a:rPr lang="en-US" sz="1250" b="1" dirty="0">
+              <a:rPr lang="en-US" sz="890" b="1" dirty="0">
                 <a:solidFill>
                   <a:srgbClr val="FFFFFF"/>
                 </a:solidFill>
@@ -6523,7 +6523,7 @@
               </a:rPr>
               <a:t>Chép lại: model nào «đủ», model nào «không đủ»</a:t>
             </a:r>
-            <a:endParaRPr lang="en-US" sz="1250" dirty="0"/>
+            <a:endParaRPr lang="en-US" sz="890" dirty="0"/>
           </a:p>
           <a:p>
             <a:pPr indent="0" marL="0">
@@ -6533,7 +6533,7 @@
               <a:buNone/>
             </a:pPr>
             <a:r>
-              <a:rPr lang="en-US" sz="1150" dirty="0">
+              <a:rPr lang="en-US" sz="820" dirty="0">
                 <a:solidFill>
                   <a:srgbClr val="AFC3D4"/>
                 </a:solidFill>
@@ -6543,7 +6543,7 @@
               </a:rPr>
               <a:t>抄下來：哪幾顆判定「夠」，哪幾顆「不夠」</a:t>
             </a:r>
-            <a:endParaRPr lang="en-US" sz="1250" dirty="0"/>
+            <a:endParaRPr lang="en-US" sz="890" dirty="0"/>
           </a:p>
         </p:txBody>
       </p:sp>
@@ -6555,8 +6555,8 @@
         </p:nvSpPr>
         <p:spPr>
           <a:xfrm>
-            <a:off x="502920" y="2450592"/>
-            <a:ext cx="8138160" cy="621792"/>
+            <a:off x="1681812" y="1767099"/>
+            <a:ext cx="5780375" cy="441647"/>
           </a:xfrm>
           <a:prstGeom prst="roundRect">
             <a:avLst>
@@ -6577,8 +6577,8 @@
         </p:nvSpPr>
         <p:spPr>
           <a:xfrm>
-            <a:off x="667512" y="2596896"/>
-            <a:ext cx="329184" cy="329184"/>
+            <a:off x="1798719" y="1871016"/>
+            <a:ext cx="233813" cy="233813"/>
           </a:xfrm>
           <a:prstGeom prst="ellipse">
             <a:avLst/>
@@ -6597,8 +6597,8 @@
         </p:nvSpPr>
         <p:spPr>
           <a:xfrm>
-            <a:off x="667512" y="2624328"/>
-            <a:ext cx="329184" cy="274320"/>
+            <a:off x="1798719" y="1890501"/>
+            <a:ext cx="233813" cy="194844"/>
           </a:xfrm>
           <a:prstGeom prst="rect">
             <a:avLst/>
@@ -6614,7 +6614,7 @@
               <a:buNone/>
             </a:pPr>
             <a:r>
-              <a:rPr lang="en-US" sz="1200" b="1" dirty="0">
+              <a:rPr lang="en-US" sz="850" b="1" dirty="0">
                 <a:solidFill>
                   <a:srgbClr val="FFFFFF"/>
                 </a:solidFill>
@@ -6624,7 +6624,7 @@
               </a:rPr>
               <a:t>2</a:t>
             </a:r>
-            <a:endParaRPr lang="en-US" sz="1200" dirty="0"/>
+            <a:endParaRPr lang="en-US" sz="850" dirty="0"/>
           </a:p>
         </p:txBody>
       </p:sp>
@@ -6636,8 +6636,8 @@
         </p:nvSpPr>
         <p:spPr>
           <a:xfrm>
-            <a:off x="1161288" y="2496312"/>
-            <a:ext cx="7296912" cy="548640"/>
+            <a:off x="2149438" y="1799573"/>
+            <a:ext cx="5182853" cy="389688"/>
           </a:xfrm>
           <a:prstGeom prst="rect">
             <a:avLst/>
@@ -6656,7 +6656,7 @@
               <a:buNone/>
             </a:pPr>
             <a:r>
-              <a:rPr lang="en-US" sz="1250" b="1" dirty="0">
+              <a:rPr lang="en-US" sz="890" b="1" dirty="0">
                 <a:solidFill>
                   <a:srgbClr val="FFFFFF"/>
                 </a:solidFill>
@@ -6666,7 +6666,7 @@
               </a:rPr>
               <a:t>Với model không đủ, chép nguyên dòng màu đỏ</a:t>
             </a:r>
-            <a:endParaRPr lang="en-US" sz="1250" dirty="0"/>
+            <a:endParaRPr lang="en-US" sz="890" dirty="0"/>
           </a:p>
           <a:p>
             <a:pPr indent="0" marL="0">
@@ -6676,7 +6676,7 @@
               <a:buNone/>
             </a:pPr>
             <a:r>
-              <a:rPr lang="en-US" sz="1150" dirty="0">
+              <a:rPr lang="en-US" sz="820" dirty="0">
                 <a:solidFill>
                   <a:srgbClr val="AFC3D4"/>
                 </a:solidFill>
@@ -6686,7 +6686,7 @@
               </a:rPr>
               <a:t>不夠的那幾顆，把紅色那一行整句抄下來</a:t>
             </a:r>
-            <a:endParaRPr lang="en-US" sz="1250" dirty="0"/>
+            <a:endParaRPr lang="en-US" sz="890" dirty="0"/>
           </a:p>
         </p:txBody>
       </p:sp>
@@ -6698,8 +6698,8 @@
         </p:nvSpPr>
         <p:spPr>
           <a:xfrm>
-            <a:off x="502920" y="3163824"/>
-            <a:ext cx="8138160" cy="621792"/>
+            <a:off x="1681812" y="2273694"/>
+            <a:ext cx="5780375" cy="441647"/>
           </a:xfrm>
           <a:prstGeom prst="roundRect">
             <a:avLst>
@@ -6720,8 +6720,8 @@
         </p:nvSpPr>
         <p:spPr>
           <a:xfrm>
-            <a:off x="667512" y="3310128"/>
-            <a:ext cx="329184" cy="329184"/>
+            <a:off x="1798719" y="2377611"/>
+            <a:ext cx="233813" cy="233813"/>
           </a:xfrm>
           <a:prstGeom prst="ellipse">
             <a:avLst/>
@@ -6740,8 +6740,8 @@
         </p:nvSpPr>
         <p:spPr>
           <a:xfrm>
-            <a:off x="667512" y="3337560"/>
-            <a:ext cx="329184" cy="274320"/>
+            <a:off x="1798719" y="2397095"/>
+            <a:ext cx="233813" cy="194844"/>
           </a:xfrm>
           <a:prstGeom prst="rect">
             <a:avLst/>
@@ -6757,7 +6757,7 @@
               <a:buNone/>
             </a:pPr>
             <a:r>
-              <a:rPr lang="en-US" sz="1200" b="1" dirty="0">
+              <a:rPr lang="en-US" sz="850" b="1" dirty="0">
                 <a:solidFill>
                   <a:srgbClr val="FFFFFF"/>
                 </a:solidFill>
@@ -6767,7 +6767,7 @@
               </a:rPr>
               <a:t>3</a:t>
             </a:r>
-            <a:endParaRPr lang="en-US" sz="1200" dirty="0"/>
+            <a:endParaRPr lang="en-US" sz="850" dirty="0"/>
           </a:p>
         </p:txBody>
       </p:sp>
@@ -6779,8 +6779,8 @@
         </p:nvSpPr>
         <p:spPr>
           <a:xfrm>
-            <a:off x="1161288" y="3209544"/>
-            <a:ext cx="7296912" cy="548640"/>
+            <a:off x="2149438" y="2306168"/>
+            <a:ext cx="5182853" cy="389688"/>
           </a:xfrm>
           <a:prstGeom prst="rect">
             <a:avLst/>
@@ -6799,7 +6799,7 @@
               <a:buNone/>
             </a:pPr>
             <a:r>
-              <a:rPr lang="en-US" sz="1250" b="1" dirty="0">
+              <a:rPr lang="en-US" sz="890" b="1" dirty="0">
                 <a:solidFill>
                   <a:srgbClr val="FFFFFF"/>
                 </a:solidFill>
@@ -6809,7 +6809,7 @@
               </a:rPr>
               <a:t>Câu hỏi: tại sao camera lại đủ ở tình huống này?</a:t>
             </a:r>
-            <a:endParaRPr lang="en-US" sz="1250" dirty="0"/>
+            <a:endParaRPr lang="en-US" sz="890" dirty="0"/>
           </a:p>
           <a:p>
             <a:pPr indent="0" marL="0">
@@ -6819,7 +6819,7 @@
               <a:buNone/>
             </a:pPr>
             <a:r>
-              <a:rPr lang="en-US" sz="1150" dirty="0">
+              <a:rPr lang="en-US" sz="820" dirty="0">
                 <a:solidFill>
                   <a:srgbClr val="AFC3D4"/>
                 </a:solidFill>
@@ -6829,7 +6829,7 @@
               </a:rPr>
               <a:t>想一題：為什麼相機在這個情境反而夠用？</a:t>
             </a:r>
-            <a:endParaRPr lang="en-US" sz="1250" dirty="0"/>
+            <a:endParaRPr lang="en-US" sz="890" dirty="0"/>
           </a:p>
         </p:txBody>
       </p:sp>
@@ -6841,8 +6841,8 @@
         </p:nvSpPr>
         <p:spPr>
           <a:xfrm>
-            <a:off x="502920" y="3913632"/>
-            <a:ext cx="8046720" cy="457200"/>
+            <a:off x="1681812" y="2806268"/>
+            <a:ext cx="5715427" cy="324740"/>
           </a:xfrm>
           <a:prstGeom prst="rect">
             <a:avLst/>
@@ -6861,7 +6861,7 @@
               <a:buNone/>
             </a:pPr>
             <a:r>
-              <a:rPr lang="en-US" sz="1250" b="1" dirty="0">
+              <a:rPr lang="en-US" sz="890" b="1" dirty="0">
                 <a:solidFill>
                   <a:srgbClr val="FFB020"/>
                 </a:solidFill>
@@ -6871,7 +6871,7 @@
               </a:rPr>
               <a:t>Trong trường chạy chậm, nhìn gần — bài toán dễ nhất trong ba tình huống.</a:t>
             </a:r>
-            <a:endParaRPr lang="en-US" sz="1250" dirty="0"/>
+            <a:endParaRPr lang="en-US" sz="890" dirty="0"/>
           </a:p>
           <a:p>
             <a:pPr indent="0" marL="0">
@@ -6881,7 +6881,7 @@
               <a:buNone/>
             </a:pPr>
             <a:r>
-              <a:rPr lang="en-US" sz="1150" dirty="0">
+              <a:rPr lang="en-US" sz="820" dirty="0">
                 <a:solidFill>
                   <a:srgbClr val="FFB020"/>
                 </a:solidFill>
@@ -6891,7 +6891,7 @@
               </a:rPr>
               <a:t>校園裡車速慢、看得近——三個情境裡最好過的一個。</a:t>
             </a:r>
-            <a:endParaRPr lang="en-US" sz="1250" dirty="0"/>
+            <a:endParaRPr lang="en-US" sz="890" dirty="0"/>
           </a:p>
         </p:txBody>
       </p:sp>
@@ -6903,8 +6903,8 @@
         </p:nvSpPr>
         <p:spPr>
           <a:xfrm>
-            <a:off x="109728" y="4791456"/>
-            <a:ext cx="822960" cy="256032"/>
+            <a:off x="1402536" y="3390800"/>
+            <a:ext cx="584532" cy="181855"/>
           </a:xfrm>
           <a:prstGeom prst="rect">
             <a:avLst/>
@@ -6920,7 +6920,7 @@
               <a:buNone/>
             </a:pPr>
             <a:r>
-              <a:rPr lang="en-US" sz="900" dirty="0">
+              <a:rPr lang="en-US" sz="640" dirty="0">
                 <a:solidFill>
                   <a:srgbClr val="9FB3C8"/>
                 </a:solidFill>
@@ -6930,7 +6930,7 @@
               </a:rPr>
               <a:t>3 / 9</a:t>
             </a:r>
-            <a:endParaRPr lang="en-US" sz="900" dirty="0"/>
+            <a:endParaRPr lang="en-US" sz="640" dirty="0"/>
           </a:p>
         </p:txBody>
       </p:sp>
@@ -6942,8 +6942,8 @@
         </p:nvSpPr>
         <p:spPr>
           <a:xfrm>
-            <a:off x="960120" y="4791456"/>
-            <a:ext cx="2011680" cy="256032"/>
+            <a:off x="2006553" y="3390800"/>
+            <a:ext cx="1428857" cy="181855"/>
           </a:xfrm>
           <a:prstGeom prst="rect">
             <a:avLst/>
@@ -6959,7 +6959,7 @@
               <a:buNone/>
             </a:pPr>
             <a:r>
-              <a:rPr lang="en-US" sz="900" dirty="0">
+              <a:rPr lang="en-US" sz="640" dirty="0">
                 <a:solidFill>
                   <a:srgbClr val="9FB3C8"/>
                 </a:solidFill>
@@ -6969,7 +6969,7 @@
               </a:rPr>
               <a:t>Tiết 3 · 第 3 節</a:t>
             </a:r>
-            <a:endParaRPr lang="en-US" sz="900" dirty="0"/>
+            <a:endParaRPr lang="en-US" sz="640" dirty="0"/>
           </a:p>
         </p:txBody>
       </p:sp>
@@ -7013,8 +7013,8 @@
         </p:nvSpPr>
         <p:spPr>
           <a:xfrm>
-            <a:off x="6766560" y="-1371600"/>
-            <a:ext cx="4206240" cy="4206240"/>
+            <a:off x="6130753" y="-947729"/>
+            <a:ext cx="2987610" cy="2987610"/>
           </a:xfrm>
           <a:prstGeom prst="ellipse">
             <a:avLst/>
@@ -7038,8 +7038,8 @@
         </p:nvSpPr>
         <p:spPr>
           <a:xfrm>
-            <a:off x="7863840" y="3108960"/>
-            <a:ext cx="2560320" cy="2560320"/>
+            <a:off x="7104973" y="1520297"/>
+            <a:ext cx="1688649" cy="1688649"/>
           </a:xfrm>
           <a:prstGeom prst="ellipse">
             <a:avLst/>
@@ -7060,8 +7060,8 @@
         </p:nvSpPr>
         <p:spPr>
           <a:xfrm>
-            <a:off x="502920" y="475488"/>
-            <a:ext cx="6766560" cy="274320"/>
+            <a:off x="1681812" y="364222"/>
+            <a:ext cx="4806155" cy="194844"/>
           </a:xfrm>
           <a:prstGeom prst="rect">
             <a:avLst/>
@@ -7077,7 +7077,7 @@
               <a:buNone/>
             </a:pPr>
             <a:r>
-              <a:rPr lang="en-US" sz="1250" b="1" dirty="0">
+              <a:rPr lang="en-US" sz="890" b="1" dirty="0">
                 <a:solidFill>
                   <a:srgbClr val="FFB020"/>
                 </a:solidFill>
@@ -7087,7 +7087,7 @@
               </a:rPr>
               <a:t>Nhiệm vụ 2 · 第二題（10 分鐘）</a:t>
             </a:r>
-            <a:endParaRPr lang="en-US" sz="1250" dirty="0"/>
+            <a:endParaRPr lang="en-US" sz="890" dirty="0"/>
           </a:p>
         </p:txBody>
       </p:sp>
@@ -7099,8 +7099,8 @@
         </p:nvSpPr>
         <p:spPr>
           <a:xfrm>
-            <a:off x="502920" y="786384"/>
-            <a:ext cx="8046720" cy="1225296"/>
+            <a:off x="1681812" y="585045"/>
+            <a:ext cx="5715427" cy="870304"/>
           </a:xfrm>
           <a:prstGeom prst="rect">
             <a:avLst/>
@@ -7119,7 +7119,7 @@
               <a:buNone/>
             </a:pPr>
             <a:r>
-              <a:rPr lang="en-US" sz="2300" b="1" dirty="0">
+              <a:rPr lang="en-US" sz="1630" b="1" dirty="0">
                 <a:solidFill>
                   <a:srgbClr val="FFFFFF"/>
                 </a:solidFill>
@@ -7129,7 +7129,7 @@
               </a:rPr>
               <a:t>Đổi sang giờ cao điểm Hà Nội, 40 km/h. Bốn model lại làm một lượt.</a:t>
             </a:r>
-            <a:endParaRPr lang="en-US" sz="2300" dirty="0"/>
+            <a:endParaRPr lang="en-US" sz="1630" dirty="0"/>
           </a:p>
           <a:p>
             <a:pPr indent="0" marL="0">
@@ -7139,7 +7139,7 @@
               <a:buNone/>
             </a:pPr>
             <a:r>
-              <a:rPr lang="en-US" sz="1500" dirty="0">
+              <a:rPr lang="en-US" sz="1070" dirty="0">
                 <a:solidFill>
                   <a:srgbClr val="AFC3D4"/>
                 </a:solidFill>
@@ -7149,7 +7149,7 @@
               </a:rPr>
               <a:t>換成河內尖峰，時速 40。四個型號再做一次。</a:t>
             </a:r>
-            <a:endParaRPr lang="en-US" sz="2300" dirty="0"/>
+            <a:endParaRPr lang="en-US" sz="1630" dirty="0"/>
           </a:p>
         </p:txBody>
       </p:sp>
@@ -7161,8 +7161,8 @@
         </p:nvSpPr>
         <p:spPr>
           <a:xfrm>
-            <a:off x="502920" y="1880384"/>
-            <a:ext cx="8138160" cy="621792"/>
+            <a:off x="1681812" y="1362092"/>
+            <a:ext cx="5780375" cy="441647"/>
           </a:xfrm>
           <a:prstGeom prst="roundRect">
             <a:avLst>
@@ -7183,8 +7183,8 @@
         </p:nvSpPr>
         <p:spPr>
           <a:xfrm>
-            <a:off x="667512" y="2026688"/>
-            <a:ext cx="329184" cy="329184"/>
+            <a:off x="1798719" y="1466008"/>
+            <a:ext cx="233813" cy="233813"/>
           </a:xfrm>
           <a:prstGeom prst="ellipse">
             <a:avLst/>
@@ -7203,8 +7203,8 @@
         </p:nvSpPr>
         <p:spPr>
           <a:xfrm>
-            <a:off x="667512" y="2054120"/>
-            <a:ext cx="329184" cy="274320"/>
+            <a:off x="1798719" y="1485493"/>
+            <a:ext cx="233813" cy="194844"/>
           </a:xfrm>
           <a:prstGeom prst="rect">
             <a:avLst/>
@@ -7220,7 +7220,7 @@
               <a:buNone/>
             </a:pPr>
             <a:r>
-              <a:rPr lang="en-US" sz="1200" b="1" dirty="0">
+              <a:rPr lang="en-US" sz="850" b="1" dirty="0">
                 <a:solidFill>
                   <a:srgbClr val="FFFFFF"/>
                 </a:solidFill>
@@ -7230,7 +7230,7 @@
               </a:rPr>
               <a:t>1</a:t>
             </a:r>
-            <a:endParaRPr lang="en-US" sz="1200" dirty="0"/>
+            <a:endParaRPr lang="en-US" sz="850" dirty="0"/>
           </a:p>
         </p:txBody>
       </p:sp>
@@ -7242,8 +7242,8 @@
         </p:nvSpPr>
         <p:spPr>
           <a:xfrm>
-            <a:off x="1161288" y="1926104"/>
-            <a:ext cx="7296912" cy="548640"/>
+            <a:off x="2149438" y="1394566"/>
+            <a:ext cx="5182853" cy="389688"/>
           </a:xfrm>
           <a:prstGeom prst="rect">
             <a:avLst/>
@@ -7262,7 +7262,7 @@
               <a:buNone/>
             </a:pPr>
             <a:r>
-              <a:rPr lang="en-US" sz="1250" b="1" dirty="0">
+              <a:rPr lang="en-US" sz="890" b="1" dirty="0">
                 <a:solidFill>
                   <a:srgbClr val="FFFFFF"/>
                 </a:solidFill>
@@ -7272,7 +7272,7 @@
               </a:rPr>
               <a:t>OS1 chỉ thiếu một chút. Mở dòng «configurable» ra xem</a:t>
             </a:r>
-            <a:endParaRPr lang="en-US" sz="1250" dirty="0"/>
+            <a:endParaRPr lang="en-US" sz="890" dirty="0"/>
           </a:p>
           <a:p>
             <a:pPr indent="0" marL="0">
@@ -7282,7 +7282,7 @@
               <a:buNone/>
             </a:pPr>
             <a:r>
-              <a:rPr lang="en-US" sz="1150" dirty="0">
+              <a:rPr lang="en-US" sz="820" dirty="0">
                 <a:solidFill>
                   <a:srgbClr val="AFC3D4"/>
                 </a:solidFill>
@@ -7292,7 +7292,7 @@
               </a:rPr>
               <a:t>OS1 只差一點點。把那一行寫著「可設定」的打開看看</a:t>
             </a:r>
-            <a:endParaRPr lang="en-US" sz="1250" dirty="0"/>
+            <a:endParaRPr lang="en-US" sz="890" dirty="0"/>
           </a:p>
         </p:txBody>
       </p:sp>
@@ -7304,8 +7304,8 @@
         </p:nvSpPr>
         <p:spPr>
           <a:xfrm>
-            <a:off x="502920" y="2593616"/>
-            <a:ext cx="8138160" cy="621792"/>
+            <a:off x="1681812" y="1868686"/>
+            <a:ext cx="5780375" cy="441647"/>
           </a:xfrm>
           <a:prstGeom prst="roundRect">
             <a:avLst>
@@ -7326,8 +7326,8 @@
         </p:nvSpPr>
         <p:spPr>
           <a:xfrm>
-            <a:off x="667512" y="2739920"/>
-            <a:ext cx="329184" cy="329184"/>
+            <a:off x="1798719" y="1972603"/>
+            <a:ext cx="233813" cy="233813"/>
           </a:xfrm>
           <a:prstGeom prst="ellipse">
             <a:avLst/>
@@ -7346,8 +7346,8 @@
         </p:nvSpPr>
         <p:spPr>
           <a:xfrm>
-            <a:off x="667512" y="2767352"/>
-            <a:ext cx="329184" cy="274320"/>
+            <a:off x="1798719" y="1992087"/>
+            <a:ext cx="233813" cy="194844"/>
           </a:xfrm>
           <a:prstGeom prst="rect">
             <a:avLst/>
@@ -7363,7 +7363,7 @@
               <a:buNone/>
             </a:pPr>
             <a:r>
-              <a:rPr lang="en-US" sz="1200" b="1" dirty="0">
+              <a:rPr lang="en-US" sz="850" b="1" dirty="0">
                 <a:solidFill>
                   <a:srgbClr val="FFFFFF"/>
                 </a:solidFill>
@@ -7373,7 +7373,7 @@
               </a:rPr>
               <a:t>2</a:t>
             </a:r>
-            <a:endParaRPr lang="en-US" sz="1200" dirty="0"/>
+            <a:endParaRPr lang="en-US" sz="850" dirty="0"/>
           </a:p>
         </p:txBody>
       </p:sp>
@@ -7385,8 +7385,8 @@
         </p:nvSpPr>
         <p:spPr>
           <a:xfrm>
-            <a:off x="1161288" y="2639336"/>
-            <a:ext cx="7296912" cy="548640"/>
+            <a:off x="2149438" y="1901160"/>
+            <a:ext cx="5182853" cy="389688"/>
           </a:xfrm>
           <a:prstGeom prst="rect">
             <a:avLst/>
@@ -7405,7 +7405,7 @@
               <a:buNone/>
             </a:pPr>
             <a:r>
-              <a:rPr lang="en-US" sz="1250" b="1" dirty="0">
+              <a:rPr lang="en-US" sz="890" b="1" dirty="0">
                 <a:solidFill>
                   <a:srgbClr val="FFFFFF"/>
                 </a:solidFill>
@@ -7415,7 +7415,7 @@
               </a:rPr>
               <a:t>Đổi 1024 → 2048 điểm mỗi vòng, chép lại số điểm mới</a:t>
             </a:r>
-            <a:endParaRPr lang="en-US" sz="1250" dirty="0"/>
+            <a:endParaRPr lang="en-US" sz="890" dirty="0"/>
           </a:p>
           <a:p>
             <a:pPr indent="0" marL="0">
@@ -7425,7 +7425,7 @@
               <a:buNone/>
             </a:pPr>
             <a:r>
-              <a:rPr lang="en-US" sz="1150" dirty="0">
+              <a:rPr lang="en-US" sz="820" dirty="0">
                 <a:solidFill>
                   <a:srgbClr val="AFC3D4"/>
                 </a:solidFill>
@@ -7435,7 +7435,7 @@
               </a:rPr>
               <a:t>把每圈 1024 點改成 2048，抄下新的點數</a:t>
             </a:r>
-            <a:endParaRPr lang="en-US" sz="1250" dirty="0"/>
+            <a:endParaRPr lang="en-US" sz="890" dirty="0"/>
           </a:p>
         </p:txBody>
       </p:sp>
@@ -7447,8 +7447,8 @@
         </p:nvSpPr>
         <p:spPr>
           <a:xfrm>
-            <a:off x="502920" y="3306848"/>
-            <a:ext cx="8138160" cy="621792"/>
+            <a:off x="1681812" y="2375281"/>
+            <a:ext cx="5780375" cy="441647"/>
           </a:xfrm>
           <a:prstGeom prst="roundRect">
             <a:avLst>
@@ -7469,8 +7469,8 @@
         </p:nvSpPr>
         <p:spPr>
           <a:xfrm>
-            <a:off x="667512" y="3453152"/>
-            <a:ext cx="329184" cy="329184"/>
+            <a:off x="1798719" y="2479198"/>
+            <a:ext cx="233813" cy="233813"/>
           </a:xfrm>
           <a:prstGeom prst="ellipse">
             <a:avLst/>
@@ -7489,8 +7489,8 @@
         </p:nvSpPr>
         <p:spPr>
           <a:xfrm>
-            <a:off x="667512" y="3480584"/>
-            <a:ext cx="329184" cy="274320"/>
+            <a:off x="1798719" y="2498682"/>
+            <a:ext cx="233813" cy="194844"/>
           </a:xfrm>
           <a:prstGeom prst="rect">
             <a:avLst/>
@@ -7506,7 +7506,7 @@
               <a:buNone/>
             </a:pPr>
             <a:r>
-              <a:rPr lang="en-US" sz="1200" b="1" dirty="0">
+              <a:rPr lang="en-US" sz="850" b="1" dirty="0">
                 <a:solidFill>
                   <a:srgbClr val="FFFFFF"/>
                 </a:solidFill>
@@ -7516,7 +7516,7 @@
               </a:rPr>
               <a:t>3</a:t>
             </a:r>
-            <a:endParaRPr lang="en-US" sz="1200" dirty="0"/>
+            <a:endParaRPr lang="en-US" sz="850" dirty="0"/>
           </a:p>
         </p:txBody>
       </p:sp>
@@ -7528,8 +7528,8 @@
         </p:nvSpPr>
         <p:spPr>
           <a:xfrm>
-            <a:off x="1161288" y="3352568"/>
-            <a:ext cx="7296912" cy="548640"/>
+            <a:off x="2149438" y="2407755"/>
+            <a:ext cx="5182853" cy="389688"/>
           </a:xfrm>
           <a:prstGeom prst="rect">
             <a:avLst/>
@@ -7548,7 +7548,7 @@
               <a:buNone/>
             </a:pPr>
             <a:r>
-              <a:rPr lang="en-US" sz="1250" b="1" dirty="0">
+              <a:rPr lang="en-US" sz="890" b="1" dirty="0">
                 <a:solidFill>
                   <a:srgbClr val="FFFFFF"/>
                 </a:solidFill>
@@ -7558,7 +7558,7 @@
               </a:rPr>
               <a:t>Viết một câu: đổi chế độ có phải trả giá gì không?</a:t>
             </a:r>
-            <a:endParaRPr lang="en-US" sz="1250" dirty="0"/>
+            <a:endParaRPr lang="en-US" sz="890" dirty="0"/>
           </a:p>
           <a:p>
             <a:pPr indent="0" marL="0">
@@ -7568,7 +7568,7 @@
               <a:buNone/>
             </a:pPr>
             <a:r>
-              <a:rPr lang="en-US" sz="1150" dirty="0">
+              <a:rPr lang="en-US" sz="820" dirty="0">
                 <a:solidFill>
                   <a:srgbClr val="AFC3D4"/>
                 </a:solidFill>
@@ -7578,7 +7578,7 @@
               </a:rPr>
               <a:t>寫一句：換模式要付什麼代價？</a:t>
             </a:r>
-            <a:endParaRPr lang="en-US" sz="1250" dirty="0"/>
+            <a:endParaRPr lang="en-US" sz="890" dirty="0"/>
           </a:p>
         </p:txBody>
       </p:sp>
@@ -7590,8 +7590,8 @@
         </p:nvSpPr>
         <p:spPr>
           <a:xfrm>
-            <a:off x="502920" y="4056656"/>
-            <a:ext cx="8046720" cy="457200"/>
+            <a:off x="1681812" y="2907855"/>
+            <a:ext cx="5715427" cy="324740"/>
           </a:xfrm>
           <a:prstGeom prst="rect">
             <a:avLst/>
@@ -7610,7 +7610,7 @@
               <a:buNone/>
             </a:pPr>
             <a:r>
-              <a:rPr lang="en-US" sz="1250" b="1" dirty="0">
+              <a:rPr lang="en-US" sz="890" b="1" dirty="0">
                 <a:solidFill>
                   <a:srgbClr val="FFB020"/>
                 </a:solidFill>
@@ -7620,7 +7620,7 @@
               </a:rPr>
               <a:t>Cùng một phần cứng, chỉ đổi chế độ, kết luận lật ngược. Đây là chỗ quan trọng nhất hôm nay.</a:t>
             </a:r>
-            <a:endParaRPr lang="en-US" sz="1250" dirty="0"/>
+            <a:endParaRPr lang="en-US" sz="890" dirty="0"/>
           </a:p>
           <a:p>
             <a:pPr indent="0" marL="0">
@@ -7630,7 +7630,7 @@
               <a:buNone/>
             </a:pPr>
             <a:r>
-              <a:rPr lang="en-US" sz="1150" dirty="0">
+              <a:rPr lang="en-US" sz="820" dirty="0">
                 <a:solidFill>
                   <a:srgbClr val="FFB020"/>
                 </a:solidFill>
@@ -7640,7 +7640,7 @@
               </a:rPr>
               <a:t>同一個硬體，只換模式，結論就翻過來。這是今天最重要的一格。</a:t>
             </a:r>
-            <a:endParaRPr lang="en-US" sz="1250" dirty="0"/>
+            <a:endParaRPr lang="en-US" sz="890" dirty="0"/>
           </a:p>
         </p:txBody>
       </p:sp>
@@ -7652,8 +7652,8 @@
         </p:nvSpPr>
         <p:spPr>
           <a:xfrm>
-            <a:off x="109728" y="4791456"/>
-            <a:ext cx="822960" cy="256032"/>
+            <a:off x="1402536" y="3390800"/>
+            <a:ext cx="584532" cy="181855"/>
           </a:xfrm>
           <a:prstGeom prst="rect">
             <a:avLst/>
@@ -7669,7 +7669,7 @@
               <a:buNone/>
             </a:pPr>
             <a:r>
-              <a:rPr lang="en-US" sz="900" dirty="0">
+              <a:rPr lang="en-US" sz="640" dirty="0">
                 <a:solidFill>
                   <a:srgbClr val="9FB3C8"/>
                 </a:solidFill>
@@ -7679,7 +7679,7 @@
               </a:rPr>
               <a:t>4 / 9</a:t>
             </a:r>
-            <a:endParaRPr lang="en-US" sz="900" dirty="0"/>
+            <a:endParaRPr lang="en-US" sz="640" dirty="0"/>
           </a:p>
         </p:txBody>
       </p:sp>
@@ -7691,8 +7691,8 @@
         </p:nvSpPr>
         <p:spPr>
           <a:xfrm>
-            <a:off x="960120" y="4791456"/>
-            <a:ext cx="2011680" cy="256032"/>
+            <a:off x="2006553" y="3390800"/>
+            <a:ext cx="1428857" cy="181855"/>
           </a:xfrm>
           <a:prstGeom prst="rect">
             <a:avLst/>
@@ -7708,7 +7708,7 @@
               <a:buNone/>
             </a:pPr>
             <a:r>
-              <a:rPr lang="en-US" sz="900" dirty="0">
+              <a:rPr lang="en-US" sz="640" dirty="0">
                 <a:solidFill>
                   <a:srgbClr val="9FB3C8"/>
                 </a:solidFill>
@@ -7718,7 +7718,7 @@
               </a:rPr>
               <a:t>Tiết 3 · 第 3 節</a:t>
             </a:r>
-            <a:endParaRPr lang="en-US" sz="900" dirty="0"/>
+            <a:endParaRPr lang="en-US" sz="640" dirty="0"/>
           </a:p>
         </p:txBody>
       </p:sp>
@@ -7762,8 +7762,8 @@
         </p:nvSpPr>
         <p:spPr>
           <a:xfrm>
-            <a:off x="6766560" y="-1371600"/>
-            <a:ext cx="4206240" cy="4206240"/>
+            <a:off x="6130753" y="-947729"/>
+            <a:ext cx="2987610" cy="2987610"/>
           </a:xfrm>
           <a:prstGeom prst="ellipse">
             <a:avLst/>
@@ -7787,8 +7787,8 @@
         </p:nvSpPr>
         <p:spPr>
           <a:xfrm>
-            <a:off x="7863840" y="3108960"/>
-            <a:ext cx="2560320" cy="2560320"/>
+            <a:off x="7104973" y="1520297"/>
+            <a:ext cx="1688649" cy="1688649"/>
           </a:xfrm>
           <a:prstGeom prst="ellipse">
             <a:avLst/>
@@ -7809,8 +7809,8 @@
         </p:nvSpPr>
         <p:spPr>
           <a:xfrm>
-            <a:off x="502920" y="475488"/>
-            <a:ext cx="6766560" cy="274320"/>
+            <a:off x="1681812" y="364222"/>
+            <a:ext cx="4806155" cy="194844"/>
           </a:xfrm>
           <a:prstGeom prst="rect">
             <a:avLst/>
@@ -7826,7 +7826,7 @@
               <a:buNone/>
             </a:pPr>
             <a:r>
-              <a:rPr lang="en-US" sz="1250" b="1" dirty="0">
+              <a:rPr lang="en-US" sz="890" b="1" dirty="0">
                 <a:solidFill>
                   <a:srgbClr val="FFB020"/>
                 </a:solidFill>
@@ -7836,7 +7836,7 @@
               </a:rPr>
               <a:t>Nhiệm vụ 3 · 第三題（10 分鐘）</a:t>
             </a:r>
-            <a:endParaRPr lang="en-US" sz="1250" dirty="0"/>
+            <a:endParaRPr lang="en-US" sz="890" dirty="0"/>
           </a:p>
         </p:txBody>
       </p:sp>
@@ -7848,8 +7848,8 @@
         </p:nvSpPr>
         <p:spPr>
           <a:xfrm>
-            <a:off x="502920" y="786384"/>
-            <a:ext cx="8046720" cy="1225296"/>
+            <a:off x="1681812" y="585045"/>
+            <a:ext cx="5715427" cy="870304"/>
           </a:xfrm>
           <a:prstGeom prst="rect">
             <a:avLst/>
@@ -7868,7 +7868,7 @@
               <a:buNone/>
             </a:pPr>
             <a:r>
-              <a:rPr lang="en-US" sz="2300" b="1" dirty="0">
+              <a:rPr lang="en-US" sz="1630" b="1" dirty="0">
                 <a:solidFill>
                   <a:srgbClr val="FFFFFF"/>
                 </a:solidFill>
@@ -7878,7 +7878,7 @@
               </a:rPr>
               <a:t>Cao tốc, 100 km/h, phải thấy xe ở 150 m. Model nào còn sống sót?</a:t>
             </a:r>
-            <a:endParaRPr lang="en-US" sz="2300" dirty="0"/>
+            <a:endParaRPr lang="en-US" sz="1630" dirty="0"/>
           </a:p>
           <a:p>
             <a:pPr indent="0" marL="0">
@@ -7888,7 +7888,7 @@
               <a:buNone/>
             </a:pPr>
             <a:r>
-              <a:rPr lang="en-US" sz="1500" dirty="0">
+              <a:rPr lang="en-US" sz="1070" dirty="0">
                 <a:solidFill>
                   <a:srgbClr val="AFC3D4"/>
                 </a:solidFill>
@@ -7898,7 +7898,7 @@
               </a:rPr>
               <a:t>國道，時速 100，要在 150 公尺外看到車。哪一顆還活著？</a:t>
             </a:r>
-            <a:endParaRPr lang="en-US" sz="2300" dirty="0"/>
+            <a:endParaRPr lang="en-US" sz="1630" dirty="0"/>
           </a:p>
         </p:txBody>
       </p:sp>
@@ -7910,8 +7910,8 @@
         </p:nvSpPr>
         <p:spPr>
           <a:xfrm>
-            <a:off x="502920" y="1880384"/>
-            <a:ext cx="8138160" cy="621792"/>
+            <a:off x="1681812" y="1362092"/>
+            <a:ext cx="5780375" cy="441647"/>
           </a:xfrm>
           <a:prstGeom prst="roundRect">
             <a:avLst>
@@ -7932,8 +7932,8 @@
         </p:nvSpPr>
         <p:spPr>
           <a:xfrm>
-            <a:off x="667512" y="2026688"/>
-            <a:ext cx="329184" cy="329184"/>
+            <a:off x="1798719" y="1466008"/>
+            <a:ext cx="233813" cy="233813"/>
           </a:xfrm>
           <a:prstGeom prst="ellipse">
             <a:avLst/>
@@ -7952,8 +7952,8 @@
         </p:nvSpPr>
         <p:spPr>
           <a:xfrm>
-            <a:off x="667512" y="2054120"/>
-            <a:ext cx="329184" cy="274320"/>
+            <a:off x="1798719" y="1485493"/>
+            <a:ext cx="233813" cy="194844"/>
           </a:xfrm>
           <a:prstGeom prst="rect">
             <a:avLst/>
@@ -7969,7 +7969,7 @@
               <a:buNone/>
             </a:pPr>
             <a:r>
-              <a:rPr lang="en-US" sz="1200" b="1" dirty="0">
+              <a:rPr lang="en-US" sz="850" b="1" dirty="0">
                 <a:solidFill>
                   <a:srgbClr val="FFFFFF"/>
                 </a:solidFill>
@@ -7979,7 +7979,7 @@
               </a:rPr>
               <a:t>1</a:t>
             </a:r>
-            <a:endParaRPr lang="en-US" sz="1200" dirty="0"/>
+            <a:endParaRPr lang="en-US" sz="850" dirty="0"/>
           </a:p>
         </p:txBody>
       </p:sp>
@@ -7991,8 +7991,8 @@
         </p:nvSpPr>
         <p:spPr>
           <a:xfrm>
-            <a:off x="1161288" y="1926104"/>
-            <a:ext cx="7296912" cy="548640"/>
+            <a:off x="2149438" y="1394566"/>
+            <a:ext cx="5182853" cy="389688"/>
           </a:xfrm>
           <a:prstGeom prst="rect">
             <a:avLst/>
@@ -8011,7 +8011,7 @@
               <a:buNone/>
             </a:pPr>
             <a:r>
-              <a:rPr lang="en-US" sz="1250" b="1" dirty="0">
+              <a:rPr lang="en-US" sz="890" b="1" dirty="0">
                 <a:solidFill>
                   <a:srgbClr val="FFFFFF"/>
                 </a:solidFill>
@@ -8021,7 +8021,7 @@
               </a:rPr>
               <a:t>Chép quãng đường phanh mà công cụ tính ra</a:t>
             </a:r>
-            <a:endParaRPr lang="en-US" sz="1250" dirty="0"/>
+            <a:endParaRPr lang="en-US" sz="890" dirty="0"/>
           </a:p>
           <a:p>
             <a:pPr indent="0" marL="0">
@@ -8031,7 +8031,7 @@
               <a:buNone/>
             </a:pPr>
             <a:r>
-              <a:rPr lang="en-US" sz="1150" dirty="0">
+              <a:rPr lang="en-US" sz="820" dirty="0">
                 <a:solidFill>
                   <a:srgbClr val="AFC3D4"/>
                 </a:solidFill>
@@ -8041,7 +8041,7 @@
               </a:rPr>
               <a:t>抄下工具算出來的煞停距離</a:t>
             </a:r>
-            <a:endParaRPr lang="en-US" sz="1250" dirty="0"/>
+            <a:endParaRPr lang="en-US" sz="890" dirty="0"/>
           </a:p>
         </p:txBody>
       </p:sp>
@@ -8053,8 +8053,8 @@
         </p:nvSpPr>
         <p:spPr>
           <a:xfrm>
-            <a:off x="502920" y="2593616"/>
-            <a:ext cx="8138160" cy="621792"/>
+            <a:off x="1681812" y="1868686"/>
+            <a:ext cx="5780375" cy="441647"/>
           </a:xfrm>
           <a:prstGeom prst="roundRect">
             <a:avLst>
@@ -8075,8 +8075,8 @@
         </p:nvSpPr>
         <p:spPr>
           <a:xfrm>
-            <a:off x="667512" y="2739920"/>
-            <a:ext cx="329184" cy="329184"/>
+            <a:off x="1798719" y="1972603"/>
+            <a:ext cx="233813" cy="233813"/>
           </a:xfrm>
           <a:prstGeom prst="ellipse">
             <a:avLst/>
@@ -8095,8 +8095,8 @@
         </p:nvSpPr>
         <p:spPr>
           <a:xfrm>
-            <a:off x="667512" y="2767352"/>
-            <a:ext cx="329184" cy="274320"/>
+            <a:off x="1798719" y="1992087"/>
+            <a:ext cx="233813" cy="194844"/>
           </a:xfrm>
           <a:prstGeom prst="rect">
             <a:avLst/>
@@ -8112,7 +8112,7 @@
               <a:buNone/>
             </a:pPr>
             <a:r>
-              <a:rPr lang="en-US" sz="1200" b="1" dirty="0">
+              <a:rPr lang="en-US" sz="850" b="1" dirty="0">
                 <a:solidFill>
                   <a:srgbClr val="FFFFFF"/>
                 </a:solidFill>
@@ -8122,7 +8122,7 @@
               </a:rPr>
               <a:t>2</a:t>
             </a:r>
-            <a:endParaRPr lang="en-US" sz="1200" dirty="0"/>
+            <a:endParaRPr lang="en-US" sz="850" dirty="0"/>
           </a:p>
         </p:txBody>
       </p:sp>
@@ -8134,8 +8134,8 @@
         </p:nvSpPr>
         <p:spPr>
           <a:xfrm>
-            <a:off x="1161288" y="2639336"/>
-            <a:ext cx="7296912" cy="548640"/>
+            <a:off x="2149438" y="1901160"/>
+            <a:ext cx="5182853" cy="389688"/>
           </a:xfrm>
           <a:prstGeom prst="rect">
             <a:avLst/>
@@ -8154,7 +8154,7 @@
               <a:buNone/>
             </a:pPr>
             <a:r>
-              <a:rPr lang="en-US" sz="1250" b="1" dirty="0">
+              <a:rPr lang="en-US" sz="890" b="1" dirty="0">
                 <a:solidFill>
                   <a:srgbClr val="FFFFFF"/>
                 </a:solidFill>
@@ -8164,7 +8164,7 @@
               </a:rPr>
               <a:t>Camera tắc ở đâu? LD-16 tắc ở đâu? Hai chỗ khác nhau</a:t>
             </a:r>
-            <a:endParaRPr lang="en-US" sz="1250" dirty="0"/>
+            <a:endParaRPr lang="en-US" sz="890" dirty="0"/>
           </a:p>
           <a:p>
             <a:pPr indent="0" marL="0">
@@ -8174,7 +8174,7 @@
               <a:buNone/>
             </a:pPr>
             <a:r>
-              <a:rPr lang="en-US" sz="1150" dirty="0">
+              <a:rPr lang="en-US" sz="820" dirty="0">
                 <a:solidFill>
                   <a:srgbClr val="AFC3D4"/>
                 </a:solidFill>
@@ -8184,7 +8184,7 @@
               </a:rPr>
               <a:t>相機卡在哪？LD-16 卡在哪？兩個卡的地方不一樣</a:t>
             </a:r>
-            <a:endParaRPr lang="en-US" sz="1250" dirty="0"/>
+            <a:endParaRPr lang="en-US" sz="890" dirty="0"/>
           </a:p>
         </p:txBody>
       </p:sp>
@@ -8196,8 +8196,8 @@
         </p:nvSpPr>
         <p:spPr>
           <a:xfrm>
-            <a:off x="502920" y="3306848"/>
-            <a:ext cx="8138160" cy="621792"/>
+            <a:off x="1681812" y="2375281"/>
+            <a:ext cx="5780375" cy="441647"/>
           </a:xfrm>
           <a:prstGeom prst="roundRect">
             <a:avLst>
@@ -8218,8 +8218,8 @@
         </p:nvSpPr>
         <p:spPr>
           <a:xfrm>
-            <a:off x="667512" y="3453152"/>
-            <a:ext cx="329184" cy="329184"/>
+            <a:off x="1798719" y="2479198"/>
+            <a:ext cx="233813" cy="233813"/>
           </a:xfrm>
           <a:prstGeom prst="ellipse">
             <a:avLst/>
@@ -8238,8 +8238,8 @@
         </p:nvSpPr>
         <p:spPr>
           <a:xfrm>
-            <a:off x="667512" y="3480584"/>
-            <a:ext cx="329184" cy="274320"/>
+            <a:off x="1798719" y="2498682"/>
+            <a:ext cx="233813" cy="194844"/>
           </a:xfrm>
           <a:prstGeom prst="rect">
             <a:avLst/>
@@ -8255,7 +8255,7 @@
               <a:buNone/>
             </a:pPr>
             <a:r>
-              <a:rPr lang="en-US" sz="1200" b="1" dirty="0">
+              <a:rPr lang="en-US" sz="850" b="1" dirty="0">
                 <a:solidFill>
                   <a:srgbClr val="FFFFFF"/>
                 </a:solidFill>
@@ -8265,7 +8265,7 @@
               </a:rPr>
               <a:t>3</a:t>
             </a:r>
-            <a:endParaRPr lang="en-US" sz="1200" dirty="0"/>
+            <a:endParaRPr lang="en-US" sz="850" dirty="0"/>
           </a:p>
         </p:txBody>
       </p:sp>
@@ -8277,8 +8277,8 @@
         </p:nvSpPr>
         <p:spPr>
           <a:xfrm>
-            <a:off x="1161288" y="3352568"/>
-            <a:ext cx="7296912" cy="548640"/>
+            <a:off x="2149438" y="2407755"/>
+            <a:ext cx="5182853" cy="389688"/>
           </a:xfrm>
           <a:prstGeom prst="rect">
             <a:avLst/>
@@ -8297,7 +8297,7 @@
               <a:buNone/>
             </a:pPr>
             <a:r>
-              <a:rPr lang="en-US" sz="1250" b="1" dirty="0">
+              <a:rPr lang="en-US" sz="890" b="1" dirty="0">
                 <a:solidFill>
                   <a:srgbClr val="FFFFFF"/>
                 </a:solidFill>
@@ -8307,7 +8307,7 @@
               </a:rPr>
               <a:t>AT128 qua được, nhưng chỉ còn mấy điểm trên chiếc xe ở 150 m?</a:t>
             </a:r>
-            <a:endParaRPr lang="en-US" sz="1250" dirty="0"/>
+            <a:endParaRPr lang="en-US" sz="890" dirty="0"/>
           </a:p>
           <a:p>
             <a:pPr indent="0" marL="0">
@@ -8317,7 +8317,7 @@
               <a:buNone/>
             </a:pPr>
             <a:r>
-              <a:rPr lang="en-US" sz="1150" dirty="0">
+              <a:rPr lang="en-US" sz="820" dirty="0">
                 <a:solidFill>
                   <a:srgbClr val="AFC3D4"/>
                 </a:solidFill>
@@ -8327,7 +8327,7 @@
               </a:rPr>
               <a:t>AT128 過了，可是 150 公尺外那台車身上只剩幾個點？</a:t>
             </a:r>
-            <a:endParaRPr lang="en-US" sz="1250" dirty="0"/>
+            <a:endParaRPr lang="en-US" sz="890" dirty="0"/>
           </a:p>
         </p:txBody>
       </p:sp>
@@ -8339,8 +8339,8 @@
         </p:nvSpPr>
         <p:spPr>
           <a:xfrm>
-            <a:off x="502920" y="4056656"/>
-            <a:ext cx="8046720" cy="457200"/>
+            <a:off x="1681812" y="2907855"/>
+            <a:ext cx="5715427" cy="324740"/>
           </a:xfrm>
           <a:prstGeom prst="rect">
             <a:avLst/>
@@ -8359,7 +8359,7 @@
               <a:buNone/>
             </a:pPr>
             <a:r>
-              <a:rPr lang="en-US" sz="1250" b="1" dirty="0">
+              <a:rPr lang="en-US" sz="890" b="1" dirty="0">
                 <a:solidFill>
                   <a:srgbClr val="FFB020"/>
                 </a:solidFill>
@@ -8369,7 +8369,7 @@
               </a:rPr>
               <a:t>Ở tốc độ cao, «đo được xa» và «nhìn được rõ» tách hẳn ra làm hai chuyện.</a:t>
             </a:r>
-            <a:endParaRPr lang="en-US" sz="1250" dirty="0"/>
+            <a:endParaRPr lang="en-US" sz="890" dirty="0"/>
           </a:p>
           <a:p>
             <a:pPr indent="0" marL="0">
@@ -8379,7 +8379,7 @@
               <a:buNone/>
             </a:pPr>
             <a:r>
-              <a:rPr lang="en-US" sz="1150" dirty="0">
+              <a:rPr lang="en-US" sz="820" dirty="0">
                 <a:solidFill>
                   <a:srgbClr val="FFB020"/>
                 </a:solidFill>
@@ -8389,7 +8389,7 @@
               </a:rPr>
               <a:t>到了高速，「測得到遠」和「看得清楚」就完全變成兩件事了。</a:t>
             </a:r>
-            <a:endParaRPr lang="en-US" sz="1250" dirty="0"/>
+            <a:endParaRPr lang="en-US" sz="890" dirty="0"/>
           </a:p>
         </p:txBody>
       </p:sp>
@@ -8401,8 +8401,8 @@
         </p:nvSpPr>
         <p:spPr>
           <a:xfrm>
-            <a:off x="109728" y="4791456"/>
-            <a:ext cx="822960" cy="256032"/>
+            <a:off x="1402536" y="3390800"/>
+            <a:ext cx="584532" cy="181855"/>
           </a:xfrm>
           <a:prstGeom prst="rect">
             <a:avLst/>
@@ -8418,7 +8418,7 @@
               <a:buNone/>
             </a:pPr>
             <a:r>
-              <a:rPr lang="en-US" sz="900" dirty="0">
+              <a:rPr lang="en-US" sz="640" dirty="0">
                 <a:solidFill>
                   <a:srgbClr val="9FB3C8"/>
                 </a:solidFill>
@@ -8428,7 +8428,7 @@
               </a:rPr>
               <a:t>5 / 9</a:t>
             </a:r>
-            <a:endParaRPr lang="en-US" sz="900" dirty="0"/>
+            <a:endParaRPr lang="en-US" sz="640" dirty="0"/>
           </a:p>
         </p:txBody>
       </p:sp>
@@ -8440,8 +8440,8 @@
         </p:nvSpPr>
         <p:spPr>
           <a:xfrm>
-            <a:off x="960120" y="4791456"/>
-            <a:ext cx="2011680" cy="256032"/>
+            <a:off x="2006553" y="3390800"/>
+            <a:ext cx="1428857" cy="181855"/>
           </a:xfrm>
           <a:prstGeom prst="rect">
             <a:avLst/>
@@ -8457,7 +8457,7 @@
               <a:buNone/>
             </a:pPr>
             <a:r>
-              <a:rPr lang="en-US" sz="900" dirty="0">
+              <a:rPr lang="en-US" sz="640" dirty="0">
                 <a:solidFill>
                   <a:srgbClr val="9FB3C8"/>
                 </a:solidFill>
@@ -8467,7 +8467,7 @@
               </a:rPr>
               <a:t>Tiết 3 · 第 3 節</a:t>
             </a:r>
-            <a:endParaRPr lang="en-US" sz="900" dirty="0"/>
+            <a:endParaRPr lang="en-US" sz="640" dirty="0"/>
           </a:p>
         </p:txBody>
       </p:sp>
@@ -8504,8 +8504,8 @@
         </p:nvSpPr>
         <p:spPr>
           <a:xfrm>
-            <a:off x="502920" y="292608"/>
-            <a:ext cx="8138160" cy="841248"/>
+            <a:off x="1681812" y="234326"/>
+            <a:ext cx="5780375" cy="597522"/>
           </a:xfrm>
           <a:prstGeom prst="rect">
             <a:avLst/>
@@ -8524,7 +8524,7 @@
               <a:buNone/>
             </a:pPr>
             <a:r>
-              <a:rPr lang="en-US" sz="2200" b="1" dirty="0">
+              <a:rPr lang="en-US" sz="1560" b="1" dirty="0">
                 <a:solidFill>
                   <a:srgbClr val="0B1F3A"/>
                 </a:solidFill>
@@ -8534,7 +8534,7 @@
               </a:rPr>
               <a:t>Không có model nào thắng cả ba tình huống</a:t>
             </a:r>
-            <a:endParaRPr lang="en-US" sz="2200" dirty="0"/>
+            <a:endParaRPr lang="en-US" sz="1560" dirty="0"/>
           </a:p>
           <a:p>
             <a:pPr indent="0" marL="0">
@@ -8544,7 +8544,7 @@
               <a:buNone/>
             </a:pPr>
             <a:r>
-              <a:rPr lang="en-US" sz="1350" dirty="0">
+              <a:rPr lang="en-US" sz="960" dirty="0">
                 <a:solidFill>
                   <a:srgbClr val="5F7183"/>
                 </a:solidFill>
@@ -8554,7 +8554,7 @@
               </a:rPr>
               <a:t>沒有一顆感測器三個情境都贏</a:t>
             </a:r>
-            <a:endParaRPr lang="en-US" sz="2200" dirty="0"/>
+            <a:endParaRPr lang="en-US" sz="1560" dirty="0"/>
           </a:p>
         </p:txBody>
       </p:sp>
@@ -8566,8 +8566,8 @@
         </p:nvSpPr>
         <p:spPr>
           <a:xfrm>
-            <a:off x="502920" y="1316736"/>
-            <a:ext cx="3566160" cy="2249424"/>
+            <a:off x="1681812" y="961744"/>
+            <a:ext cx="2532973" cy="1597722"/>
           </a:xfrm>
           <a:prstGeom prst="roundRect">
             <a:avLst>
@@ -8588,8 +8588,8 @@
         </p:nvSpPr>
         <p:spPr>
           <a:xfrm>
-            <a:off x="667512" y="1444752"/>
-            <a:ext cx="3236976" cy="329184"/>
+            <a:off x="1798719" y="1052671"/>
+            <a:ext cx="2299161" cy="233813"/>
           </a:xfrm>
           <a:prstGeom prst="rect">
             <a:avLst/>
@@ -8608,7 +8608,7 @@
               <a:buNone/>
             </a:pPr>
             <a:r>
-              <a:rPr lang="en-US" sz="1050" b="1" dirty="0">
+              <a:rPr lang="en-US" sz="750" b="1" dirty="0">
                 <a:solidFill>
                   <a:srgbClr val="00A896"/>
                 </a:solidFill>
@@ -8618,7 +8618,7 @@
               </a:rPr>
               <a:t>Cái ta vừa làm</a:t>
             </a:r>
-            <a:endParaRPr lang="en-US" sz="1050" dirty="0"/>
+            <a:endParaRPr lang="en-US" sz="750" dirty="0"/>
           </a:p>
           <a:p>
             <a:pPr indent="0" marL="0">
@@ -8628,7 +8628,7 @@
               <a:buNone/>
             </a:pPr>
             <a:r>
-              <a:rPr lang="en-US" sz="950" dirty="0">
+              <a:rPr lang="en-US" sz="670" dirty="0">
                 <a:solidFill>
                   <a:srgbClr val="00A896"/>
                 </a:solidFill>
@@ -8638,7 +8638,7 @@
               </a:rPr>
               <a:t>我們剛剛做的事</a:t>
             </a:r>
-            <a:endParaRPr lang="en-US" sz="1050" dirty="0"/>
+            <a:endParaRPr lang="en-US" sz="750" dirty="0"/>
           </a:p>
         </p:txBody>
       </p:sp>
@@ -8650,8 +8650,8 @@
         </p:nvSpPr>
         <p:spPr>
           <a:xfrm>
-            <a:off x="667512" y="1847088"/>
-            <a:ext cx="3236976" cy="566928"/>
+            <a:off x="1798719" y="1338442"/>
+            <a:ext cx="2299161" cy="402678"/>
           </a:xfrm>
           <a:prstGeom prst="rect">
             <a:avLst/>
@@ -8667,7 +8667,7 @@
               <a:buNone/>
             </a:pPr>
             <a:r>
-              <a:rPr lang="en-US" sz="2700" b="1" dirty="0">
+              <a:rPr lang="en-US" sz="1920" b="1" dirty="0">
                 <a:solidFill>
                   <a:srgbClr val="FFFFFF"/>
                 </a:solidFill>
@@ -8677,7 +8677,7 @@
               </a:rPr>
               <a:t>4 × 3</a:t>
             </a:r>
-            <a:endParaRPr lang="en-US" sz="2700" dirty="0"/>
+            <a:endParaRPr lang="en-US" sz="1920" dirty="0"/>
           </a:p>
         </p:txBody>
       </p:sp>
@@ -8689,8 +8689,8 @@
         </p:nvSpPr>
         <p:spPr>
           <a:xfrm>
-            <a:off x="667512" y="2450592"/>
-            <a:ext cx="3236976" cy="402336"/>
+            <a:off x="1798719" y="1767099"/>
+            <a:ext cx="2299161" cy="285771"/>
           </a:xfrm>
           <a:prstGeom prst="rect">
             <a:avLst/>
@@ -8709,7 +8709,7 @@
               <a:buNone/>
             </a:pPr>
             <a:r>
-              <a:rPr lang="en-US" sz="1150" b="1" dirty="0">
+              <a:rPr lang="en-US" sz="820" b="1" dirty="0">
                 <a:solidFill>
                   <a:srgbClr val="AFC3D4"/>
                 </a:solidFill>
@@ -8719,7 +8719,7 @@
               </a:rPr>
               <a:t>bốn model, ba tình huống</a:t>
             </a:r>
-            <a:endParaRPr lang="en-US" sz="1150" dirty="0"/>
+            <a:endParaRPr lang="en-US" sz="820" dirty="0"/>
           </a:p>
           <a:p>
             <a:pPr indent="0" marL="0">
@@ -8729,7 +8729,7 @@
               <a:buNone/>
             </a:pPr>
             <a:r>
-              <a:rPr lang="en-US" sz="1050" dirty="0">
+              <a:rPr lang="en-US" sz="750" dirty="0">
                 <a:solidFill>
                   <a:srgbClr val="8AA0B4"/>
                 </a:solidFill>
@@ -8739,7 +8739,7 @@
               </a:rPr>
               <a:t>四個型號、三個情境</a:t>
             </a:r>
-            <a:endParaRPr lang="en-US" sz="1150" dirty="0"/>
+            <a:endParaRPr lang="en-US" sz="820" dirty="0"/>
           </a:p>
         </p:txBody>
       </p:sp>
@@ -8751,8 +8751,8 @@
         </p:nvSpPr>
         <p:spPr>
           <a:xfrm>
-            <a:off x="667512" y="3017520"/>
-            <a:ext cx="3236976" cy="402336"/>
+            <a:off x="1798719" y="2169777"/>
+            <a:ext cx="2299161" cy="285771"/>
           </a:xfrm>
           <a:prstGeom prst="rect">
             <a:avLst/>
@@ -8771,7 +8771,7 @@
               <a:buNone/>
             </a:pPr>
             <a:r>
-              <a:rPr lang="en-US" sz="1000" b="1" dirty="0">
+              <a:rPr lang="en-US" sz="710" b="1" dirty="0">
                 <a:solidFill>
                   <a:srgbClr val="7E93A6"/>
                 </a:solidFill>
@@ -8781,7 +8781,7 @@
               </a:rPr>
               <a:t>AT128 qua cả ba · camera hai · OS1 một · LD-16 không cái nào</a:t>
             </a:r>
-            <a:endParaRPr lang="en-US" sz="1000" dirty="0"/>
+            <a:endParaRPr lang="en-US" sz="710" dirty="0"/>
           </a:p>
           <a:p>
             <a:pPr indent="0" marL="0">
@@ -8791,7 +8791,7 @@
               <a:buNone/>
             </a:pPr>
             <a:r>
-              <a:rPr lang="en-US" sz="900" dirty="0">
+              <a:rPr lang="en-US" sz="640" dirty="0">
                 <a:solidFill>
                   <a:srgbClr val="7E93A6"/>
                 </a:solidFill>
@@ -8801,7 +8801,7 @@
               </a:rPr>
               <a:t>AT128 三個都過・相機兩個・OS1 一個・LD-16 都沒過</a:t>
             </a:r>
-            <a:endParaRPr lang="en-US" sz="1000" dirty="0"/>
+            <a:endParaRPr lang="en-US" sz="710" dirty="0"/>
           </a:p>
         </p:txBody>
       </p:sp>
@@ -8813,8 +8813,8 @@
         </p:nvSpPr>
         <p:spPr>
           <a:xfrm>
-            <a:off x="4187952" y="2295144"/>
-            <a:ext cx="768096" cy="292608"/>
+            <a:off x="4299218" y="1656688"/>
+            <a:ext cx="545564" cy="207834"/>
           </a:xfrm>
           <a:prstGeom prst="rightArrow">
             <a:avLst/>
@@ -8833,8 +8833,8 @@
         </p:nvSpPr>
         <p:spPr>
           <a:xfrm flipH="1">
-            <a:off x="4370832" y="2240280"/>
-            <a:ext cx="402336" cy="402336"/>
+            <a:off x="4429114" y="1617719"/>
+            <a:ext cx="285771" cy="285771"/>
           </a:xfrm>
           <a:prstGeom prst="line">
             <a:avLst/>
@@ -8856,8 +8856,8 @@
         </p:nvSpPr>
         <p:spPr>
           <a:xfrm>
-            <a:off x="4370832" y="2240280"/>
-            <a:ext cx="402336" cy="402336"/>
+            <a:off x="4429114" y="1617719"/>
+            <a:ext cx="285771" cy="285771"/>
           </a:xfrm>
           <a:prstGeom prst="line">
             <a:avLst/>
@@ -8879,8 +8879,8 @@
         </p:nvSpPr>
         <p:spPr>
           <a:xfrm>
-            <a:off x="5074920" y="1316736"/>
-            <a:ext cx="3566160" cy="2249424"/>
+            <a:off x="4929214" y="961744"/>
+            <a:ext cx="2532973" cy="1597722"/>
           </a:xfrm>
           <a:prstGeom prst="roundRect">
             <a:avLst>
@@ -8906,8 +8906,8 @@
         </p:nvSpPr>
         <p:spPr>
           <a:xfrm>
-            <a:off x="5239512" y="1444752"/>
-            <a:ext cx="3236976" cy="329184"/>
+            <a:off x="5046121" y="1052671"/>
+            <a:ext cx="2299161" cy="233813"/>
           </a:xfrm>
           <a:prstGeom prst="rect">
             <a:avLst/>
@@ -8926,7 +8926,7 @@
               <a:buNone/>
             </a:pPr>
             <a:r>
-              <a:rPr lang="en-US" sz="1050" b="1" dirty="0">
+              <a:rPr lang="en-US" sz="750" b="1" dirty="0">
                 <a:solidFill>
                   <a:srgbClr val="D9463E"/>
                 </a:solidFill>
@@ -8936,7 +8936,7 @@
               </a:rPr>
               <a:t>Nhưng câu hỏi thật là…</a:t>
             </a:r>
-            <a:endParaRPr lang="en-US" sz="1050" dirty="0"/>
+            <a:endParaRPr lang="en-US" sz="750" dirty="0"/>
           </a:p>
           <a:p>
             <a:pPr indent="0" marL="0">
@@ -8946,7 +8946,7 @@
               <a:buNone/>
             </a:pPr>
             <a:r>
-              <a:rPr lang="en-US" sz="950" dirty="0">
+              <a:rPr lang="en-US" sz="670" dirty="0">
                 <a:solidFill>
                   <a:srgbClr val="D9463E"/>
                 </a:solidFill>
@@ -8956,7 +8956,7 @@
               </a:rPr>
               <a:t>但真正的問題是……</a:t>
             </a:r>
-            <a:endParaRPr lang="en-US" sz="1050" dirty="0"/>
+            <a:endParaRPr lang="en-US" sz="750" dirty="0"/>
           </a:p>
         </p:txBody>
       </p:sp>
@@ -8968,8 +8968,8 @@
         </p:nvSpPr>
         <p:spPr>
           <a:xfrm>
-            <a:off x="5671566" y="2337984"/>
-            <a:ext cx="370332" cy="170353"/>
+            <a:off x="5353000" y="1687116"/>
+            <a:ext cx="263040" cy="120998"/>
           </a:xfrm>
           <a:prstGeom prst="roundRect">
             <a:avLst>
@@ -8990,8 +8990,8 @@
         </p:nvSpPr>
         <p:spPr>
           <a:xfrm>
-            <a:off x="5812292" y="2372054"/>
-            <a:ext cx="125913" cy="102212"/>
+            <a:off x="5452955" y="1711315"/>
+            <a:ext cx="89433" cy="72599"/>
           </a:xfrm>
           <a:prstGeom prst="roundRect">
             <a:avLst>
@@ -9012,8 +9012,8 @@
         </p:nvSpPr>
         <p:spPr>
           <a:xfrm>
-            <a:off x="6238077" y="2506937"/>
-            <a:ext cx="86411" cy="71323"/>
+            <a:off x="5755382" y="1807120"/>
+            <a:ext cx="61376" cy="50659"/>
           </a:xfrm>
           <a:prstGeom prst="roundRect">
             <a:avLst>
@@ -9034,8 +9034,8 @@
         </p:nvSpPr>
         <p:spPr>
           <a:xfrm>
-            <a:off x="6115533" y="2683992"/>
-            <a:ext cx="86411" cy="71323"/>
+            <a:off x="5668341" y="1932879"/>
+            <a:ext cx="61376" cy="50659"/>
           </a:xfrm>
           <a:prstGeom prst="roundRect">
             <a:avLst>
@@ -9056,8 +9056,8 @@
         </p:nvSpPr>
         <p:spPr>
           <a:xfrm>
-            <a:off x="5912068" y="2781602"/>
-            <a:ext cx="86411" cy="71323"/>
+            <a:off x="5523824" y="2002209"/>
+            <a:ext cx="61376" cy="50659"/>
           </a:xfrm>
           <a:prstGeom prst="roundRect">
             <a:avLst>
@@ -9078,8 +9078,8 @@
         </p:nvSpPr>
         <p:spPr>
           <a:xfrm>
-            <a:off x="5682198" y="2773612"/>
-            <a:ext cx="86411" cy="71323"/>
+            <a:off x="5360552" y="1996534"/>
+            <a:ext cx="61376" cy="50659"/>
           </a:xfrm>
           <a:prstGeom prst="roundRect">
             <a:avLst>
@@ -9100,8 +9100,8 @@
         </p:nvSpPr>
         <p:spPr>
           <a:xfrm>
-            <a:off x="5487518" y="2662163"/>
-            <a:ext cx="86411" cy="71323"/>
+            <a:off x="5222274" y="1917374"/>
+            <a:ext cx="61376" cy="50659"/>
           </a:xfrm>
           <a:prstGeom prst="roundRect">
             <a:avLst>
@@ -9122,8 +9122,8 @@
         </p:nvSpPr>
         <p:spPr>
           <a:xfrm>
-            <a:off x="5380191" y="2477118"/>
-            <a:ext cx="86411" cy="71323"/>
+            <a:off x="5146042" y="1785940"/>
+            <a:ext cx="61376" cy="50659"/>
           </a:xfrm>
           <a:prstGeom prst="roundRect">
             <a:avLst>
@@ -9144,8 +9144,8 @@
         </p:nvSpPr>
         <p:spPr>
           <a:xfrm>
-            <a:off x="5388977" y="2268060"/>
-            <a:ext cx="86411" cy="71323"/>
+            <a:off x="5152282" y="1637450"/>
+            <a:ext cx="61376" cy="50659"/>
           </a:xfrm>
           <a:prstGeom prst="roundRect">
             <a:avLst>
@@ -9166,8 +9166,8 @@
         </p:nvSpPr>
         <p:spPr>
           <a:xfrm>
-            <a:off x="5511520" y="2091005"/>
-            <a:ext cx="86411" cy="71323"/>
+            <a:off x="5239323" y="1511692"/>
+            <a:ext cx="61376" cy="50659"/>
           </a:xfrm>
           <a:prstGeom prst="roundRect">
             <a:avLst>
@@ -9188,8 +9188,8 @@
         </p:nvSpPr>
         <p:spPr>
           <a:xfrm>
-            <a:off x="5714986" y="1993395"/>
-            <a:ext cx="86411" cy="71323"/>
+            <a:off x="5383840" y="1442361"/>
+            <a:ext cx="61376" cy="50659"/>
           </a:xfrm>
           <a:prstGeom prst="roundRect">
             <a:avLst>
@@ -9210,8 +9210,8 @@
         </p:nvSpPr>
         <p:spPr>
           <a:xfrm>
-            <a:off x="5944855" y="2001385"/>
-            <a:ext cx="86411" cy="71323"/>
+            <a:off x="5547112" y="1448036"/>
+            <a:ext cx="61376" cy="50659"/>
           </a:xfrm>
           <a:prstGeom prst="roundRect">
             <a:avLst>
@@ -9232,8 +9232,8 @@
         </p:nvSpPr>
         <p:spPr>
           <a:xfrm>
-            <a:off x="6139536" y="2112834"/>
-            <a:ext cx="86411" cy="71323"/>
+            <a:off x="5685390" y="1527196"/>
+            <a:ext cx="61376" cy="50659"/>
           </a:xfrm>
           <a:prstGeom prst="roundRect">
             <a:avLst>
@@ -9254,8 +9254,8 @@
         </p:nvSpPr>
         <p:spPr>
           <a:xfrm>
-            <a:off x="6246862" y="2297879"/>
-            <a:ext cx="86411" cy="71323"/>
+            <a:off x="5761622" y="1658630"/>
+            <a:ext cx="61376" cy="50659"/>
           </a:xfrm>
           <a:prstGeom prst="roundRect">
             <a:avLst>
@@ -9276,8 +9276,8 @@
         </p:nvSpPr>
         <p:spPr>
           <a:xfrm>
-            <a:off x="6373368" y="1883664"/>
-            <a:ext cx="2103120" cy="731520"/>
+            <a:off x="5851476" y="1364422"/>
+            <a:ext cx="1493805" cy="519584"/>
           </a:xfrm>
           <a:prstGeom prst="rect">
             <a:avLst/>
@@ -9296,7 +9296,7 @@
               <a:buNone/>
             </a:pPr>
             <a:r>
-              <a:rPr lang="en-US" sz="1300" b="1" dirty="0">
+              <a:rPr lang="en-US" sz="920" b="1" dirty="0">
                 <a:solidFill>
                   <a:srgbClr val="A32C25"/>
                 </a:solidFill>
@@ -9306,7 +9306,7 @@
               </a:rPr>
               <a:t>Vậy cứ mua AT128 cho mọi xe là xong?</a:t>
             </a:r>
-            <a:endParaRPr lang="en-US" sz="1300" dirty="0"/>
+            <a:endParaRPr lang="en-US" sz="920" dirty="0"/>
           </a:p>
           <a:p>
             <a:pPr indent="0" marL="0">
@@ -9316,7 +9316,7 @@
               <a:buNone/>
             </a:pPr>
             <a:r>
-              <a:rPr lang="en-US" sz="1100" dirty="0">
+              <a:rPr lang="en-US" sz="780" dirty="0">
                 <a:solidFill>
                   <a:srgbClr val="A32C25"/>
                 </a:solidFill>
@@ -9326,7 +9326,7 @@
               </a:rPr>
               <a:t>那每台車都買 AT128 就好了？</a:t>
             </a:r>
-            <a:endParaRPr lang="en-US" sz="1300" dirty="0"/>
+            <a:endParaRPr lang="en-US" sz="920" dirty="0"/>
           </a:p>
         </p:txBody>
       </p:sp>
@@ -9338,8 +9338,8 @@
         </p:nvSpPr>
         <p:spPr>
           <a:xfrm>
-            <a:off x="5239512" y="3017520"/>
-            <a:ext cx="3236976" cy="402336"/>
+            <a:off x="5046121" y="2169777"/>
+            <a:ext cx="2299161" cy="285771"/>
           </a:xfrm>
           <a:prstGeom prst="rect">
             <a:avLst/>
@@ -9358,7 +9358,7 @@
               <a:buNone/>
             </a:pPr>
             <a:r>
-              <a:rPr lang="en-US" sz="1000" b="1" dirty="0">
+              <a:rPr lang="en-US" sz="710" b="1" dirty="0">
                 <a:solidFill>
                   <a:srgbClr val="A32C25"/>
                 </a:solidFill>
@@ -9368,7 +9368,7 @@
               </a:rPr>
               <a:t>Giá, điện, chỗ lắp — và nó chỉ thấy 120° phía trước</a:t>
             </a:r>
-            <a:endParaRPr lang="en-US" sz="1000" dirty="0"/>
+            <a:endParaRPr lang="en-US" sz="710" dirty="0"/>
           </a:p>
           <a:p>
             <a:pPr indent="0" marL="0">
@@ -9378,7 +9378,7 @@
               <a:buNone/>
             </a:pPr>
             <a:r>
-              <a:rPr lang="en-US" sz="900" dirty="0">
+              <a:rPr lang="en-US" sz="640" dirty="0">
                 <a:solidFill>
                   <a:srgbClr val="A32C25"/>
                 </a:solidFill>
@@ -9388,7 +9388,7 @@
               </a:rPr>
               <a:t>價錢、功耗、裝不裝得下——而且它只看前面 120 度</a:t>
             </a:r>
-            <a:endParaRPr lang="en-US" sz="1000" dirty="0"/>
+            <a:endParaRPr lang="en-US" sz="710" dirty="0"/>
           </a:p>
         </p:txBody>
       </p:sp>
@@ -9400,8 +9400,8 @@
         </p:nvSpPr>
         <p:spPr>
           <a:xfrm>
-            <a:off x="502920" y="3913632"/>
-            <a:ext cx="8138160" cy="603504"/>
+            <a:off x="1681812" y="2806268"/>
+            <a:ext cx="5780375" cy="428657"/>
           </a:xfrm>
           <a:prstGeom prst="roundRect">
             <a:avLst>
@@ -9427,8 +9427,8 @@
         </p:nvSpPr>
         <p:spPr>
           <a:xfrm>
-            <a:off x="685800" y="3977640"/>
-            <a:ext cx="7772400" cy="493776"/>
+            <a:off x="1811708" y="2851732"/>
+            <a:ext cx="5520583" cy="350719"/>
           </a:xfrm>
           <a:prstGeom prst="rect">
             <a:avLst/>
@@ -9447,7 +9447,7 @@
               <a:buNone/>
             </a:pPr>
             <a:r>
-              <a:rPr lang="en-US" sz="1200" b="1" dirty="0">
+              <a:rPr lang="en-US" sz="850" b="1" dirty="0">
                 <a:solidFill>
                   <a:srgbClr val="7A4E00"/>
                 </a:solidFill>
@@ -9457,7 +9457,7 @@
               </a:rPr>
               <a:t>Chọn cảm biến không phải chọn cái tốt nhất, mà là chọn tổ hợp vừa đủ cho ODD của mình.</a:t>
             </a:r>
-            <a:endParaRPr lang="en-US" sz="1200" dirty="0"/>
+            <a:endParaRPr lang="en-US" sz="850" dirty="0"/>
           </a:p>
           <a:p>
             <a:pPr indent="0" marL="0">
@@ -9467,7 +9467,7 @@
               <a:buNone/>
             </a:pPr>
             <a:r>
-              <a:rPr lang="en-US" sz="1100" dirty="0">
+              <a:rPr lang="en-US" sz="780" dirty="0">
                 <a:solidFill>
                   <a:srgbClr val="7A4E00"/>
                 </a:solidFill>
@@ -9477,7 +9477,7 @@
               </a:rPr>
               <a:t>選感測器不是選最好的那一顆，是選一組剛好夠用的——夠用於你自己的 ODD。</a:t>
             </a:r>
-            <a:endParaRPr lang="en-US" sz="1200" dirty="0"/>
+            <a:endParaRPr lang="en-US" sz="850" dirty="0"/>
           </a:p>
         </p:txBody>
       </p:sp>
@@ -9497,8 +9497,8 @@
         </p:blipFill>
         <p:spPr>
           <a:xfrm>
-            <a:off x="7516368" y="4718304"/>
-            <a:ext cx="1097280" cy="242439"/>
+            <a:off x="6663327" y="3338842"/>
+            <a:ext cx="779376" cy="172200"/>
           </a:xfrm>
           <a:prstGeom prst="rect">
             <a:avLst/>
@@ -9513,8 +9513,8 @@
         </p:nvSpPr>
         <p:spPr>
           <a:xfrm>
-            <a:off x="109728" y="4791456"/>
-            <a:ext cx="822960" cy="256032"/>
+            <a:off x="1402536" y="3390800"/>
+            <a:ext cx="584532" cy="181855"/>
           </a:xfrm>
           <a:prstGeom prst="rect">
             <a:avLst/>
@@ -9530,7 +9530,7 @@
               <a:buNone/>
             </a:pPr>
             <a:r>
-              <a:rPr lang="en-US" sz="900" dirty="0">
+              <a:rPr lang="en-US" sz="640" dirty="0">
                 <a:solidFill>
                   <a:srgbClr val="5F7183"/>
                 </a:solidFill>
@@ -9540,7 +9540,7 @@
               </a:rPr>
               <a:t>6 / 9</a:t>
             </a:r>
-            <a:endParaRPr lang="en-US" sz="900" dirty="0"/>
+            <a:endParaRPr lang="en-US" sz="640" dirty="0"/>
           </a:p>
         </p:txBody>
       </p:sp>
@@ -9552,8 +9552,8 @@
         </p:nvSpPr>
         <p:spPr>
           <a:xfrm>
-            <a:off x="960120" y="4791456"/>
-            <a:ext cx="2011680" cy="256032"/>
+            <a:off x="2006553" y="3390800"/>
+            <a:ext cx="1428857" cy="181855"/>
           </a:xfrm>
           <a:prstGeom prst="rect">
             <a:avLst/>
@@ -9569,7 +9569,7 @@
               <a:buNone/>
             </a:pPr>
             <a:r>
-              <a:rPr lang="en-US" sz="900" dirty="0">
+              <a:rPr lang="en-US" sz="640" dirty="0">
                 <a:solidFill>
                   <a:srgbClr val="5F7183"/>
                 </a:solidFill>
@@ -9579,7 +9579,7 @@
               </a:rPr>
               <a:t>Tiết 3 · 第 3 節</a:t>
             </a:r>
-            <a:endParaRPr lang="en-US" sz="900" dirty="0"/>
+            <a:endParaRPr lang="en-US" sz="640" dirty="0"/>
           </a:p>
         </p:txBody>
       </p:sp>
@@ -9623,8 +9623,8 @@
         </p:nvSpPr>
         <p:spPr>
           <a:xfrm>
-            <a:off x="6766560" y="-1371600"/>
-            <a:ext cx="4206240" cy="4206240"/>
+            <a:off x="6130753" y="-947729"/>
+            <a:ext cx="2987610" cy="2987610"/>
           </a:xfrm>
           <a:prstGeom prst="ellipse">
             <a:avLst/>
@@ -9648,8 +9648,8 @@
         </p:nvSpPr>
         <p:spPr>
           <a:xfrm>
-            <a:off x="7863840" y="3108960"/>
-            <a:ext cx="2560320" cy="2560320"/>
+            <a:off x="7104973" y="1520297"/>
+            <a:ext cx="1688649" cy="1688649"/>
           </a:xfrm>
           <a:prstGeom prst="ellipse">
             <a:avLst/>
@@ -9670,8 +9670,8 @@
         </p:nvSpPr>
         <p:spPr>
           <a:xfrm>
-            <a:off x="502920" y="475488"/>
-            <a:ext cx="6766560" cy="274320"/>
+            <a:off x="1681812" y="364222"/>
+            <a:ext cx="4806155" cy="194844"/>
           </a:xfrm>
           <a:prstGeom prst="rect">
             <a:avLst/>
@@ -9687,7 +9687,7 @@
               <a:buNone/>
             </a:pPr>
             <a:r>
-              <a:rPr lang="en-US" sz="1250" b="1" dirty="0">
+              <a:rPr lang="en-US" sz="890" b="1" dirty="0">
                 <a:solidFill>
                   <a:srgbClr val="FFB020"/>
                 </a:solidFill>
@@ -9697,7 +9697,7 @@
               </a:rPr>
               <a:t>Hoạt động · 這句話對不對（每題 1 分鐘）</a:t>
             </a:r>
-            <a:endParaRPr lang="en-US" sz="1250" dirty="0"/>
+            <a:endParaRPr lang="en-US" sz="890" dirty="0"/>
           </a:p>
         </p:txBody>
       </p:sp>
@@ -9709,8 +9709,8 @@
         </p:nvSpPr>
         <p:spPr>
           <a:xfrm>
-            <a:off x="502920" y="786384"/>
-            <a:ext cx="8046720" cy="1225296"/>
+            <a:off x="1681812" y="585045"/>
+            <a:ext cx="5715427" cy="870304"/>
           </a:xfrm>
           <a:prstGeom prst="rect">
             <a:avLst/>
@@ -9729,7 +9729,7 @@
               <a:buNone/>
             </a:pPr>
             <a:r>
-              <a:rPr lang="en-US" sz="2300" b="1" dirty="0">
+              <a:rPr lang="en-US" sz="1630" b="1" dirty="0">
                 <a:solidFill>
                   <a:srgbClr val="FFFFFF"/>
                 </a:solidFill>
@@ -9739,7 +9739,7 @@
               </a:rPr>
               <a:t>Bốn câu dưới đây. Đúng hay sai, nói một câu lý do.</a:t>
             </a:r>
-            <a:endParaRPr lang="en-US" sz="2300" dirty="0"/>
+            <a:endParaRPr lang="en-US" sz="1630" dirty="0"/>
           </a:p>
           <a:p>
             <a:pPr indent="0" marL="0">
@@ -9749,7 +9749,7 @@
               <a:buNone/>
             </a:pPr>
             <a:r>
-              <a:rPr lang="en-US" sz="1500" dirty="0">
+              <a:rPr lang="en-US" sz="1070" dirty="0">
                 <a:solidFill>
                   <a:srgbClr val="AFC3D4"/>
                 </a:solidFill>
@@ -9759,7 +9759,7 @@
               </a:rPr>
               <a:t>下面四句話。對或錯，再說一句理由。</a:t>
             </a:r>
-            <a:endParaRPr lang="en-US" sz="2300" dirty="0"/>
+            <a:endParaRPr lang="en-US" sz="1630" dirty="0"/>
           </a:p>
         </p:txBody>
       </p:sp>
@@ -9771,8 +9771,8 @@
         </p:nvSpPr>
         <p:spPr>
           <a:xfrm>
-            <a:off x="502920" y="1737360"/>
-            <a:ext cx="8138160" cy="621792"/>
+            <a:off x="1681812" y="1260505"/>
+            <a:ext cx="5780375" cy="441647"/>
           </a:xfrm>
           <a:prstGeom prst="roundRect">
             <a:avLst>
@@ -9793,8 +9793,8 @@
         </p:nvSpPr>
         <p:spPr>
           <a:xfrm>
-            <a:off x="667512" y="1883664"/>
-            <a:ext cx="329184" cy="329184"/>
+            <a:off x="1798719" y="1364422"/>
+            <a:ext cx="233813" cy="233813"/>
           </a:xfrm>
           <a:prstGeom prst="ellipse">
             <a:avLst/>
@@ -9813,8 +9813,8 @@
         </p:nvSpPr>
         <p:spPr>
           <a:xfrm>
-            <a:off x="667512" y="1911096"/>
-            <a:ext cx="329184" cy="274320"/>
+            <a:off x="1798719" y="1383906"/>
+            <a:ext cx="233813" cy="194844"/>
           </a:xfrm>
           <a:prstGeom prst="rect">
             <a:avLst/>
@@ -9830,7 +9830,7 @@
               <a:buNone/>
             </a:pPr>
             <a:r>
-              <a:rPr lang="en-US" sz="1200" b="1" dirty="0">
+              <a:rPr lang="en-US" sz="850" b="1" dirty="0">
                 <a:solidFill>
                   <a:srgbClr val="FFFFFF"/>
                 </a:solidFill>
@@ -9840,7 +9840,7 @@
               </a:rPr>
               <a:t>1</a:t>
             </a:r>
-            <a:endParaRPr lang="en-US" sz="1200" dirty="0"/>
+            <a:endParaRPr lang="en-US" sz="850" dirty="0"/>
           </a:p>
         </p:txBody>
       </p:sp>
@@ -9852,8 +9852,8 @@
         </p:nvSpPr>
         <p:spPr>
           <a:xfrm>
-            <a:off x="1161288" y="1783080"/>
-            <a:ext cx="7296912" cy="548640"/>
+            <a:off x="2149438" y="1292979"/>
+            <a:ext cx="5182853" cy="389688"/>
           </a:xfrm>
           <a:prstGeom prst="rect">
             <a:avLst/>
@@ -9872,7 +9872,7 @@
               <a:buNone/>
             </a:pPr>
             <a:r>
-              <a:rPr lang="en-US" sz="1250" b="1" dirty="0">
+              <a:rPr lang="en-US" sz="890" b="1" dirty="0">
                 <a:solidFill>
                   <a:srgbClr val="FFFFFF"/>
                 </a:solidFill>
@@ -9882,7 +9882,7 @@
               </a:rPr>
               <a:t>① Datasheet ghi «tầm 200 m» thì nghĩa là cái gì ở 200 m cũng thấy.</a:t>
             </a:r>
-            <a:endParaRPr lang="en-US" sz="1250" dirty="0"/>
+            <a:endParaRPr lang="en-US" sz="890" dirty="0"/>
           </a:p>
           <a:p>
             <a:pPr indent="0" marL="0">
@@ -9892,7 +9892,7 @@
               <a:buNone/>
             </a:pPr>
             <a:r>
-              <a:rPr lang="en-US" sz="1150" dirty="0">
+              <a:rPr lang="en-US" sz="820" dirty="0">
                 <a:solidFill>
                   <a:srgbClr val="AFC3D4"/>
                 </a:solidFill>
@@ -9902,7 +9902,7 @@
               </a:rPr>
               <a:t>① 規格表寫「測距 200 公尺」，就表示 200 公尺內的東西都看得到。</a:t>
             </a:r>
-            <a:endParaRPr lang="en-US" sz="1250" dirty="0"/>
+            <a:endParaRPr lang="en-US" sz="890" dirty="0"/>
           </a:p>
         </p:txBody>
       </p:sp>
@@ -9914,8 +9914,8 @@
         </p:nvSpPr>
         <p:spPr>
           <a:xfrm>
-            <a:off x="502920" y="2450592"/>
-            <a:ext cx="8138160" cy="621792"/>
+            <a:off x="1681812" y="1767099"/>
+            <a:ext cx="5780375" cy="441647"/>
           </a:xfrm>
           <a:prstGeom prst="roundRect">
             <a:avLst>
@@ -9936,8 +9936,8 @@
         </p:nvSpPr>
         <p:spPr>
           <a:xfrm>
-            <a:off x="667512" y="2596896"/>
-            <a:ext cx="329184" cy="329184"/>
+            <a:off x="1798719" y="1871016"/>
+            <a:ext cx="233813" cy="233813"/>
           </a:xfrm>
           <a:prstGeom prst="ellipse">
             <a:avLst/>
@@ -9956,8 +9956,8 @@
         </p:nvSpPr>
         <p:spPr>
           <a:xfrm>
-            <a:off x="667512" y="2624328"/>
-            <a:ext cx="329184" cy="274320"/>
+            <a:off x="1798719" y="1890501"/>
+            <a:ext cx="233813" cy="194844"/>
           </a:xfrm>
           <a:prstGeom prst="rect">
             <a:avLst/>
@@ -9973,7 +9973,7 @@
               <a:buNone/>
             </a:pPr>
             <a:r>
-              <a:rPr lang="en-US" sz="1200" b="1" dirty="0">
+              <a:rPr lang="en-US" sz="850" b="1" dirty="0">
                 <a:solidFill>
                   <a:srgbClr val="FFFFFF"/>
                 </a:solidFill>
@@ -9983,7 +9983,7 @@
               </a:rPr>
               <a:t>2</a:t>
             </a:r>
-            <a:endParaRPr lang="en-US" sz="1200" dirty="0"/>
+            <a:endParaRPr lang="en-US" sz="850" dirty="0"/>
           </a:p>
         </p:txBody>
       </p:sp>
@@ -9995,8 +9995,8 @@
         </p:nvSpPr>
         <p:spPr>
           <a:xfrm>
-            <a:off x="1161288" y="2496312"/>
-            <a:ext cx="7296912" cy="548640"/>
+            <a:off x="2149438" y="1799573"/>
+            <a:ext cx="5182853" cy="389688"/>
           </a:xfrm>
           <a:prstGeom prst="rect">
             <a:avLst/>
@@ -10015,7 +10015,7 @@
               <a:buNone/>
             </a:pPr>
             <a:r>
-              <a:rPr lang="en-US" sz="1250" b="1" dirty="0">
+              <a:rPr lang="en-US" sz="890" b="1" dirty="0">
                 <a:solidFill>
                   <a:srgbClr val="FFFFFF"/>
                 </a:solidFill>
@@ -10025,7 +10025,7 @@
               </a:rPr>
               <a:t>② Cùng một cảm biến ảnh thì góc nhìn là cố định.</a:t>
             </a:r>
-            <a:endParaRPr lang="en-US" sz="1250" dirty="0"/>
+            <a:endParaRPr lang="en-US" sz="890" dirty="0"/>
           </a:p>
           <a:p>
             <a:pPr indent="0" marL="0">
@@ -10035,7 +10035,7 @@
               <a:buNone/>
             </a:pPr>
             <a:r>
-              <a:rPr lang="en-US" sz="1150" dirty="0">
+              <a:rPr lang="en-US" sz="820" dirty="0">
                 <a:solidFill>
                   <a:srgbClr val="AFC3D4"/>
                 </a:solidFill>
@@ -10045,7 +10045,7 @@
               </a:rPr>
               <a:t>② 同一顆影像感測器，視野是固定的。</a:t>
             </a:r>
-            <a:endParaRPr lang="en-US" sz="1250" dirty="0"/>
+            <a:endParaRPr lang="en-US" sz="890" dirty="0"/>
           </a:p>
         </p:txBody>
       </p:sp>
@@ -10057,8 +10057,8 @@
         </p:nvSpPr>
         <p:spPr>
           <a:xfrm>
-            <a:off x="502920" y="3163824"/>
-            <a:ext cx="8138160" cy="621792"/>
+            <a:off x="1681812" y="2273694"/>
+            <a:ext cx="5780375" cy="441647"/>
           </a:xfrm>
           <a:prstGeom prst="roundRect">
             <a:avLst>
@@ -10079,8 +10079,8 @@
         </p:nvSpPr>
         <p:spPr>
           <a:xfrm>
-            <a:off x="667512" y="3310128"/>
-            <a:ext cx="329184" cy="329184"/>
+            <a:off x="1798719" y="2377611"/>
+            <a:ext cx="233813" cy="233813"/>
           </a:xfrm>
           <a:prstGeom prst="ellipse">
             <a:avLst/>
@@ -10099,8 +10099,8 @@
         </p:nvSpPr>
         <p:spPr>
           <a:xfrm>
-            <a:off x="667512" y="3337560"/>
-            <a:ext cx="329184" cy="274320"/>
+            <a:off x="1798719" y="2397095"/>
+            <a:ext cx="233813" cy="194844"/>
           </a:xfrm>
           <a:prstGeom prst="rect">
             <a:avLst/>
@@ -10116,7 +10116,7 @@
               <a:buNone/>
             </a:pPr>
             <a:r>
-              <a:rPr lang="en-US" sz="1200" b="1" dirty="0">
+              <a:rPr lang="en-US" sz="850" b="1" dirty="0">
                 <a:solidFill>
                   <a:srgbClr val="FFFFFF"/>
                 </a:solidFill>
@@ -10126,7 +10126,7 @@
               </a:rPr>
               <a:t>3</a:t>
             </a:r>
-            <a:endParaRPr lang="en-US" sz="1200" dirty="0"/>
+            <a:endParaRPr lang="en-US" sz="850" dirty="0"/>
           </a:p>
         </p:txBody>
       </p:sp>
@@ -10138,8 +10138,8 @@
         </p:nvSpPr>
         <p:spPr>
           <a:xfrm>
-            <a:off x="1161288" y="3209544"/>
-            <a:ext cx="7296912" cy="548640"/>
+            <a:off x="2149438" y="2306168"/>
+            <a:ext cx="5182853" cy="389688"/>
           </a:xfrm>
           <a:prstGeom prst="rect">
             <a:avLst/>
@@ -10158,7 +10158,7 @@
               <a:buNone/>
             </a:pPr>
             <a:r>
-              <a:rPr lang="en-US" sz="1250" b="1" dirty="0">
+              <a:rPr lang="en-US" sz="890" b="1" dirty="0">
                 <a:solidFill>
                   <a:srgbClr val="FFFFFF"/>
                 </a:solidFill>
@@ -10168,7 +10168,7 @@
               </a:rPr>
               <a:t>③ Số điểm mỗi giây càng lớn thì nhìn người ở xa càng rõ.</a:t>
             </a:r>
-            <a:endParaRPr lang="en-US" sz="1250" dirty="0"/>
+            <a:endParaRPr lang="en-US" sz="890" dirty="0"/>
           </a:p>
           <a:p>
             <a:pPr indent="0" marL="0">
@@ -10178,7 +10178,7 @@
               <a:buNone/>
             </a:pPr>
             <a:r>
-              <a:rPr lang="en-US" sz="1150" dirty="0">
+              <a:rPr lang="en-US" sz="820" dirty="0">
                 <a:solidFill>
                   <a:srgbClr val="AFC3D4"/>
                 </a:solidFill>
@@ -10188,7 +10188,7 @@
               </a:rPr>
               <a:t>③ 每秒點數愈大，遠處的人就看得愈清楚。</a:t>
             </a:r>
-            <a:endParaRPr lang="en-US" sz="1250" dirty="0"/>
+            <a:endParaRPr lang="en-US" sz="890" dirty="0"/>
           </a:p>
         </p:txBody>
       </p:sp>
@@ -10200,8 +10200,8 @@
         </p:nvSpPr>
         <p:spPr>
           <a:xfrm>
-            <a:off x="502920" y="3913632"/>
-            <a:ext cx="8046720" cy="457200"/>
+            <a:off x="1681812" y="2806268"/>
+            <a:ext cx="5715427" cy="324740"/>
           </a:xfrm>
           <a:prstGeom prst="rect">
             <a:avLst/>
@@ -10220,7 +10220,7 @@
               <a:buNone/>
             </a:pPr>
             <a:r>
-              <a:rPr lang="en-US" sz="1250" b="1" dirty="0">
+              <a:rPr lang="en-US" sz="890" b="1" dirty="0">
                 <a:solidFill>
                   <a:srgbClr val="FFB020"/>
                 </a:solidFill>
@@ -10230,7 +10230,7 @@
               </a:rPr>
               <a:t>④ Hai cảm biến đều tốt thì ghép lại chắc chắn tốt.</a:t>
             </a:r>
-            <a:endParaRPr lang="en-US" sz="1250" dirty="0"/>
+            <a:endParaRPr lang="en-US" sz="890" dirty="0"/>
           </a:p>
           <a:p>
             <a:pPr indent="0" marL="0">
@@ -10240,7 +10240,7 @@
               <a:buNone/>
             </a:pPr>
             <a:r>
-              <a:rPr lang="en-US" sz="1150" dirty="0">
+              <a:rPr lang="en-US" sz="820" dirty="0">
                 <a:solidFill>
                   <a:srgbClr val="FFB020"/>
                 </a:solidFill>
@@ -10250,7 +10250,7 @@
               </a:rPr>
               <a:t>④ 兩顆感測器各自都好，合起來就一定好。</a:t>
             </a:r>
-            <a:endParaRPr lang="en-US" sz="1250" dirty="0"/>
+            <a:endParaRPr lang="en-US" sz="890" dirty="0"/>
           </a:p>
         </p:txBody>
       </p:sp>
@@ -10262,8 +10262,8 @@
         </p:nvSpPr>
         <p:spPr>
           <a:xfrm>
-            <a:off x="109728" y="4791456"/>
-            <a:ext cx="822960" cy="256032"/>
+            <a:off x="1402536" y="3390800"/>
+            <a:ext cx="584532" cy="181855"/>
           </a:xfrm>
           <a:prstGeom prst="rect">
             <a:avLst/>
@@ -10279,7 +10279,7 @@
               <a:buNone/>
             </a:pPr>
             <a:r>
-              <a:rPr lang="en-US" sz="900" dirty="0">
+              <a:rPr lang="en-US" sz="640" dirty="0">
                 <a:solidFill>
                   <a:srgbClr val="9FB3C8"/>
                 </a:solidFill>
@@ -10289,7 +10289,7 @@
               </a:rPr>
               <a:t>7 / 9</a:t>
             </a:r>
-            <a:endParaRPr lang="en-US" sz="900" dirty="0"/>
+            <a:endParaRPr lang="en-US" sz="640" dirty="0"/>
           </a:p>
         </p:txBody>
       </p:sp>
@@ -10301,8 +10301,8 @@
         </p:nvSpPr>
         <p:spPr>
           <a:xfrm>
-            <a:off x="960120" y="4791456"/>
-            <a:ext cx="2011680" cy="256032"/>
+            <a:off x="2006553" y="3390800"/>
+            <a:ext cx="1428857" cy="181855"/>
           </a:xfrm>
           <a:prstGeom prst="rect">
             <a:avLst/>
@@ -10318,7 +10318,7 @@
               <a:buNone/>
             </a:pPr>
             <a:r>
-              <a:rPr lang="en-US" sz="900" dirty="0">
+              <a:rPr lang="en-US" sz="640" dirty="0">
                 <a:solidFill>
                   <a:srgbClr val="9FB3C8"/>
                 </a:solidFill>
@@ -10328,7 +10328,7 @@
               </a:rPr>
               <a:t>Tiết 3 · 第 3 節</a:t>
             </a:r>
-            <a:endParaRPr lang="en-US" sz="900" dirty="0"/>
+            <a:endParaRPr lang="en-US" sz="640" dirty="0"/>
           </a:p>
         </p:txBody>
       </p:sp>
@@ -10372,8 +10372,8 @@
         </p:nvSpPr>
         <p:spPr>
           <a:xfrm>
-            <a:off x="6766560" y="-1371600"/>
-            <a:ext cx="4206240" cy="4206240"/>
+            <a:off x="6130753" y="-947729"/>
+            <a:ext cx="2987610" cy="2987610"/>
           </a:xfrm>
           <a:prstGeom prst="ellipse">
             <a:avLst/>
@@ -10397,8 +10397,8 @@
         </p:nvSpPr>
         <p:spPr>
           <a:xfrm>
-            <a:off x="7863840" y="3108960"/>
-            <a:ext cx="2560320" cy="2560320"/>
+            <a:off x="7104973" y="1520297"/>
+            <a:ext cx="1688649" cy="1688649"/>
           </a:xfrm>
           <a:prstGeom prst="ellipse">
             <a:avLst/>
@@ -10419,8 +10419,8 @@
         </p:nvSpPr>
         <p:spPr>
           <a:xfrm>
-            <a:off x="502920" y="475488"/>
-            <a:ext cx="6766560" cy="274320"/>
+            <a:off x="1681812" y="364222"/>
+            <a:ext cx="4806155" cy="194844"/>
           </a:xfrm>
           <a:prstGeom prst="rect">
             <a:avLst/>
@@ -10436,7 +10436,7 @@
               <a:buNone/>
             </a:pPr>
             <a:r>
-              <a:rPr lang="en-US" sz="1250" b="1" dirty="0">
+              <a:rPr lang="en-US" sz="890" b="1" dirty="0">
                 <a:solidFill>
                   <a:srgbClr val="FFB020"/>
                 </a:solidFill>
@@ -10446,7 +10446,7 @@
               </a:rPr>
               <a:t>Đáp án · 答案：四句都錯</a:t>
             </a:r>
-            <a:endParaRPr lang="en-US" sz="1250" dirty="0"/>
+            <a:endParaRPr lang="en-US" sz="890" dirty="0"/>
           </a:p>
         </p:txBody>
       </p:sp>
@@ -10458,8 +10458,8 @@
         </p:nvSpPr>
         <p:spPr>
           <a:xfrm>
-            <a:off x="502920" y="822960"/>
-            <a:ext cx="8046720" cy="1060704"/>
+            <a:off x="1681812" y="611024"/>
+            <a:ext cx="5715427" cy="753397"/>
           </a:xfrm>
           <a:prstGeom prst="rect">
             <a:avLst/>
@@ -10478,7 +10478,7 @@
               <a:buNone/>
             </a:pPr>
             <a:r>
-              <a:rPr lang="en-US" sz="2500" b="1" dirty="0">
+              <a:rPr lang="en-US" sz="1780" b="1" dirty="0">
                 <a:solidFill>
                   <a:srgbClr val="FFFFFF"/>
                 </a:solidFill>
@@ -10488,7 +10488,7 @@
               </a:rPr>
               <a:t>Bốn câu đều sai</a:t>
             </a:r>
-            <a:endParaRPr lang="en-US" sz="2500" dirty="0"/>
+            <a:endParaRPr lang="en-US" sz="1780" dirty="0"/>
           </a:p>
           <a:p>
             <a:pPr indent="0" marL="0">
@@ -10498,7 +10498,7 @@
               <a:buNone/>
             </a:pPr>
             <a:r>
-              <a:rPr lang="en-US" sz="1500" dirty="0">
+              <a:rPr lang="en-US" sz="1070" dirty="0">
                 <a:solidFill>
                   <a:srgbClr val="AFC3D4"/>
                 </a:solidFill>
@@ -10508,7 +10508,7 @@
               </a:rPr>
               <a:t>四句都錯</a:t>
             </a:r>
-            <a:endParaRPr lang="en-US" sz="2500" dirty="0"/>
+            <a:endParaRPr lang="en-US" sz="1780" dirty="0"/>
           </a:p>
         </p:txBody>
       </p:sp>
@@ -10520,8 +10520,8 @@
         </p:nvSpPr>
         <p:spPr>
           <a:xfrm>
-            <a:off x="502920" y="1773936"/>
-            <a:ext cx="45720" cy="512064"/>
+            <a:off x="1681812" y="1286484"/>
+            <a:ext cx="32474" cy="363709"/>
           </a:xfrm>
           <a:prstGeom prst="rect">
             <a:avLst/>
@@ -10540,8 +10540,8 @@
         </p:nvSpPr>
         <p:spPr>
           <a:xfrm>
-            <a:off x="722376" y="1737360"/>
-            <a:ext cx="7863840" cy="621792"/>
+            <a:off x="1837688" y="1260505"/>
+            <a:ext cx="5585531" cy="441647"/>
           </a:xfrm>
           <a:prstGeom prst="rect">
             <a:avLst/>
@@ -10560,7 +10560,7 @@
               <a:buNone/>
             </a:pPr>
             <a:r>
-              <a:rPr lang="en-US" sz="1350" b="1" dirty="0">
+              <a:rPr lang="en-US" sz="960" b="1" dirty="0">
                 <a:solidFill>
                   <a:srgbClr val="FFFFFF"/>
                 </a:solidFill>
@@ -10570,7 +10570,7 @@
               </a:rPr>
               <a:t>① Hỏi: phản xạ bao nhiêu? OS1: trắng 170 m, đen 90 m.</a:t>
             </a:r>
-            <a:endParaRPr lang="en-US" sz="1350" dirty="0"/>
+            <a:endParaRPr lang="en-US" sz="960" dirty="0"/>
           </a:p>
           <a:p>
             <a:pPr indent="0" marL="0">
@@ -10580,7 +10580,7 @@
               <a:buNone/>
             </a:pPr>
             <a:r>
-              <a:rPr lang="en-US" sz="1200" dirty="0">
+              <a:rPr lang="en-US" sz="850" dirty="0">
                 <a:solidFill>
                   <a:srgbClr val="AFC3D4"/>
                 </a:solidFill>
@@ -10590,7 +10590,7 @@
               </a:rPr>
               <a:t>① 要追問：對什麼反射率？OS1 對白色 170 公尺，對黑色 90。</a:t>
             </a:r>
-            <a:endParaRPr lang="en-US" sz="1350" dirty="0"/>
+            <a:endParaRPr lang="en-US" sz="960" dirty="0"/>
           </a:p>
         </p:txBody>
       </p:sp>
@@ -10602,8 +10602,8 @@
         </p:nvSpPr>
         <p:spPr>
           <a:xfrm>
-            <a:off x="502920" y="2487168"/>
-            <a:ext cx="45720" cy="512064"/>
+            <a:off x="1681812" y="1793079"/>
+            <a:ext cx="32474" cy="363709"/>
           </a:xfrm>
           <a:prstGeom prst="rect">
             <a:avLst/>
@@ -10622,8 +10622,8 @@
         </p:nvSpPr>
         <p:spPr>
           <a:xfrm>
-            <a:off x="722376" y="2450592"/>
-            <a:ext cx="7863840" cy="621792"/>
+            <a:off x="1837688" y="1767099"/>
+            <a:ext cx="5585531" cy="441647"/>
           </a:xfrm>
           <a:prstGeom prst="rect">
             <a:avLst/>
@@ -10642,7 +10642,7 @@
               <a:buNone/>
             </a:pPr>
             <a:r>
-              <a:rPr lang="en-US" sz="1350" b="1" dirty="0">
+              <a:rPr lang="en-US" sz="960" b="1" dirty="0">
                 <a:solidFill>
                   <a:srgbClr val="FFFFFF"/>
                 </a:solidFill>
@@ -10652,7 +10652,7 @@
               </a:rPr>
               <a:t>② Góc nhìn do ống kính: 8 mm → 42°, 3,6 mm → 81°.</a:t>
             </a:r>
-            <a:endParaRPr lang="en-US" sz="1350" dirty="0"/>
+            <a:endParaRPr lang="en-US" sz="960" dirty="0"/>
           </a:p>
           <a:p>
             <a:pPr indent="0" marL="0">
@@ -10662,7 +10662,7 @@
               <a:buNone/>
             </a:pPr>
             <a:r>
-              <a:rPr lang="en-US" sz="1200" dirty="0">
+              <a:rPr lang="en-US" sz="850" dirty="0">
                 <a:solidFill>
                   <a:srgbClr val="AFC3D4"/>
                 </a:solidFill>
@@ -10672,7 +10672,7 @@
               </a:rPr>
               <a:t>② 視野是鏡頭決定的：同一塊晶片，8 mm 是 42 度，3.6 mm 是 81 度。</a:t>
             </a:r>
-            <a:endParaRPr lang="en-US" sz="1350" dirty="0"/>
+            <a:endParaRPr lang="en-US" sz="960" dirty="0"/>
           </a:p>
         </p:txBody>
       </p:sp>
@@ -10684,8 +10684,8 @@
         </p:nvSpPr>
         <p:spPr>
           <a:xfrm>
-            <a:off x="502920" y="3200400"/>
-            <a:ext cx="45720" cy="512064"/>
+            <a:off x="1681812" y="2299673"/>
+            <a:ext cx="32474" cy="363709"/>
           </a:xfrm>
           <a:prstGeom prst="rect">
             <a:avLst/>
@@ -10704,8 +10704,8 @@
         </p:nvSpPr>
         <p:spPr>
           <a:xfrm>
-            <a:off x="722376" y="3163824"/>
-            <a:ext cx="7863840" cy="621792"/>
+            <a:off x="1837688" y="2273694"/>
+            <a:ext cx="5585531" cy="441647"/>
           </a:xfrm>
           <a:prstGeom prst="rect">
             <a:avLst/>
@@ -10724,7 +10724,7 @@
               <a:buNone/>
             </a:pPr>
             <a:r>
-              <a:rPr lang="en-US" sz="1350" b="1" dirty="0">
+              <a:rPr lang="en-US" sz="960" b="1" dirty="0">
                 <a:solidFill>
                   <a:srgbClr val="FFFFFF"/>
                 </a:solidFill>
@@ -10734,7 +10734,7 @@
               </a:rPr>
               <a:t>③ Điểm mỗi giây phải đổi ra góc mới dùng được.</a:t>
             </a:r>
-            <a:endParaRPr lang="en-US" sz="1350" dirty="0"/>
+            <a:endParaRPr lang="en-US" sz="960" dirty="0"/>
           </a:p>
           <a:p>
             <a:pPr indent="0" marL="0">
@@ -10744,7 +10744,7 @@
               <a:buNone/>
             </a:pPr>
             <a:r>
-              <a:rPr lang="en-US" sz="1200" dirty="0">
+              <a:rPr lang="en-US" sz="850" dirty="0">
                 <a:solidFill>
                   <a:srgbClr val="AFC3D4"/>
                 </a:solidFill>
@@ -10754,7 +10754,7 @@
               </a:rPr>
               <a:t>③ 每秒點數要先換算成角度才能用。</a:t>
             </a:r>
-            <a:endParaRPr lang="en-US" sz="1350" dirty="0"/>
+            <a:endParaRPr lang="en-US" sz="960" dirty="0"/>
           </a:p>
         </p:txBody>
       </p:sp>
@@ -10766,8 +10766,8 @@
         </p:nvSpPr>
         <p:spPr>
           <a:xfrm>
-            <a:off x="502920" y="3913632"/>
-            <a:ext cx="45720" cy="512064"/>
+            <a:off x="1681812" y="2806268"/>
+            <a:ext cx="32474" cy="363709"/>
           </a:xfrm>
           <a:prstGeom prst="rect">
             <a:avLst/>
@@ -10786,8 +10786,8 @@
         </p:nvSpPr>
         <p:spPr>
           <a:xfrm>
-            <a:off x="722376" y="3877056"/>
-            <a:ext cx="7863840" cy="621792"/>
+            <a:off x="1837688" y="2780289"/>
+            <a:ext cx="5585531" cy="441647"/>
           </a:xfrm>
           <a:prstGeom prst="rect">
             <a:avLst/>
@@ -10806,7 +10806,7 @@
               <a:buNone/>
             </a:pPr>
             <a:r>
-              <a:rPr lang="en-US" sz="1350" b="1" dirty="0">
+              <a:rPr lang="en-US" sz="960" b="1" dirty="0">
                 <a:solidFill>
                   <a:srgbClr val="FFFFFF"/>
                 </a:solidFill>
@@ -10816,7 +10816,7 @@
               </a:rPr>
               <a:t>④ Còn hiệu chuẩn và đồng bộ: 1° ở 50 m là gần 1 m.</a:t>
             </a:r>
-            <a:endParaRPr lang="en-US" sz="1350" dirty="0"/>
+            <a:endParaRPr lang="en-US" sz="960" dirty="0"/>
           </a:p>
           <a:p>
             <a:pPr indent="0" marL="0">
@@ -10826,7 +10826,7 @@
               <a:buNone/>
             </a:pPr>
             <a:r>
-              <a:rPr lang="en-US" sz="1200" dirty="0">
+              <a:rPr lang="en-US" sz="850" dirty="0">
                 <a:solidFill>
                   <a:srgbClr val="AFC3D4"/>
                 </a:solidFill>
@@ -10836,7 +10836,7 @@
               </a:rPr>
               <a:t>④ 還有標定和同步：差 1 度，50 公尺外差將近 1 公尺。</a:t>
             </a:r>
-            <a:endParaRPr lang="en-US" sz="1350" dirty="0"/>
+            <a:endParaRPr lang="en-US" sz="960" dirty="0"/>
           </a:p>
         </p:txBody>
       </p:sp>
@@ -10848,8 +10848,8 @@
         </p:nvSpPr>
         <p:spPr>
           <a:xfrm>
-            <a:off x="109728" y="4791456"/>
-            <a:ext cx="822960" cy="256032"/>
+            <a:off x="1402536" y="3390800"/>
+            <a:ext cx="584532" cy="181855"/>
           </a:xfrm>
           <a:prstGeom prst="rect">
             <a:avLst/>
@@ -10865,7 +10865,7 @@
               <a:buNone/>
             </a:pPr>
             <a:r>
-              <a:rPr lang="en-US" sz="900" dirty="0">
+              <a:rPr lang="en-US" sz="640" dirty="0">
                 <a:solidFill>
                   <a:srgbClr val="9FB3C8"/>
                 </a:solidFill>
@@ -10875,7 +10875,7 @@
               </a:rPr>
               <a:t>8 / 9</a:t>
             </a:r>
-            <a:endParaRPr lang="en-US" sz="900" dirty="0"/>
+            <a:endParaRPr lang="en-US" sz="640" dirty="0"/>
           </a:p>
         </p:txBody>
       </p:sp>
@@ -10887,8 +10887,8 @@
         </p:nvSpPr>
         <p:spPr>
           <a:xfrm>
-            <a:off x="960120" y="4791456"/>
-            <a:ext cx="2011680" cy="256032"/>
+            <a:off x="2006553" y="3390800"/>
+            <a:ext cx="1428857" cy="181855"/>
           </a:xfrm>
           <a:prstGeom prst="rect">
             <a:avLst/>
@@ -10904,7 +10904,7 @@
               <a:buNone/>
             </a:pPr>
             <a:r>
-              <a:rPr lang="en-US" sz="900" dirty="0">
+              <a:rPr lang="en-US" sz="640" dirty="0">
                 <a:solidFill>
                   <a:srgbClr val="9FB3C8"/>
                 </a:solidFill>
@@ -10914,7 +10914,7 @@
               </a:rPr>
               <a:t>Tiết 3 · 第 3 節</a:t>
             </a:r>
-            <a:endParaRPr lang="en-US" sz="900" dirty="0"/>
+            <a:endParaRPr lang="en-US" sz="640" dirty="0"/>
           </a:p>
         </p:txBody>
       </p:sp>
@@ -10958,8 +10958,8 @@
         </p:nvSpPr>
         <p:spPr>
           <a:xfrm>
-            <a:off x="6766560" y="-1371600"/>
-            <a:ext cx="4206240" cy="4206240"/>
+            <a:off x="6130753" y="-947729"/>
+            <a:ext cx="2987610" cy="2987610"/>
           </a:xfrm>
           <a:prstGeom prst="ellipse">
             <a:avLst/>
@@ -10983,8 +10983,8 @@
         </p:nvSpPr>
         <p:spPr>
           <a:xfrm>
-            <a:off x="7863840" y="3108960"/>
-            <a:ext cx="2560320" cy="2560320"/>
+            <a:off x="7104973" y="1520297"/>
+            <a:ext cx="1688649" cy="1688649"/>
           </a:xfrm>
           <a:prstGeom prst="ellipse">
             <a:avLst/>
@@ -11005,8 +11005,8 @@
         </p:nvSpPr>
         <p:spPr>
           <a:xfrm>
-            <a:off x="502920" y="475488"/>
-            <a:ext cx="6766560" cy="274320"/>
+            <a:off x="1681812" y="364222"/>
+            <a:ext cx="4806155" cy="194844"/>
           </a:xfrm>
           <a:prstGeom prst="rect">
             <a:avLst/>
@@ -11022,7 +11022,7 @@
               <a:buNone/>
             </a:pPr>
             <a:r>
-              <a:rPr lang="en-US" sz="1250" b="1" dirty="0">
+              <a:rPr lang="en-US" sz="890" b="1" dirty="0">
                 <a:solidFill>
                   <a:srgbClr val="FFB020"/>
                 </a:solidFill>
@@ -11032,7 +11032,7 @@
               </a:rPr>
               <a:t>Tuần sau · 下週預告</a:t>
             </a:r>
-            <a:endParaRPr lang="en-US" sz="1250" dirty="0"/>
+            <a:endParaRPr lang="en-US" sz="890" dirty="0"/>
           </a:p>
         </p:txBody>
       </p:sp>
@@ -11044,8 +11044,8 @@
         </p:nvSpPr>
         <p:spPr>
           <a:xfrm>
-            <a:off x="502920" y="822960"/>
-            <a:ext cx="8046720" cy="1060704"/>
+            <a:off x="1681812" y="611024"/>
+            <a:ext cx="5715427" cy="753397"/>
           </a:xfrm>
           <a:prstGeom prst="rect">
             <a:avLst/>
@@ -11064,7 +11064,7 @@
               <a:buNone/>
             </a:pPr>
             <a:r>
-              <a:rPr lang="en-US" sz="2500" b="1" dirty="0">
+              <a:rPr lang="en-US" sz="1780" b="1" dirty="0">
                 <a:solidFill>
                   <a:srgbClr val="FFFFFF"/>
                 </a:solidFill>
@@ -11074,7 +11074,7 @@
               </a:rPr>
               <a:t>Tuần 6, 15/10: radar, siêu âm, GNSS và IMU</a:t>
             </a:r>
-            <a:endParaRPr lang="en-US" sz="2500" dirty="0"/>
+            <a:endParaRPr lang="en-US" sz="1780" dirty="0"/>
           </a:p>
           <a:p>
             <a:pPr indent="0" marL="0">
@@ -11084,7 +11084,7 @@
               <a:buNone/>
             </a:pPr>
             <a:r>
-              <a:rPr lang="en-US" sz="1500" dirty="0">
+              <a:rPr lang="en-US" sz="1070" dirty="0">
                 <a:solidFill>
                   <a:srgbClr val="AFC3D4"/>
                 </a:solidFill>
@@ -11094,7 +11094,7 @@
               </a:rPr>
               <a:t>第 6 週，10 月 15 日：雷達、超音波、GNSS 與 IMU</a:t>
             </a:r>
-            <a:endParaRPr lang="en-US" sz="2500" dirty="0"/>
+            <a:endParaRPr lang="en-US" sz="1780" dirty="0"/>
           </a:p>
         </p:txBody>
       </p:sp>
@@ -11106,8 +11106,8 @@
         </p:nvSpPr>
         <p:spPr>
           <a:xfrm>
-            <a:off x="502920" y="1773936"/>
-            <a:ext cx="45720" cy="512064"/>
+            <a:off x="1681812" y="1286484"/>
+            <a:ext cx="32474" cy="363709"/>
           </a:xfrm>
           <a:prstGeom prst="rect">
             <a:avLst/>
@@ -11126,8 +11126,8 @@
         </p:nvSpPr>
         <p:spPr>
           <a:xfrm>
-            <a:off x="722376" y="1737360"/>
-            <a:ext cx="7863840" cy="621792"/>
+            <a:off x="1837688" y="1260505"/>
+            <a:ext cx="5585531" cy="441647"/>
           </a:xfrm>
           <a:prstGeom prst="rect">
             <a:avLst/>
@@ -11146,7 +11146,7 @@
               <a:buNone/>
             </a:pPr>
             <a:r>
-              <a:rPr lang="en-US" sz="1350" b="1" dirty="0">
+              <a:rPr lang="en-US" sz="960" b="1" dirty="0">
                 <a:solidFill>
                   <a:srgbClr val="FFFFFF"/>
                 </a:solidFill>
@@ -11156,7 +11156,7 @@
               </a:rPr>
               <a:t>Vẫn là đọc datasheet — nhưng ba loại này có những dòng hoàn toàn khác.</a:t>
             </a:r>
-            <a:endParaRPr lang="en-US" sz="1350" dirty="0"/>
+            <a:endParaRPr lang="en-US" sz="960" dirty="0"/>
           </a:p>
           <a:p>
             <a:pPr indent="0" marL="0">
@@ -11166,7 +11166,7 @@
               <a:buNone/>
             </a:pPr>
             <a:r>
-              <a:rPr lang="en-US" sz="1200" dirty="0">
+              <a:rPr lang="en-US" sz="850" dirty="0">
                 <a:solidFill>
                   <a:srgbClr val="AFC3D4"/>
                 </a:solidFill>
@@ -11176,7 +11176,7 @@
               </a:rPr>
               <a:t>一樣是讀規格表——但這三種的規格行完全不一樣。</a:t>
             </a:r>
-            <a:endParaRPr lang="en-US" sz="1350" dirty="0"/>
+            <a:endParaRPr lang="en-US" sz="960" dirty="0"/>
           </a:p>
         </p:txBody>
       </p:sp>
@@ -11188,8 +11188,8 @@
         </p:nvSpPr>
         <p:spPr>
           <a:xfrm>
-            <a:off x="502920" y="2487168"/>
-            <a:ext cx="45720" cy="512064"/>
+            <a:off x="1681812" y="1793079"/>
+            <a:ext cx="32474" cy="363709"/>
           </a:xfrm>
           <a:prstGeom prst="rect">
             <a:avLst/>
@@ -11208,8 +11208,8 @@
         </p:nvSpPr>
         <p:spPr>
           <a:xfrm>
-            <a:off x="722376" y="2450592"/>
-            <a:ext cx="7863840" cy="621792"/>
+            <a:off x="1837688" y="1767099"/>
+            <a:ext cx="5585531" cy="441647"/>
           </a:xfrm>
           <a:prstGeom prst="rect">
             <a:avLst/>
@@ -11228,7 +11228,7 @@
               <a:buNone/>
             </a:pPr>
             <a:r>
-              <a:rPr lang="en-US" sz="1350" b="1" dirty="0">
+              <a:rPr lang="en-US" sz="960" b="1" dirty="0">
                 <a:solidFill>
                   <a:srgbClr val="FFFFFF"/>
                 </a:solidFill>
@@ -11238,7 +11238,7 @@
               </a:rPr>
               <a:t>Mang theo: tờ hôm nay. Tuần sau sẽ thêm cột radar vào cùng bảng đó.</a:t>
             </a:r>
-            <a:endParaRPr lang="en-US" sz="1350" dirty="0"/>
+            <a:endParaRPr lang="en-US" sz="960" dirty="0"/>
           </a:p>
           <a:p>
             <a:pPr indent="0" marL="0">
@@ -11248,7 +11248,7 @@
               <a:buNone/>
             </a:pPr>
             <a:r>
-              <a:rPr lang="en-US" sz="1200" dirty="0">
+              <a:rPr lang="en-US" sz="850" dirty="0">
                 <a:solidFill>
                   <a:srgbClr val="AFC3D4"/>
                 </a:solidFill>
@@ -11258,7 +11258,7 @@
               </a:rPr>
               <a:t>要帶：今天這張紙。下週會在同一張表上加一欄雷達。</a:t>
             </a:r>
-            <a:endParaRPr lang="en-US" sz="1350" dirty="0"/>
+            <a:endParaRPr lang="en-US" sz="960" dirty="0"/>
           </a:p>
         </p:txBody>
       </p:sp>
@@ -11270,8 +11270,8 @@
         </p:nvSpPr>
         <p:spPr>
           <a:xfrm>
-            <a:off x="502920" y="3200400"/>
-            <a:ext cx="45720" cy="512064"/>
+            <a:off x="1681812" y="2299673"/>
+            <a:ext cx="32474" cy="363709"/>
           </a:xfrm>
           <a:prstGeom prst="rect">
             <a:avLst/>
@@ -11290,8 +11290,8 @@
         </p:nvSpPr>
         <p:spPr>
           <a:xfrm>
-            <a:off x="722376" y="3163824"/>
-            <a:ext cx="7863840" cy="621792"/>
+            <a:off x="1837688" y="2273694"/>
+            <a:ext cx="5585531" cy="441647"/>
           </a:xfrm>
           <a:prstGeom prst="rect">
             <a:avLst/>
@@ -11310,7 +11310,7 @@
               <a:buNone/>
             </a:pPr>
             <a:r>
-              <a:rPr lang="en-US" sz="1350" b="1" dirty="0">
+              <a:rPr lang="en-US" sz="960" b="1" dirty="0">
                 <a:solidFill>
                   <a:srgbClr val="FFFFFF"/>
                 </a:solidFill>
@@ -11320,7 +11320,7 @@
               </a:rPr>
               <a:t>Làm: đọc 3.4–3.6 trong giáo trình trước khi lên lớp.</a:t>
             </a:r>
-            <a:endParaRPr lang="en-US" sz="1350" dirty="0"/>
+            <a:endParaRPr lang="en-US" sz="960" dirty="0"/>
           </a:p>
           <a:p>
             <a:pPr indent="0" marL="0">
@@ -11330,7 +11330,7 @@
               <a:buNone/>
             </a:pPr>
             <a:r>
-              <a:rPr lang="en-US" sz="1200" dirty="0">
+              <a:rPr lang="en-US" sz="850" dirty="0">
                 <a:solidFill>
                   <a:srgbClr val="AFC3D4"/>
                 </a:solidFill>
@@ -11340,7 +11340,7 @@
               </a:rPr>
               <a:t>要做：上課前先讀講義 3.4–3.6。</a:t>
             </a:r>
-            <a:endParaRPr lang="en-US" sz="1350" dirty="0"/>
+            <a:endParaRPr lang="en-US" sz="960" dirty="0"/>
           </a:p>
         </p:txBody>
       </p:sp>
@@ -11352,8 +11352,8 @@
         </p:nvSpPr>
         <p:spPr>
           <a:xfrm>
-            <a:off x="109728" y="4791456"/>
-            <a:ext cx="822960" cy="256032"/>
+            <a:off x="1402536" y="3390800"/>
+            <a:ext cx="584532" cy="181855"/>
           </a:xfrm>
           <a:prstGeom prst="rect">
             <a:avLst/>
@@ -11369,7 +11369,7 @@
               <a:buNone/>
             </a:pPr>
             <a:r>
-              <a:rPr lang="en-US" sz="900" dirty="0">
+              <a:rPr lang="en-US" sz="640" dirty="0">
                 <a:solidFill>
                   <a:srgbClr val="9FB3C8"/>
                 </a:solidFill>
@@ -11379,7 +11379,7 @@
               </a:rPr>
               <a:t>9 / 9</a:t>
             </a:r>
-            <a:endParaRPr lang="en-US" sz="900" dirty="0"/>
+            <a:endParaRPr lang="en-US" sz="640" dirty="0"/>
           </a:p>
         </p:txBody>
       </p:sp>
@@ -11391,8 +11391,8 @@
         </p:nvSpPr>
         <p:spPr>
           <a:xfrm>
-            <a:off x="960120" y="4791456"/>
-            <a:ext cx="2011680" cy="256032"/>
+            <a:off x="2006553" y="3390800"/>
+            <a:ext cx="1428857" cy="181855"/>
           </a:xfrm>
           <a:prstGeom prst="rect">
             <a:avLst/>
@@ -11408,7 +11408,7 @@
               <a:buNone/>
             </a:pPr>
             <a:r>
-              <a:rPr lang="en-US" sz="900" dirty="0">
+              <a:rPr lang="en-US" sz="640" dirty="0">
                 <a:solidFill>
                   <a:srgbClr val="9FB3C8"/>
                 </a:solidFill>
@@ -11418,7 +11418,7 @@
               </a:rPr>
               <a:t>Tiết 3 · 第 3 節</a:t>
             </a:r>
-            <a:endParaRPr lang="en-US" sz="900" dirty="0"/>
+            <a:endParaRPr lang="en-US" sz="640" dirty="0"/>
           </a:p>
         </p:txBody>
       </p:sp>

--- a/第五週(10-08)/第五週_第3節_簡報.pptx
+++ b/第五週(10-08)/第五週_第3節_簡報.pptx
@@ -4446,8 +4446,8 @@
       </p:nvGrpSpPr>
       <p:grpSpPr>
         <a:xfrm>
-          <a:off x="0" y="0"/>
-          <a:ext cx="0" cy="0"/>
+          <a:off x="1028250" y="0"/>
+          <a:ext cx="1" cy="1"/>
           <a:chOff x="0" y="0"/>
           <a:chExt cx="0" cy="0"/>
         </a:xfrm>
@@ -4460,8 +4460,8 @@
         </p:nvSpPr>
         <p:spPr>
           <a:xfrm>
-            <a:off x="6130753" y="-947729"/>
-            <a:ext cx="2987610" cy="2987610"/>
+            <a:off x="6273000" y="-1063125"/>
+            <a:ext cx="3260250" cy="3260250"/>
           </a:xfrm>
           <a:prstGeom prst="ellipse">
             <a:avLst/>
@@ -4485,8 +4485,8 @@
         </p:nvSpPr>
         <p:spPr>
           <a:xfrm>
-            <a:off x="7104973" y="1520297"/>
-            <a:ext cx="1688649" cy="1688649"/>
+            <a:off x="7336125" y="1630125"/>
+            <a:ext cx="1842750" cy="1842750"/>
           </a:xfrm>
           <a:prstGeom prst="ellipse">
             <a:avLst/>
@@ -4507,8 +4507,8 @@
         </p:nvSpPr>
         <p:spPr>
           <a:xfrm>
-            <a:off x="1681812" y="883806"/>
-            <a:ext cx="4936051" cy="194844"/>
+            <a:off x="1418063" y="935550"/>
+            <a:ext cx="5386500" cy="212625"/>
           </a:xfrm>
           <a:prstGeom prst="rect">
             <a:avLst/>
@@ -4524,7 +4524,7 @@
               <a:buNone/>
             </a:pPr>
             <a:r>
-              <a:rPr lang="en-US" sz="890" b="1" dirty="0">
+              <a:rPr lang="en-US" sz="970" b="1" dirty="0">
                 <a:solidFill>
                   <a:srgbClr val="00A896"/>
                 </a:solidFill>
@@ -4534,7 +4534,7 @@
               </a:rPr>
               <a:t>MITUST · Nguyên lý xe tự lái · Tuần 5</a:t>
             </a:r>
-            <a:endParaRPr lang="en-US" sz="890" dirty="0"/>
+            <a:endParaRPr lang="en-US" sz="970" dirty="0"/>
           </a:p>
         </p:txBody>
       </p:sp>
@@ -4546,8 +4546,8 @@
         </p:nvSpPr>
         <p:spPr>
           <a:xfrm>
-            <a:off x="1681812" y="1143598"/>
-            <a:ext cx="5325739" cy="990767"/>
+            <a:off x="1418063" y="1219050"/>
+            <a:ext cx="5811750" cy="1081182"/>
           </a:xfrm>
           <a:prstGeom prst="rect">
             <a:avLst/>
@@ -4566,7 +4566,7 @@
               <a:buNone/>
             </a:pPr>
             <a:r>
-              <a:rPr lang="en-US" sz="2410" b="1" dirty="0">
+              <a:rPr lang="en-US" sz="2640" b="1" dirty="0">
                 <a:solidFill>
                   <a:srgbClr val="FFFFFF"/>
                 </a:solidFill>
@@ -4576,7 +4576,7 @@
               </a:rPr>
               <a:t>Chọn cảm biến cho một chiếc xe cụ thể</a:t>
             </a:r>
-            <a:endParaRPr lang="en-US" sz="2410" dirty="0"/>
+            <a:endParaRPr lang="en-US" sz="2640" dirty="0"/>
           </a:p>
           <a:p>
             <a:pPr indent="0" marL="0">
@@ -4586,7 +4586,7 @@
               <a:buNone/>
             </a:pPr>
             <a:r>
-              <a:rPr lang="en-US" sz="1350" dirty="0">
+              <a:rPr lang="en-US" sz="1470" dirty="0">
                 <a:solidFill>
                   <a:srgbClr val="C8D6E2"/>
                 </a:solidFill>
@@ -4596,7 +4596,7 @@
               </a:rPr>
               <a:t>替一台指定的車選感測器</a:t>
             </a:r>
-            <a:endParaRPr lang="en-US" sz="2410" dirty="0"/>
+            <a:endParaRPr lang="en-US" sz="2640" dirty="0"/>
           </a:p>
         </p:txBody>
       </p:sp>
@@ -4608,8 +4608,8 @@
         </p:nvSpPr>
         <p:spPr>
           <a:xfrm>
-            <a:off x="1681812" y="2163355"/>
-            <a:ext cx="974221" cy="29227"/>
+            <a:off x="1418063" y="2331867"/>
+            <a:ext cx="1063125" cy="31894"/>
           </a:xfrm>
           <a:prstGeom prst="rect">
             <a:avLst/>
@@ -4628,8 +4628,8 @@
         </p:nvSpPr>
         <p:spPr>
           <a:xfrm>
-            <a:off x="1681812" y="2306241"/>
-            <a:ext cx="5065947" cy="435079"/>
+            <a:off x="1418063" y="2487792"/>
+            <a:ext cx="5528250" cy="474783"/>
           </a:xfrm>
           <a:prstGeom prst="rect">
             <a:avLst/>
@@ -4648,7 +4648,7 @@
               <a:buNone/>
             </a:pPr>
             <a:r>
-              <a:rPr lang="en-US" sz="1030" dirty="0">
+              <a:rPr lang="en-US" sz="1120" dirty="0">
                 <a:solidFill>
                   <a:srgbClr val="C8D6E2"/>
                 </a:solidFill>
@@ -4658,7 +4658,7 @@
               </a:rPr>
               <a:t>Bốn model, ba tình huống, mỗi người nộp một tờ</a:t>
             </a:r>
-            <a:endParaRPr lang="en-US" sz="1030" dirty="0"/>
+            <a:endParaRPr lang="en-US" sz="1120" dirty="0"/>
           </a:p>
           <a:p>
             <a:pPr indent="0" marL="0">
@@ -4668,7 +4668,7 @@
               <a:buNone/>
             </a:pPr>
             <a:r>
-              <a:rPr lang="en-US" sz="890" dirty="0">
+              <a:rPr lang="en-US" sz="970" dirty="0">
                 <a:solidFill>
                   <a:srgbClr val="8AA0B4"/>
                 </a:solidFill>
@@ -4678,7 +4678,7 @@
               </a:rPr>
               <a:t>四個型號、三個情境，每個人交一張</a:t>
             </a:r>
-            <a:endParaRPr lang="en-US" sz="1030" dirty="0"/>
+            <a:endParaRPr lang="en-US" sz="1120" dirty="0"/>
           </a:p>
         </p:txBody>
       </p:sp>
@@ -4690,8 +4690,8 @@
         </p:nvSpPr>
         <p:spPr>
           <a:xfrm>
-            <a:off x="1681812" y="2793278"/>
-            <a:ext cx="4221622" cy="272782"/>
+            <a:off x="1418063" y="3019275"/>
+            <a:ext cx="4606875" cy="297675"/>
           </a:xfrm>
           <a:prstGeom prst="roundRect">
             <a:avLst>
@@ -4712,8 +4712,8 @@
         </p:nvSpPr>
         <p:spPr>
           <a:xfrm>
-            <a:off x="1772740" y="2825752"/>
-            <a:ext cx="4039768" cy="207834"/>
+            <a:off x="1517288" y="3054713"/>
+            <a:ext cx="4408425" cy="226800"/>
           </a:xfrm>
           <a:prstGeom prst="rect">
             <a:avLst/>
@@ -4729,7 +4729,7 @@
               <a:buNone/>
             </a:pPr>
             <a:r>
-              <a:rPr lang="en-US" sz="750" b="1" dirty="0">
+              <a:rPr lang="en-US" sz="810" b="1" dirty="0">
                 <a:solidFill>
                   <a:srgbClr val="9FD6CE"/>
                 </a:solidFill>
@@ -4739,7 +4739,7 @@
               </a:rPr>
               <a:t>工具｜Công cụ： ch-neural.github.io/MITUST-Principles-of-Self-Driving-Cars/week5/spec/</a:t>
             </a:r>
-            <a:endParaRPr lang="en-US" sz="750" dirty="0"/>
+            <a:endParaRPr lang="en-US" sz="810" dirty="0"/>
           </a:p>
         </p:txBody>
       </p:sp>
@@ -4751,8 +4751,8 @@
         </p:nvSpPr>
         <p:spPr>
           <a:xfrm>
-            <a:off x="1681812" y="3131008"/>
-            <a:ext cx="4936051" cy="194844"/>
+            <a:off x="1418063" y="3387825"/>
+            <a:ext cx="5386500" cy="212625"/>
           </a:xfrm>
           <a:prstGeom prst="rect">
             <a:avLst/>
@@ -4768,7 +4768,7 @@
               <a:buNone/>
             </a:pPr>
             <a:r>
-              <a:rPr lang="en-US" sz="820" dirty="0">
+              <a:rPr lang="en-US" sz="890" dirty="0">
                 <a:solidFill>
                   <a:srgbClr val="8AA0B4"/>
                 </a:solidFill>
@@ -4778,7 +4778,7 @@
               </a:rPr>
               <a:t>第五週 第 3 節　2026/10/08（四）11:10–12:00　CH Tseng</a:t>
             </a:r>
-            <a:endParaRPr lang="en-US" sz="820" dirty="0"/>
+            <a:endParaRPr lang="en-US" sz="890" dirty="0"/>
           </a:p>
         </p:txBody>
       </p:sp>
@@ -4790,8 +4790,8 @@
         </p:nvSpPr>
         <p:spPr>
           <a:xfrm>
-            <a:off x="1577895" y="247315"/>
-            <a:ext cx="1571743" cy="532574"/>
+            <a:off x="1304663" y="240975"/>
+            <a:ext cx="1715175" cy="581175"/>
           </a:xfrm>
           <a:prstGeom prst="roundRect">
             <a:avLst>
@@ -4820,8 +4820,8 @@
         </p:blipFill>
         <p:spPr>
           <a:xfrm>
-            <a:off x="1681812" y="364222"/>
-            <a:ext cx="1363909" cy="301350"/>
+            <a:off x="502920" y="475488"/>
+            <a:ext cx="1920240" cy="424269"/>
           </a:xfrm>
           <a:prstGeom prst="rect">
             <a:avLst/>
@@ -4847,8 +4847,8 @@
       </p:nvGrpSpPr>
       <p:grpSpPr>
         <a:xfrm>
-          <a:off x="0" y="0"/>
-          <a:ext cx="0" cy="0"/>
+          <a:off x="971550" y="0"/>
+          <a:ext cx="1" cy="1"/>
           <a:chOff x="0" y="0"/>
           <a:chExt cx="0" cy="0"/>
         </a:xfrm>
@@ -4861,8 +4861,8 @@
         </p:nvSpPr>
         <p:spPr>
           <a:xfrm>
-            <a:off x="1681812" y="234326"/>
-            <a:ext cx="5780375" cy="597522"/>
+            <a:off x="1367600" y="230429"/>
+            <a:ext cx="6408801" cy="662483"/>
           </a:xfrm>
           <a:prstGeom prst="rect">
             <a:avLst/>
@@ -4881,7 +4881,7 @@
               <a:buNone/>
             </a:pPr>
             <a:r>
-              <a:rPr lang="en-US" sz="1560" b="1" dirty="0">
+              <a:rPr lang="en-US" sz="1730" b="1" dirty="0">
                 <a:solidFill>
                   <a:srgbClr val="0B1F3A"/>
                 </a:solidFill>
@@ -4891,7 +4891,7 @@
               </a:rPr>
               <a:t>Bốn bước, mỗi bước đều có con số phải chép</a:t>
             </a:r>
-            <a:endParaRPr lang="en-US" sz="1560" dirty="0"/>
+            <a:endParaRPr lang="en-US" sz="1730" dirty="0"/>
           </a:p>
           <a:p>
             <a:pPr indent="0" marL="0">
@@ -4901,7 +4901,7 @@
               <a:buNone/>
             </a:pPr>
             <a:r>
-              <a:rPr lang="en-US" sz="960" dirty="0">
+              <a:rPr lang="en-US" sz="1060" dirty="0">
                 <a:solidFill>
                   <a:srgbClr val="5F7183"/>
                 </a:solidFill>
@@ -4911,7 +4911,7 @@
               </a:rPr>
               <a:t>四個步驟，每一步都有要抄下來的數字</a:t>
             </a:r>
-            <a:endParaRPr lang="en-US" sz="1560" dirty="0"/>
+            <a:endParaRPr lang="en-US" sz="1730" dirty="0"/>
           </a:p>
         </p:txBody>
       </p:sp>
@@ -4923,8 +4923,8 @@
         </p:nvSpPr>
         <p:spPr>
           <a:xfrm>
-            <a:off x="1681812" y="831848"/>
-            <a:ext cx="1298961" cy="1935452"/>
+            <a:off x="1367600" y="892912"/>
+            <a:ext cx="1440180" cy="2145868"/>
           </a:xfrm>
           <a:prstGeom prst="roundRect">
             <a:avLst>
@@ -4957,8 +4957,8 @@
         </p:nvSpPr>
         <p:spPr>
           <a:xfrm>
-            <a:off x="2162428" y="961744"/>
-            <a:ext cx="337730" cy="337730"/>
+            <a:off x="1900466" y="1036930"/>
+            <a:ext cx="374447" cy="374447"/>
           </a:xfrm>
           <a:prstGeom prst="ellipse">
             <a:avLst/>
@@ -4977,8 +4977,8 @@
         </p:nvSpPr>
         <p:spPr>
           <a:xfrm>
-            <a:off x="2162428" y="1033187"/>
-            <a:ext cx="337730" cy="194844"/>
+            <a:off x="1900466" y="1116140"/>
+            <a:ext cx="374447" cy="216027"/>
           </a:xfrm>
           <a:prstGeom prst="rect">
             <a:avLst/>
@@ -4994,7 +4994,7 @@
               <a:buNone/>
             </a:pPr>
             <a:r>
-              <a:rPr lang="en-US" sz="1070" b="1" dirty="0">
+              <a:rPr lang="en-US" sz="1180" b="1" dirty="0">
                 <a:solidFill>
                   <a:srgbClr val="FFFFFF"/>
                 </a:solidFill>
@@ -5004,7 +5004,7 @@
               </a:rPr>
               <a:t>1</a:t>
             </a:r>
-            <a:endParaRPr lang="en-US" sz="1070" dirty="0"/>
+            <a:endParaRPr lang="en-US" sz="1180" dirty="0"/>
           </a:p>
         </p:txBody>
       </p:sp>
@@ -5016,8 +5016,8 @@
         </p:nvSpPr>
         <p:spPr>
           <a:xfrm>
-            <a:off x="1772740" y="1364422"/>
-            <a:ext cx="1117106" cy="467626"/>
+            <a:off x="1468412" y="1483385"/>
+            <a:ext cx="1238555" cy="518465"/>
           </a:xfrm>
           <a:prstGeom prst="rect">
             <a:avLst/>
@@ -5036,7 +5036,7 @@
               <a:buNone/>
             </a:pPr>
             <a:r>
-              <a:rPr lang="en-US" sz="990" b="1" dirty="0">
+              <a:rPr lang="en-US" sz="1100" b="1" dirty="0">
                 <a:solidFill>
                   <a:srgbClr val="0B1F3A"/>
                 </a:solidFill>
@@ -5046,7 +5046,7 @@
               </a:rPr>
               <a:t>Chọn model</a:t>
             </a:r>
-            <a:endParaRPr lang="en-US" sz="990" dirty="0"/>
+            <a:endParaRPr lang="en-US" sz="1100" dirty="0"/>
           </a:p>
           <a:p>
             <a:pPr algn="ctr" indent="0" marL="0">
@@ -5056,7 +5056,7 @@
               <a:buNone/>
             </a:pPr>
             <a:r>
-              <a:rPr lang="en-US" sz="850" dirty="0">
+              <a:rPr lang="en-US" sz="950" dirty="0">
                 <a:solidFill>
                   <a:srgbClr val="007F72"/>
                 </a:solidFill>
@@ -5066,7 +5066,7 @@
               </a:rPr>
               <a:t>選型號</a:t>
             </a:r>
-            <a:endParaRPr lang="en-US" sz="990" dirty="0"/>
+            <a:endParaRPr lang="en-US" sz="1100" dirty="0"/>
           </a:p>
         </p:txBody>
       </p:sp>
@@ -5078,8 +5078,8 @@
         </p:nvSpPr>
         <p:spPr>
           <a:xfrm>
-            <a:off x="1772740" y="1858027"/>
-            <a:ext cx="1117106" cy="831335"/>
+            <a:off x="1468412" y="2030654"/>
+            <a:ext cx="1238555" cy="921715"/>
           </a:xfrm>
           <a:prstGeom prst="rect">
             <a:avLst/>
@@ -5098,7 +5098,7 @@
               <a:buNone/>
             </a:pPr>
             <a:r>
-              <a:rPr lang="en-US" sz="750" dirty="0">
+              <a:rPr lang="en-US" sz="830" dirty="0">
                 <a:solidFill>
                   <a:srgbClr val="5F7183"/>
                 </a:solidFill>
@@ -5108,7 +5108,7 @@
               </a:rPr>
               <a:t>Đọc bảng</a:t>
             </a:r>
-            <a:endParaRPr lang="en-US" sz="750" dirty="0"/>
+            <a:endParaRPr lang="en-US" sz="830" dirty="0"/>
           </a:p>
           <a:p>
             <a:pPr algn="ctr" indent="0" marL="0">
@@ -5118,7 +5118,7 @@
               <a:buNone/>
             </a:pPr>
             <a:r>
-              <a:rPr lang="en-US" sz="750" dirty="0">
+              <a:rPr lang="en-US" sz="830" dirty="0">
                 <a:solidFill>
                   <a:srgbClr val="5F7183"/>
                 </a:solidFill>
@@ -5128,7 +5128,7 @@
               </a:rPr>
               <a:t>Tắt phần dịch</a:t>
             </a:r>
-            <a:endParaRPr lang="en-US" sz="750" dirty="0"/>
+            <a:endParaRPr lang="en-US" sz="830" dirty="0"/>
           </a:p>
           <a:p>
             <a:pPr algn="ctr" indent="0" marL="0">
@@ -5138,7 +5138,7 @@
               <a:buNone/>
             </a:pPr>
             <a:r>
-              <a:rPr lang="en-US" sz="670" dirty="0">
+              <a:rPr lang="en-US" sz="750" dirty="0">
                 <a:solidFill>
                   <a:srgbClr val="5F7183"/>
                 </a:solidFill>
@@ -5148,7 +5148,7 @@
               </a:rPr>
               <a:t>讀規格表</a:t>
             </a:r>
-            <a:endParaRPr lang="en-US" sz="750" dirty="0"/>
+            <a:endParaRPr lang="en-US" sz="830" dirty="0"/>
           </a:p>
           <a:p>
             <a:pPr algn="ctr" indent="0" marL="0">
@@ -5158,7 +5158,7 @@
               <a:buNone/>
             </a:pPr>
             <a:r>
-              <a:rPr lang="en-US" sz="670" dirty="0">
+              <a:rPr lang="en-US" sz="750" dirty="0">
                 <a:solidFill>
                   <a:srgbClr val="5F7183"/>
                 </a:solidFill>
@@ -5168,7 +5168,7 @@
               </a:rPr>
               <a:t>把對照關掉</a:t>
             </a:r>
-            <a:endParaRPr lang="en-US" sz="750" dirty="0"/>
+            <a:endParaRPr lang="en-US" sz="830" dirty="0"/>
           </a:p>
         </p:txBody>
       </p:sp>
@@ -5180,8 +5180,8 @@
         </p:nvSpPr>
         <p:spPr>
           <a:xfrm>
-            <a:off x="2980773" y="1481328"/>
-            <a:ext cx="194844" cy="259792"/>
+            <a:off x="2807780" y="1613002"/>
+            <a:ext cx="216027" cy="288036"/>
           </a:xfrm>
           <a:prstGeom prst="rect">
             <a:avLst/>
@@ -5197,7 +5197,7 @@
               <a:buNone/>
             </a:pPr>
             <a:r>
-              <a:rPr lang="en-US" sz="1350" b="1" dirty="0">
+              <a:rPr lang="en-US" sz="1500" b="1" dirty="0">
                 <a:solidFill>
                   <a:srgbClr val="00A896"/>
                 </a:solidFill>
@@ -5207,7 +5207,7 @@
               </a:rPr>
               <a:t>→</a:t>
             </a:r>
-            <a:endParaRPr lang="en-US" sz="1350" dirty="0"/>
+            <a:endParaRPr lang="en-US" sz="1500" dirty="0"/>
           </a:p>
         </p:txBody>
       </p:sp>
@@ -5219,8 +5219,8 @@
         </p:nvSpPr>
         <p:spPr>
           <a:xfrm>
-            <a:off x="3175617" y="831848"/>
-            <a:ext cx="1298961" cy="1935452"/>
+            <a:off x="3023807" y="892912"/>
+            <a:ext cx="1440180" cy="2145868"/>
           </a:xfrm>
           <a:prstGeom prst="roundRect">
             <a:avLst>
@@ -5253,8 +5253,8 @@
         </p:nvSpPr>
         <p:spPr>
           <a:xfrm>
-            <a:off x="3656233" y="961744"/>
-            <a:ext cx="337730" cy="337730"/>
+            <a:off x="3556673" y="1036930"/>
+            <a:ext cx="374447" cy="374447"/>
           </a:xfrm>
           <a:prstGeom prst="ellipse">
             <a:avLst/>
@@ -5273,8 +5273,8 @@
         </p:nvSpPr>
         <p:spPr>
           <a:xfrm>
-            <a:off x="3656233" y="1033187"/>
-            <a:ext cx="337730" cy="194844"/>
+            <a:off x="3556673" y="1116140"/>
+            <a:ext cx="374447" cy="216027"/>
           </a:xfrm>
           <a:prstGeom prst="rect">
             <a:avLst/>
@@ -5290,7 +5290,7 @@
               <a:buNone/>
             </a:pPr>
             <a:r>
-              <a:rPr lang="en-US" sz="1070" b="1" dirty="0">
+              <a:rPr lang="en-US" sz="1180" b="1" dirty="0">
                 <a:solidFill>
                   <a:srgbClr val="FFFFFF"/>
                 </a:solidFill>
@@ -5300,7 +5300,7 @@
               </a:rPr>
               <a:t>2</a:t>
             </a:r>
-            <a:endParaRPr lang="en-US" sz="1070" dirty="0"/>
+            <a:endParaRPr lang="en-US" sz="1180" dirty="0"/>
           </a:p>
         </p:txBody>
       </p:sp>
@@ -5312,8 +5312,8 @@
         </p:nvSpPr>
         <p:spPr>
           <a:xfrm>
-            <a:off x="3266544" y="1364422"/>
-            <a:ext cx="1117106" cy="467626"/>
+            <a:off x="3124619" y="1483385"/>
+            <a:ext cx="1238555" cy="518465"/>
           </a:xfrm>
           <a:prstGeom prst="rect">
             <a:avLst/>
@@ -5332,7 +5332,7 @@
               <a:buNone/>
             </a:pPr>
             <a:r>
-              <a:rPr lang="en-US" sz="990" b="1" dirty="0">
+              <a:rPr lang="en-US" sz="1100" b="1" dirty="0">
                 <a:solidFill>
                   <a:srgbClr val="0B1F3A"/>
                 </a:solidFill>
@@ -5342,7 +5342,7 @@
               </a:rPr>
               <a:t>Tìm bốn số</a:t>
             </a:r>
-            <a:endParaRPr lang="en-US" sz="990" dirty="0"/>
+            <a:endParaRPr lang="en-US" sz="1100" dirty="0"/>
           </a:p>
           <a:p>
             <a:pPr algn="ctr" indent="0" marL="0">
@@ -5352,7 +5352,7 @@
               <a:buNone/>
             </a:pPr>
             <a:r>
-              <a:rPr lang="en-US" sz="850" dirty="0">
+              <a:rPr lang="en-US" sz="950" dirty="0">
                 <a:solidFill>
                   <a:srgbClr val="007F72"/>
                 </a:solidFill>
@@ -5362,7 +5362,7 @@
               </a:rPr>
               <a:t>找四個數字</a:t>
             </a:r>
-            <a:endParaRPr lang="en-US" sz="990" dirty="0"/>
+            <a:endParaRPr lang="en-US" sz="1100" dirty="0"/>
           </a:p>
         </p:txBody>
       </p:sp>
@@ -5374,8 +5374,8 @@
         </p:nvSpPr>
         <p:spPr>
           <a:xfrm>
-            <a:off x="3266544" y="1858027"/>
-            <a:ext cx="1117106" cy="831335"/>
+            <a:off x="3124619" y="2030654"/>
+            <a:ext cx="1238555" cy="921715"/>
           </a:xfrm>
           <a:prstGeom prst="rect">
             <a:avLst/>
@@ -5394,7 +5394,7 @@
               <a:buNone/>
             </a:pPr>
             <a:r>
-              <a:rPr lang="en-US" sz="750" dirty="0">
+              <a:rPr lang="en-US" sz="830" dirty="0">
                 <a:solidFill>
                   <a:srgbClr val="5F7183"/>
                 </a:solidFill>
@@ -5404,7 +5404,7 @@
               </a:rPr>
               <a:t>Góc nhìn · tầm đo</a:t>
             </a:r>
-            <a:endParaRPr lang="en-US" sz="750" dirty="0"/>
+            <a:endParaRPr lang="en-US" sz="830" dirty="0"/>
           </a:p>
           <a:p>
             <a:pPr algn="ctr" indent="0" marL="0">
@@ -5414,7 +5414,7 @@
               <a:buNone/>
             </a:pPr>
             <a:r>
-              <a:rPr lang="en-US" sz="750" dirty="0">
+              <a:rPr lang="en-US" sz="830" dirty="0">
                 <a:solidFill>
                   <a:srgbClr val="5F7183"/>
                 </a:solidFill>
@@ -5424,7 +5424,7 @@
               </a:rPr>
               <a:t>phân giải · tốc độ</a:t>
             </a:r>
-            <a:endParaRPr lang="en-US" sz="750" dirty="0"/>
+            <a:endParaRPr lang="en-US" sz="830" dirty="0"/>
           </a:p>
           <a:p>
             <a:pPr algn="ctr" indent="0" marL="0">
@@ -5434,7 +5434,7 @@
               <a:buNone/>
             </a:pPr>
             <a:r>
-              <a:rPr lang="en-US" sz="670" dirty="0">
+              <a:rPr lang="en-US" sz="750" dirty="0">
                 <a:solidFill>
                   <a:srgbClr val="5F7183"/>
                 </a:solidFill>
@@ -5444,7 +5444,7 @@
               </a:rPr>
               <a:t>視野・測距</a:t>
             </a:r>
-            <a:endParaRPr lang="en-US" sz="750" dirty="0"/>
+            <a:endParaRPr lang="en-US" sz="830" dirty="0"/>
           </a:p>
           <a:p>
             <a:pPr algn="ctr" indent="0" marL="0">
@@ -5454,7 +5454,7 @@
               <a:buNone/>
             </a:pPr>
             <a:r>
-              <a:rPr lang="en-US" sz="670" dirty="0">
+              <a:rPr lang="en-US" sz="750" dirty="0">
                 <a:solidFill>
                   <a:srgbClr val="5F7183"/>
                 </a:solidFill>
@@ -5464,7 +5464,7 @@
               </a:rPr>
               <a:t>解析度・更新率</a:t>
             </a:r>
-            <a:endParaRPr lang="en-US" sz="750" dirty="0"/>
+            <a:endParaRPr lang="en-US" sz="830" dirty="0"/>
           </a:p>
         </p:txBody>
       </p:sp>
@@ -5476,8 +5476,8 @@
         </p:nvSpPr>
         <p:spPr>
           <a:xfrm>
-            <a:off x="4474578" y="1481328"/>
-            <a:ext cx="194844" cy="259792"/>
+            <a:off x="4463987" y="1613002"/>
+            <a:ext cx="216027" cy="288036"/>
           </a:xfrm>
           <a:prstGeom prst="rect">
             <a:avLst/>
@@ -5493,7 +5493,7 @@
               <a:buNone/>
             </a:pPr>
             <a:r>
-              <a:rPr lang="en-US" sz="1350" b="1" dirty="0">
+              <a:rPr lang="en-US" sz="1500" b="1" dirty="0">
                 <a:solidFill>
                   <a:srgbClr val="00A896"/>
                 </a:solidFill>
@@ -5503,7 +5503,7 @@
               </a:rPr>
               <a:t>→</a:t>
             </a:r>
-            <a:endParaRPr lang="en-US" sz="1350" dirty="0"/>
+            <a:endParaRPr lang="en-US" sz="1500" dirty="0"/>
           </a:p>
         </p:txBody>
       </p:sp>
@@ -5515,8 +5515,8 @@
         </p:nvSpPr>
         <p:spPr>
           <a:xfrm>
-            <a:off x="4669422" y="831848"/>
-            <a:ext cx="1298961" cy="1935452"/>
+            <a:off x="4680014" y="892912"/>
+            <a:ext cx="1440180" cy="2145868"/>
           </a:xfrm>
           <a:prstGeom prst="roundRect">
             <a:avLst>
@@ -5549,8 +5549,8 @@
         </p:nvSpPr>
         <p:spPr>
           <a:xfrm>
-            <a:off x="5150038" y="961744"/>
-            <a:ext cx="337730" cy="337730"/>
+            <a:off x="5212880" y="1036930"/>
+            <a:ext cx="374447" cy="374447"/>
           </a:xfrm>
           <a:prstGeom prst="ellipse">
             <a:avLst/>
@@ -5569,8 +5569,8 @@
         </p:nvSpPr>
         <p:spPr>
           <a:xfrm>
-            <a:off x="5150038" y="1033187"/>
-            <a:ext cx="337730" cy="194844"/>
+            <a:off x="5212880" y="1116140"/>
+            <a:ext cx="374447" cy="216027"/>
           </a:xfrm>
           <a:prstGeom prst="rect">
             <a:avLst/>
@@ -5586,7 +5586,7 @@
               <a:buNone/>
             </a:pPr>
             <a:r>
-              <a:rPr lang="en-US" sz="1070" b="1" dirty="0">
+              <a:rPr lang="en-US" sz="1180" b="1" dirty="0">
                 <a:solidFill>
                   <a:srgbClr val="FFFFFF"/>
                 </a:solidFill>
@@ -5596,7 +5596,7 @@
               </a:rPr>
               <a:t>3</a:t>
             </a:r>
-            <a:endParaRPr lang="en-US" sz="1070" dirty="0"/>
+            <a:endParaRPr lang="en-US" sz="1180" dirty="0"/>
           </a:p>
         </p:txBody>
       </p:sp>
@@ -5608,8 +5608,8 @@
         </p:nvSpPr>
         <p:spPr>
           <a:xfrm>
-            <a:off x="4760349" y="1364422"/>
-            <a:ext cx="1117106" cy="467626"/>
+            <a:off x="4780826" y="1483385"/>
+            <a:ext cx="1238555" cy="518465"/>
           </a:xfrm>
           <a:prstGeom prst="rect">
             <a:avLst/>
@@ -5628,7 +5628,7 @@
               <a:buNone/>
             </a:pPr>
             <a:r>
-              <a:rPr lang="en-US" sz="990" b="1" dirty="0">
+              <a:rPr lang="en-US" sz="1100" b="1" dirty="0">
                 <a:solidFill>
                   <a:srgbClr val="0B1F3A"/>
                 </a:solidFill>
@@ -5638,7 +5638,7 @@
               </a:rPr>
               <a:t>Chọn tình huống</a:t>
             </a:r>
-            <a:endParaRPr lang="en-US" sz="990" dirty="0"/>
+            <a:endParaRPr lang="en-US" sz="1100" dirty="0"/>
           </a:p>
           <a:p>
             <a:pPr algn="ctr" indent="0" marL="0">
@@ -5648,7 +5648,7 @@
               <a:buNone/>
             </a:pPr>
             <a:r>
-              <a:rPr lang="en-US" sz="850" dirty="0">
+              <a:rPr lang="en-US" sz="950" dirty="0">
                 <a:solidFill>
                   <a:srgbClr val="007F72"/>
                 </a:solidFill>
@@ -5658,7 +5658,7 @@
               </a:rPr>
               <a:t>選情境</a:t>
             </a:r>
-            <a:endParaRPr lang="en-US" sz="990" dirty="0"/>
+            <a:endParaRPr lang="en-US" sz="1100" dirty="0"/>
           </a:p>
         </p:txBody>
       </p:sp>
@@ -5670,8 +5670,8 @@
         </p:nvSpPr>
         <p:spPr>
           <a:xfrm>
-            <a:off x="4760349" y="1858027"/>
-            <a:ext cx="1117106" cy="831335"/>
+            <a:off x="4780826" y="2030654"/>
+            <a:ext cx="1238555" cy="921715"/>
           </a:xfrm>
           <a:prstGeom prst="rect">
             <a:avLst/>
@@ -5690,7 +5690,7 @@
               <a:buNone/>
             </a:pPr>
             <a:r>
-              <a:rPr lang="en-US" sz="750" dirty="0">
+              <a:rPr lang="en-US" sz="830" dirty="0">
                 <a:solidFill>
                   <a:srgbClr val="5F7183"/>
                 </a:solidFill>
@@ -5700,7 +5700,7 @@
               </a:rPr>
               <a:t>Trường học · Hà Nội</a:t>
             </a:r>
-            <a:endParaRPr lang="en-US" sz="750" dirty="0"/>
+            <a:endParaRPr lang="en-US" sz="830" dirty="0"/>
           </a:p>
           <a:p>
             <a:pPr algn="ctr" indent="0" marL="0">
@@ -5710,7 +5710,7 @@
               <a:buNone/>
             </a:pPr>
             <a:r>
-              <a:rPr lang="en-US" sz="750" dirty="0">
+              <a:rPr lang="en-US" sz="830" dirty="0">
                 <a:solidFill>
                   <a:srgbClr val="5F7183"/>
                 </a:solidFill>
@@ -5720,7 +5720,7 @@
               </a:rPr>
               <a:t>Cao tốc</a:t>
             </a:r>
-            <a:endParaRPr lang="en-US" sz="750" dirty="0"/>
+            <a:endParaRPr lang="en-US" sz="830" dirty="0"/>
           </a:p>
           <a:p>
             <a:pPr algn="ctr" indent="0" marL="0">
@@ -5730,7 +5730,7 @@
               <a:buNone/>
             </a:pPr>
             <a:r>
-              <a:rPr lang="en-US" sz="670" dirty="0">
+              <a:rPr lang="en-US" sz="750" dirty="0">
                 <a:solidFill>
                   <a:srgbClr val="5F7183"/>
                 </a:solidFill>
@@ -5740,7 +5740,7 @@
               </a:rPr>
               <a:t>校園・河內</a:t>
             </a:r>
-            <a:endParaRPr lang="en-US" sz="750" dirty="0"/>
+            <a:endParaRPr lang="en-US" sz="830" dirty="0"/>
           </a:p>
           <a:p>
             <a:pPr algn="ctr" indent="0" marL="0">
@@ -5750,7 +5750,7 @@
               <a:buNone/>
             </a:pPr>
             <a:r>
-              <a:rPr lang="en-US" sz="670" dirty="0">
+              <a:rPr lang="en-US" sz="750" dirty="0">
                 <a:solidFill>
                   <a:srgbClr val="5F7183"/>
                 </a:solidFill>
@@ -5760,7 +5760,7 @@
               </a:rPr>
               <a:t>國道</a:t>
             </a:r>
-            <a:endParaRPr lang="en-US" sz="750" dirty="0"/>
+            <a:endParaRPr lang="en-US" sz="830" dirty="0"/>
           </a:p>
         </p:txBody>
       </p:sp>
@@ -5772,8 +5772,8 @@
         </p:nvSpPr>
         <p:spPr>
           <a:xfrm>
-            <a:off x="5968383" y="1481328"/>
-            <a:ext cx="194844" cy="259792"/>
+            <a:off x="6120194" y="1613002"/>
+            <a:ext cx="216027" cy="288036"/>
           </a:xfrm>
           <a:prstGeom prst="rect">
             <a:avLst/>
@@ -5789,7 +5789,7 @@
               <a:buNone/>
             </a:pPr>
             <a:r>
-              <a:rPr lang="en-US" sz="1350" b="1" dirty="0">
+              <a:rPr lang="en-US" sz="1500" b="1" dirty="0">
                 <a:solidFill>
                   <a:srgbClr val="00A896"/>
                 </a:solidFill>
@@ -5799,7 +5799,7 @@
               </a:rPr>
               <a:t>→</a:t>
             </a:r>
-            <a:endParaRPr lang="en-US" sz="1350" dirty="0"/>
+            <a:endParaRPr lang="en-US" sz="1500" dirty="0"/>
           </a:p>
         </p:txBody>
       </p:sp>
@@ -5811,8 +5811,8 @@
         </p:nvSpPr>
         <p:spPr>
           <a:xfrm>
-            <a:off x="6163227" y="831848"/>
-            <a:ext cx="1298961" cy="1935452"/>
+            <a:off x="6336221" y="892912"/>
+            <a:ext cx="1440180" cy="2145868"/>
           </a:xfrm>
           <a:prstGeom prst="roundRect">
             <a:avLst>
@@ -5845,8 +5845,8 @@
         </p:nvSpPr>
         <p:spPr>
           <a:xfrm>
-            <a:off x="6643842" y="961744"/>
-            <a:ext cx="337730" cy="337730"/>
+            <a:off x="6869087" y="1036930"/>
+            <a:ext cx="374447" cy="374447"/>
           </a:xfrm>
           <a:prstGeom prst="ellipse">
             <a:avLst/>
@@ -5865,8 +5865,8 @@
         </p:nvSpPr>
         <p:spPr>
           <a:xfrm>
-            <a:off x="6643842" y="1033187"/>
-            <a:ext cx="337730" cy="194844"/>
+            <a:off x="6869087" y="1116140"/>
+            <a:ext cx="374447" cy="216027"/>
           </a:xfrm>
           <a:prstGeom prst="rect">
             <a:avLst/>
@@ -5882,7 +5882,7 @@
               <a:buNone/>
             </a:pPr>
             <a:r>
-              <a:rPr lang="en-US" sz="1070" b="1" dirty="0">
+              <a:rPr lang="en-US" sz="1180" b="1" dirty="0">
                 <a:solidFill>
                   <a:srgbClr val="FFFFFF"/>
                 </a:solidFill>
@@ -5892,7 +5892,7 @@
               </a:rPr>
               <a:t>4</a:t>
             </a:r>
-            <a:endParaRPr lang="en-US" sz="1070" dirty="0"/>
+            <a:endParaRPr lang="en-US" sz="1180" dirty="0"/>
           </a:p>
         </p:txBody>
       </p:sp>
@@ -5904,8 +5904,8 @@
         </p:nvSpPr>
         <p:spPr>
           <a:xfrm>
-            <a:off x="6254154" y="1364422"/>
-            <a:ext cx="1117106" cy="467626"/>
+            <a:off x="6437033" y="1483385"/>
+            <a:ext cx="1238555" cy="518465"/>
           </a:xfrm>
           <a:prstGeom prst="rect">
             <a:avLst/>
@@ -5924,7 +5924,7 @@
               <a:buNone/>
             </a:pPr>
             <a:r>
-              <a:rPr lang="en-US" sz="990" b="1" dirty="0">
+              <a:rPr lang="en-US" sz="1100" b="1" dirty="0">
                 <a:solidFill>
                   <a:srgbClr val="0B1F3A"/>
                 </a:solidFill>
@@ -5934,7 +5934,7 @@
               </a:rPr>
               <a:t>Viết kết luận</a:t>
             </a:r>
-            <a:endParaRPr lang="en-US" sz="990" dirty="0"/>
+            <a:endParaRPr lang="en-US" sz="1100" dirty="0"/>
           </a:p>
           <a:p>
             <a:pPr algn="ctr" indent="0" marL="0">
@@ -5944,7 +5944,7 @@
               <a:buNone/>
             </a:pPr>
             <a:r>
-              <a:rPr lang="en-US" sz="850" dirty="0">
+              <a:rPr lang="en-US" sz="950" dirty="0">
                 <a:solidFill>
                   <a:srgbClr val="007F72"/>
                 </a:solidFill>
@@ -5954,7 +5954,7 @@
               </a:rPr>
               <a:t>寫結論</a:t>
             </a:r>
-            <a:endParaRPr lang="en-US" sz="990" dirty="0"/>
+            <a:endParaRPr lang="en-US" sz="1100" dirty="0"/>
           </a:p>
         </p:txBody>
       </p:sp>
@@ -5966,8 +5966,8 @@
         </p:nvSpPr>
         <p:spPr>
           <a:xfrm>
-            <a:off x="6254154" y="1858027"/>
-            <a:ext cx="1117106" cy="831335"/>
+            <a:off x="6437033" y="2030654"/>
+            <a:ext cx="1238555" cy="921715"/>
           </a:xfrm>
           <a:prstGeom prst="rect">
             <a:avLst/>
@@ -5986,7 +5986,7 @@
               <a:buNone/>
             </a:pPr>
             <a:r>
-              <a:rPr lang="en-US" sz="750" dirty="0">
+              <a:rPr lang="en-US" sz="830" dirty="0">
                 <a:solidFill>
                   <a:srgbClr val="5F7183"/>
                 </a:solidFill>
@@ -5996,7 +5996,7 @@
               </a:rPr>
               <a:t>Đủ hay không</a:t>
             </a:r>
-            <a:endParaRPr lang="en-US" sz="750" dirty="0"/>
+            <a:endParaRPr lang="en-US" sz="830" dirty="0"/>
           </a:p>
           <a:p>
             <a:pPr algn="ctr" indent="0" marL="0">
@@ -6006,7 +6006,7 @@
               <a:buNone/>
             </a:pPr>
             <a:r>
-              <a:rPr lang="en-US" sz="750" dirty="0">
+              <a:rPr lang="en-US" sz="830" dirty="0">
                 <a:solidFill>
                   <a:srgbClr val="5F7183"/>
                 </a:solidFill>
@@ -6016,7 +6016,7 @@
               </a:rPr>
               <a:t>Tắc ở dòng nào</a:t>
             </a:r>
-            <a:endParaRPr lang="en-US" sz="750" dirty="0"/>
+            <a:endParaRPr lang="en-US" sz="830" dirty="0"/>
           </a:p>
           <a:p>
             <a:pPr algn="ctr" indent="0" marL="0">
@@ -6026,7 +6026,7 @@
               <a:buNone/>
             </a:pPr>
             <a:r>
-              <a:rPr lang="en-US" sz="670" dirty="0">
+              <a:rPr lang="en-US" sz="750" dirty="0">
                 <a:solidFill>
                   <a:srgbClr val="5F7183"/>
                 </a:solidFill>
@@ -6036,7 +6036,7 @@
               </a:rPr>
               <a:t>夠或不夠</a:t>
             </a:r>
-            <a:endParaRPr lang="en-US" sz="750" dirty="0"/>
+            <a:endParaRPr lang="en-US" sz="830" dirty="0"/>
           </a:p>
           <a:p>
             <a:pPr algn="ctr" indent="0" marL="0">
@@ -6046,7 +6046,7 @@
               <a:buNone/>
             </a:pPr>
             <a:r>
-              <a:rPr lang="en-US" sz="670" dirty="0">
+              <a:rPr lang="en-US" sz="750" dirty="0">
                 <a:solidFill>
                   <a:srgbClr val="5F7183"/>
                 </a:solidFill>
@@ -6056,7 +6056,7 @@
               </a:rPr>
               <a:t>卡在哪一行</a:t>
             </a:r>
-            <a:endParaRPr lang="en-US" sz="750" dirty="0"/>
+            <a:endParaRPr lang="en-US" sz="830" dirty="0"/>
           </a:p>
         </p:txBody>
       </p:sp>
@@ -6068,8 +6068,8 @@
         </p:nvSpPr>
         <p:spPr>
           <a:xfrm>
-            <a:off x="1681812" y="2871216"/>
-            <a:ext cx="5780375" cy="402678"/>
+            <a:off x="1367600" y="3153994"/>
+            <a:ext cx="6408801" cy="446456"/>
           </a:xfrm>
           <a:prstGeom prst="rect">
             <a:avLst/>
@@ -6088,7 +6088,7 @@
               <a:buNone/>
             </a:pPr>
             <a:r>
-              <a:rPr lang="en-US" sz="890" b="1" dirty="0">
+              <a:rPr lang="en-US" sz="980" b="1" dirty="0">
                 <a:solidFill>
                   <a:srgbClr val="0B1F3A"/>
                 </a:solidFill>
@@ -6098,7 +6098,7 @@
               </a:rPr>
               <a:t>Bước 4 mới là phần chấm điểm: «không đủ» mà không nói được tắc ở đâu thì không tính.</a:t>
             </a:r>
-            <a:endParaRPr lang="en-US" sz="890" dirty="0"/>
+            <a:endParaRPr lang="en-US" sz="980" dirty="0"/>
           </a:p>
           <a:p>
             <a:pPr indent="0" marL="0">
@@ -6108,7 +6108,7 @@
               <a:buNone/>
             </a:pPr>
             <a:r>
-              <a:rPr lang="en-US" sz="820" dirty="0">
+              <a:rPr lang="en-US" sz="910" dirty="0">
                 <a:solidFill>
                   <a:srgbClr val="007F72"/>
                 </a:solidFill>
@@ -6118,7 +6118,7 @@
               </a:rPr>
               <a:t>第 4 步才是計分的地方：只寫「不夠」卻說不出卡在哪，不算。</a:t>
             </a:r>
-            <a:endParaRPr lang="en-US" sz="890" dirty="0"/>
+            <a:endParaRPr lang="en-US" sz="980" dirty="0"/>
           </a:p>
         </p:txBody>
       </p:sp>
@@ -6138,8 +6138,8 @@
         </p:blipFill>
         <p:spPr>
           <a:xfrm>
-            <a:off x="6663327" y="3338842"/>
-            <a:ext cx="779376" cy="172200"/>
+            <a:off x="7882128" y="109728"/>
+            <a:ext cx="1097280" cy="242439"/>
           </a:xfrm>
           <a:prstGeom prst="rect">
             <a:avLst/>
@@ -6154,8 +6154,8 @@
         </p:nvSpPr>
         <p:spPr>
           <a:xfrm>
-            <a:off x="1402536" y="3390800"/>
-            <a:ext cx="584532" cy="181855"/>
+            <a:off x="1057961" y="100813"/>
+            <a:ext cx="648081" cy="201625"/>
           </a:xfrm>
           <a:prstGeom prst="rect">
             <a:avLst/>
@@ -6171,7 +6171,7 @@
               <a:buNone/>
             </a:pPr>
             <a:r>
-              <a:rPr lang="en-US" sz="640" dirty="0">
+              <a:rPr lang="en-US" sz="710" dirty="0">
                 <a:solidFill>
                   <a:srgbClr val="5F7183"/>
                 </a:solidFill>
@@ -6181,7 +6181,7 @@
               </a:rPr>
               <a:t>2 / 9</a:t>
             </a:r>
-            <a:endParaRPr lang="en-US" sz="640" dirty="0"/>
+            <a:endParaRPr lang="en-US" sz="710" dirty="0"/>
           </a:p>
         </p:txBody>
       </p:sp>
@@ -6193,8 +6193,8 @@
         </p:nvSpPr>
         <p:spPr>
           <a:xfrm>
-            <a:off x="2006553" y="3390800"/>
-            <a:ext cx="1428857" cy="181855"/>
+            <a:off x="1727645" y="100813"/>
+            <a:ext cx="1584198" cy="201625"/>
           </a:xfrm>
           <a:prstGeom prst="rect">
             <a:avLst/>
@@ -6210,7 +6210,7 @@
               <a:buNone/>
             </a:pPr>
             <a:r>
-              <a:rPr lang="en-US" sz="640" dirty="0">
+              <a:rPr lang="en-US" sz="710" dirty="0">
                 <a:solidFill>
                   <a:srgbClr val="5F7183"/>
                 </a:solidFill>
@@ -6220,7 +6220,7 @@
               </a:rPr>
               <a:t>Tiết 3 · 第 3 節</a:t>
             </a:r>
-            <a:endParaRPr lang="en-US" sz="640" dirty="0"/>
+            <a:endParaRPr lang="en-US" sz="710" dirty="0"/>
           </a:p>
         </p:txBody>
       </p:sp>
@@ -6250,8 +6250,8 @@
       </p:nvGrpSpPr>
       <p:grpSpPr>
         <a:xfrm>
-          <a:off x="0" y="0"/>
-          <a:ext cx="0" cy="0"/>
+          <a:off x="898071" y="0"/>
+          <a:ext cx="1" cy="1"/>
           <a:chOff x="0" y="0"/>
           <a:chExt cx="0" cy="0"/>
         </a:xfrm>
@@ -6264,8 +6264,8 @@
         </p:nvSpPr>
         <p:spPr>
           <a:xfrm>
-            <a:off x="6130753" y="-947729"/>
-            <a:ext cx="2987610" cy="2987610"/>
+            <a:off x="6335486" y="-1102179"/>
+            <a:ext cx="3380014" cy="3380014"/>
           </a:xfrm>
           <a:prstGeom prst="ellipse">
             <a:avLst/>
@@ -6289,8 +6289,8 @@
         </p:nvSpPr>
         <p:spPr>
           <a:xfrm>
-            <a:off x="7104973" y="1520297"/>
-            <a:ext cx="1688649" cy="1688649"/>
+            <a:off x="7437664" y="1690007"/>
+            <a:ext cx="1910443" cy="1910443"/>
           </a:xfrm>
           <a:prstGeom prst="ellipse">
             <a:avLst/>
@@ -6311,8 +6311,8 @@
         </p:nvSpPr>
         <p:spPr>
           <a:xfrm>
-            <a:off x="1681812" y="364222"/>
-            <a:ext cx="4806155" cy="194844"/>
+            <a:off x="1302204" y="382089"/>
+            <a:ext cx="5437414" cy="220436"/>
           </a:xfrm>
           <a:prstGeom prst="rect">
             <a:avLst/>
@@ -6328,7 +6328,7 @@
               <a:buNone/>
             </a:pPr>
             <a:r>
-              <a:rPr lang="en-US" sz="890" b="1" dirty="0">
+              <a:rPr lang="en-US" sz="1000" b="1" dirty="0">
                 <a:solidFill>
                   <a:srgbClr val="FFB020"/>
                 </a:solidFill>
@@ -6338,7 +6338,7 @@
               </a:rPr>
               <a:t>Nhiệm vụ 1 · 第一題（10 分鐘）</a:t>
             </a:r>
-            <a:endParaRPr lang="en-US" sz="890" dirty="0"/>
+            <a:endParaRPr lang="en-US" sz="1000" dirty="0"/>
           </a:p>
         </p:txBody>
       </p:sp>
@@ -6350,8 +6350,8 @@
         </p:nvSpPr>
         <p:spPr>
           <a:xfrm>
-            <a:off x="1681812" y="585045"/>
-            <a:ext cx="5715427" cy="870304"/>
+            <a:off x="1302204" y="631916"/>
+            <a:ext cx="6466114" cy="984613"/>
           </a:xfrm>
           <a:prstGeom prst="rect">
             <a:avLst/>
@@ -6370,7 +6370,7 @@
               <a:buNone/>
             </a:pPr>
             <a:r>
-              <a:rPr lang="en-US" sz="1630" b="1" dirty="0">
+              <a:rPr lang="en-US" sz="1850" b="1" dirty="0">
                 <a:solidFill>
                   <a:srgbClr val="FFFFFF"/>
                 </a:solidFill>
@@ -6380,7 +6380,7 @@
               </a:rPr>
               <a:t>Xe buýt nhỏ trong trường, 20 km/h. Thử cả bốn model.</a:t>
             </a:r>
-            <a:endParaRPr lang="en-US" sz="1630" dirty="0"/>
+            <a:endParaRPr lang="en-US" sz="1850" dirty="0"/>
           </a:p>
           <a:p>
             <a:pPr indent="0" marL="0">
@@ -6390,7 +6390,7 @@
               <a:buNone/>
             </a:pPr>
             <a:r>
-              <a:rPr lang="en-US" sz="1070" dirty="0">
+              <a:rPr lang="en-US" sz="1210" dirty="0">
                 <a:solidFill>
                   <a:srgbClr val="AFC3D4"/>
                 </a:solidFill>
@@ -6400,7 +6400,7 @@
               </a:rPr>
               <a:t>校園接駁小巴，時速 20。四個型號都試一次。</a:t>
             </a:r>
-            <a:endParaRPr lang="en-US" sz="1630" dirty="0"/>
+            <a:endParaRPr lang="en-US" sz="1850" dirty="0"/>
           </a:p>
         </p:txBody>
       </p:sp>
@@ -6412,8 +6412,8 @@
         </p:nvSpPr>
         <p:spPr>
           <a:xfrm>
-            <a:off x="1681812" y="1260505"/>
-            <a:ext cx="5780375" cy="441647"/>
+            <a:off x="1302204" y="1396093"/>
+            <a:ext cx="6539593" cy="499654"/>
           </a:xfrm>
           <a:prstGeom prst="roundRect">
             <a:avLst>
@@ -6434,8 +6434,8 @@
         </p:nvSpPr>
         <p:spPr>
           <a:xfrm>
-            <a:off x="1798719" y="1364422"/>
-            <a:ext cx="233813" cy="233813"/>
+            <a:off x="1434465" y="1513659"/>
+            <a:ext cx="264523" cy="264523"/>
           </a:xfrm>
           <a:prstGeom prst="ellipse">
             <a:avLst/>
@@ -6454,8 +6454,8 @@
         </p:nvSpPr>
         <p:spPr>
           <a:xfrm>
-            <a:off x="1798719" y="1383906"/>
-            <a:ext cx="233813" cy="194844"/>
+            <a:off x="1434465" y="1535702"/>
+            <a:ext cx="264523" cy="220436"/>
           </a:xfrm>
           <a:prstGeom prst="rect">
             <a:avLst/>
@@ -6471,7 +6471,7 @@
               <a:buNone/>
             </a:pPr>
             <a:r>
-              <a:rPr lang="en-US" sz="850" b="1" dirty="0">
+              <a:rPr lang="en-US" sz="960" b="1" dirty="0">
                 <a:solidFill>
                   <a:srgbClr val="FFFFFF"/>
                 </a:solidFill>
@@ -6481,7 +6481,7 @@
               </a:rPr>
               <a:t>1</a:t>
             </a:r>
-            <a:endParaRPr lang="en-US" sz="850" dirty="0"/>
+            <a:endParaRPr lang="en-US" sz="960" dirty="0"/>
           </a:p>
         </p:txBody>
       </p:sp>
@@ -6493,8 +6493,8 @@
         </p:nvSpPr>
         <p:spPr>
           <a:xfrm>
-            <a:off x="2149438" y="1292979"/>
-            <a:ext cx="5182853" cy="389688"/>
+            <a:off x="1831249" y="1432832"/>
+            <a:ext cx="5863590" cy="440871"/>
           </a:xfrm>
           <a:prstGeom prst="rect">
             <a:avLst/>
@@ -6513,7 +6513,7 @@
               <a:buNone/>
             </a:pPr>
             <a:r>
-              <a:rPr lang="en-US" sz="890" b="1" dirty="0">
+              <a:rPr lang="en-US" sz="1000" b="1" dirty="0">
                 <a:solidFill>
                   <a:srgbClr val="FFFFFF"/>
                 </a:solidFill>
@@ -6523,7 +6523,7 @@
               </a:rPr>
               <a:t>Chép lại: model nào «đủ», model nào «không đủ»</a:t>
             </a:r>
-            <a:endParaRPr lang="en-US" sz="890" dirty="0"/>
+            <a:endParaRPr lang="en-US" sz="1000" dirty="0"/>
           </a:p>
           <a:p>
             <a:pPr indent="0" marL="0">
@@ -6533,7 +6533,7 @@
               <a:buNone/>
             </a:pPr>
             <a:r>
-              <a:rPr lang="en-US" sz="820" dirty="0">
+              <a:rPr lang="en-US" sz="920" dirty="0">
                 <a:solidFill>
                   <a:srgbClr val="AFC3D4"/>
                 </a:solidFill>
@@ -6543,7 +6543,7 @@
               </a:rPr>
               <a:t>抄下來：哪幾顆判定「夠」，哪幾顆「不夠」</a:t>
             </a:r>
-            <a:endParaRPr lang="en-US" sz="890" dirty="0"/>
+            <a:endParaRPr lang="en-US" sz="1000" dirty="0"/>
           </a:p>
         </p:txBody>
       </p:sp>
@@ -6555,8 +6555,8 @@
         </p:nvSpPr>
         <p:spPr>
           <a:xfrm>
-            <a:off x="1681812" y="1767099"/>
-            <a:ext cx="5780375" cy="441647"/>
+            <a:off x="1302204" y="1969226"/>
+            <a:ext cx="6539593" cy="499654"/>
           </a:xfrm>
           <a:prstGeom prst="roundRect">
             <a:avLst>
@@ -6577,8 +6577,8 @@
         </p:nvSpPr>
         <p:spPr>
           <a:xfrm>
-            <a:off x="1798719" y="1871016"/>
-            <a:ext cx="233813" cy="233813"/>
+            <a:off x="1434465" y="2086791"/>
+            <a:ext cx="264523" cy="264523"/>
           </a:xfrm>
           <a:prstGeom prst="ellipse">
             <a:avLst/>
@@ -6597,8 +6597,8 @@
         </p:nvSpPr>
         <p:spPr>
           <a:xfrm>
-            <a:off x="1798719" y="1890501"/>
-            <a:ext cx="233813" cy="194844"/>
+            <a:off x="1434465" y="2108835"/>
+            <a:ext cx="264523" cy="220436"/>
           </a:xfrm>
           <a:prstGeom prst="rect">
             <a:avLst/>
@@ -6614,7 +6614,7 @@
               <a:buNone/>
             </a:pPr>
             <a:r>
-              <a:rPr lang="en-US" sz="850" b="1" dirty="0">
+              <a:rPr lang="en-US" sz="960" b="1" dirty="0">
                 <a:solidFill>
                   <a:srgbClr val="FFFFFF"/>
                 </a:solidFill>
@@ -6624,7 +6624,7 @@
               </a:rPr>
               <a:t>2</a:t>
             </a:r>
-            <a:endParaRPr lang="en-US" sz="850" dirty="0"/>
+            <a:endParaRPr lang="en-US" sz="960" dirty="0"/>
           </a:p>
         </p:txBody>
       </p:sp>
@@ -6636,8 +6636,8 @@
         </p:nvSpPr>
         <p:spPr>
           <a:xfrm>
-            <a:off x="2149438" y="1799573"/>
-            <a:ext cx="5182853" cy="389688"/>
+            <a:off x="1831249" y="2005965"/>
+            <a:ext cx="5863590" cy="440871"/>
           </a:xfrm>
           <a:prstGeom prst="rect">
             <a:avLst/>
@@ -6656,7 +6656,7 @@
               <a:buNone/>
             </a:pPr>
             <a:r>
-              <a:rPr lang="en-US" sz="890" b="1" dirty="0">
+              <a:rPr lang="en-US" sz="1000" b="1" dirty="0">
                 <a:solidFill>
                   <a:srgbClr val="FFFFFF"/>
                 </a:solidFill>
@@ -6666,7 +6666,7 @@
               </a:rPr>
               <a:t>Với model không đủ, chép nguyên dòng màu đỏ</a:t>
             </a:r>
-            <a:endParaRPr lang="en-US" sz="890" dirty="0"/>
+            <a:endParaRPr lang="en-US" sz="1000" dirty="0"/>
           </a:p>
           <a:p>
             <a:pPr indent="0" marL="0">
@@ -6676,7 +6676,7 @@
               <a:buNone/>
             </a:pPr>
             <a:r>
-              <a:rPr lang="en-US" sz="820" dirty="0">
+              <a:rPr lang="en-US" sz="920" dirty="0">
                 <a:solidFill>
                   <a:srgbClr val="AFC3D4"/>
                 </a:solidFill>
@@ -6686,7 +6686,7 @@
               </a:rPr>
               <a:t>不夠的那幾顆，把紅色那一行整句抄下來</a:t>
             </a:r>
-            <a:endParaRPr lang="en-US" sz="890" dirty="0"/>
+            <a:endParaRPr lang="en-US" sz="1000" dirty="0"/>
           </a:p>
         </p:txBody>
       </p:sp>
@@ -6698,8 +6698,8 @@
         </p:nvSpPr>
         <p:spPr>
           <a:xfrm>
-            <a:off x="1681812" y="2273694"/>
-            <a:ext cx="5780375" cy="441647"/>
+            <a:off x="1302204" y="2542359"/>
+            <a:ext cx="6539593" cy="499654"/>
           </a:xfrm>
           <a:prstGeom prst="roundRect">
             <a:avLst>
@@ -6720,8 +6720,8 @@
         </p:nvSpPr>
         <p:spPr>
           <a:xfrm>
-            <a:off x="1798719" y="2377611"/>
-            <a:ext cx="233813" cy="233813"/>
+            <a:off x="1434465" y="2659924"/>
+            <a:ext cx="264523" cy="264523"/>
           </a:xfrm>
           <a:prstGeom prst="ellipse">
             <a:avLst/>
@@ -6740,8 +6740,8 @@
         </p:nvSpPr>
         <p:spPr>
           <a:xfrm>
-            <a:off x="1798719" y="2397095"/>
-            <a:ext cx="233813" cy="194844"/>
+            <a:off x="1434465" y="2681968"/>
+            <a:ext cx="264523" cy="220436"/>
           </a:xfrm>
           <a:prstGeom prst="rect">
             <a:avLst/>
@@ -6757,7 +6757,7 @@
               <a:buNone/>
             </a:pPr>
             <a:r>
-              <a:rPr lang="en-US" sz="850" b="1" dirty="0">
+              <a:rPr lang="en-US" sz="960" b="1" dirty="0">
                 <a:solidFill>
                   <a:srgbClr val="FFFFFF"/>
                 </a:solidFill>
@@ -6767,7 +6767,7 @@
               </a:rPr>
               <a:t>3</a:t>
             </a:r>
-            <a:endParaRPr lang="en-US" sz="850" dirty="0"/>
+            <a:endParaRPr lang="en-US" sz="960" dirty="0"/>
           </a:p>
         </p:txBody>
       </p:sp>
@@ -6779,8 +6779,8 @@
         </p:nvSpPr>
         <p:spPr>
           <a:xfrm>
-            <a:off x="2149438" y="2306168"/>
-            <a:ext cx="5182853" cy="389688"/>
+            <a:off x="1831249" y="2579098"/>
+            <a:ext cx="5863590" cy="440871"/>
           </a:xfrm>
           <a:prstGeom prst="rect">
             <a:avLst/>
@@ -6799,7 +6799,7 @@
               <a:buNone/>
             </a:pPr>
             <a:r>
-              <a:rPr lang="en-US" sz="890" b="1" dirty="0">
+              <a:rPr lang="en-US" sz="1000" b="1" dirty="0">
                 <a:solidFill>
                   <a:srgbClr val="FFFFFF"/>
                 </a:solidFill>
@@ -6809,7 +6809,7 @@
               </a:rPr>
               <a:t>Câu hỏi: tại sao camera lại đủ ở tình huống này?</a:t>
             </a:r>
-            <a:endParaRPr lang="en-US" sz="890" dirty="0"/>
+            <a:endParaRPr lang="en-US" sz="1000" dirty="0"/>
           </a:p>
           <a:p>
             <a:pPr indent="0" marL="0">
@@ -6819,7 +6819,7 @@
               <a:buNone/>
             </a:pPr>
             <a:r>
-              <a:rPr lang="en-US" sz="820" dirty="0">
+              <a:rPr lang="en-US" sz="920" dirty="0">
                 <a:solidFill>
                   <a:srgbClr val="AFC3D4"/>
                 </a:solidFill>
@@ -6829,7 +6829,7 @@
               </a:rPr>
               <a:t>想一題：為什麼相機在這個情境反而夠用？</a:t>
             </a:r>
-            <a:endParaRPr lang="en-US" sz="890" dirty="0"/>
+            <a:endParaRPr lang="en-US" sz="1000" dirty="0"/>
           </a:p>
         </p:txBody>
       </p:sp>
@@ -6841,8 +6841,8 @@
         </p:nvSpPr>
         <p:spPr>
           <a:xfrm>
-            <a:off x="1681812" y="2806268"/>
-            <a:ext cx="5715427" cy="324740"/>
+            <a:off x="1302204" y="3144883"/>
+            <a:ext cx="6466114" cy="367393"/>
           </a:xfrm>
           <a:prstGeom prst="rect">
             <a:avLst/>
@@ -6861,7 +6861,7 @@
               <a:buNone/>
             </a:pPr>
             <a:r>
-              <a:rPr lang="en-US" sz="890" b="1" dirty="0">
+              <a:rPr lang="en-US" sz="1000" b="1" dirty="0">
                 <a:solidFill>
                   <a:srgbClr val="FFB020"/>
                 </a:solidFill>
@@ -6871,7 +6871,7 @@
               </a:rPr>
               <a:t>Trong trường chạy chậm, nhìn gần — bài toán dễ nhất trong ba tình huống.</a:t>
             </a:r>
-            <a:endParaRPr lang="en-US" sz="890" dirty="0"/>
+            <a:endParaRPr lang="en-US" sz="1000" dirty="0"/>
           </a:p>
           <a:p>
             <a:pPr indent="0" marL="0">
@@ -6881,7 +6881,7 @@
               <a:buNone/>
             </a:pPr>
             <a:r>
-              <a:rPr lang="en-US" sz="820" dirty="0">
+              <a:rPr lang="en-US" sz="920" dirty="0">
                 <a:solidFill>
                   <a:srgbClr val="FFB020"/>
                 </a:solidFill>
@@ -6891,7 +6891,7 @@
               </a:rPr>
               <a:t>校園裡車速慢、看得近——三個情境裡最好過的一個。</a:t>
             </a:r>
-            <a:endParaRPr lang="en-US" sz="890" dirty="0"/>
+            <a:endParaRPr lang="en-US" sz="1000" dirty="0"/>
           </a:p>
         </p:txBody>
       </p:sp>
@@ -6903,8 +6903,8 @@
         </p:nvSpPr>
         <p:spPr>
           <a:xfrm>
-            <a:off x="1402536" y="3390800"/>
-            <a:ext cx="584532" cy="181855"/>
+            <a:off x="986246" y="102870"/>
+            <a:ext cx="661307" cy="205740"/>
           </a:xfrm>
           <a:prstGeom prst="rect">
             <a:avLst/>
@@ -6920,7 +6920,7 @@
               <a:buNone/>
             </a:pPr>
             <a:r>
-              <a:rPr lang="en-US" sz="640" dirty="0">
+              <a:rPr lang="en-US" sz="720" dirty="0">
                 <a:solidFill>
                   <a:srgbClr val="9FB3C8"/>
                 </a:solidFill>
@@ -6930,7 +6930,7 @@
               </a:rPr>
               <a:t>3 / 9</a:t>
             </a:r>
-            <a:endParaRPr lang="en-US" sz="640" dirty="0"/>
+            <a:endParaRPr lang="en-US" sz="720" dirty="0"/>
           </a:p>
         </p:txBody>
       </p:sp>
@@ -6942,8 +6942,8 @@
         </p:nvSpPr>
         <p:spPr>
           <a:xfrm>
-            <a:off x="2006553" y="3390800"/>
-            <a:ext cx="1428857" cy="181855"/>
+            <a:off x="1669596" y="102870"/>
+            <a:ext cx="1616529" cy="205740"/>
           </a:xfrm>
           <a:prstGeom prst="rect">
             <a:avLst/>
@@ -6959,7 +6959,7 @@
               <a:buNone/>
             </a:pPr>
             <a:r>
-              <a:rPr lang="en-US" sz="640" dirty="0">
+              <a:rPr lang="en-US" sz="720" dirty="0">
                 <a:solidFill>
                   <a:srgbClr val="9FB3C8"/>
                 </a:solidFill>
@@ -6969,7 +6969,7 @@
               </a:rPr>
               <a:t>Tiết 3 · 第 3 節</a:t>
             </a:r>
-            <a:endParaRPr lang="en-US" sz="640" dirty="0"/>
+            <a:endParaRPr lang="en-US" sz="720" dirty="0"/>
           </a:p>
         </p:txBody>
       </p:sp>
@@ -6999,8 +6999,8 @@
       </p:nvGrpSpPr>
       <p:grpSpPr>
         <a:xfrm>
-          <a:off x="0" y="0"/>
-          <a:ext cx="0" cy="0"/>
+          <a:off x="925172" y="0"/>
+          <a:ext cx="1" cy="1"/>
           <a:chOff x="0" y="0"/>
           <a:chExt cx="0" cy="0"/>
         </a:xfrm>
@@ -7013,8 +7013,8 @@
         </p:nvSpPr>
         <p:spPr>
           <a:xfrm>
-            <a:off x="6130753" y="-947729"/>
-            <a:ext cx="2987610" cy="2987610"/>
+            <a:off x="6322478" y="-1094048"/>
+            <a:ext cx="3355082" cy="3355082"/>
           </a:xfrm>
           <a:prstGeom prst="ellipse">
             <a:avLst/>
@@ -7038,8 +7038,8 @@
         </p:nvSpPr>
         <p:spPr>
           <a:xfrm>
-            <a:off x="7104973" y="1520297"/>
-            <a:ext cx="1688649" cy="1688649"/>
+            <a:off x="7416526" y="1677541"/>
+            <a:ext cx="1896351" cy="1896351"/>
           </a:xfrm>
           <a:prstGeom prst="ellipse">
             <a:avLst/>
@@ -7060,8 +7060,8 @@
         </p:nvSpPr>
         <p:spPr>
           <a:xfrm>
-            <a:off x="1681812" y="364222"/>
-            <a:ext cx="4806155" cy="194844"/>
+            <a:off x="1326323" y="379270"/>
+            <a:ext cx="5397306" cy="218810"/>
           </a:xfrm>
           <a:prstGeom prst="rect">
             <a:avLst/>
@@ -7077,7 +7077,7 @@
               <a:buNone/>
             </a:pPr>
             <a:r>
-              <a:rPr lang="en-US" sz="890" b="1" dirty="0">
+              <a:rPr lang="en-US" sz="1000" b="1" dirty="0">
                 <a:solidFill>
                   <a:srgbClr val="FFB020"/>
                 </a:solidFill>
@@ -7087,7 +7087,7 @@
               </a:rPr>
               <a:t>Nhiệm vụ 2 · 第二題（10 分鐘）</a:t>
             </a:r>
-            <a:endParaRPr lang="en-US" sz="890" dirty="0"/>
+            <a:endParaRPr lang="en-US" sz="1000" dirty="0"/>
           </a:p>
         </p:txBody>
       </p:sp>
@@ -7099,8 +7099,8 @@
         </p:nvSpPr>
         <p:spPr>
           <a:xfrm>
-            <a:off x="1681812" y="585045"/>
-            <a:ext cx="5715427" cy="870304"/>
+            <a:off x="1326323" y="627254"/>
+            <a:ext cx="6418418" cy="977350"/>
           </a:xfrm>
           <a:prstGeom prst="rect">
             <a:avLst/>
@@ -7119,7 +7119,7 @@
               <a:buNone/>
             </a:pPr>
             <a:r>
-              <a:rPr lang="en-US" sz="1630" b="1" dirty="0">
+              <a:rPr lang="en-US" sz="1830" b="1" dirty="0">
                 <a:solidFill>
                   <a:srgbClr val="FFFFFF"/>
                 </a:solidFill>
@@ -7129,7 +7129,7 @@
               </a:rPr>
               <a:t>Đổi sang giờ cao điểm Hà Nội, 40 km/h. Bốn model lại làm một lượt.</a:t>
             </a:r>
-            <a:endParaRPr lang="en-US" sz="1630" dirty="0"/>
+            <a:endParaRPr lang="en-US" sz="1830" dirty="0"/>
           </a:p>
           <a:p>
             <a:pPr indent="0" marL="0">
@@ -7139,7 +7139,7 @@
               <a:buNone/>
             </a:pPr>
             <a:r>
-              <a:rPr lang="en-US" sz="1070" dirty="0">
+              <a:rPr lang="en-US" sz="1200" dirty="0">
                 <a:solidFill>
                   <a:srgbClr val="AFC3D4"/>
                 </a:solidFill>
@@ -7149,7 +7149,7 @@
               </a:rPr>
               <a:t>換成河內尖峰，時速 40。四個型號再做一次。</a:t>
             </a:r>
-            <a:endParaRPr lang="en-US" sz="1630" dirty="0"/>
+            <a:endParaRPr lang="en-US" sz="1830" dirty="0"/>
           </a:p>
         </p:txBody>
       </p:sp>
@@ -7161,8 +7161,8 @@
         </p:nvSpPr>
         <p:spPr>
           <a:xfrm>
-            <a:off x="1681812" y="1362092"/>
-            <a:ext cx="5780375" cy="441647"/>
+            <a:off x="1326323" y="1499877"/>
+            <a:ext cx="6491354" cy="495969"/>
           </a:xfrm>
           <a:prstGeom prst="roundRect">
             <a:avLst>
@@ -7183,8 +7183,8 @@
         </p:nvSpPr>
         <p:spPr>
           <a:xfrm>
-            <a:off x="1798719" y="1466008"/>
-            <a:ext cx="233813" cy="233813"/>
+            <a:off x="1457609" y="1616575"/>
+            <a:ext cx="262572" cy="262572"/>
           </a:xfrm>
           <a:prstGeom prst="ellipse">
             <a:avLst/>
@@ -7203,8 +7203,8 @@
         </p:nvSpPr>
         <p:spPr>
           <a:xfrm>
-            <a:off x="1798719" y="1485493"/>
-            <a:ext cx="233813" cy="194844"/>
+            <a:off x="1457609" y="1638456"/>
+            <a:ext cx="262572" cy="218810"/>
           </a:xfrm>
           <a:prstGeom prst="rect">
             <a:avLst/>
@@ -7220,7 +7220,7 @@
               <a:buNone/>
             </a:pPr>
             <a:r>
-              <a:rPr lang="en-US" sz="850" b="1" dirty="0">
+              <a:rPr lang="en-US" sz="960" b="1" dirty="0">
                 <a:solidFill>
                   <a:srgbClr val="FFFFFF"/>
                 </a:solidFill>
@@ -7230,7 +7230,7 @@
               </a:rPr>
               <a:t>1</a:t>
             </a:r>
-            <a:endParaRPr lang="en-US" sz="850" dirty="0"/>
+            <a:endParaRPr lang="en-US" sz="960" dirty="0"/>
           </a:p>
         </p:txBody>
       </p:sp>
@@ -7242,8 +7242,8 @@
         </p:nvSpPr>
         <p:spPr>
           <a:xfrm>
-            <a:off x="2149438" y="1394566"/>
-            <a:ext cx="5182853" cy="389688"/>
+            <a:off x="1851466" y="1536345"/>
+            <a:ext cx="5820338" cy="437619"/>
           </a:xfrm>
           <a:prstGeom prst="rect">
             <a:avLst/>
@@ -7262,7 +7262,7 @@
               <a:buNone/>
             </a:pPr>
             <a:r>
-              <a:rPr lang="en-US" sz="890" b="1" dirty="0">
+              <a:rPr lang="en-US" sz="1000" b="1" dirty="0">
                 <a:solidFill>
                   <a:srgbClr val="FFFFFF"/>
                 </a:solidFill>
@@ -7272,7 +7272,7 @@
               </a:rPr>
               <a:t>OS1 chỉ thiếu một chút. Mở dòng «configurable» ra xem</a:t>
             </a:r>
-            <a:endParaRPr lang="en-US" sz="890" dirty="0"/>
+            <a:endParaRPr lang="en-US" sz="1000" dirty="0"/>
           </a:p>
           <a:p>
             <a:pPr indent="0" marL="0">
@@ -7282,7 +7282,7 @@
               <a:buNone/>
             </a:pPr>
             <a:r>
-              <a:rPr lang="en-US" sz="820" dirty="0">
+              <a:rPr lang="en-US" sz="920" dirty="0">
                 <a:solidFill>
                   <a:srgbClr val="AFC3D4"/>
                 </a:solidFill>
@@ -7292,7 +7292,7 @@
               </a:rPr>
               <a:t>OS1 只差一點點。把那一行寫著「可設定」的打開看看</a:t>
             </a:r>
-            <a:endParaRPr lang="en-US" sz="890" dirty="0"/>
+            <a:endParaRPr lang="en-US" sz="1000" dirty="0"/>
           </a:p>
         </p:txBody>
       </p:sp>
@@ -7304,8 +7304,8 @@
         </p:nvSpPr>
         <p:spPr>
           <a:xfrm>
-            <a:off x="1681812" y="1868686"/>
-            <a:ext cx="5780375" cy="441647"/>
+            <a:off x="1326323" y="2068782"/>
+            <a:ext cx="6491354" cy="495969"/>
           </a:xfrm>
           <a:prstGeom prst="roundRect">
             <a:avLst>
@@ -7326,8 +7326,8 @@
         </p:nvSpPr>
         <p:spPr>
           <a:xfrm>
-            <a:off x="1798719" y="1972603"/>
-            <a:ext cx="233813" cy="233813"/>
+            <a:off x="1457609" y="2185481"/>
+            <a:ext cx="262572" cy="262572"/>
           </a:xfrm>
           <a:prstGeom prst="ellipse">
             <a:avLst/>
@@ -7346,8 +7346,8 @@
         </p:nvSpPr>
         <p:spPr>
           <a:xfrm>
-            <a:off x="1798719" y="1992087"/>
-            <a:ext cx="233813" cy="194844"/>
+            <a:off x="1457609" y="2207362"/>
+            <a:ext cx="262572" cy="218810"/>
           </a:xfrm>
           <a:prstGeom prst="rect">
             <a:avLst/>
@@ -7363,7 +7363,7 @@
               <a:buNone/>
             </a:pPr>
             <a:r>
-              <a:rPr lang="en-US" sz="850" b="1" dirty="0">
+              <a:rPr lang="en-US" sz="960" b="1" dirty="0">
                 <a:solidFill>
                   <a:srgbClr val="FFFFFF"/>
                 </a:solidFill>
@@ -7373,7 +7373,7 @@
               </a:rPr>
               <a:t>2</a:t>
             </a:r>
-            <a:endParaRPr lang="en-US" sz="850" dirty="0"/>
+            <a:endParaRPr lang="en-US" sz="960" dirty="0"/>
           </a:p>
         </p:txBody>
       </p:sp>
@@ -7385,8 +7385,8 @@
         </p:nvSpPr>
         <p:spPr>
           <a:xfrm>
-            <a:off x="2149438" y="1901160"/>
-            <a:ext cx="5182853" cy="389688"/>
+            <a:off x="1851466" y="2105250"/>
+            <a:ext cx="5820338" cy="437619"/>
           </a:xfrm>
           <a:prstGeom prst="rect">
             <a:avLst/>
@@ -7405,7 +7405,7 @@
               <a:buNone/>
             </a:pPr>
             <a:r>
-              <a:rPr lang="en-US" sz="890" b="1" dirty="0">
+              <a:rPr lang="en-US" sz="1000" b="1" dirty="0">
                 <a:solidFill>
                   <a:srgbClr val="FFFFFF"/>
                 </a:solidFill>
@@ -7415,7 +7415,7 @@
               </a:rPr>
               <a:t>Đổi 1024 → 2048 điểm mỗi vòng, chép lại số điểm mới</a:t>
             </a:r>
-            <a:endParaRPr lang="en-US" sz="890" dirty="0"/>
+            <a:endParaRPr lang="en-US" sz="1000" dirty="0"/>
           </a:p>
           <a:p>
             <a:pPr indent="0" marL="0">
@@ -7425,7 +7425,7 @@
               <a:buNone/>
             </a:pPr>
             <a:r>
-              <a:rPr lang="en-US" sz="820" dirty="0">
+              <a:rPr lang="en-US" sz="920" dirty="0">
                 <a:solidFill>
                   <a:srgbClr val="AFC3D4"/>
                 </a:solidFill>
@@ -7435,7 +7435,7 @@
               </a:rPr>
               <a:t>把每圈 1024 點改成 2048，抄下新的點數</a:t>
             </a:r>
-            <a:endParaRPr lang="en-US" sz="890" dirty="0"/>
+            <a:endParaRPr lang="en-US" sz="1000" dirty="0"/>
           </a:p>
         </p:txBody>
       </p:sp>
@@ -7447,8 +7447,8 @@
         </p:nvSpPr>
         <p:spPr>
           <a:xfrm>
-            <a:off x="1681812" y="2375281"/>
-            <a:ext cx="5780375" cy="441647"/>
+            <a:off x="1326323" y="2637687"/>
+            <a:ext cx="6491354" cy="495969"/>
           </a:xfrm>
           <a:prstGeom prst="roundRect">
             <a:avLst>
@@ -7469,8 +7469,8 @@
         </p:nvSpPr>
         <p:spPr>
           <a:xfrm>
-            <a:off x="1798719" y="2479198"/>
-            <a:ext cx="233813" cy="233813"/>
+            <a:off x="1457609" y="2754386"/>
+            <a:ext cx="262572" cy="262572"/>
           </a:xfrm>
           <a:prstGeom prst="ellipse">
             <a:avLst/>
@@ -7489,8 +7489,8 @@
         </p:nvSpPr>
         <p:spPr>
           <a:xfrm>
-            <a:off x="1798719" y="2498682"/>
-            <a:ext cx="233813" cy="194844"/>
+            <a:off x="1457609" y="2776267"/>
+            <a:ext cx="262572" cy="218810"/>
           </a:xfrm>
           <a:prstGeom prst="rect">
             <a:avLst/>
@@ -7506,7 +7506,7 @@
               <a:buNone/>
             </a:pPr>
             <a:r>
-              <a:rPr lang="en-US" sz="850" b="1" dirty="0">
+              <a:rPr lang="en-US" sz="960" b="1" dirty="0">
                 <a:solidFill>
                   <a:srgbClr val="FFFFFF"/>
                 </a:solidFill>
@@ -7516,7 +7516,7 @@
               </a:rPr>
               <a:t>3</a:t>
             </a:r>
-            <a:endParaRPr lang="en-US" sz="850" dirty="0"/>
+            <a:endParaRPr lang="en-US" sz="960" dirty="0"/>
           </a:p>
         </p:txBody>
       </p:sp>
@@ -7528,8 +7528,8 @@
         </p:nvSpPr>
         <p:spPr>
           <a:xfrm>
-            <a:off x="2149438" y="2407755"/>
-            <a:ext cx="5182853" cy="389688"/>
+            <a:off x="1851466" y="2674156"/>
+            <a:ext cx="5820338" cy="437619"/>
           </a:xfrm>
           <a:prstGeom prst="rect">
             <a:avLst/>
@@ -7548,7 +7548,7 @@
               <a:buNone/>
             </a:pPr>
             <a:r>
-              <a:rPr lang="en-US" sz="890" b="1" dirty="0">
+              <a:rPr lang="en-US" sz="1000" b="1" dirty="0">
                 <a:solidFill>
                   <a:srgbClr val="FFFFFF"/>
                 </a:solidFill>
@@ -7558,7 +7558,7 @@
               </a:rPr>
               <a:t>Viết một câu: đổi chế độ có phải trả giá gì không?</a:t>
             </a:r>
-            <a:endParaRPr lang="en-US" sz="890" dirty="0"/>
+            <a:endParaRPr lang="en-US" sz="1000" dirty="0"/>
           </a:p>
           <a:p>
             <a:pPr indent="0" marL="0">
@@ -7568,7 +7568,7 @@
               <a:buNone/>
             </a:pPr>
             <a:r>
-              <a:rPr lang="en-US" sz="820" dirty="0">
+              <a:rPr lang="en-US" sz="920" dirty="0">
                 <a:solidFill>
                   <a:srgbClr val="AFC3D4"/>
                 </a:solidFill>
@@ -7578,7 +7578,7 @@
               </a:rPr>
               <a:t>寫一句：換模式要付什麼代價？</a:t>
             </a:r>
-            <a:endParaRPr lang="en-US" sz="890" dirty="0"/>
+            <a:endParaRPr lang="en-US" sz="1000" dirty="0"/>
           </a:p>
         </p:txBody>
       </p:sp>
@@ -7590,8 +7590,8 @@
         </p:nvSpPr>
         <p:spPr>
           <a:xfrm>
-            <a:off x="1681812" y="2907855"/>
-            <a:ext cx="5715427" cy="324740"/>
+            <a:off x="1326323" y="3235767"/>
+            <a:ext cx="6418418" cy="364683"/>
           </a:xfrm>
           <a:prstGeom prst="rect">
             <a:avLst/>
@@ -7610,7 +7610,7 @@
               <a:buNone/>
             </a:pPr>
             <a:r>
-              <a:rPr lang="en-US" sz="890" b="1" dirty="0">
+              <a:rPr lang="en-US" sz="1000" b="1" dirty="0">
                 <a:solidFill>
                   <a:srgbClr val="FFB020"/>
                 </a:solidFill>
@@ -7620,7 +7620,7 @@
               </a:rPr>
               <a:t>Cùng một phần cứng, chỉ đổi chế độ, kết luận lật ngược. Đây là chỗ quan trọng nhất hôm nay.</a:t>
             </a:r>
-            <a:endParaRPr lang="en-US" sz="890" dirty="0"/>
+            <a:endParaRPr lang="en-US" sz="1000" dirty="0"/>
           </a:p>
           <a:p>
             <a:pPr indent="0" marL="0">
@@ -7630,7 +7630,7 @@
               <a:buNone/>
             </a:pPr>
             <a:r>
-              <a:rPr lang="en-US" sz="820" dirty="0">
+              <a:rPr lang="en-US" sz="920" dirty="0">
                 <a:solidFill>
                   <a:srgbClr val="FFB020"/>
                 </a:solidFill>
@@ -7640,7 +7640,7 @@
               </a:rPr>
               <a:t>同一個硬體，只換模式，結論就翻過來。這是今天最重要的一格。</a:t>
             </a:r>
-            <a:endParaRPr lang="en-US" sz="890" dirty="0"/>
+            <a:endParaRPr lang="en-US" sz="1000" dirty="0"/>
           </a:p>
         </p:txBody>
       </p:sp>
@@ -7652,8 +7652,8 @@
         </p:nvSpPr>
         <p:spPr>
           <a:xfrm>
-            <a:off x="1402536" y="3390800"/>
-            <a:ext cx="584532" cy="181855"/>
+            <a:off x="1012696" y="102111"/>
+            <a:ext cx="656429" cy="204222"/>
           </a:xfrm>
           <a:prstGeom prst="rect">
             <a:avLst/>
@@ -7669,7 +7669,7 @@
               <a:buNone/>
             </a:pPr>
             <a:r>
-              <a:rPr lang="en-US" sz="640" dirty="0">
+              <a:rPr lang="en-US" sz="720" dirty="0">
                 <a:solidFill>
                   <a:srgbClr val="9FB3C8"/>
                 </a:solidFill>
@@ -7679,7 +7679,7 @@
               </a:rPr>
               <a:t>4 / 9</a:t>
             </a:r>
-            <a:endParaRPr lang="en-US" sz="640" dirty="0"/>
+            <a:endParaRPr lang="en-US" sz="720" dirty="0"/>
           </a:p>
         </p:txBody>
       </p:sp>
@@ -7691,8 +7691,8 @@
         </p:nvSpPr>
         <p:spPr>
           <a:xfrm>
-            <a:off x="2006553" y="3390800"/>
-            <a:ext cx="1428857" cy="181855"/>
+            <a:off x="1691006" y="102111"/>
+            <a:ext cx="1604604" cy="204222"/>
           </a:xfrm>
           <a:prstGeom prst="rect">
             <a:avLst/>
@@ -7708,7 +7708,7 @@
               <a:buNone/>
             </a:pPr>
             <a:r>
-              <a:rPr lang="en-US" sz="640" dirty="0">
+              <a:rPr lang="en-US" sz="720" dirty="0">
                 <a:solidFill>
                   <a:srgbClr val="9FB3C8"/>
                 </a:solidFill>
@@ -7718,7 +7718,7 @@
               </a:rPr>
               <a:t>Tiết 3 · 第 3 節</a:t>
             </a:r>
-            <a:endParaRPr lang="en-US" sz="640" dirty="0"/>
+            <a:endParaRPr lang="en-US" sz="720" dirty="0"/>
           </a:p>
         </p:txBody>
       </p:sp>
@@ -7748,8 +7748,8 @@
       </p:nvGrpSpPr>
       <p:grpSpPr>
         <a:xfrm>
-          <a:off x="0" y="0"/>
-          <a:ext cx="0" cy="0"/>
+          <a:off x="925172" y="0"/>
+          <a:ext cx="1" cy="1"/>
           <a:chOff x="0" y="0"/>
           <a:chExt cx="0" cy="0"/>
         </a:xfrm>
@@ -7762,8 +7762,8 @@
         </p:nvSpPr>
         <p:spPr>
           <a:xfrm>
-            <a:off x="6130753" y="-947729"/>
-            <a:ext cx="2987610" cy="2987610"/>
+            <a:off x="6322478" y="-1094048"/>
+            <a:ext cx="3355082" cy="3355082"/>
           </a:xfrm>
           <a:prstGeom prst="ellipse">
             <a:avLst/>
@@ -7787,8 +7787,8 @@
         </p:nvSpPr>
         <p:spPr>
           <a:xfrm>
-            <a:off x="7104973" y="1520297"/>
-            <a:ext cx="1688649" cy="1688649"/>
+            <a:off x="7416526" y="1677541"/>
+            <a:ext cx="1896351" cy="1896351"/>
           </a:xfrm>
           <a:prstGeom prst="ellipse">
             <a:avLst/>
@@ -7809,8 +7809,8 @@
         </p:nvSpPr>
         <p:spPr>
           <a:xfrm>
-            <a:off x="1681812" y="364222"/>
-            <a:ext cx="4806155" cy="194844"/>
+            <a:off x="1326323" y="379270"/>
+            <a:ext cx="5397306" cy="218810"/>
           </a:xfrm>
           <a:prstGeom prst="rect">
             <a:avLst/>
@@ -7826,7 +7826,7 @@
               <a:buNone/>
             </a:pPr>
             <a:r>
-              <a:rPr lang="en-US" sz="890" b="1" dirty="0">
+              <a:rPr lang="en-US" sz="1000" b="1" dirty="0">
                 <a:solidFill>
                   <a:srgbClr val="FFB020"/>
                 </a:solidFill>
@@ -7836,7 +7836,7 @@
               </a:rPr>
               <a:t>Nhiệm vụ 3 · 第三題（10 分鐘）</a:t>
             </a:r>
-            <a:endParaRPr lang="en-US" sz="890" dirty="0"/>
+            <a:endParaRPr lang="en-US" sz="1000" dirty="0"/>
           </a:p>
         </p:txBody>
       </p:sp>
@@ -7848,8 +7848,8 @@
         </p:nvSpPr>
         <p:spPr>
           <a:xfrm>
-            <a:off x="1681812" y="585045"/>
-            <a:ext cx="5715427" cy="870304"/>
+            <a:off x="1326323" y="627254"/>
+            <a:ext cx="6418418" cy="977350"/>
           </a:xfrm>
           <a:prstGeom prst="rect">
             <a:avLst/>
@@ -7868,7 +7868,7 @@
               <a:buNone/>
             </a:pPr>
             <a:r>
-              <a:rPr lang="en-US" sz="1630" b="1" dirty="0">
+              <a:rPr lang="en-US" sz="1830" b="1" dirty="0">
                 <a:solidFill>
                   <a:srgbClr val="FFFFFF"/>
                 </a:solidFill>
@@ -7878,7 +7878,7 @@
               </a:rPr>
               <a:t>Cao tốc, 100 km/h, phải thấy xe ở 150 m. Model nào còn sống sót?</a:t>
             </a:r>
-            <a:endParaRPr lang="en-US" sz="1630" dirty="0"/>
+            <a:endParaRPr lang="en-US" sz="1830" dirty="0"/>
           </a:p>
           <a:p>
             <a:pPr indent="0" marL="0">
@@ -7888,7 +7888,7 @@
               <a:buNone/>
             </a:pPr>
             <a:r>
-              <a:rPr lang="en-US" sz="1070" dirty="0">
+              <a:rPr lang="en-US" sz="1200" dirty="0">
                 <a:solidFill>
                   <a:srgbClr val="AFC3D4"/>
                 </a:solidFill>
@@ -7898,7 +7898,7 @@
               </a:rPr>
               <a:t>國道，時速 100，要在 150 公尺外看到車。哪一顆還活著？</a:t>
             </a:r>
-            <a:endParaRPr lang="en-US" sz="1630" dirty="0"/>
+            <a:endParaRPr lang="en-US" sz="1830" dirty="0"/>
           </a:p>
         </p:txBody>
       </p:sp>
@@ -7910,8 +7910,8 @@
         </p:nvSpPr>
         <p:spPr>
           <a:xfrm>
-            <a:off x="1681812" y="1362092"/>
-            <a:ext cx="5780375" cy="441647"/>
+            <a:off x="1326323" y="1499877"/>
+            <a:ext cx="6491354" cy="495969"/>
           </a:xfrm>
           <a:prstGeom prst="roundRect">
             <a:avLst>
@@ -7932,8 +7932,8 @@
         </p:nvSpPr>
         <p:spPr>
           <a:xfrm>
-            <a:off x="1798719" y="1466008"/>
-            <a:ext cx="233813" cy="233813"/>
+            <a:off x="1457609" y="1616575"/>
+            <a:ext cx="262572" cy="262572"/>
           </a:xfrm>
           <a:prstGeom prst="ellipse">
             <a:avLst/>
@@ -7952,8 +7952,8 @@
         </p:nvSpPr>
         <p:spPr>
           <a:xfrm>
-            <a:off x="1798719" y="1485493"/>
-            <a:ext cx="233813" cy="194844"/>
+            <a:off x="1457609" y="1638456"/>
+            <a:ext cx="262572" cy="218810"/>
           </a:xfrm>
           <a:prstGeom prst="rect">
             <a:avLst/>
@@ -7969,7 +7969,7 @@
               <a:buNone/>
             </a:pPr>
             <a:r>
-              <a:rPr lang="en-US" sz="850" b="1" dirty="0">
+              <a:rPr lang="en-US" sz="960" b="1" dirty="0">
                 <a:solidFill>
                   <a:srgbClr val="FFFFFF"/>
                 </a:solidFill>
@@ -7979,7 +7979,7 @@
               </a:rPr>
               <a:t>1</a:t>
             </a:r>
-            <a:endParaRPr lang="en-US" sz="850" dirty="0"/>
+            <a:endParaRPr lang="en-US" sz="960" dirty="0"/>
           </a:p>
         </p:txBody>
       </p:sp>
@@ -7991,8 +7991,8 @@
         </p:nvSpPr>
         <p:spPr>
           <a:xfrm>
-            <a:off x="2149438" y="1394566"/>
-            <a:ext cx="5182853" cy="389688"/>
+            <a:off x="1851466" y="1536345"/>
+            <a:ext cx="5820338" cy="437619"/>
           </a:xfrm>
           <a:prstGeom prst="rect">
             <a:avLst/>
@@ -8011,7 +8011,7 @@
               <a:buNone/>
             </a:pPr>
             <a:r>
-              <a:rPr lang="en-US" sz="890" b="1" dirty="0">
+              <a:rPr lang="en-US" sz="1000" b="1" dirty="0">
                 <a:solidFill>
                   <a:srgbClr val="FFFFFF"/>
                 </a:solidFill>
@@ -8021,7 +8021,7 @@
               </a:rPr>
               <a:t>Chép quãng đường phanh mà công cụ tính ra</a:t>
             </a:r>
-            <a:endParaRPr lang="en-US" sz="890" dirty="0"/>
+            <a:endParaRPr lang="en-US" sz="1000" dirty="0"/>
           </a:p>
           <a:p>
             <a:pPr indent="0" marL="0">
@@ -8031,7 +8031,7 @@
               <a:buNone/>
             </a:pPr>
             <a:r>
-              <a:rPr lang="en-US" sz="820" dirty="0">
+              <a:rPr lang="en-US" sz="920" dirty="0">
                 <a:solidFill>
                   <a:srgbClr val="AFC3D4"/>
                 </a:solidFill>
@@ -8041,7 +8041,7 @@
               </a:rPr>
               <a:t>抄下工具算出來的煞停距離</a:t>
             </a:r>
-            <a:endParaRPr lang="en-US" sz="890" dirty="0"/>
+            <a:endParaRPr lang="en-US" sz="1000" dirty="0"/>
           </a:p>
         </p:txBody>
       </p:sp>
@@ -8053,8 +8053,8 @@
         </p:nvSpPr>
         <p:spPr>
           <a:xfrm>
-            <a:off x="1681812" y="1868686"/>
-            <a:ext cx="5780375" cy="441647"/>
+            <a:off x="1326323" y="2068782"/>
+            <a:ext cx="6491354" cy="495969"/>
           </a:xfrm>
           <a:prstGeom prst="roundRect">
             <a:avLst>
@@ -8075,8 +8075,8 @@
         </p:nvSpPr>
         <p:spPr>
           <a:xfrm>
-            <a:off x="1798719" y="1972603"/>
-            <a:ext cx="233813" cy="233813"/>
+            <a:off x="1457609" y="2185481"/>
+            <a:ext cx="262572" cy="262572"/>
           </a:xfrm>
           <a:prstGeom prst="ellipse">
             <a:avLst/>
@@ -8095,8 +8095,8 @@
         </p:nvSpPr>
         <p:spPr>
           <a:xfrm>
-            <a:off x="1798719" y="1992087"/>
-            <a:ext cx="233813" cy="194844"/>
+            <a:off x="1457609" y="2207362"/>
+            <a:ext cx="262572" cy="218810"/>
           </a:xfrm>
           <a:prstGeom prst="rect">
             <a:avLst/>
@@ -8112,7 +8112,7 @@
               <a:buNone/>
             </a:pPr>
             <a:r>
-              <a:rPr lang="en-US" sz="850" b="1" dirty="0">
+              <a:rPr lang="en-US" sz="960" b="1" dirty="0">
                 <a:solidFill>
                   <a:srgbClr val="FFFFFF"/>
                 </a:solidFill>
@@ -8122,7 +8122,7 @@
               </a:rPr>
               <a:t>2</a:t>
             </a:r>
-            <a:endParaRPr lang="en-US" sz="850" dirty="0"/>
+            <a:endParaRPr lang="en-US" sz="960" dirty="0"/>
           </a:p>
         </p:txBody>
       </p:sp>
@@ -8134,8 +8134,8 @@
         </p:nvSpPr>
         <p:spPr>
           <a:xfrm>
-            <a:off x="2149438" y="1901160"/>
-            <a:ext cx="5182853" cy="389688"/>
+            <a:off x="1851466" y="2105250"/>
+            <a:ext cx="5820338" cy="437619"/>
           </a:xfrm>
           <a:prstGeom prst="rect">
             <a:avLst/>
@@ -8154,7 +8154,7 @@
               <a:buNone/>
             </a:pPr>
             <a:r>
-              <a:rPr lang="en-US" sz="890" b="1" dirty="0">
+              <a:rPr lang="en-US" sz="1000" b="1" dirty="0">
                 <a:solidFill>
                   <a:srgbClr val="FFFFFF"/>
                 </a:solidFill>
@@ -8164,7 +8164,7 @@
               </a:rPr>
               <a:t>Camera tắc ở đâu? LD-16 tắc ở đâu? Hai chỗ khác nhau</a:t>
             </a:r>
-            <a:endParaRPr lang="en-US" sz="890" dirty="0"/>
+            <a:endParaRPr lang="en-US" sz="1000" dirty="0"/>
           </a:p>
           <a:p>
             <a:pPr indent="0" marL="0">
@@ -8174,7 +8174,7 @@
               <a:buNone/>
             </a:pPr>
             <a:r>
-              <a:rPr lang="en-US" sz="820" dirty="0">
+              <a:rPr lang="en-US" sz="920" dirty="0">
                 <a:solidFill>
                   <a:srgbClr val="AFC3D4"/>
                 </a:solidFill>
@@ -8184,7 +8184,7 @@
               </a:rPr>
               <a:t>相機卡在哪？LD-16 卡在哪？兩個卡的地方不一樣</a:t>
             </a:r>
-            <a:endParaRPr lang="en-US" sz="890" dirty="0"/>
+            <a:endParaRPr lang="en-US" sz="1000" dirty="0"/>
           </a:p>
         </p:txBody>
       </p:sp>
@@ -8196,8 +8196,8 @@
         </p:nvSpPr>
         <p:spPr>
           <a:xfrm>
-            <a:off x="1681812" y="2375281"/>
-            <a:ext cx="5780375" cy="441647"/>
+            <a:off x="1326323" y="2637687"/>
+            <a:ext cx="6491354" cy="495969"/>
           </a:xfrm>
           <a:prstGeom prst="roundRect">
             <a:avLst>
@@ -8218,8 +8218,8 @@
         </p:nvSpPr>
         <p:spPr>
           <a:xfrm>
-            <a:off x="1798719" y="2479198"/>
-            <a:ext cx="233813" cy="233813"/>
+            <a:off x="1457609" y="2754386"/>
+            <a:ext cx="262572" cy="262572"/>
           </a:xfrm>
           <a:prstGeom prst="ellipse">
             <a:avLst/>
@@ -8238,8 +8238,8 @@
         </p:nvSpPr>
         <p:spPr>
           <a:xfrm>
-            <a:off x="1798719" y="2498682"/>
-            <a:ext cx="233813" cy="194844"/>
+            <a:off x="1457609" y="2776267"/>
+            <a:ext cx="262572" cy="218810"/>
           </a:xfrm>
           <a:prstGeom prst="rect">
             <a:avLst/>
@@ -8255,7 +8255,7 @@
               <a:buNone/>
             </a:pPr>
             <a:r>
-              <a:rPr lang="en-US" sz="850" b="1" dirty="0">
+              <a:rPr lang="en-US" sz="960" b="1" dirty="0">
                 <a:solidFill>
                   <a:srgbClr val="FFFFFF"/>
                 </a:solidFill>
@@ -8265,7 +8265,7 @@
               </a:rPr>
               <a:t>3</a:t>
             </a:r>
-            <a:endParaRPr lang="en-US" sz="850" dirty="0"/>
+            <a:endParaRPr lang="en-US" sz="960" dirty="0"/>
           </a:p>
         </p:txBody>
       </p:sp>
@@ -8277,8 +8277,8 @@
         </p:nvSpPr>
         <p:spPr>
           <a:xfrm>
-            <a:off x="2149438" y="2407755"/>
-            <a:ext cx="5182853" cy="389688"/>
+            <a:off x="1851466" y="2674156"/>
+            <a:ext cx="5820338" cy="437619"/>
           </a:xfrm>
           <a:prstGeom prst="rect">
             <a:avLst/>
@@ -8297,7 +8297,7 @@
               <a:buNone/>
             </a:pPr>
             <a:r>
-              <a:rPr lang="en-US" sz="890" b="1" dirty="0">
+              <a:rPr lang="en-US" sz="1000" b="1" dirty="0">
                 <a:solidFill>
                   <a:srgbClr val="FFFFFF"/>
                 </a:solidFill>
@@ -8307,7 +8307,7 @@
               </a:rPr>
               <a:t>AT128 qua được, nhưng chỉ còn mấy điểm trên chiếc xe ở 150 m?</a:t>
             </a:r>
-            <a:endParaRPr lang="en-US" sz="890" dirty="0"/>
+            <a:endParaRPr lang="en-US" sz="1000" dirty="0"/>
           </a:p>
           <a:p>
             <a:pPr indent="0" marL="0">
@@ -8317,7 +8317,7 @@
               <a:buNone/>
             </a:pPr>
             <a:r>
-              <a:rPr lang="en-US" sz="820" dirty="0">
+              <a:rPr lang="en-US" sz="920" dirty="0">
                 <a:solidFill>
                   <a:srgbClr val="AFC3D4"/>
                 </a:solidFill>
@@ -8327,7 +8327,7 @@
               </a:rPr>
               <a:t>AT128 過了，可是 150 公尺外那台車身上只剩幾個點？</a:t>
             </a:r>
-            <a:endParaRPr lang="en-US" sz="890" dirty="0"/>
+            <a:endParaRPr lang="en-US" sz="1000" dirty="0"/>
           </a:p>
         </p:txBody>
       </p:sp>
@@ -8339,8 +8339,8 @@
         </p:nvSpPr>
         <p:spPr>
           <a:xfrm>
-            <a:off x="1681812" y="2907855"/>
-            <a:ext cx="5715427" cy="324740"/>
+            <a:off x="1326323" y="3235767"/>
+            <a:ext cx="6418418" cy="364683"/>
           </a:xfrm>
           <a:prstGeom prst="rect">
             <a:avLst/>
@@ -8359,7 +8359,7 @@
               <a:buNone/>
             </a:pPr>
             <a:r>
-              <a:rPr lang="en-US" sz="890" b="1" dirty="0">
+              <a:rPr lang="en-US" sz="1000" b="1" dirty="0">
                 <a:solidFill>
                   <a:srgbClr val="FFB020"/>
                 </a:solidFill>
@@ -8369,7 +8369,7 @@
               </a:rPr>
               <a:t>Ở tốc độ cao, «đo được xa» và «nhìn được rõ» tách hẳn ra làm hai chuyện.</a:t>
             </a:r>
-            <a:endParaRPr lang="en-US" sz="890" dirty="0"/>
+            <a:endParaRPr lang="en-US" sz="1000" dirty="0"/>
           </a:p>
           <a:p>
             <a:pPr indent="0" marL="0">
@@ -8379,7 +8379,7 @@
               <a:buNone/>
             </a:pPr>
             <a:r>
-              <a:rPr lang="en-US" sz="820" dirty="0">
+              <a:rPr lang="en-US" sz="920" dirty="0">
                 <a:solidFill>
                   <a:srgbClr val="FFB020"/>
                 </a:solidFill>
@@ -8389,7 +8389,7 @@
               </a:rPr>
               <a:t>到了高速，「測得到遠」和「看得清楚」就完全變成兩件事了。</a:t>
             </a:r>
-            <a:endParaRPr lang="en-US" sz="890" dirty="0"/>
+            <a:endParaRPr lang="en-US" sz="1000" dirty="0"/>
           </a:p>
         </p:txBody>
       </p:sp>
@@ -8401,8 +8401,8 @@
         </p:nvSpPr>
         <p:spPr>
           <a:xfrm>
-            <a:off x="1402536" y="3390800"/>
-            <a:ext cx="584532" cy="181855"/>
+            <a:off x="1012696" y="102111"/>
+            <a:ext cx="656429" cy="204222"/>
           </a:xfrm>
           <a:prstGeom prst="rect">
             <a:avLst/>
@@ -8418,7 +8418,7 @@
               <a:buNone/>
             </a:pPr>
             <a:r>
-              <a:rPr lang="en-US" sz="640" dirty="0">
+              <a:rPr lang="en-US" sz="720" dirty="0">
                 <a:solidFill>
                   <a:srgbClr val="9FB3C8"/>
                 </a:solidFill>
@@ -8428,7 +8428,7 @@
               </a:rPr>
               <a:t>5 / 9</a:t>
             </a:r>
-            <a:endParaRPr lang="en-US" sz="640" dirty="0"/>
+            <a:endParaRPr lang="en-US" sz="720" dirty="0"/>
           </a:p>
         </p:txBody>
       </p:sp>
@@ -8440,8 +8440,8 @@
         </p:nvSpPr>
         <p:spPr>
           <a:xfrm>
-            <a:off x="2006553" y="3390800"/>
-            <a:ext cx="1428857" cy="181855"/>
+            <a:off x="1691006" y="102111"/>
+            <a:ext cx="1604604" cy="204222"/>
           </a:xfrm>
           <a:prstGeom prst="rect">
             <a:avLst/>
@@ -8457,7 +8457,7 @@
               <a:buNone/>
             </a:pPr>
             <a:r>
-              <a:rPr lang="en-US" sz="640" dirty="0">
+              <a:rPr lang="en-US" sz="720" dirty="0">
                 <a:solidFill>
                   <a:srgbClr val="9FB3C8"/>
                 </a:solidFill>
@@ -8467,7 +8467,7 @@
               </a:rPr>
               <a:t>Tiết 3 · 第 3 節</a:t>
             </a:r>
-            <a:endParaRPr lang="en-US" sz="640" dirty="0"/>
+            <a:endParaRPr lang="en-US" sz="720" dirty="0"/>
           </a:p>
         </p:txBody>
       </p:sp>
@@ -8490,8 +8490,8 @@
       </p:nvGrpSpPr>
       <p:grpSpPr>
         <a:xfrm>
-          <a:off x="0" y="0"/>
-          <a:ext cx="0" cy="0"/>
+          <a:off x="927820" y="0"/>
+          <a:ext cx="1" cy="1"/>
           <a:chOff x="0" y="0"/>
           <a:chExt cx="0" cy="0"/>
         </a:xfrm>
@@ -8504,8 +8504,8 @@
         </p:nvSpPr>
         <p:spPr>
           <a:xfrm>
-            <a:off x="1681812" y="234326"/>
-            <a:ext cx="5780375" cy="597522"/>
+            <a:off x="1328680" y="233228"/>
+            <a:ext cx="6486641" cy="670529"/>
           </a:xfrm>
           <a:prstGeom prst="rect">
             <a:avLst/>
@@ -8524,7 +8524,7 @@
               <a:buNone/>
             </a:pPr>
             <a:r>
-              <a:rPr lang="en-US" sz="1560" b="1" dirty="0">
+              <a:rPr lang="en-US" sz="1750" b="1" dirty="0">
                 <a:solidFill>
                   <a:srgbClr val="0B1F3A"/>
                 </a:solidFill>
@@ -8534,7 +8534,7 @@
               </a:rPr>
               <a:t>Không có model nào thắng cả ba tình huống</a:t>
             </a:r>
-            <a:endParaRPr lang="en-US" sz="1560" dirty="0"/>
+            <a:endParaRPr lang="en-US" sz="1750" dirty="0"/>
           </a:p>
           <a:p>
             <a:pPr indent="0" marL="0">
@@ -8544,7 +8544,7 @@
               <a:buNone/>
             </a:pPr>
             <a:r>
-              <a:rPr lang="en-US" sz="960" dirty="0">
+              <a:rPr lang="en-US" sz="1080" dirty="0">
                 <a:solidFill>
                   <a:srgbClr val="5F7183"/>
                 </a:solidFill>
@@ -8554,7 +8554,7 @@
               </a:rPr>
               <a:t>沒有一顆感測器三個情境都贏</a:t>
             </a:r>
-            <a:endParaRPr lang="en-US" sz="1560" dirty="0"/>
+            <a:endParaRPr lang="en-US" sz="1750" dirty="0"/>
           </a:p>
         </p:txBody>
       </p:sp>
@@ -8566,8 +8566,8 @@
         </p:nvSpPr>
         <p:spPr>
           <a:xfrm>
-            <a:off x="1681812" y="961744"/>
-            <a:ext cx="2532973" cy="1597722"/>
+            <a:off x="1328680" y="1049524"/>
+            <a:ext cx="2842461" cy="1792937"/>
           </a:xfrm>
           <a:prstGeom prst="roundRect">
             <a:avLst>
@@ -8588,8 +8588,8 @@
         </p:nvSpPr>
         <p:spPr>
           <a:xfrm>
-            <a:off x="1798719" y="1052671"/>
-            <a:ext cx="2299161" cy="233813"/>
+            <a:off x="1459870" y="1151561"/>
+            <a:ext cx="2580080" cy="262381"/>
           </a:xfrm>
           <a:prstGeom prst="rect">
             <a:avLst/>
@@ -8608,7 +8608,7 @@
               <a:buNone/>
             </a:pPr>
             <a:r>
-              <a:rPr lang="en-US" sz="750" b="1" dirty="0">
+              <a:rPr lang="en-US" sz="840" b="1" dirty="0">
                 <a:solidFill>
                   <a:srgbClr val="00A896"/>
                 </a:solidFill>
@@ -8618,7 +8618,7 @@
               </a:rPr>
               <a:t>Cái ta vừa làm</a:t>
             </a:r>
-            <a:endParaRPr lang="en-US" sz="750" dirty="0"/>
+            <a:endParaRPr lang="en-US" sz="840" dirty="0"/>
           </a:p>
           <a:p>
             <a:pPr indent="0" marL="0">
@@ -8628,7 +8628,7 @@
               <a:buNone/>
             </a:pPr>
             <a:r>
-              <a:rPr lang="en-US" sz="670" dirty="0">
+              <a:rPr lang="en-US" sz="760" dirty="0">
                 <a:solidFill>
                   <a:srgbClr val="00A896"/>
                 </a:solidFill>
@@ -8638,7 +8638,7 @@
               </a:rPr>
               <a:t>我們剛剛做的事</a:t>
             </a:r>
-            <a:endParaRPr lang="en-US" sz="750" dirty="0"/>
+            <a:endParaRPr lang="en-US" sz="840" dirty="0"/>
           </a:p>
         </p:txBody>
       </p:sp>
@@ -8650,8 +8650,8 @@
         </p:nvSpPr>
         <p:spPr>
           <a:xfrm>
-            <a:off x="1798719" y="1338442"/>
-            <a:ext cx="2299161" cy="402678"/>
+            <a:off x="1459870" y="1472249"/>
+            <a:ext cx="2580080" cy="451878"/>
           </a:xfrm>
           <a:prstGeom prst="rect">
             <a:avLst/>
@@ -8667,7 +8667,7 @@
               <a:buNone/>
             </a:pPr>
             <a:r>
-              <a:rPr lang="en-US" sz="1920" b="1" dirty="0">
+              <a:rPr lang="en-US" sz="2150" b="1" dirty="0">
                 <a:solidFill>
                   <a:srgbClr val="FFFFFF"/>
                 </a:solidFill>
@@ -8677,7 +8677,7 @@
               </a:rPr>
               <a:t>4 × 3</a:t>
             </a:r>
-            <a:endParaRPr lang="en-US" sz="1920" dirty="0"/>
+            <a:endParaRPr lang="en-US" sz="2150" dirty="0"/>
           </a:p>
         </p:txBody>
       </p:sp>
@@ -8689,8 +8689,8 @@
         </p:nvSpPr>
         <p:spPr>
           <a:xfrm>
-            <a:off x="1798719" y="1767099"/>
-            <a:ext cx="2299161" cy="285771"/>
+            <a:off x="1459870" y="1953281"/>
+            <a:ext cx="2580080" cy="320688"/>
           </a:xfrm>
           <a:prstGeom prst="rect">
             <a:avLst/>
@@ -8709,7 +8709,7 @@
               <a:buNone/>
             </a:pPr>
             <a:r>
-              <a:rPr lang="en-US" sz="820" b="1" dirty="0">
+              <a:rPr lang="en-US" sz="920" b="1" dirty="0">
                 <a:solidFill>
                   <a:srgbClr val="AFC3D4"/>
                 </a:solidFill>
@@ -8719,7 +8719,7 @@
               </a:rPr>
               <a:t>bốn model, ba tình huống</a:t>
             </a:r>
-            <a:endParaRPr lang="en-US" sz="820" dirty="0"/>
+            <a:endParaRPr lang="en-US" sz="920" dirty="0"/>
           </a:p>
           <a:p>
             <a:pPr indent="0" marL="0">
@@ -8729,7 +8729,7 @@
               <a:buNone/>
             </a:pPr>
             <a:r>
-              <a:rPr lang="en-US" sz="750" dirty="0">
+              <a:rPr lang="en-US" sz="840" dirty="0">
                 <a:solidFill>
                   <a:srgbClr val="8AA0B4"/>
                 </a:solidFill>
@@ -8739,7 +8739,7 @@
               </a:rPr>
               <a:t>四個型號、三個情境</a:t>
             </a:r>
-            <a:endParaRPr lang="en-US" sz="820" dirty="0"/>
+            <a:endParaRPr lang="en-US" sz="920" dirty="0"/>
           </a:p>
         </p:txBody>
       </p:sp>
@@ -8751,8 +8751,8 @@
         </p:nvSpPr>
         <p:spPr>
           <a:xfrm>
-            <a:off x="1798719" y="2169777"/>
-            <a:ext cx="2299161" cy="285771"/>
+            <a:off x="1459870" y="2405159"/>
+            <a:ext cx="2580080" cy="320688"/>
           </a:xfrm>
           <a:prstGeom prst="rect">
             <a:avLst/>
@@ -8771,7 +8771,7 @@
               <a:buNone/>
             </a:pPr>
             <a:r>
-              <a:rPr lang="en-US" sz="710" b="1" dirty="0">
+              <a:rPr lang="en-US" sz="800" b="1" dirty="0">
                 <a:solidFill>
                   <a:srgbClr val="7E93A6"/>
                 </a:solidFill>
@@ -8781,7 +8781,7 @@
               </a:rPr>
               <a:t>AT128 qua cả ba · camera hai · OS1 một · LD-16 không cái nào</a:t>
             </a:r>
-            <a:endParaRPr lang="en-US" sz="710" dirty="0"/>
+            <a:endParaRPr lang="en-US" sz="800" dirty="0"/>
           </a:p>
           <a:p>
             <a:pPr indent="0" marL="0">
@@ -8791,7 +8791,7 @@
               <a:buNone/>
             </a:pPr>
             <a:r>
-              <a:rPr lang="en-US" sz="640" dirty="0">
+              <a:rPr lang="en-US" sz="720" dirty="0">
                 <a:solidFill>
                   <a:srgbClr val="7E93A6"/>
                 </a:solidFill>
@@ -8801,7 +8801,7 @@
               </a:rPr>
               <a:t>AT128 三個都過・相機兩個・OS1 一個・LD-16 都沒過</a:t>
             </a:r>
-            <a:endParaRPr lang="en-US" sz="710" dirty="0"/>
+            <a:endParaRPr lang="en-US" sz="800" dirty="0"/>
           </a:p>
         </p:txBody>
       </p:sp>
@@ -8813,8 +8813,8 @@
         </p:nvSpPr>
         <p:spPr>
           <a:xfrm>
-            <a:off x="4299218" y="1656688"/>
-            <a:ext cx="545564" cy="207834"/>
+            <a:off x="4265889" y="1829378"/>
+            <a:ext cx="612222" cy="233228"/>
           </a:xfrm>
           <a:prstGeom prst="rightArrow">
             <a:avLst/>
@@ -8833,8 +8833,8 @@
         </p:nvSpPr>
         <p:spPr>
           <a:xfrm flipH="1">
-            <a:off x="4429114" y="1617719"/>
-            <a:ext cx="285771" cy="285771"/>
+            <a:off x="4411656" y="1785648"/>
+            <a:ext cx="320688" cy="320688"/>
           </a:xfrm>
           <a:prstGeom prst="line">
             <a:avLst/>
@@ -8856,8 +8856,8 @@
         </p:nvSpPr>
         <p:spPr>
           <a:xfrm>
-            <a:off x="4429114" y="1617719"/>
-            <a:ext cx="285771" cy="285771"/>
+            <a:off x="4411656" y="1785648"/>
+            <a:ext cx="320688" cy="320688"/>
           </a:xfrm>
           <a:prstGeom prst="line">
             <a:avLst/>
@@ -8879,8 +8879,8 @@
         </p:nvSpPr>
         <p:spPr>
           <a:xfrm>
-            <a:off x="4929214" y="961744"/>
-            <a:ext cx="2532973" cy="1597722"/>
+            <a:off x="4972860" y="1049524"/>
+            <a:ext cx="2842461" cy="1792937"/>
           </a:xfrm>
           <a:prstGeom prst="roundRect">
             <a:avLst>
@@ -8906,8 +8906,8 @@
         </p:nvSpPr>
         <p:spPr>
           <a:xfrm>
-            <a:off x="5046121" y="1052671"/>
-            <a:ext cx="2299161" cy="233813"/>
+            <a:off x="5104050" y="1151561"/>
+            <a:ext cx="2580080" cy="262381"/>
           </a:xfrm>
           <a:prstGeom prst="rect">
             <a:avLst/>
@@ -8926,7 +8926,7 @@
               <a:buNone/>
             </a:pPr>
             <a:r>
-              <a:rPr lang="en-US" sz="750" b="1" dirty="0">
+              <a:rPr lang="en-US" sz="840" b="1" dirty="0">
                 <a:solidFill>
                   <a:srgbClr val="D9463E"/>
                 </a:solidFill>
@@ -8936,7 +8936,7 @@
               </a:rPr>
               <a:t>Nhưng câu hỏi thật là…</a:t>
             </a:r>
-            <a:endParaRPr lang="en-US" sz="750" dirty="0"/>
+            <a:endParaRPr lang="en-US" sz="840" dirty="0"/>
           </a:p>
           <a:p>
             <a:pPr indent="0" marL="0">
@@ -8946,7 +8946,7 @@
               <a:buNone/>
             </a:pPr>
             <a:r>
-              <a:rPr lang="en-US" sz="670" dirty="0">
+              <a:rPr lang="en-US" sz="760" dirty="0">
                 <a:solidFill>
                   <a:srgbClr val="D9463E"/>
                 </a:solidFill>
@@ -8956,7 +8956,7 @@
               </a:rPr>
               <a:t>但真正的問題是……</a:t>
             </a:r>
-            <a:endParaRPr lang="en-US" sz="750" dirty="0"/>
+            <a:endParaRPr lang="en-US" sz="840" dirty="0"/>
           </a:p>
         </p:txBody>
       </p:sp>
@@ -8968,8 +8968,8 @@
         </p:nvSpPr>
         <p:spPr>
           <a:xfrm>
-            <a:off x="5353000" y="1687116"/>
-            <a:ext cx="263040" cy="120998"/>
+            <a:off x="5448425" y="1863525"/>
+            <a:ext cx="295179" cy="135782"/>
           </a:xfrm>
           <a:prstGeom prst="roundRect">
             <a:avLst>
@@ -8990,8 +8990,8 @@
         </p:nvSpPr>
         <p:spPr>
           <a:xfrm>
-            <a:off x="5452955" y="1711315"/>
-            <a:ext cx="89433" cy="72599"/>
+            <a:off x="5560593" y="1890681"/>
+            <a:ext cx="100361" cy="81470"/>
           </a:xfrm>
           <a:prstGeom prst="roundRect">
             <a:avLst>
@@ -9012,8 +9012,8 @@
         </p:nvSpPr>
         <p:spPr>
           <a:xfrm>
-            <a:off x="5755382" y="1807120"/>
-            <a:ext cx="61376" cy="50659"/>
+            <a:off x="5899971" y="1998191"/>
+            <a:ext cx="68875" cy="56849"/>
           </a:xfrm>
           <a:prstGeom prst="roundRect">
             <a:avLst>
@@ -9034,8 +9034,8 @@
         </p:nvSpPr>
         <p:spPr>
           <a:xfrm>
-            <a:off x="5668341" y="1932879"/>
-            <a:ext cx="61376" cy="50659"/>
+            <a:off x="5802296" y="2139315"/>
+            <a:ext cx="68875" cy="56849"/>
           </a:xfrm>
           <a:prstGeom prst="roundRect">
             <a:avLst>
@@ -9056,8 +9056,8 @@
         </p:nvSpPr>
         <p:spPr>
           <a:xfrm>
-            <a:off x="5523824" y="2002209"/>
-            <a:ext cx="61376" cy="50659"/>
+            <a:off x="5640121" y="2217117"/>
+            <a:ext cx="68875" cy="56849"/>
           </a:xfrm>
           <a:prstGeom prst="roundRect">
             <a:avLst>
@@ -9078,8 +9078,8 @@
         </p:nvSpPr>
         <p:spPr>
           <a:xfrm>
-            <a:off x="5360552" y="1996534"/>
-            <a:ext cx="61376" cy="50659"/>
+            <a:off x="5456900" y="2210748"/>
+            <a:ext cx="68875" cy="56849"/>
           </a:xfrm>
           <a:prstGeom prst="roundRect">
             <a:avLst>
@@ -9100,8 +9100,8 @@
         </p:nvSpPr>
         <p:spPr>
           <a:xfrm>
-            <a:off x="5222274" y="1917374"/>
-            <a:ext cx="61376" cy="50659"/>
+            <a:off x="5301727" y="2121916"/>
+            <a:ext cx="68875" cy="56849"/>
           </a:xfrm>
           <a:prstGeom prst="roundRect">
             <a:avLst>
@@ -9122,8 +9122,8 @@
         </p:nvSpPr>
         <p:spPr>
           <a:xfrm>
-            <a:off x="5146042" y="1785940"/>
-            <a:ext cx="61376" cy="50659"/>
+            <a:off x="5216181" y="1974424"/>
+            <a:ext cx="68875" cy="56849"/>
           </a:xfrm>
           <a:prstGeom prst="roundRect">
             <a:avLst>
@@ -9144,8 +9144,8 @@
         </p:nvSpPr>
         <p:spPr>
           <a:xfrm>
-            <a:off x="5152282" y="1637450"/>
-            <a:ext cx="61376" cy="50659"/>
+            <a:off x="5223184" y="1807791"/>
+            <a:ext cx="68875" cy="56849"/>
           </a:xfrm>
           <a:prstGeom prst="roundRect">
             <a:avLst>
@@ -9166,8 +9166,8 @@
         </p:nvSpPr>
         <p:spPr>
           <a:xfrm>
-            <a:off x="5239323" y="1511692"/>
-            <a:ext cx="61376" cy="50659"/>
+            <a:off x="5320858" y="1666666"/>
+            <a:ext cx="68875" cy="56849"/>
           </a:xfrm>
           <a:prstGeom prst="roundRect">
             <a:avLst>
@@ -9188,8 +9188,8 @@
         </p:nvSpPr>
         <p:spPr>
           <a:xfrm>
-            <a:off x="5383840" y="1442361"/>
-            <a:ext cx="61376" cy="50659"/>
+            <a:off x="5483034" y="1588865"/>
+            <a:ext cx="68875" cy="56849"/>
           </a:xfrm>
           <a:prstGeom prst="roundRect">
             <a:avLst>
@@ -9210,8 +9210,8 @@
         </p:nvSpPr>
         <p:spPr>
           <a:xfrm>
-            <a:off x="5547112" y="1448036"/>
-            <a:ext cx="61376" cy="50659"/>
+            <a:off x="5666254" y="1595233"/>
+            <a:ext cx="68875" cy="56849"/>
           </a:xfrm>
           <a:prstGeom prst="roundRect">
             <a:avLst>
@@ -9232,8 +9232,8 @@
         </p:nvSpPr>
         <p:spPr>
           <a:xfrm>
-            <a:off x="5685390" y="1527196"/>
-            <a:ext cx="61376" cy="50659"/>
+            <a:off x="5821428" y="1684066"/>
+            <a:ext cx="68875" cy="56849"/>
           </a:xfrm>
           <a:prstGeom prst="roundRect">
             <a:avLst>
@@ -9254,8 +9254,8 @@
         </p:nvSpPr>
         <p:spPr>
           <a:xfrm>
-            <a:off x="5761622" y="1658630"/>
-            <a:ext cx="61376" cy="50659"/>
+            <a:off x="5906974" y="1831558"/>
+            <a:ext cx="68875" cy="56849"/>
           </a:xfrm>
           <a:prstGeom prst="roundRect">
             <a:avLst>
@@ -9276,8 +9276,8 @@
         </p:nvSpPr>
         <p:spPr>
           <a:xfrm>
-            <a:off x="5851476" y="1364422"/>
-            <a:ext cx="1493805" cy="519584"/>
+            <a:off x="6007807" y="1501402"/>
+            <a:ext cx="1676323" cy="583069"/>
           </a:xfrm>
           <a:prstGeom prst="rect">
             <a:avLst/>
@@ -9296,7 +9296,7 @@
               <a:buNone/>
             </a:pPr>
             <a:r>
-              <a:rPr lang="en-US" sz="920" b="1" dirty="0">
+              <a:rPr lang="en-US" sz="1040" b="1" dirty="0">
                 <a:solidFill>
                   <a:srgbClr val="A32C25"/>
                 </a:solidFill>
@@ -9306,7 +9306,7 @@
               </a:rPr>
               <a:t>Vậy cứ mua AT128 cho mọi xe là xong?</a:t>
             </a:r>
-            <a:endParaRPr lang="en-US" sz="920" dirty="0"/>
+            <a:endParaRPr lang="en-US" sz="1040" dirty="0"/>
           </a:p>
           <a:p>
             <a:pPr indent="0" marL="0">
@@ -9316,7 +9316,7 @@
               <a:buNone/>
             </a:pPr>
             <a:r>
-              <a:rPr lang="en-US" sz="780" dirty="0">
+              <a:rPr lang="en-US" sz="880" dirty="0">
                 <a:solidFill>
                   <a:srgbClr val="A32C25"/>
                 </a:solidFill>
@@ -9326,7 +9326,7 @@
               </a:rPr>
               <a:t>那每台車都買 AT128 就好了？</a:t>
             </a:r>
-            <a:endParaRPr lang="en-US" sz="920" dirty="0"/>
+            <a:endParaRPr lang="en-US" sz="1040" dirty="0"/>
           </a:p>
         </p:txBody>
       </p:sp>
@@ -9338,8 +9338,8 @@
         </p:nvSpPr>
         <p:spPr>
           <a:xfrm>
-            <a:off x="5046121" y="2169777"/>
-            <a:ext cx="2299161" cy="285771"/>
+            <a:off x="5104050" y="2405159"/>
+            <a:ext cx="2580080" cy="320688"/>
           </a:xfrm>
           <a:prstGeom prst="rect">
             <a:avLst/>
@@ -9358,7 +9358,7 @@
               <a:buNone/>
             </a:pPr>
             <a:r>
-              <a:rPr lang="en-US" sz="710" b="1" dirty="0">
+              <a:rPr lang="en-US" sz="800" b="1" dirty="0">
                 <a:solidFill>
                   <a:srgbClr val="A32C25"/>
                 </a:solidFill>
@@ -9368,7 +9368,7 @@
               </a:rPr>
               <a:t>Giá, điện, chỗ lắp — và nó chỉ thấy 120° phía trước</a:t>
             </a:r>
-            <a:endParaRPr lang="en-US" sz="710" dirty="0"/>
+            <a:endParaRPr lang="en-US" sz="800" dirty="0"/>
           </a:p>
           <a:p>
             <a:pPr indent="0" marL="0">
@@ -9378,7 +9378,7 @@
               <a:buNone/>
             </a:pPr>
             <a:r>
-              <a:rPr lang="en-US" sz="640" dirty="0">
+              <a:rPr lang="en-US" sz="720" dirty="0">
                 <a:solidFill>
                   <a:srgbClr val="A32C25"/>
                 </a:solidFill>
@@ -9388,7 +9388,7 @@
               </a:rPr>
               <a:t>價錢、功耗、裝不裝得下——而且它只看前面 120 度</a:t>
             </a:r>
-            <a:endParaRPr lang="en-US" sz="710" dirty="0"/>
+            <a:endParaRPr lang="en-US" sz="800" dirty="0"/>
           </a:p>
         </p:txBody>
       </p:sp>
@@ -9400,8 +9400,8 @@
         </p:nvSpPr>
         <p:spPr>
           <a:xfrm>
-            <a:off x="1681812" y="2806268"/>
-            <a:ext cx="5780375" cy="428657"/>
+            <a:off x="1328680" y="3119418"/>
+            <a:ext cx="6486641" cy="481032"/>
           </a:xfrm>
           <a:prstGeom prst="roundRect">
             <a:avLst>
@@ -9427,8 +9427,8 @@
         </p:nvSpPr>
         <p:spPr>
           <a:xfrm>
-            <a:off x="1811708" y="2851732"/>
-            <a:ext cx="5520583" cy="350719"/>
+            <a:off x="1474447" y="3170437"/>
+            <a:ext cx="6195106" cy="393571"/>
           </a:xfrm>
           <a:prstGeom prst="rect">
             <a:avLst/>
@@ -9447,7 +9447,7 @@
               <a:buNone/>
             </a:pPr>
             <a:r>
-              <a:rPr lang="en-US" sz="850" b="1" dirty="0">
+              <a:rPr lang="en-US" sz="960" b="1" dirty="0">
                 <a:solidFill>
                   <a:srgbClr val="7A4E00"/>
                 </a:solidFill>
@@ -9457,7 +9457,7 @@
               </a:rPr>
               <a:t>Chọn cảm biến không phải chọn cái tốt nhất, mà là chọn tổ hợp vừa đủ cho ODD của mình.</a:t>
             </a:r>
-            <a:endParaRPr lang="en-US" sz="850" dirty="0"/>
+            <a:endParaRPr lang="en-US" sz="960" dirty="0"/>
           </a:p>
           <a:p>
             <a:pPr indent="0" marL="0">
@@ -9467,7 +9467,7 @@
               <a:buNone/>
             </a:pPr>
             <a:r>
-              <a:rPr lang="en-US" sz="780" dirty="0">
+              <a:rPr lang="en-US" sz="880" dirty="0">
                 <a:solidFill>
                   <a:srgbClr val="7A4E00"/>
                 </a:solidFill>
@@ -9477,7 +9477,7 @@
               </a:rPr>
               <a:t>選感測器不是選最好的那一顆，是選一組剛好夠用的——夠用於你自己的 ODD。</a:t>
             </a:r>
-            <a:endParaRPr lang="en-US" sz="850" dirty="0"/>
+            <a:endParaRPr lang="en-US" sz="960" dirty="0"/>
           </a:p>
         </p:txBody>
       </p:sp>
@@ -9497,8 +9497,8 @@
         </p:blipFill>
         <p:spPr>
           <a:xfrm>
-            <a:off x="6663327" y="3338842"/>
-            <a:ext cx="779376" cy="172200"/>
+            <a:off x="7882128" y="109728"/>
+            <a:ext cx="1097280" cy="242439"/>
           </a:xfrm>
           <a:prstGeom prst="rect">
             <a:avLst/>
@@ -9513,8 +9513,8 @@
         </p:nvSpPr>
         <p:spPr>
           <a:xfrm>
-            <a:off x="1402536" y="3390800"/>
-            <a:ext cx="584532" cy="181855"/>
+            <a:off x="1015280" y="102037"/>
+            <a:ext cx="655952" cy="204074"/>
           </a:xfrm>
           <a:prstGeom prst="rect">
             <a:avLst/>
@@ -9530,7 +9530,7 @@
               <a:buNone/>
             </a:pPr>
             <a:r>
-              <a:rPr lang="en-US" sz="640" dirty="0">
+              <a:rPr lang="en-US" sz="720" dirty="0">
                 <a:solidFill>
                   <a:srgbClr val="5F7183"/>
                 </a:solidFill>
@@ -9540,7 +9540,7 @@
               </a:rPr>
               <a:t>6 / 9</a:t>
             </a:r>
-            <a:endParaRPr lang="en-US" sz="640" dirty="0"/>
+            <a:endParaRPr lang="en-US" sz="720" dirty="0"/>
           </a:p>
         </p:txBody>
       </p:sp>
@@ -9552,8 +9552,8 @@
         </p:nvSpPr>
         <p:spPr>
           <a:xfrm>
-            <a:off x="2006553" y="3390800"/>
-            <a:ext cx="1428857" cy="181855"/>
+            <a:off x="1693098" y="102037"/>
+            <a:ext cx="1603439" cy="204074"/>
           </a:xfrm>
           <a:prstGeom prst="rect">
             <a:avLst/>
@@ -9569,7 +9569,7 @@
               <a:buNone/>
             </a:pPr>
             <a:r>
-              <a:rPr lang="en-US" sz="640" dirty="0">
+              <a:rPr lang="en-US" sz="720" dirty="0">
                 <a:solidFill>
                   <a:srgbClr val="5F7183"/>
                 </a:solidFill>
@@ -9579,7 +9579,7 @@
               </a:rPr>
               <a:t>Tiết 3 · 第 3 節</a:t>
             </a:r>
-            <a:endParaRPr lang="en-US" sz="640" dirty="0"/>
+            <a:endParaRPr lang="en-US" sz="720" dirty="0"/>
           </a:p>
         </p:txBody>
       </p:sp>
@@ -9609,8 +9609,8 @@
       </p:nvGrpSpPr>
       <p:grpSpPr>
         <a:xfrm>
-          <a:off x="0" y="0"/>
-          <a:ext cx="0" cy="0"/>
+          <a:off x="898071" y="0"/>
+          <a:ext cx="1" cy="1"/>
           <a:chOff x="0" y="0"/>
           <a:chExt cx="0" cy="0"/>
         </a:xfrm>
@@ -9623,8 +9623,8 @@
         </p:nvSpPr>
         <p:spPr>
           <a:xfrm>
-            <a:off x="6130753" y="-947729"/>
-            <a:ext cx="2987610" cy="2987610"/>
+            <a:off x="6335486" y="-1102179"/>
+            <a:ext cx="3380014" cy="3380014"/>
           </a:xfrm>
           <a:prstGeom prst="ellipse">
             <a:avLst/>
@@ -9648,8 +9648,8 @@
         </p:nvSpPr>
         <p:spPr>
           <a:xfrm>
-            <a:off x="7104973" y="1520297"/>
-            <a:ext cx="1688649" cy="1688649"/>
+            <a:off x="7437664" y="1690007"/>
+            <a:ext cx="1910443" cy="1910443"/>
           </a:xfrm>
           <a:prstGeom prst="ellipse">
             <a:avLst/>
@@ -9670,8 +9670,8 @@
         </p:nvSpPr>
         <p:spPr>
           <a:xfrm>
-            <a:off x="1681812" y="364222"/>
-            <a:ext cx="4806155" cy="194844"/>
+            <a:off x="1302204" y="382089"/>
+            <a:ext cx="5437414" cy="220436"/>
           </a:xfrm>
           <a:prstGeom prst="rect">
             <a:avLst/>
@@ -9687,7 +9687,7 @@
               <a:buNone/>
             </a:pPr>
             <a:r>
-              <a:rPr lang="en-US" sz="890" b="1" dirty="0">
+              <a:rPr lang="en-US" sz="1000" b="1" dirty="0">
                 <a:solidFill>
                   <a:srgbClr val="FFB020"/>
                 </a:solidFill>
@@ -9697,7 +9697,7 @@
               </a:rPr>
               <a:t>Hoạt động · 這句話對不對（每題 1 分鐘）</a:t>
             </a:r>
-            <a:endParaRPr lang="en-US" sz="890" dirty="0"/>
+            <a:endParaRPr lang="en-US" sz="1000" dirty="0"/>
           </a:p>
         </p:txBody>
       </p:sp>
@@ -9709,8 +9709,8 @@
         </p:nvSpPr>
         <p:spPr>
           <a:xfrm>
-            <a:off x="1681812" y="585045"/>
-            <a:ext cx="5715427" cy="870304"/>
+            <a:off x="1302204" y="631916"/>
+            <a:ext cx="6466114" cy="984613"/>
           </a:xfrm>
           <a:prstGeom prst="rect">
             <a:avLst/>
@@ -9729,7 +9729,7 @@
               <a:buNone/>
             </a:pPr>
             <a:r>
-              <a:rPr lang="en-US" sz="1630" b="1" dirty="0">
+              <a:rPr lang="en-US" sz="1850" b="1" dirty="0">
                 <a:solidFill>
                   <a:srgbClr val="FFFFFF"/>
                 </a:solidFill>
@@ -9739,7 +9739,7 @@
               </a:rPr>
               <a:t>Bốn câu dưới đây. Đúng hay sai, nói một câu lý do.</a:t>
             </a:r>
-            <a:endParaRPr lang="en-US" sz="1630" dirty="0"/>
+            <a:endParaRPr lang="en-US" sz="1850" dirty="0"/>
           </a:p>
           <a:p>
             <a:pPr indent="0" marL="0">
@@ -9749,7 +9749,7 @@
               <a:buNone/>
             </a:pPr>
             <a:r>
-              <a:rPr lang="en-US" sz="1070" dirty="0">
+              <a:rPr lang="en-US" sz="1210" dirty="0">
                 <a:solidFill>
                   <a:srgbClr val="AFC3D4"/>
                 </a:solidFill>
@@ -9759,7 +9759,7 @@
               </a:rPr>
               <a:t>下面四句話。對或錯，再說一句理由。</a:t>
             </a:r>
-            <a:endParaRPr lang="en-US" sz="1630" dirty="0"/>
+            <a:endParaRPr lang="en-US" sz="1850" dirty="0"/>
           </a:p>
         </p:txBody>
       </p:sp>
@@ -9771,8 +9771,8 @@
         </p:nvSpPr>
         <p:spPr>
           <a:xfrm>
-            <a:off x="1681812" y="1260505"/>
-            <a:ext cx="5780375" cy="441647"/>
+            <a:off x="1302204" y="1396093"/>
+            <a:ext cx="6539593" cy="499654"/>
           </a:xfrm>
           <a:prstGeom prst="roundRect">
             <a:avLst>
@@ -9793,8 +9793,8 @@
         </p:nvSpPr>
         <p:spPr>
           <a:xfrm>
-            <a:off x="1798719" y="1364422"/>
-            <a:ext cx="233813" cy="233813"/>
+            <a:off x="1434465" y="1513659"/>
+            <a:ext cx="264523" cy="264523"/>
           </a:xfrm>
           <a:prstGeom prst="ellipse">
             <a:avLst/>
@@ -9813,8 +9813,8 @@
         </p:nvSpPr>
         <p:spPr>
           <a:xfrm>
-            <a:off x="1798719" y="1383906"/>
-            <a:ext cx="233813" cy="194844"/>
+            <a:off x="1434465" y="1535702"/>
+            <a:ext cx="264523" cy="220436"/>
           </a:xfrm>
           <a:prstGeom prst="rect">
             <a:avLst/>
@@ -9830,7 +9830,7 @@
               <a:buNone/>
             </a:pPr>
             <a:r>
-              <a:rPr lang="en-US" sz="850" b="1" dirty="0">
+              <a:rPr lang="en-US" sz="960" b="1" dirty="0">
                 <a:solidFill>
                   <a:srgbClr val="FFFFFF"/>
                 </a:solidFill>
@@ -9840,7 +9840,7 @@
               </a:rPr>
               <a:t>1</a:t>
             </a:r>
-            <a:endParaRPr lang="en-US" sz="850" dirty="0"/>
+            <a:endParaRPr lang="en-US" sz="960" dirty="0"/>
           </a:p>
         </p:txBody>
       </p:sp>
@@ -9852,8 +9852,8 @@
         </p:nvSpPr>
         <p:spPr>
           <a:xfrm>
-            <a:off x="2149438" y="1292979"/>
-            <a:ext cx="5182853" cy="389688"/>
+            <a:off x="1831249" y="1432832"/>
+            <a:ext cx="5863590" cy="440871"/>
           </a:xfrm>
           <a:prstGeom prst="rect">
             <a:avLst/>
@@ -9872,7 +9872,7 @@
               <a:buNone/>
             </a:pPr>
             <a:r>
-              <a:rPr lang="en-US" sz="890" b="1" dirty="0">
+              <a:rPr lang="en-US" sz="1000" b="1" dirty="0">
                 <a:solidFill>
                   <a:srgbClr val="FFFFFF"/>
                 </a:solidFill>
@@ -9882,7 +9882,7 @@
               </a:rPr>
               <a:t>① Datasheet ghi «tầm 200 m» thì nghĩa là cái gì ở 200 m cũng thấy.</a:t>
             </a:r>
-            <a:endParaRPr lang="en-US" sz="890" dirty="0"/>
+            <a:endParaRPr lang="en-US" sz="1000" dirty="0"/>
           </a:p>
           <a:p>
             <a:pPr indent="0" marL="0">
@@ -9892,7 +9892,7 @@
               <a:buNone/>
             </a:pPr>
             <a:r>
-              <a:rPr lang="en-US" sz="820" dirty="0">
+              <a:rPr lang="en-US" sz="920" dirty="0">
                 <a:solidFill>
                   <a:srgbClr val="AFC3D4"/>
                 </a:solidFill>
@@ -9902,7 +9902,7 @@
               </a:rPr>
               <a:t>① 規格表寫「測距 200 公尺」，就表示 200 公尺內的東西都看得到。</a:t>
             </a:r>
-            <a:endParaRPr lang="en-US" sz="890" dirty="0"/>
+            <a:endParaRPr lang="en-US" sz="1000" dirty="0"/>
           </a:p>
         </p:txBody>
       </p:sp>
@@ -9914,8 +9914,8 @@
         </p:nvSpPr>
         <p:spPr>
           <a:xfrm>
-            <a:off x="1681812" y="1767099"/>
-            <a:ext cx="5780375" cy="441647"/>
+            <a:off x="1302204" y="1969226"/>
+            <a:ext cx="6539593" cy="499654"/>
           </a:xfrm>
           <a:prstGeom prst="roundRect">
             <a:avLst>
@@ -9936,8 +9936,8 @@
         </p:nvSpPr>
         <p:spPr>
           <a:xfrm>
-            <a:off x="1798719" y="1871016"/>
-            <a:ext cx="233813" cy="233813"/>
+            <a:off x="1434465" y="2086791"/>
+            <a:ext cx="264523" cy="264523"/>
           </a:xfrm>
           <a:prstGeom prst="ellipse">
             <a:avLst/>
@@ -9956,8 +9956,8 @@
         </p:nvSpPr>
         <p:spPr>
           <a:xfrm>
-            <a:off x="1798719" y="1890501"/>
-            <a:ext cx="233813" cy="194844"/>
+            <a:off x="1434465" y="2108835"/>
+            <a:ext cx="264523" cy="220436"/>
           </a:xfrm>
           <a:prstGeom prst="rect">
             <a:avLst/>
@@ -9973,7 +9973,7 @@
               <a:buNone/>
             </a:pPr>
             <a:r>
-              <a:rPr lang="en-US" sz="850" b="1" dirty="0">
+              <a:rPr lang="en-US" sz="960" b="1" dirty="0">
                 <a:solidFill>
                   <a:srgbClr val="FFFFFF"/>
                 </a:solidFill>
@@ -9983,7 +9983,7 @@
               </a:rPr>
               <a:t>2</a:t>
             </a:r>
-            <a:endParaRPr lang="en-US" sz="850" dirty="0"/>
+            <a:endParaRPr lang="en-US" sz="960" dirty="0"/>
           </a:p>
         </p:txBody>
       </p:sp>
@@ -9995,8 +9995,8 @@
         </p:nvSpPr>
         <p:spPr>
           <a:xfrm>
-            <a:off x="2149438" y="1799573"/>
-            <a:ext cx="5182853" cy="389688"/>
+            <a:off x="1831249" y="2005965"/>
+            <a:ext cx="5863590" cy="440871"/>
           </a:xfrm>
           <a:prstGeom prst="rect">
             <a:avLst/>
@@ -10015,7 +10015,7 @@
               <a:buNone/>
             </a:pPr>
             <a:r>
-              <a:rPr lang="en-US" sz="890" b="1" dirty="0">
+              <a:rPr lang="en-US" sz="1000" b="1" dirty="0">
                 <a:solidFill>
                   <a:srgbClr val="FFFFFF"/>
                 </a:solidFill>
@@ -10025,7 +10025,7 @@
               </a:rPr>
               <a:t>② Cùng một cảm biến ảnh thì góc nhìn là cố định.</a:t>
             </a:r>
-            <a:endParaRPr lang="en-US" sz="890" dirty="0"/>
+            <a:endParaRPr lang="en-US" sz="1000" dirty="0"/>
           </a:p>
           <a:p>
             <a:pPr indent="0" marL="0">
@@ -10035,7 +10035,7 @@
               <a:buNone/>
             </a:pPr>
             <a:r>
-              <a:rPr lang="en-US" sz="820" dirty="0">
+              <a:rPr lang="en-US" sz="920" dirty="0">
                 <a:solidFill>
                   <a:srgbClr val="AFC3D4"/>
                 </a:solidFill>
@@ -10045,7 +10045,7 @@
               </a:rPr>
               <a:t>② 同一顆影像感測器，視野是固定的。</a:t>
             </a:r>
-            <a:endParaRPr lang="en-US" sz="890" dirty="0"/>
+            <a:endParaRPr lang="en-US" sz="1000" dirty="0"/>
           </a:p>
         </p:txBody>
       </p:sp>
@@ -10057,8 +10057,8 @@
         </p:nvSpPr>
         <p:spPr>
           <a:xfrm>
-            <a:off x="1681812" y="2273694"/>
-            <a:ext cx="5780375" cy="441647"/>
+            <a:off x="1302204" y="2542359"/>
+            <a:ext cx="6539593" cy="499654"/>
           </a:xfrm>
           <a:prstGeom prst="roundRect">
             <a:avLst>
@@ -10079,8 +10079,8 @@
         </p:nvSpPr>
         <p:spPr>
           <a:xfrm>
-            <a:off x="1798719" y="2377611"/>
-            <a:ext cx="233813" cy="233813"/>
+            <a:off x="1434465" y="2659924"/>
+            <a:ext cx="264523" cy="264523"/>
           </a:xfrm>
           <a:prstGeom prst="ellipse">
             <a:avLst/>
@@ -10099,8 +10099,8 @@
         </p:nvSpPr>
         <p:spPr>
           <a:xfrm>
-            <a:off x="1798719" y="2397095"/>
-            <a:ext cx="233813" cy="194844"/>
+            <a:off x="1434465" y="2681968"/>
+            <a:ext cx="264523" cy="220436"/>
           </a:xfrm>
           <a:prstGeom prst="rect">
             <a:avLst/>
@@ -10116,7 +10116,7 @@
               <a:buNone/>
             </a:pPr>
             <a:r>
-              <a:rPr lang="en-US" sz="850" b="1" dirty="0">
+              <a:rPr lang="en-US" sz="960" b="1" dirty="0">
                 <a:solidFill>
                   <a:srgbClr val="FFFFFF"/>
                 </a:solidFill>
@@ -10126,7 +10126,7 @@
               </a:rPr>
               <a:t>3</a:t>
             </a:r>
-            <a:endParaRPr lang="en-US" sz="850" dirty="0"/>
+            <a:endParaRPr lang="en-US" sz="960" dirty="0"/>
           </a:p>
         </p:txBody>
       </p:sp>
@@ -10138,8 +10138,8 @@
         </p:nvSpPr>
         <p:spPr>
           <a:xfrm>
-            <a:off x="2149438" y="2306168"/>
-            <a:ext cx="5182853" cy="389688"/>
+            <a:off x="1831249" y="2579098"/>
+            <a:ext cx="5863590" cy="440871"/>
           </a:xfrm>
           <a:prstGeom prst="rect">
             <a:avLst/>
@@ -10158,7 +10158,7 @@
               <a:buNone/>
             </a:pPr>
             <a:r>
-              <a:rPr lang="en-US" sz="890" b="1" dirty="0">
+              <a:rPr lang="en-US" sz="1000" b="1" dirty="0">
                 <a:solidFill>
                   <a:srgbClr val="FFFFFF"/>
                 </a:solidFill>
@@ -10168,7 +10168,7 @@
               </a:rPr>
               <a:t>③ Số điểm mỗi giây càng lớn thì nhìn người ở xa càng rõ.</a:t>
             </a:r>
-            <a:endParaRPr lang="en-US" sz="890" dirty="0"/>
+            <a:endParaRPr lang="en-US" sz="1000" dirty="0"/>
           </a:p>
           <a:p>
             <a:pPr indent="0" marL="0">
@@ -10178,7 +10178,7 @@
               <a:buNone/>
             </a:pPr>
             <a:r>
-              <a:rPr lang="en-US" sz="820" dirty="0">
+              <a:rPr lang="en-US" sz="920" dirty="0">
                 <a:solidFill>
                   <a:srgbClr val="AFC3D4"/>
                 </a:solidFill>
@@ -10188,7 +10188,7 @@
               </a:rPr>
               <a:t>③ 每秒點數愈大，遠處的人就看得愈清楚。</a:t>
             </a:r>
-            <a:endParaRPr lang="en-US" sz="890" dirty="0"/>
+            <a:endParaRPr lang="en-US" sz="1000" dirty="0"/>
           </a:p>
         </p:txBody>
       </p:sp>
@@ -10200,8 +10200,8 @@
         </p:nvSpPr>
         <p:spPr>
           <a:xfrm>
-            <a:off x="1681812" y="2806268"/>
-            <a:ext cx="5715427" cy="324740"/>
+            <a:off x="1302204" y="3144883"/>
+            <a:ext cx="6466114" cy="367393"/>
           </a:xfrm>
           <a:prstGeom prst="rect">
             <a:avLst/>
@@ -10220,7 +10220,7 @@
               <a:buNone/>
             </a:pPr>
             <a:r>
-              <a:rPr lang="en-US" sz="890" b="1" dirty="0">
+              <a:rPr lang="en-US" sz="1000" b="1" dirty="0">
                 <a:solidFill>
                   <a:srgbClr val="FFB020"/>
                 </a:solidFill>
@@ -10230,7 +10230,7 @@
               </a:rPr>
               <a:t>④ Hai cảm biến đều tốt thì ghép lại chắc chắn tốt.</a:t>
             </a:r>
-            <a:endParaRPr lang="en-US" sz="890" dirty="0"/>
+            <a:endParaRPr lang="en-US" sz="1000" dirty="0"/>
           </a:p>
           <a:p>
             <a:pPr indent="0" marL="0">
@@ -10240,7 +10240,7 @@
               <a:buNone/>
             </a:pPr>
             <a:r>
-              <a:rPr lang="en-US" sz="820" dirty="0">
+              <a:rPr lang="en-US" sz="920" dirty="0">
                 <a:solidFill>
                   <a:srgbClr val="FFB020"/>
                 </a:solidFill>
@@ -10250,7 +10250,7 @@
               </a:rPr>
               <a:t>④ 兩顆感測器各自都好，合起來就一定好。</a:t>
             </a:r>
-            <a:endParaRPr lang="en-US" sz="890" dirty="0"/>
+            <a:endParaRPr lang="en-US" sz="1000" dirty="0"/>
           </a:p>
         </p:txBody>
       </p:sp>
@@ -10262,8 +10262,8 @@
         </p:nvSpPr>
         <p:spPr>
           <a:xfrm>
-            <a:off x="1402536" y="3390800"/>
-            <a:ext cx="584532" cy="181855"/>
+            <a:off x="986246" y="102870"/>
+            <a:ext cx="661307" cy="205740"/>
           </a:xfrm>
           <a:prstGeom prst="rect">
             <a:avLst/>
@@ -10279,7 +10279,7 @@
               <a:buNone/>
             </a:pPr>
             <a:r>
-              <a:rPr lang="en-US" sz="640" dirty="0">
+              <a:rPr lang="en-US" sz="720" dirty="0">
                 <a:solidFill>
                   <a:srgbClr val="9FB3C8"/>
                 </a:solidFill>
@@ -10289,7 +10289,7 @@
               </a:rPr>
               <a:t>7 / 9</a:t>
             </a:r>
-            <a:endParaRPr lang="en-US" sz="640" dirty="0"/>
+            <a:endParaRPr lang="en-US" sz="720" dirty="0"/>
           </a:p>
         </p:txBody>
       </p:sp>
@@ -10301,8 +10301,8 @@
         </p:nvSpPr>
         <p:spPr>
           <a:xfrm>
-            <a:off x="2006553" y="3390800"/>
-            <a:ext cx="1428857" cy="181855"/>
+            <a:off x="1669596" y="102870"/>
+            <a:ext cx="1616529" cy="205740"/>
           </a:xfrm>
           <a:prstGeom prst="rect">
             <a:avLst/>
@@ -10318,7 +10318,7 @@
               <a:buNone/>
             </a:pPr>
             <a:r>
-              <a:rPr lang="en-US" sz="640" dirty="0">
+              <a:rPr lang="en-US" sz="720" dirty="0">
                 <a:solidFill>
                   <a:srgbClr val="9FB3C8"/>
                 </a:solidFill>
@@ -10328,7 +10328,7 @@
               </a:rPr>
               <a:t>Tiết 3 · 第 3 節</a:t>
             </a:r>
-            <a:endParaRPr lang="en-US" sz="640" dirty="0"/>
+            <a:endParaRPr lang="en-US" sz="720" dirty="0"/>
           </a:p>
         </p:txBody>
       </p:sp>
@@ -10358,8 +10358,8 @@
       </p:nvGrpSpPr>
       <p:grpSpPr>
         <a:xfrm>
-          <a:off x="0" y="0"/>
-          <a:ext cx="0" cy="0"/>
+          <a:off x="913006" y="0"/>
+          <a:ext cx="1" cy="1"/>
           <a:chOff x="0" y="0"/>
           <a:chExt cx="0" cy="0"/>
         </a:xfrm>
@@ -10372,8 +10372,8 @@
         </p:nvSpPr>
         <p:spPr>
           <a:xfrm>
-            <a:off x="6130753" y="-947729"/>
-            <a:ext cx="2987610" cy="2987610"/>
+            <a:off x="6328317" y="-1097698"/>
+            <a:ext cx="3366274" cy="3366274"/>
           </a:xfrm>
           <a:prstGeom prst="ellipse">
             <a:avLst/>
@@ -10397,8 +10397,8 @@
         </p:nvSpPr>
         <p:spPr>
           <a:xfrm>
-            <a:off x="7104973" y="1520297"/>
-            <a:ext cx="1688649" cy="1688649"/>
+            <a:off x="7426015" y="1683137"/>
+            <a:ext cx="1902677" cy="1902677"/>
           </a:xfrm>
           <a:prstGeom prst="ellipse">
             <a:avLst/>
@@ -10419,8 +10419,8 @@
         </p:nvSpPr>
         <p:spPr>
           <a:xfrm>
-            <a:off x="1681812" y="364222"/>
-            <a:ext cx="4806155" cy="194844"/>
+            <a:off x="1315495" y="380535"/>
+            <a:ext cx="5415311" cy="219540"/>
           </a:xfrm>
           <a:prstGeom prst="rect">
             <a:avLst/>
@@ -10436,7 +10436,7 @@
               <a:buNone/>
             </a:pPr>
             <a:r>
-              <a:rPr lang="en-US" sz="890" b="1" dirty="0">
+              <a:rPr lang="en-US" sz="1000" b="1" dirty="0">
                 <a:solidFill>
                   <a:srgbClr val="FFB020"/>
                 </a:solidFill>
@@ -10446,7 +10446,7 @@
               </a:rPr>
               <a:t>Đáp án · 答案：四句都錯</a:t>
             </a:r>
-            <a:endParaRPr lang="en-US" sz="890" dirty="0"/>
+            <a:endParaRPr lang="en-US" sz="1000" dirty="0"/>
           </a:p>
         </p:txBody>
       </p:sp>
@@ -10458,8 +10458,8 @@
         </p:nvSpPr>
         <p:spPr>
           <a:xfrm>
-            <a:off x="1681812" y="611024"/>
-            <a:ext cx="5715427" cy="753397"/>
+            <a:off x="1315495" y="658619"/>
+            <a:ext cx="6439829" cy="848887"/>
           </a:xfrm>
           <a:prstGeom prst="rect">
             <a:avLst/>
@@ -10478,7 +10478,7 @@
               <a:buNone/>
             </a:pPr>
             <a:r>
-              <a:rPr lang="en-US" sz="1780" b="1" dirty="0">
+              <a:rPr lang="en-US" sz="2000" b="1" dirty="0">
                 <a:solidFill>
                   <a:srgbClr val="FFFFFF"/>
                 </a:solidFill>
@@ -10488,7 +10488,7 @@
               </a:rPr>
               <a:t>Bốn câu đều sai</a:t>
             </a:r>
-            <a:endParaRPr lang="en-US" sz="1780" dirty="0"/>
+            <a:endParaRPr lang="en-US" sz="2000" dirty="0"/>
           </a:p>
           <a:p>
             <a:pPr indent="0" marL="0">
@@ -10498,7 +10498,7 @@
               <a:buNone/>
             </a:pPr>
             <a:r>
-              <a:rPr lang="en-US" sz="1070" dirty="0">
+              <a:rPr lang="en-US" sz="1200" dirty="0">
                 <a:solidFill>
                   <a:srgbClr val="AFC3D4"/>
                 </a:solidFill>
@@ -10508,7 +10508,7 @@
               </a:rPr>
               <a:t>四句都錯</a:t>
             </a:r>
-            <a:endParaRPr lang="en-US" sz="1780" dirty="0"/>
+            <a:endParaRPr lang="en-US" sz="2000" dirty="0"/>
           </a:p>
         </p:txBody>
       </p:sp>
@@ -10520,8 +10520,8 @@
         </p:nvSpPr>
         <p:spPr>
           <a:xfrm>
-            <a:off x="1681812" y="1286484"/>
-            <a:ext cx="32474" cy="363709"/>
+            <a:off x="1315495" y="1419690"/>
+            <a:ext cx="36590" cy="409807"/>
           </a:xfrm>
           <a:prstGeom prst="rect">
             <a:avLst/>
@@ -10540,8 +10540,8 @@
         </p:nvSpPr>
         <p:spPr>
           <a:xfrm>
-            <a:off x="1837688" y="1260505"/>
-            <a:ext cx="5585531" cy="441647"/>
+            <a:off x="1491127" y="1390418"/>
+            <a:ext cx="6293470" cy="497623"/>
           </a:xfrm>
           <a:prstGeom prst="rect">
             <a:avLst/>
@@ -10560,7 +10560,7 @@
               <a:buNone/>
             </a:pPr>
             <a:r>
-              <a:rPr lang="en-US" sz="960" b="1" dirty="0">
+              <a:rPr lang="en-US" sz="1080" b="1" dirty="0">
                 <a:solidFill>
                   <a:srgbClr val="FFFFFF"/>
                 </a:solidFill>
@@ -10570,7 +10570,7 @@
               </a:rPr>
               <a:t>① Hỏi: phản xạ bao nhiêu? OS1: trắng 170 m, đen 90 m.</a:t>
             </a:r>
-            <a:endParaRPr lang="en-US" sz="960" dirty="0"/>
+            <a:endParaRPr lang="en-US" sz="1080" dirty="0"/>
           </a:p>
           <a:p>
             <a:pPr indent="0" marL="0">
@@ -10580,7 +10580,7 @@
               <a:buNone/>
             </a:pPr>
             <a:r>
-              <a:rPr lang="en-US" sz="850" dirty="0">
+              <a:rPr lang="en-US" sz="960" dirty="0">
                 <a:solidFill>
                   <a:srgbClr val="AFC3D4"/>
                 </a:solidFill>
@@ -10590,7 +10590,7 @@
               </a:rPr>
               <a:t>① 要追問：對什麼反射率？OS1 對白色 170 公尺，對黑色 90。</a:t>
             </a:r>
-            <a:endParaRPr lang="en-US" sz="960" dirty="0"/>
+            <a:endParaRPr lang="en-US" sz="1080" dirty="0"/>
           </a:p>
         </p:txBody>
       </p:sp>
@@ -10602,8 +10602,8 @@
         </p:nvSpPr>
         <p:spPr>
           <a:xfrm>
-            <a:off x="1681812" y="1793079"/>
-            <a:ext cx="32474" cy="363709"/>
+            <a:off x="1315495" y="1990493"/>
+            <a:ext cx="36590" cy="409807"/>
           </a:xfrm>
           <a:prstGeom prst="rect">
             <a:avLst/>
@@ -10622,8 +10622,8 @@
         </p:nvSpPr>
         <p:spPr>
           <a:xfrm>
-            <a:off x="1837688" y="1767099"/>
-            <a:ext cx="5585531" cy="441647"/>
+            <a:off x="1491127" y="1961221"/>
+            <a:ext cx="6293470" cy="497623"/>
           </a:xfrm>
           <a:prstGeom prst="rect">
             <a:avLst/>
@@ -10642,7 +10642,7 @@
               <a:buNone/>
             </a:pPr>
             <a:r>
-              <a:rPr lang="en-US" sz="960" b="1" dirty="0">
+              <a:rPr lang="en-US" sz="1080" b="1" dirty="0">
                 <a:solidFill>
                   <a:srgbClr val="FFFFFF"/>
                 </a:solidFill>
@@ -10652,7 +10652,7 @@
               </a:rPr>
               <a:t>② Góc nhìn do ống kính: 8 mm → 42°, 3,6 mm → 81°.</a:t>
             </a:r>
-            <a:endParaRPr lang="en-US" sz="960" dirty="0"/>
+            <a:endParaRPr lang="en-US" sz="1080" dirty="0"/>
           </a:p>
           <a:p>
             <a:pPr indent="0" marL="0">
@@ -10662,7 +10662,7 @@
               <a:buNone/>
             </a:pPr>
             <a:r>
-              <a:rPr lang="en-US" sz="850" dirty="0">
+              <a:rPr lang="en-US" sz="960" dirty="0">
                 <a:solidFill>
                   <a:srgbClr val="AFC3D4"/>
                 </a:solidFill>
@@ -10672,7 +10672,7 @@
               </a:rPr>
               <a:t>② 視野是鏡頭決定的：同一塊晶片，8 mm 是 42 度，3.6 mm 是 81 度。</a:t>
             </a:r>
-            <a:endParaRPr lang="en-US" sz="960" dirty="0"/>
+            <a:endParaRPr lang="en-US" sz="1080" dirty="0"/>
           </a:p>
         </p:txBody>
       </p:sp>
@@ -10684,8 +10684,8 @@
         </p:nvSpPr>
         <p:spPr>
           <a:xfrm>
-            <a:off x="1681812" y="2299673"/>
-            <a:ext cx="32474" cy="363709"/>
+            <a:off x="1315495" y="2561296"/>
+            <a:ext cx="36590" cy="409807"/>
           </a:xfrm>
           <a:prstGeom prst="rect">
             <a:avLst/>
@@ -10704,8 +10704,8 @@
         </p:nvSpPr>
         <p:spPr>
           <a:xfrm>
-            <a:off x="1837688" y="2273694"/>
-            <a:ext cx="5585531" cy="441647"/>
+            <a:off x="1491127" y="2532024"/>
+            <a:ext cx="6293470" cy="497623"/>
           </a:xfrm>
           <a:prstGeom prst="rect">
             <a:avLst/>
@@ -10724,7 +10724,7 @@
               <a:buNone/>
             </a:pPr>
             <a:r>
-              <a:rPr lang="en-US" sz="960" b="1" dirty="0">
+              <a:rPr lang="en-US" sz="1080" b="1" dirty="0">
                 <a:solidFill>
                   <a:srgbClr val="FFFFFF"/>
                 </a:solidFill>
@@ -10734,7 +10734,7 @@
               </a:rPr>
               <a:t>③ Điểm mỗi giây phải đổi ra góc mới dùng được.</a:t>
             </a:r>
-            <a:endParaRPr lang="en-US" sz="960" dirty="0"/>
+            <a:endParaRPr lang="en-US" sz="1080" dirty="0"/>
           </a:p>
           <a:p>
             <a:pPr indent="0" marL="0">
@@ -10744,7 +10744,7 @@
               <a:buNone/>
             </a:pPr>
             <a:r>
-              <a:rPr lang="en-US" sz="850" dirty="0">
+              <a:rPr lang="en-US" sz="960" dirty="0">
                 <a:solidFill>
                   <a:srgbClr val="AFC3D4"/>
                 </a:solidFill>
@@ -10754,7 +10754,7 @@
               </a:rPr>
               <a:t>③ 每秒點數要先換算成角度才能用。</a:t>
             </a:r>
-            <a:endParaRPr lang="en-US" sz="960" dirty="0"/>
+            <a:endParaRPr lang="en-US" sz="1080" dirty="0"/>
           </a:p>
         </p:txBody>
       </p:sp>
@@ -10766,8 +10766,8 @@
         </p:nvSpPr>
         <p:spPr>
           <a:xfrm>
-            <a:off x="1681812" y="2806268"/>
-            <a:ext cx="32474" cy="363709"/>
+            <a:off x="1315495" y="3132099"/>
+            <a:ext cx="36590" cy="409807"/>
           </a:xfrm>
           <a:prstGeom prst="rect">
             <a:avLst/>
@@ -10786,8 +10786,8 @@
         </p:nvSpPr>
         <p:spPr>
           <a:xfrm>
-            <a:off x="1837688" y="2780289"/>
-            <a:ext cx="5585531" cy="441647"/>
+            <a:off x="1491127" y="3102827"/>
+            <a:ext cx="6293470" cy="497623"/>
           </a:xfrm>
           <a:prstGeom prst="rect">
             <a:avLst/>
@@ -10806,7 +10806,7 @@
               <a:buNone/>
             </a:pPr>
             <a:r>
-              <a:rPr lang="en-US" sz="960" b="1" dirty="0">
+              <a:rPr lang="en-US" sz="1080" b="1" dirty="0">
                 <a:solidFill>
                   <a:srgbClr val="FFFFFF"/>
                 </a:solidFill>
@@ -10816,7 +10816,7 @@
               </a:rPr>
               <a:t>④ Còn hiệu chuẩn và đồng bộ: 1° ở 50 m là gần 1 m.</a:t>
             </a:r>
-            <a:endParaRPr lang="en-US" sz="960" dirty="0"/>
+            <a:endParaRPr lang="en-US" sz="1080" dirty="0"/>
           </a:p>
           <a:p>
             <a:pPr indent="0" marL="0">
@@ -10826,7 +10826,7 @@
               <a:buNone/>
             </a:pPr>
             <a:r>
-              <a:rPr lang="en-US" sz="850" dirty="0">
+              <a:rPr lang="en-US" sz="960" dirty="0">
                 <a:solidFill>
                   <a:srgbClr val="AFC3D4"/>
                 </a:solidFill>
@@ -10836,7 +10836,7 @@
               </a:rPr>
               <a:t>④ 還有標定和同步：差 1 度，50 公尺外差將近 1 公尺。</a:t>
             </a:r>
-            <a:endParaRPr lang="en-US" sz="960" dirty="0"/>
+            <a:endParaRPr lang="en-US" sz="1080" dirty="0"/>
           </a:p>
         </p:txBody>
       </p:sp>
@@ -10848,8 +10848,8 @@
         </p:nvSpPr>
         <p:spPr>
           <a:xfrm>
-            <a:off x="1402536" y="3390800"/>
-            <a:ext cx="584532" cy="181855"/>
+            <a:off x="1000822" y="102452"/>
+            <a:ext cx="658619" cy="204904"/>
           </a:xfrm>
           <a:prstGeom prst="rect">
             <a:avLst/>
@@ -10865,7 +10865,7 @@
               <a:buNone/>
             </a:pPr>
             <a:r>
-              <a:rPr lang="en-US" sz="640" dirty="0">
+              <a:rPr lang="en-US" sz="720" dirty="0">
                 <a:solidFill>
                   <a:srgbClr val="9FB3C8"/>
                 </a:solidFill>
@@ -10875,7 +10875,7 @@
               </a:rPr>
               <a:t>8 / 9</a:t>
             </a:r>
-            <a:endParaRPr lang="en-US" sz="640" dirty="0"/>
+            <a:endParaRPr lang="en-US" sz="720" dirty="0"/>
           </a:p>
         </p:txBody>
       </p:sp>
@@ -10887,8 +10887,8 @@
         </p:nvSpPr>
         <p:spPr>
           <a:xfrm>
-            <a:off x="2006553" y="3390800"/>
-            <a:ext cx="1428857" cy="181855"/>
+            <a:off x="1681395" y="102452"/>
+            <a:ext cx="1609957" cy="204904"/>
           </a:xfrm>
           <a:prstGeom prst="rect">
             <a:avLst/>
@@ -10904,7 +10904,7 @@
               <a:buNone/>
             </a:pPr>
             <a:r>
-              <a:rPr lang="en-US" sz="640" dirty="0">
+              <a:rPr lang="en-US" sz="720" dirty="0">
                 <a:solidFill>
                   <a:srgbClr val="9FB3C8"/>
                 </a:solidFill>
@@ -10914,7 +10914,7 @@
               </a:rPr>
               <a:t>Tiết 3 · 第 3 節</a:t>
             </a:r>
-            <a:endParaRPr lang="en-US" sz="640" dirty="0"/>
+            <a:endParaRPr lang="en-US" sz="720" dirty="0"/>
           </a:p>
         </p:txBody>
       </p:sp>
@@ -10944,8 +10944,8 @@
       </p:nvGrpSpPr>
       <p:grpSpPr>
         <a:xfrm>
-          <a:off x="0" y="0"/>
-          <a:ext cx="0" cy="0"/>
+          <a:off x="898071" y="0"/>
+          <a:ext cx="1" cy="1"/>
           <a:chOff x="0" y="0"/>
           <a:chExt cx="0" cy="0"/>
         </a:xfrm>
@@ -10958,8 +10958,8 @@
         </p:nvSpPr>
         <p:spPr>
           <a:xfrm>
-            <a:off x="6130753" y="-947729"/>
-            <a:ext cx="2987610" cy="2987610"/>
+            <a:off x="6335486" y="-1102179"/>
+            <a:ext cx="3380014" cy="3380014"/>
           </a:xfrm>
           <a:prstGeom prst="ellipse">
             <a:avLst/>
@@ -10983,8 +10983,8 @@
         </p:nvSpPr>
         <p:spPr>
           <a:xfrm>
-            <a:off x="7104973" y="1520297"/>
-            <a:ext cx="1688649" cy="1688649"/>
+            <a:off x="7437664" y="1690007"/>
+            <a:ext cx="1910443" cy="1910443"/>
           </a:xfrm>
           <a:prstGeom prst="ellipse">
             <a:avLst/>
@@ -11005,8 +11005,8 @@
         </p:nvSpPr>
         <p:spPr>
           <a:xfrm>
-            <a:off x="1681812" y="364222"/>
-            <a:ext cx="4806155" cy="194844"/>
+            <a:off x="1302204" y="382089"/>
+            <a:ext cx="5437414" cy="220436"/>
           </a:xfrm>
           <a:prstGeom prst="rect">
             <a:avLst/>
@@ -11022,7 +11022,7 @@
               <a:buNone/>
             </a:pPr>
             <a:r>
-              <a:rPr lang="en-US" sz="890" b="1" dirty="0">
+              <a:rPr lang="en-US" sz="1000" b="1" dirty="0">
                 <a:solidFill>
                   <a:srgbClr val="FFB020"/>
                 </a:solidFill>
@@ -11032,7 +11032,7 @@
               </a:rPr>
               <a:t>Tuần sau · 下週預告</a:t>
             </a:r>
-            <a:endParaRPr lang="en-US" sz="890" dirty="0"/>
+            <a:endParaRPr lang="en-US" sz="1000" dirty="0"/>
           </a:p>
         </p:txBody>
       </p:sp>
@@ -11044,8 +11044,8 @@
         </p:nvSpPr>
         <p:spPr>
           <a:xfrm>
-            <a:off x="1681812" y="611024"/>
-            <a:ext cx="5715427" cy="753397"/>
+            <a:off x="1302204" y="661307"/>
+            <a:ext cx="6466114" cy="852351"/>
           </a:xfrm>
           <a:prstGeom prst="rect">
             <a:avLst/>
@@ -11064,7 +11064,7 @@
               <a:buNone/>
             </a:pPr>
             <a:r>
-              <a:rPr lang="en-US" sz="1780" b="1" dirty="0">
+              <a:rPr lang="en-US" sz="2010" b="1" dirty="0">
                 <a:solidFill>
                   <a:srgbClr val="FFFFFF"/>
                 </a:solidFill>
@@ -11074,7 +11074,7 @@
               </a:rPr>
               <a:t>Tuần 6, 15/10: radar, siêu âm, GNSS và IMU</a:t>
             </a:r>
-            <a:endParaRPr lang="en-US" sz="1780" dirty="0"/>
+            <a:endParaRPr lang="en-US" sz="2010" dirty="0"/>
           </a:p>
           <a:p>
             <a:pPr indent="0" marL="0">
@@ -11084,7 +11084,7 @@
               <a:buNone/>
             </a:pPr>
             <a:r>
-              <a:rPr lang="en-US" sz="1070" dirty="0">
+              <a:rPr lang="en-US" sz="1210" dirty="0">
                 <a:solidFill>
                   <a:srgbClr val="AFC3D4"/>
                 </a:solidFill>
@@ -11094,7 +11094,7 @@
               </a:rPr>
               <a:t>第 6 週，10 月 15 日：雷達、超音波、GNSS 與 IMU</a:t>
             </a:r>
-            <a:endParaRPr lang="en-US" sz="1780" dirty="0"/>
+            <a:endParaRPr lang="en-US" sz="2010" dirty="0"/>
           </a:p>
         </p:txBody>
       </p:sp>
@@ -11106,8 +11106,8 @@
         </p:nvSpPr>
         <p:spPr>
           <a:xfrm>
-            <a:off x="1681812" y="1286484"/>
-            <a:ext cx="32474" cy="363709"/>
+            <a:off x="1302204" y="1425484"/>
+            <a:ext cx="36739" cy="411480"/>
           </a:xfrm>
           <a:prstGeom prst="rect">
             <a:avLst/>
@@ -11126,8 +11126,8 @@
         </p:nvSpPr>
         <p:spPr>
           <a:xfrm>
-            <a:off x="1837688" y="1260505"/>
-            <a:ext cx="5585531" cy="441647"/>
+            <a:off x="1478552" y="1396093"/>
+            <a:ext cx="6319157" cy="499654"/>
           </a:xfrm>
           <a:prstGeom prst="rect">
             <a:avLst/>
@@ -11146,7 +11146,7 @@
               <a:buNone/>
             </a:pPr>
             <a:r>
-              <a:rPr lang="en-US" sz="960" b="1" dirty="0">
+              <a:rPr lang="en-US" sz="1080" b="1" dirty="0">
                 <a:solidFill>
                   <a:srgbClr val="FFFFFF"/>
                 </a:solidFill>
@@ -11156,7 +11156,7 @@
               </a:rPr>
               <a:t>Vẫn là đọc datasheet — nhưng ba loại này có những dòng hoàn toàn khác.</a:t>
             </a:r>
-            <a:endParaRPr lang="en-US" sz="960" dirty="0"/>
+            <a:endParaRPr lang="en-US" sz="1080" dirty="0"/>
           </a:p>
           <a:p>
             <a:pPr indent="0" marL="0">
@@ -11166,7 +11166,7 @@
               <a:buNone/>
             </a:pPr>
             <a:r>
-              <a:rPr lang="en-US" sz="850" dirty="0">
+              <a:rPr lang="en-US" sz="960" dirty="0">
                 <a:solidFill>
                   <a:srgbClr val="AFC3D4"/>
                 </a:solidFill>
@@ -11176,7 +11176,7 @@
               </a:rPr>
               <a:t>一樣是讀規格表——但這三種的規格行完全不一樣。</a:t>
             </a:r>
-            <a:endParaRPr lang="en-US" sz="960" dirty="0"/>
+            <a:endParaRPr lang="en-US" sz="1080" dirty="0"/>
           </a:p>
         </p:txBody>
       </p:sp>
@@ -11188,8 +11188,8 @@
         </p:nvSpPr>
         <p:spPr>
           <a:xfrm>
-            <a:off x="1681812" y="1793079"/>
-            <a:ext cx="32474" cy="363709"/>
+            <a:off x="1302204" y="1998617"/>
+            <a:ext cx="36739" cy="411480"/>
           </a:xfrm>
           <a:prstGeom prst="rect">
             <a:avLst/>
@@ -11208,8 +11208,8 @@
         </p:nvSpPr>
         <p:spPr>
           <a:xfrm>
-            <a:off x="1837688" y="1767099"/>
-            <a:ext cx="5585531" cy="441647"/>
+            <a:off x="1478552" y="1969226"/>
+            <a:ext cx="6319157" cy="499654"/>
           </a:xfrm>
           <a:prstGeom prst="rect">
             <a:avLst/>
@@ -11228,7 +11228,7 @@
               <a:buNone/>
             </a:pPr>
             <a:r>
-              <a:rPr lang="en-US" sz="960" b="1" dirty="0">
+              <a:rPr lang="en-US" sz="1080" b="1" dirty="0">
                 <a:solidFill>
                   <a:srgbClr val="FFFFFF"/>
                 </a:solidFill>
@@ -11238,7 +11238,7 @@
               </a:rPr>
               <a:t>Mang theo: tờ hôm nay. Tuần sau sẽ thêm cột radar vào cùng bảng đó.</a:t>
             </a:r>
-            <a:endParaRPr lang="en-US" sz="960" dirty="0"/>
+            <a:endParaRPr lang="en-US" sz="1080" dirty="0"/>
           </a:p>
           <a:p>
             <a:pPr indent="0" marL="0">
@@ -11248,7 +11248,7 @@
               <a:buNone/>
             </a:pPr>
             <a:r>
-              <a:rPr lang="en-US" sz="850" dirty="0">
+              <a:rPr lang="en-US" sz="960" dirty="0">
                 <a:solidFill>
                   <a:srgbClr val="AFC3D4"/>
                 </a:solidFill>
@@ -11258,7 +11258,7 @@
               </a:rPr>
               <a:t>要帶：今天這張紙。下週會在同一張表上加一欄雷達。</a:t>
             </a:r>
-            <a:endParaRPr lang="en-US" sz="960" dirty="0"/>
+            <a:endParaRPr lang="en-US" sz="1080" dirty="0"/>
           </a:p>
         </p:txBody>
       </p:sp>
@@ -11270,8 +11270,8 @@
         </p:nvSpPr>
         <p:spPr>
           <a:xfrm>
-            <a:off x="1681812" y="2299673"/>
-            <a:ext cx="32474" cy="363709"/>
+            <a:off x="1302204" y="2571750"/>
+            <a:ext cx="36739" cy="411480"/>
           </a:xfrm>
           <a:prstGeom prst="rect">
             <a:avLst/>
@@ -11290,8 +11290,8 @@
         </p:nvSpPr>
         <p:spPr>
           <a:xfrm>
-            <a:off x="1837688" y="2273694"/>
-            <a:ext cx="5585531" cy="441647"/>
+            <a:off x="1478552" y="2542359"/>
+            <a:ext cx="6319157" cy="499654"/>
           </a:xfrm>
           <a:prstGeom prst="rect">
             <a:avLst/>
@@ -11310,7 +11310,7 @@
               <a:buNone/>
             </a:pPr>
             <a:r>
-              <a:rPr lang="en-US" sz="960" b="1" dirty="0">
+              <a:rPr lang="en-US" sz="1080" b="1" dirty="0">
                 <a:solidFill>
                   <a:srgbClr val="FFFFFF"/>
                 </a:solidFill>
@@ -11320,7 +11320,7 @@
               </a:rPr>
               <a:t>Làm: đọc 3.4–3.6 trong giáo trình trước khi lên lớp.</a:t>
             </a:r>
-            <a:endParaRPr lang="en-US" sz="960" dirty="0"/>
+            <a:endParaRPr lang="en-US" sz="1080" dirty="0"/>
           </a:p>
           <a:p>
             <a:pPr indent="0" marL="0">
@@ -11330,7 +11330,7 @@
               <a:buNone/>
             </a:pPr>
             <a:r>
-              <a:rPr lang="en-US" sz="850" dirty="0">
+              <a:rPr lang="en-US" sz="960" dirty="0">
                 <a:solidFill>
                   <a:srgbClr val="AFC3D4"/>
                 </a:solidFill>
@@ -11340,7 +11340,7 @@
               </a:rPr>
               <a:t>要做：上課前先讀講義 3.4–3.6。</a:t>
             </a:r>
-            <a:endParaRPr lang="en-US" sz="960" dirty="0"/>
+            <a:endParaRPr lang="en-US" sz="1080" dirty="0"/>
           </a:p>
         </p:txBody>
       </p:sp>
@@ -11352,8 +11352,8 @@
         </p:nvSpPr>
         <p:spPr>
           <a:xfrm>
-            <a:off x="1402536" y="3390800"/>
-            <a:ext cx="584532" cy="181855"/>
+            <a:off x="986246" y="102870"/>
+            <a:ext cx="661307" cy="205740"/>
           </a:xfrm>
           <a:prstGeom prst="rect">
             <a:avLst/>
@@ -11369,7 +11369,7 @@
               <a:buNone/>
             </a:pPr>
             <a:r>
-              <a:rPr lang="en-US" sz="640" dirty="0">
+              <a:rPr lang="en-US" sz="720" dirty="0">
                 <a:solidFill>
                   <a:srgbClr val="9FB3C8"/>
                 </a:solidFill>
@@ -11379,7 +11379,7 @@
               </a:rPr>
               <a:t>9 / 9</a:t>
             </a:r>
-            <a:endParaRPr lang="en-US" sz="640" dirty="0"/>
+            <a:endParaRPr lang="en-US" sz="720" dirty="0"/>
           </a:p>
         </p:txBody>
       </p:sp>
@@ -11391,8 +11391,8 @@
         </p:nvSpPr>
         <p:spPr>
           <a:xfrm>
-            <a:off x="2006553" y="3390800"/>
-            <a:ext cx="1428857" cy="181855"/>
+            <a:off x="1669596" y="102870"/>
+            <a:ext cx="1616529" cy="205740"/>
           </a:xfrm>
           <a:prstGeom prst="rect">
             <a:avLst/>
@@ -11408,7 +11408,7 @@
               <a:buNone/>
             </a:pPr>
             <a:r>
-              <a:rPr lang="en-US" sz="640" dirty="0">
+              <a:rPr lang="en-US" sz="720" dirty="0">
                 <a:solidFill>
                   <a:srgbClr val="9FB3C8"/>
                 </a:solidFill>
@@ -11418,7 +11418,7 @@
               </a:rPr>
               <a:t>Tiết 3 · 第 3 節</a:t>
             </a:r>
-            <a:endParaRPr lang="en-US" sz="640" dirty="0"/>
+            <a:endParaRPr lang="en-US" sz="720" dirty="0"/>
           </a:p>
         </p:txBody>
       </p:sp>

--- a/第五週(10-08)/第五週_第3節_簡報.pptx
+++ b/第五週(10-08)/第五週_第3節_簡報.pptx
@@ -435,11 +435,154 @@
                 <a:spcPct val="115000"/>
               </a:lnSpc>
               <a:spcAft>
-                <a:spcPts val="600"/>
-              </a:spcAft>
-            </a:pPr>
-            <a:r>
-              <a:rPr sz="1200" lang="zh-TW" dirty="0">
+                <a:spcPts val="575"/>
+              </a:spcAft>
+            </a:pPr>
+            <a:r>
+              <a:rPr sz="1150" b="1" lang="zh-TW" dirty="0">
+                <a:solidFill>
+                  <a:srgbClr val="000000"/>
+                </a:solidFill>
+                <a:latin typeface="Arial Unicode MS"/>
+                <a:ea typeface="Arial Unicode MS"/>
+                <a:cs typeface="Arial Unicode MS"/>
+              </a:rPr>
+              <a:t>▍這一張要做什麼</a:t>
+            </a:r>
+            <a:r>
+              <a:rPr sz="1150" lang="zh-TW" dirty="0">
+                <a:solidFill>
+                  <a:srgbClr val="000000"/>
+                </a:solidFill>
+                <a:latin typeface="Arial Unicode MS"/>
+                <a:ea typeface="Arial Unicode MS"/>
+                <a:cs typeface="Arial Unicode MS"/>
+              </a:rPr>
+              <a:t>
+</a:t>
+            </a:r>
+          </a:p>
+          <a:p>
+            <a:pPr algn="l">
+              <a:lnSpc>
+                <a:spcPct val="115000"/>
+              </a:lnSpc>
+              <a:spcAft>
+                <a:spcPts val="575"/>
+              </a:spcAft>
+            </a:pPr>
+            <a:r>
+              <a:rPr sz="1150" lang="zh-TW" dirty="0">
+                <a:solidFill>
+                  <a:srgbClr val="000000"/>
+                </a:solidFill>
+                <a:latin typeface="Arial Unicode MS"/>
+                <a:ea typeface="Arial Unicode MS"/>
+                <a:cs typeface="Arial Unicode MS"/>
+              </a:rPr>
+              <a:t>第三節開場。整節上機，四個型號乘三個情境，每人交一張。
+</a:t>
+            </a:r>
+          </a:p>
+          <a:p>
+            <a:pPr algn="l">
+              <a:lnSpc>
+                <a:spcPct val="115000"/>
+              </a:lnSpc>
+              <a:spcAft>
+                <a:spcPts val="575"/>
+              </a:spcAft>
+            </a:pPr>
+            <a:r>
+              <a:rPr sz="1150" b="1" lang="zh-TW" dirty="0">
+                <a:solidFill>
+                  <a:srgbClr val="000000"/>
+                </a:solidFill>
+                <a:latin typeface="Arial Unicode MS"/>
+                <a:ea typeface="Arial Unicode MS"/>
+                <a:cs typeface="Arial Unicode MS"/>
+              </a:rPr>
+              <a:t>▍畫面上圈這裡</a:t>
+            </a:r>
+            <a:r>
+              <a:rPr sz="1150" lang="zh-TW" dirty="0">
+                <a:solidFill>
+                  <a:srgbClr val="000000"/>
+                </a:solidFill>
+                <a:latin typeface="Arial Unicode MS"/>
+                <a:ea typeface="Arial Unicode MS"/>
+                <a:cs typeface="Arial Unicode MS"/>
+              </a:rPr>
+              <a:t>
+</a:t>
+            </a:r>
+          </a:p>
+          <a:p>
+            <a:pPr algn="l">
+              <a:lnSpc>
+                <a:spcPct val="115000"/>
+              </a:lnSpc>
+              <a:spcAft>
+                <a:spcPts val="575"/>
+              </a:spcAft>
+            </a:pPr>
+            <a:r>
+              <a:rPr sz="1150" lang="zh-TW" dirty="0">
+                <a:solidFill>
+                  <a:srgbClr val="000000"/>
+                </a:solidFill>
+                <a:latin typeface="Arial Unicode MS"/>
+                <a:ea typeface="Arial Unicode MS"/>
+                <a:cs typeface="Arial Unicode MS"/>
+              </a:rPr>
+              <a:t>圈主標「替一台指定的車選感測器」。說明今天交的是自己的判斷，不是抄答案。
+</a:t>
+            </a:r>
+          </a:p>
+          <a:p>
+            <a:pPr algn="l">
+              <a:lnSpc>
+                <a:spcPct val="115000"/>
+              </a:lnSpc>
+              <a:spcAft>
+                <a:spcPts val="575"/>
+              </a:spcAft>
+            </a:pPr>
+            <a:r>
+              <a:rPr sz="1150" b="1" lang="zh-TW" dirty="0">
+                <a:solidFill>
+                  <a:srgbClr val="000000"/>
+                </a:solidFill>
+                <a:latin typeface="Arial Unicode MS"/>
+                <a:ea typeface="Arial Unicode MS"/>
+                <a:cs typeface="Arial Unicode MS"/>
+              </a:rPr>
+              <a:t>▍以下照著唸</a:t>
+            </a:r>
+            <a:r>
+              <a:rPr sz="1150" lang="zh-TW" dirty="0">
+                <a:solidFill>
+                  <a:srgbClr val="000000"/>
+                </a:solidFill>
+                <a:latin typeface="Arial Unicode MS"/>
+                <a:ea typeface="Arial Unicode MS"/>
+                <a:cs typeface="Arial Unicode MS"/>
+              </a:rPr>
+              <a:t>
+</a:t>
+            </a:r>
+          </a:p>
+          <a:p>
+            <a:pPr algn="l">
+              <a:lnSpc>
+                <a:spcPct val="115000"/>
+              </a:lnSpc>
+              <a:spcAft>
+                <a:spcPts val="575"/>
+              </a:spcAft>
+            </a:pPr>
+            <a:r>
+              <a:rPr sz="1150" lang="zh-TW" dirty="0">
                 <a:solidFill>
                   <a:srgbClr val="000000"/>
                 </a:solidFill>
@@ -457,11 +600,11 @@
                 <a:spcPct val="115000"/>
               </a:lnSpc>
               <a:spcAft>
-                <a:spcPts val="600"/>
-              </a:spcAft>
-            </a:pPr>
-            <a:r>
-              <a:rPr sz="1200" lang="zh-TW" dirty="0">
+                <a:spcPts val="575"/>
+              </a:spcAft>
+            </a:pPr>
+            <a:r>
+              <a:rPr sz="1150" lang="zh-TW" dirty="0">
                 <a:solidFill>
                   <a:srgbClr val="000000"/>
                 </a:solidFill>
@@ -479,11 +622,11 @@
                 <a:spcPct val="115000"/>
               </a:lnSpc>
               <a:spcAft>
-                <a:spcPts val="600"/>
-              </a:spcAft>
-            </a:pPr>
-            <a:r>
-              <a:rPr sz="1200" lang="zh-TW" dirty="0">
+                <a:spcPts val="575"/>
+              </a:spcAft>
+            </a:pPr>
+            <a:r>
+              <a:rPr sz="1150" lang="zh-TW" dirty="0">
                 <a:solidFill>
                   <a:srgbClr val="000000"/>
                 </a:solidFill>
@@ -494,7 +637,7 @@
               <a:t>規則很簡單：</a:t>
             </a:r>
             <a:r>
-              <a:rPr sz="1200" b="1" lang="zh-TW" dirty="0">
+              <a:rPr sz="1150" b="1" lang="zh-TW" dirty="0">
                 <a:solidFill>
                   <a:srgbClr val="000000"/>
                 </a:solidFill>
@@ -505,7 +648,7 @@
               <a:t>我給你一台車要在哪裡跑，你告訴我哪一顆感測器可以用、哪一顆不行，而且要講得出卡在哪一行。</a:t>
             </a:r>
             <a:r>
-              <a:rPr sz="1200" lang="zh-TW" dirty="0">
+              <a:rPr sz="1150" lang="zh-TW" dirty="0">
                 <a:solidFill>
                   <a:srgbClr val="000000"/>
                 </a:solidFill>
@@ -523,11 +666,11 @@
                 <a:spcPct val="115000"/>
               </a:lnSpc>
               <a:spcAft>
-                <a:spcPts val="600"/>
-              </a:spcAft>
-            </a:pPr>
-            <a:r>
-              <a:rPr sz="1200" lang="zh-TW" dirty="0">
+                <a:spcPts val="575"/>
+              </a:spcAft>
+            </a:pPr>
+            <a:r>
+              <a:rPr sz="1150" lang="zh-TW" dirty="0">
                 <a:solidFill>
                   <a:srgbClr val="000000"/>
                 </a:solidFill>
@@ -545,11 +688,11 @@
                 <a:spcPct val="115000"/>
               </a:lnSpc>
               <a:spcAft>
-                <a:spcPts val="600"/>
-              </a:spcAft>
-            </a:pPr>
-            <a:r>
-              <a:rPr sz="1200" lang="zh-TW" dirty="0">
+                <a:spcPts val="575"/>
+              </a:spcAft>
+            </a:pPr>
+            <a:r>
+              <a:rPr sz="1150" lang="zh-TW" dirty="0">
                 <a:solidFill>
                   <a:srgbClr val="000000"/>
                 </a:solidFill>
@@ -560,7 +703,7 @@
               <a:t>這一節是</a:t>
             </a:r>
             <a:r>
-              <a:rPr sz="1200" b="1" lang="zh-TW" dirty="0">
+              <a:rPr sz="1150" b="1" lang="zh-TW" dirty="0">
                 <a:solidFill>
                   <a:srgbClr val="000000"/>
                 </a:solidFill>
@@ -571,7 +714,7 @@
               <a:t>個人作業</a:t>
             </a:r>
             <a:r>
-              <a:rPr sz="1200" lang="zh-TW" dirty="0">
+              <a:rPr sz="1150" lang="zh-TW" dirty="0">
                 <a:solidFill>
                   <a:srgbClr val="000000"/>
                 </a:solidFill>
@@ -589,11 +732,11 @@
                 <a:spcPct val="115000"/>
               </a:lnSpc>
               <a:spcAft>
-                <a:spcPts val="600"/>
-              </a:spcAft>
-            </a:pPr>
-            <a:r>
-              <a:rPr sz="1200" lang="zh-TW" dirty="0">
+                <a:spcPts val="575"/>
+              </a:spcAft>
+            </a:pPr>
+            <a:r>
+              <a:rPr sz="1150" lang="zh-TW" dirty="0">
                 <a:solidFill>
                   <a:srgbClr val="000000"/>
                 </a:solidFill>
@@ -710,11 +853,154 @@
                 <a:spcPct val="115000"/>
               </a:lnSpc>
               <a:spcAft>
-                <a:spcPts val="525"/>
-              </a:spcAft>
-            </a:pPr>
-            <a:r>
-              <a:rPr sz="1050" lang="zh-TW" dirty="0">
+                <a:spcPts val="500"/>
+              </a:spcAft>
+            </a:pPr>
+            <a:r>
+              <a:rPr sz="1000" b="1" lang="zh-TW" dirty="0">
+                <a:solidFill>
+                  <a:srgbClr val="000000"/>
+                </a:solidFill>
+                <a:latin typeface="Arial Unicode MS"/>
+                <a:ea typeface="Arial Unicode MS"/>
+                <a:cs typeface="Arial Unicode MS"/>
+              </a:rPr>
+              <a:t>▍這一張要做什麼</a:t>
+            </a:r>
+            <a:r>
+              <a:rPr sz="1000" lang="zh-TW" dirty="0">
+                <a:solidFill>
+                  <a:srgbClr val="000000"/>
+                </a:solidFill>
+                <a:latin typeface="Arial Unicode MS"/>
+                <a:ea typeface="Arial Unicode MS"/>
+                <a:cs typeface="Arial Unicode MS"/>
+              </a:rPr>
+              <a:t>
+</a:t>
+            </a:r>
+          </a:p>
+          <a:p>
+            <a:pPr algn="l">
+              <a:lnSpc>
+                <a:spcPct val="115000"/>
+              </a:lnSpc>
+              <a:spcAft>
+                <a:spcPts val="500"/>
+              </a:spcAft>
+            </a:pPr>
+            <a:r>
+              <a:rPr sz="1000" lang="zh-TW" dirty="0">
+                <a:solidFill>
+                  <a:srgbClr val="000000"/>
+                </a:solidFill>
+                <a:latin typeface="Arial Unicode MS"/>
+                <a:ea typeface="Arial Unicode MS"/>
+                <a:cs typeface="Arial Unicode MS"/>
+              </a:rPr>
+              <a:t>交代四個步驟與每一步要抄下來的數字。
+</a:t>
+            </a:r>
+          </a:p>
+          <a:p>
+            <a:pPr algn="l">
+              <a:lnSpc>
+                <a:spcPct val="115000"/>
+              </a:lnSpc>
+              <a:spcAft>
+                <a:spcPts val="500"/>
+              </a:spcAft>
+            </a:pPr>
+            <a:r>
+              <a:rPr sz="1000" b="1" lang="zh-TW" dirty="0">
+                <a:solidFill>
+                  <a:srgbClr val="000000"/>
+                </a:solidFill>
+                <a:latin typeface="Arial Unicode MS"/>
+                <a:ea typeface="Arial Unicode MS"/>
+                <a:cs typeface="Arial Unicode MS"/>
+              </a:rPr>
+              <a:t>▍畫面上圈這裡</a:t>
+            </a:r>
+            <a:r>
+              <a:rPr sz="1000" lang="zh-TW" dirty="0">
+                <a:solidFill>
+                  <a:srgbClr val="000000"/>
+                </a:solidFill>
+                <a:latin typeface="Arial Unicode MS"/>
+                <a:ea typeface="Arial Unicode MS"/>
+                <a:cs typeface="Arial Unicode MS"/>
+              </a:rPr>
+              <a:t>
+</a:t>
+            </a:r>
+          </a:p>
+          <a:p>
+            <a:pPr algn="l">
+              <a:lnSpc>
+                <a:spcPct val="115000"/>
+              </a:lnSpc>
+              <a:spcAft>
+                <a:spcPts val="500"/>
+              </a:spcAft>
+            </a:pPr>
+            <a:r>
+              <a:rPr sz="1000" lang="zh-TW" dirty="0">
+                <a:solidFill>
+                  <a:srgbClr val="000000"/>
+                </a:solidFill>
+                <a:latin typeface="Arial Unicode MS"/>
+                <a:ea typeface="Arial Unicode MS"/>
+                <a:cs typeface="Arial Unicode MS"/>
+              </a:rPr>
+              <a:t>圈「每一步都有要抄下來的數字」。強調沒抄數字就等於沒做。
+</a:t>
+            </a:r>
+          </a:p>
+          <a:p>
+            <a:pPr algn="l">
+              <a:lnSpc>
+                <a:spcPct val="115000"/>
+              </a:lnSpc>
+              <a:spcAft>
+                <a:spcPts val="500"/>
+              </a:spcAft>
+            </a:pPr>
+            <a:r>
+              <a:rPr sz="1000" b="1" lang="zh-TW" dirty="0">
+                <a:solidFill>
+                  <a:srgbClr val="000000"/>
+                </a:solidFill>
+                <a:latin typeface="Arial Unicode MS"/>
+                <a:ea typeface="Arial Unicode MS"/>
+                <a:cs typeface="Arial Unicode MS"/>
+              </a:rPr>
+              <a:t>▍以下照著唸</a:t>
+            </a:r>
+            <a:r>
+              <a:rPr sz="1000" lang="zh-TW" dirty="0">
+                <a:solidFill>
+                  <a:srgbClr val="000000"/>
+                </a:solidFill>
+                <a:latin typeface="Arial Unicode MS"/>
+                <a:ea typeface="Arial Unicode MS"/>
+                <a:cs typeface="Arial Unicode MS"/>
+              </a:rPr>
+              <a:t>
+</a:t>
+            </a:r>
+          </a:p>
+          <a:p>
+            <a:pPr algn="l">
+              <a:lnSpc>
+                <a:spcPct val="115000"/>
+              </a:lnSpc>
+              <a:spcAft>
+                <a:spcPts val="500"/>
+              </a:spcAft>
+            </a:pPr>
+            <a:r>
+              <a:rPr sz="1000" lang="zh-TW" dirty="0">
                 <a:solidFill>
                   <a:srgbClr val="000000"/>
                 </a:solidFill>
@@ -732,11 +1018,11 @@
                 <a:spcPct val="115000"/>
               </a:lnSpc>
               <a:spcAft>
-                <a:spcPts val="525"/>
-              </a:spcAft>
-            </a:pPr>
-            <a:r>
-              <a:rPr sz="1050" b="1" lang="zh-TW" dirty="0">
+                <a:spcPts val="500"/>
+              </a:spcAft>
+            </a:pPr>
+            <a:r>
+              <a:rPr sz="1000" b="1" lang="zh-TW" dirty="0">
                 <a:solidFill>
                   <a:srgbClr val="000000"/>
                 </a:solidFill>
@@ -747,7 +1033,7 @@
               <a:t>第一步，選型號。</a:t>
             </a:r>
             <a:r>
-              <a:rPr sz="1050" lang="zh-TW" dirty="0">
+              <a:rPr sz="1000" lang="zh-TW" dirty="0">
                 <a:solidFill>
                   <a:srgbClr val="000000"/>
                 </a:solidFill>
@@ -758,7 +1044,7 @@
               <a:t>左邊四個按鈕，你要算哪一顆就按哪一顆。這裡我要請各位做一件事：</a:t>
             </a:r>
             <a:r>
-              <a:rPr sz="1050" b="1" lang="zh-TW" dirty="0">
+              <a:rPr sz="1000" b="1" lang="zh-TW" dirty="0">
                 <a:solidFill>
                   <a:srgbClr val="000000"/>
                 </a:solidFill>
@@ -769,7 +1055,7 @@
               <a:t>把「只看英文原文」按下去</a:t>
             </a:r>
             <a:r>
-              <a:rPr sz="1050" lang="zh-TW" dirty="0">
+              <a:rPr sz="1000" lang="zh-TW" dirty="0">
                 <a:solidFill>
                   <a:srgbClr val="000000"/>
                 </a:solidFill>
@@ -787,11 +1073,11 @@
                 <a:spcPct val="115000"/>
               </a:lnSpc>
               <a:spcAft>
-                <a:spcPts val="525"/>
-              </a:spcAft>
-            </a:pPr>
-            <a:r>
-              <a:rPr sz="1050" lang="zh-TW" dirty="0">
+                <a:spcPts val="500"/>
+              </a:spcAft>
+            </a:pPr>
+            <a:r>
+              <a:rPr sz="1000" lang="zh-TW" dirty="0">
                 <a:solidFill>
                   <a:srgbClr val="000000"/>
                 </a:solidFill>
@@ -809,11 +1095,11 @@
                 <a:spcPct val="115000"/>
               </a:lnSpc>
               <a:spcAft>
-                <a:spcPts val="525"/>
-              </a:spcAft>
-            </a:pPr>
-            <a:r>
-              <a:rPr sz="1050" b="1" lang="zh-TW" dirty="0">
+                <a:spcPts val="500"/>
+              </a:spcAft>
+            </a:pPr>
+            <a:r>
+              <a:rPr sz="1000" b="1" lang="zh-TW" dirty="0">
                 <a:solidFill>
                   <a:srgbClr val="000000"/>
                 </a:solidFill>
@@ -824,7 +1110,7 @@
               <a:t>第二步，找四個數字。</a:t>
             </a:r>
             <a:r>
-              <a:rPr sz="1050" lang="zh-TW" dirty="0">
+              <a:rPr sz="1000" lang="zh-TW" dirty="0">
                 <a:solidFill>
                   <a:srgbClr val="000000"/>
                 </a:solidFill>
@@ -842,11 +1128,11 @@
                 <a:spcPct val="115000"/>
               </a:lnSpc>
               <a:spcAft>
-                <a:spcPts val="525"/>
-              </a:spcAft>
-            </a:pPr>
-            <a:r>
-              <a:rPr sz="1050" b="1" lang="zh-TW" dirty="0">
+                <a:spcPts val="500"/>
+              </a:spcAft>
+            </a:pPr>
+            <a:r>
+              <a:rPr sz="1000" b="1" lang="zh-TW" dirty="0">
                 <a:solidFill>
                   <a:srgbClr val="000000"/>
                 </a:solidFill>
@@ -857,7 +1143,7 @@
               <a:t>第三步，選情境。</a:t>
             </a:r>
             <a:r>
-              <a:rPr sz="1050" lang="zh-TW" dirty="0">
+              <a:rPr sz="1000" lang="zh-TW" dirty="0">
                 <a:solidFill>
                   <a:srgbClr val="000000"/>
                 </a:solidFill>
@@ -875,11 +1161,11 @@
                 <a:spcPct val="115000"/>
               </a:lnSpc>
               <a:spcAft>
-                <a:spcPts val="525"/>
-              </a:spcAft>
-            </a:pPr>
-            <a:r>
-              <a:rPr sz="1050" b="1" lang="zh-TW" dirty="0">
+                <a:spcPts val="500"/>
+              </a:spcAft>
+            </a:pPr>
+            <a:r>
+              <a:rPr sz="1000" b="1" lang="zh-TW" dirty="0">
                 <a:solidFill>
                   <a:srgbClr val="000000"/>
                 </a:solidFill>
@@ -890,7 +1176,7 @@
               <a:t>第四步，寫結論。</a:t>
             </a:r>
             <a:r>
-              <a:rPr sz="1050" lang="zh-TW" dirty="0">
+              <a:rPr sz="1000" lang="zh-TW" dirty="0">
                 <a:solidFill>
                   <a:srgbClr val="000000"/>
                 </a:solidFill>
@@ -908,11 +1194,11 @@
                 <a:spcPct val="115000"/>
               </a:lnSpc>
               <a:spcAft>
-                <a:spcPts val="525"/>
-              </a:spcAft>
-            </a:pPr>
-            <a:r>
-              <a:rPr sz="1050" lang="zh-TW" dirty="0">
+                <a:spcPts val="500"/>
+              </a:spcAft>
+            </a:pPr>
+            <a:r>
+              <a:rPr sz="1000" lang="zh-TW" dirty="0">
                 <a:solidFill>
                   <a:srgbClr val="000000"/>
                 </a:solidFill>
@@ -923,7 +1209,7 @@
               <a:t>我要看到的不是「夠」或「不夠」兩個字，是</a:t>
             </a:r>
             <a:r>
-              <a:rPr sz="1050" b="1" lang="zh-TW" dirty="0">
+              <a:rPr sz="1000" b="1" lang="zh-TW" dirty="0">
                 <a:solidFill>
                   <a:srgbClr val="000000"/>
                 </a:solidFill>
@@ -934,7 +1220,7 @@
               <a:t>卡在哪一行</a:t>
             </a:r>
             <a:r>
-              <a:rPr sz="1050" lang="zh-TW" dirty="0">
+              <a:rPr sz="1000" lang="zh-TW" dirty="0">
                 <a:solidFill>
                   <a:srgbClr val="000000"/>
                 </a:solidFill>
@@ -952,11 +1238,11 @@
                 <a:spcPct val="115000"/>
               </a:lnSpc>
               <a:spcAft>
-                <a:spcPts val="525"/>
-              </a:spcAft>
-            </a:pPr>
-            <a:r>
-              <a:rPr sz="1050" lang="zh-TW" dirty="0">
+                <a:spcPts val="500"/>
+              </a:spcAft>
+            </a:pPr>
+            <a:r>
+              <a:rPr sz="1000" lang="zh-TW" dirty="0">
                 <a:solidFill>
                   <a:srgbClr val="000000"/>
                 </a:solidFill>
@@ -974,11 +1260,11 @@
                 <a:spcPct val="115000"/>
               </a:lnSpc>
               <a:spcAft>
-                <a:spcPts val="525"/>
-              </a:spcAft>
-            </a:pPr>
-            <a:r>
-              <a:rPr sz="1050" lang="zh-TW" dirty="0">
+                <a:spcPts val="500"/>
+              </a:spcAft>
+            </a:pPr>
+            <a:r>
+              <a:rPr sz="1000" lang="zh-TW" dirty="0">
                 <a:solidFill>
                   <a:srgbClr val="000000"/>
                 </a:solidFill>
@@ -996,11 +1282,11 @@
                 <a:spcPct val="115000"/>
               </a:lnSpc>
               <a:spcAft>
-                <a:spcPts val="525"/>
-              </a:spcAft>
-            </a:pPr>
-            <a:r>
-              <a:rPr sz="1050" lang="zh-TW" dirty="0">
+                <a:spcPts val="500"/>
+              </a:spcAft>
+            </a:pPr>
+            <a:r>
+              <a:rPr sz="1000" lang="zh-TW" dirty="0">
                 <a:solidFill>
                   <a:srgbClr val="000000"/>
                 </a:solidFill>
@@ -1121,6 +1407,149 @@
               </a:spcAft>
             </a:pPr>
             <a:r>
+              <a:rPr sz="1000" b="1" lang="zh-TW" dirty="0">
+                <a:solidFill>
+                  <a:srgbClr val="000000"/>
+                </a:solidFill>
+                <a:latin typeface="Arial Unicode MS"/>
+                <a:ea typeface="Arial Unicode MS"/>
+                <a:cs typeface="Arial Unicode MS"/>
+              </a:rPr>
+              <a:t>▍這一張要做什麼</a:t>
+            </a:r>
+            <a:r>
+              <a:rPr sz="1000" lang="zh-TW" dirty="0">
+                <a:solidFill>
+                  <a:srgbClr val="000000"/>
+                </a:solidFill>
+                <a:latin typeface="Arial Unicode MS"/>
+                <a:ea typeface="Arial Unicode MS"/>
+                <a:cs typeface="Arial Unicode MS"/>
+              </a:rPr>
+              <a:t>
+</a:t>
+            </a:r>
+          </a:p>
+          <a:p>
+            <a:pPr algn="l">
+              <a:lnSpc>
+                <a:spcPct val="115000"/>
+              </a:lnSpc>
+              <a:spcAft>
+                <a:spcPts val="500"/>
+              </a:spcAft>
+            </a:pPr>
+            <a:r>
+              <a:rPr sz="1000" lang="zh-TW" dirty="0">
+                <a:solidFill>
+                  <a:srgbClr val="000000"/>
+                </a:solidFill>
+                <a:latin typeface="Arial Unicode MS"/>
+                <a:ea typeface="Arial Unicode MS"/>
+                <a:cs typeface="Arial Unicode MS"/>
+              </a:rPr>
+              <a:t>第一題：校園接駁，時速 20。四個型號都試一次，先建立基準。
+</a:t>
+            </a:r>
+          </a:p>
+          <a:p>
+            <a:pPr algn="l">
+              <a:lnSpc>
+                <a:spcPct val="115000"/>
+              </a:lnSpc>
+              <a:spcAft>
+                <a:spcPts val="500"/>
+              </a:spcAft>
+            </a:pPr>
+            <a:r>
+              <a:rPr sz="1000" b="1" lang="zh-TW" dirty="0">
+                <a:solidFill>
+                  <a:srgbClr val="000000"/>
+                </a:solidFill>
+                <a:latin typeface="Arial Unicode MS"/>
+                <a:ea typeface="Arial Unicode MS"/>
+                <a:cs typeface="Arial Unicode MS"/>
+              </a:rPr>
+              <a:t>▍畫面上圈這裡</a:t>
+            </a:r>
+            <a:r>
+              <a:rPr sz="1000" lang="zh-TW" dirty="0">
+                <a:solidFill>
+                  <a:srgbClr val="000000"/>
+                </a:solidFill>
+                <a:latin typeface="Arial Unicode MS"/>
+                <a:ea typeface="Arial Unicode MS"/>
+                <a:cs typeface="Arial Unicode MS"/>
+              </a:rPr>
+              <a:t>
+</a:t>
+            </a:r>
+          </a:p>
+          <a:p>
+            <a:pPr algn="l">
+              <a:lnSpc>
+                <a:spcPct val="115000"/>
+              </a:lnSpc>
+              <a:spcAft>
+                <a:spcPts val="500"/>
+              </a:spcAft>
+            </a:pPr>
+            <a:r>
+              <a:rPr sz="1000" lang="zh-TW" dirty="0">
+                <a:solidFill>
+                  <a:srgbClr val="000000"/>
+                </a:solidFill>
+                <a:latin typeface="Arial Unicode MS"/>
+                <a:ea typeface="Arial Unicode MS"/>
+                <a:cs typeface="Arial Unicode MS"/>
+              </a:rPr>
+              <a:t>圈情境條件裡的時速與目標大小。這一題多數型號都會過，重點是熟悉流程。
+</a:t>
+            </a:r>
+          </a:p>
+          <a:p>
+            <a:pPr algn="l">
+              <a:lnSpc>
+                <a:spcPct val="115000"/>
+              </a:lnSpc>
+              <a:spcAft>
+                <a:spcPts val="500"/>
+              </a:spcAft>
+            </a:pPr>
+            <a:r>
+              <a:rPr sz="1000" b="1" lang="zh-TW" dirty="0">
+                <a:solidFill>
+                  <a:srgbClr val="000000"/>
+                </a:solidFill>
+                <a:latin typeface="Arial Unicode MS"/>
+                <a:ea typeface="Arial Unicode MS"/>
+                <a:cs typeface="Arial Unicode MS"/>
+              </a:rPr>
+              <a:t>▍以下照著唸</a:t>
+            </a:r>
+            <a:r>
+              <a:rPr sz="1000" lang="zh-TW" dirty="0">
+                <a:solidFill>
+                  <a:srgbClr val="000000"/>
+                </a:solidFill>
+                <a:latin typeface="Arial Unicode MS"/>
+                <a:ea typeface="Arial Unicode MS"/>
+                <a:cs typeface="Arial Unicode MS"/>
+              </a:rPr>
+              <a:t>
+</a:t>
+            </a:r>
+          </a:p>
+          <a:p>
+            <a:pPr algn="l">
+              <a:lnSpc>
+                <a:spcPct val="115000"/>
+              </a:lnSpc>
+              <a:spcAft>
+                <a:spcPts val="500"/>
+              </a:spcAft>
+            </a:pPr>
+            <a:r>
               <a:rPr sz="1000" lang="zh-TW" dirty="0">
                 <a:solidFill>
                   <a:srgbClr val="000000"/>
@@ -1594,6 +2023,149 @@
               </a:spcAft>
             </a:pPr>
             <a:r>
+              <a:rPr sz="1000" b="1" lang="zh-TW" dirty="0">
+                <a:solidFill>
+                  <a:srgbClr val="000000"/>
+                </a:solidFill>
+                <a:latin typeface="Arial Unicode MS"/>
+                <a:ea typeface="Arial Unicode MS"/>
+                <a:cs typeface="Arial Unicode MS"/>
+              </a:rPr>
+              <a:t>▍這一張要做什麼</a:t>
+            </a:r>
+            <a:r>
+              <a:rPr sz="1000" lang="zh-TW" dirty="0">
+                <a:solidFill>
+                  <a:srgbClr val="000000"/>
+                </a:solidFill>
+                <a:latin typeface="Arial Unicode MS"/>
+                <a:ea typeface="Arial Unicode MS"/>
+                <a:cs typeface="Arial Unicode MS"/>
+              </a:rPr>
+              <a:t>
+</a:t>
+            </a:r>
+          </a:p>
+          <a:p>
+            <a:pPr algn="l">
+              <a:lnSpc>
+                <a:spcPct val="115000"/>
+              </a:lnSpc>
+              <a:spcAft>
+                <a:spcPts val="500"/>
+              </a:spcAft>
+            </a:pPr>
+            <a:r>
+              <a:rPr sz="1000" lang="zh-TW" dirty="0">
+                <a:solidFill>
+                  <a:srgbClr val="000000"/>
+                </a:solidFill>
+                <a:latin typeface="Arial Unicode MS"/>
+                <a:ea typeface="Arial Unicode MS"/>
+                <a:cs typeface="Arial Unicode MS"/>
+              </a:rPr>
+              <a:t>第二題：河內尖峰，時速 40。這一題會出現翻盤，是今天的亮點。
+</a:t>
+            </a:r>
+          </a:p>
+          <a:p>
+            <a:pPr algn="l">
+              <a:lnSpc>
+                <a:spcPct val="115000"/>
+              </a:lnSpc>
+              <a:spcAft>
+                <a:spcPts val="500"/>
+              </a:spcAft>
+            </a:pPr>
+            <a:r>
+              <a:rPr sz="1000" b="1" lang="zh-TW" dirty="0">
+                <a:solidFill>
+                  <a:srgbClr val="000000"/>
+                </a:solidFill>
+                <a:latin typeface="Arial Unicode MS"/>
+                <a:ea typeface="Arial Unicode MS"/>
+                <a:cs typeface="Arial Unicode MS"/>
+              </a:rPr>
+              <a:t>▍畫面上圈這裡</a:t>
+            </a:r>
+            <a:r>
+              <a:rPr sz="1000" lang="zh-TW" dirty="0">
+                <a:solidFill>
+                  <a:srgbClr val="000000"/>
+                </a:solidFill>
+                <a:latin typeface="Arial Unicode MS"/>
+                <a:ea typeface="Arial Unicode MS"/>
+                <a:cs typeface="Arial Unicode MS"/>
+              </a:rPr>
+              <a:t>
+</a:t>
+            </a:r>
+          </a:p>
+          <a:p>
+            <a:pPr algn="l">
+              <a:lnSpc>
+                <a:spcPct val="115000"/>
+              </a:lnSpc>
+              <a:spcAft>
+                <a:spcPts val="500"/>
+              </a:spcAft>
+            </a:pPr>
+            <a:r>
+              <a:rPr sz="1000" lang="zh-TW" dirty="0">
+                <a:solidFill>
+                  <a:srgbClr val="000000"/>
+                </a:solidFill>
+                <a:latin typeface="Arial Unicode MS"/>
+                <a:ea typeface="Arial Unicode MS"/>
+                <a:cs typeface="Arial Unicode MS"/>
+              </a:rPr>
+              <a:t>圈 OS1 那一列的點數判定。等他們卡住之後，再提示規格表上那行「可設定」。
+</a:t>
+            </a:r>
+          </a:p>
+          <a:p>
+            <a:pPr algn="l">
+              <a:lnSpc>
+                <a:spcPct val="115000"/>
+              </a:lnSpc>
+              <a:spcAft>
+                <a:spcPts val="500"/>
+              </a:spcAft>
+            </a:pPr>
+            <a:r>
+              <a:rPr sz="1000" b="1" lang="zh-TW" dirty="0">
+                <a:solidFill>
+                  <a:srgbClr val="000000"/>
+                </a:solidFill>
+                <a:latin typeface="Arial Unicode MS"/>
+                <a:ea typeface="Arial Unicode MS"/>
+                <a:cs typeface="Arial Unicode MS"/>
+              </a:rPr>
+              <a:t>▍以下照著唸</a:t>
+            </a:r>
+            <a:r>
+              <a:rPr sz="1000" lang="zh-TW" dirty="0">
+                <a:solidFill>
+                  <a:srgbClr val="000000"/>
+                </a:solidFill>
+                <a:latin typeface="Arial Unicode MS"/>
+                <a:ea typeface="Arial Unicode MS"/>
+                <a:cs typeface="Arial Unicode MS"/>
+              </a:rPr>
+              <a:t>
+</a:t>
+            </a:r>
+          </a:p>
+          <a:p>
+            <a:pPr algn="l">
+              <a:lnSpc>
+                <a:spcPct val="115000"/>
+              </a:lnSpc>
+              <a:spcAft>
+                <a:spcPts val="500"/>
+              </a:spcAft>
+            </a:pPr>
+            <a:r>
               <a:rPr sz="1000" lang="zh-TW" dirty="0">
                 <a:solidFill>
                   <a:srgbClr val="000000"/>
@@ -2122,6 +2694,149 @@
               </a:spcAft>
             </a:pPr>
             <a:r>
+              <a:rPr sz="1000" b="1" lang="zh-TW" dirty="0">
+                <a:solidFill>
+                  <a:srgbClr val="000000"/>
+                </a:solidFill>
+                <a:latin typeface="Arial Unicode MS"/>
+                <a:ea typeface="Arial Unicode MS"/>
+                <a:cs typeface="Arial Unicode MS"/>
+              </a:rPr>
+              <a:t>▍這一張要做什麼</a:t>
+            </a:r>
+            <a:r>
+              <a:rPr sz="1000" lang="zh-TW" dirty="0">
+                <a:solidFill>
+                  <a:srgbClr val="000000"/>
+                </a:solidFill>
+                <a:latin typeface="Arial Unicode MS"/>
+                <a:ea typeface="Arial Unicode MS"/>
+                <a:cs typeface="Arial Unicode MS"/>
+              </a:rPr>
+              <a:t>
+</a:t>
+            </a:r>
+          </a:p>
+          <a:p>
+            <a:pPr algn="l">
+              <a:lnSpc>
+                <a:spcPct val="115000"/>
+              </a:lnSpc>
+              <a:spcAft>
+                <a:spcPts val="500"/>
+              </a:spcAft>
+            </a:pPr>
+            <a:r>
+              <a:rPr sz="1000" lang="zh-TW" dirty="0">
+                <a:solidFill>
+                  <a:srgbClr val="000000"/>
+                </a:solidFill>
+                <a:latin typeface="Arial Unicode MS"/>
+                <a:ea typeface="Arial Unicode MS"/>
+                <a:cs typeface="Arial Unicode MS"/>
+              </a:rPr>
+              <a:t>第三題：國道，時速 100，150 公尺外要看到車。測距夠不等於看得清。
+</a:t>
+            </a:r>
+          </a:p>
+          <a:p>
+            <a:pPr algn="l">
+              <a:lnSpc>
+                <a:spcPct val="115000"/>
+              </a:lnSpc>
+              <a:spcAft>
+                <a:spcPts val="500"/>
+              </a:spcAft>
+            </a:pPr>
+            <a:r>
+              <a:rPr sz="1000" b="1" lang="zh-TW" dirty="0">
+                <a:solidFill>
+                  <a:srgbClr val="000000"/>
+                </a:solidFill>
+                <a:latin typeface="Arial Unicode MS"/>
+                <a:ea typeface="Arial Unicode MS"/>
+                <a:cs typeface="Arial Unicode MS"/>
+              </a:rPr>
+              <a:t>▍畫面上圈這裡</a:t>
+            </a:r>
+            <a:r>
+              <a:rPr sz="1000" lang="zh-TW" dirty="0">
+                <a:solidFill>
+                  <a:srgbClr val="000000"/>
+                </a:solidFill>
+                <a:latin typeface="Arial Unicode MS"/>
+                <a:ea typeface="Arial Unicode MS"/>
+                <a:cs typeface="Arial Unicode MS"/>
+              </a:rPr>
+              <a:t>
+</a:t>
+            </a:r>
+          </a:p>
+          <a:p>
+            <a:pPr algn="l">
+              <a:lnSpc>
+                <a:spcPct val="115000"/>
+              </a:lnSpc>
+              <a:spcAft>
+                <a:spcPts val="500"/>
+              </a:spcAft>
+            </a:pPr>
+            <a:r>
+              <a:rPr sz="1000" lang="zh-TW" dirty="0">
+                <a:solidFill>
+                  <a:srgbClr val="000000"/>
+                </a:solidFill>
+                <a:latin typeface="Arial Unicode MS"/>
+                <a:ea typeface="Arial Unicode MS"/>
+                <a:cs typeface="Arial Unicode MS"/>
+              </a:rPr>
+              <a:t>圈測距那一欄與點數那一欄，讓他們看到一個過、一個不過。
+</a:t>
+            </a:r>
+          </a:p>
+          <a:p>
+            <a:pPr algn="l">
+              <a:lnSpc>
+                <a:spcPct val="115000"/>
+              </a:lnSpc>
+              <a:spcAft>
+                <a:spcPts val="500"/>
+              </a:spcAft>
+            </a:pPr>
+            <a:r>
+              <a:rPr sz="1000" b="1" lang="zh-TW" dirty="0">
+                <a:solidFill>
+                  <a:srgbClr val="000000"/>
+                </a:solidFill>
+                <a:latin typeface="Arial Unicode MS"/>
+                <a:ea typeface="Arial Unicode MS"/>
+                <a:cs typeface="Arial Unicode MS"/>
+              </a:rPr>
+              <a:t>▍以下照著唸</a:t>
+            </a:r>
+            <a:r>
+              <a:rPr sz="1000" lang="zh-TW" dirty="0">
+                <a:solidFill>
+                  <a:srgbClr val="000000"/>
+                </a:solidFill>
+                <a:latin typeface="Arial Unicode MS"/>
+                <a:ea typeface="Arial Unicode MS"/>
+                <a:cs typeface="Arial Unicode MS"/>
+              </a:rPr>
+              <a:t>
+</a:t>
+            </a:r>
+          </a:p>
+          <a:p>
+            <a:pPr algn="l">
+              <a:lnSpc>
+                <a:spcPct val="115000"/>
+              </a:lnSpc>
+              <a:spcAft>
+                <a:spcPts val="500"/>
+              </a:spcAft>
+            </a:pPr>
+            <a:r>
               <a:rPr sz="1000" lang="zh-TW" dirty="0">
                 <a:solidFill>
                   <a:srgbClr val="000000"/>
@@ -2661,6 +3376,149 @@
               </a:spcAft>
             </a:pPr>
             <a:r>
+              <a:rPr sz="1000" b="1" lang="zh-TW" dirty="0">
+                <a:solidFill>
+                  <a:srgbClr val="000000"/>
+                </a:solidFill>
+                <a:latin typeface="Arial Unicode MS"/>
+                <a:ea typeface="Arial Unicode MS"/>
+                <a:cs typeface="Arial Unicode MS"/>
+              </a:rPr>
+              <a:t>▍這一張要做什麼</a:t>
+            </a:r>
+            <a:r>
+              <a:rPr sz="1000" lang="zh-TW" dirty="0">
+                <a:solidFill>
+                  <a:srgbClr val="000000"/>
+                </a:solidFill>
+                <a:latin typeface="Arial Unicode MS"/>
+                <a:ea typeface="Arial Unicode MS"/>
+                <a:cs typeface="Arial Unicode MS"/>
+              </a:rPr>
+              <a:t>
+</a:t>
+            </a:r>
+          </a:p>
+          <a:p>
+            <a:pPr algn="l">
+              <a:lnSpc>
+                <a:spcPct val="115000"/>
+              </a:lnSpc>
+              <a:spcAft>
+                <a:spcPts val="500"/>
+              </a:spcAft>
+            </a:pPr>
+            <a:r>
+              <a:rPr sz="1000" lang="zh-TW" dirty="0">
+                <a:solidFill>
+                  <a:srgbClr val="000000"/>
+                </a:solidFill>
+                <a:latin typeface="Arial Unicode MS"/>
+                <a:ea typeface="Arial Unicode MS"/>
+                <a:cs typeface="Arial Unicode MS"/>
+              </a:rPr>
+              <a:t>把十二格合成一張表，得出結論：沒有一顆三個情境都贏。
+</a:t>
+            </a:r>
+          </a:p>
+          <a:p>
+            <a:pPr algn="l">
+              <a:lnSpc>
+                <a:spcPct val="115000"/>
+              </a:lnSpc>
+              <a:spcAft>
+                <a:spcPts val="500"/>
+              </a:spcAft>
+            </a:pPr>
+            <a:r>
+              <a:rPr sz="1000" b="1" lang="zh-TW" dirty="0">
+                <a:solidFill>
+                  <a:srgbClr val="000000"/>
+                </a:solidFill>
+                <a:latin typeface="Arial Unicode MS"/>
+                <a:ea typeface="Arial Unicode MS"/>
+                <a:cs typeface="Arial Unicode MS"/>
+              </a:rPr>
+              <a:t>▍畫面上圈這裡</a:t>
+            </a:r>
+            <a:r>
+              <a:rPr sz="1000" lang="zh-TW" dirty="0">
+                <a:solidFill>
+                  <a:srgbClr val="000000"/>
+                </a:solidFill>
+                <a:latin typeface="Arial Unicode MS"/>
+                <a:ea typeface="Arial Unicode MS"/>
+                <a:cs typeface="Arial Unicode MS"/>
+              </a:rPr>
+              <a:t>
+</a:t>
+            </a:r>
+          </a:p>
+          <a:p>
+            <a:pPr algn="l">
+              <a:lnSpc>
+                <a:spcPct val="115000"/>
+              </a:lnSpc>
+              <a:spcAft>
+                <a:spcPts val="500"/>
+              </a:spcAft>
+            </a:pPr>
+            <a:r>
+              <a:rPr sz="1000" lang="zh-TW" dirty="0">
+                <a:solidFill>
+                  <a:srgbClr val="000000"/>
+                </a:solidFill>
+                <a:latin typeface="Arial Unicode MS"/>
+                <a:ea typeface="Arial Unicode MS"/>
+                <a:cs typeface="Arial Unicode MS"/>
+              </a:rPr>
+              <a:t>把三個情境各自的贏家圈起來，指出它們不是同一顆。
+</a:t>
+            </a:r>
+          </a:p>
+          <a:p>
+            <a:pPr algn="l">
+              <a:lnSpc>
+                <a:spcPct val="115000"/>
+              </a:lnSpc>
+              <a:spcAft>
+                <a:spcPts val="500"/>
+              </a:spcAft>
+            </a:pPr>
+            <a:r>
+              <a:rPr sz="1000" b="1" lang="zh-TW" dirty="0">
+                <a:solidFill>
+                  <a:srgbClr val="000000"/>
+                </a:solidFill>
+                <a:latin typeface="Arial Unicode MS"/>
+                <a:ea typeface="Arial Unicode MS"/>
+                <a:cs typeface="Arial Unicode MS"/>
+              </a:rPr>
+              <a:t>▍以下照著唸</a:t>
+            </a:r>
+            <a:r>
+              <a:rPr sz="1000" lang="zh-TW" dirty="0">
+                <a:solidFill>
+                  <a:srgbClr val="000000"/>
+                </a:solidFill>
+                <a:latin typeface="Arial Unicode MS"/>
+                <a:ea typeface="Arial Unicode MS"/>
+                <a:cs typeface="Arial Unicode MS"/>
+              </a:rPr>
+              <a:t>
+</a:t>
+            </a:r>
+          </a:p>
+          <a:p>
+            <a:pPr algn="l">
+              <a:lnSpc>
+                <a:spcPct val="115000"/>
+              </a:lnSpc>
+              <a:spcAft>
+                <a:spcPts val="500"/>
+              </a:spcAft>
+            </a:pPr>
+            <a:r>
               <a:rPr sz="1000" lang="zh-TW" dirty="0">
                 <a:solidFill>
                   <a:srgbClr val="000000"/>
@@ -3108,11 +3966,154 @@
                 <a:spcPct val="115000"/>
               </a:lnSpc>
               <a:spcAft>
-                <a:spcPts val="600"/>
-              </a:spcAft>
-            </a:pPr>
-            <a:r>
-              <a:rPr sz="1200" lang="zh-TW" dirty="0">
+                <a:spcPts val="500"/>
+              </a:spcAft>
+            </a:pPr>
+            <a:r>
+              <a:rPr sz="1000" b="1" lang="zh-TW" dirty="0">
+                <a:solidFill>
+                  <a:srgbClr val="000000"/>
+                </a:solidFill>
+                <a:latin typeface="Arial Unicode MS"/>
+                <a:ea typeface="Arial Unicode MS"/>
+                <a:cs typeface="Arial Unicode MS"/>
+              </a:rPr>
+              <a:t>▍這一張要做什麼</a:t>
+            </a:r>
+            <a:r>
+              <a:rPr sz="1000" lang="zh-TW" dirty="0">
+                <a:solidFill>
+                  <a:srgbClr val="000000"/>
+                </a:solidFill>
+                <a:latin typeface="Arial Unicode MS"/>
+                <a:ea typeface="Arial Unicode MS"/>
+                <a:cs typeface="Arial Unicode MS"/>
+              </a:rPr>
+              <a:t>
+</a:t>
+            </a:r>
+          </a:p>
+          <a:p>
+            <a:pPr algn="l">
+              <a:lnSpc>
+                <a:spcPct val="115000"/>
+              </a:lnSpc>
+              <a:spcAft>
+                <a:spcPts val="500"/>
+              </a:spcAft>
+            </a:pPr>
+            <a:r>
+              <a:rPr sz="1000" lang="zh-TW" dirty="0">
+                <a:solidFill>
+                  <a:srgbClr val="000000"/>
+                </a:solidFill>
+                <a:latin typeface="Arial Unicode MS"/>
+                <a:ea typeface="Arial Unicode MS"/>
+                <a:cs typeface="Arial Unicode MS"/>
+              </a:rPr>
+              <a:t>四句是非題，當作本章總複習。
+</a:t>
+            </a:r>
+          </a:p>
+          <a:p>
+            <a:pPr algn="l">
+              <a:lnSpc>
+                <a:spcPct val="115000"/>
+              </a:lnSpc>
+              <a:spcAft>
+                <a:spcPts val="500"/>
+              </a:spcAft>
+            </a:pPr>
+            <a:r>
+              <a:rPr sz="1000" b="1" lang="zh-TW" dirty="0">
+                <a:solidFill>
+                  <a:srgbClr val="000000"/>
+                </a:solidFill>
+                <a:latin typeface="Arial Unicode MS"/>
+                <a:ea typeface="Arial Unicode MS"/>
+                <a:cs typeface="Arial Unicode MS"/>
+              </a:rPr>
+              <a:t>▍畫面上圈這裡</a:t>
+            </a:r>
+            <a:r>
+              <a:rPr sz="1000" lang="zh-TW" dirty="0">
+                <a:solidFill>
+                  <a:srgbClr val="000000"/>
+                </a:solidFill>
+                <a:latin typeface="Arial Unicode MS"/>
+                <a:ea typeface="Arial Unicode MS"/>
+                <a:cs typeface="Arial Unicode MS"/>
+              </a:rPr>
+              <a:t>
+</a:t>
+            </a:r>
+          </a:p>
+          <a:p>
+            <a:pPr algn="l">
+              <a:lnSpc>
+                <a:spcPct val="115000"/>
+              </a:lnSpc>
+              <a:spcAft>
+                <a:spcPts val="500"/>
+              </a:spcAft>
+            </a:pPr>
+            <a:r>
+              <a:rPr sz="1000" lang="zh-TW" dirty="0">
+                <a:solidFill>
+                  <a:srgbClr val="000000"/>
+                </a:solidFill>
+                <a:latin typeface="Arial Unicode MS"/>
+                <a:ea typeface="Arial Unicode MS"/>
+                <a:cs typeface="Arial Unicode MS"/>
+              </a:rPr>
+              <a:t>一句一句圈，每句給一分鐘先表態。
+</a:t>
+            </a:r>
+          </a:p>
+          <a:p>
+            <a:pPr algn="l">
+              <a:lnSpc>
+                <a:spcPct val="115000"/>
+              </a:lnSpc>
+              <a:spcAft>
+                <a:spcPts val="500"/>
+              </a:spcAft>
+            </a:pPr>
+            <a:r>
+              <a:rPr sz="1000" b="1" lang="zh-TW" dirty="0">
+                <a:solidFill>
+                  <a:srgbClr val="000000"/>
+                </a:solidFill>
+                <a:latin typeface="Arial Unicode MS"/>
+                <a:ea typeface="Arial Unicode MS"/>
+                <a:cs typeface="Arial Unicode MS"/>
+              </a:rPr>
+              <a:t>▍以下照著唸</a:t>
+            </a:r>
+            <a:r>
+              <a:rPr sz="1000" lang="zh-TW" dirty="0">
+                <a:solidFill>
+                  <a:srgbClr val="000000"/>
+                </a:solidFill>
+                <a:latin typeface="Arial Unicode MS"/>
+                <a:ea typeface="Arial Unicode MS"/>
+                <a:cs typeface="Arial Unicode MS"/>
+              </a:rPr>
+              <a:t>
+</a:t>
+            </a:r>
+          </a:p>
+          <a:p>
+            <a:pPr algn="l">
+              <a:lnSpc>
+                <a:spcPct val="115000"/>
+              </a:lnSpc>
+              <a:spcAft>
+                <a:spcPts val="500"/>
+              </a:spcAft>
+            </a:pPr>
+            <a:r>
+              <a:rPr sz="1000" lang="zh-TW" dirty="0">
                 <a:solidFill>
                   <a:srgbClr val="000000"/>
                 </a:solidFill>
@@ -3130,11 +4131,11 @@
                 <a:spcPct val="115000"/>
               </a:lnSpc>
               <a:spcAft>
-                <a:spcPts val="600"/>
-              </a:spcAft>
-            </a:pPr>
-            <a:r>
-              <a:rPr sz="1200" lang="zh-TW" dirty="0">
+                <a:spcPts val="500"/>
+              </a:spcAft>
+            </a:pPr>
+            <a:r>
+              <a:rPr sz="1000" lang="zh-TW" dirty="0">
                 <a:solidFill>
                   <a:srgbClr val="000000"/>
                 </a:solidFill>
@@ -3152,11 +4153,11 @@
                 <a:spcPct val="115000"/>
               </a:lnSpc>
               <a:spcAft>
-                <a:spcPts val="600"/>
-              </a:spcAft>
-            </a:pPr>
-            <a:r>
-              <a:rPr sz="1200" lang="zh-TW" dirty="0">
+                <a:spcPts val="500"/>
+              </a:spcAft>
+            </a:pPr>
+            <a:r>
+              <a:rPr sz="1000" lang="zh-TW" dirty="0">
                 <a:solidFill>
                   <a:srgbClr val="000000"/>
                 </a:solidFill>
@@ -3174,11 +4175,11 @@
                 <a:spcPct val="115000"/>
               </a:lnSpc>
               <a:spcAft>
-                <a:spcPts val="600"/>
-              </a:spcAft>
-            </a:pPr>
-            <a:r>
-              <a:rPr sz="1200" lang="zh-TW" dirty="0">
+                <a:spcPts val="500"/>
+              </a:spcAft>
+            </a:pPr>
+            <a:r>
+              <a:rPr sz="1000" lang="zh-TW" dirty="0">
                 <a:solidFill>
                   <a:srgbClr val="000000"/>
                 </a:solidFill>
@@ -3196,11 +4197,11 @@
                 <a:spcPct val="115000"/>
               </a:lnSpc>
               <a:spcAft>
-                <a:spcPts val="600"/>
-              </a:spcAft>
-            </a:pPr>
-            <a:r>
-              <a:rPr sz="1200" lang="zh-TW" dirty="0">
+                <a:spcPts val="500"/>
+              </a:spcAft>
+            </a:pPr>
+            <a:r>
+              <a:rPr sz="1000" lang="zh-TW" dirty="0">
                 <a:solidFill>
                   <a:srgbClr val="000000"/>
                 </a:solidFill>
@@ -3218,11 +4219,11 @@
                 <a:spcPct val="115000"/>
               </a:lnSpc>
               <a:spcAft>
-                <a:spcPts val="600"/>
-              </a:spcAft>
-            </a:pPr>
-            <a:r>
-              <a:rPr sz="1200" lang="zh-TW" dirty="0">
+                <a:spcPts val="500"/>
+              </a:spcAft>
+            </a:pPr>
+            <a:r>
+              <a:rPr sz="1000" lang="zh-TW" dirty="0">
                 <a:solidFill>
                   <a:srgbClr val="000000"/>
                 </a:solidFill>
@@ -3240,11 +4241,11 @@
                 <a:spcPct val="115000"/>
               </a:lnSpc>
               <a:spcAft>
-                <a:spcPts val="600"/>
-              </a:spcAft>
-            </a:pPr>
-            <a:r>
-              <a:rPr sz="1200" lang="zh-TW" dirty="0">
+                <a:spcPts val="500"/>
+              </a:spcAft>
+            </a:pPr>
+            <a:r>
+              <a:rPr sz="1000" lang="zh-TW" dirty="0">
                 <a:solidFill>
                   <a:srgbClr val="000000"/>
                 </a:solidFill>
@@ -3255,7 +4256,7 @@
               <a:t>我給四個提示詞，分別是</a:t>
             </a:r>
             <a:r>
-              <a:rPr sz="1200" b="1" lang="zh-TW" dirty="0">
+              <a:rPr sz="1000" b="1" lang="zh-TW" dirty="0">
                 <a:solidFill>
                   <a:srgbClr val="000000"/>
                 </a:solidFill>
@@ -3266,7 +4267,7 @@
               <a:t>反射率、鏡頭、換算成角度、標定</a:t>
             </a:r>
             <a:r>
-              <a:rPr sz="1200" lang="zh-TW" dirty="0">
+              <a:rPr sz="1000" lang="zh-TW" dirty="0">
                 <a:solidFill>
                   <a:srgbClr val="000000"/>
                 </a:solidFill>
@@ -3284,11 +4285,11 @@
                 <a:spcPct val="115000"/>
               </a:lnSpc>
               <a:spcAft>
-                <a:spcPts val="600"/>
-              </a:spcAft>
-            </a:pPr>
-            <a:r>
-              <a:rPr sz="1200" lang="zh-TW" dirty="0">
+                <a:spcPts val="500"/>
+              </a:spcAft>
+            </a:pPr>
+            <a:r>
+              <a:rPr sz="1000" lang="zh-TW" dirty="0">
                 <a:solidFill>
                   <a:srgbClr val="000000"/>
                 </a:solidFill>
@@ -3405,11 +4406,154 @@
                 <a:spcPct val="115000"/>
               </a:lnSpc>
               <a:spcAft>
-                <a:spcPts val="600"/>
-              </a:spcAft>
-            </a:pPr>
-            <a:r>
-              <a:rPr sz="1200" lang="zh-TW" dirty="0">
+                <a:spcPts val="500"/>
+              </a:spcAft>
+            </a:pPr>
+            <a:r>
+              <a:rPr sz="1000" b="1" lang="zh-TW" dirty="0">
+                <a:solidFill>
+                  <a:srgbClr val="000000"/>
+                </a:solidFill>
+                <a:latin typeface="Arial Unicode MS"/>
+                <a:ea typeface="Arial Unicode MS"/>
+                <a:cs typeface="Arial Unicode MS"/>
+              </a:rPr>
+              <a:t>▍這一張要做什麼</a:t>
+            </a:r>
+            <a:r>
+              <a:rPr sz="1000" lang="zh-TW" dirty="0">
+                <a:solidFill>
+                  <a:srgbClr val="000000"/>
+                </a:solidFill>
+                <a:latin typeface="Arial Unicode MS"/>
+                <a:ea typeface="Arial Unicode MS"/>
+                <a:cs typeface="Arial Unicode MS"/>
+              </a:rPr>
+              <a:t>
+</a:t>
+            </a:r>
+          </a:p>
+          <a:p>
+            <a:pPr algn="l">
+              <a:lnSpc>
+                <a:spcPct val="115000"/>
+              </a:lnSpc>
+              <a:spcAft>
+                <a:spcPts val="500"/>
+              </a:spcAft>
+            </a:pPr>
+            <a:r>
+              <a:rPr sz="1000" lang="zh-TW" dirty="0">
+                <a:solidFill>
+                  <a:srgbClr val="000000"/>
+                </a:solidFill>
+                <a:latin typeface="Arial Unicode MS"/>
+                <a:ea typeface="Arial Unicode MS"/>
+                <a:cs typeface="Arial Unicode MS"/>
+              </a:rPr>
+              <a:t>公布答案並解釋每一句錯在哪。
+</a:t>
+            </a:r>
+          </a:p>
+          <a:p>
+            <a:pPr algn="l">
+              <a:lnSpc>
+                <a:spcPct val="115000"/>
+              </a:lnSpc>
+              <a:spcAft>
+                <a:spcPts val="500"/>
+              </a:spcAft>
+            </a:pPr>
+            <a:r>
+              <a:rPr sz="1000" b="1" lang="zh-TW" dirty="0">
+                <a:solidFill>
+                  <a:srgbClr val="000000"/>
+                </a:solidFill>
+                <a:latin typeface="Arial Unicode MS"/>
+                <a:ea typeface="Arial Unicode MS"/>
+                <a:cs typeface="Arial Unicode MS"/>
+              </a:rPr>
+              <a:t>▍畫面上圈這裡</a:t>
+            </a:r>
+            <a:r>
+              <a:rPr sz="1000" lang="zh-TW" dirty="0">
+                <a:solidFill>
+                  <a:srgbClr val="000000"/>
+                </a:solidFill>
+                <a:latin typeface="Arial Unicode MS"/>
+                <a:ea typeface="Arial Unicode MS"/>
+                <a:cs typeface="Arial Unicode MS"/>
+              </a:rPr>
+              <a:t>
+</a:t>
+            </a:r>
+          </a:p>
+          <a:p>
+            <a:pPr algn="l">
+              <a:lnSpc>
+                <a:spcPct val="115000"/>
+              </a:lnSpc>
+              <a:spcAft>
+                <a:spcPts val="500"/>
+              </a:spcAft>
+            </a:pPr>
+            <a:r>
+              <a:rPr sz="1000" lang="zh-TW" dirty="0">
+                <a:solidFill>
+                  <a:srgbClr val="000000"/>
+                </a:solidFill>
+                <a:latin typeface="Arial Unicode MS"/>
+                <a:ea typeface="Arial Unicode MS"/>
+                <a:cs typeface="Arial Unicode MS"/>
+              </a:rPr>
+              <a:t>四句依序圈，每一句都回到今天自己抄下來的數字，不要只講道理。
+</a:t>
+            </a:r>
+          </a:p>
+          <a:p>
+            <a:pPr algn="l">
+              <a:lnSpc>
+                <a:spcPct val="115000"/>
+              </a:lnSpc>
+              <a:spcAft>
+                <a:spcPts val="500"/>
+              </a:spcAft>
+            </a:pPr>
+            <a:r>
+              <a:rPr sz="1000" b="1" lang="zh-TW" dirty="0">
+                <a:solidFill>
+                  <a:srgbClr val="000000"/>
+                </a:solidFill>
+                <a:latin typeface="Arial Unicode MS"/>
+                <a:ea typeface="Arial Unicode MS"/>
+                <a:cs typeface="Arial Unicode MS"/>
+              </a:rPr>
+              <a:t>▍以下照著唸</a:t>
+            </a:r>
+            <a:r>
+              <a:rPr sz="1000" lang="zh-TW" dirty="0">
+                <a:solidFill>
+                  <a:srgbClr val="000000"/>
+                </a:solidFill>
+                <a:latin typeface="Arial Unicode MS"/>
+                <a:ea typeface="Arial Unicode MS"/>
+                <a:cs typeface="Arial Unicode MS"/>
+              </a:rPr>
+              <a:t>
+</a:t>
+            </a:r>
+          </a:p>
+          <a:p>
+            <a:pPr algn="l">
+              <a:lnSpc>
+                <a:spcPct val="115000"/>
+              </a:lnSpc>
+              <a:spcAft>
+                <a:spcPts val="500"/>
+              </a:spcAft>
+            </a:pPr>
+            <a:r>
+              <a:rPr sz="1000" lang="zh-TW" dirty="0">
                 <a:solidFill>
                   <a:srgbClr val="000000"/>
                 </a:solidFill>
@@ -3420,7 +4564,7 @@
               <a:t>答案：</a:t>
             </a:r>
             <a:r>
-              <a:rPr sz="1200" b="1" lang="zh-TW" dirty="0">
+              <a:rPr sz="1000" b="1" lang="zh-TW" dirty="0">
                 <a:solidFill>
                   <a:srgbClr val="000000"/>
                 </a:solidFill>
@@ -3431,7 +4575,7 @@
               <a:t>四句都錯</a:t>
             </a:r>
             <a:r>
-              <a:rPr sz="1200" lang="zh-TW" dirty="0">
+              <a:rPr sz="1000" lang="zh-TW" dirty="0">
                 <a:solidFill>
                   <a:srgbClr val="000000"/>
                 </a:solidFill>
@@ -3449,11 +4593,11 @@
                 <a:spcPct val="115000"/>
               </a:lnSpc>
               <a:spcAft>
-                <a:spcPts val="600"/>
-              </a:spcAft>
-            </a:pPr>
-            <a:r>
-              <a:rPr sz="1200" b="1" lang="zh-TW" dirty="0">
+                <a:spcPts val="500"/>
+              </a:spcAft>
+            </a:pPr>
+            <a:r>
+              <a:rPr sz="1000" b="1" lang="zh-TW" dirty="0">
                 <a:solidFill>
                   <a:srgbClr val="000000"/>
                 </a:solidFill>
@@ -3464,7 +4608,7 @@
               <a:t>第一句</a:t>
             </a:r>
             <a:r>
-              <a:rPr sz="1200" lang="zh-TW" dirty="0">
+              <a:rPr sz="1000" lang="zh-TW" dirty="0">
                 <a:solidFill>
                   <a:srgbClr val="000000"/>
                 </a:solidFill>
@@ -3482,11 +4626,11 @@
                 <a:spcPct val="115000"/>
               </a:lnSpc>
               <a:spcAft>
-                <a:spcPts val="600"/>
-              </a:spcAft>
-            </a:pPr>
-            <a:r>
-              <a:rPr sz="1200" b="1" lang="zh-TW" dirty="0">
+                <a:spcPts val="500"/>
+              </a:spcAft>
+            </a:pPr>
+            <a:r>
+              <a:rPr sz="1000" b="1" lang="zh-TW" dirty="0">
                 <a:solidFill>
                   <a:srgbClr val="000000"/>
                 </a:solidFill>
@@ -3497,7 +4641,7 @@
               <a:t>第二句</a:t>
             </a:r>
             <a:r>
-              <a:rPr sz="1200" lang="zh-TW" dirty="0">
+              <a:rPr sz="1000" lang="zh-TW" dirty="0">
                 <a:solidFill>
                   <a:srgbClr val="000000"/>
                 </a:solidFill>
@@ -3508,7 +4652,7 @@
               <a:t>錯在把視野當成晶片的規格。視野是</a:t>
             </a:r>
             <a:r>
-              <a:rPr sz="1200" b="1" lang="zh-TW" dirty="0">
+              <a:rPr sz="1000" b="1" lang="zh-TW" dirty="0">
                 <a:solidFill>
                   <a:srgbClr val="000000"/>
                 </a:solidFill>
@@ -3519,7 +4663,7 @@
               <a:t>鏡頭</a:t>
             </a:r>
             <a:r>
-              <a:rPr sz="1200" lang="zh-TW" dirty="0">
+              <a:rPr sz="1000" lang="zh-TW" dirty="0">
                 <a:solidFill>
                   <a:srgbClr val="000000"/>
                 </a:solidFill>
@@ -3537,11 +4681,11 @@
                 <a:spcPct val="115000"/>
               </a:lnSpc>
               <a:spcAft>
-                <a:spcPts val="600"/>
-              </a:spcAft>
-            </a:pPr>
-            <a:r>
-              <a:rPr sz="1200" b="1" lang="zh-TW" dirty="0">
+                <a:spcPts val="500"/>
+              </a:spcAft>
+            </a:pPr>
+            <a:r>
+              <a:rPr sz="1000" b="1" lang="zh-TW" dirty="0">
                 <a:solidFill>
                   <a:srgbClr val="000000"/>
                 </a:solidFill>
@@ -3552,7 +4696,7 @@
               <a:t>第三句</a:t>
             </a:r>
             <a:r>
-              <a:rPr sz="1200" lang="zh-TW" dirty="0">
+              <a:rPr sz="1000" lang="zh-TW" dirty="0">
                 <a:solidFill>
                   <a:srgbClr val="000000"/>
                 </a:solidFill>
@@ -3563,7 +4707,7 @@
               <a:t>錯在直接拿點數比大小。每秒點數要</a:t>
             </a:r>
             <a:r>
-              <a:rPr sz="1200" b="1" lang="zh-TW" dirty="0">
+              <a:rPr sz="1000" b="1" lang="zh-TW" dirty="0">
                 <a:solidFill>
                   <a:srgbClr val="000000"/>
                 </a:solidFill>
@@ -3574,7 +4718,7 @@
               <a:t>先換算成角度</a:t>
             </a:r>
             <a:r>
-              <a:rPr sz="1200" lang="zh-TW" dirty="0">
+              <a:rPr sz="1000" lang="zh-TW" dirty="0">
                 <a:solidFill>
                   <a:srgbClr val="000000"/>
                 </a:solidFill>
@@ -3592,11 +4736,11 @@
                 <a:spcPct val="115000"/>
               </a:lnSpc>
               <a:spcAft>
-                <a:spcPts val="600"/>
-              </a:spcAft>
-            </a:pPr>
-            <a:r>
-              <a:rPr sz="1200" b="1" lang="zh-TW" dirty="0">
+                <a:spcPts val="500"/>
+              </a:spcAft>
+            </a:pPr>
+            <a:r>
+              <a:rPr sz="1000" b="1" lang="zh-TW" dirty="0">
                 <a:solidFill>
                   <a:srgbClr val="000000"/>
                 </a:solidFill>
@@ -3607,7 +4751,7 @@
               <a:t>第四句</a:t>
             </a:r>
             <a:r>
-              <a:rPr sz="1200" lang="zh-TW" dirty="0">
+              <a:rPr sz="1000" lang="zh-TW" dirty="0">
                 <a:solidFill>
                   <a:srgbClr val="000000"/>
                 </a:solidFill>
@@ -3625,11 +4769,11 @@
                 <a:spcPct val="115000"/>
               </a:lnSpc>
               <a:spcAft>
-                <a:spcPts val="600"/>
-              </a:spcAft>
-            </a:pPr>
-            <a:r>
-              <a:rPr sz="1200" lang="zh-TW" dirty="0">
+                <a:spcPts val="500"/>
+              </a:spcAft>
+            </a:pPr>
+            <a:r>
+              <a:rPr sz="1000" lang="zh-TW" dirty="0">
                 <a:solidFill>
                   <a:srgbClr val="000000"/>
                 </a:solidFill>
@@ -3647,11 +4791,11 @@
                 <a:spcPct val="115000"/>
               </a:lnSpc>
               <a:spcAft>
-                <a:spcPts val="600"/>
-              </a:spcAft>
-            </a:pPr>
-            <a:r>
-              <a:rPr sz="1200" lang="zh-TW" dirty="0">
+                <a:spcPts val="500"/>
+              </a:spcAft>
+            </a:pPr>
+            <a:r>
+              <a:rPr sz="1000" lang="zh-TW" dirty="0">
                 <a:solidFill>
                   <a:srgbClr val="000000"/>
                 </a:solidFill>
@@ -3768,11 +4912,154 @@
                 <a:spcPct val="115000"/>
               </a:lnSpc>
               <a:spcAft>
-                <a:spcPts val="600"/>
-              </a:spcAft>
-            </a:pPr>
-            <a:r>
-              <a:rPr sz="1200" lang="zh-TW" dirty="0">
+                <a:spcPts val="500"/>
+              </a:spcAft>
+            </a:pPr>
+            <a:r>
+              <a:rPr sz="1000" b="1" lang="zh-TW" dirty="0">
+                <a:solidFill>
+                  <a:srgbClr val="000000"/>
+                </a:solidFill>
+                <a:latin typeface="Arial Unicode MS"/>
+                <a:ea typeface="Arial Unicode MS"/>
+                <a:cs typeface="Arial Unicode MS"/>
+              </a:rPr>
+              <a:t>▍這一張要做什麼</a:t>
+            </a:r>
+            <a:r>
+              <a:rPr sz="1000" lang="zh-TW" dirty="0">
+                <a:solidFill>
+                  <a:srgbClr val="000000"/>
+                </a:solidFill>
+                <a:latin typeface="Arial Unicode MS"/>
+                <a:ea typeface="Arial Unicode MS"/>
+                <a:cs typeface="Arial Unicode MS"/>
+              </a:rPr>
+              <a:t>
+</a:t>
+            </a:r>
+          </a:p>
+          <a:p>
+            <a:pPr algn="l">
+              <a:lnSpc>
+                <a:spcPct val="115000"/>
+              </a:lnSpc>
+              <a:spcAft>
+                <a:spcPts val="500"/>
+              </a:spcAft>
+            </a:pPr>
+            <a:r>
+              <a:rPr sz="1000" lang="zh-TW" dirty="0">
+                <a:solidFill>
+                  <a:srgbClr val="000000"/>
+                </a:solidFill>
+                <a:latin typeface="Arial Unicode MS"/>
+                <a:ea typeface="Arial Unicode MS"/>
+                <a:cs typeface="Arial Unicode MS"/>
+              </a:rPr>
+              <a:t>下週預告：雷達、超音波、GNSS 與 IMU 的規格判讀。
+</a:t>
+            </a:r>
+          </a:p>
+          <a:p>
+            <a:pPr algn="l">
+              <a:lnSpc>
+                <a:spcPct val="115000"/>
+              </a:lnSpc>
+              <a:spcAft>
+                <a:spcPts val="500"/>
+              </a:spcAft>
+            </a:pPr>
+            <a:r>
+              <a:rPr sz="1000" b="1" lang="zh-TW" dirty="0">
+                <a:solidFill>
+                  <a:srgbClr val="000000"/>
+                </a:solidFill>
+                <a:latin typeface="Arial Unicode MS"/>
+                <a:ea typeface="Arial Unicode MS"/>
+                <a:cs typeface="Arial Unicode MS"/>
+              </a:rPr>
+              <a:t>▍畫面上圈這裡</a:t>
+            </a:r>
+            <a:r>
+              <a:rPr sz="1000" lang="zh-TW" dirty="0">
+                <a:solidFill>
+                  <a:srgbClr val="000000"/>
+                </a:solidFill>
+                <a:latin typeface="Arial Unicode MS"/>
+                <a:ea typeface="Arial Unicode MS"/>
+                <a:cs typeface="Arial Unicode MS"/>
+              </a:rPr>
+              <a:t>
+</a:t>
+            </a:r>
+          </a:p>
+          <a:p>
+            <a:pPr algn="l">
+              <a:lnSpc>
+                <a:spcPct val="115000"/>
+              </a:lnSpc>
+              <a:spcAft>
+                <a:spcPts val="500"/>
+              </a:spcAft>
+            </a:pPr>
+            <a:r>
+              <a:rPr sz="1000" lang="zh-TW" dirty="0">
+                <a:solidFill>
+                  <a:srgbClr val="000000"/>
+                </a:solidFill>
+                <a:latin typeface="Arial Unicode MS"/>
+                <a:ea typeface="Arial Unicode MS"/>
+                <a:cs typeface="Arial Unicode MS"/>
+              </a:rPr>
+              <a:t>圈下週的四種感測器，說明同一支工具會再加型號。
+</a:t>
+            </a:r>
+          </a:p>
+          <a:p>
+            <a:pPr algn="l">
+              <a:lnSpc>
+                <a:spcPct val="115000"/>
+              </a:lnSpc>
+              <a:spcAft>
+                <a:spcPts val="500"/>
+              </a:spcAft>
+            </a:pPr>
+            <a:r>
+              <a:rPr sz="1000" b="1" lang="zh-TW" dirty="0">
+                <a:solidFill>
+                  <a:srgbClr val="000000"/>
+                </a:solidFill>
+                <a:latin typeface="Arial Unicode MS"/>
+                <a:ea typeface="Arial Unicode MS"/>
+                <a:cs typeface="Arial Unicode MS"/>
+              </a:rPr>
+              <a:t>▍以下照著唸</a:t>
+            </a:r>
+            <a:r>
+              <a:rPr sz="1000" lang="zh-TW" dirty="0">
+                <a:solidFill>
+                  <a:srgbClr val="000000"/>
+                </a:solidFill>
+                <a:latin typeface="Arial Unicode MS"/>
+                <a:ea typeface="Arial Unicode MS"/>
+                <a:cs typeface="Arial Unicode MS"/>
+              </a:rPr>
+              <a:t>
+</a:t>
+            </a:r>
+          </a:p>
+          <a:p>
+            <a:pPr algn="l">
+              <a:lnSpc>
+                <a:spcPct val="115000"/>
+              </a:lnSpc>
+              <a:spcAft>
+                <a:spcPts val="500"/>
+              </a:spcAft>
+            </a:pPr>
+            <a:r>
+              <a:rPr sz="1000" lang="zh-TW" dirty="0">
                 <a:solidFill>
                   <a:srgbClr val="000000"/>
                 </a:solidFill>
@@ -3790,11 +5077,11 @@
                 <a:spcPct val="115000"/>
               </a:lnSpc>
               <a:spcAft>
-                <a:spcPts val="600"/>
-              </a:spcAft>
-            </a:pPr>
-            <a:r>
-              <a:rPr sz="1200" lang="zh-TW" dirty="0">
+                <a:spcPts val="500"/>
+              </a:spcAft>
+            </a:pPr>
+            <a:r>
+              <a:rPr sz="1000" lang="zh-TW" dirty="0">
                 <a:solidFill>
                   <a:srgbClr val="000000"/>
                 </a:solidFill>
@@ -3805,7 +5092,7 @@
               <a:t>我們把剩下三種感測器的規格表讀完：</a:t>
             </a:r>
             <a:r>
-              <a:rPr sz="1200" b="1" lang="zh-TW" dirty="0">
+              <a:rPr sz="1000" b="1" lang="zh-TW" dirty="0">
                 <a:solidFill>
                   <a:srgbClr val="000000"/>
                 </a:solidFill>
@@ -3816,7 +5103,7 @@
               <a:t>毫米波雷達、超音波、還有衛星定位加慣性感測器</a:t>
             </a:r>
             <a:r>
-              <a:rPr sz="1200" lang="zh-TW" dirty="0">
+              <a:rPr sz="1000" lang="zh-TW" dirty="0">
                 <a:solidFill>
                   <a:srgbClr val="000000"/>
                 </a:solidFill>
@@ -3834,11 +5121,11 @@
                 <a:spcPct val="115000"/>
               </a:lnSpc>
               <a:spcAft>
-                <a:spcPts val="600"/>
-              </a:spcAft>
-            </a:pPr>
-            <a:r>
-              <a:rPr sz="1200" lang="zh-TW" dirty="0">
+                <a:spcPts val="500"/>
+              </a:spcAft>
+            </a:pPr>
+            <a:r>
+              <a:rPr sz="1000" lang="zh-TW" dirty="0">
                 <a:solidFill>
                   <a:srgbClr val="000000"/>
                 </a:solidFill>
@@ -3849,7 +5136,7 @@
               <a:t>我先給各位一個預告，讓大家有心理準備：</a:t>
             </a:r>
             <a:r>
-              <a:rPr sz="1200" b="1" lang="zh-TW" dirty="0">
+              <a:rPr sz="1000" b="1" lang="zh-TW" dirty="0">
                 <a:solidFill>
                   <a:srgbClr val="000000"/>
                 </a:solidFill>
@@ -3860,7 +5147,7 @@
               <a:t>雷達的規格表跟今天看的完全不一樣。</a:t>
             </a:r>
             <a:r>
-              <a:rPr sz="1200" lang="zh-TW" dirty="0">
+              <a:rPr sz="1000" lang="zh-TW" dirty="0">
                 <a:solidFill>
                   <a:srgbClr val="000000"/>
                 </a:solidFill>
@@ -3878,11 +5165,11 @@
                 <a:spcPct val="115000"/>
               </a:lnSpc>
               <a:spcAft>
-                <a:spcPts val="600"/>
-              </a:spcAft>
-            </a:pPr>
-            <a:r>
-              <a:rPr sz="1200" lang="zh-TW" dirty="0">
+                <a:spcPts val="500"/>
+              </a:spcAft>
+            </a:pPr>
+            <a:r>
+              <a:rPr sz="1000" lang="zh-TW" dirty="0">
                 <a:solidFill>
                   <a:srgbClr val="000000"/>
                 </a:solidFill>
@@ -3893,7 +5180,7 @@
               <a:t>它上面沒有「像素」，也沒有「線束數」。它有的是</a:t>
             </a:r>
             <a:r>
-              <a:rPr sz="1200" b="1" lang="zh-TW" dirty="0">
+              <a:rPr sz="1000" b="1" lang="zh-TW" dirty="0">
                 <a:solidFill>
                   <a:srgbClr val="000000"/>
                 </a:solidFill>
@@ -3904,7 +5191,7 @@
               <a:t>頻寬</a:t>
             </a:r>
             <a:r>
-              <a:rPr sz="1200" lang="zh-TW" dirty="0">
+              <a:rPr sz="1000" lang="zh-TW" dirty="0">
                 <a:solidFill>
                   <a:srgbClr val="000000"/>
                 </a:solidFill>
@@ -3915,7 +5202,7 @@
               <a:t>、</a:t>
             </a:r>
             <a:r>
-              <a:rPr sz="1200" b="1" lang="zh-TW" dirty="0">
+              <a:rPr sz="1000" b="1" lang="zh-TW" dirty="0">
                 <a:solidFill>
                   <a:srgbClr val="000000"/>
                 </a:solidFill>
@@ -3926,7 +5213,7 @@
               <a:t>都卜勒速度解析度</a:t>
             </a:r>
             <a:r>
-              <a:rPr sz="1200" lang="zh-TW" dirty="0">
+              <a:rPr sz="1000" lang="zh-TW" dirty="0">
                 <a:solidFill>
                   <a:srgbClr val="000000"/>
                 </a:solidFill>
@@ -3937,7 +5224,7 @@
               <a:t>、</a:t>
             </a:r>
             <a:r>
-              <a:rPr sz="1200" b="1" lang="zh-TW" dirty="0">
+              <a:rPr sz="1000" b="1" lang="zh-TW" dirty="0">
                 <a:solidFill>
                   <a:srgbClr val="000000"/>
                 </a:solidFill>
@@ -3948,7 +5235,7 @@
               <a:t>天線數</a:t>
             </a:r>
             <a:r>
-              <a:rPr sz="1200" lang="zh-TW" dirty="0">
+              <a:rPr sz="1000" lang="zh-TW" dirty="0">
                 <a:solidFill>
                   <a:srgbClr val="000000"/>
                 </a:solidFill>
@@ -3966,11 +5253,11 @@
                 <a:spcPct val="115000"/>
               </a:lnSpc>
               <a:spcAft>
-                <a:spcPts val="600"/>
-              </a:spcAft>
-            </a:pPr>
-            <a:r>
-              <a:rPr sz="1200" lang="zh-TW" dirty="0">
+                <a:spcPts val="500"/>
+              </a:spcAft>
+            </a:pPr>
+            <a:r>
+              <a:rPr sz="1000" lang="zh-TW" dirty="0">
                 <a:solidFill>
                   <a:srgbClr val="000000"/>
                 </a:solidFill>
@@ -3988,11 +5275,11 @@
                 <a:spcPct val="115000"/>
               </a:lnSpc>
               <a:spcAft>
-                <a:spcPts val="600"/>
-              </a:spcAft>
-            </a:pPr>
-            <a:r>
-              <a:rPr sz="1200" b="1" lang="zh-TW" dirty="0">
+                <a:spcPts val="500"/>
+              </a:spcAft>
+            </a:pPr>
+            <a:r>
+              <a:rPr sz="1000" b="1" lang="zh-TW" dirty="0">
                 <a:solidFill>
                   <a:srgbClr val="000000"/>
                 </a:solidFill>
@@ -4003,7 +5290,7 @@
               <a:t>第一，把今天這張紙留著。</a:t>
             </a:r>
             <a:r>
-              <a:rPr sz="1200" lang="zh-TW" dirty="0">
+              <a:rPr sz="1000" lang="zh-TW" dirty="0">
                 <a:solidFill>
                   <a:srgbClr val="000000"/>
                 </a:solidFill>
@@ -4021,11 +5308,11 @@
                 <a:spcPct val="115000"/>
               </a:lnSpc>
               <a:spcAft>
-                <a:spcPts val="600"/>
-              </a:spcAft>
-            </a:pPr>
-            <a:r>
-              <a:rPr sz="1200" b="1" lang="zh-TW" dirty="0">
+                <a:spcPts val="500"/>
+              </a:spcAft>
+            </a:pPr>
+            <a:r>
+              <a:rPr sz="1000" b="1" lang="zh-TW" dirty="0">
                 <a:solidFill>
                   <a:srgbClr val="000000"/>
                 </a:solidFill>
@@ -4036,7 +5323,7 @@
               <a:t>第二，上課前把講義 3.4 到 3.6 讀一遍。</a:t>
             </a:r>
             <a:r>
-              <a:rPr sz="1200" lang="zh-TW" dirty="0">
+              <a:rPr sz="1000" lang="zh-TW" dirty="0">
                 <a:solidFill>
                   <a:srgbClr val="000000"/>
                 </a:solidFill>
@@ -4054,11 +5341,11 @@
                 <a:spcPct val="115000"/>
               </a:lnSpc>
               <a:spcAft>
-                <a:spcPts val="600"/>
-              </a:spcAft>
-            </a:pPr>
-            <a:r>
-              <a:rPr sz="1200" lang="zh-TW" dirty="0">
+                <a:spcPts val="500"/>
+              </a:spcAft>
+            </a:pPr>
+            <a:r>
+              <a:rPr sz="1000" lang="zh-TW" dirty="0">
                 <a:solidFill>
                   <a:srgbClr val="000000"/>
                 </a:solidFill>

--- a/第五週(10-08)/第五週_第3節_簡報.pptx
+++ b/第五週(10-08)/第五週_第3節_簡報.pptx
@@ -5733,7 +5733,7 @@
       </p:nvGrpSpPr>
       <p:grpSpPr>
         <a:xfrm>
-          <a:off x="1028250" y="0"/>
+          <a:off x="15750" y="0"/>
           <a:ext cx="1" cy="1"/>
           <a:chOff x="0" y="0"/>
           <a:chExt cx="0" cy="0"/>
@@ -5747,8 +5747,8 @@
         </p:nvSpPr>
         <p:spPr>
           <a:xfrm>
-            <a:off x="6273000" y="-1063125"/>
-            <a:ext cx="3260250" cy="3260250"/>
+            <a:off x="6759000" y="-1366875"/>
+            <a:ext cx="4191750" cy="4191750"/>
           </a:xfrm>
           <a:prstGeom prst="ellipse">
             <a:avLst/>
@@ -5772,8 +5772,8 @@
         </p:nvSpPr>
         <p:spPr>
           <a:xfrm>
-            <a:off x="7336125" y="1630125"/>
-            <a:ext cx="1842750" cy="1842750"/>
+            <a:off x="8125875" y="2095875"/>
+            <a:ext cx="2369250" cy="2369250"/>
           </a:xfrm>
           <a:prstGeom prst="ellipse">
             <a:avLst/>
@@ -5794,8 +5794,8 @@
         </p:nvSpPr>
         <p:spPr>
           <a:xfrm>
-            <a:off x="1418063" y="935550"/>
-            <a:ext cx="5386500" cy="212625"/>
+            <a:off x="516938" y="1202850"/>
+            <a:ext cx="6925500" cy="273375"/>
           </a:xfrm>
           <a:prstGeom prst="rect">
             <a:avLst/>
@@ -5811,7 +5811,7 @@
               <a:buNone/>
             </a:pPr>
             <a:r>
-              <a:rPr lang="en-US" sz="970" b="1" dirty="0">
+              <a:rPr lang="en-US" sz="1250" b="1" dirty="0">
                 <a:solidFill>
                   <a:srgbClr val="00A896"/>
                 </a:solidFill>
@@ -5821,7 +5821,7 @@
               </a:rPr>
               <a:t>MITUST · Nguyên lý xe tự lái · Tuần 5</a:t>
             </a:r>
-            <a:endParaRPr lang="en-US" sz="970" dirty="0"/>
+            <a:endParaRPr lang="en-US" sz="1250" dirty="0"/>
           </a:p>
         </p:txBody>
       </p:sp>
@@ -5833,8 +5833,8 @@
         </p:nvSpPr>
         <p:spPr>
           <a:xfrm>
-            <a:off x="1418063" y="1219050"/>
-            <a:ext cx="5811750" cy="1081182"/>
+            <a:off x="516938" y="1567350"/>
+            <a:ext cx="7472250" cy="1390091"/>
           </a:xfrm>
           <a:prstGeom prst="rect">
             <a:avLst/>
@@ -5853,7 +5853,7 @@
               <a:buNone/>
             </a:pPr>
             <a:r>
-              <a:rPr lang="en-US" sz="2640" b="1" dirty="0">
+              <a:rPr lang="en-US" sz="3390" b="1" dirty="0">
                 <a:solidFill>
                   <a:srgbClr val="FFFFFF"/>
                 </a:solidFill>
@@ -5863,7 +5863,7 @@
               </a:rPr>
               <a:t>Chọn cảm biến cho một chiếc xe cụ thể</a:t>
             </a:r>
-            <a:endParaRPr lang="en-US" sz="2640" dirty="0"/>
+            <a:endParaRPr lang="en-US" sz="3390" dirty="0"/>
           </a:p>
           <a:p>
             <a:pPr indent="0" marL="0">
@@ -5873,7 +5873,7 @@
               <a:buNone/>
             </a:pPr>
             <a:r>
-              <a:rPr lang="en-US" sz="1470" dirty="0">
+              <a:rPr lang="en-US" sz="1890" dirty="0">
                 <a:solidFill>
                   <a:srgbClr val="C8D6E2"/>
                 </a:solidFill>
@@ -5883,7 +5883,7 @@
               </a:rPr>
               <a:t>替一台指定的車選感測器</a:t>
             </a:r>
-            <a:endParaRPr lang="en-US" sz="2640" dirty="0"/>
+            <a:endParaRPr lang="en-US" sz="3390" dirty="0"/>
           </a:p>
         </p:txBody>
       </p:sp>
@@ -5895,8 +5895,8 @@
         </p:nvSpPr>
         <p:spPr>
           <a:xfrm>
-            <a:off x="1418063" y="2331867"/>
-            <a:ext cx="1063125" cy="31894"/>
+            <a:off x="516938" y="2998115"/>
+            <a:ext cx="1366875" cy="41006"/>
           </a:xfrm>
           <a:prstGeom prst="rect">
             <a:avLst/>
@@ -5915,8 +5915,8 @@
         </p:nvSpPr>
         <p:spPr>
           <a:xfrm>
-            <a:off x="1418063" y="2487792"/>
-            <a:ext cx="5528250" cy="474783"/>
+            <a:off x="516938" y="3198590"/>
+            <a:ext cx="7107750" cy="610435"/>
           </a:xfrm>
           <a:prstGeom prst="rect">
             <a:avLst/>
@@ -5935,7 +5935,7 @@
               <a:buNone/>
             </a:pPr>
             <a:r>
-              <a:rPr lang="en-US" sz="1120" dirty="0">
+              <a:rPr lang="en-US" sz="1450" dirty="0">
                 <a:solidFill>
                   <a:srgbClr val="C8D6E2"/>
                 </a:solidFill>
@@ -5945,7 +5945,7 @@
               </a:rPr>
               <a:t>Bốn model, ba tình huống, mỗi người nộp một tờ</a:t>
             </a:r>
-            <a:endParaRPr lang="en-US" sz="1120" dirty="0"/>
+            <a:endParaRPr lang="en-US" sz="1450" dirty="0"/>
           </a:p>
           <a:p>
             <a:pPr indent="0" marL="0">
@@ -5955,7 +5955,7 @@
               <a:buNone/>
             </a:pPr>
             <a:r>
-              <a:rPr lang="en-US" sz="970" dirty="0">
+              <a:rPr lang="en-US" sz="1250" dirty="0">
                 <a:solidFill>
                   <a:srgbClr val="8AA0B4"/>
                 </a:solidFill>
@@ -5965,7 +5965,7 @@
               </a:rPr>
               <a:t>四個型號、三個情境，每個人交一張</a:t>
             </a:r>
-            <a:endParaRPr lang="en-US" sz="1120" dirty="0"/>
+            <a:endParaRPr lang="en-US" sz="1450" dirty="0"/>
           </a:p>
         </p:txBody>
       </p:sp>
@@ -5977,8 +5977,8 @@
         </p:nvSpPr>
         <p:spPr>
           <a:xfrm>
-            <a:off x="1418063" y="3019275"/>
-            <a:ext cx="4606875" cy="297675"/>
+            <a:off x="516938" y="3881925"/>
+            <a:ext cx="5923125" cy="382725"/>
           </a:xfrm>
           <a:prstGeom prst="roundRect">
             <a:avLst>
@@ -5999,8 +5999,8 @@
         </p:nvSpPr>
         <p:spPr>
           <a:xfrm>
-            <a:off x="1517288" y="3054713"/>
-            <a:ext cx="4408425" cy="226800"/>
+            <a:off x="644513" y="3927488"/>
+            <a:ext cx="5667975" cy="291600"/>
           </a:xfrm>
           <a:prstGeom prst="rect">
             <a:avLst/>
@@ -6016,7 +6016,7 @@
               <a:buNone/>
             </a:pPr>
             <a:r>
-              <a:rPr lang="en-US" sz="810" b="1" dirty="0">
+              <a:rPr lang="en-US" sz="1050" b="1" dirty="0">
                 <a:solidFill>
                   <a:srgbClr val="9FD6CE"/>
                 </a:solidFill>
@@ -6026,7 +6026,7 @@
               </a:rPr>
               <a:t>工具｜Công cụ： ch-neural.github.io/MITUST-Principles-of-Self-Driving-Cars/week5/spec/</a:t>
             </a:r>
-            <a:endParaRPr lang="en-US" sz="810" dirty="0"/>
+            <a:endParaRPr lang="en-US" sz="1050" dirty="0"/>
           </a:p>
         </p:txBody>
       </p:sp>
@@ -6038,8 +6038,8 @@
         </p:nvSpPr>
         <p:spPr>
           <a:xfrm>
-            <a:off x="1418063" y="3387825"/>
-            <a:ext cx="5386500" cy="212625"/>
+            <a:off x="516938" y="4355775"/>
+            <a:ext cx="6925500" cy="273375"/>
           </a:xfrm>
           <a:prstGeom prst="rect">
             <a:avLst/>
@@ -6055,7 +6055,7 @@
               <a:buNone/>
             </a:pPr>
             <a:r>
-              <a:rPr lang="en-US" sz="890" dirty="0">
+              <a:rPr lang="en-US" sz="1150" dirty="0">
                 <a:solidFill>
                   <a:srgbClr val="8AA0B4"/>
                 </a:solidFill>
@@ -6065,7 +6065,7 @@
               </a:rPr>
               <a:t>第五週 第 3 節　2026/10/08（四）11:10–12:00　CH Tseng</a:t>
             </a:r>
-            <a:endParaRPr lang="en-US" sz="890" dirty="0"/>
+            <a:endParaRPr lang="en-US" sz="1150" dirty="0"/>
           </a:p>
         </p:txBody>
       </p:sp>
@@ -6077,8 +6077,8 @@
         </p:nvSpPr>
         <p:spPr>
           <a:xfrm>
-            <a:off x="1304663" y="240975"/>
-            <a:ext cx="1715175" cy="581175"/>
+            <a:off x="371138" y="309825"/>
+            <a:ext cx="2205225" cy="747225"/>
           </a:xfrm>
           <a:prstGeom prst="roundRect">
             <a:avLst>
@@ -6134,7 +6134,7 @@
       </p:nvGrpSpPr>
       <p:grpSpPr>
         <a:xfrm>
-          <a:off x="971550" y="0"/>
+          <a:off x="0" y="0"/>
           <a:ext cx="1" cy="1"/>
           <a:chOff x="0" y="0"/>
           <a:chExt cx="0" cy="0"/>
@@ -6148,8 +6148,8 @@
         </p:nvSpPr>
         <p:spPr>
           <a:xfrm>
-            <a:off x="1367600" y="230429"/>
-            <a:ext cx="6408801" cy="662483"/>
+            <a:off x="502920" y="292608"/>
+            <a:ext cx="8138160" cy="841248"/>
           </a:xfrm>
           <a:prstGeom prst="rect">
             <a:avLst/>
@@ -6168,7 +6168,7 @@
               <a:buNone/>
             </a:pPr>
             <a:r>
-              <a:rPr lang="en-US" sz="1730" b="1" dirty="0">
+              <a:rPr lang="en-US" sz="2200" b="1" dirty="0">
                 <a:solidFill>
                   <a:srgbClr val="0B1F3A"/>
                 </a:solidFill>
@@ -6178,7 +6178,7 @@
               </a:rPr>
               <a:t>Bốn bước, mỗi bước đều có con số phải chép</a:t>
             </a:r>
-            <a:endParaRPr lang="en-US" sz="1730" dirty="0"/>
+            <a:endParaRPr lang="en-US" sz="2200" dirty="0"/>
           </a:p>
           <a:p>
             <a:pPr indent="0" marL="0">
@@ -6188,7 +6188,7 @@
               <a:buNone/>
             </a:pPr>
             <a:r>
-              <a:rPr lang="en-US" sz="1060" dirty="0">
+              <a:rPr lang="en-US" sz="1350" dirty="0">
                 <a:solidFill>
                   <a:srgbClr val="5F7183"/>
                 </a:solidFill>
@@ -6198,7 +6198,7 @@
               </a:rPr>
               <a:t>四個步驟，每一步都有要抄下來的數字</a:t>
             </a:r>
-            <a:endParaRPr lang="en-US" sz="1730" dirty="0"/>
+            <a:endParaRPr lang="en-US" sz="2200" dirty="0"/>
           </a:p>
         </p:txBody>
       </p:sp>
@@ -6210,8 +6210,8 @@
         </p:nvSpPr>
         <p:spPr>
           <a:xfrm>
-            <a:off x="1367600" y="892912"/>
-            <a:ext cx="1440180" cy="2145868"/>
+            <a:off x="502920" y="1133856"/>
+            <a:ext cx="1828800" cy="2724912"/>
           </a:xfrm>
           <a:prstGeom prst="roundRect">
             <a:avLst>
@@ -6244,8 +6244,8 @@
         </p:nvSpPr>
         <p:spPr>
           <a:xfrm>
-            <a:off x="1900466" y="1036930"/>
-            <a:ext cx="374447" cy="374447"/>
+            <a:off x="1179576" y="1316736"/>
+            <a:ext cx="475488" cy="475488"/>
           </a:xfrm>
           <a:prstGeom prst="ellipse">
             <a:avLst/>
@@ -6264,8 +6264,8 @@
         </p:nvSpPr>
         <p:spPr>
           <a:xfrm>
-            <a:off x="1900466" y="1116140"/>
-            <a:ext cx="374447" cy="216027"/>
+            <a:off x="1179576" y="1417320"/>
+            <a:ext cx="475488" cy="274320"/>
           </a:xfrm>
           <a:prstGeom prst="rect">
             <a:avLst/>
@@ -6281,7 +6281,7 @@
               <a:buNone/>
             </a:pPr>
             <a:r>
-              <a:rPr lang="en-US" sz="1180" b="1" dirty="0">
+              <a:rPr lang="en-US" sz="1500" b="1" dirty="0">
                 <a:solidFill>
                   <a:srgbClr val="FFFFFF"/>
                 </a:solidFill>
@@ -6291,7 +6291,7 @@
               </a:rPr>
               <a:t>1</a:t>
             </a:r>
-            <a:endParaRPr lang="en-US" sz="1180" dirty="0"/>
+            <a:endParaRPr lang="en-US" sz="1500" dirty="0"/>
           </a:p>
         </p:txBody>
       </p:sp>
@@ -6303,8 +6303,8 @@
         </p:nvSpPr>
         <p:spPr>
           <a:xfrm>
-            <a:off x="1468412" y="1483385"/>
-            <a:ext cx="1238555" cy="518465"/>
+            <a:off x="630936" y="1883664"/>
+            <a:ext cx="1572768" cy="658368"/>
           </a:xfrm>
           <a:prstGeom prst="rect">
             <a:avLst/>
@@ -6323,7 +6323,7 @@
               <a:buNone/>
             </a:pPr>
             <a:r>
-              <a:rPr lang="en-US" sz="1100" b="1" dirty="0">
+              <a:rPr lang="en-US" sz="1400" b="1" dirty="0">
                 <a:solidFill>
                   <a:srgbClr val="0B1F3A"/>
                 </a:solidFill>
@@ -6333,7 +6333,7 @@
               </a:rPr>
               <a:t>Chọn model</a:t>
             </a:r>
-            <a:endParaRPr lang="en-US" sz="1100" dirty="0"/>
+            <a:endParaRPr lang="en-US" sz="1400" dirty="0"/>
           </a:p>
           <a:p>
             <a:pPr algn="ctr" indent="0" marL="0">
@@ -6343,7 +6343,7 @@
               <a:buNone/>
             </a:pPr>
             <a:r>
-              <a:rPr lang="en-US" sz="950" dirty="0">
+              <a:rPr lang="en-US" sz="1200" dirty="0">
                 <a:solidFill>
                   <a:srgbClr val="007F72"/>
                 </a:solidFill>
@@ -6353,7 +6353,7 @@
               </a:rPr>
               <a:t>選型號</a:t>
             </a:r>
-            <a:endParaRPr lang="en-US" sz="1100" dirty="0"/>
+            <a:endParaRPr lang="en-US" sz="1400" dirty="0"/>
           </a:p>
         </p:txBody>
       </p:sp>
@@ -6365,8 +6365,8 @@
         </p:nvSpPr>
         <p:spPr>
           <a:xfrm>
-            <a:off x="1468412" y="2030654"/>
-            <a:ext cx="1238555" cy="921715"/>
+            <a:off x="630936" y="2578608"/>
+            <a:ext cx="1572768" cy="1170432"/>
           </a:xfrm>
           <a:prstGeom prst="rect">
             <a:avLst/>
@@ -6385,7 +6385,7 @@
               <a:buNone/>
             </a:pPr>
             <a:r>
-              <a:rPr lang="en-US" sz="830" dirty="0">
+              <a:rPr lang="en-US" sz="1050" dirty="0">
                 <a:solidFill>
                   <a:srgbClr val="5F7183"/>
                 </a:solidFill>
@@ -6395,7 +6395,7 @@
               </a:rPr>
               <a:t>Đọc bảng</a:t>
             </a:r>
-            <a:endParaRPr lang="en-US" sz="830" dirty="0"/>
+            <a:endParaRPr lang="en-US" sz="1050" dirty="0"/>
           </a:p>
           <a:p>
             <a:pPr algn="ctr" indent="0" marL="0">
@@ -6405,7 +6405,7 @@
               <a:buNone/>
             </a:pPr>
             <a:r>
-              <a:rPr lang="en-US" sz="830" dirty="0">
+              <a:rPr lang="en-US" sz="1050" dirty="0">
                 <a:solidFill>
                   <a:srgbClr val="5F7183"/>
                 </a:solidFill>
@@ -6415,7 +6415,7 @@
               </a:rPr>
               <a:t>Tắt phần dịch</a:t>
             </a:r>
-            <a:endParaRPr lang="en-US" sz="830" dirty="0"/>
+            <a:endParaRPr lang="en-US" sz="1050" dirty="0"/>
           </a:p>
           <a:p>
             <a:pPr algn="ctr" indent="0" marL="0">
@@ -6425,7 +6425,7 @@
               <a:buNone/>
             </a:pPr>
             <a:r>
-              <a:rPr lang="en-US" sz="750" dirty="0">
+              <a:rPr lang="en-US" sz="950" dirty="0">
                 <a:solidFill>
                   <a:srgbClr val="5F7183"/>
                 </a:solidFill>
@@ -6435,7 +6435,7 @@
               </a:rPr>
               <a:t>讀規格表</a:t>
             </a:r>
-            <a:endParaRPr lang="en-US" sz="830" dirty="0"/>
+            <a:endParaRPr lang="en-US" sz="1050" dirty="0"/>
           </a:p>
           <a:p>
             <a:pPr algn="ctr" indent="0" marL="0">
@@ -6445,7 +6445,7 @@
               <a:buNone/>
             </a:pPr>
             <a:r>
-              <a:rPr lang="en-US" sz="750" dirty="0">
+              <a:rPr lang="en-US" sz="950" dirty="0">
                 <a:solidFill>
                   <a:srgbClr val="5F7183"/>
                 </a:solidFill>
@@ -6455,7 +6455,7 @@
               </a:rPr>
               <a:t>把對照關掉</a:t>
             </a:r>
-            <a:endParaRPr lang="en-US" sz="830" dirty="0"/>
+            <a:endParaRPr lang="en-US" sz="1050" dirty="0"/>
           </a:p>
         </p:txBody>
       </p:sp>
@@ -6467,8 +6467,8 @@
         </p:nvSpPr>
         <p:spPr>
           <a:xfrm>
-            <a:off x="2807780" y="1613002"/>
-            <a:ext cx="216027" cy="288036"/>
+            <a:off x="2331720" y="2048256"/>
+            <a:ext cx="274320" cy="365760"/>
           </a:xfrm>
           <a:prstGeom prst="rect">
             <a:avLst/>
@@ -6484,7 +6484,7 @@
               <a:buNone/>
             </a:pPr>
             <a:r>
-              <a:rPr lang="en-US" sz="1500" b="1" dirty="0">
+              <a:rPr lang="en-US" sz="1900" b="1" dirty="0">
                 <a:solidFill>
                   <a:srgbClr val="00A896"/>
                 </a:solidFill>
@@ -6494,7 +6494,7 @@
               </a:rPr>
               <a:t>→</a:t>
             </a:r>
-            <a:endParaRPr lang="en-US" sz="1500" dirty="0"/>
+            <a:endParaRPr lang="en-US" sz="1900" dirty="0"/>
           </a:p>
         </p:txBody>
       </p:sp>
@@ -6506,8 +6506,8 @@
         </p:nvSpPr>
         <p:spPr>
           <a:xfrm>
-            <a:off x="3023807" y="892912"/>
-            <a:ext cx="1440180" cy="2145868"/>
+            <a:off x="2606040" y="1133856"/>
+            <a:ext cx="1828800" cy="2724912"/>
           </a:xfrm>
           <a:prstGeom prst="roundRect">
             <a:avLst>
@@ -6540,8 +6540,8 @@
         </p:nvSpPr>
         <p:spPr>
           <a:xfrm>
-            <a:off x="3556673" y="1036930"/>
-            <a:ext cx="374447" cy="374447"/>
+            <a:off x="3282696" y="1316736"/>
+            <a:ext cx="475488" cy="475488"/>
           </a:xfrm>
           <a:prstGeom prst="ellipse">
             <a:avLst/>
@@ -6560,8 +6560,8 @@
         </p:nvSpPr>
         <p:spPr>
           <a:xfrm>
-            <a:off x="3556673" y="1116140"/>
-            <a:ext cx="374447" cy="216027"/>
+            <a:off x="3282696" y="1417320"/>
+            <a:ext cx="475488" cy="274320"/>
           </a:xfrm>
           <a:prstGeom prst="rect">
             <a:avLst/>
@@ -6577,7 +6577,7 @@
               <a:buNone/>
             </a:pPr>
             <a:r>
-              <a:rPr lang="en-US" sz="1180" b="1" dirty="0">
+              <a:rPr lang="en-US" sz="1500" b="1" dirty="0">
                 <a:solidFill>
                   <a:srgbClr val="FFFFFF"/>
                 </a:solidFill>
@@ -6587,7 +6587,7 @@
               </a:rPr>
               <a:t>2</a:t>
             </a:r>
-            <a:endParaRPr lang="en-US" sz="1180" dirty="0"/>
+            <a:endParaRPr lang="en-US" sz="1500" dirty="0"/>
           </a:p>
         </p:txBody>
       </p:sp>
@@ -6599,8 +6599,8 @@
         </p:nvSpPr>
         <p:spPr>
           <a:xfrm>
-            <a:off x="3124619" y="1483385"/>
-            <a:ext cx="1238555" cy="518465"/>
+            <a:off x="2734056" y="1883664"/>
+            <a:ext cx="1572768" cy="658368"/>
           </a:xfrm>
           <a:prstGeom prst="rect">
             <a:avLst/>
@@ -6619,7 +6619,7 @@
               <a:buNone/>
             </a:pPr>
             <a:r>
-              <a:rPr lang="en-US" sz="1100" b="1" dirty="0">
+              <a:rPr lang="en-US" sz="1400" b="1" dirty="0">
                 <a:solidFill>
                   <a:srgbClr val="0B1F3A"/>
                 </a:solidFill>
@@ -6629,7 +6629,7 @@
               </a:rPr>
               <a:t>Tìm bốn số</a:t>
             </a:r>
-            <a:endParaRPr lang="en-US" sz="1100" dirty="0"/>
+            <a:endParaRPr lang="en-US" sz="1400" dirty="0"/>
           </a:p>
           <a:p>
             <a:pPr algn="ctr" indent="0" marL="0">
@@ -6639,7 +6639,7 @@
               <a:buNone/>
             </a:pPr>
             <a:r>
-              <a:rPr lang="en-US" sz="950" dirty="0">
+              <a:rPr lang="en-US" sz="1200" dirty="0">
                 <a:solidFill>
                   <a:srgbClr val="007F72"/>
                 </a:solidFill>
@@ -6649,7 +6649,7 @@
               </a:rPr>
               <a:t>找四個數字</a:t>
             </a:r>
-            <a:endParaRPr lang="en-US" sz="1100" dirty="0"/>
+            <a:endParaRPr lang="en-US" sz="1400" dirty="0"/>
           </a:p>
         </p:txBody>
       </p:sp>
@@ -6661,8 +6661,8 @@
         </p:nvSpPr>
         <p:spPr>
           <a:xfrm>
-            <a:off x="3124619" y="2030654"/>
-            <a:ext cx="1238555" cy="921715"/>
+            <a:off x="2734056" y="2578608"/>
+            <a:ext cx="1572768" cy="1170432"/>
           </a:xfrm>
           <a:prstGeom prst="rect">
             <a:avLst/>
@@ -6681,7 +6681,7 @@
               <a:buNone/>
             </a:pPr>
             <a:r>
-              <a:rPr lang="en-US" sz="830" dirty="0">
+              <a:rPr lang="en-US" sz="1050" dirty="0">
                 <a:solidFill>
                   <a:srgbClr val="5F7183"/>
                 </a:solidFill>
@@ -6691,7 +6691,7 @@
               </a:rPr>
               <a:t>Góc nhìn · tầm đo</a:t>
             </a:r>
-            <a:endParaRPr lang="en-US" sz="830" dirty="0"/>
+            <a:endParaRPr lang="en-US" sz="1050" dirty="0"/>
           </a:p>
           <a:p>
             <a:pPr algn="ctr" indent="0" marL="0">
@@ -6701,7 +6701,7 @@
               <a:buNone/>
             </a:pPr>
             <a:r>
-              <a:rPr lang="en-US" sz="830" dirty="0">
+              <a:rPr lang="en-US" sz="1050" dirty="0">
                 <a:solidFill>
                   <a:srgbClr val="5F7183"/>
                 </a:solidFill>
@@ -6711,7 +6711,7 @@
               </a:rPr>
               <a:t>phân giải · tốc độ</a:t>
             </a:r>
-            <a:endParaRPr lang="en-US" sz="830" dirty="0"/>
+            <a:endParaRPr lang="en-US" sz="1050" dirty="0"/>
           </a:p>
           <a:p>
             <a:pPr algn="ctr" indent="0" marL="0">
@@ -6721,7 +6721,7 @@
               <a:buNone/>
             </a:pPr>
             <a:r>
-              <a:rPr lang="en-US" sz="750" dirty="0">
+              <a:rPr lang="en-US" sz="950" dirty="0">
                 <a:solidFill>
                   <a:srgbClr val="5F7183"/>
                 </a:solidFill>
@@ -6731,7 +6731,7 @@
               </a:rPr>
               <a:t>視野・測距</a:t>
             </a:r>
-            <a:endParaRPr lang="en-US" sz="830" dirty="0"/>
+            <a:endParaRPr lang="en-US" sz="1050" dirty="0"/>
           </a:p>
           <a:p>
             <a:pPr algn="ctr" indent="0" marL="0">
@@ -6741,7 +6741,7 @@
               <a:buNone/>
             </a:pPr>
             <a:r>
-              <a:rPr lang="en-US" sz="750" dirty="0">
+              <a:rPr lang="en-US" sz="950" dirty="0">
                 <a:solidFill>
                   <a:srgbClr val="5F7183"/>
                 </a:solidFill>
@@ -6751,7 +6751,7 @@
               </a:rPr>
               <a:t>解析度・更新率</a:t>
             </a:r>
-            <a:endParaRPr lang="en-US" sz="830" dirty="0"/>
+            <a:endParaRPr lang="en-US" sz="1050" dirty="0"/>
           </a:p>
         </p:txBody>
       </p:sp>
@@ -6763,8 +6763,8 @@
         </p:nvSpPr>
         <p:spPr>
           <a:xfrm>
-            <a:off x="4463987" y="1613002"/>
-            <a:ext cx="216027" cy="288036"/>
+            <a:off x="4434840" y="2048256"/>
+            <a:ext cx="274320" cy="365760"/>
           </a:xfrm>
           <a:prstGeom prst="rect">
             <a:avLst/>
@@ -6780,7 +6780,7 @@
               <a:buNone/>
             </a:pPr>
             <a:r>
-              <a:rPr lang="en-US" sz="1500" b="1" dirty="0">
+              <a:rPr lang="en-US" sz="1900" b="1" dirty="0">
                 <a:solidFill>
                   <a:srgbClr val="00A896"/>
                 </a:solidFill>
@@ -6790,7 +6790,7 @@
               </a:rPr>
               <a:t>→</a:t>
             </a:r>
-            <a:endParaRPr lang="en-US" sz="1500" dirty="0"/>
+            <a:endParaRPr lang="en-US" sz="1900" dirty="0"/>
           </a:p>
         </p:txBody>
       </p:sp>
@@ -6802,8 +6802,8 @@
         </p:nvSpPr>
         <p:spPr>
           <a:xfrm>
-            <a:off x="4680014" y="892912"/>
-            <a:ext cx="1440180" cy="2145868"/>
+            <a:off x="4709160" y="1133856"/>
+            <a:ext cx="1828800" cy="2724912"/>
           </a:xfrm>
           <a:prstGeom prst="roundRect">
             <a:avLst>
@@ -6836,8 +6836,8 @@
         </p:nvSpPr>
         <p:spPr>
           <a:xfrm>
-            <a:off x="5212880" y="1036930"/>
-            <a:ext cx="374447" cy="374447"/>
+            <a:off x="5385816" y="1316736"/>
+            <a:ext cx="475488" cy="475488"/>
           </a:xfrm>
           <a:prstGeom prst="ellipse">
             <a:avLst/>
@@ -6856,8 +6856,8 @@
         </p:nvSpPr>
         <p:spPr>
           <a:xfrm>
-            <a:off x="5212880" y="1116140"/>
-            <a:ext cx="374447" cy="216027"/>
+            <a:off x="5385816" y="1417320"/>
+            <a:ext cx="475488" cy="274320"/>
           </a:xfrm>
           <a:prstGeom prst="rect">
             <a:avLst/>
@@ -6873,7 +6873,7 @@
               <a:buNone/>
             </a:pPr>
             <a:r>
-              <a:rPr lang="en-US" sz="1180" b="1" dirty="0">
+              <a:rPr lang="en-US" sz="1500" b="1" dirty="0">
                 <a:solidFill>
                   <a:srgbClr val="FFFFFF"/>
                 </a:solidFill>
@@ -6883,7 +6883,7 @@
               </a:rPr>
               <a:t>3</a:t>
             </a:r>
-            <a:endParaRPr lang="en-US" sz="1180" dirty="0"/>
+            <a:endParaRPr lang="en-US" sz="1500" dirty="0"/>
           </a:p>
         </p:txBody>
       </p:sp>
@@ -6895,8 +6895,8 @@
         </p:nvSpPr>
         <p:spPr>
           <a:xfrm>
-            <a:off x="4780826" y="1483385"/>
-            <a:ext cx="1238555" cy="518465"/>
+            <a:off x="4837176" y="1883664"/>
+            <a:ext cx="1572768" cy="658368"/>
           </a:xfrm>
           <a:prstGeom prst="rect">
             <a:avLst/>
@@ -6915,7 +6915,7 @@
               <a:buNone/>
             </a:pPr>
             <a:r>
-              <a:rPr lang="en-US" sz="1100" b="1" dirty="0">
+              <a:rPr lang="en-US" sz="1400" b="1" dirty="0">
                 <a:solidFill>
                   <a:srgbClr val="0B1F3A"/>
                 </a:solidFill>
@@ -6925,7 +6925,7 @@
               </a:rPr>
               <a:t>Chọn tình huống</a:t>
             </a:r>
-            <a:endParaRPr lang="en-US" sz="1100" dirty="0"/>
+            <a:endParaRPr lang="en-US" sz="1400" dirty="0"/>
           </a:p>
           <a:p>
             <a:pPr algn="ctr" indent="0" marL="0">
@@ -6935,7 +6935,7 @@
               <a:buNone/>
             </a:pPr>
             <a:r>
-              <a:rPr lang="en-US" sz="950" dirty="0">
+              <a:rPr lang="en-US" sz="1200" dirty="0">
                 <a:solidFill>
                   <a:srgbClr val="007F72"/>
                 </a:solidFill>
@@ -6945,7 +6945,7 @@
               </a:rPr>
               <a:t>選情境</a:t>
             </a:r>
-            <a:endParaRPr lang="en-US" sz="1100" dirty="0"/>
+            <a:endParaRPr lang="en-US" sz="1400" dirty="0"/>
           </a:p>
         </p:txBody>
       </p:sp>
@@ -6957,8 +6957,8 @@
         </p:nvSpPr>
         <p:spPr>
           <a:xfrm>
-            <a:off x="4780826" y="2030654"/>
-            <a:ext cx="1238555" cy="921715"/>
+            <a:off x="4837176" y="2578608"/>
+            <a:ext cx="1572768" cy="1170432"/>
           </a:xfrm>
           <a:prstGeom prst="rect">
             <a:avLst/>
@@ -6977,7 +6977,7 @@
               <a:buNone/>
             </a:pPr>
             <a:r>
-              <a:rPr lang="en-US" sz="830" dirty="0">
+              <a:rPr lang="en-US" sz="1050" dirty="0">
                 <a:solidFill>
                   <a:srgbClr val="5F7183"/>
                 </a:solidFill>
@@ -6987,7 +6987,7 @@
               </a:rPr>
               <a:t>Trường học · Hà Nội</a:t>
             </a:r>
-            <a:endParaRPr lang="en-US" sz="830" dirty="0"/>
+            <a:endParaRPr lang="en-US" sz="1050" dirty="0"/>
           </a:p>
           <a:p>
             <a:pPr algn="ctr" indent="0" marL="0">
@@ -6997,7 +6997,7 @@
               <a:buNone/>
             </a:pPr>
             <a:r>
-              <a:rPr lang="en-US" sz="830" dirty="0">
+              <a:rPr lang="en-US" sz="1050" dirty="0">
                 <a:solidFill>
                   <a:srgbClr val="5F7183"/>
                 </a:solidFill>
@@ -7007,7 +7007,7 @@
               </a:rPr>
               <a:t>Cao tốc</a:t>
             </a:r>
-            <a:endParaRPr lang="en-US" sz="830" dirty="0"/>
+            <a:endParaRPr lang="en-US" sz="1050" dirty="0"/>
           </a:p>
           <a:p>
             <a:pPr algn="ctr" indent="0" marL="0">
@@ -7017,7 +7017,7 @@
               <a:buNone/>
             </a:pPr>
             <a:r>
-              <a:rPr lang="en-US" sz="750" dirty="0">
+              <a:rPr lang="en-US" sz="950" dirty="0">
                 <a:solidFill>
                   <a:srgbClr val="5F7183"/>
                 </a:solidFill>
@@ -7027,7 +7027,7 @@
               </a:rPr>
               <a:t>校園・河內</a:t>
             </a:r>
-            <a:endParaRPr lang="en-US" sz="830" dirty="0"/>
+            <a:endParaRPr lang="en-US" sz="1050" dirty="0"/>
           </a:p>
           <a:p>
             <a:pPr algn="ctr" indent="0" marL="0">
@@ -7037,7 +7037,7 @@
               <a:buNone/>
             </a:pPr>
             <a:r>
-              <a:rPr lang="en-US" sz="750" dirty="0">
+              <a:rPr lang="en-US" sz="950" dirty="0">
                 <a:solidFill>
                   <a:srgbClr val="5F7183"/>
                 </a:solidFill>
@@ -7047,7 +7047,7 @@
               </a:rPr>
               <a:t>國道</a:t>
             </a:r>
-            <a:endParaRPr lang="en-US" sz="830" dirty="0"/>
+            <a:endParaRPr lang="en-US" sz="1050" dirty="0"/>
           </a:p>
         </p:txBody>
       </p:sp>
@@ -7059,8 +7059,8 @@
         </p:nvSpPr>
         <p:spPr>
           <a:xfrm>
-            <a:off x="6120194" y="1613002"/>
-            <a:ext cx="216027" cy="288036"/>
+            <a:off x="6537960" y="2048256"/>
+            <a:ext cx="274320" cy="365760"/>
           </a:xfrm>
           <a:prstGeom prst="rect">
             <a:avLst/>
@@ -7076,7 +7076,7 @@
               <a:buNone/>
             </a:pPr>
             <a:r>
-              <a:rPr lang="en-US" sz="1500" b="1" dirty="0">
+              <a:rPr lang="en-US" sz="1900" b="1" dirty="0">
                 <a:solidFill>
                   <a:srgbClr val="00A896"/>
                 </a:solidFill>
@@ -7086,7 +7086,7 @@
               </a:rPr>
               <a:t>→</a:t>
             </a:r>
-            <a:endParaRPr lang="en-US" sz="1500" dirty="0"/>
+            <a:endParaRPr lang="en-US" sz="1900" dirty="0"/>
           </a:p>
         </p:txBody>
       </p:sp>
@@ -7098,8 +7098,8 @@
         </p:nvSpPr>
         <p:spPr>
           <a:xfrm>
-            <a:off x="6336221" y="892912"/>
-            <a:ext cx="1440180" cy="2145868"/>
+            <a:off x="6812280" y="1133856"/>
+            <a:ext cx="1828800" cy="2724912"/>
           </a:xfrm>
           <a:prstGeom prst="roundRect">
             <a:avLst>
@@ -7132,8 +7132,8 @@
         </p:nvSpPr>
         <p:spPr>
           <a:xfrm>
-            <a:off x="6869087" y="1036930"/>
-            <a:ext cx="374447" cy="374447"/>
+            <a:off x="7488936" y="1316736"/>
+            <a:ext cx="475488" cy="475488"/>
           </a:xfrm>
           <a:prstGeom prst="ellipse">
             <a:avLst/>
@@ -7152,8 +7152,8 @@
         </p:nvSpPr>
         <p:spPr>
           <a:xfrm>
-            <a:off x="6869087" y="1116140"/>
-            <a:ext cx="374447" cy="216027"/>
+            <a:off x="7488936" y="1417320"/>
+            <a:ext cx="475488" cy="274320"/>
           </a:xfrm>
           <a:prstGeom prst="rect">
             <a:avLst/>
@@ -7169,7 +7169,7 @@
               <a:buNone/>
             </a:pPr>
             <a:r>
-              <a:rPr lang="en-US" sz="1180" b="1" dirty="0">
+              <a:rPr lang="en-US" sz="1500" b="1" dirty="0">
                 <a:solidFill>
                   <a:srgbClr val="FFFFFF"/>
                 </a:solidFill>
@@ -7179,7 +7179,7 @@
               </a:rPr>
               <a:t>4</a:t>
             </a:r>
-            <a:endParaRPr lang="en-US" sz="1180" dirty="0"/>
+            <a:endParaRPr lang="en-US" sz="1500" dirty="0"/>
           </a:p>
         </p:txBody>
       </p:sp>
@@ -7191,8 +7191,8 @@
         </p:nvSpPr>
         <p:spPr>
           <a:xfrm>
-            <a:off x="6437033" y="1483385"/>
-            <a:ext cx="1238555" cy="518465"/>
+            <a:off x="6940296" y="1883664"/>
+            <a:ext cx="1572768" cy="658368"/>
           </a:xfrm>
           <a:prstGeom prst="rect">
             <a:avLst/>
@@ -7211,7 +7211,7 @@
               <a:buNone/>
             </a:pPr>
             <a:r>
-              <a:rPr lang="en-US" sz="1100" b="1" dirty="0">
+              <a:rPr lang="en-US" sz="1400" b="1" dirty="0">
                 <a:solidFill>
                   <a:srgbClr val="0B1F3A"/>
                 </a:solidFill>
@@ -7221,7 +7221,7 @@
               </a:rPr>
               <a:t>Viết kết luận</a:t>
             </a:r>
-            <a:endParaRPr lang="en-US" sz="1100" dirty="0"/>
+            <a:endParaRPr lang="en-US" sz="1400" dirty="0"/>
           </a:p>
           <a:p>
             <a:pPr algn="ctr" indent="0" marL="0">
@@ -7231,7 +7231,7 @@
               <a:buNone/>
             </a:pPr>
             <a:r>
-              <a:rPr lang="en-US" sz="950" dirty="0">
+              <a:rPr lang="en-US" sz="1200" dirty="0">
                 <a:solidFill>
                   <a:srgbClr val="007F72"/>
                 </a:solidFill>
@@ -7241,7 +7241,7 @@
               </a:rPr>
               <a:t>寫結論</a:t>
             </a:r>
-            <a:endParaRPr lang="en-US" sz="1100" dirty="0"/>
+            <a:endParaRPr lang="en-US" sz="1400" dirty="0"/>
           </a:p>
         </p:txBody>
       </p:sp>
@@ -7253,8 +7253,8 @@
         </p:nvSpPr>
         <p:spPr>
           <a:xfrm>
-            <a:off x="6437033" y="2030654"/>
-            <a:ext cx="1238555" cy="921715"/>
+            <a:off x="6940296" y="2578608"/>
+            <a:ext cx="1572768" cy="1170432"/>
           </a:xfrm>
           <a:prstGeom prst="rect">
             <a:avLst/>
@@ -7273,7 +7273,7 @@
               <a:buNone/>
             </a:pPr>
             <a:r>
-              <a:rPr lang="en-US" sz="830" dirty="0">
+              <a:rPr lang="en-US" sz="1050" dirty="0">
                 <a:solidFill>
                   <a:srgbClr val="5F7183"/>
                 </a:solidFill>
@@ -7283,7 +7283,7 @@
               </a:rPr>
               <a:t>Đủ hay không</a:t>
             </a:r>
-            <a:endParaRPr lang="en-US" sz="830" dirty="0"/>
+            <a:endParaRPr lang="en-US" sz="1050" dirty="0"/>
           </a:p>
           <a:p>
             <a:pPr algn="ctr" indent="0" marL="0">
@@ -7293,7 +7293,7 @@
               <a:buNone/>
             </a:pPr>
             <a:r>
-              <a:rPr lang="en-US" sz="830" dirty="0">
+              <a:rPr lang="en-US" sz="1050" dirty="0">
                 <a:solidFill>
                   <a:srgbClr val="5F7183"/>
                 </a:solidFill>
@@ -7303,7 +7303,7 @@
               </a:rPr>
               <a:t>Tắc ở dòng nào</a:t>
             </a:r>
-            <a:endParaRPr lang="en-US" sz="830" dirty="0"/>
+            <a:endParaRPr lang="en-US" sz="1050" dirty="0"/>
           </a:p>
           <a:p>
             <a:pPr algn="ctr" indent="0" marL="0">
@@ -7313,7 +7313,7 @@
               <a:buNone/>
             </a:pPr>
             <a:r>
-              <a:rPr lang="en-US" sz="750" dirty="0">
+              <a:rPr lang="en-US" sz="950" dirty="0">
                 <a:solidFill>
                   <a:srgbClr val="5F7183"/>
                 </a:solidFill>
@@ -7323,7 +7323,7 @@
               </a:rPr>
               <a:t>夠或不夠</a:t>
             </a:r>
-            <a:endParaRPr lang="en-US" sz="830" dirty="0"/>
+            <a:endParaRPr lang="en-US" sz="1050" dirty="0"/>
           </a:p>
           <a:p>
             <a:pPr algn="ctr" indent="0" marL="0">
@@ -7333,7 +7333,7 @@
               <a:buNone/>
             </a:pPr>
             <a:r>
-              <a:rPr lang="en-US" sz="750" dirty="0">
+              <a:rPr lang="en-US" sz="950" dirty="0">
                 <a:solidFill>
                   <a:srgbClr val="5F7183"/>
                 </a:solidFill>
@@ -7343,7 +7343,7 @@
               </a:rPr>
               <a:t>卡在哪一行</a:t>
             </a:r>
-            <a:endParaRPr lang="en-US" sz="830" dirty="0"/>
+            <a:endParaRPr lang="en-US" sz="1050" dirty="0"/>
           </a:p>
         </p:txBody>
       </p:sp>
@@ -7355,8 +7355,8 @@
         </p:nvSpPr>
         <p:spPr>
           <a:xfrm>
-            <a:off x="1367600" y="3153994"/>
-            <a:ext cx="6408801" cy="446456"/>
+            <a:off x="502920" y="4005072"/>
+            <a:ext cx="8138160" cy="566928"/>
           </a:xfrm>
           <a:prstGeom prst="rect">
             <a:avLst/>
@@ -7375,7 +7375,7 @@
               <a:buNone/>
             </a:pPr>
             <a:r>
-              <a:rPr lang="en-US" sz="980" b="1" dirty="0">
+              <a:rPr lang="en-US" sz="1250" b="1" dirty="0">
                 <a:solidFill>
                   <a:srgbClr val="0B1F3A"/>
                 </a:solidFill>
@@ -7385,7 +7385,7 @@
               </a:rPr>
               <a:t>Bước 4 mới là phần chấm điểm: «không đủ» mà không nói được tắc ở đâu thì không tính.</a:t>
             </a:r>
-            <a:endParaRPr lang="en-US" sz="980" dirty="0"/>
+            <a:endParaRPr lang="en-US" sz="1250" dirty="0"/>
           </a:p>
           <a:p>
             <a:pPr indent="0" marL="0">
@@ -7395,7 +7395,7 @@
               <a:buNone/>
             </a:pPr>
             <a:r>
-              <a:rPr lang="en-US" sz="910" dirty="0">
+              <a:rPr lang="en-US" sz="1150" dirty="0">
                 <a:solidFill>
                   <a:srgbClr val="007F72"/>
                 </a:solidFill>
@@ -7405,7 +7405,7 @@
               </a:rPr>
               <a:t>第 4 步才是計分的地方：只寫「不夠」卻說不出卡在哪，不算。</a:t>
             </a:r>
-            <a:endParaRPr lang="en-US" sz="980" dirty="0"/>
+            <a:endParaRPr lang="en-US" sz="1250" dirty="0"/>
           </a:p>
         </p:txBody>
       </p:sp>
@@ -7441,8 +7441,8 @@
         </p:nvSpPr>
         <p:spPr>
           <a:xfrm>
-            <a:off x="1057961" y="100813"/>
-            <a:ext cx="648081" cy="201625"/>
+            <a:off x="109728" y="128016"/>
+            <a:ext cx="822960" cy="256032"/>
           </a:xfrm>
           <a:prstGeom prst="rect">
             <a:avLst/>
@@ -7458,7 +7458,7 @@
               <a:buNone/>
             </a:pPr>
             <a:r>
-              <a:rPr lang="en-US" sz="710" dirty="0">
+              <a:rPr lang="en-US" sz="900" dirty="0">
                 <a:solidFill>
                   <a:srgbClr val="5F7183"/>
                 </a:solidFill>
@@ -7468,7 +7468,7 @@
               </a:rPr>
               <a:t>2 / 9</a:t>
             </a:r>
-            <a:endParaRPr lang="en-US" sz="710" dirty="0"/>
+            <a:endParaRPr lang="en-US" sz="900" dirty="0"/>
           </a:p>
         </p:txBody>
       </p:sp>
@@ -7480,8 +7480,8 @@
         </p:nvSpPr>
         <p:spPr>
           <a:xfrm>
-            <a:off x="1727645" y="100813"/>
-            <a:ext cx="1584198" cy="201625"/>
+            <a:off x="960120" y="128016"/>
+            <a:ext cx="2011680" cy="256032"/>
           </a:xfrm>
           <a:prstGeom prst="rect">
             <a:avLst/>
@@ -7497,7 +7497,7 @@
               <a:buNone/>
             </a:pPr>
             <a:r>
-              <a:rPr lang="en-US" sz="710" dirty="0">
+              <a:rPr lang="en-US" sz="900" dirty="0">
                 <a:solidFill>
                   <a:srgbClr val="5F7183"/>
                 </a:solidFill>
@@ -7507,7 +7507,7 @@
               </a:rPr>
               <a:t>Tiết 3 · 第 3 節</a:t>
             </a:r>
-            <a:endParaRPr lang="en-US" sz="710" dirty="0"/>
+            <a:endParaRPr lang="en-US" sz="900" dirty="0"/>
           </a:p>
         </p:txBody>
       </p:sp>
@@ -7537,7 +7537,7 @@
       </p:nvGrpSpPr>
       <p:grpSpPr>
         <a:xfrm>
-          <a:off x="898071" y="0"/>
+          <a:off x="0" y="0"/>
           <a:ext cx="1" cy="1"/>
           <a:chOff x="0" y="0"/>
           <a:chExt cx="0" cy="0"/>
@@ -7551,8 +7551,8 @@
         </p:nvSpPr>
         <p:spPr>
           <a:xfrm>
-            <a:off x="6335486" y="-1102179"/>
-            <a:ext cx="3380014" cy="3380014"/>
+            <a:off x="6766560" y="-1371600"/>
+            <a:ext cx="4206240" cy="4206240"/>
           </a:xfrm>
           <a:prstGeom prst="ellipse">
             <a:avLst/>
@@ -7576,8 +7576,8 @@
         </p:nvSpPr>
         <p:spPr>
           <a:xfrm>
-            <a:off x="7437664" y="1690007"/>
-            <a:ext cx="1910443" cy="1910443"/>
+            <a:off x="8138160" y="2103120"/>
+            <a:ext cx="2377440" cy="2377440"/>
           </a:xfrm>
           <a:prstGeom prst="ellipse">
             <a:avLst/>
@@ -7598,8 +7598,8 @@
         </p:nvSpPr>
         <p:spPr>
           <a:xfrm>
-            <a:off x="1302204" y="382089"/>
-            <a:ext cx="5437414" cy="220436"/>
+            <a:off x="502920" y="475488"/>
+            <a:ext cx="6766560" cy="274320"/>
           </a:xfrm>
           <a:prstGeom prst="rect">
             <a:avLst/>
@@ -7615,7 +7615,7 @@
               <a:buNone/>
             </a:pPr>
             <a:r>
-              <a:rPr lang="en-US" sz="1000" b="1" dirty="0">
+              <a:rPr lang="en-US" sz="1250" b="1" dirty="0">
                 <a:solidFill>
                   <a:srgbClr val="FFB020"/>
                 </a:solidFill>
@@ -7625,7 +7625,7 @@
               </a:rPr>
               <a:t>Nhiệm vụ 1 · 第一題（10 分鐘）</a:t>
             </a:r>
-            <a:endParaRPr lang="en-US" sz="1000" dirty="0"/>
+            <a:endParaRPr lang="en-US" sz="1250" dirty="0"/>
           </a:p>
         </p:txBody>
       </p:sp>
@@ -7637,8 +7637,8 @@
         </p:nvSpPr>
         <p:spPr>
           <a:xfrm>
-            <a:off x="1302204" y="631916"/>
-            <a:ext cx="6466114" cy="984613"/>
+            <a:off x="502920" y="786384"/>
+            <a:ext cx="8046720" cy="1225296"/>
           </a:xfrm>
           <a:prstGeom prst="rect">
             <a:avLst/>
@@ -7657,7 +7657,7 @@
               <a:buNone/>
             </a:pPr>
             <a:r>
-              <a:rPr lang="en-US" sz="1850" b="1" dirty="0">
+              <a:rPr lang="en-US" sz="2300" b="1" dirty="0">
                 <a:solidFill>
                   <a:srgbClr val="FFFFFF"/>
                 </a:solidFill>
@@ -7667,7 +7667,7 @@
               </a:rPr>
               <a:t>Xe buýt nhỏ trong trường, 20 km/h. Thử cả bốn model.</a:t>
             </a:r>
-            <a:endParaRPr lang="en-US" sz="1850" dirty="0"/>
+            <a:endParaRPr lang="en-US" sz="2300" dirty="0"/>
           </a:p>
           <a:p>
             <a:pPr indent="0" marL="0">
@@ -7677,7 +7677,7 @@
               <a:buNone/>
             </a:pPr>
             <a:r>
-              <a:rPr lang="en-US" sz="1210" dirty="0">
+              <a:rPr lang="en-US" sz="1500" dirty="0">
                 <a:solidFill>
                   <a:srgbClr val="AFC3D4"/>
                 </a:solidFill>
@@ -7687,7 +7687,7 @@
               </a:rPr>
               <a:t>校園接駁小巴，時速 20。四個型號都試一次。</a:t>
             </a:r>
-            <a:endParaRPr lang="en-US" sz="1850" dirty="0"/>
+            <a:endParaRPr lang="en-US" sz="2300" dirty="0"/>
           </a:p>
         </p:txBody>
       </p:sp>
@@ -7699,8 +7699,8 @@
         </p:nvSpPr>
         <p:spPr>
           <a:xfrm>
-            <a:off x="1302204" y="1396093"/>
-            <a:ext cx="6539593" cy="499654"/>
+            <a:off x="502920" y="1737360"/>
+            <a:ext cx="8138160" cy="621792"/>
           </a:xfrm>
           <a:prstGeom prst="roundRect">
             <a:avLst>
@@ -7721,8 +7721,8 @@
         </p:nvSpPr>
         <p:spPr>
           <a:xfrm>
-            <a:off x="1434465" y="1513659"/>
-            <a:ext cx="264523" cy="264523"/>
+            <a:off x="667512" y="1883664"/>
+            <a:ext cx="329184" cy="329184"/>
           </a:xfrm>
           <a:prstGeom prst="ellipse">
             <a:avLst/>
@@ -7741,8 +7741,8 @@
         </p:nvSpPr>
         <p:spPr>
           <a:xfrm>
-            <a:off x="1434465" y="1535702"/>
-            <a:ext cx="264523" cy="220436"/>
+            <a:off x="667512" y="1911096"/>
+            <a:ext cx="329184" cy="274320"/>
           </a:xfrm>
           <a:prstGeom prst="rect">
             <a:avLst/>
@@ -7758,7 +7758,7 @@
               <a:buNone/>
             </a:pPr>
             <a:r>
-              <a:rPr lang="en-US" sz="960" b="1" dirty="0">
+              <a:rPr lang="en-US" sz="1200" b="1" dirty="0">
                 <a:solidFill>
                   <a:srgbClr val="FFFFFF"/>
                 </a:solidFill>
@@ -7768,7 +7768,7 @@
               </a:rPr>
               <a:t>1</a:t>
             </a:r>
-            <a:endParaRPr lang="en-US" sz="960" dirty="0"/>
+            <a:endParaRPr lang="en-US" sz="1200" dirty="0"/>
           </a:p>
         </p:txBody>
       </p:sp>
@@ -7780,8 +7780,8 @@
         </p:nvSpPr>
         <p:spPr>
           <a:xfrm>
-            <a:off x="1831249" y="1432832"/>
-            <a:ext cx="5863590" cy="440871"/>
+            <a:off x="1161288" y="1783080"/>
+            <a:ext cx="7296912" cy="548640"/>
           </a:xfrm>
           <a:prstGeom prst="rect">
             <a:avLst/>
@@ -7800,7 +7800,7 @@
               <a:buNone/>
             </a:pPr>
             <a:r>
-              <a:rPr lang="en-US" sz="1000" b="1" dirty="0">
+              <a:rPr lang="en-US" sz="1250" b="1" dirty="0">
                 <a:solidFill>
                   <a:srgbClr val="FFFFFF"/>
                 </a:solidFill>
@@ -7810,7 +7810,7 @@
               </a:rPr>
               <a:t>Chép lại: model nào «đủ», model nào «không đủ»</a:t>
             </a:r>
-            <a:endParaRPr lang="en-US" sz="1000" dirty="0"/>
+            <a:endParaRPr lang="en-US" sz="1250" dirty="0"/>
           </a:p>
           <a:p>
             <a:pPr indent="0" marL="0">
@@ -7820,7 +7820,7 @@
               <a:buNone/>
             </a:pPr>
             <a:r>
-              <a:rPr lang="en-US" sz="920" dirty="0">
+              <a:rPr lang="en-US" sz="1150" dirty="0">
                 <a:solidFill>
                   <a:srgbClr val="AFC3D4"/>
                 </a:solidFill>
@@ -7830,7 +7830,7 @@
               </a:rPr>
               <a:t>抄下來：哪幾顆判定「夠」，哪幾顆「不夠」</a:t>
             </a:r>
-            <a:endParaRPr lang="en-US" sz="1000" dirty="0"/>
+            <a:endParaRPr lang="en-US" sz="1250" dirty="0"/>
           </a:p>
         </p:txBody>
       </p:sp>
@@ -7842,8 +7842,8 @@
         </p:nvSpPr>
         <p:spPr>
           <a:xfrm>
-            <a:off x="1302204" y="1969226"/>
-            <a:ext cx="6539593" cy="499654"/>
+            <a:off x="502920" y="2450592"/>
+            <a:ext cx="8138160" cy="621792"/>
           </a:xfrm>
           <a:prstGeom prst="roundRect">
             <a:avLst>
@@ -7864,8 +7864,8 @@
         </p:nvSpPr>
         <p:spPr>
           <a:xfrm>
-            <a:off x="1434465" y="2086791"/>
-            <a:ext cx="264523" cy="264523"/>
+            <a:off x="667512" y="2596896"/>
+            <a:ext cx="329184" cy="329184"/>
           </a:xfrm>
           <a:prstGeom prst="ellipse">
             <a:avLst/>
@@ -7884,8 +7884,8 @@
         </p:nvSpPr>
         <p:spPr>
           <a:xfrm>
-            <a:off x="1434465" y="2108835"/>
-            <a:ext cx="264523" cy="220436"/>
+            <a:off x="667512" y="2624328"/>
+            <a:ext cx="329184" cy="274320"/>
           </a:xfrm>
           <a:prstGeom prst="rect">
             <a:avLst/>
@@ -7901,7 +7901,7 @@
               <a:buNone/>
             </a:pPr>
             <a:r>
-              <a:rPr lang="en-US" sz="960" b="1" dirty="0">
+              <a:rPr lang="en-US" sz="1200" b="1" dirty="0">
                 <a:solidFill>
                   <a:srgbClr val="FFFFFF"/>
                 </a:solidFill>
@@ -7911,7 +7911,7 @@
               </a:rPr>
               <a:t>2</a:t>
             </a:r>
-            <a:endParaRPr lang="en-US" sz="960" dirty="0"/>
+            <a:endParaRPr lang="en-US" sz="1200" dirty="0"/>
           </a:p>
         </p:txBody>
       </p:sp>
@@ -7923,8 +7923,8 @@
         </p:nvSpPr>
         <p:spPr>
           <a:xfrm>
-            <a:off x="1831249" y="2005965"/>
-            <a:ext cx="5863590" cy="440871"/>
+            <a:off x="1161288" y="2496312"/>
+            <a:ext cx="7296912" cy="548640"/>
           </a:xfrm>
           <a:prstGeom prst="rect">
             <a:avLst/>
@@ -7943,7 +7943,7 @@
               <a:buNone/>
             </a:pPr>
             <a:r>
-              <a:rPr lang="en-US" sz="1000" b="1" dirty="0">
+              <a:rPr lang="en-US" sz="1250" b="1" dirty="0">
                 <a:solidFill>
                   <a:srgbClr val="FFFFFF"/>
                 </a:solidFill>
@@ -7953,7 +7953,7 @@
               </a:rPr>
               <a:t>Với model không đủ, chép nguyên dòng màu đỏ</a:t>
             </a:r>
-            <a:endParaRPr lang="en-US" sz="1000" dirty="0"/>
+            <a:endParaRPr lang="en-US" sz="1250" dirty="0"/>
           </a:p>
           <a:p>
             <a:pPr indent="0" marL="0">
@@ -7963,7 +7963,7 @@
               <a:buNone/>
             </a:pPr>
             <a:r>
-              <a:rPr lang="en-US" sz="920" dirty="0">
+              <a:rPr lang="en-US" sz="1150" dirty="0">
                 <a:solidFill>
                   <a:srgbClr val="AFC3D4"/>
                 </a:solidFill>
@@ -7973,7 +7973,7 @@
               </a:rPr>
               <a:t>不夠的那幾顆，把紅色那一行整句抄下來</a:t>
             </a:r>
-            <a:endParaRPr lang="en-US" sz="1000" dirty="0"/>
+            <a:endParaRPr lang="en-US" sz="1250" dirty="0"/>
           </a:p>
         </p:txBody>
       </p:sp>
@@ -7985,8 +7985,8 @@
         </p:nvSpPr>
         <p:spPr>
           <a:xfrm>
-            <a:off x="1302204" y="2542359"/>
-            <a:ext cx="6539593" cy="499654"/>
+            <a:off x="502920" y="3163824"/>
+            <a:ext cx="8138160" cy="621792"/>
           </a:xfrm>
           <a:prstGeom prst="roundRect">
             <a:avLst>
@@ -8007,8 +8007,8 @@
         </p:nvSpPr>
         <p:spPr>
           <a:xfrm>
-            <a:off x="1434465" y="2659924"/>
-            <a:ext cx="264523" cy="264523"/>
+            <a:off x="667512" y="3310128"/>
+            <a:ext cx="329184" cy="329184"/>
           </a:xfrm>
           <a:prstGeom prst="ellipse">
             <a:avLst/>
@@ -8027,8 +8027,8 @@
         </p:nvSpPr>
         <p:spPr>
           <a:xfrm>
-            <a:off x="1434465" y="2681968"/>
-            <a:ext cx="264523" cy="220436"/>
+            <a:off x="667512" y="3337560"/>
+            <a:ext cx="329184" cy="274320"/>
           </a:xfrm>
           <a:prstGeom prst="rect">
             <a:avLst/>
@@ -8044,7 +8044,7 @@
               <a:buNone/>
             </a:pPr>
             <a:r>
-              <a:rPr lang="en-US" sz="960" b="1" dirty="0">
+              <a:rPr lang="en-US" sz="1200" b="1" dirty="0">
                 <a:solidFill>
                   <a:srgbClr val="FFFFFF"/>
                 </a:solidFill>
@@ -8054,7 +8054,7 @@
               </a:rPr>
               <a:t>3</a:t>
             </a:r>
-            <a:endParaRPr lang="en-US" sz="960" dirty="0"/>
+            <a:endParaRPr lang="en-US" sz="1200" dirty="0"/>
           </a:p>
         </p:txBody>
       </p:sp>
@@ -8066,8 +8066,8 @@
         </p:nvSpPr>
         <p:spPr>
           <a:xfrm>
-            <a:off x="1831249" y="2579098"/>
-            <a:ext cx="5863590" cy="440871"/>
+            <a:off x="1161288" y="3209544"/>
+            <a:ext cx="7296912" cy="548640"/>
           </a:xfrm>
           <a:prstGeom prst="rect">
             <a:avLst/>
@@ -8086,7 +8086,7 @@
               <a:buNone/>
             </a:pPr>
             <a:r>
-              <a:rPr lang="en-US" sz="1000" b="1" dirty="0">
+              <a:rPr lang="en-US" sz="1250" b="1" dirty="0">
                 <a:solidFill>
                   <a:srgbClr val="FFFFFF"/>
                 </a:solidFill>
@@ -8096,7 +8096,7 @@
               </a:rPr>
               <a:t>Câu hỏi: tại sao camera lại đủ ở tình huống này?</a:t>
             </a:r>
-            <a:endParaRPr lang="en-US" sz="1000" dirty="0"/>
+            <a:endParaRPr lang="en-US" sz="1250" dirty="0"/>
           </a:p>
           <a:p>
             <a:pPr indent="0" marL="0">
@@ -8106,7 +8106,7 @@
               <a:buNone/>
             </a:pPr>
             <a:r>
-              <a:rPr lang="en-US" sz="920" dirty="0">
+              <a:rPr lang="en-US" sz="1150" dirty="0">
                 <a:solidFill>
                   <a:srgbClr val="AFC3D4"/>
                 </a:solidFill>
@@ -8116,7 +8116,7 @@
               </a:rPr>
               <a:t>想一題：為什麼相機在這個情境反而夠用？</a:t>
             </a:r>
-            <a:endParaRPr lang="en-US" sz="1000" dirty="0"/>
+            <a:endParaRPr lang="en-US" sz="1250" dirty="0"/>
           </a:p>
         </p:txBody>
       </p:sp>
@@ -8128,8 +8128,8 @@
         </p:nvSpPr>
         <p:spPr>
           <a:xfrm>
-            <a:off x="1302204" y="3144883"/>
-            <a:ext cx="6466114" cy="367393"/>
+            <a:off x="502920" y="3913632"/>
+            <a:ext cx="8046720" cy="457200"/>
           </a:xfrm>
           <a:prstGeom prst="rect">
             <a:avLst/>
@@ -8148,7 +8148,7 @@
               <a:buNone/>
             </a:pPr>
             <a:r>
-              <a:rPr lang="en-US" sz="1000" b="1" dirty="0">
+              <a:rPr lang="en-US" sz="1250" b="1" dirty="0">
                 <a:solidFill>
                   <a:srgbClr val="FFB020"/>
                 </a:solidFill>
@@ -8158,7 +8158,7 @@
               </a:rPr>
               <a:t>Trong trường chạy chậm, nhìn gần — bài toán dễ nhất trong ba tình huống.</a:t>
             </a:r>
-            <a:endParaRPr lang="en-US" sz="1000" dirty="0"/>
+            <a:endParaRPr lang="en-US" sz="1250" dirty="0"/>
           </a:p>
           <a:p>
             <a:pPr indent="0" marL="0">
@@ -8168,7 +8168,7 @@
               <a:buNone/>
             </a:pPr>
             <a:r>
-              <a:rPr lang="en-US" sz="920" dirty="0">
+              <a:rPr lang="en-US" sz="1150" dirty="0">
                 <a:solidFill>
                   <a:srgbClr val="FFB020"/>
                 </a:solidFill>
@@ -8178,7 +8178,7 @@
               </a:rPr>
               <a:t>校園裡車速慢、看得近——三個情境裡最好過的一個。</a:t>
             </a:r>
-            <a:endParaRPr lang="en-US" sz="1000" dirty="0"/>
+            <a:endParaRPr lang="en-US" sz="1250" dirty="0"/>
           </a:p>
         </p:txBody>
       </p:sp>
@@ -8190,8 +8190,8 @@
         </p:nvSpPr>
         <p:spPr>
           <a:xfrm>
-            <a:off x="986246" y="102870"/>
-            <a:ext cx="661307" cy="205740"/>
+            <a:off x="109728" y="128016"/>
+            <a:ext cx="822960" cy="256032"/>
           </a:xfrm>
           <a:prstGeom prst="rect">
             <a:avLst/>
@@ -8207,7 +8207,7 @@
               <a:buNone/>
             </a:pPr>
             <a:r>
-              <a:rPr lang="en-US" sz="720" dirty="0">
+              <a:rPr lang="en-US" sz="900" dirty="0">
                 <a:solidFill>
                   <a:srgbClr val="9FB3C8"/>
                 </a:solidFill>
@@ -8217,7 +8217,7 @@
               </a:rPr>
               <a:t>3 / 9</a:t>
             </a:r>
-            <a:endParaRPr lang="en-US" sz="720" dirty="0"/>
+            <a:endParaRPr lang="en-US" sz="900" dirty="0"/>
           </a:p>
         </p:txBody>
       </p:sp>
@@ -8229,8 +8229,8 @@
         </p:nvSpPr>
         <p:spPr>
           <a:xfrm>
-            <a:off x="1669596" y="102870"/>
-            <a:ext cx="1616529" cy="205740"/>
+            <a:off x="960120" y="128016"/>
+            <a:ext cx="2011680" cy="256032"/>
           </a:xfrm>
           <a:prstGeom prst="rect">
             <a:avLst/>
@@ -8246,7 +8246,7 @@
               <a:buNone/>
             </a:pPr>
             <a:r>
-              <a:rPr lang="en-US" sz="720" dirty="0">
+              <a:rPr lang="en-US" sz="900" dirty="0">
                 <a:solidFill>
                   <a:srgbClr val="9FB3C8"/>
                 </a:solidFill>
@@ -8256,7 +8256,7 @@
               </a:rPr>
               <a:t>Tiết 3 · 第 3 節</a:t>
             </a:r>
-            <a:endParaRPr lang="en-US" sz="720" dirty="0"/>
+            <a:endParaRPr lang="en-US" sz="900" dirty="0"/>
           </a:p>
         </p:txBody>
       </p:sp>
@@ -8286,7 +8286,7 @@
       </p:nvGrpSpPr>
       <p:grpSpPr>
         <a:xfrm>
-          <a:off x="925172" y="0"/>
+          <a:off x="0" y="0"/>
           <a:ext cx="1" cy="1"/>
           <a:chOff x="0" y="0"/>
           <a:chExt cx="0" cy="0"/>
@@ -8300,8 +8300,8 @@
         </p:nvSpPr>
         <p:spPr>
           <a:xfrm>
-            <a:off x="6322478" y="-1094048"/>
-            <a:ext cx="3355082" cy="3355082"/>
+            <a:off x="6766560" y="-1371600"/>
+            <a:ext cx="4206240" cy="4206240"/>
           </a:xfrm>
           <a:prstGeom prst="ellipse">
             <a:avLst/>
@@ -8325,8 +8325,8 @@
         </p:nvSpPr>
         <p:spPr>
           <a:xfrm>
-            <a:off x="7416526" y="1677541"/>
-            <a:ext cx="1896351" cy="1896351"/>
+            <a:off x="8138160" y="2103120"/>
+            <a:ext cx="2377440" cy="2377440"/>
           </a:xfrm>
           <a:prstGeom prst="ellipse">
             <a:avLst/>
@@ -8347,8 +8347,8 @@
         </p:nvSpPr>
         <p:spPr>
           <a:xfrm>
-            <a:off x="1326323" y="379270"/>
-            <a:ext cx="5397306" cy="218810"/>
+            <a:off x="502920" y="475488"/>
+            <a:ext cx="6766560" cy="274320"/>
           </a:xfrm>
           <a:prstGeom prst="rect">
             <a:avLst/>
@@ -8364,7 +8364,7 @@
               <a:buNone/>
             </a:pPr>
             <a:r>
-              <a:rPr lang="en-US" sz="1000" b="1" dirty="0">
+              <a:rPr lang="en-US" sz="1250" b="1" dirty="0">
                 <a:solidFill>
                   <a:srgbClr val="FFB020"/>
                 </a:solidFill>
@@ -8374,7 +8374,7 @@
               </a:rPr>
               <a:t>Nhiệm vụ 2 · 第二題（10 分鐘）</a:t>
             </a:r>
-            <a:endParaRPr lang="en-US" sz="1000" dirty="0"/>
+            <a:endParaRPr lang="en-US" sz="1250" dirty="0"/>
           </a:p>
         </p:txBody>
       </p:sp>
@@ -8386,8 +8386,8 @@
         </p:nvSpPr>
         <p:spPr>
           <a:xfrm>
-            <a:off x="1326323" y="627254"/>
-            <a:ext cx="6418418" cy="977350"/>
+            <a:off x="502920" y="786384"/>
+            <a:ext cx="8046720" cy="1225296"/>
           </a:xfrm>
           <a:prstGeom prst="rect">
             <a:avLst/>
@@ -8406,7 +8406,7 @@
               <a:buNone/>
             </a:pPr>
             <a:r>
-              <a:rPr lang="en-US" sz="1830" b="1" dirty="0">
+              <a:rPr lang="en-US" sz="2300" b="1" dirty="0">
                 <a:solidFill>
                   <a:srgbClr val="FFFFFF"/>
                 </a:solidFill>
@@ -8416,7 +8416,7 @@
               </a:rPr>
               <a:t>Đổi sang giờ cao điểm Hà Nội, 40 km/h. Bốn model lại làm một lượt.</a:t>
             </a:r>
-            <a:endParaRPr lang="en-US" sz="1830" dirty="0"/>
+            <a:endParaRPr lang="en-US" sz="2300" dirty="0"/>
           </a:p>
           <a:p>
             <a:pPr indent="0" marL="0">
@@ -8426,7 +8426,7 @@
               <a:buNone/>
             </a:pPr>
             <a:r>
-              <a:rPr lang="en-US" sz="1200" dirty="0">
+              <a:rPr lang="en-US" sz="1500" dirty="0">
                 <a:solidFill>
                   <a:srgbClr val="AFC3D4"/>
                 </a:solidFill>
@@ -8436,7 +8436,7 @@
               </a:rPr>
               <a:t>換成河內尖峰，時速 40。四個型號再做一次。</a:t>
             </a:r>
-            <a:endParaRPr lang="en-US" sz="1830" dirty="0"/>
+            <a:endParaRPr lang="en-US" sz="2300" dirty="0"/>
           </a:p>
         </p:txBody>
       </p:sp>
@@ -8448,8 +8448,8 @@
         </p:nvSpPr>
         <p:spPr>
           <a:xfrm>
-            <a:off x="1326323" y="1499877"/>
-            <a:ext cx="6491354" cy="495969"/>
+            <a:off x="502920" y="1880384"/>
+            <a:ext cx="8138160" cy="621792"/>
           </a:xfrm>
           <a:prstGeom prst="roundRect">
             <a:avLst>
@@ -8470,8 +8470,8 @@
         </p:nvSpPr>
         <p:spPr>
           <a:xfrm>
-            <a:off x="1457609" y="1616575"/>
-            <a:ext cx="262572" cy="262572"/>
+            <a:off x="667512" y="2026688"/>
+            <a:ext cx="329184" cy="329184"/>
           </a:xfrm>
           <a:prstGeom prst="ellipse">
             <a:avLst/>
@@ -8490,8 +8490,8 @@
         </p:nvSpPr>
         <p:spPr>
           <a:xfrm>
-            <a:off x="1457609" y="1638456"/>
-            <a:ext cx="262572" cy="218810"/>
+            <a:off x="667512" y="2054120"/>
+            <a:ext cx="329184" cy="274320"/>
           </a:xfrm>
           <a:prstGeom prst="rect">
             <a:avLst/>
@@ -8507,7 +8507,7 @@
               <a:buNone/>
             </a:pPr>
             <a:r>
-              <a:rPr lang="en-US" sz="960" b="1" dirty="0">
+              <a:rPr lang="en-US" sz="1200" b="1" dirty="0">
                 <a:solidFill>
                   <a:srgbClr val="FFFFFF"/>
                 </a:solidFill>
@@ -8517,7 +8517,7 @@
               </a:rPr>
               <a:t>1</a:t>
             </a:r>
-            <a:endParaRPr lang="en-US" sz="960" dirty="0"/>
+            <a:endParaRPr lang="en-US" sz="1200" dirty="0"/>
           </a:p>
         </p:txBody>
       </p:sp>
@@ -8529,8 +8529,8 @@
         </p:nvSpPr>
         <p:spPr>
           <a:xfrm>
-            <a:off x="1851466" y="1536345"/>
-            <a:ext cx="5820338" cy="437619"/>
+            <a:off x="1161288" y="1926104"/>
+            <a:ext cx="7296912" cy="548640"/>
           </a:xfrm>
           <a:prstGeom prst="rect">
             <a:avLst/>
@@ -8549,7 +8549,7 @@
               <a:buNone/>
             </a:pPr>
             <a:r>
-              <a:rPr lang="en-US" sz="1000" b="1" dirty="0">
+              <a:rPr lang="en-US" sz="1250" b="1" dirty="0">
                 <a:solidFill>
                   <a:srgbClr val="FFFFFF"/>
                 </a:solidFill>
@@ -8559,7 +8559,7 @@
               </a:rPr>
               <a:t>OS1 chỉ thiếu một chút. Mở dòng «configurable» ra xem</a:t>
             </a:r>
-            <a:endParaRPr lang="en-US" sz="1000" dirty="0"/>
+            <a:endParaRPr lang="en-US" sz="1250" dirty="0"/>
           </a:p>
           <a:p>
             <a:pPr indent="0" marL="0">
@@ -8569,7 +8569,7 @@
               <a:buNone/>
             </a:pPr>
             <a:r>
-              <a:rPr lang="en-US" sz="920" dirty="0">
+              <a:rPr lang="en-US" sz="1150" dirty="0">
                 <a:solidFill>
                   <a:srgbClr val="AFC3D4"/>
                 </a:solidFill>
@@ -8579,7 +8579,7 @@
               </a:rPr>
               <a:t>OS1 只差一點點。把那一行寫著「可設定」的打開看看</a:t>
             </a:r>
-            <a:endParaRPr lang="en-US" sz="1000" dirty="0"/>
+            <a:endParaRPr lang="en-US" sz="1250" dirty="0"/>
           </a:p>
         </p:txBody>
       </p:sp>
@@ -8591,8 +8591,8 @@
         </p:nvSpPr>
         <p:spPr>
           <a:xfrm>
-            <a:off x="1326323" y="2068782"/>
-            <a:ext cx="6491354" cy="495969"/>
+            <a:off x="502920" y="2593616"/>
+            <a:ext cx="8138160" cy="621792"/>
           </a:xfrm>
           <a:prstGeom prst="roundRect">
             <a:avLst>
@@ -8613,8 +8613,8 @@
         </p:nvSpPr>
         <p:spPr>
           <a:xfrm>
-            <a:off x="1457609" y="2185481"/>
-            <a:ext cx="262572" cy="262572"/>
+            <a:off x="667512" y="2739920"/>
+            <a:ext cx="329184" cy="329184"/>
           </a:xfrm>
           <a:prstGeom prst="ellipse">
             <a:avLst/>
@@ -8633,8 +8633,8 @@
         </p:nvSpPr>
         <p:spPr>
           <a:xfrm>
-            <a:off x="1457609" y="2207362"/>
-            <a:ext cx="262572" cy="218810"/>
+            <a:off x="667512" y="2767352"/>
+            <a:ext cx="329184" cy="274320"/>
           </a:xfrm>
           <a:prstGeom prst="rect">
             <a:avLst/>
@@ -8650,7 +8650,7 @@
               <a:buNone/>
             </a:pPr>
             <a:r>
-              <a:rPr lang="en-US" sz="960" b="1" dirty="0">
+              <a:rPr lang="en-US" sz="1200" b="1" dirty="0">
                 <a:solidFill>
                   <a:srgbClr val="FFFFFF"/>
                 </a:solidFill>
@@ -8660,7 +8660,7 @@
               </a:rPr>
               <a:t>2</a:t>
             </a:r>
-            <a:endParaRPr lang="en-US" sz="960" dirty="0"/>
+            <a:endParaRPr lang="en-US" sz="1200" dirty="0"/>
           </a:p>
         </p:txBody>
       </p:sp>
@@ -8672,8 +8672,8 @@
         </p:nvSpPr>
         <p:spPr>
           <a:xfrm>
-            <a:off x="1851466" y="2105250"/>
-            <a:ext cx="5820338" cy="437619"/>
+            <a:off x="1161288" y="2639336"/>
+            <a:ext cx="7296912" cy="548640"/>
           </a:xfrm>
           <a:prstGeom prst="rect">
             <a:avLst/>
@@ -8692,7 +8692,7 @@
               <a:buNone/>
             </a:pPr>
             <a:r>
-              <a:rPr lang="en-US" sz="1000" b="1" dirty="0">
+              <a:rPr lang="en-US" sz="1250" b="1" dirty="0">
                 <a:solidFill>
                   <a:srgbClr val="FFFFFF"/>
                 </a:solidFill>
@@ -8702,7 +8702,7 @@
               </a:rPr>
               <a:t>Đổi 1024 → 2048 điểm mỗi vòng, chép lại số điểm mới</a:t>
             </a:r>
-            <a:endParaRPr lang="en-US" sz="1000" dirty="0"/>
+            <a:endParaRPr lang="en-US" sz="1250" dirty="0"/>
           </a:p>
           <a:p>
             <a:pPr indent="0" marL="0">
@@ -8712,7 +8712,7 @@
               <a:buNone/>
             </a:pPr>
             <a:r>
-              <a:rPr lang="en-US" sz="920" dirty="0">
+              <a:rPr lang="en-US" sz="1150" dirty="0">
                 <a:solidFill>
                   <a:srgbClr val="AFC3D4"/>
                 </a:solidFill>
@@ -8722,7 +8722,7 @@
               </a:rPr>
               <a:t>把每圈 1024 點改成 2048，抄下新的點數</a:t>
             </a:r>
-            <a:endParaRPr lang="en-US" sz="1000" dirty="0"/>
+            <a:endParaRPr lang="en-US" sz="1250" dirty="0"/>
           </a:p>
         </p:txBody>
       </p:sp>
@@ -8734,8 +8734,8 @@
         </p:nvSpPr>
         <p:spPr>
           <a:xfrm>
-            <a:off x="1326323" y="2637687"/>
-            <a:ext cx="6491354" cy="495969"/>
+            <a:off x="502920" y="3306848"/>
+            <a:ext cx="8138160" cy="621792"/>
           </a:xfrm>
           <a:prstGeom prst="roundRect">
             <a:avLst>
@@ -8756,8 +8756,8 @@
         </p:nvSpPr>
         <p:spPr>
           <a:xfrm>
-            <a:off x="1457609" y="2754386"/>
-            <a:ext cx="262572" cy="262572"/>
+            <a:off x="667512" y="3453152"/>
+            <a:ext cx="329184" cy="329184"/>
           </a:xfrm>
           <a:prstGeom prst="ellipse">
             <a:avLst/>
@@ -8776,8 +8776,8 @@
         </p:nvSpPr>
         <p:spPr>
           <a:xfrm>
-            <a:off x="1457609" y="2776267"/>
-            <a:ext cx="262572" cy="218810"/>
+            <a:off x="667512" y="3480584"/>
+            <a:ext cx="329184" cy="274320"/>
           </a:xfrm>
           <a:prstGeom prst="rect">
             <a:avLst/>
@@ -8793,7 +8793,7 @@
               <a:buNone/>
             </a:pPr>
             <a:r>
-              <a:rPr lang="en-US" sz="960" b="1" dirty="0">
+              <a:rPr lang="en-US" sz="1200" b="1" dirty="0">
                 <a:solidFill>
                   <a:srgbClr val="FFFFFF"/>
                 </a:solidFill>
@@ -8803,7 +8803,7 @@
               </a:rPr>
               <a:t>3</a:t>
             </a:r>
-            <a:endParaRPr lang="en-US" sz="960" dirty="0"/>
+            <a:endParaRPr lang="en-US" sz="1200" dirty="0"/>
           </a:p>
         </p:txBody>
       </p:sp>
@@ -8815,8 +8815,8 @@
         </p:nvSpPr>
         <p:spPr>
           <a:xfrm>
-            <a:off x="1851466" y="2674156"/>
-            <a:ext cx="5820338" cy="437619"/>
+            <a:off x="1161288" y="3352568"/>
+            <a:ext cx="7296912" cy="548640"/>
           </a:xfrm>
           <a:prstGeom prst="rect">
             <a:avLst/>
@@ -8835,7 +8835,7 @@
               <a:buNone/>
             </a:pPr>
             <a:r>
-              <a:rPr lang="en-US" sz="1000" b="1" dirty="0">
+              <a:rPr lang="en-US" sz="1250" b="1" dirty="0">
                 <a:solidFill>
                   <a:srgbClr val="FFFFFF"/>
                 </a:solidFill>
@@ -8845,7 +8845,7 @@
               </a:rPr>
               <a:t>Viết một câu: đổi chế độ có phải trả giá gì không?</a:t>
             </a:r>
-            <a:endParaRPr lang="en-US" sz="1000" dirty="0"/>
+            <a:endParaRPr lang="en-US" sz="1250" dirty="0"/>
           </a:p>
           <a:p>
             <a:pPr indent="0" marL="0">
@@ -8855,7 +8855,7 @@
               <a:buNone/>
             </a:pPr>
             <a:r>
-              <a:rPr lang="en-US" sz="920" dirty="0">
+              <a:rPr lang="en-US" sz="1150" dirty="0">
                 <a:solidFill>
                   <a:srgbClr val="AFC3D4"/>
                 </a:solidFill>
@@ -8865,7 +8865,7 @@
               </a:rPr>
               <a:t>寫一句：換模式要付什麼代價？</a:t>
             </a:r>
-            <a:endParaRPr lang="en-US" sz="1000" dirty="0"/>
+            <a:endParaRPr lang="en-US" sz="1250" dirty="0"/>
           </a:p>
         </p:txBody>
       </p:sp>
@@ -8877,8 +8877,8 @@
         </p:nvSpPr>
         <p:spPr>
           <a:xfrm>
-            <a:off x="1326323" y="3235767"/>
-            <a:ext cx="6418418" cy="364683"/>
+            <a:off x="502920" y="4056656"/>
+            <a:ext cx="8046720" cy="457200"/>
           </a:xfrm>
           <a:prstGeom prst="rect">
             <a:avLst/>
@@ -8897,7 +8897,7 @@
               <a:buNone/>
             </a:pPr>
             <a:r>
-              <a:rPr lang="en-US" sz="1000" b="1" dirty="0">
+              <a:rPr lang="en-US" sz="1250" b="1" dirty="0">
                 <a:solidFill>
                   <a:srgbClr val="FFB020"/>
                 </a:solidFill>
@@ -8907,7 +8907,7 @@
               </a:rPr>
               <a:t>Cùng một phần cứng, chỉ đổi chế độ, kết luận lật ngược. Đây là chỗ quan trọng nhất hôm nay.</a:t>
             </a:r>
-            <a:endParaRPr lang="en-US" sz="1000" dirty="0"/>
+            <a:endParaRPr lang="en-US" sz="1250" dirty="0"/>
           </a:p>
           <a:p>
             <a:pPr indent="0" marL="0">
@@ -8917,7 +8917,7 @@
               <a:buNone/>
             </a:pPr>
             <a:r>
-              <a:rPr lang="en-US" sz="920" dirty="0">
+              <a:rPr lang="en-US" sz="1150" dirty="0">
                 <a:solidFill>
                   <a:srgbClr val="FFB020"/>
                 </a:solidFill>
@@ -8927,7 +8927,7 @@
               </a:rPr>
               <a:t>同一個硬體，只換模式，結論就翻過來。這是今天最重要的一格。</a:t>
             </a:r>
-            <a:endParaRPr lang="en-US" sz="1000" dirty="0"/>
+            <a:endParaRPr lang="en-US" sz="1250" dirty="0"/>
           </a:p>
         </p:txBody>
       </p:sp>
@@ -8939,8 +8939,8 @@
         </p:nvSpPr>
         <p:spPr>
           <a:xfrm>
-            <a:off x="1012696" y="102111"/>
-            <a:ext cx="656429" cy="204222"/>
+            <a:off x="109728" y="128016"/>
+            <a:ext cx="822960" cy="256032"/>
           </a:xfrm>
           <a:prstGeom prst="rect">
             <a:avLst/>
@@ -8956,7 +8956,7 @@
               <a:buNone/>
             </a:pPr>
             <a:r>
-              <a:rPr lang="en-US" sz="720" dirty="0">
+              <a:rPr lang="en-US" sz="900" dirty="0">
                 <a:solidFill>
                   <a:srgbClr val="9FB3C8"/>
                 </a:solidFill>
@@ -8966,7 +8966,7 @@
               </a:rPr>
               <a:t>4 / 9</a:t>
             </a:r>
-            <a:endParaRPr lang="en-US" sz="720" dirty="0"/>
+            <a:endParaRPr lang="en-US" sz="900" dirty="0"/>
           </a:p>
         </p:txBody>
       </p:sp>
@@ -8978,8 +8978,8 @@
         </p:nvSpPr>
         <p:spPr>
           <a:xfrm>
-            <a:off x="1691006" y="102111"/>
-            <a:ext cx="1604604" cy="204222"/>
+            <a:off x="960120" y="128016"/>
+            <a:ext cx="2011680" cy="256032"/>
           </a:xfrm>
           <a:prstGeom prst="rect">
             <a:avLst/>
@@ -8995,7 +8995,7 @@
               <a:buNone/>
             </a:pPr>
             <a:r>
-              <a:rPr lang="en-US" sz="720" dirty="0">
+              <a:rPr lang="en-US" sz="900" dirty="0">
                 <a:solidFill>
                   <a:srgbClr val="9FB3C8"/>
                 </a:solidFill>
@@ -9005,7 +9005,7 @@
               </a:rPr>
               <a:t>Tiết 3 · 第 3 節</a:t>
             </a:r>
-            <a:endParaRPr lang="en-US" sz="720" dirty="0"/>
+            <a:endParaRPr lang="en-US" sz="900" dirty="0"/>
           </a:p>
         </p:txBody>
       </p:sp>
@@ -9035,7 +9035,7 @@
       </p:nvGrpSpPr>
       <p:grpSpPr>
         <a:xfrm>
-          <a:off x="925172" y="0"/>
+          <a:off x="0" y="0"/>
           <a:ext cx="1" cy="1"/>
           <a:chOff x="0" y="0"/>
           <a:chExt cx="0" cy="0"/>
@@ -9049,8 +9049,8 @@
         </p:nvSpPr>
         <p:spPr>
           <a:xfrm>
-            <a:off x="6322478" y="-1094048"/>
-            <a:ext cx="3355082" cy="3355082"/>
+            <a:off x="6766560" y="-1371600"/>
+            <a:ext cx="4206240" cy="4206240"/>
           </a:xfrm>
           <a:prstGeom prst="ellipse">
             <a:avLst/>
@@ -9074,8 +9074,8 @@
         </p:nvSpPr>
         <p:spPr>
           <a:xfrm>
-            <a:off x="7416526" y="1677541"/>
-            <a:ext cx="1896351" cy="1896351"/>
+            <a:off x="8138160" y="2103120"/>
+            <a:ext cx="2377440" cy="2377440"/>
           </a:xfrm>
           <a:prstGeom prst="ellipse">
             <a:avLst/>
@@ -9096,8 +9096,8 @@
         </p:nvSpPr>
         <p:spPr>
           <a:xfrm>
-            <a:off x="1326323" y="379270"/>
-            <a:ext cx="5397306" cy="218810"/>
+            <a:off x="502920" y="475488"/>
+            <a:ext cx="6766560" cy="274320"/>
           </a:xfrm>
           <a:prstGeom prst="rect">
             <a:avLst/>
@@ -9113,7 +9113,7 @@
               <a:buNone/>
             </a:pPr>
             <a:r>
-              <a:rPr lang="en-US" sz="1000" b="1" dirty="0">
+              <a:rPr lang="en-US" sz="1250" b="1" dirty="0">
                 <a:solidFill>
                   <a:srgbClr val="FFB020"/>
                 </a:solidFill>
@@ -9123,7 +9123,7 @@
               </a:rPr>
               <a:t>Nhiệm vụ 3 · 第三題（10 分鐘）</a:t>
             </a:r>
-            <a:endParaRPr lang="en-US" sz="1000" dirty="0"/>
+            <a:endParaRPr lang="en-US" sz="1250" dirty="0"/>
           </a:p>
         </p:txBody>
       </p:sp>
@@ -9135,8 +9135,8 @@
         </p:nvSpPr>
         <p:spPr>
           <a:xfrm>
-            <a:off x="1326323" y="627254"/>
-            <a:ext cx="6418418" cy="977350"/>
+            <a:off x="502920" y="786384"/>
+            <a:ext cx="8046720" cy="1225296"/>
           </a:xfrm>
           <a:prstGeom prst="rect">
             <a:avLst/>
@@ -9155,7 +9155,7 @@
               <a:buNone/>
             </a:pPr>
             <a:r>
-              <a:rPr lang="en-US" sz="1830" b="1" dirty="0">
+              <a:rPr lang="en-US" sz="2300" b="1" dirty="0">
                 <a:solidFill>
                   <a:srgbClr val="FFFFFF"/>
                 </a:solidFill>
@@ -9165,7 +9165,7 @@
               </a:rPr>
               <a:t>Cao tốc, 100 km/h, phải thấy xe ở 150 m. Model nào còn sống sót?</a:t>
             </a:r>
-            <a:endParaRPr lang="en-US" sz="1830" dirty="0"/>
+            <a:endParaRPr lang="en-US" sz="2300" dirty="0"/>
           </a:p>
           <a:p>
             <a:pPr indent="0" marL="0">
@@ -9175,7 +9175,7 @@
               <a:buNone/>
             </a:pPr>
             <a:r>
-              <a:rPr lang="en-US" sz="1200" dirty="0">
+              <a:rPr lang="en-US" sz="1500" dirty="0">
                 <a:solidFill>
                   <a:srgbClr val="AFC3D4"/>
                 </a:solidFill>
@@ -9185,7 +9185,7 @@
               </a:rPr>
               <a:t>國道，時速 100，要在 150 公尺外看到車。哪一顆還活著？</a:t>
             </a:r>
-            <a:endParaRPr lang="en-US" sz="1830" dirty="0"/>
+            <a:endParaRPr lang="en-US" sz="2300" dirty="0"/>
           </a:p>
         </p:txBody>
       </p:sp>
@@ -9197,8 +9197,8 @@
         </p:nvSpPr>
         <p:spPr>
           <a:xfrm>
-            <a:off x="1326323" y="1499877"/>
-            <a:ext cx="6491354" cy="495969"/>
+            <a:off x="502920" y="1880384"/>
+            <a:ext cx="8138160" cy="621792"/>
           </a:xfrm>
           <a:prstGeom prst="roundRect">
             <a:avLst>
@@ -9219,8 +9219,8 @@
         </p:nvSpPr>
         <p:spPr>
           <a:xfrm>
-            <a:off x="1457609" y="1616575"/>
-            <a:ext cx="262572" cy="262572"/>
+            <a:off x="667512" y="2026688"/>
+            <a:ext cx="329184" cy="329184"/>
           </a:xfrm>
           <a:prstGeom prst="ellipse">
             <a:avLst/>
@@ -9239,8 +9239,8 @@
         </p:nvSpPr>
         <p:spPr>
           <a:xfrm>
-            <a:off x="1457609" y="1638456"/>
-            <a:ext cx="262572" cy="218810"/>
+            <a:off x="667512" y="2054120"/>
+            <a:ext cx="329184" cy="274320"/>
           </a:xfrm>
           <a:prstGeom prst="rect">
             <a:avLst/>
@@ -9256,7 +9256,7 @@
               <a:buNone/>
             </a:pPr>
             <a:r>
-              <a:rPr lang="en-US" sz="960" b="1" dirty="0">
+              <a:rPr lang="en-US" sz="1200" b="1" dirty="0">
                 <a:solidFill>
                   <a:srgbClr val="FFFFFF"/>
                 </a:solidFill>
@@ -9266,7 +9266,7 @@
               </a:rPr>
               <a:t>1</a:t>
             </a:r>
-            <a:endParaRPr lang="en-US" sz="960" dirty="0"/>
+            <a:endParaRPr lang="en-US" sz="1200" dirty="0"/>
           </a:p>
         </p:txBody>
       </p:sp>
@@ -9278,8 +9278,8 @@
         </p:nvSpPr>
         <p:spPr>
           <a:xfrm>
-            <a:off x="1851466" y="1536345"/>
-            <a:ext cx="5820338" cy="437619"/>
+            <a:off x="1161288" y="1926104"/>
+            <a:ext cx="7296912" cy="548640"/>
           </a:xfrm>
           <a:prstGeom prst="rect">
             <a:avLst/>
@@ -9298,7 +9298,7 @@
               <a:buNone/>
             </a:pPr>
             <a:r>
-              <a:rPr lang="en-US" sz="1000" b="1" dirty="0">
+              <a:rPr lang="en-US" sz="1250" b="1" dirty="0">
                 <a:solidFill>
                   <a:srgbClr val="FFFFFF"/>
                 </a:solidFill>
@@ -9308,7 +9308,7 @@
               </a:rPr>
               <a:t>Chép quãng đường phanh mà công cụ tính ra</a:t>
             </a:r>
-            <a:endParaRPr lang="en-US" sz="1000" dirty="0"/>
+            <a:endParaRPr lang="en-US" sz="1250" dirty="0"/>
           </a:p>
           <a:p>
             <a:pPr indent="0" marL="0">
@@ -9318,7 +9318,7 @@
               <a:buNone/>
             </a:pPr>
             <a:r>
-              <a:rPr lang="en-US" sz="920" dirty="0">
+              <a:rPr lang="en-US" sz="1150" dirty="0">
                 <a:solidFill>
                   <a:srgbClr val="AFC3D4"/>
                 </a:solidFill>
@@ -9328,7 +9328,7 @@
               </a:rPr>
               <a:t>抄下工具算出來的煞停距離</a:t>
             </a:r>
-            <a:endParaRPr lang="en-US" sz="1000" dirty="0"/>
+            <a:endParaRPr lang="en-US" sz="1250" dirty="0"/>
           </a:p>
         </p:txBody>
       </p:sp>
@@ -9340,8 +9340,8 @@
         </p:nvSpPr>
         <p:spPr>
           <a:xfrm>
-            <a:off x="1326323" y="2068782"/>
-            <a:ext cx="6491354" cy="495969"/>
+            <a:off x="502920" y="2593616"/>
+            <a:ext cx="8138160" cy="621792"/>
           </a:xfrm>
           <a:prstGeom prst="roundRect">
             <a:avLst>
@@ -9362,8 +9362,8 @@
         </p:nvSpPr>
         <p:spPr>
           <a:xfrm>
-            <a:off x="1457609" y="2185481"/>
-            <a:ext cx="262572" cy="262572"/>
+            <a:off x="667512" y="2739920"/>
+            <a:ext cx="329184" cy="329184"/>
           </a:xfrm>
           <a:prstGeom prst="ellipse">
             <a:avLst/>
@@ -9382,8 +9382,8 @@
         </p:nvSpPr>
         <p:spPr>
           <a:xfrm>
-            <a:off x="1457609" y="2207362"/>
-            <a:ext cx="262572" cy="218810"/>
+            <a:off x="667512" y="2767352"/>
+            <a:ext cx="329184" cy="274320"/>
           </a:xfrm>
           <a:prstGeom prst="rect">
             <a:avLst/>
@@ -9399,7 +9399,7 @@
               <a:buNone/>
             </a:pPr>
             <a:r>
-              <a:rPr lang="en-US" sz="960" b="1" dirty="0">
+              <a:rPr lang="en-US" sz="1200" b="1" dirty="0">
                 <a:solidFill>
                   <a:srgbClr val="FFFFFF"/>
                 </a:solidFill>
@@ -9409,7 +9409,7 @@
               </a:rPr>
               <a:t>2</a:t>
             </a:r>
-            <a:endParaRPr lang="en-US" sz="960" dirty="0"/>
+            <a:endParaRPr lang="en-US" sz="1200" dirty="0"/>
           </a:p>
         </p:txBody>
       </p:sp>
@@ -9421,8 +9421,8 @@
         </p:nvSpPr>
         <p:spPr>
           <a:xfrm>
-            <a:off x="1851466" y="2105250"/>
-            <a:ext cx="5820338" cy="437619"/>
+            <a:off x="1161288" y="2639336"/>
+            <a:ext cx="7296912" cy="548640"/>
           </a:xfrm>
           <a:prstGeom prst="rect">
             <a:avLst/>
@@ -9441,7 +9441,7 @@
               <a:buNone/>
             </a:pPr>
             <a:r>
-              <a:rPr lang="en-US" sz="1000" b="1" dirty="0">
+              <a:rPr lang="en-US" sz="1250" b="1" dirty="0">
                 <a:solidFill>
                   <a:srgbClr val="FFFFFF"/>
                 </a:solidFill>
@@ -9451,7 +9451,7 @@
               </a:rPr>
               <a:t>Camera tắc ở đâu? LD-16 tắc ở đâu? Hai chỗ khác nhau</a:t>
             </a:r>
-            <a:endParaRPr lang="en-US" sz="1000" dirty="0"/>
+            <a:endParaRPr lang="en-US" sz="1250" dirty="0"/>
           </a:p>
           <a:p>
             <a:pPr indent="0" marL="0">
@@ -9461,7 +9461,7 @@
               <a:buNone/>
             </a:pPr>
             <a:r>
-              <a:rPr lang="en-US" sz="920" dirty="0">
+              <a:rPr lang="en-US" sz="1150" dirty="0">
                 <a:solidFill>
                   <a:srgbClr val="AFC3D4"/>
                 </a:solidFill>
@@ -9471,7 +9471,7 @@
               </a:rPr>
               <a:t>相機卡在哪？LD-16 卡在哪？兩個卡的地方不一樣</a:t>
             </a:r>
-            <a:endParaRPr lang="en-US" sz="1000" dirty="0"/>
+            <a:endParaRPr lang="en-US" sz="1250" dirty="0"/>
           </a:p>
         </p:txBody>
       </p:sp>
@@ -9483,8 +9483,8 @@
         </p:nvSpPr>
         <p:spPr>
           <a:xfrm>
-            <a:off x="1326323" y="2637687"/>
-            <a:ext cx="6491354" cy="495969"/>
+            <a:off x="502920" y="3306848"/>
+            <a:ext cx="8138160" cy="621792"/>
           </a:xfrm>
           <a:prstGeom prst="roundRect">
             <a:avLst>
@@ -9505,8 +9505,8 @@
         </p:nvSpPr>
         <p:spPr>
           <a:xfrm>
-            <a:off x="1457609" y="2754386"/>
-            <a:ext cx="262572" cy="262572"/>
+            <a:off x="667512" y="3453152"/>
+            <a:ext cx="329184" cy="329184"/>
           </a:xfrm>
           <a:prstGeom prst="ellipse">
             <a:avLst/>
@@ -9525,8 +9525,8 @@
         </p:nvSpPr>
         <p:spPr>
           <a:xfrm>
-            <a:off x="1457609" y="2776267"/>
-            <a:ext cx="262572" cy="218810"/>
+            <a:off x="667512" y="3480584"/>
+            <a:ext cx="329184" cy="274320"/>
           </a:xfrm>
           <a:prstGeom prst="rect">
             <a:avLst/>
@@ -9542,7 +9542,7 @@
               <a:buNone/>
             </a:pPr>
             <a:r>
-              <a:rPr lang="en-US" sz="960" b="1" dirty="0">
+              <a:rPr lang="en-US" sz="1200" b="1" dirty="0">
                 <a:solidFill>
                   <a:srgbClr val="FFFFFF"/>
                 </a:solidFill>
@@ -9552,7 +9552,7 @@
               </a:rPr>
               <a:t>3</a:t>
             </a:r>
-            <a:endParaRPr lang="en-US" sz="960" dirty="0"/>
+            <a:endParaRPr lang="en-US" sz="1200" dirty="0"/>
           </a:p>
         </p:txBody>
       </p:sp>
@@ -9564,8 +9564,8 @@
         </p:nvSpPr>
         <p:spPr>
           <a:xfrm>
-            <a:off x="1851466" y="2674156"/>
-            <a:ext cx="5820338" cy="437619"/>
+            <a:off x="1161288" y="3352568"/>
+            <a:ext cx="7296912" cy="548640"/>
           </a:xfrm>
           <a:prstGeom prst="rect">
             <a:avLst/>
@@ -9584,7 +9584,7 @@
               <a:buNone/>
             </a:pPr>
             <a:r>
-              <a:rPr lang="en-US" sz="1000" b="1" dirty="0">
+              <a:rPr lang="en-US" sz="1250" b="1" dirty="0">
                 <a:solidFill>
                   <a:srgbClr val="FFFFFF"/>
                 </a:solidFill>
@@ -9594,7 +9594,7 @@
               </a:rPr>
               <a:t>AT128 qua được, nhưng chỉ còn mấy điểm trên chiếc xe ở 150 m?</a:t>
             </a:r>
-            <a:endParaRPr lang="en-US" sz="1000" dirty="0"/>
+            <a:endParaRPr lang="en-US" sz="1250" dirty="0"/>
           </a:p>
           <a:p>
             <a:pPr indent="0" marL="0">
@@ -9604,7 +9604,7 @@
               <a:buNone/>
             </a:pPr>
             <a:r>
-              <a:rPr lang="en-US" sz="920" dirty="0">
+              <a:rPr lang="en-US" sz="1150" dirty="0">
                 <a:solidFill>
                   <a:srgbClr val="AFC3D4"/>
                 </a:solidFill>
@@ -9614,7 +9614,7 @@
               </a:rPr>
               <a:t>AT128 過了，可是 150 公尺外那台車身上只剩幾個點？</a:t>
             </a:r>
-            <a:endParaRPr lang="en-US" sz="1000" dirty="0"/>
+            <a:endParaRPr lang="en-US" sz="1250" dirty="0"/>
           </a:p>
         </p:txBody>
       </p:sp>
@@ -9626,8 +9626,8 @@
         </p:nvSpPr>
         <p:spPr>
           <a:xfrm>
-            <a:off x="1326323" y="3235767"/>
-            <a:ext cx="6418418" cy="364683"/>
+            <a:off x="502920" y="4056656"/>
+            <a:ext cx="8046720" cy="457200"/>
           </a:xfrm>
           <a:prstGeom prst="rect">
             <a:avLst/>
@@ -9646,7 +9646,7 @@
               <a:buNone/>
             </a:pPr>
             <a:r>
-              <a:rPr lang="en-US" sz="1000" b="1" dirty="0">
+              <a:rPr lang="en-US" sz="1250" b="1" dirty="0">
                 <a:solidFill>
                   <a:srgbClr val="FFB020"/>
                 </a:solidFill>
@@ -9656,7 +9656,7 @@
               </a:rPr>
               <a:t>Ở tốc độ cao, «đo được xa» và «nhìn được rõ» tách hẳn ra làm hai chuyện.</a:t>
             </a:r>
-            <a:endParaRPr lang="en-US" sz="1000" dirty="0"/>
+            <a:endParaRPr lang="en-US" sz="1250" dirty="0"/>
           </a:p>
           <a:p>
             <a:pPr indent="0" marL="0">
@@ -9666,7 +9666,7 @@
               <a:buNone/>
             </a:pPr>
             <a:r>
-              <a:rPr lang="en-US" sz="920" dirty="0">
+              <a:rPr lang="en-US" sz="1150" dirty="0">
                 <a:solidFill>
                   <a:srgbClr val="FFB020"/>
                 </a:solidFill>
@@ -9676,7 +9676,7 @@
               </a:rPr>
               <a:t>到了高速，「測得到遠」和「看得清楚」就完全變成兩件事了。</a:t>
             </a:r>
-            <a:endParaRPr lang="en-US" sz="1000" dirty="0"/>
+            <a:endParaRPr lang="en-US" sz="1250" dirty="0"/>
           </a:p>
         </p:txBody>
       </p:sp>
@@ -9688,8 +9688,8 @@
         </p:nvSpPr>
         <p:spPr>
           <a:xfrm>
-            <a:off x="1012696" y="102111"/>
-            <a:ext cx="656429" cy="204222"/>
+            <a:off x="109728" y="128016"/>
+            <a:ext cx="822960" cy="256032"/>
           </a:xfrm>
           <a:prstGeom prst="rect">
             <a:avLst/>
@@ -9705,7 +9705,7 @@
               <a:buNone/>
             </a:pPr>
             <a:r>
-              <a:rPr lang="en-US" sz="720" dirty="0">
+              <a:rPr lang="en-US" sz="900" dirty="0">
                 <a:solidFill>
                   <a:srgbClr val="9FB3C8"/>
                 </a:solidFill>
@@ -9715,7 +9715,7 @@
               </a:rPr>
               <a:t>5 / 9</a:t>
             </a:r>
-            <a:endParaRPr lang="en-US" sz="720" dirty="0"/>
+            <a:endParaRPr lang="en-US" sz="900" dirty="0"/>
           </a:p>
         </p:txBody>
       </p:sp>
@@ -9727,8 +9727,8 @@
         </p:nvSpPr>
         <p:spPr>
           <a:xfrm>
-            <a:off x="1691006" y="102111"/>
-            <a:ext cx="1604604" cy="204222"/>
+            <a:off x="960120" y="128016"/>
+            <a:ext cx="2011680" cy="256032"/>
           </a:xfrm>
           <a:prstGeom prst="rect">
             <a:avLst/>
@@ -9744,7 +9744,7 @@
               <a:buNone/>
             </a:pPr>
             <a:r>
-              <a:rPr lang="en-US" sz="720" dirty="0">
+              <a:rPr lang="en-US" sz="900" dirty="0">
                 <a:solidFill>
                   <a:srgbClr val="9FB3C8"/>
                 </a:solidFill>
@@ -9754,7 +9754,7 @@
               </a:rPr>
               <a:t>Tiết 3 · 第 3 節</a:t>
             </a:r>
-            <a:endParaRPr lang="en-US" sz="720" dirty="0"/>
+            <a:endParaRPr lang="en-US" sz="900" dirty="0"/>
           </a:p>
         </p:txBody>
       </p:sp>
@@ -9777,7 +9777,7 @@
       </p:nvGrpSpPr>
       <p:grpSpPr>
         <a:xfrm>
-          <a:off x="927820" y="0"/>
+          <a:off x="0" y="0"/>
           <a:ext cx="1" cy="1"/>
           <a:chOff x="0" y="0"/>
           <a:chExt cx="0" cy="0"/>
@@ -9791,8 +9791,8 @@
         </p:nvSpPr>
         <p:spPr>
           <a:xfrm>
-            <a:off x="1328680" y="233228"/>
-            <a:ext cx="6486641" cy="670529"/>
+            <a:off x="502920" y="292608"/>
+            <a:ext cx="8138160" cy="841248"/>
           </a:xfrm>
           <a:prstGeom prst="rect">
             <a:avLst/>
@@ -9811,7 +9811,7 @@
               <a:buNone/>
             </a:pPr>
             <a:r>
-              <a:rPr lang="en-US" sz="1750" b="1" dirty="0">
+              <a:rPr lang="en-US" sz="2200" b="1" dirty="0">
                 <a:solidFill>
                   <a:srgbClr val="0B1F3A"/>
                 </a:solidFill>
@@ -9821,7 +9821,7 @@
               </a:rPr>
               <a:t>Không có model nào thắng cả ba tình huống</a:t>
             </a:r>
-            <a:endParaRPr lang="en-US" sz="1750" dirty="0"/>
+            <a:endParaRPr lang="en-US" sz="2200" dirty="0"/>
           </a:p>
           <a:p>
             <a:pPr indent="0" marL="0">
@@ -9831,7 +9831,7 @@
               <a:buNone/>
             </a:pPr>
             <a:r>
-              <a:rPr lang="en-US" sz="1080" dirty="0">
+              <a:rPr lang="en-US" sz="1350" dirty="0">
                 <a:solidFill>
                   <a:srgbClr val="5F7183"/>
                 </a:solidFill>
@@ -9841,7 +9841,7 @@
               </a:rPr>
               <a:t>沒有一顆感測器三個情境都贏</a:t>
             </a:r>
-            <a:endParaRPr lang="en-US" sz="1750" dirty="0"/>
+            <a:endParaRPr lang="en-US" sz="2200" dirty="0"/>
           </a:p>
         </p:txBody>
       </p:sp>
@@ -9853,8 +9853,8 @@
         </p:nvSpPr>
         <p:spPr>
           <a:xfrm>
-            <a:off x="1328680" y="1049524"/>
-            <a:ext cx="2842461" cy="1792937"/>
+            <a:off x="502920" y="1316736"/>
+            <a:ext cx="3566160" cy="2249424"/>
           </a:xfrm>
           <a:prstGeom prst="roundRect">
             <a:avLst>
@@ -9875,8 +9875,8 @@
         </p:nvSpPr>
         <p:spPr>
           <a:xfrm>
-            <a:off x="1459870" y="1151561"/>
-            <a:ext cx="2580080" cy="262381"/>
+            <a:off x="667512" y="1444752"/>
+            <a:ext cx="3236976" cy="329184"/>
           </a:xfrm>
           <a:prstGeom prst="rect">
             <a:avLst/>
@@ -9895,7 +9895,7 @@
               <a:buNone/>
             </a:pPr>
             <a:r>
-              <a:rPr lang="en-US" sz="840" b="1" dirty="0">
+              <a:rPr lang="en-US" sz="1050" b="1" dirty="0">
                 <a:solidFill>
                   <a:srgbClr val="00A896"/>
                 </a:solidFill>
@@ -9905,7 +9905,7 @@
               </a:rPr>
               <a:t>Cái ta vừa làm</a:t>
             </a:r>
-            <a:endParaRPr lang="en-US" sz="840" dirty="0"/>
+            <a:endParaRPr lang="en-US" sz="1050" dirty="0"/>
           </a:p>
           <a:p>
             <a:pPr indent="0" marL="0">
@@ -9915,7 +9915,7 @@
               <a:buNone/>
             </a:pPr>
             <a:r>
-              <a:rPr lang="en-US" sz="760" dirty="0">
+              <a:rPr lang="en-US" sz="950" dirty="0">
                 <a:solidFill>
                   <a:srgbClr val="00A896"/>
                 </a:solidFill>
@@ -9925,7 +9925,7 @@
               </a:rPr>
               <a:t>我們剛剛做的事</a:t>
             </a:r>
-            <a:endParaRPr lang="en-US" sz="840" dirty="0"/>
+            <a:endParaRPr lang="en-US" sz="1050" dirty="0"/>
           </a:p>
         </p:txBody>
       </p:sp>
@@ -9937,8 +9937,8 @@
         </p:nvSpPr>
         <p:spPr>
           <a:xfrm>
-            <a:off x="1459870" y="1472249"/>
-            <a:ext cx="2580080" cy="451878"/>
+            <a:off x="667512" y="1847088"/>
+            <a:ext cx="3236976" cy="566928"/>
           </a:xfrm>
           <a:prstGeom prst="rect">
             <a:avLst/>
@@ -9954,7 +9954,7 @@
               <a:buNone/>
             </a:pPr>
             <a:r>
-              <a:rPr lang="en-US" sz="2150" b="1" dirty="0">
+              <a:rPr lang="en-US" sz="2700" b="1" dirty="0">
                 <a:solidFill>
                   <a:srgbClr val="FFFFFF"/>
                 </a:solidFill>
@@ -9964,7 +9964,7 @@
               </a:rPr>
               <a:t>4 × 3</a:t>
             </a:r>
-            <a:endParaRPr lang="en-US" sz="2150" dirty="0"/>
+            <a:endParaRPr lang="en-US" sz="2700" dirty="0"/>
           </a:p>
         </p:txBody>
       </p:sp>
@@ -9976,8 +9976,8 @@
         </p:nvSpPr>
         <p:spPr>
           <a:xfrm>
-            <a:off x="1459870" y="1953281"/>
-            <a:ext cx="2580080" cy="320688"/>
+            <a:off x="667512" y="2450592"/>
+            <a:ext cx="3236976" cy="402336"/>
           </a:xfrm>
           <a:prstGeom prst="rect">
             <a:avLst/>
@@ -9996,7 +9996,7 @@
               <a:buNone/>
             </a:pPr>
             <a:r>
-              <a:rPr lang="en-US" sz="920" b="1" dirty="0">
+              <a:rPr lang="en-US" sz="1150" b="1" dirty="0">
                 <a:solidFill>
                   <a:srgbClr val="AFC3D4"/>
                 </a:solidFill>
@@ -10006,7 +10006,7 @@
               </a:rPr>
               <a:t>bốn model, ba tình huống</a:t>
             </a:r>
-            <a:endParaRPr lang="en-US" sz="920" dirty="0"/>
+            <a:endParaRPr lang="en-US" sz="1150" dirty="0"/>
           </a:p>
           <a:p>
             <a:pPr indent="0" marL="0">
@@ -10016,7 +10016,7 @@
               <a:buNone/>
             </a:pPr>
             <a:r>
-              <a:rPr lang="en-US" sz="840" dirty="0">
+              <a:rPr lang="en-US" sz="1050" dirty="0">
                 <a:solidFill>
                   <a:srgbClr val="8AA0B4"/>
                 </a:solidFill>
@@ -10026,7 +10026,7 @@
               </a:rPr>
               <a:t>四個型號、三個情境</a:t>
             </a:r>
-            <a:endParaRPr lang="en-US" sz="920" dirty="0"/>
+            <a:endParaRPr lang="en-US" sz="1150" dirty="0"/>
           </a:p>
         </p:txBody>
       </p:sp>
@@ -10038,8 +10038,8 @@
         </p:nvSpPr>
         <p:spPr>
           <a:xfrm>
-            <a:off x="1459870" y="2405159"/>
-            <a:ext cx="2580080" cy="320688"/>
+            <a:off x="667512" y="3017520"/>
+            <a:ext cx="3236976" cy="402336"/>
           </a:xfrm>
           <a:prstGeom prst="rect">
             <a:avLst/>
@@ -10058,7 +10058,7 @@
               <a:buNone/>
             </a:pPr>
             <a:r>
-              <a:rPr lang="en-US" sz="800" b="1" dirty="0">
+              <a:rPr lang="en-US" sz="1000" b="1" dirty="0">
                 <a:solidFill>
                   <a:srgbClr val="7E93A6"/>
                 </a:solidFill>
@@ -10068,7 +10068,7 @@
               </a:rPr>
               <a:t>AT128 qua cả ba · camera hai · OS1 một · LD-16 không cái nào</a:t>
             </a:r>
-            <a:endParaRPr lang="en-US" sz="800" dirty="0"/>
+            <a:endParaRPr lang="en-US" sz="1000" dirty="0"/>
           </a:p>
           <a:p>
             <a:pPr indent="0" marL="0">
@@ -10078,7 +10078,7 @@
               <a:buNone/>
             </a:pPr>
             <a:r>
-              <a:rPr lang="en-US" sz="720" dirty="0">
+              <a:rPr lang="en-US" sz="900" dirty="0">
                 <a:solidFill>
                   <a:srgbClr val="7E93A6"/>
                 </a:solidFill>
@@ -10088,7 +10088,7 @@
               </a:rPr>
               <a:t>AT128 三個都過・相機兩個・OS1 一個・LD-16 都沒過</a:t>
             </a:r>
-            <a:endParaRPr lang="en-US" sz="800" dirty="0"/>
+            <a:endParaRPr lang="en-US" sz="1000" dirty="0"/>
           </a:p>
         </p:txBody>
       </p:sp>
@@ -10100,8 +10100,8 @@
         </p:nvSpPr>
         <p:spPr>
           <a:xfrm>
-            <a:off x="4265889" y="1829378"/>
-            <a:ext cx="612222" cy="233228"/>
+            <a:off x="4187952" y="2295144"/>
+            <a:ext cx="768096" cy="292608"/>
           </a:xfrm>
           <a:prstGeom prst="rightArrow">
             <a:avLst/>
@@ -10120,8 +10120,8 @@
         </p:nvSpPr>
         <p:spPr>
           <a:xfrm flipH="1">
-            <a:off x="4411656" y="1785648"/>
-            <a:ext cx="320688" cy="320688"/>
+            <a:off x="4370832" y="2240280"/>
+            <a:ext cx="402336" cy="402336"/>
           </a:xfrm>
           <a:prstGeom prst="line">
             <a:avLst/>
@@ -10143,8 +10143,8 @@
         </p:nvSpPr>
         <p:spPr>
           <a:xfrm>
-            <a:off x="4411656" y="1785648"/>
-            <a:ext cx="320688" cy="320688"/>
+            <a:off x="4370832" y="2240280"/>
+            <a:ext cx="402336" cy="402336"/>
           </a:xfrm>
           <a:prstGeom prst="line">
             <a:avLst/>
@@ -10166,8 +10166,8 @@
         </p:nvSpPr>
         <p:spPr>
           <a:xfrm>
-            <a:off x="4972860" y="1049524"/>
-            <a:ext cx="2842461" cy="1792937"/>
+            <a:off x="5074920" y="1316736"/>
+            <a:ext cx="3566160" cy="2249424"/>
           </a:xfrm>
           <a:prstGeom prst="roundRect">
             <a:avLst>
@@ -10193,8 +10193,8 @@
         </p:nvSpPr>
         <p:spPr>
           <a:xfrm>
-            <a:off x="5104050" y="1151561"/>
-            <a:ext cx="2580080" cy="262381"/>
+            <a:off x="5239512" y="1444752"/>
+            <a:ext cx="3236976" cy="329184"/>
           </a:xfrm>
           <a:prstGeom prst="rect">
             <a:avLst/>
@@ -10213,7 +10213,7 @@
               <a:buNone/>
             </a:pPr>
             <a:r>
-              <a:rPr lang="en-US" sz="840" b="1" dirty="0">
+              <a:rPr lang="en-US" sz="1050" b="1" dirty="0">
                 <a:solidFill>
                   <a:srgbClr val="D9463E"/>
                 </a:solidFill>
@@ -10223,7 +10223,7 @@
               </a:rPr>
               <a:t>Nhưng câu hỏi thật là…</a:t>
             </a:r>
-            <a:endParaRPr lang="en-US" sz="840" dirty="0"/>
+            <a:endParaRPr lang="en-US" sz="1050" dirty="0"/>
           </a:p>
           <a:p>
             <a:pPr indent="0" marL="0">
@@ -10233,7 +10233,7 @@
               <a:buNone/>
             </a:pPr>
             <a:r>
-              <a:rPr lang="en-US" sz="760" dirty="0">
+              <a:rPr lang="en-US" sz="950" dirty="0">
                 <a:solidFill>
                   <a:srgbClr val="D9463E"/>
                 </a:solidFill>
@@ -10243,7 +10243,7 @@
               </a:rPr>
               <a:t>但真正的問題是……</a:t>
             </a:r>
-            <a:endParaRPr lang="en-US" sz="840" dirty="0"/>
+            <a:endParaRPr lang="en-US" sz="1050" dirty="0"/>
           </a:p>
         </p:txBody>
       </p:sp>
@@ -10255,8 +10255,8 @@
         </p:nvSpPr>
         <p:spPr>
           <a:xfrm>
-            <a:off x="5448425" y="1863525"/>
-            <a:ext cx="295179" cy="135782"/>
+            <a:off x="5671566" y="2337984"/>
+            <a:ext cx="370332" cy="170353"/>
           </a:xfrm>
           <a:prstGeom prst="roundRect">
             <a:avLst>
@@ -10277,8 +10277,8 @@
         </p:nvSpPr>
         <p:spPr>
           <a:xfrm>
-            <a:off x="5560593" y="1890681"/>
-            <a:ext cx="100361" cy="81470"/>
+            <a:off x="5812292" y="2372054"/>
+            <a:ext cx="125913" cy="102212"/>
           </a:xfrm>
           <a:prstGeom prst="roundRect">
             <a:avLst>
@@ -10299,8 +10299,8 @@
         </p:nvSpPr>
         <p:spPr>
           <a:xfrm>
-            <a:off x="5899971" y="1998191"/>
-            <a:ext cx="68875" cy="56849"/>
+            <a:off x="6238077" y="2506937"/>
+            <a:ext cx="86411" cy="71323"/>
           </a:xfrm>
           <a:prstGeom prst="roundRect">
             <a:avLst>
@@ -10321,8 +10321,8 @@
         </p:nvSpPr>
         <p:spPr>
           <a:xfrm>
-            <a:off x="5802296" y="2139315"/>
-            <a:ext cx="68875" cy="56849"/>
+            <a:off x="6115533" y="2683992"/>
+            <a:ext cx="86411" cy="71323"/>
           </a:xfrm>
           <a:prstGeom prst="roundRect">
             <a:avLst>
@@ -10343,8 +10343,8 @@
         </p:nvSpPr>
         <p:spPr>
           <a:xfrm>
-            <a:off x="5640121" y="2217117"/>
-            <a:ext cx="68875" cy="56849"/>
+            <a:off x="5912068" y="2781602"/>
+            <a:ext cx="86411" cy="71323"/>
           </a:xfrm>
           <a:prstGeom prst="roundRect">
             <a:avLst>
@@ -10365,8 +10365,8 @@
         </p:nvSpPr>
         <p:spPr>
           <a:xfrm>
-            <a:off x="5456900" y="2210748"/>
-            <a:ext cx="68875" cy="56849"/>
+            <a:off x="5682198" y="2773612"/>
+            <a:ext cx="86411" cy="71323"/>
           </a:xfrm>
           <a:prstGeom prst="roundRect">
             <a:avLst>
@@ -10387,8 +10387,8 @@
         </p:nvSpPr>
         <p:spPr>
           <a:xfrm>
-            <a:off x="5301727" y="2121916"/>
-            <a:ext cx="68875" cy="56849"/>
+            <a:off x="5487518" y="2662163"/>
+            <a:ext cx="86411" cy="71323"/>
           </a:xfrm>
           <a:prstGeom prst="roundRect">
             <a:avLst>
@@ -10409,8 +10409,8 @@
         </p:nvSpPr>
         <p:spPr>
           <a:xfrm>
-            <a:off x="5216181" y="1974424"/>
-            <a:ext cx="68875" cy="56849"/>
+            <a:off x="5380191" y="2477118"/>
+            <a:ext cx="86411" cy="71323"/>
           </a:xfrm>
           <a:prstGeom prst="roundRect">
             <a:avLst>
@@ -10431,8 +10431,8 @@
         </p:nvSpPr>
         <p:spPr>
           <a:xfrm>
-            <a:off x="5223184" y="1807791"/>
-            <a:ext cx="68875" cy="56849"/>
+            <a:off x="5388977" y="2268060"/>
+            <a:ext cx="86411" cy="71323"/>
           </a:xfrm>
           <a:prstGeom prst="roundRect">
             <a:avLst>
@@ -10453,8 +10453,8 @@
         </p:nvSpPr>
         <p:spPr>
           <a:xfrm>
-            <a:off x="5320858" y="1666666"/>
-            <a:ext cx="68875" cy="56849"/>
+            <a:off x="5511520" y="2091005"/>
+            <a:ext cx="86411" cy="71323"/>
           </a:xfrm>
           <a:prstGeom prst="roundRect">
             <a:avLst>
@@ -10475,8 +10475,8 @@
         </p:nvSpPr>
         <p:spPr>
           <a:xfrm>
-            <a:off x="5483034" y="1588865"/>
-            <a:ext cx="68875" cy="56849"/>
+            <a:off x="5714986" y="1993395"/>
+            <a:ext cx="86411" cy="71323"/>
           </a:xfrm>
           <a:prstGeom prst="roundRect">
             <a:avLst>
@@ -10497,8 +10497,8 @@
         </p:nvSpPr>
         <p:spPr>
           <a:xfrm>
-            <a:off x="5666254" y="1595233"/>
-            <a:ext cx="68875" cy="56849"/>
+            <a:off x="5944855" y="2001385"/>
+            <a:ext cx="86411" cy="71323"/>
           </a:xfrm>
           <a:prstGeom prst="roundRect">
             <a:avLst>
@@ -10519,8 +10519,8 @@
         </p:nvSpPr>
         <p:spPr>
           <a:xfrm>
-            <a:off x="5821428" y="1684066"/>
-            <a:ext cx="68875" cy="56849"/>
+            <a:off x="6139536" y="2112834"/>
+            <a:ext cx="86411" cy="71323"/>
           </a:xfrm>
           <a:prstGeom prst="roundRect">
             <a:avLst>
@@ -10541,8 +10541,8 @@
         </p:nvSpPr>
         <p:spPr>
           <a:xfrm>
-            <a:off x="5906974" y="1831558"/>
-            <a:ext cx="68875" cy="56849"/>
+            <a:off x="6246862" y="2297879"/>
+            <a:ext cx="86411" cy="71323"/>
           </a:xfrm>
           <a:prstGeom prst="roundRect">
             <a:avLst>
@@ -10563,8 +10563,8 @@
         </p:nvSpPr>
         <p:spPr>
           <a:xfrm>
-            <a:off x="6007807" y="1501402"/>
-            <a:ext cx="1676323" cy="583069"/>
+            <a:off x="6373368" y="1883664"/>
+            <a:ext cx="2103120" cy="731520"/>
           </a:xfrm>
           <a:prstGeom prst="rect">
             <a:avLst/>
@@ -10583,7 +10583,7 @@
               <a:buNone/>
             </a:pPr>
             <a:r>
-              <a:rPr lang="en-US" sz="1040" b="1" dirty="0">
+              <a:rPr lang="en-US" sz="1300" b="1" dirty="0">
                 <a:solidFill>
                   <a:srgbClr val="A32C25"/>
                 </a:solidFill>
@@ -10593,7 +10593,7 @@
               </a:rPr>
               <a:t>Vậy cứ mua AT128 cho mọi xe là xong?</a:t>
             </a:r>
-            <a:endParaRPr lang="en-US" sz="1040" dirty="0"/>
+            <a:endParaRPr lang="en-US" sz="1300" dirty="0"/>
           </a:p>
           <a:p>
             <a:pPr indent="0" marL="0">
@@ -10603,7 +10603,7 @@
               <a:buNone/>
             </a:pPr>
             <a:r>
-              <a:rPr lang="en-US" sz="880" dirty="0">
+              <a:rPr lang="en-US" sz="1100" dirty="0">
                 <a:solidFill>
                   <a:srgbClr val="A32C25"/>
                 </a:solidFill>
@@ -10613,7 +10613,7 @@
               </a:rPr>
               <a:t>那每台車都買 AT128 就好了？</a:t>
             </a:r>
-            <a:endParaRPr lang="en-US" sz="1040" dirty="0"/>
+            <a:endParaRPr lang="en-US" sz="1300" dirty="0"/>
           </a:p>
         </p:txBody>
       </p:sp>
@@ -10625,8 +10625,8 @@
         </p:nvSpPr>
         <p:spPr>
           <a:xfrm>
-            <a:off x="5104050" y="2405159"/>
-            <a:ext cx="2580080" cy="320688"/>
+            <a:off x="5239512" y="3017520"/>
+            <a:ext cx="3236976" cy="402336"/>
           </a:xfrm>
           <a:prstGeom prst="rect">
             <a:avLst/>
@@ -10645,7 +10645,7 @@
               <a:buNone/>
             </a:pPr>
             <a:r>
-              <a:rPr lang="en-US" sz="800" b="1" dirty="0">
+              <a:rPr lang="en-US" sz="1000" b="1" dirty="0">
                 <a:solidFill>
                   <a:srgbClr val="A32C25"/>
                 </a:solidFill>
@@ -10655,7 +10655,7 @@
               </a:rPr>
               <a:t>Giá, điện, chỗ lắp — và nó chỉ thấy 120° phía trước</a:t>
             </a:r>
-            <a:endParaRPr lang="en-US" sz="800" dirty="0"/>
+            <a:endParaRPr lang="en-US" sz="1000" dirty="0"/>
           </a:p>
           <a:p>
             <a:pPr indent="0" marL="0">
@@ -10665,7 +10665,7 @@
               <a:buNone/>
             </a:pPr>
             <a:r>
-              <a:rPr lang="en-US" sz="720" dirty="0">
+              <a:rPr lang="en-US" sz="900" dirty="0">
                 <a:solidFill>
                   <a:srgbClr val="A32C25"/>
                 </a:solidFill>
@@ -10675,7 +10675,7 @@
               </a:rPr>
               <a:t>價錢、功耗、裝不裝得下——而且它只看前面 120 度</a:t>
             </a:r>
-            <a:endParaRPr lang="en-US" sz="800" dirty="0"/>
+            <a:endParaRPr lang="en-US" sz="1000" dirty="0"/>
           </a:p>
         </p:txBody>
       </p:sp>
@@ -10687,8 +10687,8 @@
         </p:nvSpPr>
         <p:spPr>
           <a:xfrm>
-            <a:off x="1328680" y="3119418"/>
-            <a:ext cx="6486641" cy="481032"/>
+            <a:off x="502920" y="3913632"/>
+            <a:ext cx="8138160" cy="603504"/>
           </a:xfrm>
           <a:prstGeom prst="roundRect">
             <a:avLst>
@@ -10714,8 +10714,8 @@
         </p:nvSpPr>
         <p:spPr>
           <a:xfrm>
-            <a:off x="1474447" y="3170437"/>
-            <a:ext cx="6195106" cy="393571"/>
+            <a:off x="685800" y="3977640"/>
+            <a:ext cx="7772400" cy="493776"/>
           </a:xfrm>
           <a:prstGeom prst="rect">
             <a:avLst/>
@@ -10734,7 +10734,7 @@
               <a:buNone/>
             </a:pPr>
             <a:r>
-              <a:rPr lang="en-US" sz="960" b="1" dirty="0">
+              <a:rPr lang="en-US" sz="1200" b="1" dirty="0">
                 <a:solidFill>
                   <a:srgbClr val="7A4E00"/>
                 </a:solidFill>
@@ -10744,7 +10744,7 @@
               </a:rPr>
               <a:t>Chọn cảm biến không phải chọn cái tốt nhất, mà là chọn tổ hợp vừa đủ cho ODD của mình.</a:t>
             </a:r>
-            <a:endParaRPr lang="en-US" sz="960" dirty="0"/>
+            <a:endParaRPr lang="en-US" sz="1200" dirty="0"/>
           </a:p>
           <a:p>
             <a:pPr indent="0" marL="0">
@@ -10754,7 +10754,7 @@
               <a:buNone/>
             </a:pPr>
             <a:r>
-              <a:rPr lang="en-US" sz="880" dirty="0">
+              <a:rPr lang="en-US" sz="1100" dirty="0">
                 <a:solidFill>
                   <a:srgbClr val="7A4E00"/>
                 </a:solidFill>
@@ -10764,7 +10764,7 @@
               </a:rPr>
               <a:t>選感測器不是選最好的那一顆，是選一組剛好夠用的——夠用於你自己的 ODD。</a:t>
             </a:r>
-            <a:endParaRPr lang="en-US" sz="960" dirty="0"/>
+            <a:endParaRPr lang="en-US" sz="1200" dirty="0"/>
           </a:p>
         </p:txBody>
       </p:sp>
@@ -10800,8 +10800,8 @@
         </p:nvSpPr>
         <p:spPr>
           <a:xfrm>
-            <a:off x="1015280" y="102037"/>
-            <a:ext cx="655952" cy="204074"/>
+            <a:off x="109728" y="128016"/>
+            <a:ext cx="822960" cy="256032"/>
           </a:xfrm>
           <a:prstGeom prst="rect">
             <a:avLst/>
@@ -10817,7 +10817,7 @@
               <a:buNone/>
             </a:pPr>
             <a:r>
-              <a:rPr lang="en-US" sz="720" dirty="0">
+              <a:rPr lang="en-US" sz="900" dirty="0">
                 <a:solidFill>
                   <a:srgbClr val="5F7183"/>
                 </a:solidFill>
@@ -10827,7 +10827,7 @@
               </a:rPr>
               <a:t>6 / 9</a:t>
             </a:r>
-            <a:endParaRPr lang="en-US" sz="720" dirty="0"/>
+            <a:endParaRPr lang="en-US" sz="900" dirty="0"/>
           </a:p>
         </p:txBody>
       </p:sp>
@@ -10839,8 +10839,8 @@
         </p:nvSpPr>
         <p:spPr>
           <a:xfrm>
-            <a:off x="1693098" y="102037"/>
-            <a:ext cx="1603439" cy="204074"/>
+            <a:off x="960120" y="128016"/>
+            <a:ext cx="2011680" cy="256032"/>
           </a:xfrm>
           <a:prstGeom prst="rect">
             <a:avLst/>
@@ -10856,7 +10856,7 @@
               <a:buNone/>
             </a:pPr>
             <a:r>
-              <a:rPr lang="en-US" sz="720" dirty="0">
+              <a:rPr lang="en-US" sz="900" dirty="0">
                 <a:solidFill>
                   <a:srgbClr val="5F7183"/>
                 </a:solidFill>
@@ -10866,7 +10866,7 @@
               </a:rPr>
               <a:t>Tiết 3 · 第 3 節</a:t>
             </a:r>
-            <a:endParaRPr lang="en-US" sz="720" dirty="0"/>
+            <a:endParaRPr lang="en-US" sz="900" dirty="0"/>
           </a:p>
         </p:txBody>
       </p:sp>
@@ -10896,7 +10896,7 @@
       </p:nvGrpSpPr>
       <p:grpSpPr>
         <a:xfrm>
-          <a:off x="898071" y="0"/>
+          <a:off x="0" y="0"/>
           <a:ext cx="1" cy="1"/>
           <a:chOff x="0" y="0"/>
           <a:chExt cx="0" cy="0"/>
@@ -10910,8 +10910,8 @@
         </p:nvSpPr>
         <p:spPr>
           <a:xfrm>
-            <a:off x="6335486" y="-1102179"/>
-            <a:ext cx="3380014" cy="3380014"/>
+            <a:off x="6766560" y="-1371600"/>
+            <a:ext cx="4206240" cy="4206240"/>
           </a:xfrm>
           <a:prstGeom prst="ellipse">
             <a:avLst/>
@@ -10935,8 +10935,8 @@
         </p:nvSpPr>
         <p:spPr>
           <a:xfrm>
-            <a:off x="7437664" y="1690007"/>
-            <a:ext cx="1910443" cy="1910443"/>
+            <a:off x="8138160" y="2103120"/>
+            <a:ext cx="2377440" cy="2377440"/>
           </a:xfrm>
           <a:prstGeom prst="ellipse">
             <a:avLst/>
@@ -10957,8 +10957,8 @@
         </p:nvSpPr>
         <p:spPr>
           <a:xfrm>
-            <a:off x="1302204" y="382089"/>
-            <a:ext cx="5437414" cy="220436"/>
+            <a:off x="502920" y="475488"/>
+            <a:ext cx="6766560" cy="274320"/>
           </a:xfrm>
           <a:prstGeom prst="rect">
             <a:avLst/>
@@ -10974,7 +10974,7 @@
               <a:buNone/>
             </a:pPr>
             <a:r>
-              <a:rPr lang="en-US" sz="1000" b="1" dirty="0">
+              <a:rPr lang="en-US" sz="1250" b="1" dirty="0">
                 <a:solidFill>
                   <a:srgbClr val="FFB020"/>
                 </a:solidFill>
@@ -10984,7 +10984,7 @@
               </a:rPr>
               <a:t>Hoạt động · 這句話對不對（每題 1 分鐘）</a:t>
             </a:r>
-            <a:endParaRPr lang="en-US" sz="1000" dirty="0"/>
+            <a:endParaRPr lang="en-US" sz="1250" dirty="0"/>
           </a:p>
         </p:txBody>
       </p:sp>
@@ -10996,8 +10996,8 @@
         </p:nvSpPr>
         <p:spPr>
           <a:xfrm>
-            <a:off x="1302204" y="631916"/>
-            <a:ext cx="6466114" cy="984613"/>
+            <a:off x="502920" y="786384"/>
+            <a:ext cx="8046720" cy="1225296"/>
           </a:xfrm>
           <a:prstGeom prst="rect">
             <a:avLst/>
@@ -11016,7 +11016,7 @@
               <a:buNone/>
             </a:pPr>
             <a:r>
-              <a:rPr lang="en-US" sz="1850" b="1" dirty="0">
+              <a:rPr lang="en-US" sz="2300" b="1" dirty="0">
                 <a:solidFill>
                   <a:srgbClr val="FFFFFF"/>
                 </a:solidFill>
@@ -11026,7 +11026,7 @@
               </a:rPr>
               <a:t>Bốn câu dưới đây. Đúng hay sai, nói một câu lý do.</a:t>
             </a:r>
-            <a:endParaRPr lang="en-US" sz="1850" dirty="0"/>
+            <a:endParaRPr lang="en-US" sz="2300" dirty="0"/>
           </a:p>
           <a:p>
             <a:pPr indent="0" marL="0">
@@ -11036,7 +11036,7 @@
               <a:buNone/>
             </a:pPr>
             <a:r>
-              <a:rPr lang="en-US" sz="1210" dirty="0">
+              <a:rPr lang="en-US" sz="1500" dirty="0">
                 <a:solidFill>
                   <a:srgbClr val="AFC3D4"/>
                 </a:solidFill>
@@ -11046,7 +11046,7 @@
               </a:rPr>
               <a:t>下面四句話。對或錯，再說一句理由。</a:t>
             </a:r>
-            <a:endParaRPr lang="en-US" sz="1850" dirty="0"/>
+            <a:endParaRPr lang="en-US" sz="2300" dirty="0"/>
           </a:p>
         </p:txBody>
       </p:sp>
@@ -11058,8 +11058,8 @@
         </p:nvSpPr>
         <p:spPr>
           <a:xfrm>
-            <a:off x="1302204" y="1396093"/>
-            <a:ext cx="6539593" cy="499654"/>
+            <a:off x="502920" y="1737360"/>
+            <a:ext cx="8138160" cy="621792"/>
           </a:xfrm>
           <a:prstGeom prst="roundRect">
             <a:avLst>
@@ -11080,8 +11080,8 @@
         </p:nvSpPr>
         <p:spPr>
           <a:xfrm>
-            <a:off x="1434465" y="1513659"/>
-            <a:ext cx="264523" cy="264523"/>
+            <a:off x="667512" y="1883664"/>
+            <a:ext cx="329184" cy="329184"/>
           </a:xfrm>
           <a:prstGeom prst="ellipse">
             <a:avLst/>
@@ -11100,8 +11100,8 @@
         </p:nvSpPr>
         <p:spPr>
           <a:xfrm>
-            <a:off x="1434465" y="1535702"/>
-            <a:ext cx="264523" cy="220436"/>
+            <a:off x="667512" y="1911096"/>
+            <a:ext cx="329184" cy="274320"/>
           </a:xfrm>
           <a:prstGeom prst="rect">
             <a:avLst/>
@@ -11117,7 +11117,7 @@
               <a:buNone/>
             </a:pPr>
             <a:r>
-              <a:rPr lang="en-US" sz="960" b="1" dirty="0">
+              <a:rPr lang="en-US" sz="1200" b="1" dirty="0">
                 <a:solidFill>
                   <a:srgbClr val="FFFFFF"/>
                 </a:solidFill>
@@ -11127,7 +11127,7 @@
               </a:rPr>
               <a:t>1</a:t>
             </a:r>
-            <a:endParaRPr lang="en-US" sz="960" dirty="0"/>
+            <a:endParaRPr lang="en-US" sz="1200" dirty="0"/>
           </a:p>
         </p:txBody>
       </p:sp>
@@ -11139,8 +11139,8 @@
         </p:nvSpPr>
         <p:spPr>
           <a:xfrm>
-            <a:off x="1831249" y="1432832"/>
-            <a:ext cx="5863590" cy="440871"/>
+            <a:off x="1161288" y="1783080"/>
+            <a:ext cx="7296912" cy="548640"/>
           </a:xfrm>
           <a:prstGeom prst="rect">
             <a:avLst/>
@@ -11159,7 +11159,7 @@
               <a:buNone/>
             </a:pPr>
             <a:r>
-              <a:rPr lang="en-US" sz="1000" b="1" dirty="0">
+              <a:rPr lang="en-US" sz="1250" b="1" dirty="0">
                 <a:solidFill>
                   <a:srgbClr val="FFFFFF"/>
                 </a:solidFill>
@@ -11169,7 +11169,7 @@
               </a:rPr>
               <a:t>① Datasheet ghi «tầm 200 m» thì nghĩa là cái gì ở 200 m cũng thấy.</a:t>
             </a:r>
-            <a:endParaRPr lang="en-US" sz="1000" dirty="0"/>
+            <a:endParaRPr lang="en-US" sz="1250" dirty="0"/>
           </a:p>
           <a:p>
             <a:pPr indent="0" marL="0">
@@ -11179,7 +11179,7 @@
               <a:buNone/>
             </a:pPr>
             <a:r>
-              <a:rPr lang="en-US" sz="920" dirty="0">
+              <a:rPr lang="en-US" sz="1150" dirty="0">
                 <a:solidFill>
                   <a:srgbClr val="AFC3D4"/>
                 </a:solidFill>
@@ -11189,7 +11189,7 @@
               </a:rPr>
               <a:t>① 規格表寫「測距 200 公尺」，就表示 200 公尺內的東西都看得到。</a:t>
             </a:r>
-            <a:endParaRPr lang="en-US" sz="1000" dirty="0"/>
+            <a:endParaRPr lang="en-US" sz="1250" dirty="0"/>
           </a:p>
         </p:txBody>
       </p:sp>
@@ -11201,8 +11201,8 @@
         </p:nvSpPr>
         <p:spPr>
           <a:xfrm>
-            <a:off x="1302204" y="1969226"/>
-            <a:ext cx="6539593" cy="499654"/>
+            <a:off x="502920" y="2450592"/>
+            <a:ext cx="8138160" cy="621792"/>
           </a:xfrm>
           <a:prstGeom prst="roundRect">
             <a:avLst>
@@ -11223,8 +11223,8 @@
         </p:nvSpPr>
         <p:spPr>
           <a:xfrm>
-            <a:off x="1434465" y="2086791"/>
-            <a:ext cx="264523" cy="264523"/>
+            <a:off x="667512" y="2596896"/>
+            <a:ext cx="329184" cy="329184"/>
           </a:xfrm>
           <a:prstGeom prst="ellipse">
             <a:avLst/>
@@ -11243,8 +11243,8 @@
         </p:nvSpPr>
         <p:spPr>
           <a:xfrm>
-            <a:off x="1434465" y="2108835"/>
-            <a:ext cx="264523" cy="220436"/>
+            <a:off x="667512" y="2624328"/>
+            <a:ext cx="329184" cy="274320"/>
           </a:xfrm>
           <a:prstGeom prst="rect">
             <a:avLst/>
@@ -11260,7 +11260,7 @@
               <a:buNone/>
             </a:pPr>
             <a:r>
-              <a:rPr lang="en-US" sz="960" b="1" dirty="0">
+              <a:rPr lang="en-US" sz="1200" b="1" dirty="0">
                 <a:solidFill>
                   <a:srgbClr val="FFFFFF"/>
                 </a:solidFill>
@@ -11270,7 +11270,7 @@
               </a:rPr>
               <a:t>2</a:t>
             </a:r>
-            <a:endParaRPr lang="en-US" sz="960" dirty="0"/>
+            <a:endParaRPr lang="en-US" sz="1200" dirty="0"/>
           </a:p>
         </p:txBody>
       </p:sp>
@@ -11282,8 +11282,8 @@
         </p:nvSpPr>
         <p:spPr>
           <a:xfrm>
-            <a:off x="1831249" y="2005965"/>
-            <a:ext cx="5863590" cy="440871"/>
+            <a:off x="1161288" y="2496312"/>
+            <a:ext cx="7296912" cy="548640"/>
           </a:xfrm>
           <a:prstGeom prst="rect">
             <a:avLst/>
@@ -11302,7 +11302,7 @@
               <a:buNone/>
             </a:pPr>
             <a:r>
-              <a:rPr lang="en-US" sz="1000" b="1" dirty="0">
+              <a:rPr lang="en-US" sz="1250" b="1" dirty="0">
                 <a:solidFill>
                   <a:srgbClr val="FFFFFF"/>
                 </a:solidFill>
@@ -11312,7 +11312,7 @@
               </a:rPr>
               <a:t>② Cùng một cảm biến ảnh thì góc nhìn là cố định.</a:t>
             </a:r>
-            <a:endParaRPr lang="en-US" sz="1000" dirty="0"/>
+            <a:endParaRPr lang="en-US" sz="1250" dirty="0"/>
           </a:p>
           <a:p>
             <a:pPr indent="0" marL="0">
@@ -11322,7 +11322,7 @@
               <a:buNone/>
             </a:pPr>
             <a:r>
-              <a:rPr lang="en-US" sz="920" dirty="0">
+              <a:rPr lang="en-US" sz="1150" dirty="0">
                 <a:solidFill>
                   <a:srgbClr val="AFC3D4"/>
                 </a:solidFill>
@@ -11332,7 +11332,7 @@
               </a:rPr>
               <a:t>② 同一顆影像感測器，視野是固定的。</a:t>
             </a:r>
-            <a:endParaRPr lang="en-US" sz="1000" dirty="0"/>
+            <a:endParaRPr lang="en-US" sz="1250" dirty="0"/>
           </a:p>
         </p:txBody>
       </p:sp>
@@ -11344,8 +11344,8 @@
         </p:nvSpPr>
         <p:spPr>
           <a:xfrm>
-            <a:off x="1302204" y="2542359"/>
-            <a:ext cx="6539593" cy="499654"/>
+            <a:off x="502920" y="3163824"/>
+            <a:ext cx="8138160" cy="621792"/>
           </a:xfrm>
           <a:prstGeom prst="roundRect">
             <a:avLst>
@@ -11366,8 +11366,8 @@
         </p:nvSpPr>
         <p:spPr>
           <a:xfrm>
-            <a:off x="1434465" y="2659924"/>
-            <a:ext cx="264523" cy="264523"/>
+            <a:off x="667512" y="3310128"/>
+            <a:ext cx="329184" cy="329184"/>
           </a:xfrm>
           <a:prstGeom prst="ellipse">
             <a:avLst/>
@@ -11386,8 +11386,8 @@
         </p:nvSpPr>
         <p:spPr>
           <a:xfrm>
-            <a:off x="1434465" y="2681968"/>
-            <a:ext cx="264523" cy="220436"/>
+            <a:off x="667512" y="3337560"/>
+            <a:ext cx="329184" cy="274320"/>
           </a:xfrm>
           <a:prstGeom prst="rect">
             <a:avLst/>
@@ -11403,7 +11403,7 @@
               <a:buNone/>
             </a:pPr>
             <a:r>
-              <a:rPr lang="en-US" sz="960" b="1" dirty="0">
+              <a:rPr lang="en-US" sz="1200" b="1" dirty="0">
                 <a:solidFill>
                   <a:srgbClr val="FFFFFF"/>
                 </a:solidFill>
@@ -11413,7 +11413,7 @@
               </a:rPr>
               <a:t>3</a:t>
             </a:r>
-            <a:endParaRPr lang="en-US" sz="960" dirty="0"/>
+            <a:endParaRPr lang="en-US" sz="1200" dirty="0"/>
           </a:p>
         </p:txBody>
       </p:sp>
@@ -11425,8 +11425,8 @@
         </p:nvSpPr>
         <p:spPr>
           <a:xfrm>
-            <a:off x="1831249" y="2579098"/>
-            <a:ext cx="5863590" cy="440871"/>
+            <a:off x="1161288" y="3209544"/>
+            <a:ext cx="7296912" cy="548640"/>
           </a:xfrm>
           <a:prstGeom prst="rect">
             <a:avLst/>
@@ -11445,7 +11445,7 @@
               <a:buNone/>
             </a:pPr>
             <a:r>
-              <a:rPr lang="en-US" sz="1000" b="1" dirty="0">
+              <a:rPr lang="en-US" sz="1250" b="1" dirty="0">
                 <a:solidFill>
                   <a:srgbClr val="FFFFFF"/>
                 </a:solidFill>
@@ -11455,7 +11455,7 @@
               </a:rPr>
               <a:t>③ Số điểm mỗi giây càng lớn thì nhìn người ở xa càng rõ.</a:t>
             </a:r>
-            <a:endParaRPr lang="en-US" sz="1000" dirty="0"/>
+            <a:endParaRPr lang="en-US" sz="1250" dirty="0"/>
           </a:p>
           <a:p>
             <a:pPr indent="0" marL="0">
@@ -11465,7 +11465,7 @@
               <a:buNone/>
             </a:pPr>
             <a:r>
-              <a:rPr lang="en-US" sz="920" dirty="0">
+              <a:rPr lang="en-US" sz="1150" dirty="0">
                 <a:solidFill>
                   <a:srgbClr val="AFC3D4"/>
                 </a:solidFill>
@@ -11475,7 +11475,7 @@
               </a:rPr>
               <a:t>③ 每秒點數愈大，遠處的人就看得愈清楚。</a:t>
             </a:r>
-            <a:endParaRPr lang="en-US" sz="1000" dirty="0"/>
+            <a:endParaRPr lang="en-US" sz="1250" dirty="0"/>
           </a:p>
         </p:txBody>
       </p:sp>
@@ -11487,8 +11487,8 @@
         </p:nvSpPr>
         <p:spPr>
           <a:xfrm>
-            <a:off x="1302204" y="3144883"/>
-            <a:ext cx="6466114" cy="367393"/>
+            <a:off x="502920" y="3913632"/>
+            <a:ext cx="8046720" cy="457200"/>
           </a:xfrm>
           <a:prstGeom prst="rect">
             <a:avLst/>
@@ -11507,7 +11507,7 @@
               <a:buNone/>
             </a:pPr>
             <a:r>
-              <a:rPr lang="en-US" sz="1000" b="1" dirty="0">
+              <a:rPr lang="en-US" sz="1250" b="1" dirty="0">
                 <a:solidFill>
                   <a:srgbClr val="FFB020"/>
                 </a:solidFill>
@@ -11517,7 +11517,7 @@
               </a:rPr>
               <a:t>④ Hai cảm biến đều tốt thì ghép lại chắc chắn tốt.</a:t>
             </a:r>
-            <a:endParaRPr lang="en-US" sz="1000" dirty="0"/>
+            <a:endParaRPr lang="en-US" sz="1250" dirty="0"/>
           </a:p>
           <a:p>
             <a:pPr indent="0" marL="0">
@@ -11527,7 +11527,7 @@
               <a:buNone/>
             </a:pPr>
             <a:r>
-              <a:rPr lang="en-US" sz="920" dirty="0">
+              <a:rPr lang="en-US" sz="1150" dirty="0">
                 <a:solidFill>
                   <a:srgbClr val="FFB020"/>
                 </a:solidFill>
@@ -11537,7 +11537,7 @@
               </a:rPr>
               <a:t>④ 兩顆感測器各自都好，合起來就一定好。</a:t>
             </a:r>
-            <a:endParaRPr lang="en-US" sz="1000" dirty="0"/>
+            <a:endParaRPr lang="en-US" sz="1250" dirty="0"/>
           </a:p>
         </p:txBody>
       </p:sp>
@@ -11549,8 +11549,8 @@
         </p:nvSpPr>
         <p:spPr>
           <a:xfrm>
-            <a:off x="986246" y="102870"/>
-            <a:ext cx="661307" cy="205740"/>
+            <a:off x="109728" y="128016"/>
+            <a:ext cx="822960" cy="256032"/>
           </a:xfrm>
           <a:prstGeom prst="rect">
             <a:avLst/>
@@ -11566,7 +11566,7 @@
               <a:buNone/>
             </a:pPr>
             <a:r>
-              <a:rPr lang="en-US" sz="720" dirty="0">
+              <a:rPr lang="en-US" sz="900" dirty="0">
                 <a:solidFill>
                   <a:srgbClr val="9FB3C8"/>
                 </a:solidFill>
@@ -11576,7 +11576,7 @@
               </a:rPr>
               <a:t>7 / 9</a:t>
             </a:r>
-            <a:endParaRPr lang="en-US" sz="720" dirty="0"/>
+            <a:endParaRPr lang="en-US" sz="900" dirty="0"/>
           </a:p>
         </p:txBody>
       </p:sp>
@@ -11588,8 +11588,8 @@
         </p:nvSpPr>
         <p:spPr>
           <a:xfrm>
-            <a:off x="1669596" y="102870"/>
-            <a:ext cx="1616529" cy="205740"/>
+            <a:off x="960120" y="128016"/>
+            <a:ext cx="2011680" cy="256032"/>
           </a:xfrm>
           <a:prstGeom prst="rect">
             <a:avLst/>
@@ -11605,7 +11605,7 @@
               <a:buNone/>
             </a:pPr>
             <a:r>
-              <a:rPr lang="en-US" sz="720" dirty="0">
+              <a:rPr lang="en-US" sz="900" dirty="0">
                 <a:solidFill>
                   <a:srgbClr val="9FB3C8"/>
                 </a:solidFill>
@@ -11615,7 +11615,7 @@
               </a:rPr>
               <a:t>Tiết 3 · 第 3 節</a:t>
             </a:r>
-            <a:endParaRPr lang="en-US" sz="720" dirty="0"/>
+            <a:endParaRPr lang="en-US" sz="900" dirty="0"/>
           </a:p>
         </p:txBody>
       </p:sp>
@@ -11645,7 +11645,7 @@
       </p:nvGrpSpPr>
       <p:grpSpPr>
         <a:xfrm>
-          <a:off x="913006" y="0"/>
+          <a:off x="0" y="0"/>
           <a:ext cx="1" cy="1"/>
           <a:chOff x="0" y="0"/>
           <a:chExt cx="0" cy="0"/>
@@ -11659,8 +11659,8 @@
         </p:nvSpPr>
         <p:spPr>
           <a:xfrm>
-            <a:off x="6328317" y="-1097698"/>
-            <a:ext cx="3366274" cy="3366274"/>
+            <a:off x="6766560" y="-1371600"/>
+            <a:ext cx="4206240" cy="4206240"/>
           </a:xfrm>
           <a:prstGeom prst="ellipse">
             <a:avLst/>
@@ -11684,8 +11684,8 @@
         </p:nvSpPr>
         <p:spPr>
           <a:xfrm>
-            <a:off x="7426015" y="1683137"/>
-            <a:ext cx="1902677" cy="1902677"/>
+            <a:off x="8138160" y="2103120"/>
+            <a:ext cx="2377440" cy="2377440"/>
           </a:xfrm>
           <a:prstGeom prst="ellipse">
             <a:avLst/>
@@ -11706,8 +11706,8 @@
         </p:nvSpPr>
         <p:spPr>
           <a:xfrm>
-            <a:off x="1315495" y="380535"/>
-            <a:ext cx="5415311" cy="219540"/>
+            <a:off x="502920" y="475488"/>
+            <a:ext cx="6766560" cy="274320"/>
           </a:xfrm>
           <a:prstGeom prst="rect">
             <a:avLst/>
@@ -11723,7 +11723,7 @@
               <a:buNone/>
             </a:pPr>
             <a:r>
-              <a:rPr lang="en-US" sz="1000" b="1" dirty="0">
+              <a:rPr lang="en-US" sz="1250" b="1" dirty="0">
                 <a:solidFill>
                   <a:srgbClr val="FFB020"/>
                 </a:solidFill>
@@ -11733,7 +11733,7 @@
               </a:rPr>
               <a:t>Đáp án · 答案：四句都錯</a:t>
             </a:r>
-            <a:endParaRPr lang="en-US" sz="1000" dirty="0"/>
+            <a:endParaRPr lang="en-US" sz="1250" dirty="0"/>
           </a:p>
         </p:txBody>
       </p:sp>
@@ -11745,8 +11745,8 @@
         </p:nvSpPr>
         <p:spPr>
           <a:xfrm>
-            <a:off x="1315495" y="658619"/>
-            <a:ext cx="6439829" cy="848887"/>
+            <a:off x="502920" y="822960"/>
+            <a:ext cx="8046720" cy="1060704"/>
           </a:xfrm>
           <a:prstGeom prst="rect">
             <a:avLst/>
@@ -11765,7 +11765,7 @@
               <a:buNone/>
             </a:pPr>
             <a:r>
-              <a:rPr lang="en-US" sz="2000" b="1" dirty="0">
+              <a:rPr lang="en-US" sz="2500" b="1" dirty="0">
                 <a:solidFill>
                   <a:srgbClr val="FFFFFF"/>
                 </a:solidFill>
@@ -11775,7 +11775,7 @@
               </a:rPr>
               <a:t>Bốn câu đều sai</a:t>
             </a:r>
-            <a:endParaRPr lang="en-US" sz="2000" dirty="0"/>
+            <a:endParaRPr lang="en-US" sz="2500" dirty="0"/>
           </a:p>
           <a:p>
             <a:pPr indent="0" marL="0">
@@ -11785,7 +11785,7 @@
               <a:buNone/>
             </a:pPr>
             <a:r>
-              <a:rPr lang="en-US" sz="1200" dirty="0">
+              <a:rPr lang="en-US" sz="1500" dirty="0">
                 <a:solidFill>
                   <a:srgbClr val="AFC3D4"/>
                 </a:solidFill>
@@ -11795,7 +11795,7 @@
               </a:rPr>
               <a:t>四句都錯</a:t>
             </a:r>
-            <a:endParaRPr lang="en-US" sz="2000" dirty="0"/>
+            <a:endParaRPr lang="en-US" sz="2500" dirty="0"/>
           </a:p>
         </p:txBody>
       </p:sp>
@@ -11807,8 +11807,8 @@
         </p:nvSpPr>
         <p:spPr>
           <a:xfrm>
-            <a:off x="1315495" y="1419690"/>
-            <a:ext cx="36590" cy="409807"/>
+            <a:off x="502920" y="1773936"/>
+            <a:ext cx="45720" cy="512064"/>
           </a:xfrm>
           <a:prstGeom prst="rect">
             <a:avLst/>
@@ -11827,8 +11827,8 @@
         </p:nvSpPr>
         <p:spPr>
           <a:xfrm>
-            <a:off x="1491127" y="1390418"/>
-            <a:ext cx="6293470" cy="497623"/>
+            <a:off x="722376" y="1737360"/>
+            <a:ext cx="7863840" cy="621792"/>
           </a:xfrm>
           <a:prstGeom prst="rect">
             <a:avLst/>
@@ -11847,7 +11847,7 @@
               <a:buNone/>
             </a:pPr>
             <a:r>
-              <a:rPr lang="en-US" sz="1080" b="1" dirty="0">
+              <a:rPr lang="en-US" sz="1350" b="1" dirty="0">
                 <a:solidFill>
                   <a:srgbClr val="FFFFFF"/>
                 </a:solidFill>
@@ -11857,7 +11857,7 @@
               </a:rPr>
               <a:t>① Hỏi: phản xạ bao nhiêu? OS1: trắng 170 m, đen 90 m.</a:t>
             </a:r>
-            <a:endParaRPr lang="en-US" sz="1080" dirty="0"/>
+            <a:endParaRPr lang="en-US" sz="1350" dirty="0"/>
           </a:p>
           <a:p>
             <a:pPr indent="0" marL="0">
@@ -11867,7 +11867,7 @@
               <a:buNone/>
             </a:pPr>
             <a:r>
-              <a:rPr lang="en-US" sz="960" dirty="0">
+              <a:rPr lang="en-US" sz="1200" dirty="0">
                 <a:solidFill>
                   <a:srgbClr val="AFC3D4"/>
                 </a:solidFill>
@@ -11877,7 +11877,7 @@
               </a:rPr>
               <a:t>① 要追問：對什麼反射率？OS1 對白色 170 公尺，對黑色 90。</a:t>
             </a:r>
-            <a:endParaRPr lang="en-US" sz="1080" dirty="0"/>
+            <a:endParaRPr lang="en-US" sz="1350" dirty="0"/>
           </a:p>
         </p:txBody>
       </p:sp>
@@ -11889,8 +11889,8 @@
         </p:nvSpPr>
         <p:spPr>
           <a:xfrm>
-            <a:off x="1315495" y="1990493"/>
-            <a:ext cx="36590" cy="409807"/>
+            <a:off x="502920" y="2487168"/>
+            <a:ext cx="45720" cy="512064"/>
           </a:xfrm>
           <a:prstGeom prst="rect">
             <a:avLst/>
@@ -11909,8 +11909,8 @@
         </p:nvSpPr>
         <p:spPr>
           <a:xfrm>
-            <a:off x="1491127" y="1961221"/>
-            <a:ext cx="6293470" cy="497623"/>
+            <a:off x="722376" y="2450592"/>
+            <a:ext cx="7863840" cy="621792"/>
           </a:xfrm>
           <a:prstGeom prst="rect">
             <a:avLst/>
@@ -11929,7 +11929,7 @@
               <a:buNone/>
             </a:pPr>
             <a:r>
-              <a:rPr lang="en-US" sz="1080" b="1" dirty="0">
+              <a:rPr lang="en-US" sz="1350" b="1" dirty="0">
                 <a:solidFill>
                   <a:srgbClr val="FFFFFF"/>
                 </a:solidFill>
@@ -11939,7 +11939,7 @@
               </a:rPr>
               <a:t>② Góc nhìn do ống kính: 8 mm → 42°, 3,6 mm → 81°.</a:t>
             </a:r>
-            <a:endParaRPr lang="en-US" sz="1080" dirty="0"/>
+            <a:endParaRPr lang="en-US" sz="1350" dirty="0"/>
           </a:p>
           <a:p>
             <a:pPr indent="0" marL="0">
@@ -11949,7 +11949,7 @@
               <a:buNone/>
             </a:pPr>
             <a:r>
-              <a:rPr lang="en-US" sz="960" dirty="0">
+              <a:rPr lang="en-US" sz="1200" dirty="0">
                 <a:solidFill>
                   <a:srgbClr val="AFC3D4"/>
                 </a:solidFill>
@@ -11959,7 +11959,7 @@
               </a:rPr>
               <a:t>② 視野是鏡頭決定的：同一塊晶片，8 mm 是 42 度，3.6 mm 是 81 度。</a:t>
             </a:r>
-            <a:endParaRPr lang="en-US" sz="1080" dirty="0"/>
+            <a:endParaRPr lang="en-US" sz="1350" dirty="0"/>
           </a:p>
         </p:txBody>
       </p:sp>
@@ -11971,8 +11971,8 @@
         </p:nvSpPr>
         <p:spPr>
           <a:xfrm>
-            <a:off x="1315495" y="2561296"/>
-            <a:ext cx="36590" cy="409807"/>
+            <a:off x="502920" y="3200400"/>
+            <a:ext cx="45720" cy="512064"/>
           </a:xfrm>
           <a:prstGeom prst="rect">
             <a:avLst/>
@@ -11991,8 +11991,8 @@
         </p:nvSpPr>
         <p:spPr>
           <a:xfrm>
-            <a:off x="1491127" y="2532024"/>
-            <a:ext cx="6293470" cy="497623"/>
+            <a:off x="722376" y="3163824"/>
+            <a:ext cx="7863840" cy="621792"/>
           </a:xfrm>
           <a:prstGeom prst="rect">
             <a:avLst/>
@@ -12011,7 +12011,7 @@
               <a:buNone/>
             </a:pPr>
             <a:r>
-              <a:rPr lang="en-US" sz="1080" b="1" dirty="0">
+              <a:rPr lang="en-US" sz="1350" b="1" dirty="0">
                 <a:solidFill>
                   <a:srgbClr val="FFFFFF"/>
                 </a:solidFill>
@@ -12021,7 +12021,7 @@
               </a:rPr>
               <a:t>③ Điểm mỗi giây phải đổi ra góc mới dùng được.</a:t>
             </a:r>
-            <a:endParaRPr lang="en-US" sz="1080" dirty="0"/>
+            <a:endParaRPr lang="en-US" sz="1350" dirty="0"/>
           </a:p>
           <a:p>
             <a:pPr indent="0" marL="0">
@@ -12031,7 +12031,7 @@
               <a:buNone/>
             </a:pPr>
             <a:r>
-              <a:rPr lang="en-US" sz="960" dirty="0">
+              <a:rPr lang="en-US" sz="1200" dirty="0">
                 <a:solidFill>
                   <a:srgbClr val="AFC3D4"/>
                 </a:solidFill>
@@ -12041,7 +12041,7 @@
               </a:rPr>
               <a:t>③ 每秒點數要先換算成角度才能用。</a:t>
             </a:r>
-            <a:endParaRPr lang="en-US" sz="1080" dirty="0"/>
+            <a:endParaRPr lang="en-US" sz="1350" dirty="0"/>
           </a:p>
         </p:txBody>
       </p:sp>
@@ -12053,8 +12053,8 @@
         </p:nvSpPr>
         <p:spPr>
           <a:xfrm>
-            <a:off x="1315495" y="3132099"/>
-            <a:ext cx="36590" cy="409807"/>
+            <a:off x="502920" y="3913632"/>
+            <a:ext cx="45720" cy="512064"/>
           </a:xfrm>
           <a:prstGeom prst="rect">
             <a:avLst/>
@@ -12073,8 +12073,8 @@
         </p:nvSpPr>
         <p:spPr>
           <a:xfrm>
-            <a:off x="1491127" y="3102827"/>
-            <a:ext cx="6293470" cy="497623"/>
+            <a:off x="722376" y="3877056"/>
+            <a:ext cx="7863840" cy="621792"/>
           </a:xfrm>
           <a:prstGeom prst="rect">
             <a:avLst/>
@@ -12093,7 +12093,7 @@
               <a:buNone/>
             </a:pPr>
             <a:r>
-              <a:rPr lang="en-US" sz="1080" b="1" dirty="0">
+              <a:rPr lang="en-US" sz="1350" b="1" dirty="0">
                 <a:solidFill>
                   <a:srgbClr val="FFFFFF"/>
                 </a:solidFill>
@@ -12103,7 +12103,7 @@
               </a:rPr>
               <a:t>④ Còn hiệu chuẩn và đồng bộ: 1° ở 50 m là gần 1 m.</a:t>
             </a:r>
-            <a:endParaRPr lang="en-US" sz="1080" dirty="0"/>
+            <a:endParaRPr lang="en-US" sz="1350" dirty="0"/>
           </a:p>
           <a:p>
             <a:pPr indent="0" marL="0">
@@ -12113,7 +12113,7 @@
               <a:buNone/>
             </a:pPr>
             <a:r>
-              <a:rPr lang="en-US" sz="960" dirty="0">
+              <a:rPr lang="en-US" sz="1200" dirty="0">
                 <a:solidFill>
                   <a:srgbClr val="AFC3D4"/>
                 </a:solidFill>
@@ -12123,7 +12123,7 @@
               </a:rPr>
               <a:t>④ 還有標定和同步：差 1 度，50 公尺外差將近 1 公尺。</a:t>
             </a:r>
-            <a:endParaRPr lang="en-US" sz="1080" dirty="0"/>
+            <a:endParaRPr lang="en-US" sz="1350" dirty="0"/>
           </a:p>
         </p:txBody>
       </p:sp>
@@ -12135,8 +12135,8 @@
         </p:nvSpPr>
         <p:spPr>
           <a:xfrm>
-            <a:off x="1000822" y="102452"/>
-            <a:ext cx="658619" cy="204904"/>
+            <a:off x="109728" y="128016"/>
+            <a:ext cx="822960" cy="256032"/>
           </a:xfrm>
           <a:prstGeom prst="rect">
             <a:avLst/>
@@ -12152,7 +12152,7 @@
               <a:buNone/>
             </a:pPr>
             <a:r>
-              <a:rPr lang="en-US" sz="720" dirty="0">
+              <a:rPr lang="en-US" sz="900" dirty="0">
                 <a:solidFill>
                   <a:srgbClr val="9FB3C8"/>
                 </a:solidFill>
@@ -12162,7 +12162,7 @@
               </a:rPr>
               <a:t>8 / 9</a:t>
             </a:r>
-            <a:endParaRPr lang="en-US" sz="720" dirty="0"/>
+            <a:endParaRPr lang="en-US" sz="900" dirty="0"/>
           </a:p>
         </p:txBody>
       </p:sp>
@@ -12174,8 +12174,8 @@
         </p:nvSpPr>
         <p:spPr>
           <a:xfrm>
-            <a:off x="1681395" y="102452"/>
-            <a:ext cx="1609957" cy="204904"/>
+            <a:off x="960120" y="128016"/>
+            <a:ext cx="2011680" cy="256032"/>
           </a:xfrm>
           <a:prstGeom prst="rect">
             <a:avLst/>
@@ -12191,7 +12191,7 @@
               <a:buNone/>
             </a:pPr>
             <a:r>
-              <a:rPr lang="en-US" sz="720" dirty="0">
+              <a:rPr lang="en-US" sz="900" dirty="0">
                 <a:solidFill>
                   <a:srgbClr val="9FB3C8"/>
                 </a:solidFill>
@@ -12201,7 +12201,7 @@
               </a:rPr>
               <a:t>Tiết 3 · 第 3 節</a:t>
             </a:r>
-            <a:endParaRPr lang="en-US" sz="720" dirty="0"/>
+            <a:endParaRPr lang="en-US" sz="900" dirty="0"/>
           </a:p>
         </p:txBody>
       </p:sp>
@@ -12231,7 +12231,7 @@
       </p:nvGrpSpPr>
       <p:grpSpPr>
         <a:xfrm>
-          <a:off x="898071" y="0"/>
+          <a:off x="0" y="0"/>
           <a:ext cx="1" cy="1"/>
           <a:chOff x="0" y="0"/>
           <a:chExt cx="0" cy="0"/>
@@ -12245,8 +12245,8 @@
         </p:nvSpPr>
         <p:spPr>
           <a:xfrm>
-            <a:off x="6335486" y="-1102179"/>
-            <a:ext cx="3380014" cy="3380014"/>
+            <a:off x="6766560" y="-1371600"/>
+            <a:ext cx="4206240" cy="4206240"/>
           </a:xfrm>
           <a:prstGeom prst="ellipse">
             <a:avLst/>
@@ -12270,8 +12270,8 @@
         </p:nvSpPr>
         <p:spPr>
           <a:xfrm>
-            <a:off x="7437664" y="1690007"/>
-            <a:ext cx="1910443" cy="1910443"/>
+            <a:off x="8138160" y="2103120"/>
+            <a:ext cx="2377440" cy="2377440"/>
           </a:xfrm>
           <a:prstGeom prst="ellipse">
             <a:avLst/>
@@ -12292,8 +12292,8 @@
         </p:nvSpPr>
         <p:spPr>
           <a:xfrm>
-            <a:off x="1302204" y="382089"/>
-            <a:ext cx="5437414" cy="220436"/>
+            <a:off x="502920" y="475488"/>
+            <a:ext cx="6766560" cy="274320"/>
           </a:xfrm>
           <a:prstGeom prst="rect">
             <a:avLst/>
@@ -12309,7 +12309,7 @@
               <a:buNone/>
             </a:pPr>
             <a:r>
-              <a:rPr lang="en-US" sz="1000" b="1" dirty="0">
+              <a:rPr lang="en-US" sz="1250" b="1" dirty="0">
                 <a:solidFill>
                   <a:srgbClr val="FFB020"/>
                 </a:solidFill>
@@ -12319,7 +12319,7 @@
               </a:rPr>
               <a:t>Tuần sau · 下週預告</a:t>
             </a:r>
-            <a:endParaRPr lang="en-US" sz="1000" dirty="0"/>
+            <a:endParaRPr lang="en-US" sz="1250" dirty="0"/>
           </a:p>
         </p:txBody>
       </p:sp>
@@ -12331,8 +12331,8 @@
         </p:nvSpPr>
         <p:spPr>
           <a:xfrm>
-            <a:off x="1302204" y="661307"/>
-            <a:ext cx="6466114" cy="852351"/>
+            <a:off x="502920" y="822960"/>
+            <a:ext cx="8046720" cy="1060704"/>
           </a:xfrm>
           <a:prstGeom prst="rect">
             <a:avLst/>
@@ -12351,7 +12351,7 @@
               <a:buNone/>
             </a:pPr>
             <a:r>
-              <a:rPr lang="en-US" sz="2010" b="1" dirty="0">
+              <a:rPr lang="en-US" sz="2500" b="1" dirty="0">
                 <a:solidFill>
                   <a:srgbClr val="FFFFFF"/>
                 </a:solidFill>
@@ -12361,7 +12361,7 @@
               </a:rPr>
               <a:t>Tuần 6, 15/10: radar, siêu âm, GNSS và IMU</a:t>
             </a:r>
-            <a:endParaRPr lang="en-US" sz="2010" dirty="0"/>
+            <a:endParaRPr lang="en-US" sz="2500" dirty="0"/>
           </a:p>
           <a:p>
             <a:pPr indent="0" marL="0">
@@ -12371,7 +12371,7 @@
               <a:buNone/>
             </a:pPr>
             <a:r>
-              <a:rPr lang="en-US" sz="1210" dirty="0">
+              <a:rPr lang="en-US" sz="1500" dirty="0">
                 <a:solidFill>
                   <a:srgbClr val="AFC3D4"/>
                 </a:solidFill>
@@ -12381,7 +12381,7 @@
               </a:rPr>
               <a:t>第 6 週，10 月 15 日：雷達、超音波、GNSS 與 IMU</a:t>
             </a:r>
-            <a:endParaRPr lang="en-US" sz="2010" dirty="0"/>
+            <a:endParaRPr lang="en-US" sz="2500" dirty="0"/>
           </a:p>
         </p:txBody>
       </p:sp>
@@ -12393,8 +12393,8 @@
         </p:nvSpPr>
         <p:spPr>
           <a:xfrm>
-            <a:off x="1302204" y="1425484"/>
-            <a:ext cx="36739" cy="411480"/>
+            <a:off x="502920" y="1773936"/>
+            <a:ext cx="45720" cy="512064"/>
           </a:xfrm>
           <a:prstGeom prst="rect">
             <a:avLst/>
@@ -12413,8 +12413,8 @@
         </p:nvSpPr>
         <p:spPr>
           <a:xfrm>
-            <a:off x="1478552" y="1396093"/>
-            <a:ext cx="6319157" cy="499654"/>
+            <a:off x="722376" y="1737360"/>
+            <a:ext cx="7863840" cy="621792"/>
           </a:xfrm>
           <a:prstGeom prst="rect">
             <a:avLst/>
@@ -12433,7 +12433,7 @@
               <a:buNone/>
             </a:pPr>
             <a:r>
-              <a:rPr lang="en-US" sz="1080" b="1" dirty="0">
+              <a:rPr lang="en-US" sz="1350" b="1" dirty="0">
                 <a:solidFill>
                   <a:srgbClr val="FFFFFF"/>
                 </a:solidFill>
@@ -12443,7 +12443,7 @@
               </a:rPr>
               <a:t>Vẫn là đọc datasheet — nhưng ba loại này có những dòng hoàn toàn khác.</a:t>
             </a:r>
-            <a:endParaRPr lang="en-US" sz="1080" dirty="0"/>
+            <a:endParaRPr lang="en-US" sz="1350" dirty="0"/>
           </a:p>
           <a:p>
             <a:pPr indent="0" marL="0">
@@ -12453,7 +12453,7 @@
               <a:buNone/>
             </a:pPr>
             <a:r>
-              <a:rPr lang="en-US" sz="960" dirty="0">
+              <a:rPr lang="en-US" sz="1200" dirty="0">
                 <a:solidFill>
                   <a:srgbClr val="AFC3D4"/>
                 </a:solidFill>
@@ -12463,7 +12463,7 @@
               </a:rPr>
               <a:t>一樣是讀規格表——但這三種的規格行完全不一樣。</a:t>
             </a:r>
-            <a:endParaRPr lang="en-US" sz="1080" dirty="0"/>
+            <a:endParaRPr lang="en-US" sz="1350" dirty="0"/>
           </a:p>
         </p:txBody>
       </p:sp>
@@ -12475,8 +12475,8 @@
         </p:nvSpPr>
         <p:spPr>
           <a:xfrm>
-            <a:off x="1302204" y="1998617"/>
-            <a:ext cx="36739" cy="411480"/>
+            <a:off x="502920" y="2487168"/>
+            <a:ext cx="45720" cy="512064"/>
           </a:xfrm>
           <a:prstGeom prst="rect">
             <a:avLst/>
@@ -12495,8 +12495,8 @@
         </p:nvSpPr>
         <p:spPr>
           <a:xfrm>
-            <a:off x="1478552" y="1969226"/>
-            <a:ext cx="6319157" cy="499654"/>
+            <a:off x="722376" y="2450592"/>
+            <a:ext cx="7863840" cy="621792"/>
           </a:xfrm>
           <a:prstGeom prst="rect">
             <a:avLst/>
@@ -12515,7 +12515,7 @@
               <a:buNone/>
             </a:pPr>
             <a:r>
-              <a:rPr lang="en-US" sz="1080" b="1" dirty="0">
+              <a:rPr lang="en-US" sz="1350" b="1" dirty="0">
                 <a:solidFill>
                   <a:srgbClr val="FFFFFF"/>
                 </a:solidFill>
@@ -12525,7 +12525,7 @@
               </a:rPr>
               <a:t>Mang theo: tờ hôm nay. Tuần sau sẽ thêm cột radar vào cùng bảng đó.</a:t>
             </a:r>
-            <a:endParaRPr lang="en-US" sz="1080" dirty="0"/>
+            <a:endParaRPr lang="en-US" sz="1350" dirty="0"/>
           </a:p>
           <a:p>
             <a:pPr indent="0" marL="0">
@@ -12535,7 +12535,7 @@
               <a:buNone/>
             </a:pPr>
             <a:r>
-              <a:rPr lang="en-US" sz="960" dirty="0">
+              <a:rPr lang="en-US" sz="1200" dirty="0">
                 <a:solidFill>
                   <a:srgbClr val="AFC3D4"/>
                 </a:solidFill>
@@ -12545,7 +12545,7 @@
               </a:rPr>
               <a:t>要帶：今天這張紙。下週會在同一張表上加一欄雷達。</a:t>
             </a:r>
-            <a:endParaRPr lang="en-US" sz="1080" dirty="0"/>
+            <a:endParaRPr lang="en-US" sz="1350" dirty="0"/>
           </a:p>
         </p:txBody>
       </p:sp>
@@ -12557,8 +12557,8 @@
         </p:nvSpPr>
         <p:spPr>
           <a:xfrm>
-            <a:off x="1302204" y="2571750"/>
-            <a:ext cx="36739" cy="411480"/>
+            <a:off x="502920" y="3200400"/>
+            <a:ext cx="45720" cy="512064"/>
           </a:xfrm>
           <a:prstGeom prst="rect">
             <a:avLst/>
@@ -12577,8 +12577,8 @@
         </p:nvSpPr>
         <p:spPr>
           <a:xfrm>
-            <a:off x="1478552" y="2542359"/>
-            <a:ext cx="6319157" cy="499654"/>
+            <a:off x="722376" y="3163824"/>
+            <a:ext cx="7863840" cy="621792"/>
           </a:xfrm>
           <a:prstGeom prst="rect">
             <a:avLst/>
@@ -12597,7 +12597,7 @@
               <a:buNone/>
             </a:pPr>
             <a:r>
-              <a:rPr lang="en-US" sz="1080" b="1" dirty="0">
+              <a:rPr lang="en-US" sz="1350" b="1" dirty="0">
                 <a:solidFill>
                   <a:srgbClr val="FFFFFF"/>
                 </a:solidFill>
@@ -12607,7 +12607,7 @@
               </a:rPr>
               <a:t>Làm: đọc 3.4–3.6 trong giáo trình trước khi lên lớp.</a:t>
             </a:r>
-            <a:endParaRPr lang="en-US" sz="1080" dirty="0"/>
+            <a:endParaRPr lang="en-US" sz="1350" dirty="0"/>
           </a:p>
           <a:p>
             <a:pPr indent="0" marL="0">
@@ -12617,7 +12617,7 @@
               <a:buNone/>
             </a:pPr>
             <a:r>
-              <a:rPr lang="en-US" sz="960" dirty="0">
+              <a:rPr lang="en-US" sz="1200" dirty="0">
                 <a:solidFill>
                   <a:srgbClr val="AFC3D4"/>
                 </a:solidFill>
@@ -12627,7 +12627,7 @@
               </a:rPr>
               <a:t>要做：上課前先讀講義 3.4–3.6。</a:t>
             </a:r>
-            <a:endParaRPr lang="en-US" sz="1080" dirty="0"/>
+            <a:endParaRPr lang="en-US" sz="1350" dirty="0"/>
           </a:p>
         </p:txBody>
       </p:sp>
@@ -12639,8 +12639,8 @@
         </p:nvSpPr>
         <p:spPr>
           <a:xfrm>
-            <a:off x="986246" y="102870"/>
-            <a:ext cx="661307" cy="205740"/>
+            <a:off x="109728" y="128016"/>
+            <a:ext cx="822960" cy="256032"/>
           </a:xfrm>
           <a:prstGeom prst="rect">
             <a:avLst/>
@@ -12656,7 +12656,7 @@
               <a:buNone/>
             </a:pPr>
             <a:r>
-              <a:rPr lang="en-US" sz="720" dirty="0">
+              <a:rPr lang="en-US" sz="900" dirty="0">
                 <a:solidFill>
                   <a:srgbClr val="9FB3C8"/>
                 </a:solidFill>
@@ -12666,7 +12666,7 @@
               </a:rPr>
               <a:t>9 / 9</a:t>
             </a:r>
-            <a:endParaRPr lang="en-US" sz="720" dirty="0"/>
+            <a:endParaRPr lang="en-US" sz="900" dirty="0"/>
           </a:p>
         </p:txBody>
       </p:sp>
@@ -12678,8 +12678,8 @@
         </p:nvSpPr>
         <p:spPr>
           <a:xfrm>
-            <a:off x="1669596" y="102870"/>
-            <a:ext cx="1616529" cy="205740"/>
+            <a:off x="960120" y="128016"/>
+            <a:ext cx="2011680" cy="256032"/>
           </a:xfrm>
           <a:prstGeom prst="rect">
             <a:avLst/>
@@ -12695,7 +12695,7 @@
               <a:buNone/>
             </a:pPr>
             <a:r>
-              <a:rPr lang="en-US" sz="720" dirty="0">
+              <a:rPr lang="en-US" sz="900" dirty="0">
                 <a:solidFill>
                   <a:srgbClr val="9FB3C8"/>
                 </a:solidFill>
@@ -12705,7 +12705,7 @@
               </a:rPr>
               <a:t>Tiết 3 · 第 3 節</a:t>
             </a:r>
-            <a:endParaRPr lang="en-US" sz="720" dirty="0"/>
+            <a:endParaRPr lang="en-US" sz="900" dirty="0"/>
           </a:p>
         </p:txBody>
       </p:sp>

--- a/第五週(10-08)/第五週_第3節_簡報.pptx
+++ b/第五週(10-08)/第五週_第3節_簡報.pptx
@@ -1756,7 +1756,7 @@
                 <a:ea typeface="Arial Unicode MS"/>
                 <a:cs typeface="Arial Unicode MS"/>
               </a:rPr>
-              <a:t>AT128 在四十公尺的行人身上有八十四個點，過。相機的估距誤差在四十公尺是正負零點五八公尺，也過。
+              <a:t>AT128P 在四十公尺的行人身上有八十四個點，過。相機的估距誤差在四十公尺是正負零點五八公尺，也過。
 </a:t>
             </a:r>
           </a:p>
@@ -3098,7 +3098,7 @@
                 <a:ea typeface="Arial Unicode MS"/>
                 <a:cs typeface="Arial Unicode MS"/>
               </a:rPr>
-              <a:t>AT128 過了。</a:t>
+              <a:t>AT128P 過了。</a:t>
             </a:r>
             <a:r>
               <a:rPr sz="1000" lang="zh-TW" dirty="0">
@@ -3549,7 +3549,7 @@
                 <a:ea typeface="Arial Unicode MS"/>
                 <a:cs typeface="Arial Unicode MS"/>
               </a:rPr>
-              <a:t>AT128 三個情境都過。相機是校園和河內過、國道不過。OS1 校園不過、河內換模式之後過、國道不過。LD-16 一個都沒過。</a:t>
+              <a:t>AT128P 三個情境都過。相機是校園和河內過、國道不過。OS1 校園不過、河內換模式之後過、國道不過。LD-16 一個都沒過。</a:t>
             </a:r>
             <a:r>
               <a:rPr sz="1000" lang="zh-TW" dirty="0">
@@ -3582,7 +3582,7 @@
                 <a:ea typeface="Arial Unicode MS"/>
                 <a:cs typeface="Arial Unicode MS"/>
               </a:rPr>
-              <a:t>所以結論很明顯，每一台車都裝 AT128 就好了，對不對？
+              <a:t>所以結論很明顯，每一台車都裝 AT128P 就好了，對不對？
 </a:t>
             </a:r>
           </a:p>
@@ -3714,7 +3714,7 @@
                 <a:ea typeface="Arial Unicode MS"/>
                 <a:cs typeface="Arial Unicode MS"/>
               </a:rPr>
-              <a:t>鑽出來的。AT128 看不到兩側。所以就算你裝了它，還是得再裝別的東西補兩邊——這就回到第三週那張「每一種的弱點，由哪一種來補」的表。
+              <a:t>鑽出來的。AT128P 看不到兩側。所以就算你裝了它，還是得再裝別的東西補兩邊——這就回到第三週那張「每一種的弱點，由哪一種來補」的表。
 </a:t>
             </a:r>
           </a:p>
@@ -9592,7 +9592,7 @@
                 <a:ea typeface="Arial" pitchFamily="34" charset="-122"/>
                 <a:cs typeface="Arial" pitchFamily="34" charset="-120"/>
               </a:rPr>
-              <a:t>AT128 qua được, nhưng chỉ còn mấy điểm trên chiếc xe ở 150 m?</a:t>
+              <a:t>AT128P qua được, nhưng chỉ còn mấy điểm trên chiếc xe ở 150 m?</a:t>
             </a:r>
             <a:endParaRPr lang="en-US" sz="1250" dirty="0"/>
           </a:p>
@@ -9612,7 +9612,7 @@
                 <a:ea typeface="微軟正黑體" pitchFamily="34" charset="-122"/>
                 <a:cs typeface="微軟正黑體" pitchFamily="34" charset="-120"/>
               </a:rPr>
-              <a:t>AT128 過了，可是 150 公尺外那台車身上只剩幾個點？</a:t>
+              <a:t>AT128P 過了，可是 150 公尺外那台車身上只剩幾個點？</a:t>
             </a:r>
             <a:endParaRPr lang="en-US" sz="1250" dirty="0"/>
           </a:p>
@@ -10066,7 +10066,7 @@
                 <a:ea typeface="Arial" pitchFamily="34" charset="-122"/>
                 <a:cs typeface="Arial" pitchFamily="34" charset="-120"/>
               </a:rPr>
-              <a:t>AT128 qua cả ba · camera hai · OS1 một · LD-16 không cái nào</a:t>
+              <a:t>AT128P qua cả ba · camera hai · OS1 một · LD-16 không cái nào</a:t>
             </a:r>
             <a:endParaRPr lang="en-US" sz="1000" dirty="0"/>
           </a:p>
@@ -10086,7 +10086,7 @@
                 <a:ea typeface="微軟正黑體" pitchFamily="34" charset="-122"/>
                 <a:cs typeface="微軟正黑體" pitchFamily="34" charset="-120"/>
               </a:rPr>
-              <a:t>AT128 三個都過・相機兩個・OS1 一個・LD-16 都沒過</a:t>
+              <a:t>AT128P 三個都過・相機兩個・OS1 一個・LD-16 都沒過</a:t>
             </a:r>
             <a:endParaRPr lang="en-US" sz="1000" dirty="0"/>
           </a:p>
@@ -10591,7 +10591,7 @@
                 <a:ea typeface="Arial" pitchFamily="34" charset="-122"/>
                 <a:cs typeface="Arial" pitchFamily="34" charset="-120"/>
               </a:rPr>
-              <a:t>Vậy cứ mua AT128 cho mọi xe là xong?</a:t>
+              <a:t>Vậy cứ mua AT128P cho mọi xe là xong?</a:t>
             </a:r>
             <a:endParaRPr lang="en-US" sz="1300" dirty="0"/>
           </a:p>
@@ -10611,7 +10611,7 @@
                 <a:ea typeface="微軟正黑體" pitchFamily="34" charset="-122"/>
                 <a:cs typeface="微軟正黑體" pitchFamily="34" charset="-120"/>
               </a:rPr>
-              <a:t>那每台車都買 AT128 就好了？</a:t>
+              <a:t>那每台車都買 AT128P 就好了？</a:t>
             </a:r>
             <a:endParaRPr lang="en-US" sz="1300" dirty="0"/>
           </a:p>

--- a/第五週(10-08)/第五週_第3節_簡報.pptx
+++ b/第五週(10-08)/第五週_第3節_簡報.pptx
@@ -431,15 +431,15 @@
           <a:lstStyle/>
           <a:p>
             <a:pPr algn="l">
-              <a:lnSpc>
-                <a:spcPct val="115000"/>
-              </a:lnSpc>
-              <a:spcAft>
-                <a:spcPts val="575"/>
-              </a:spcAft>
-            </a:pPr>
-            <a:r>
-              <a:rPr sz="1150" b="1" lang="zh-TW" dirty="0">
+              <a:spcBef>
+                <a:spcPts val="0"/>
+              </a:spcBef>
+              <a:spcAft>
+                <a:spcPts val="200"/>
+              </a:spcAft>
+            </a:pPr>
+            <a:r>
+              <a:rPr sz="1200" b="1" lang="zh-TW" dirty="0">
                 <a:solidFill>
                   <a:srgbClr val="000000"/>
                 </a:solidFill>
@@ -450,7 +450,7 @@
               <a:t>▍這一張要做什麼</a:t>
             </a:r>
             <a:r>
-              <a:rPr sz="1150" lang="zh-TW" dirty="0">
+              <a:rPr sz="1200" lang="zh-TW" dirty="0">
                 <a:solidFill>
                   <a:srgbClr val="000000"/>
                 </a:solidFill>
@@ -464,15 +464,15 @@
           </a:p>
           <a:p>
             <a:pPr algn="l">
-              <a:lnSpc>
-                <a:spcPct val="115000"/>
-              </a:lnSpc>
-              <a:spcAft>
-                <a:spcPts val="575"/>
-              </a:spcAft>
-            </a:pPr>
-            <a:r>
-              <a:rPr sz="1150" lang="zh-TW" dirty="0">
+              <a:spcBef>
+                <a:spcPts val="0"/>
+              </a:spcBef>
+              <a:spcAft>
+                <a:spcPts val="200"/>
+              </a:spcAft>
+            </a:pPr>
+            <a:r>
+              <a:rPr sz="1200" lang="zh-TW" dirty="0">
                 <a:solidFill>
                   <a:srgbClr val="000000"/>
                 </a:solidFill>
@@ -486,15 +486,15 @@
           </a:p>
           <a:p>
             <a:pPr algn="l">
-              <a:lnSpc>
-                <a:spcPct val="115000"/>
-              </a:lnSpc>
-              <a:spcAft>
-                <a:spcPts val="575"/>
-              </a:spcAft>
-            </a:pPr>
-            <a:r>
-              <a:rPr sz="1150" b="1" lang="zh-TW" dirty="0">
+              <a:spcBef>
+                <a:spcPts val="0"/>
+              </a:spcBef>
+              <a:spcAft>
+                <a:spcPts val="200"/>
+              </a:spcAft>
+            </a:pPr>
+            <a:r>
+              <a:rPr sz="1200" b="1" lang="zh-TW" dirty="0">
                 <a:solidFill>
                   <a:srgbClr val="000000"/>
                 </a:solidFill>
@@ -505,7 +505,7 @@
               <a:t>▍畫面上圈這裡</a:t>
             </a:r>
             <a:r>
-              <a:rPr sz="1150" lang="zh-TW" dirty="0">
+              <a:rPr sz="1200" lang="zh-TW" dirty="0">
                 <a:solidFill>
                   <a:srgbClr val="000000"/>
                 </a:solidFill>
@@ -519,15 +519,15 @@
           </a:p>
           <a:p>
             <a:pPr algn="l">
-              <a:lnSpc>
-                <a:spcPct val="115000"/>
-              </a:lnSpc>
-              <a:spcAft>
-                <a:spcPts val="575"/>
-              </a:spcAft>
-            </a:pPr>
-            <a:r>
-              <a:rPr sz="1150" lang="zh-TW" dirty="0">
+              <a:spcBef>
+                <a:spcPts val="0"/>
+              </a:spcBef>
+              <a:spcAft>
+                <a:spcPts val="200"/>
+              </a:spcAft>
+            </a:pPr>
+            <a:r>
+              <a:rPr sz="1200" lang="zh-TW" dirty="0">
                 <a:solidFill>
                   <a:srgbClr val="000000"/>
                 </a:solidFill>
@@ -541,15 +541,15 @@
           </a:p>
           <a:p>
             <a:pPr algn="l">
-              <a:lnSpc>
-                <a:spcPct val="115000"/>
-              </a:lnSpc>
-              <a:spcAft>
-                <a:spcPts val="575"/>
-              </a:spcAft>
-            </a:pPr>
-            <a:r>
-              <a:rPr sz="1150" b="1" lang="zh-TW" dirty="0">
+              <a:spcBef>
+                <a:spcPts val="0"/>
+              </a:spcBef>
+              <a:spcAft>
+                <a:spcPts val="200"/>
+              </a:spcAft>
+            </a:pPr>
+            <a:r>
+              <a:rPr sz="1200" b="1" lang="zh-TW" dirty="0">
                 <a:solidFill>
                   <a:srgbClr val="000000"/>
                 </a:solidFill>
@@ -560,7 +560,7 @@
               <a:t>▍以下照著唸</a:t>
             </a:r>
             <a:r>
-              <a:rPr sz="1150" lang="zh-TW" dirty="0">
+              <a:rPr sz="1200" lang="zh-TW" dirty="0">
                 <a:solidFill>
                   <a:srgbClr val="000000"/>
                 </a:solidFill>
@@ -574,15 +574,15 @@
           </a:p>
           <a:p>
             <a:pPr algn="l">
-              <a:lnSpc>
-                <a:spcPct val="115000"/>
-              </a:lnSpc>
-              <a:spcAft>
-                <a:spcPts val="575"/>
-              </a:spcAft>
-            </a:pPr>
-            <a:r>
-              <a:rPr sz="1150" lang="zh-TW" dirty="0">
+              <a:spcBef>
+                <a:spcPts val="0"/>
+              </a:spcBef>
+              <a:spcAft>
+                <a:spcPts val="200"/>
+              </a:spcAft>
+            </a:pPr>
+            <a:r>
+              <a:rPr sz="1200" lang="zh-TW" dirty="0">
                 <a:solidFill>
                   <a:srgbClr val="000000"/>
                 </a:solidFill>
@@ -596,15 +596,15 @@
           </a:p>
           <a:p>
             <a:pPr algn="l">
-              <a:lnSpc>
-                <a:spcPct val="115000"/>
-              </a:lnSpc>
-              <a:spcAft>
-                <a:spcPts val="575"/>
-              </a:spcAft>
-            </a:pPr>
-            <a:r>
-              <a:rPr sz="1150" lang="zh-TW" dirty="0">
+              <a:spcBef>
+                <a:spcPts val="0"/>
+              </a:spcBef>
+              <a:spcAft>
+                <a:spcPts val="200"/>
+              </a:spcAft>
+            </a:pPr>
+            <a:r>
+              <a:rPr sz="1200" lang="zh-TW" dirty="0">
                 <a:solidFill>
                   <a:srgbClr val="000000"/>
                 </a:solidFill>
@@ -618,15 +618,15 @@
           </a:p>
           <a:p>
             <a:pPr algn="l">
-              <a:lnSpc>
-                <a:spcPct val="115000"/>
-              </a:lnSpc>
-              <a:spcAft>
-                <a:spcPts val="575"/>
-              </a:spcAft>
-            </a:pPr>
-            <a:r>
-              <a:rPr sz="1150" lang="zh-TW" dirty="0">
+              <a:spcBef>
+                <a:spcPts val="0"/>
+              </a:spcBef>
+              <a:spcAft>
+                <a:spcPts val="200"/>
+              </a:spcAft>
+            </a:pPr>
+            <a:r>
+              <a:rPr sz="1200" lang="zh-TW" dirty="0">
                 <a:solidFill>
                   <a:srgbClr val="000000"/>
                 </a:solidFill>
@@ -637,7 +637,7 @@
               <a:t>規則很簡單：</a:t>
             </a:r>
             <a:r>
-              <a:rPr sz="1150" b="1" lang="zh-TW" dirty="0">
+              <a:rPr sz="1200" b="1" lang="zh-TW" dirty="0">
                 <a:solidFill>
                   <a:srgbClr val="000000"/>
                 </a:solidFill>
@@ -648,7 +648,7 @@
               <a:t>我給你一台車要在哪裡跑，你告訴我哪一顆感測器可以用、哪一顆不行，而且要講得出卡在哪一行。</a:t>
             </a:r>
             <a:r>
-              <a:rPr sz="1150" lang="zh-TW" dirty="0">
+              <a:rPr sz="1200" lang="zh-TW" dirty="0">
                 <a:solidFill>
                   <a:srgbClr val="000000"/>
                 </a:solidFill>
@@ -662,15 +662,15 @@
           </a:p>
           <a:p>
             <a:pPr algn="l">
-              <a:lnSpc>
-                <a:spcPct val="115000"/>
-              </a:lnSpc>
-              <a:spcAft>
-                <a:spcPts val="575"/>
-              </a:spcAft>
-            </a:pPr>
-            <a:r>
-              <a:rPr sz="1150" lang="zh-TW" dirty="0">
+              <a:spcBef>
+                <a:spcPts val="0"/>
+              </a:spcBef>
+              <a:spcAft>
+                <a:spcPts val="200"/>
+              </a:spcAft>
+            </a:pPr>
+            <a:r>
+              <a:rPr sz="1200" lang="zh-TW" dirty="0">
                 <a:solidFill>
                   <a:srgbClr val="000000"/>
                 </a:solidFill>
@@ -684,15 +684,15 @@
           </a:p>
           <a:p>
             <a:pPr algn="l">
-              <a:lnSpc>
-                <a:spcPct val="115000"/>
-              </a:lnSpc>
-              <a:spcAft>
-                <a:spcPts val="575"/>
-              </a:spcAft>
-            </a:pPr>
-            <a:r>
-              <a:rPr sz="1150" lang="zh-TW" dirty="0">
+              <a:spcBef>
+                <a:spcPts val="0"/>
+              </a:spcBef>
+              <a:spcAft>
+                <a:spcPts val="200"/>
+              </a:spcAft>
+            </a:pPr>
+            <a:r>
+              <a:rPr sz="1200" lang="zh-TW" dirty="0">
                 <a:solidFill>
                   <a:srgbClr val="000000"/>
                 </a:solidFill>
@@ -703,7 +703,7 @@
               <a:t>這一節是</a:t>
             </a:r>
             <a:r>
-              <a:rPr sz="1150" b="1" lang="zh-TW" dirty="0">
+              <a:rPr sz="1200" b="1" lang="zh-TW" dirty="0">
                 <a:solidFill>
                   <a:srgbClr val="000000"/>
                 </a:solidFill>
@@ -714,7 +714,7 @@
               <a:t>個人作業</a:t>
             </a:r>
             <a:r>
-              <a:rPr sz="1150" lang="zh-TW" dirty="0">
+              <a:rPr sz="1200" lang="zh-TW" dirty="0">
                 <a:solidFill>
                   <a:srgbClr val="000000"/>
                 </a:solidFill>
@@ -728,15 +728,15 @@
           </a:p>
           <a:p>
             <a:pPr algn="l">
-              <a:lnSpc>
-                <a:spcPct val="115000"/>
-              </a:lnSpc>
-              <a:spcAft>
-                <a:spcPts val="575"/>
-              </a:spcAft>
-            </a:pPr>
-            <a:r>
-              <a:rPr sz="1150" lang="zh-TW" dirty="0">
+              <a:spcBef>
+                <a:spcPts val="0"/>
+              </a:spcBef>
+              <a:spcAft>
+                <a:spcPts val="200"/>
+              </a:spcAft>
+            </a:pPr>
+            <a:r>
+              <a:rPr sz="1200" lang="zh-TW" dirty="0">
                 <a:solidFill>
                   <a:srgbClr val="000000"/>
                 </a:solidFill>
@@ -770,11 +770,11 @@
           <a:lstStyle/>
           <a:p>
             <a:pPr algn="l">
-              <a:lnSpc>
-                <a:spcPct val="115000"/>
-              </a:lnSpc>
-              <a:spcAft>
-                <a:spcPts val="500"/>
+              <a:spcBef>
+                <a:spcPts val="0"/>
+              </a:spcBef>
+              <a:spcAft>
+                <a:spcPts val="167"/>
               </a:spcAft>
             </a:pPr>
             <a:r>
@@ -849,15 +849,15 @@
           <a:lstStyle/>
           <a:p>
             <a:pPr algn="l">
-              <a:lnSpc>
-                <a:spcPct val="115000"/>
-              </a:lnSpc>
-              <a:spcAft>
-                <a:spcPts val="500"/>
-              </a:spcAft>
-            </a:pPr>
-            <a:r>
-              <a:rPr sz="1000" b="1" lang="zh-TW" dirty="0">
+              <a:spcBef>
+                <a:spcPts val="0"/>
+              </a:spcBef>
+              <a:spcAft>
+                <a:spcPts val="142"/>
+              </a:spcAft>
+            </a:pPr>
+            <a:r>
+              <a:rPr sz="850" b="1" lang="zh-TW" dirty="0">
                 <a:solidFill>
                   <a:srgbClr val="000000"/>
                 </a:solidFill>
@@ -868,7 +868,7 @@
               <a:t>▍這一張要做什麼</a:t>
             </a:r>
             <a:r>
-              <a:rPr sz="1000" lang="zh-TW" dirty="0">
+              <a:rPr sz="850" lang="zh-TW" dirty="0">
                 <a:solidFill>
                   <a:srgbClr val="000000"/>
                 </a:solidFill>
@@ -882,15 +882,15 @@
           </a:p>
           <a:p>
             <a:pPr algn="l">
-              <a:lnSpc>
-                <a:spcPct val="115000"/>
-              </a:lnSpc>
-              <a:spcAft>
-                <a:spcPts val="500"/>
-              </a:spcAft>
-            </a:pPr>
-            <a:r>
-              <a:rPr sz="1000" lang="zh-TW" dirty="0">
+              <a:spcBef>
+                <a:spcPts val="0"/>
+              </a:spcBef>
+              <a:spcAft>
+                <a:spcPts val="142"/>
+              </a:spcAft>
+            </a:pPr>
+            <a:r>
+              <a:rPr sz="850" lang="zh-TW" dirty="0">
                 <a:solidFill>
                   <a:srgbClr val="000000"/>
                 </a:solidFill>
@@ -904,15 +904,15 @@
           </a:p>
           <a:p>
             <a:pPr algn="l">
-              <a:lnSpc>
-                <a:spcPct val="115000"/>
-              </a:lnSpc>
-              <a:spcAft>
-                <a:spcPts val="500"/>
-              </a:spcAft>
-            </a:pPr>
-            <a:r>
-              <a:rPr sz="1000" b="1" lang="zh-TW" dirty="0">
+              <a:spcBef>
+                <a:spcPts val="0"/>
+              </a:spcBef>
+              <a:spcAft>
+                <a:spcPts val="142"/>
+              </a:spcAft>
+            </a:pPr>
+            <a:r>
+              <a:rPr sz="850" b="1" lang="zh-TW" dirty="0">
                 <a:solidFill>
                   <a:srgbClr val="000000"/>
                 </a:solidFill>
@@ -923,7 +923,7 @@
               <a:t>▍畫面上圈這裡</a:t>
             </a:r>
             <a:r>
-              <a:rPr sz="1000" lang="zh-TW" dirty="0">
+              <a:rPr sz="850" lang="zh-TW" dirty="0">
                 <a:solidFill>
                   <a:srgbClr val="000000"/>
                 </a:solidFill>
@@ -937,15 +937,15 @@
           </a:p>
           <a:p>
             <a:pPr algn="l">
-              <a:lnSpc>
-                <a:spcPct val="115000"/>
-              </a:lnSpc>
-              <a:spcAft>
-                <a:spcPts val="500"/>
-              </a:spcAft>
-            </a:pPr>
-            <a:r>
-              <a:rPr sz="1000" lang="zh-TW" dirty="0">
+              <a:spcBef>
+                <a:spcPts val="0"/>
+              </a:spcBef>
+              <a:spcAft>
+                <a:spcPts val="142"/>
+              </a:spcAft>
+            </a:pPr>
+            <a:r>
+              <a:rPr sz="850" lang="zh-TW" dirty="0">
                 <a:solidFill>
                   <a:srgbClr val="000000"/>
                 </a:solidFill>
@@ -959,15 +959,15 @@
           </a:p>
           <a:p>
             <a:pPr algn="l">
-              <a:lnSpc>
-                <a:spcPct val="115000"/>
-              </a:lnSpc>
-              <a:spcAft>
-                <a:spcPts val="500"/>
-              </a:spcAft>
-            </a:pPr>
-            <a:r>
-              <a:rPr sz="1000" b="1" lang="zh-TW" dirty="0">
+              <a:spcBef>
+                <a:spcPts val="0"/>
+              </a:spcBef>
+              <a:spcAft>
+                <a:spcPts val="142"/>
+              </a:spcAft>
+            </a:pPr>
+            <a:r>
+              <a:rPr sz="850" b="1" lang="zh-TW" dirty="0">
                 <a:solidFill>
                   <a:srgbClr val="000000"/>
                 </a:solidFill>
@@ -978,7 +978,7 @@
               <a:t>▍以下照著唸</a:t>
             </a:r>
             <a:r>
-              <a:rPr sz="1000" lang="zh-TW" dirty="0">
+              <a:rPr sz="850" lang="zh-TW" dirty="0">
                 <a:solidFill>
                   <a:srgbClr val="000000"/>
                 </a:solidFill>
@@ -992,15 +992,15 @@
           </a:p>
           <a:p>
             <a:pPr algn="l">
-              <a:lnSpc>
-                <a:spcPct val="115000"/>
-              </a:lnSpc>
-              <a:spcAft>
-                <a:spcPts val="500"/>
-              </a:spcAft>
-            </a:pPr>
-            <a:r>
-              <a:rPr sz="1000" lang="zh-TW" dirty="0">
+              <a:spcBef>
+                <a:spcPts val="0"/>
+              </a:spcBef>
+              <a:spcAft>
+                <a:spcPts val="142"/>
+              </a:spcAft>
+            </a:pPr>
+            <a:r>
+              <a:rPr sz="850" lang="zh-TW" dirty="0">
                 <a:solidFill>
                   <a:srgbClr val="000000"/>
                 </a:solidFill>
@@ -1014,15 +1014,15 @@
           </a:p>
           <a:p>
             <a:pPr algn="l">
-              <a:lnSpc>
-                <a:spcPct val="115000"/>
-              </a:lnSpc>
-              <a:spcAft>
-                <a:spcPts val="500"/>
-              </a:spcAft>
-            </a:pPr>
-            <a:r>
-              <a:rPr sz="1000" b="1" lang="zh-TW" dirty="0">
+              <a:spcBef>
+                <a:spcPts val="0"/>
+              </a:spcBef>
+              <a:spcAft>
+                <a:spcPts val="142"/>
+              </a:spcAft>
+            </a:pPr>
+            <a:r>
+              <a:rPr sz="850" b="1" lang="zh-TW" dirty="0">
                 <a:solidFill>
                   <a:srgbClr val="000000"/>
                 </a:solidFill>
@@ -1033,7 +1033,7 @@
               <a:t>第一步，選型號。</a:t>
             </a:r>
             <a:r>
-              <a:rPr sz="1000" lang="zh-TW" dirty="0">
+              <a:rPr sz="850" lang="zh-TW" dirty="0">
                 <a:solidFill>
                   <a:srgbClr val="000000"/>
                 </a:solidFill>
@@ -1044,7 +1044,7 @@
               <a:t>左邊四個按鈕，你要算哪一顆就按哪一顆。這裡我要請各位做一件事：</a:t>
             </a:r>
             <a:r>
-              <a:rPr sz="1000" b="1" lang="zh-TW" dirty="0">
+              <a:rPr sz="850" b="1" lang="zh-TW" dirty="0">
                 <a:solidFill>
                   <a:srgbClr val="000000"/>
                 </a:solidFill>
@@ -1055,7 +1055,7 @@
               <a:t>把「只看英文原文」按下去</a:t>
             </a:r>
             <a:r>
-              <a:rPr sz="1000" lang="zh-TW" dirty="0">
+              <a:rPr sz="850" lang="zh-TW" dirty="0">
                 <a:solidFill>
                   <a:srgbClr val="000000"/>
                 </a:solidFill>
@@ -1069,15 +1069,15 @@
           </a:p>
           <a:p>
             <a:pPr algn="l">
-              <a:lnSpc>
-                <a:spcPct val="115000"/>
-              </a:lnSpc>
-              <a:spcAft>
-                <a:spcPts val="500"/>
-              </a:spcAft>
-            </a:pPr>
-            <a:r>
-              <a:rPr sz="1000" lang="zh-TW" dirty="0">
+              <a:spcBef>
+                <a:spcPts val="0"/>
+              </a:spcBef>
+              <a:spcAft>
+                <a:spcPts val="142"/>
+              </a:spcAft>
+            </a:pPr>
+            <a:r>
+              <a:rPr sz="850" lang="zh-TW" dirty="0">
                 <a:solidFill>
                   <a:srgbClr val="000000"/>
                 </a:solidFill>
@@ -1091,15 +1091,15 @@
           </a:p>
           <a:p>
             <a:pPr algn="l">
-              <a:lnSpc>
-                <a:spcPct val="115000"/>
-              </a:lnSpc>
-              <a:spcAft>
-                <a:spcPts val="500"/>
-              </a:spcAft>
-            </a:pPr>
-            <a:r>
-              <a:rPr sz="1000" b="1" lang="zh-TW" dirty="0">
+              <a:spcBef>
+                <a:spcPts val="0"/>
+              </a:spcBef>
+              <a:spcAft>
+                <a:spcPts val="142"/>
+              </a:spcAft>
+            </a:pPr>
+            <a:r>
+              <a:rPr sz="850" b="1" lang="zh-TW" dirty="0">
                 <a:solidFill>
                   <a:srgbClr val="000000"/>
                 </a:solidFill>
@@ -1110,7 +1110,7 @@
               <a:t>第二步，找四個數字。</a:t>
             </a:r>
             <a:r>
-              <a:rPr sz="1000" lang="zh-TW" dirty="0">
+              <a:rPr sz="850" lang="zh-TW" dirty="0">
                 <a:solidFill>
                   <a:srgbClr val="000000"/>
                 </a:solidFill>
@@ -1124,15 +1124,15 @@
           </a:p>
           <a:p>
             <a:pPr algn="l">
-              <a:lnSpc>
-                <a:spcPct val="115000"/>
-              </a:lnSpc>
-              <a:spcAft>
-                <a:spcPts val="500"/>
-              </a:spcAft>
-            </a:pPr>
-            <a:r>
-              <a:rPr sz="1000" b="1" lang="zh-TW" dirty="0">
+              <a:spcBef>
+                <a:spcPts val="0"/>
+              </a:spcBef>
+              <a:spcAft>
+                <a:spcPts val="142"/>
+              </a:spcAft>
+            </a:pPr>
+            <a:r>
+              <a:rPr sz="850" b="1" lang="zh-TW" dirty="0">
                 <a:solidFill>
                   <a:srgbClr val="000000"/>
                 </a:solidFill>
@@ -1143,7 +1143,7 @@
               <a:t>第三步，選情境。</a:t>
             </a:r>
             <a:r>
-              <a:rPr sz="1000" lang="zh-TW" dirty="0">
+              <a:rPr sz="850" lang="zh-TW" dirty="0">
                 <a:solidFill>
                   <a:srgbClr val="000000"/>
                 </a:solidFill>
@@ -1157,15 +1157,15 @@
           </a:p>
           <a:p>
             <a:pPr algn="l">
-              <a:lnSpc>
-                <a:spcPct val="115000"/>
-              </a:lnSpc>
-              <a:spcAft>
-                <a:spcPts val="500"/>
-              </a:spcAft>
-            </a:pPr>
-            <a:r>
-              <a:rPr sz="1000" b="1" lang="zh-TW" dirty="0">
+              <a:spcBef>
+                <a:spcPts val="0"/>
+              </a:spcBef>
+              <a:spcAft>
+                <a:spcPts val="142"/>
+              </a:spcAft>
+            </a:pPr>
+            <a:r>
+              <a:rPr sz="850" b="1" lang="zh-TW" dirty="0">
                 <a:solidFill>
                   <a:srgbClr val="000000"/>
                 </a:solidFill>
@@ -1176,7 +1176,7 @@
               <a:t>第四步，寫結論。</a:t>
             </a:r>
             <a:r>
-              <a:rPr sz="1000" lang="zh-TW" dirty="0">
+              <a:rPr sz="850" lang="zh-TW" dirty="0">
                 <a:solidFill>
                   <a:srgbClr val="000000"/>
                 </a:solidFill>
@@ -1190,15 +1190,15 @@
           </a:p>
           <a:p>
             <a:pPr algn="l">
-              <a:lnSpc>
-                <a:spcPct val="115000"/>
-              </a:lnSpc>
-              <a:spcAft>
-                <a:spcPts val="500"/>
-              </a:spcAft>
-            </a:pPr>
-            <a:r>
-              <a:rPr sz="1000" lang="zh-TW" dirty="0">
+              <a:spcBef>
+                <a:spcPts val="0"/>
+              </a:spcBef>
+              <a:spcAft>
+                <a:spcPts val="142"/>
+              </a:spcAft>
+            </a:pPr>
+            <a:r>
+              <a:rPr sz="850" lang="zh-TW" dirty="0">
                 <a:solidFill>
                   <a:srgbClr val="000000"/>
                 </a:solidFill>
@@ -1209,7 +1209,7 @@
               <a:t>我要看到的不是「夠」或「不夠」兩個字，是</a:t>
             </a:r>
             <a:r>
-              <a:rPr sz="1000" b="1" lang="zh-TW" dirty="0">
+              <a:rPr sz="850" b="1" lang="zh-TW" dirty="0">
                 <a:solidFill>
                   <a:srgbClr val="000000"/>
                 </a:solidFill>
@@ -1220,7 +1220,7 @@
               <a:t>卡在哪一行</a:t>
             </a:r>
             <a:r>
-              <a:rPr sz="1000" lang="zh-TW" dirty="0">
+              <a:rPr sz="850" lang="zh-TW" dirty="0">
                 <a:solidFill>
                   <a:srgbClr val="000000"/>
                 </a:solidFill>
@@ -1234,15 +1234,15 @@
           </a:p>
           <a:p>
             <a:pPr algn="l">
-              <a:lnSpc>
-                <a:spcPct val="115000"/>
-              </a:lnSpc>
-              <a:spcAft>
-                <a:spcPts val="500"/>
-              </a:spcAft>
-            </a:pPr>
-            <a:r>
-              <a:rPr sz="1000" lang="zh-TW" dirty="0">
+              <a:spcBef>
+                <a:spcPts val="0"/>
+              </a:spcBef>
+              <a:spcAft>
+                <a:spcPts val="142"/>
+              </a:spcAft>
+            </a:pPr>
+            <a:r>
+              <a:rPr sz="850" lang="zh-TW" dirty="0">
                 <a:solidFill>
                   <a:srgbClr val="000000"/>
                 </a:solidFill>
@@ -1256,15 +1256,15 @@
           </a:p>
           <a:p>
             <a:pPr algn="l">
-              <a:lnSpc>
-                <a:spcPct val="115000"/>
-              </a:lnSpc>
-              <a:spcAft>
-                <a:spcPts val="500"/>
-              </a:spcAft>
-            </a:pPr>
-            <a:r>
-              <a:rPr sz="1000" lang="zh-TW" dirty="0">
+              <a:spcBef>
+                <a:spcPts val="0"/>
+              </a:spcBef>
+              <a:spcAft>
+                <a:spcPts val="142"/>
+              </a:spcAft>
+            </a:pPr>
+            <a:r>
+              <a:rPr sz="850" lang="zh-TW" dirty="0">
                 <a:solidFill>
                   <a:srgbClr val="000000"/>
                 </a:solidFill>
@@ -1278,15 +1278,15 @@
           </a:p>
           <a:p>
             <a:pPr algn="l">
-              <a:lnSpc>
-                <a:spcPct val="115000"/>
-              </a:lnSpc>
-              <a:spcAft>
-                <a:spcPts val="500"/>
-              </a:spcAft>
-            </a:pPr>
-            <a:r>
-              <a:rPr sz="1000" lang="zh-TW" dirty="0">
+              <a:spcBef>
+                <a:spcPts val="0"/>
+              </a:spcBef>
+              <a:spcAft>
+                <a:spcPts val="142"/>
+              </a:spcAft>
+            </a:pPr>
+            <a:r>
+              <a:rPr sz="850" lang="zh-TW" dirty="0">
                 <a:solidFill>
                   <a:srgbClr val="000000"/>
                 </a:solidFill>
@@ -1320,11 +1320,11 @@
           <a:lstStyle/>
           <a:p>
             <a:pPr algn="l">
-              <a:lnSpc>
-                <a:spcPct val="115000"/>
-              </a:lnSpc>
-              <a:spcAft>
-                <a:spcPts val="500"/>
+              <a:spcBef>
+                <a:spcPts val="0"/>
+              </a:spcBef>
+              <a:spcAft>
+                <a:spcPts val="167"/>
               </a:spcAft>
             </a:pPr>
             <a:r>
@@ -1399,15 +1399,15 @@
           <a:lstStyle/>
           <a:p>
             <a:pPr algn="l">
-              <a:lnSpc>
-                <a:spcPct val="115000"/>
-              </a:lnSpc>
-              <a:spcAft>
-                <a:spcPts val="500"/>
-              </a:spcAft>
-            </a:pPr>
-            <a:r>
-              <a:rPr sz="1000" b="1" lang="zh-TW" dirty="0">
+              <a:spcBef>
+                <a:spcPts val="0"/>
+              </a:spcBef>
+              <a:spcAft>
+                <a:spcPts val="133"/>
+              </a:spcAft>
+            </a:pPr>
+            <a:r>
+              <a:rPr sz="800" b="1" lang="zh-TW" dirty="0">
                 <a:solidFill>
                   <a:srgbClr val="000000"/>
                 </a:solidFill>
@@ -1418,7 +1418,7 @@
               <a:t>▍這一張要做什麼</a:t>
             </a:r>
             <a:r>
-              <a:rPr sz="1000" lang="zh-TW" dirty="0">
+              <a:rPr sz="800" lang="zh-TW" dirty="0">
                 <a:solidFill>
                   <a:srgbClr val="000000"/>
                 </a:solidFill>
@@ -1432,15 +1432,15 @@
           </a:p>
           <a:p>
             <a:pPr algn="l">
-              <a:lnSpc>
-                <a:spcPct val="115000"/>
-              </a:lnSpc>
-              <a:spcAft>
-                <a:spcPts val="500"/>
-              </a:spcAft>
-            </a:pPr>
-            <a:r>
-              <a:rPr sz="1000" lang="zh-TW" dirty="0">
+              <a:spcBef>
+                <a:spcPts val="0"/>
+              </a:spcBef>
+              <a:spcAft>
+                <a:spcPts val="133"/>
+              </a:spcAft>
+            </a:pPr>
+            <a:r>
+              <a:rPr sz="800" lang="zh-TW" dirty="0">
                 <a:solidFill>
                   <a:srgbClr val="000000"/>
                 </a:solidFill>
@@ -1454,15 +1454,15 @@
           </a:p>
           <a:p>
             <a:pPr algn="l">
-              <a:lnSpc>
-                <a:spcPct val="115000"/>
-              </a:lnSpc>
-              <a:spcAft>
-                <a:spcPts val="500"/>
-              </a:spcAft>
-            </a:pPr>
-            <a:r>
-              <a:rPr sz="1000" b="1" lang="zh-TW" dirty="0">
+              <a:spcBef>
+                <a:spcPts val="0"/>
+              </a:spcBef>
+              <a:spcAft>
+                <a:spcPts val="133"/>
+              </a:spcAft>
+            </a:pPr>
+            <a:r>
+              <a:rPr sz="800" b="1" lang="zh-TW" dirty="0">
                 <a:solidFill>
                   <a:srgbClr val="000000"/>
                 </a:solidFill>
@@ -1473,7 +1473,7 @@
               <a:t>▍畫面上圈這裡</a:t>
             </a:r>
             <a:r>
-              <a:rPr sz="1000" lang="zh-TW" dirty="0">
+              <a:rPr sz="800" lang="zh-TW" dirty="0">
                 <a:solidFill>
                   <a:srgbClr val="000000"/>
                 </a:solidFill>
@@ -1487,15 +1487,15 @@
           </a:p>
           <a:p>
             <a:pPr algn="l">
-              <a:lnSpc>
-                <a:spcPct val="115000"/>
-              </a:lnSpc>
-              <a:spcAft>
-                <a:spcPts val="500"/>
-              </a:spcAft>
-            </a:pPr>
-            <a:r>
-              <a:rPr sz="1000" lang="zh-TW" dirty="0">
+              <a:spcBef>
+                <a:spcPts val="0"/>
+              </a:spcBef>
+              <a:spcAft>
+                <a:spcPts val="133"/>
+              </a:spcAft>
+            </a:pPr>
+            <a:r>
+              <a:rPr sz="800" lang="zh-TW" dirty="0">
                 <a:solidFill>
                   <a:srgbClr val="000000"/>
                 </a:solidFill>
@@ -1509,15 +1509,15 @@
           </a:p>
           <a:p>
             <a:pPr algn="l">
-              <a:lnSpc>
-                <a:spcPct val="115000"/>
-              </a:lnSpc>
-              <a:spcAft>
-                <a:spcPts val="500"/>
-              </a:spcAft>
-            </a:pPr>
-            <a:r>
-              <a:rPr sz="1000" b="1" lang="zh-TW" dirty="0">
+              <a:spcBef>
+                <a:spcPts val="0"/>
+              </a:spcBef>
+              <a:spcAft>
+                <a:spcPts val="133"/>
+              </a:spcAft>
+            </a:pPr>
+            <a:r>
+              <a:rPr sz="800" b="1" lang="zh-TW" dirty="0">
                 <a:solidFill>
                   <a:srgbClr val="000000"/>
                 </a:solidFill>
@@ -1528,7 +1528,7 @@
               <a:t>▍以下照著唸</a:t>
             </a:r>
             <a:r>
-              <a:rPr sz="1000" lang="zh-TW" dirty="0">
+              <a:rPr sz="800" lang="zh-TW" dirty="0">
                 <a:solidFill>
                   <a:srgbClr val="000000"/>
                 </a:solidFill>
@@ -1542,15 +1542,15 @@
           </a:p>
           <a:p>
             <a:pPr algn="l">
-              <a:lnSpc>
-                <a:spcPct val="115000"/>
-              </a:lnSpc>
-              <a:spcAft>
-                <a:spcPts val="500"/>
-              </a:spcAft>
-            </a:pPr>
-            <a:r>
-              <a:rPr sz="1000" lang="zh-TW" dirty="0">
+              <a:spcBef>
+                <a:spcPts val="0"/>
+              </a:spcBef>
+              <a:spcAft>
+                <a:spcPts val="133"/>
+              </a:spcAft>
+            </a:pPr>
+            <a:r>
+              <a:rPr sz="800" lang="zh-TW" dirty="0">
                 <a:solidFill>
                   <a:srgbClr val="000000"/>
                 </a:solidFill>
@@ -1564,15 +1564,15 @@
           </a:p>
           <a:p>
             <a:pPr algn="l">
-              <a:lnSpc>
-                <a:spcPct val="115000"/>
-              </a:lnSpc>
-              <a:spcAft>
-                <a:spcPts val="500"/>
-              </a:spcAft>
-            </a:pPr>
-            <a:r>
-              <a:rPr sz="1000" lang="zh-TW" dirty="0">
+              <a:spcBef>
+                <a:spcPts val="0"/>
+              </a:spcBef>
+              <a:spcAft>
+                <a:spcPts val="133"/>
+              </a:spcAft>
+            </a:pPr>
+            <a:r>
+              <a:rPr sz="800" lang="zh-TW" dirty="0">
                 <a:solidFill>
                   <a:srgbClr val="000000"/>
                 </a:solidFill>
@@ -1583,7 +1583,7 @@
               <a:t>情境是</a:t>
             </a:r>
             <a:r>
-              <a:rPr sz="1000" b="1" lang="zh-TW" dirty="0">
+              <a:rPr sz="800" b="1" lang="zh-TW" dirty="0">
                 <a:solidFill>
                   <a:srgbClr val="000000"/>
                 </a:solidFill>
@@ -1594,7 +1594,7 @@
               <a:t>校園接駁小巴，時速二十，要在四十公尺外認出行人</a:t>
             </a:r>
             <a:r>
-              <a:rPr sz="1000" lang="zh-TW" dirty="0">
+              <a:rPr sz="800" lang="zh-TW" dirty="0">
                 <a:solidFill>
                   <a:srgbClr val="000000"/>
                 </a:solidFill>
@@ -1608,15 +1608,15 @@
           </a:p>
           <a:p>
             <a:pPr algn="l">
-              <a:lnSpc>
-                <a:spcPct val="115000"/>
-              </a:lnSpc>
-              <a:spcAft>
-                <a:spcPts val="500"/>
-              </a:spcAft>
-            </a:pPr>
-            <a:r>
-              <a:rPr sz="1000" lang="zh-TW" dirty="0">
+              <a:spcBef>
+                <a:spcPts val="0"/>
+              </a:spcBef>
+              <a:spcAft>
+                <a:spcPts val="133"/>
+              </a:spcAft>
+            </a:pPr>
+            <a:r>
+              <a:rPr sz="800" lang="zh-TW" dirty="0">
                 <a:solidFill>
                   <a:srgbClr val="000000"/>
                 </a:solidFill>
@@ -1630,15 +1630,15 @@
           </a:p>
           <a:p>
             <a:pPr algn="l">
-              <a:lnSpc>
-                <a:spcPct val="115000"/>
-              </a:lnSpc>
-              <a:spcAft>
-                <a:spcPts val="500"/>
-              </a:spcAft>
-            </a:pPr>
-            <a:r>
-              <a:rPr sz="1000" lang="zh-TW" dirty="0">
+              <a:spcBef>
+                <a:spcPts val="0"/>
+              </a:spcBef>
+              <a:spcAft>
+                <a:spcPts val="133"/>
+              </a:spcAft>
+            </a:pPr>
+            <a:r>
+              <a:rPr sz="800" lang="zh-TW" dirty="0">
                 <a:solidFill>
                   <a:srgbClr val="000000"/>
                 </a:solidFill>
@@ -1652,15 +1652,15 @@
           </a:p>
           <a:p>
             <a:pPr algn="l">
-              <a:lnSpc>
-                <a:spcPct val="115000"/>
-              </a:lnSpc>
-              <a:spcAft>
-                <a:spcPts val="500"/>
-              </a:spcAft>
-            </a:pPr>
-            <a:r>
-              <a:rPr sz="1000" lang="zh-TW" dirty="0">
+              <a:spcBef>
+                <a:spcPts val="0"/>
+              </a:spcBef>
+              <a:spcAft>
+                <a:spcPts val="133"/>
+              </a:spcAft>
+            </a:pPr>
+            <a:r>
+              <a:rPr sz="800" lang="zh-TW" dirty="0">
                 <a:solidFill>
                   <a:srgbClr val="000000"/>
                 </a:solidFill>
@@ -1671,7 +1671,7 @@
               <a:t>時速二十的煞停距離是四點二公尺，加五公尺餘裕，所以感測器只要看得到</a:t>
             </a:r>
             <a:r>
-              <a:rPr sz="1000" b="1" lang="zh-TW" dirty="0">
+              <a:rPr sz="800" b="1" lang="zh-TW" dirty="0">
                 <a:solidFill>
                   <a:srgbClr val="000000"/>
                 </a:solidFill>
@@ -1682,7 +1682,7 @@
               <a:t>九公尺</a:t>
             </a:r>
             <a:r>
-              <a:rPr sz="1000" lang="zh-TW" dirty="0">
+              <a:rPr sz="800" lang="zh-TW" dirty="0">
                 <a:solidFill>
                   <a:srgbClr val="000000"/>
                 </a:solidFill>
@@ -1696,15 +1696,15 @@
           </a:p>
           <a:p>
             <a:pPr algn="l">
-              <a:lnSpc>
-                <a:spcPct val="115000"/>
-              </a:lnSpc>
-              <a:spcAft>
-                <a:spcPts val="500"/>
-              </a:spcAft>
-            </a:pPr>
-            <a:r>
-              <a:rPr sz="1000" lang="zh-TW" dirty="0">
+              <a:spcBef>
+                <a:spcPts val="0"/>
+              </a:spcBef>
+              <a:spcAft>
+                <a:spcPts val="133"/>
+              </a:spcAft>
+            </a:pPr>
+            <a:r>
+              <a:rPr sz="800" lang="zh-TW" dirty="0">
                 <a:solidFill>
                   <a:srgbClr val="000000"/>
                 </a:solidFill>
@@ -1715,7 +1715,7 @@
               <a:t>所以卡住的不會是測距，而是</a:t>
             </a:r>
             <a:r>
-              <a:rPr sz="1000" b="1" lang="zh-TW" dirty="0">
+              <a:rPr sz="800" b="1" lang="zh-TW" dirty="0">
                 <a:solidFill>
                   <a:srgbClr val="000000"/>
                 </a:solidFill>
@@ -1726,7 +1726,7 @@
               <a:t>點數</a:t>
             </a:r>
             <a:r>
-              <a:rPr sz="1000" lang="zh-TW" dirty="0">
+              <a:rPr sz="800" lang="zh-TW" dirty="0">
                 <a:solidFill>
                   <a:srgbClr val="000000"/>
                 </a:solidFill>
@@ -1740,15 +1740,15 @@
           </a:p>
           <a:p>
             <a:pPr algn="l">
-              <a:lnSpc>
-                <a:spcPct val="115000"/>
-              </a:lnSpc>
-              <a:spcAft>
-                <a:spcPts val="500"/>
-              </a:spcAft>
-            </a:pPr>
-            <a:r>
-              <a:rPr sz="1000" lang="zh-TW" dirty="0">
+              <a:spcBef>
+                <a:spcPts val="0"/>
+              </a:spcBef>
+              <a:spcAft>
+                <a:spcPts val="133"/>
+              </a:spcAft>
+            </a:pPr>
+            <a:r>
+              <a:rPr sz="800" lang="zh-TW" dirty="0">
                 <a:solidFill>
                   <a:srgbClr val="000000"/>
                 </a:solidFill>
@@ -1762,15 +1762,15 @@
           </a:p>
           <a:p>
             <a:pPr algn="l">
-              <a:lnSpc>
-                <a:spcPct val="115000"/>
-              </a:lnSpc>
-              <a:spcAft>
-                <a:spcPts val="500"/>
-              </a:spcAft>
-            </a:pPr>
-            <a:r>
-              <a:rPr sz="1000" lang="zh-TW" dirty="0">
+              <a:spcBef>
+                <a:spcPts val="0"/>
+              </a:spcBef>
+              <a:spcAft>
+                <a:spcPts val="133"/>
+              </a:spcAft>
+            </a:pPr>
+            <a:r>
+              <a:rPr sz="800" lang="zh-TW" dirty="0">
                 <a:solidFill>
                   <a:srgbClr val="000000"/>
                 </a:solidFill>
@@ -1784,15 +1784,15 @@
           </a:p>
           <a:p>
             <a:pPr algn="l">
-              <a:lnSpc>
-                <a:spcPct val="115000"/>
-              </a:lnSpc>
-              <a:spcAft>
-                <a:spcPts val="500"/>
-              </a:spcAft>
-            </a:pPr>
-            <a:r>
-              <a:rPr sz="1000" lang="zh-TW" dirty="0">
+              <a:spcBef>
+                <a:spcPts val="0"/>
+              </a:spcBef>
+              <a:spcAft>
+                <a:spcPts val="133"/>
+              </a:spcAft>
+            </a:pPr>
+            <a:r>
+              <a:rPr sz="800" lang="zh-TW" dirty="0">
                 <a:solidFill>
                   <a:srgbClr val="000000"/>
                 </a:solidFill>
@@ -1803,7 +1803,7 @@
               <a:t>現在我要各位想一題：</a:t>
             </a:r>
             <a:r>
-              <a:rPr sz="1000" b="1" lang="zh-TW" dirty="0">
+              <a:rPr sz="800" b="1" lang="zh-TW" dirty="0">
                 <a:solidFill>
                   <a:srgbClr val="000000"/>
                 </a:solidFill>
@@ -1814,7 +1814,7 @@
               <a:t>為什麼相機在這個情境反而夠用？</a:t>
             </a:r>
             <a:r>
-              <a:rPr sz="1000" lang="zh-TW" dirty="0">
+              <a:rPr sz="800" lang="zh-TW" dirty="0">
                 <a:solidFill>
                   <a:srgbClr val="000000"/>
                 </a:solidFill>
@@ -1828,15 +1828,15 @@
           </a:p>
           <a:p>
             <a:pPr algn="l">
-              <a:lnSpc>
-                <a:spcPct val="115000"/>
-              </a:lnSpc>
-              <a:spcAft>
-                <a:spcPts val="500"/>
-              </a:spcAft>
-            </a:pPr>
-            <a:r>
-              <a:rPr sz="1000" lang="zh-TW" dirty="0">
+              <a:spcBef>
+                <a:spcPts val="0"/>
+              </a:spcBef>
+              <a:spcAft>
+                <a:spcPts val="133"/>
+              </a:spcAft>
+            </a:pPr>
+            <a:r>
+              <a:rPr sz="800" lang="zh-TW" dirty="0">
                 <a:solidFill>
                   <a:srgbClr val="000000"/>
                 </a:solidFill>
@@ -1850,15 +1850,15 @@
           </a:p>
           <a:p>
             <a:pPr algn="l">
-              <a:lnSpc>
-                <a:spcPct val="115000"/>
-              </a:lnSpc>
-              <a:spcAft>
-                <a:spcPts val="500"/>
-              </a:spcAft>
-            </a:pPr>
-            <a:r>
-              <a:rPr sz="1000" lang="zh-TW" dirty="0">
+              <a:spcBef>
+                <a:spcPts val="0"/>
+              </a:spcBef>
+              <a:spcAft>
+                <a:spcPts val="133"/>
+              </a:spcAft>
+            </a:pPr>
+            <a:r>
+              <a:rPr sz="800" lang="zh-TW" dirty="0">
                 <a:solidFill>
                   <a:srgbClr val="000000"/>
                 </a:solidFill>
@@ -1869,7 +1869,7 @@
               <a:t>所以這一題的結論是：</a:t>
             </a:r>
             <a:r>
-              <a:rPr sz="1000" b="1" lang="zh-TW" dirty="0">
+              <a:rPr sz="800" b="1" lang="zh-TW" dirty="0">
                 <a:solidFill>
                   <a:srgbClr val="000000"/>
                 </a:solidFill>
@@ -1880,7 +1880,7 @@
               <a:t>在慢速、近距離的場合，便宜的相機就很夠用。</a:t>
             </a:r>
             <a:r>
-              <a:rPr sz="1000" lang="zh-TW" dirty="0">
+              <a:rPr sz="800" lang="zh-TW" dirty="0">
                 <a:solidFill>
                   <a:srgbClr val="000000"/>
                 </a:solidFill>
@@ -1894,15 +1894,15 @@
           </a:p>
           <a:p>
             <a:pPr algn="l">
-              <a:lnSpc>
-                <a:spcPct val="115000"/>
-              </a:lnSpc>
-              <a:spcAft>
-                <a:spcPts val="500"/>
-              </a:spcAft>
-            </a:pPr>
-            <a:r>
-              <a:rPr sz="1000" lang="zh-TW" dirty="0">
+              <a:spcBef>
+                <a:spcPts val="0"/>
+              </a:spcBef>
+              <a:spcAft>
+                <a:spcPts val="133"/>
+              </a:spcAft>
+            </a:pPr>
+            <a:r>
+              <a:rPr sz="800" lang="zh-TW" dirty="0">
                 <a:solidFill>
                   <a:srgbClr val="000000"/>
                 </a:solidFill>
@@ -1936,11 +1936,11 @@
           <a:lstStyle/>
           <a:p>
             <a:pPr algn="l">
-              <a:lnSpc>
-                <a:spcPct val="115000"/>
-              </a:lnSpc>
-              <a:spcAft>
-                <a:spcPts val="500"/>
+              <a:spcBef>
+                <a:spcPts val="0"/>
+              </a:spcBef>
+              <a:spcAft>
+                <a:spcPts val="167"/>
               </a:spcAft>
             </a:pPr>
             <a:r>
@@ -2015,15 +2015,15 @@
           <a:lstStyle/>
           <a:p>
             <a:pPr algn="l">
-              <a:lnSpc>
-                <a:spcPct val="115000"/>
-              </a:lnSpc>
-              <a:spcAft>
-                <a:spcPts val="500"/>
-              </a:spcAft>
-            </a:pPr>
-            <a:r>
-              <a:rPr sz="1000" b="1" lang="zh-TW" dirty="0">
+              <a:spcBef>
+                <a:spcPts val="0"/>
+              </a:spcBef>
+              <a:spcAft>
+                <a:spcPts val="133"/>
+              </a:spcAft>
+            </a:pPr>
+            <a:r>
+              <a:rPr sz="800" b="1" lang="zh-TW" dirty="0">
                 <a:solidFill>
                   <a:srgbClr val="000000"/>
                 </a:solidFill>
@@ -2034,7 +2034,7 @@
               <a:t>▍這一張要做什麼</a:t>
             </a:r>
             <a:r>
-              <a:rPr sz="1000" lang="zh-TW" dirty="0">
+              <a:rPr sz="800" lang="zh-TW" dirty="0">
                 <a:solidFill>
                   <a:srgbClr val="000000"/>
                 </a:solidFill>
@@ -2048,15 +2048,15 @@
           </a:p>
           <a:p>
             <a:pPr algn="l">
-              <a:lnSpc>
-                <a:spcPct val="115000"/>
-              </a:lnSpc>
-              <a:spcAft>
-                <a:spcPts val="500"/>
-              </a:spcAft>
-            </a:pPr>
-            <a:r>
-              <a:rPr sz="1000" lang="zh-TW" dirty="0">
+              <a:spcBef>
+                <a:spcPts val="0"/>
+              </a:spcBef>
+              <a:spcAft>
+                <a:spcPts val="133"/>
+              </a:spcAft>
+            </a:pPr>
+            <a:r>
+              <a:rPr sz="800" lang="zh-TW" dirty="0">
                 <a:solidFill>
                   <a:srgbClr val="000000"/>
                 </a:solidFill>
@@ -2070,15 +2070,15 @@
           </a:p>
           <a:p>
             <a:pPr algn="l">
-              <a:lnSpc>
-                <a:spcPct val="115000"/>
-              </a:lnSpc>
-              <a:spcAft>
-                <a:spcPts val="500"/>
-              </a:spcAft>
-            </a:pPr>
-            <a:r>
-              <a:rPr sz="1000" b="1" lang="zh-TW" dirty="0">
+              <a:spcBef>
+                <a:spcPts val="0"/>
+              </a:spcBef>
+              <a:spcAft>
+                <a:spcPts val="133"/>
+              </a:spcAft>
+            </a:pPr>
+            <a:r>
+              <a:rPr sz="800" b="1" lang="zh-TW" dirty="0">
                 <a:solidFill>
                   <a:srgbClr val="000000"/>
                 </a:solidFill>
@@ -2089,7 +2089,7 @@
               <a:t>▍畫面上圈這裡</a:t>
             </a:r>
             <a:r>
-              <a:rPr sz="1000" lang="zh-TW" dirty="0">
+              <a:rPr sz="800" lang="zh-TW" dirty="0">
                 <a:solidFill>
                   <a:srgbClr val="000000"/>
                 </a:solidFill>
@@ -2103,15 +2103,15 @@
           </a:p>
           <a:p>
             <a:pPr algn="l">
-              <a:lnSpc>
-                <a:spcPct val="115000"/>
-              </a:lnSpc>
-              <a:spcAft>
-                <a:spcPts val="500"/>
-              </a:spcAft>
-            </a:pPr>
-            <a:r>
-              <a:rPr sz="1000" lang="zh-TW" dirty="0">
+              <a:spcBef>
+                <a:spcPts val="0"/>
+              </a:spcBef>
+              <a:spcAft>
+                <a:spcPts val="133"/>
+              </a:spcAft>
+            </a:pPr>
+            <a:r>
+              <a:rPr sz="800" lang="zh-TW" dirty="0">
                 <a:solidFill>
                   <a:srgbClr val="000000"/>
                 </a:solidFill>
@@ -2125,15 +2125,15 @@
           </a:p>
           <a:p>
             <a:pPr algn="l">
-              <a:lnSpc>
-                <a:spcPct val="115000"/>
-              </a:lnSpc>
-              <a:spcAft>
-                <a:spcPts val="500"/>
-              </a:spcAft>
-            </a:pPr>
-            <a:r>
-              <a:rPr sz="1000" b="1" lang="zh-TW" dirty="0">
+              <a:spcBef>
+                <a:spcPts val="0"/>
+              </a:spcBef>
+              <a:spcAft>
+                <a:spcPts val="133"/>
+              </a:spcAft>
+            </a:pPr>
+            <a:r>
+              <a:rPr sz="800" b="1" lang="zh-TW" dirty="0">
                 <a:solidFill>
                   <a:srgbClr val="000000"/>
                 </a:solidFill>
@@ -2144,7 +2144,7 @@
               <a:t>▍以下照著唸</a:t>
             </a:r>
             <a:r>
-              <a:rPr sz="1000" lang="zh-TW" dirty="0">
+              <a:rPr sz="800" lang="zh-TW" dirty="0">
                 <a:solidFill>
                   <a:srgbClr val="000000"/>
                 </a:solidFill>
@@ -2158,15 +2158,15 @@
           </a:p>
           <a:p>
             <a:pPr algn="l">
-              <a:lnSpc>
-                <a:spcPct val="115000"/>
-              </a:lnSpc>
-              <a:spcAft>
-                <a:spcPts val="500"/>
-              </a:spcAft>
-            </a:pPr>
-            <a:r>
-              <a:rPr sz="1000" lang="zh-TW" dirty="0">
+              <a:spcBef>
+                <a:spcPts val="0"/>
+              </a:spcBef>
+              <a:spcAft>
+                <a:spcPts val="133"/>
+              </a:spcAft>
+            </a:pPr>
+            <a:r>
+              <a:rPr sz="800" lang="zh-TW" dirty="0">
                 <a:solidFill>
                   <a:srgbClr val="000000"/>
                 </a:solidFill>
@@ -2180,15 +2180,15 @@
           </a:p>
           <a:p>
             <a:pPr algn="l">
-              <a:lnSpc>
-                <a:spcPct val="115000"/>
-              </a:lnSpc>
-              <a:spcAft>
-                <a:spcPts val="500"/>
-              </a:spcAft>
-            </a:pPr>
-            <a:r>
-              <a:rPr sz="1000" lang="zh-TW" dirty="0">
+              <a:spcBef>
+                <a:spcPts val="0"/>
+              </a:spcBef>
+              <a:spcAft>
+                <a:spcPts val="133"/>
+              </a:spcAft>
+            </a:pPr>
+            <a:r>
+              <a:rPr sz="800" lang="zh-TW" dirty="0">
                 <a:solidFill>
                   <a:srgbClr val="000000"/>
                 </a:solidFill>
@@ -2202,15 +2202,15 @@
           </a:p>
           <a:p>
             <a:pPr algn="l">
-              <a:lnSpc>
-                <a:spcPct val="115000"/>
-              </a:lnSpc>
-              <a:spcAft>
-                <a:spcPts val="500"/>
-              </a:spcAft>
-            </a:pPr>
-            <a:r>
-              <a:rPr sz="1000" lang="zh-TW" dirty="0">
+              <a:spcBef>
+                <a:spcPts val="0"/>
+              </a:spcBef>
+              <a:spcAft>
+                <a:spcPts val="133"/>
+              </a:spcAft>
+            </a:pPr>
+            <a:r>
+              <a:rPr sz="800" lang="zh-TW" dirty="0">
                 <a:solidFill>
                   <a:srgbClr val="000000"/>
                 </a:solidFill>
@@ -2224,15 +2224,15 @@
           </a:p>
           <a:p>
             <a:pPr algn="l">
-              <a:lnSpc>
-                <a:spcPct val="115000"/>
-              </a:lnSpc>
-              <a:spcAft>
-                <a:spcPts val="500"/>
-              </a:spcAft>
-            </a:pPr>
-            <a:r>
-              <a:rPr sz="1000" b="1" lang="zh-TW" dirty="0">
+              <a:spcBef>
+                <a:spcPts val="0"/>
+              </a:spcBef>
+              <a:spcAft>
+                <a:spcPts val="133"/>
+              </a:spcAft>
+            </a:pPr>
+            <a:r>
+              <a:rPr sz="800" b="1" lang="zh-TW" dirty="0">
                 <a:solidFill>
                   <a:srgbClr val="000000"/>
                 </a:solidFill>
@@ -2243,7 +2243,7 @@
               <a:t>OS1 在這個情境下，是「不夠」，而且只差一點點。</a:t>
             </a:r>
             <a:r>
-              <a:rPr sz="1000" lang="zh-TW" dirty="0">
+              <a:rPr sz="800" lang="zh-TW" dirty="0">
                 <a:solidFill>
                   <a:srgbClr val="000000"/>
                 </a:solidFill>
@@ -2257,15 +2257,15 @@
           </a:p>
           <a:p>
             <a:pPr algn="l">
-              <a:lnSpc>
-                <a:spcPct val="115000"/>
-              </a:lnSpc>
-              <a:spcAft>
-                <a:spcPts val="500"/>
-              </a:spcAft>
-            </a:pPr>
-            <a:r>
-              <a:rPr sz="1000" lang="zh-TW" dirty="0">
+              <a:spcBef>
+                <a:spcPts val="0"/>
+              </a:spcBef>
+              <a:spcAft>
+                <a:spcPts val="133"/>
+              </a:spcAft>
+            </a:pPr>
+            <a:r>
+              <a:rPr sz="800" lang="zh-TW" dirty="0">
                 <a:solidFill>
                   <a:srgbClr val="000000"/>
                 </a:solidFill>
@@ -2279,15 +2279,15 @@
           </a:p>
           <a:p>
             <a:pPr algn="l">
-              <a:lnSpc>
-                <a:spcPct val="115000"/>
-              </a:lnSpc>
-              <a:spcAft>
-                <a:spcPts val="500"/>
-              </a:spcAft>
-            </a:pPr>
-            <a:r>
-              <a:rPr sz="1000" lang="zh-TW" dirty="0">
+              <a:spcBef>
+                <a:spcPts val="0"/>
+              </a:spcBef>
+              <a:spcAft>
+                <a:spcPts val="133"/>
+              </a:spcAft>
+            </a:pPr>
+            <a:r>
+              <a:rPr sz="800" lang="zh-TW" dirty="0">
                 <a:solidFill>
                   <a:srgbClr val="000000"/>
                 </a:solidFill>
@@ -2298,7 +2298,7 @@
               <a:t>請把左邊那個從 </a:t>
             </a:r>
             <a:r>
-              <a:rPr sz="1000" b="1" lang="zh-TW" dirty="0">
+              <a:rPr sz="800" b="1" lang="zh-TW" dirty="0">
                 <a:solidFill>
                   <a:srgbClr val="000000"/>
                 </a:solidFill>
@@ -2309,7 +2309,7 @@
               <a:t>1024 點／圈</a:t>
             </a:r>
             <a:r>
-              <a:rPr sz="1000" lang="zh-TW" dirty="0">
+              <a:rPr sz="800" lang="zh-TW" dirty="0">
                 <a:solidFill>
                   <a:srgbClr val="000000"/>
                 </a:solidFill>
@@ -2320,7 +2320,7 @@
               <a:t> 改成 </a:t>
             </a:r>
             <a:r>
-              <a:rPr sz="1000" b="1" lang="zh-TW" dirty="0">
+              <a:rPr sz="800" b="1" lang="zh-TW" dirty="0">
                 <a:solidFill>
                   <a:srgbClr val="000000"/>
                 </a:solidFill>
@@ -2331,7 +2331,7 @@
               <a:t>2048 點／圈</a:t>
             </a:r>
             <a:r>
-              <a:rPr sz="1000" lang="zh-TW" dirty="0">
+              <a:rPr sz="800" lang="zh-TW" dirty="0">
                 <a:solidFill>
                   <a:srgbClr val="000000"/>
                 </a:solidFill>
@@ -2345,15 +2345,15 @@
           </a:p>
           <a:p>
             <a:pPr algn="l">
-              <a:lnSpc>
-                <a:spcPct val="115000"/>
-              </a:lnSpc>
-              <a:spcAft>
-                <a:spcPts val="500"/>
-              </a:spcAft>
-            </a:pPr>
-            <a:r>
-              <a:rPr sz="1000" lang="zh-TW" dirty="0">
+              <a:spcBef>
+                <a:spcPts val="0"/>
+              </a:spcBef>
+              <a:spcAft>
+                <a:spcPts val="133"/>
+              </a:spcAft>
+            </a:pPr>
+            <a:r>
+              <a:rPr sz="800" lang="zh-TW" dirty="0">
                 <a:solidFill>
                   <a:srgbClr val="000000"/>
                 </a:solidFill>
@@ -2367,15 +2367,15 @@
           </a:p>
           <a:p>
             <a:pPr algn="l">
-              <a:lnSpc>
-                <a:spcPct val="115000"/>
-              </a:lnSpc>
-              <a:spcAft>
-                <a:spcPts val="500"/>
-              </a:spcAft>
-            </a:pPr>
-            <a:r>
-              <a:rPr sz="1000" lang="zh-TW" dirty="0">
+              <a:spcBef>
+                <a:spcPts val="0"/>
+              </a:spcBef>
+              <a:spcAft>
+                <a:spcPts val="133"/>
+              </a:spcAft>
+            </a:pPr>
+            <a:r>
+              <a:rPr sz="800" lang="zh-TW" dirty="0">
                 <a:solidFill>
                   <a:srgbClr val="000000"/>
                 </a:solidFill>
@@ -2386,7 +2386,7 @@
               <a:t>九個點變成</a:t>
             </a:r>
             <a:r>
-              <a:rPr sz="1000" b="1" lang="zh-TW" dirty="0">
+              <a:rPr sz="800" b="1" lang="zh-TW" dirty="0">
                 <a:solidFill>
                   <a:srgbClr val="000000"/>
                 </a:solidFill>
@@ -2397,7 +2397,7 @@
               <a:t>十八個點</a:t>
             </a:r>
             <a:r>
-              <a:rPr sz="1000" lang="zh-TW" dirty="0">
+              <a:rPr sz="800" lang="zh-TW" dirty="0">
                 <a:solidFill>
                   <a:srgbClr val="000000"/>
                 </a:solidFill>
@@ -2411,15 +2411,15 @@
           </a:p>
           <a:p>
             <a:pPr algn="l">
-              <a:lnSpc>
-                <a:spcPct val="115000"/>
-              </a:lnSpc>
-              <a:spcAft>
-                <a:spcPts val="500"/>
-              </a:spcAft>
-            </a:pPr>
-            <a:r>
-              <a:rPr sz="1000" lang="zh-TW" dirty="0">
+              <a:spcBef>
+                <a:spcPts val="0"/>
+              </a:spcBef>
+              <a:spcAft>
+                <a:spcPts val="133"/>
+              </a:spcAft>
+            </a:pPr>
+            <a:r>
+              <a:rPr sz="800" lang="zh-TW" dirty="0">
                 <a:solidFill>
                   <a:srgbClr val="000000"/>
                 </a:solidFill>
@@ -2430,7 +2430,7 @@
               <a:t>大家停一下想想這件事。</a:t>
             </a:r>
             <a:r>
-              <a:rPr sz="1000" b="1" lang="zh-TW" dirty="0">
+              <a:rPr sz="800" b="1" lang="zh-TW" dirty="0">
                 <a:solidFill>
                   <a:srgbClr val="000000"/>
                 </a:solidFill>
@@ -2441,7 +2441,7 @@
               <a:t>同一顆光達，沒有多花一毛錢，只是換了一個設定，結論就翻過來了。</a:t>
             </a:r>
             <a:r>
-              <a:rPr sz="1000" lang="zh-TW" dirty="0">
+              <a:rPr sz="800" lang="zh-TW" dirty="0">
                 <a:solidFill>
                   <a:srgbClr val="000000"/>
                 </a:solidFill>
@@ -2455,15 +2455,15 @@
           </a:p>
           <a:p>
             <a:pPr algn="l">
-              <a:lnSpc>
-                <a:spcPct val="115000"/>
-              </a:lnSpc>
-              <a:spcAft>
-                <a:spcPts val="500"/>
-              </a:spcAft>
-            </a:pPr>
-            <a:r>
-              <a:rPr sz="1000" lang="zh-TW" dirty="0">
+              <a:spcBef>
+                <a:spcPts val="0"/>
+              </a:spcBef>
+              <a:spcAft>
+                <a:spcPts val="133"/>
+              </a:spcAft>
+            </a:pPr>
+            <a:r>
+              <a:rPr sz="800" lang="zh-TW" dirty="0">
                 <a:solidFill>
                   <a:srgbClr val="000000"/>
                 </a:solidFill>
@@ -2474,7 +2474,7 @@
               <a:t>這就是上午我講「configurable 這個字很重要」的意思。規格表上有些數字是</a:t>
             </a:r>
             <a:r>
-              <a:rPr sz="1000" b="1" lang="zh-TW" dirty="0">
+              <a:rPr sz="800" b="1" lang="zh-TW" dirty="0">
                 <a:solidFill>
                   <a:srgbClr val="000000"/>
                 </a:solidFill>
@@ -2485,7 +2485,7 @@
               <a:t>模式</a:t>
             </a:r>
             <a:r>
-              <a:rPr sz="1000" lang="zh-TW" dirty="0">
+              <a:rPr sz="800" lang="zh-TW" dirty="0">
                 <a:solidFill>
                   <a:srgbClr val="000000"/>
                 </a:solidFill>
@@ -2499,15 +2499,15 @@
           </a:p>
           <a:p>
             <a:pPr algn="l">
-              <a:lnSpc>
-                <a:spcPct val="115000"/>
-              </a:lnSpc>
-              <a:spcAft>
-                <a:spcPts val="500"/>
-              </a:spcAft>
-            </a:pPr>
-            <a:r>
-              <a:rPr sz="1000" lang="zh-TW" dirty="0">
+              <a:spcBef>
+                <a:spcPts val="0"/>
+              </a:spcBef>
+              <a:spcAft>
+                <a:spcPts val="133"/>
+              </a:spcAft>
+            </a:pPr>
+            <a:r>
+              <a:rPr sz="800" lang="zh-TW" dirty="0">
                 <a:solidFill>
                   <a:srgbClr val="000000"/>
                 </a:solidFill>
@@ -2518,7 +2518,7 @@
               <a:t>不過天下沒有白吃的午餐，所以紙上要寫第三件事：</a:t>
             </a:r>
             <a:r>
-              <a:rPr sz="1000" b="1" lang="zh-TW" dirty="0">
+              <a:rPr sz="800" b="1" lang="zh-TW" dirty="0">
                 <a:solidFill>
                   <a:srgbClr val="000000"/>
                 </a:solidFill>
@@ -2529,7 +2529,7 @@
               <a:t>換這個模式要付什麼代價？</a:t>
             </a:r>
             <a:r>
-              <a:rPr sz="1000" lang="zh-TW" dirty="0">
+              <a:rPr sz="800" lang="zh-TW" dirty="0">
                 <a:solidFill>
                   <a:srgbClr val="000000"/>
                 </a:solidFill>
@@ -2543,15 +2543,15 @@
           </a:p>
           <a:p>
             <a:pPr algn="l">
-              <a:lnSpc>
-                <a:spcPct val="115000"/>
-              </a:lnSpc>
-              <a:spcAft>
-                <a:spcPts val="500"/>
-              </a:spcAft>
-            </a:pPr>
-            <a:r>
-              <a:rPr sz="1000" lang="zh-TW" dirty="0">
+              <a:spcBef>
+                <a:spcPts val="0"/>
+              </a:spcBef>
+              <a:spcAft>
+                <a:spcPts val="133"/>
+              </a:spcAft>
+            </a:pPr>
+            <a:r>
+              <a:rPr sz="800" lang="zh-TW" dirty="0">
                 <a:solidFill>
                   <a:srgbClr val="000000"/>
                 </a:solidFill>
@@ -2565,15 +2565,15 @@
           </a:p>
           <a:p>
             <a:pPr algn="l">
-              <a:lnSpc>
-                <a:spcPct val="115000"/>
-              </a:lnSpc>
-              <a:spcAft>
-                <a:spcPts val="500"/>
-              </a:spcAft>
-            </a:pPr>
-            <a:r>
-              <a:rPr sz="1000" lang="zh-TW" dirty="0">
+              <a:spcBef>
+                <a:spcPts val="0"/>
+              </a:spcBef>
+              <a:spcAft>
+                <a:spcPts val="133"/>
+              </a:spcAft>
+            </a:pPr>
+            <a:r>
+              <a:rPr sz="800" lang="zh-TW" dirty="0">
                 <a:solidFill>
                   <a:srgbClr val="000000"/>
                 </a:solidFill>
@@ -2607,11 +2607,11 @@
           <a:lstStyle/>
           <a:p>
             <a:pPr algn="l">
-              <a:lnSpc>
-                <a:spcPct val="115000"/>
-              </a:lnSpc>
-              <a:spcAft>
-                <a:spcPts val="500"/>
+              <a:spcBef>
+                <a:spcPts val="0"/>
+              </a:spcBef>
+              <a:spcAft>
+                <a:spcPts val="167"/>
               </a:spcAft>
             </a:pPr>
             <a:r>
@@ -2686,15 +2686,15 @@
           <a:lstStyle/>
           <a:p>
             <a:pPr algn="l">
-              <a:lnSpc>
-                <a:spcPct val="115000"/>
-              </a:lnSpc>
-              <a:spcAft>
-                <a:spcPts val="500"/>
-              </a:spcAft>
-            </a:pPr>
-            <a:r>
-              <a:rPr sz="1000" b="1" lang="zh-TW" dirty="0">
+              <a:spcBef>
+                <a:spcPts val="0"/>
+              </a:spcBef>
+              <a:spcAft>
+                <a:spcPts val="133"/>
+              </a:spcAft>
+            </a:pPr>
+            <a:r>
+              <a:rPr sz="800" b="1" lang="zh-TW" dirty="0">
                 <a:solidFill>
                   <a:srgbClr val="000000"/>
                 </a:solidFill>
@@ -2705,7 +2705,7 @@
               <a:t>▍這一張要做什麼</a:t>
             </a:r>
             <a:r>
-              <a:rPr sz="1000" lang="zh-TW" dirty="0">
+              <a:rPr sz="800" lang="zh-TW" dirty="0">
                 <a:solidFill>
                   <a:srgbClr val="000000"/>
                 </a:solidFill>
@@ -2719,15 +2719,15 @@
           </a:p>
           <a:p>
             <a:pPr algn="l">
-              <a:lnSpc>
-                <a:spcPct val="115000"/>
-              </a:lnSpc>
-              <a:spcAft>
-                <a:spcPts val="500"/>
-              </a:spcAft>
-            </a:pPr>
-            <a:r>
-              <a:rPr sz="1000" lang="zh-TW" dirty="0">
+              <a:spcBef>
+                <a:spcPts val="0"/>
+              </a:spcBef>
+              <a:spcAft>
+                <a:spcPts val="133"/>
+              </a:spcAft>
+            </a:pPr>
+            <a:r>
+              <a:rPr sz="800" lang="zh-TW" dirty="0">
                 <a:solidFill>
                   <a:srgbClr val="000000"/>
                 </a:solidFill>
@@ -2741,15 +2741,15 @@
           </a:p>
           <a:p>
             <a:pPr algn="l">
-              <a:lnSpc>
-                <a:spcPct val="115000"/>
-              </a:lnSpc>
-              <a:spcAft>
-                <a:spcPts val="500"/>
-              </a:spcAft>
-            </a:pPr>
-            <a:r>
-              <a:rPr sz="1000" b="1" lang="zh-TW" dirty="0">
+              <a:spcBef>
+                <a:spcPts val="0"/>
+              </a:spcBef>
+              <a:spcAft>
+                <a:spcPts val="133"/>
+              </a:spcAft>
+            </a:pPr>
+            <a:r>
+              <a:rPr sz="800" b="1" lang="zh-TW" dirty="0">
                 <a:solidFill>
                   <a:srgbClr val="000000"/>
                 </a:solidFill>
@@ -2760,7 +2760,7 @@
               <a:t>▍畫面上圈這裡</a:t>
             </a:r>
             <a:r>
-              <a:rPr sz="1000" lang="zh-TW" dirty="0">
+              <a:rPr sz="800" lang="zh-TW" dirty="0">
                 <a:solidFill>
                   <a:srgbClr val="000000"/>
                 </a:solidFill>
@@ -2774,15 +2774,15 @@
           </a:p>
           <a:p>
             <a:pPr algn="l">
-              <a:lnSpc>
-                <a:spcPct val="115000"/>
-              </a:lnSpc>
-              <a:spcAft>
-                <a:spcPts val="500"/>
-              </a:spcAft>
-            </a:pPr>
-            <a:r>
-              <a:rPr sz="1000" lang="zh-TW" dirty="0">
+              <a:spcBef>
+                <a:spcPts val="0"/>
+              </a:spcBef>
+              <a:spcAft>
+                <a:spcPts val="133"/>
+              </a:spcAft>
+            </a:pPr>
+            <a:r>
+              <a:rPr sz="800" lang="zh-TW" dirty="0">
                 <a:solidFill>
                   <a:srgbClr val="000000"/>
                 </a:solidFill>
@@ -2796,15 +2796,15 @@
           </a:p>
           <a:p>
             <a:pPr algn="l">
-              <a:lnSpc>
-                <a:spcPct val="115000"/>
-              </a:lnSpc>
-              <a:spcAft>
-                <a:spcPts val="500"/>
-              </a:spcAft>
-            </a:pPr>
-            <a:r>
-              <a:rPr sz="1000" b="1" lang="zh-TW" dirty="0">
+              <a:spcBef>
+                <a:spcPts val="0"/>
+              </a:spcBef>
+              <a:spcAft>
+                <a:spcPts val="133"/>
+              </a:spcAft>
+            </a:pPr>
+            <a:r>
+              <a:rPr sz="800" b="1" lang="zh-TW" dirty="0">
                 <a:solidFill>
                   <a:srgbClr val="000000"/>
                 </a:solidFill>
@@ -2815,7 +2815,7 @@
               <a:t>▍以下照著唸</a:t>
             </a:r>
             <a:r>
-              <a:rPr sz="1000" lang="zh-TW" dirty="0">
+              <a:rPr sz="800" lang="zh-TW" dirty="0">
                 <a:solidFill>
                   <a:srgbClr val="000000"/>
                 </a:solidFill>
@@ -2829,15 +2829,15 @@
           </a:p>
           <a:p>
             <a:pPr algn="l">
-              <a:lnSpc>
-                <a:spcPct val="115000"/>
-              </a:lnSpc>
-              <a:spcAft>
-                <a:spcPts val="500"/>
-              </a:spcAft>
-            </a:pPr>
-            <a:r>
-              <a:rPr sz="1000" lang="zh-TW" dirty="0">
+              <a:spcBef>
+                <a:spcPts val="0"/>
+              </a:spcBef>
+              <a:spcAft>
+                <a:spcPts val="133"/>
+              </a:spcAft>
+            </a:pPr>
+            <a:r>
+              <a:rPr sz="800" lang="zh-TW" dirty="0">
                 <a:solidFill>
                   <a:srgbClr val="000000"/>
                 </a:solidFill>
@@ -2851,15 +2851,15 @@
           </a:p>
           <a:p>
             <a:pPr algn="l">
-              <a:lnSpc>
-                <a:spcPct val="115000"/>
-              </a:lnSpc>
-              <a:spcAft>
-                <a:spcPts val="500"/>
-              </a:spcAft>
-            </a:pPr>
-            <a:r>
-              <a:rPr sz="1000" lang="zh-TW" dirty="0">
+              <a:spcBef>
+                <a:spcPts val="0"/>
+              </a:spcBef>
+              <a:spcAft>
+                <a:spcPts val="133"/>
+              </a:spcAft>
+            </a:pPr>
+            <a:r>
+              <a:rPr sz="800" lang="zh-TW" dirty="0">
                 <a:solidFill>
                   <a:srgbClr val="000000"/>
                 </a:solidFill>
@@ -2870,7 +2870,7 @@
               <a:t>先看煞停距離。工具會算給你：時速一百的煞停距離是</a:t>
             </a:r>
             <a:r>
-              <a:rPr sz="1000" b="1" lang="zh-TW" dirty="0">
+              <a:rPr sz="800" b="1" lang="zh-TW" dirty="0">
                 <a:solidFill>
                   <a:srgbClr val="000000"/>
                 </a:solidFill>
@@ -2881,7 +2881,7 @@
               <a:t>七十三公尺</a:t>
             </a:r>
             <a:r>
-              <a:rPr sz="1000" lang="zh-TW" dirty="0">
+              <a:rPr sz="800" lang="zh-TW" dirty="0">
                 <a:solidFill>
                   <a:srgbClr val="000000"/>
                 </a:solidFill>
@@ -2892,7 +2892,7 @@
               <a:t>，加五公尺餘裕，所以感測器至少要看到</a:t>
             </a:r>
             <a:r>
-              <a:rPr sz="1000" b="1" lang="zh-TW" dirty="0">
+              <a:rPr sz="800" b="1" lang="zh-TW" dirty="0">
                 <a:solidFill>
                   <a:srgbClr val="000000"/>
                 </a:solidFill>
@@ -2903,7 +2903,7 @@
               <a:t>七十八公尺</a:t>
             </a:r>
             <a:r>
-              <a:rPr sz="1000" lang="zh-TW" dirty="0">
+              <a:rPr sz="800" lang="zh-TW" dirty="0">
                 <a:solidFill>
                   <a:srgbClr val="000000"/>
                 </a:solidFill>
@@ -2917,15 +2917,15 @@
           </a:p>
           <a:p>
             <a:pPr algn="l">
-              <a:lnSpc>
-                <a:spcPct val="115000"/>
-              </a:lnSpc>
-              <a:spcAft>
-                <a:spcPts val="500"/>
-              </a:spcAft>
-            </a:pPr>
-            <a:r>
-              <a:rPr sz="1000" lang="zh-TW" dirty="0">
+              <a:spcBef>
+                <a:spcPts val="0"/>
+              </a:spcBef>
+              <a:spcAft>
+                <a:spcPts val="133"/>
+              </a:spcAft>
+            </a:pPr>
+            <a:r>
+              <a:rPr sz="800" lang="zh-TW" dirty="0">
                 <a:solidFill>
                   <a:srgbClr val="000000"/>
                 </a:solidFill>
@@ -2939,15 +2939,15 @@
           </a:p>
           <a:p>
             <a:pPr algn="l">
-              <a:lnSpc>
-                <a:spcPct val="115000"/>
-              </a:lnSpc>
-              <a:spcAft>
-                <a:spcPts val="500"/>
-              </a:spcAft>
-            </a:pPr>
-            <a:r>
-              <a:rPr sz="1000" lang="zh-TW" dirty="0">
+              <a:spcBef>
+                <a:spcPts val="0"/>
+              </a:spcBef>
+              <a:spcAft>
+                <a:spcPts val="133"/>
+              </a:spcAft>
+            </a:pPr>
+            <a:r>
+              <a:rPr sz="800" lang="zh-TW" dirty="0">
                 <a:solidFill>
                   <a:srgbClr val="000000"/>
                 </a:solidFill>
@@ -2961,15 +2961,15 @@
           </a:p>
           <a:p>
             <a:pPr algn="l">
-              <a:lnSpc>
-                <a:spcPct val="115000"/>
-              </a:lnSpc>
-              <a:spcAft>
-                <a:spcPts val="500"/>
-              </a:spcAft>
-            </a:pPr>
-            <a:r>
-              <a:rPr sz="1000" b="1" lang="zh-TW" dirty="0">
+              <a:spcBef>
+                <a:spcPts val="0"/>
+              </a:spcBef>
+              <a:spcAft>
+                <a:spcPts val="133"/>
+              </a:spcAft>
+            </a:pPr>
+            <a:r>
+              <a:rPr sz="800" b="1" lang="zh-TW" dirty="0">
                 <a:solidFill>
                   <a:srgbClr val="000000"/>
                 </a:solidFill>
@@ -2980,7 +2980,7 @@
               <a:t>LD-16 卡在測距。</a:t>
             </a:r>
             <a:r>
-              <a:rPr sz="1000" lang="zh-TW" dirty="0">
+              <a:rPr sz="800" lang="zh-TW" dirty="0">
                 <a:solidFill>
                   <a:srgbClr val="000000"/>
                 </a:solidFill>
@@ -2994,15 +2994,15 @@
           </a:p>
           <a:p>
             <a:pPr algn="l">
-              <a:lnSpc>
-                <a:spcPct val="115000"/>
-              </a:lnSpc>
-              <a:spcAft>
-                <a:spcPts val="500"/>
-              </a:spcAft>
-            </a:pPr>
-            <a:r>
-              <a:rPr sz="1000" b="1" lang="zh-TW" dirty="0">
+              <a:spcBef>
+                <a:spcPts val="0"/>
+              </a:spcBef>
+              <a:spcAft>
+                <a:spcPts val="133"/>
+              </a:spcAft>
+            </a:pPr>
+            <a:r>
+              <a:rPr sz="800" b="1" lang="zh-TW" dirty="0">
                 <a:solidFill>
                   <a:srgbClr val="000000"/>
                 </a:solidFill>
@@ -3013,7 +3013,7 @@
               <a:t>OS1 也卡在測距。</a:t>
             </a:r>
             <a:r>
-              <a:rPr sz="1000" lang="zh-TW" dirty="0">
+              <a:rPr sz="800" lang="zh-TW" dirty="0">
                 <a:solidFill>
                   <a:srgbClr val="000000"/>
                 </a:solidFill>
@@ -3027,15 +3027,15 @@
           </a:p>
           <a:p>
             <a:pPr algn="l">
-              <a:lnSpc>
-                <a:spcPct val="115000"/>
-              </a:lnSpc>
-              <a:spcAft>
-                <a:spcPts val="500"/>
-              </a:spcAft>
-            </a:pPr>
-            <a:r>
-              <a:rPr sz="1000" b="1" lang="zh-TW" dirty="0">
+              <a:spcBef>
+                <a:spcPts val="0"/>
+              </a:spcBef>
+              <a:spcAft>
+                <a:spcPts val="133"/>
+              </a:spcAft>
+            </a:pPr>
+            <a:r>
+              <a:rPr sz="800" b="1" lang="zh-TW" dirty="0">
                 <a:solidFill>
                   <a:srgbClr val="000000"/>
                 </a:solidFill>
@@ -3046,7 +3046,7 @@
               <a:t>相機卡在別的地方。</a:t>
             </a:r>
             <a:r>
-              <a:rPr sz="1000" lang="zh-TW" dirty="0">
+              <a:rPr sz="800" lang="zh-TW" dirty="0">
                 <a:solidFill>
                   <a:srgbClr val="000000"/>
                 </a:solidFill>
@@ -3057,7 +3057,7 @@
               <a:t>它的問題不是看不到，是</a:t>
             </a:r>
             <a:r>
-              <a:rPr sz="1000" b="1" lang="zh-TW" dirty="0">
+              <a:rPr sz="800" b="1" lang="zh-TW" dirty="0">
                 <a:solidFill>
                   <a:srgbClr val="000000"/>
                 </a:solidFill>
@@ -3068,7 +3068,7 @@
               <a:t>看不準</a:t>
             </a:r>
             <a:r>
-              <a:rPr sz="1000" lang="zh-TW" dirty="0">
+              <a:rPr sz="800" lang="zh-TW" dirty="0">
                 <a:solidFill>
                   <a:srgbClr val="000000"/>
                 </a:solidFill>
@@ -3082,15 +3082,15 @@
           </a:p>
           <a:p>
             <a:pPr algn="l">
-              <a:lnSpc>
-                <a:spcPct val="115000"/>
-              </a:lnSpc>
-              <a:spcAft>
-                <a:spcPts val="500"/>
-              </a:spcAft>
-            </a:pPr>
-            <a:r>
-              <a:rPr sz="1000" b="1" lang="zh-TW" dirty="0">
+              <a:spcBef>
+                <a:spcPts val="0"/>
+              </a:spcBef>
+              <a:spcAft>
+                <a:spcPts val="133"/>
+              </a:spcAft>
+            </a:pPr>
+            <a:r>
+              <a:rPr sz="800" b="1" lang="zh-TW" dirty="0">
                 <a:solidFill>
                   <a:srgbClr val="000000"/>
                 </a:solidFill>
@@ -3101,7 +3101,7 @@
               <a:t>AT128P 過了。</a:t>
             </a:r>
             <a:r>
-              <a:rPr sz="1000" lang="zh-TW" dirty="0">
+              <a:rPr sz="800" lang="zh-TW" dirty="0">
                 <a:solidFill>
                   <a:srgbClr val="000000"/>
                 </a:solidFill>
@@ -3115,15 +3115,15 @@
           </a:p>
           <a:p>
             <a:pPr algn="l">
-              <a:lnSpc>
-                <a:spcPct val="115000"/>
-              </a:lnSpc>
-              <a:spcAft>
-                <a:spcPts val="500"/>
-              </a:spcAft>
-            </a:pPr>
-            <a:r>
-              <a:rPr sz="1000" lang="zh-TW" dirty="0">
+              <a:spcBef>
+                <a:spcPts val="0"/>
+              </a:spcBef>
+              <a:spcAft>
+                <a:spcPts val="133"/>
+              </a:spcAft>
+            </a:pPr>
+            <a:r>
+              <a:rPr sz="800" lang="zh-TW" dirty="0">
                 <a:solidFill>
                   <a:srgbClr val="000000"/>
                 </a:solidFill>
@@ -3134,7 +3134,7 @@
               <a:t>可是請各位看它的點數：一百五十公尺外那台車身上，只剩</a:t>
             </a:r>
             <a:r>
-              <a:rPr sz="1000" b="1" lang="zh-TW" dirty="0">
+              <a:rPr sz="800" b="1" lang="zh-TW" dirty="0">
                 <a:solidFill>
                   <a:srgbClr val="000000"/>
                 </a:solidFill>
@@ -3145,7 +3145,7 @@
               <a:t>十二個點</a:t>
             </a:r>
             <a:r>
-              <a:rPr sz="1000" lang="zh-TW" dirty="0">
+              <a:rPr sz="800" lang="zh-TW" dirty="0">
                 <a:solidFill>
                   <a:srgbClr val="000000"/>
                 </a:solidFill>
@@ -3159,15 +3159,15 @@
           </a:p>
           <a:p>
             <a:pPr algn="l">
-              <a:lnSpc>
-                <a:spcPct val="115000"/>
-              </a:lnSpc>
-              <a:spcAft>
-                <a:spcPts val="500"/>
-              </a:spcAft>
-            </a:pPr>
-            <a:r>
-              <a:rPr sz="1000" lang="zh-TW" dirty="0">
+              <a:spcBef>
+                <a:spcPts val="0"/>
+              </a:spcBef>
+              <a:spcAft>
+                <a:spcPts val="133"/>
+              </a:spcAft>
+            </a:pPr>
+            <a:r>
+              <a:rPr sz="800" lang="zh-TW" dirty="0">
                 <a:solidFill>
                   <a:srgbClr val="000000"/>
                 </a:solidFill>
@@ -3181,15 +3181,15 @@
           </a:p>
           <a:p>
             <a:pPr algn="l">
-              <a:lnSpc>
-                <a:spcPct val="115000"/>
-              </a:lnSpc>
-              <a:spcAft>
-                <a:spcPts val="500"/>
-              </a:spcAft>
-            </a:pPr>
-            <a:r>
-              <a:rPr sz="1000" lang="zh-TW" dirty="0">
+              <a:spcBef>
+                <a:spcPts val="0"/>
+              </a:spcBef>
+              <a:spcAft>
+                <a:spcPts val="133"/>
+              </a:spcAft>
+            </a:pPr>
+            <a:r>
+              <a:rPr sz="800" lang="zh-TW" dirty="0">
                 <a:solidFill>
                   <a:srgbClr val="000000"/>
                 </a:solidFill>
@@ -3200,7 +3200,7 @@
               <a:t>所以這一題的結論是：</a:t>
             </a:r>
             <a:r>
-              <a:rPr sz="1000" b="1" lang="zh-TW" dirty="0">
+              <a:rPr sz="800" b="1" lang="zh-TW" dirty="0">
                 <a:solidFill>
                   <a:srgbClr val="000000"/>
                 </a:solidFill>
@@ -3211,7 +3211,7 @@
               <a:t>到了高速，「測得到遠」和「看得清楚」完全變成兩件事。</a:t>
             </a:r>
             <a:r>
-              <a:rPr sz="1000" lang="zh-TW" dirty="0">
+              <a:rPr sz="800" lang="zh-TW" dirty="0">
                 <a:solidFill>
                   <a:srgbClr val="000000"/>
                 </a:solidFill>
@@ -3225,15 +3225,15 @@
           </a:p>
           <a:p>
             <a:pPr algn="l">
-              <a:lnSpc>
-                <a:spcPct val="115000"/>
-              </a:lnSpc>
-              <a:spcAft>
-                <a:spcPts val="500"/>
-              </a:spcAft>
-            </a:pPr>
-            <a:r>
-              <a:rPr sz="1000" lang="zh-TW" dirty="0">
+              <a:spcBef>
+                <a:spcPts val="0"/>
+              </a:spcBef>
+              <a:spcAft>
+                <a:spcPts val="133"/>
+              </a:spcAft>
+            </a:pPr>
+            <a:r>
+              <a:rPr sz="800" lang="zh-TW" dirty="0">
                 <a:solidFill>
                   <a:srgbClr val="000000"/>
                 </a:solidFill>
@@ -3247,15 +3247,15 @@
           </a:p>
           <a:p>
             <a:pPr algn="l">
-              <a:lnSpc>
-                <a:spcPct val="115000"/>
-              </a:lnSpc>
-              <a:spcAft>
-                <a:spcPts val="500"/>
-              </a:spcAft>
-            </a:pPr>
-            <a:r>
-              <a:rPr sz="1000" lang="zh-TW" dirty="0">
+              <a:spcBef>
+                <a:spcPts val="0"/>
+              </a:spcBef>
+              <a:spcAft>
+                <a:spcPts val="133"/>
+              </a:spcAft>
+            </a:pPr>
+            <a:r>
+              <a:rPr sz="800" lang="zh-TW" dirty="0">
                 <a:solidFill>
                   <a:srgbClr val="000000"/>
                 </a:solidFill>
@@ -3289,11 +3289,11 @@
           <a:lstStyle/>
           <a:p>
             <a:pPr algn="l">
-              <a:lnSpc>
-                <a:spcPct val="115000"/>
-              </a:lnSpc>
-              <a:spcAft>
-                <a:spcPts val="500"/>
+              <a:spcBef>
+                <a:spcPts val="0"/>
+              </a:spcBef>
+              <a:spcAft>
+                <a:spcPts val="167"/>
               </a:spcAft>
             </a:pPr>
             <a:r>
@@ -3368,15 +3368,15 @@
           <a:lstStyle/>
           <a:p>
             <a:pPr algn="l">
-              <a:lnSpc>
-                <a:spcPct val="115000"/>
-              </a:lnSpc>
-              <a:spcAft>
-                <a:spcPts val="500"/>
-              </a:spcAft>
-            </a:pPr>
-            <a:r>
-              <a:rPr sz="1000" b="1" lang="zh-TW" dirty="0">
+              <a:spcBef>
+                <a:spcPts val="0"/>
+              </a:spcBef>
+              <a:spcAft>
+                <a:spcPts val="133"/>
+              </a:spcAft>
+            </a:pPr>
+            <a:r>
+              <a:rPr sz="800" b="1" lang="zh-TW" dirty="0">
                 <a:solidFill>
                   <a:srgbClr val="000000"/>
                 </a:solidFill>
@@ -3387,7 +3387,7 @@
               <a:t>▍這一張要做什麼</a:t>
             </a:r>
             <a:r>
-              <a:rPr sz="1000" lang="zh-TW" dirty="0">
+              <a:rPr sz="800" lang="zh-TW" dirty="0">
                 <a:solidFill>
                   <a:srgbClr val="000000"/>
                 </a:solidFill>
@@ -3401,15 +3401,15 @@
           </a:p>
           <a:p>
             <a:pPr algn="l">
-              <a:lnSpc>
-                <a:spcPct val="115000"/>
-              </a:lnSpc>
-              <a:spcAft>
-                <a:spcPts val="500"/>
-              </a:spcAft>
-            </a:pPr>
-            <a:r>
-              <a:rPr sz="1000" lang="zh-TW" dirty="0">
+              <a:spcBef>
+                <a:spcPts val="0"/>
+              </a:spcBef>
+              <a:spcAft>
+                <a:spcPts val="133"/>
+              </a:spcAft>
+            </a:pPr>
+            <a:r>
+              <a:rPr sz="800" lang="zh-TW" dirty="0">
                 <a:solidFill>
                   <a:srgbClr val="000000"/>
                 </a:solidFill>
@@ -3423,15 +3423,15 @@
           </a:p>
           <a:p>
             <a:pPr algn="l">
-              <a:lnSpc>
-                <a:spcPct val="115000"/>
-              </a:lnSpc>
-              <a:spcAft>
-                <a:spcPts val="500"/>
-              </a:spcAft>
-            </a:pPr>
-            <a:r>
-              <a:rPr sz="1000" b="1" lang="zh-TW" dirty="0">
+              <a:spcBef>
+                <a:spcPts val="0"/>
+              </a:spcBef>
+              <a:spcAft>
+                <a:spcPts val="133"/>
+              </a:spcAft>
+            </a:pPr>
+            <a:r>
+              <a:rPr sz="800" b="1" lang="zh-TW" dirty="0">
                 <a:solidFill>
                   <a:srgbClr val="000000"/>
                 </a:solidFill>
@@ -3442,7 +3442,7 @@
               <a:t>▍畫面上圈這裡</a:t>
             </a:r>
             <a:r>
-              <a:rPr sz="1000" lang="zh-TW" dirty="0">
+              <a:rPr sz="800" lang="zh-TW" dirty="0">
                 <a:solidFill>
                   <a:srgbClr val="000000"/>
                 </a:solidFill>
@@ -3456,15 +3456,15 @@
           </a:p>
           <a:p>
             <a:pPr algn="l">
-              <a:lnSpc>
-                <a:spcPct val="115000"/>
-              </a:lnSpc>
-              <a:spcAft>
-                <a:spcPts val="500"/>
-              </a:spcAft>
-            </a:pPr>
-            <a:r>
-              <a:rPr sz="1000" lang="zh-TW" dirty="0">
+              <a:spcBef>
+                <a:spcPts val="0"/>
+              </a:spcBef>
+              <a:spcAft>
+                <a:spcPts val="133"/>
+              </a:spcAft>
+            </a:pPr>
+            <a:r>
+              <a:rPr sz="800" lang="zh-TW" dirty="0">
                 <a:solidFill>
                   <a:srgbClr val="000000"/>
                 </a:solidFill>
@@ -3478,15 +3478,15 @@
           </a:p>
           <a:p>
             <a:pPr algn="l">
-              <a:lnSpc>
-                <a:spcPct val="115000"/>
-              </a:lnSpc>
-              <a:spcAft>
-                <a:spcPts val="500"/>
-              </a:spcAft>
-            </a:pPr>
-            <a:r>
-              <a:rPr sz="1000" b="1" lang="zh-TW" dirty="0">
+              <a:spcBef>
+                <a:spcPts val="0"/>
+              </a:spcBef>
+              <a:spcAft>
+                <a:spcPts val="133"/>
+              </a:spcAft>
+            </a:pPr>
+            <a:r>
+              <a:rPr sz="800" b="1" lang="zh-TW" dirty="0">
                 <a:solidFill>
                   <a:srgbClr val="000000"/>
                 </a:solidFill>
@@ -3497,7 +3497,7 @@
               <a:t>▍以下照著唸</a:t>
             </a:r>
             <a:r>
-              <a:rPr sz="1000" lang="zh-TW" dirty="0">
+              <a:rPr sz="800" lang="zh-TW" dirty="0">
                 <a:solidFill>
                   <a:srgbClr val="000000"/>
                 </a:solidFill>
@@ -3511,15 +3511,15 @@
           </a:p>
           <a:p>
             <a:pPr algn="l">
-              <a:lnSpc>
-                <a:spcPct val="115000"/>
-              </a:lnSpc>
-              <a:spcAft>
-                <a:spcPts val="500"/>
-              </a:spcAft>
-            </a:pPr>
-            <a:r>
-              <a:rPr sz="1000" lang="zh-TW" dirty="0">
+              <a:spcBef>
+                <a:spcPts val="0"/>
+              </a:spcBef>
+              <a:spcAft>
+                <a:spcPts val="133"/>
+              </a:spcAft>
+            </a:pPr>
+            <a:r>
+              <a:rPr sz="800" lang="zh-TW" dirty="0">
                 <a:solidFill>
                   <a:srgbClr val="000000"/>
                 </a:solidFill>
@@ -3533,15 +3533,15 @@
           </a:p>
           <a:p>
             <a:pPr algn="l">
-              <a:lnSpc>
-                <a:spcPct val="115000"/>
-              </a:lnSpc>
-              <a:spcAft>
-                <a:spcPts val="500"/>
-              </a:spcAft>
-            </a:pPr>
-            <a:r>
-              <a:rPr sz="1000" b="1" lang="zh-TW" dirty="0">
+              <a:spcBef>
+                <a:spcPts val="0"/>
+              </a:spcBef>
+              <a:spcAft>
+                <a:spcPts val="133"/>
+              </a:spcAft>
+            </a:pPr>
+            <a:r>
+              <a:rPr sz="800" b="1" lang="zh-TW" dirty="0">
                 <a:solidFill>
                   <a:srgbClr val="000000"/>
                 </a:solidFill>
@@ -3552,7 +3552,7 @@
               <a:t>AT128P 三個情境都過。相機是校園和河內過、國道不過。OS1 校園不過、河內換模式之後過、國道不過。LD-16 一個都沒過。</a:t>
             </a:r>
             <a:r>
-              <a:rPr sz="1000" lang="zh-TW" dirty="0">
+              <a:rPr sz="800" lang="zh-TW" dirty="0">
                 <a:solidFill>
                   <a:srgbClr val="000000"/>
                 </a:solidFill>
@@ -3566,15 +3566,15 @@
           </a:p>
           <a:p>
             <a:pPr algn="l">
-              <a:lnSpc>
-                <a:spcPct val="115000"/>
-              </a:lnSpc>
-              <a:spcAft>
-                <a:spcPts val="500"/>
-              </a:spcAft>
-            </a:pPr>
-            <a:r>
-              <a:rPr sz="1000" lang="zh-TW" dirty="0">
+              <a:spcBef>
+                <a:spcPts val="0"/>
+              </a:spcBef>
+              <a:spcAft>
+                <a:spcPts val="133"/>
+              </a:spcAft>
+            </a:pPr>
+            <a:r>
+              <a:rPr sz="800" lang="zh-TW" dirty="0">
                 <a:solidFill>
                   <a:srgbClr val="000000"/>
                 </a:solidFill>
@@ -3588,15 +3588,15 @@
           </a:p>
           <a:p>
             <a:pPr algn="l">
-              <a:lnSpc>
-                <a:spcPct val="115000"/>
-              </a:lnSpc>
-              <a:spcAft>
-                <a:spcPts val="500"/>
-              </a:spcAft>
-            </a:pPr>
-            <a:r>
-              <a:rPr sz="1000" lang="zh-TW" dirty="0">
+              <a:spcBef>
+                <a:spcPts val="0"/>
+              </a:spcBef>
+              <a:spcAft>
+                <a:spcPts val="133"/>
+              </a:spcAft>
+            </a:pPr>
+            <a:r>
+              <a:rPr sz="800" lang="zh-TW" dirty="0">
                 <a:solidFill>
                   <a:srgbClr val="000000"/>
                 </a:solidFill>
@@ -3610,15 +3610,15 @@
           </a:p>
           <a:p>
             <a:pPr algn="l">
-              <a:lnSpc>
-                <a:spcPct val="115000"/>
-              </a:lnSpc>
-              <a:spcAft>
-                <a:spcPts val="500"/>
-              </a:spcAft>
-            </a:pPr>
-            <a:r>
-              <a:rPr sz="1000" lang="zh-TW" dirty="0">
+              <a:spcBef>
+                <a:spcPts val="0"/>
+              </a:spcBef>
+              <a:spcAft>
+                <a:spcPts val="133"/>
+              </a:spcAft>
+            </a:pPr>
+            <a:r>
+              <a:rPr sz="800" lang="zh-TW" dirty="0">
                 <a:solidFill>
                   <a:srgbClr val="000000"/>
                 </a:solidFill>
@@ -3632,15 +3632,15 @@
           </a:p>
           <a:p>
             <a:pPr algn="l">
-              <a:lnSpc>
-                <a:spcPct val="115000"/>
-              </a:lnSpc>
-              <a:spcAft>
-                <a:spcPts val="500"/>
-              </a:spcAft>
-            </a:pPr>
-            <a:r>
-              <a:rPr sz="1000" b="1" lang="zh-TW" dirty="0">
+              <a:spcBef>
+                <a:spcPts val="0"/>
+              </a:spcBef>
+              <a:spcAft>
+                <a:spcPts val="133"/>
+              </a:spcAft>
+            </a:pPr>
+            <a:r>
+              <a:rPr sz="800" b="1" lang="zh-TW" dirty="0">
                 <a:solidFill>
                   <a:srgbClr val="000000"/>
                 </a:solidFill>
@@ -3651,7 +3651,7 @@
               <a:t>第一，錢。</a:t>
             </a:r>
             <a:r>
-              <a:rPr sz="1000" lang="zh-TW" dirty="0">
+              <a:rPr sz="800" lang="zh-TW" dirty="0">
                 <a:solidFill>
                   <a:srgbClr val="000000"/>
                 </a:solidFill>
@@ -3665,15 +3665,15 @@
           </a:p>
           <a:p>
             <a:pPr algn="l">
-              <a:lnSpc>
-                <a:spcPct val="115000"/>
-              </a:lnSpc>
-              <a:spcAft>
-                <a:spcPts val="500"/>
-              </a:spcAft>
-            </a:pPr>
-            <a:r>
-              <a:rPr sz="1000" b="1" lang="zh-TW" dirty="0">
+              <a:spcBef>
+                <a:spcPts val="0"/>
+              </a:spcBef>
+              <a:spcAft>
+                <a:spcPts val="133"/>
+              </a:spcAft>
+            </a:pPr>
+            <a:r>
+              <a:rPr sz="800" b="1" lang="zh-TW" dirty="0">
                 <a:solidFill>
                   <a:srgbClr val="000000"/>
                 </a:solidFill>
@@ -3684,7 +3684,7 @@
               <a:t>第二，它只看前面一百二十度。</a:t>
             </a:r>
             <a:r>
-              <a:rPr sz="1000" lang="zh-TW" dirty="0">
+              <a:rPr sz="800" lang="zh-TW" dirty="0">
                 <a:solidFill>
                   <a:srgbClr val="000000"/>
                 </a:solidFill>
@@ -3695,7 +3695,7 @@
               <a:t>河內的路口，機車是從</a:t>
             </a:r>
             <a:r>
-              <a:rPr sz="1000" b="1" lang="zh-TW" dirty="0">
+              <a:rPr sz="800" b="1" lang="zh-TW" dirty="0">
                 <a:solidFill>
                   <a:srgbClr val="000000"/>
                 </a:solidFill>
@@ -3706,7 +3706,7 @@
               <a:t>兩側</a:t>
             </a:r>
             <a:r>
-              <a:rPr sz="1000" lang="zh-TW" dirty="0">
+              <a:rPr sz="800" lang="zh-TW" dirty="0">
                 <a:solidFill>
                   <a:srgbClr val="000000"/>
                 </a:solidFill>
@@ -3720,15 +3720,15 @@
           </a:p>
           <a:p>
             <a:pPr algn="l">
-              <a:lnSpc>
-                <a:spcPct val="115000"/>
-              </a:lnSpc>
-              <a:spcAft>
-                <a:spcPts val="500"/>
-              </a:spcAft>
-            </a:pPr>
-            <a:r>
-              <a:rPr sz="1000" b="1" lang="zh-TW" dirty="0">
+              <a:spcBef>
+                <a:spcPts val="0"/>
+              </a:spcBef>
+              <a:spcAft>
+                <a:spcPts val="133"/>
+              </a:spcAft>
+            </a:pPr>
+            <a:r>
+              <a:rPr sz="800" b="1" lang="zh-TW" dirty="0">
                 <a:solidFill>
                   <a:srgbClr val="000000"/>
                 </a:solidFill>
@@ -3739,7 +3739,7 @@
               <a:t>第三，裝不裝得下、電夠不夠。</a:t>
             </a:r>
             <a:r>
-              <a:rPr sz="1000" lang="zh-TW" dirty="0">
+              <a:rPr sz="800" lang="zh-TW" dirty="0">
                 <a:solidFill>
                   <a:srgbClr val="000000"/>
                 </a:solidFill>
@@ -3753,15 +3753,15 @@
           </a:p>
           <a:p>
             <a:pPr algn="l">
-              <a:lnSpc>
-                <a:spcPct val="115000"/>
-              </a:lnSpc>
-              <a:spcAft>
-                <a:spcPts val="500"/>
-              </a:spcAft>
-            </a:pPr>
-            <a:r>
-              <a:rPr sz="1000" lang="zh-TW" dirty="0">
+              <a:spcBef>
+                <a:spcPts val="0"/>
+              </a:spcBef>
+              <a:spcAft>
+                <a:spcPts val="133"/>
+              </a:spcAft>
+            </a:pPr>
+            <a:r>
+              <a:rPr sz="800" lang="zh-TW" dirty="0">
                 <a:solidFill>
                   <a:srgbClr val="000000"/>
                 </a:solidFill>
@@ -3772,7 +3772,7 @@
               <a:t>所以今天的結論是：</a:t>
             </a:r>
             <a:r>
-              <a:rPr sz="1000" b="1" lang="zh-TW" dirty="0">
+              <a:rPr sz="800" b="1" lang="zh-TW" dirty="0">
                 <a:solidFill>
                   <a:srgbClr val="000000"/>
                 </a:solidFill>
@@ -3783,7 +3783,7 @@
               <a:t>選感測器不是選最好的那一顆，是選一組剛好夠用的。</a:t>
             </a:r>
             <a:r>
-              <a:rPr sz="1000" lang="zh-TW" dirty="0">
+              <a:rPr sz="800" lang="zh-TW" dirty="0">
                 <a:solidFill>
                   <a:srgbClr val="000000"/>
                 </a:solidFill>
@@ -3797,15 +3797,15 @@
           </a:p>
           <a:p>
             <a:pPr algn="l">
-              <a:lnSpc>
-                <a:spcPct val="115000"/>
-              </a:lnSpc>
-              <a:spcAft>
-                <a:spcPts val="500"/>
-              </a:spcAft>
-            </a:pPr>
-            <a:r>
-              <a:rPr sz="1000" lang="zh-TW" dirty="0">
+              <a:spcBef>
+                <a:spcPts val="0"/>
+              </a:spcBef>
+              <a:spcAft>
+                <a:spcPts val="133"/>
+              </a:spcAft>
+            </a:pPr>
+            <a:r>
+              <a:rPr sz="800" lang="zh-TW" dirty="0">
                 <a:solidFill>
                   <a:srgbClr val="000000"/>
                 </a:solidFill>
@@ -3816,7 +3816,7 @@
               <a:t>而「剛好夠用」要對著什麼講？對著你的 </a:t>
             </a:r>
             <a:r>
-              <a:rPr sz="1000" b="1" lang="zh-TW" dirty="0">
+              <a:rPr sz="800" b="1" lang="zh-TW" dirty="0">
                 <a:solidFill>
                   <a:srgbClr val="000000"/>
                 </a:solidFill>
@@ -3827,7 +3827,7 @@
               <a:t>ODD</a:t>
             </a:r>
             <a:r>
-              <a:rPr sz="1000" lang="zh-TW" dirty="0">
+              <a:rPr sz="800" lang="zh-TW" dirty="0">
                 <a:solidFill>
                   <a:srgbClr val="000000"/>
                 </a:solidFill>
@@ -3841,15 +3841,15 @@
           </a:p>
           <a:p>
             <a:pPr algn="l">
-              <a:lnSpc>
-                <a:spcPct val="115000"/>
-              </a:lnSpc>
-              <a:spcAft>
-                <a:spcPts val="500"/>
-              </a:spcAft>
-            </a:pPr>
-            <a:r>
-              <a:rPr sz="1000" lang="zh-TW" dirty="0">
+              <a:spcBef>
+                <a:spcPts val="0"/>
+              </a:spcBef>
+              <a:spcAft>
+                <a:spcPts val="133"/>
+              </a:spcAft>
+            </a:pPr>
+            <a:r>
+              <a:rPr sz="800" lang="zh-TW" dirty="0">
                 <a:solidFill>
                   <a:srgbClr val="000000"/>
                 </a:solidFill>
@@ -3883,11 +3883,11 @@
           <a:lstStyle/>
           <a:p>
             <a:pPr algn="l">
-              <a:lnSpc>
-                <a:spcPct val="115000"/>
-              </a:lnSpc>
-              <a:spcAft>
-                <a:spcPts val="500"/>
+              <a:spcBef>
+                <a:spcPts val="0"/>
+              </a:spcBef>
+              <a:spcAft>
+                <a:spcPts val="167"/>
               </a:spcAft>
             </a:pPr>
             <a:r>
@@ -3962,15 +3962,15 @@
           <a:lstStyle/>
           <a:p>
             <a:pPr algn="l">
-              <a:lnSpc>
-                <a:spcPct val="115000"/>
-              </a:lnSpc>
-              <a:spcAft>
-                <a:spcPts val="500"/>
-              </a:spcAft>
-            </a:pPr>
-            <a:r>
-              <a:rPr sz="1000" b="1" lang="zh-TW" dirty="0">
+              <a:spcBef>
+                <a:spcPts val="0"/>
+              </a:spcBef>
+              <a:spcAft>
+                <a:spcPts val="175"/>
+              </a:spcAft>
+            </a:pPr>
+            <a:r>
+              <a:rPr sz="1050" b="1" lang="zh-TW" dirty="0">
                 <a:solidFill>
                   <a:srgbClr val="000000"/>
                 </a:solidFill>
@@ -3981,7 +3981,7 @@
               <a:t>▍這一張要做什麼</a:t>
             </a:r>
             <a:r>
-              <a:rPr sz="1000" lang="zh-TW" dirty="0">
+              <a:rPr sz="1050" lang="zh-TW" dirty="0">
                 <a:solidFill>
                   <a:srgbClr val="000000"/>
                 </a:solidFill>
@@ -3995,15 +3995,15 @@
           </a:p>
           <a:p>
             <a:pPr algn="l">
-              <a:lnSpc>
-                <a:spcPct val="115000"/>
-              </a:lnSpc>
-              <a:spcAft>
-                <a:spcPts val="500"/>
-              </a:spcAft>
-            </a:pPr>
-            <a:r>
-              <a:rPr sz="1000" lang="zh-TW" dirty="0">
+              <a:spcBef>
+                <a:spcPts val="0"/>
+              </a:spcBef>
+              <a:spcAft>
+                <a:spcPts val="175"/>
+              </a:spcAft>
+            </a:pPr>
+            <a:r>
+              <a:rPr sz="1050" lang="zh-TW" dirty="0">
                 <a:solidFill>
                   <a:srgbClr val="000000"/>
                 </a:solidFill>
@@ -4017,15 +4017,15 @@
           </a:p>
           <a:p>
             <a:pPr algn="l">
-              <a:lnSpc>
-                <a:spcPct val="115000"/>
-              </a:lnSpc>
-              <a:spcAft>
-                <a:spcPts val="500"/>
-              </a:spcAft>
-            </a:pPr>
-            <a:r>
-              <a:rPr sz="1000" b="1" lang="zh-TW" dirty="0">
+              <a:spcBef>
+                <a:spcPts val="0"/>
+              </a:spcBef>
+              <a:spcAft>
+                <a:spcPts val="175"/>
+              </a:spcAft>
+            </a:pPr>
+            <a:r>
+              <a:rPr sz="1050" b="1" lang="zh-TW" dirty="0">
                 <a:solidFill>
                   <a:srgbClr val="000000"/>
                 </a:solidFill>
@@ -4036,7 +4036,7 @@
               <a:t>▍畫面上圈這裡</a:t>
             </a:r>
             <a:r>
-              <a:rPr sz="1000" lang="zh-TW" dirty="0">
+              <a:rPr sz="1050" lang="zh-TW" dirty="0">
                 <a:solidFill>
                   <a:srgbClr val="000000"/>
                 </a:solidFill>
@@ -4050,15 +4050,15 @@
           </a:p>
           <a:p>
             <a:pPr algn="l">
-              <a:lnSpc>
-                <a:spcPct val="115000"/>
-              </a:lnSpc>
-              <a:spcAft>
-                <a:spcPts val="500"/>
-              </a:spcAft>
-            </a:pPr>
-            <a:r>
-              <a:rPr sz="1000" lang="zh-TW" dirty="0">
+              <a:spcBef>
+                <a:spcPts val="0"/>
+              </a:spcBef>
+              <a:spcAft>
+                <a:spcPts val="175"/>
+              </a:spcAft>
+            </a:pPr>
+            <a:r>
+              <a:rPr sz="1050" lang="zh-TW" dirty="0">
                 <a:solidFill>
                   <a:srgbClr val="000000"/>
                 </a:solidFill>
@@ -4072,15 +4072,15 @@
           </a:p>
           <a:p>
             <a:pPr algn="l">
-              <a:lnSpc>
-                <a:spcPct val="115000"/>
-              </a:lnSpc>
-              <a:spcAft>
-                <a:spcPts val="500"/>
-              </a:spcAft>
-            </a:pPr>
-            <a:r>
-              <a:rPr sz="1000" b="1" lang="zh-TW" dirty="0">
+              <a:spcBef>
+                <a:spcPts val="0"/>
+              </a:spcBef>
+              <a:spcAft>
+                <a:spcPts val="175"/>
+              </a:spcAft>
+            </a:pPr>
+            <a:r>
+              <a:rPr sz="1050" b="1" lang="zh-TW" dirty="0">
                 <a:solidFill>
                   <a:srgbClr val="000000"/>
                 </a:solidFill>
@@ -4091,7 +4091,7 @@
               <a:t>▍以下照著唸</a:t>
             </a:r>
             <a:r>
-              <a:rPr sz="1000" lang="zh-TW" dirty="0">
+              <a:rPr sz="1050" lang="zh-TW" dirty="0">
                 <a:solidFill>
                   <a:srgbClr val="000000"/>
                 </a:solidFill>
@@ -4105,15 +4105,15 @@
           </a:p>
           <a:p>
             <a:pPr algn="l">
-              <a:lnSpc>
-                <a:spcPct val="115000"/>
-              </a:lnSpc>
-              <a:spcAft>
-                <a:spcPts val="500"/>
-              </a:spcAft>
-            </a:pPr>
-            <a:r>
-              <a:rPr sz="1000" lang="zh-TW" dirty="0">
+              <a:spcBef>
+                <a:spcPts val="0"/>
+              </a:spcBef>
+              <a:spcAft>
+                <a:spcPts val="175"/>
+              </a:spcAft>
+            </a:pPr>
+            <a:r>
+              <a:rPr sz="1050" lang="zh-TW" dirty="0">
                 <a:solidFill>
                   <a:srgbClr val="000000"/>
                 </a:solidFill>
@@ -4127,15 +4127,15 @@
           </a:p>
           <a:p>
             <a:pPr algn="l">
-              <a:lnSpc>
-                <a:spcPct val="115000"/>
-              </a:lnSpc>
-              <a:spcAft>
-                <a:spcPts val="500"/>
-              </a:spcAft>
-            </a:pPr>
-            <a:r>
-              <a:rPr sz="1000" lang="zh-TW" dirty="0">
+              <a:spcBef>
+                <a:spcPts val="0"/>
+              </a:spcBef>
+              <a:spcAft>
+                <a:spcPts val="175"/>
+              </a:spcAft>
+            </a:pPr>
+            <a:r>
+              <a:rPr sz="1050" lang="zh-TW" dirty="0">
                 <a:solidFill>
                   <a:srgbClr val="000000"/>
                 </a:solidFill>
@@ -4149,15 +4149,15 @@
           </a:p>
           <a:p>
             <a:pPr algn="l">
-              <a:lnSpc>
-                <a:spcPct val="115000"/>
-              </a:lnSpc>
-              <a:spcAft>
-                <a:spcPts val="500"/>
-              </a:spcAft>
-            </a:pPr>
-            <a:r>
-              <a:rPr sz="1000" lang="zh-TW" dirty="0">
+              <a:spcBef>
+                <a:spcPts val="0"/>
+              </a:spcBef>
+              <a:spcAft>
+                <a:spcPts val="175"/>
+              </a:spcAft>
+            </a:pPr>
+            <a:r>
+              <a:rPr sz="1050" lang="zh-TW" dirty="0">
                 <a:solidFill>
                   <a:srgbClr val="000000"/>
                 </a:solidFill>
@@ -4171,15 +4171,15 @@
           </a:p>
           <a:p>
             <a:pPr algn="l">
-              <a:lnSpc>
-                <a:spcPct val="115000"/>
-              </a:lnSpc>
-              <a:spcAft>
-                <a:spcPts val="500"/>
-              </a:spcAft>
-            </a:pPr>
-            <a:r>
-              <a:rPr sz="1000" lang="zh-TW" dirty="0">
+              <a:spcBef>
+                <a:spcPts val="0"/>
+              </a:spcBef>
+              <a:spcAft>
+                <a:spcPts val="175"/>
+              </a:spcAft>
+            </a:pPr>
+            <a:r>
+              <a:rPr sz="1050" lang="zh-TW" dirty="0">
                 <a:solidFill>
                   <a:srgbClr val="000000"/>
                 </a:solidFill>
@@ -4193,15 +4193,15 @@
           </a:p>
           <a:p>
             <a:pPr algn="l">
-              <a:lnSpc>
-                <a:spcPct val="115000"/>
-              </a:lnSpc>
-              <a:spcAft>
-                <a:spcPts val="500"/>
-              </a:spcAft>
-            </a:pPr>
-            <a:r>
-              <a:rPr sz="1000" lang="zh-TW" dirty="0">
+              <a:spcBef>
+                <a:spcPts val="0"/>
+              </a:spcBef>
+              <a:spcAft>
+                <a:spcPts val="175"/>
+              </a:spcAft>
+            </a:pPr>
+            <a:r>
+              <a:rPr sz="1050" lang="zh-TW" dirty="0">
                 <a:solidFill>
                   <a:srgbClr val="000000"/>
                 </a:solidFill>
@@ -4215,15 +4215,15 @@
           </a:p>
           <a:p>
             <a:pPr algn="l">
-              <a:lnSpc>
-                <a:spcPct val="115000"/>
-              </a:lnSpc>
-              <a:spcAft>
-                <a:spcPts val="500"/>
-              </a:spcAft>
-            </a:pPr>
-            <a:r>
-              <a:rPr sz="1000" lang="zh-TW" dirty="0">
+              <a:spcBef>
+                <a:spcPts val="0"/>
+              </a:spcBef>
+              <a:spcAft>
+                <a:spcPts val="175"/>
+              </a:spcAft>
+            </a:pPr>
+            <a:r>
+              <a:rPr sz="1050" lang="zh-TW" dirty="0">
                 <a:solidFill>
                   <a:srgbClr val="000000"/>
                 </a:solidFill>
@@ -4237,15 +4237,15 @@
           </a:p>
           <a:p>
             <a:pPr algn="l">
-              <a:lnSpc>
-                <a:spcPct val="115000"/>
-              </a:lnSpc>
-              <a:spcAft>
-                <a:spcPts val="500"/>
-              </a:spcAft>
-            </a:pPr>
-            <a:r>
-              <a:rPr sz="1000" lang="zh-TW" dirty="0">
+              <a:spcBef>
+                <a:spcPts val="0"/>
+              </a:spcBef>
+              <a:spcAft>
+                <a:spcPts val="175"/>
+              </a:spcAft>
+            </a:pPr>
+            <a:r>
+              <a:rPr sz="1050" lang="zh-TW" dirty="0">
                 <a:solidFill>
                   <a:srgbClr val="000000"/>
                 </a:solidFill>
@@ -4256,7 +4256,7 @@
               <a:t>我給四個提示詞，分別是</a:t>
             </a:r>
             <a:r>
-              <a:rPr sz="1000" b="1" lang="zh-TW" dirty="0">
+              <a:rPr sz="1050" b="1" lang="zh-TW" dirty="0">
                 <a:solidFill>
                   <a:srgbClr val="000000"/>
                 </a:solidFill>
@@ -4267,7 +4267,7 @@
               <a:t>反射率、鏡頭、換算成角度、標定</a:t>
             </a:r>
             <a:r>
-              <a:rPr sz="1000" lang="zh-TW" dirty="0">
+              <a:rPr sz="1050" lang="zh-TW" dirty="0">
                 <a:solidFill>
                   <a:srgbClr val="000000"/>
                 </a:solidFill>
@@ -4281,15 +4281,15 @@
           </a:p>
           <a:p>
             <a:pPr algn="l">
-              <a:lnSpc>
-                <a:spcPct val="115000"/>
-              </a:lnSpc>
-              <a:spcAft>
-                <a:spcPts val="500"/>
-              </a:spcAft>
-            </a:pPr>
-            <a:r>
-              <a:rPr sz="1000" lang="zh-TW" dirty="0">
+              <a:spcBef>
+                <a:spcPts val="0"/>
+              </a:spcBef>
+              <a:spcAft>
+                <a:spcPts val="175"/>
+              </a:spcAft>
+            </a:pPr>
+            <a:r>
+              <a:rPr sz="1050" lang="zh-TW" dirty="0">
                 <a:solidFill>
                   <a:srgbClr val="000000"/>
                 </a:solidFill>
@@ -4323,11 +4323,11 @@
           <a:lstStyle/>
           <a:p>
             <a:pPr algn="l">
-              <a:lnSpc>
-                <a:spcPct val="115000"/>
-              </a:lnSpc>
-              <a:spcAft>
-                <a:spcPts val="500"/>
+              <a:spcBef>
+                <a:spcPts val="0"/>
+              </a:spcBef>
+              <a:spcAft>
+                <a:spcPts val="167"/>
               </a:spcAft>
             </a:pPr>
             <a:r>
@@ -4402,15 +4402,15 @@
           <a:lstStyle/>
           <a:p>
             <a:pPr algn="l">
-              <a:lnSpc>
-                <a:spcPct val="115000"/>
-              </a:lnSpc>
-              <a:spcAft>
-                <a:spcPts val="500"/>
-              </a:spcAft>
-            </a:pPr>
-            <a:r>
-              <a:rPr sz="1000" b="1" lang="zh-TW" dirty="0">
+              <a:spcBef>
+                <a:spcPts val="0"/>
+              </a:spcBef>
+              <a:spcAft>
+                <a:spcPts val="175"/>
+              </a:spcAft>
+            </a:pPr>
+            <a:r>
+              <a:rPr sz="1050" b="1" lang="zh-TW" dirty="0">
                 <a:solidFill>
                   <a:srgbClr val="000000"/>
                 </a:solidFill>
@@ -4421,7 +4421,7 @@
               <a:t>▍這一張要做什麼</a:t>
             </a:r>
             <a:r>
-              <a:rPr sz="1000" lang="zh-TW" dirty="0">
+              <a:rPr sz="1050" lang="zh-TW" dirty="0">
                 <a:solidFill>
                   <a:srgbClr val="000000"/>
                 </a:solidFill>
@@ -4435,15 +4435,15 @@
           </a:p>
           <a:p>
             <a:pPr algn="l">
-              <a:lnSpc>
-                <a:spcPct val="115000"/>
-              </a:lnSpc>
-              <a:spcAft>
-                <a:spcPts val="500"/>
-              </a:spcAft>
-            </a:pPr>
-            <a:r>
-              <a:rPr sz="1000" lang="zh-TW" dirty="0">
+              <a:spcBef>
+                <a:spcPts val="0"/>
+              </a:spcBef>
+              <a:spcAft>
+                <a:spcPts val="175"/>
+              </a:spcAft>
+            </a:pPr>
+            <a:r>
+              <a:rPr sz="1050" lang="zh-TW" dirty="0">
                 <a:solidFill>
                   <a:srgbClr val="000000"/>
                 </a:solidFill>
@@ -4457,15 +4457,15 @@
           </a:p>
           <a:p>
             <a:pPr algn="l">
-              <a:lnSpc>
-                <a:spcPct val="115000"/>
-              </a:lnSpc>
-              <a:spcAft>
-                <a:spcPts val="500"/>
-              </a:spcAft>
-            </a:pPr>
-            <a:r>
-              <a:rPr sz="1000" b="1" lang="zh-TW" dirty="0">
+              <a:spcBef>
+                <a:spcPts val="0"/>
+              </a:spcBef>
+              <a:spcAft>
+                <a:spcPts val="175"/>
+              </a:spcAft>
+            </a:pPr>
+            <a:r>
+              <a:rPr sz="1050" b="1" lang="zh-TW" dirty="0">
                 <a:solidFill>
                   <a:srgbClr val="000000"/>
                 </a:solidFill>
@@ -4476,7 +4476,7 @@
               <a:t>▍畫面上圈這裡</a:t>
             </a:r>
             <a:r>
-              <a:rPr sz="1000" lang="zh-TW" dirty="0">
+              <a:rPr sz="1050" lang="zh-TW" dirty="0">
                 <a:solidFill>
                   <a:srgbClr val="000000"/>
                 </a:solidFill>
@@ -4490,15 +4490,15 @@
           </a:p>
           <a:p>
             <a:pPr algn="l">
-              <a:lnSpc>
-                <a:spcPct val="115000"/>
-              </a:lnSpc>
-              <a:spcAft>
-                <a:spcPts val="500"/>
-              </a:spcAft>
-            </a:pPr>
-            <a:r>
-              <a:rPr sz="1000" lang="zh-TW" dirty="0">
+              <a:spcBef>
+                <a:spcPts val="0"/>
+              </a:spcBef>
+              <a:spcAft>
+                <a:spcPts val="175"/>
+              </a:spcAft>
+            </a:pPr>
+            <a:r>
+              <a:rPr sz="1050" lang="zh-TW" dirty="0">
                 <a:solidFill>
                   <a:srgbClr val="000000"/>
                 </a:solidFill>
@@ -4512,15 +4512,15 @@
           </a:p>
           <a:p>
             <a:pPr algn="l">
-              <a:lnSpc>
-                <a:spcPct val="115000"/>
-              </a:lnSpc>
-              <a:spcAft>
-                <a:spcPts val="500"/>
-              </a:spcAft>
-            </a:pPr>
-            <a:r>
-              <a:rPr sz="1000" b="1" lang="zh-TW" dirty="0">
+              <a:spcBef>
+                <a:spcPts val="0"/>
+              </a:spcBef>
+              <a:spcAft>
+                <a:spcPts val="175"/>
+              </a:spcAft>
+            </a:pPr>
+            <a:r>
+              <a:rPr sz="1050" b="1" lang="zh-TW" dirty="0">
                 <a:solidFill>
                   <a:srgbClr val="000000"/>
                 </a:solidFill>
@@ -4531,7 +4531,7 @@
               <a:t>▍以下照著唸</a:t>
             </a:r>
             <a:r>
-              <a:rPr sz="1000" lang="zh-TW" dirty="0">
+              <a:rPr sz="1050" lang="zh-TW" dirty="0">
                 <a:solidFill>
                   <a:srgbClr val="000000"/>
                 </a:solidFill>
@@ -4545,15 +4545,15 @@
           </a:p>
           <a:p>
             <a:pPr algn="l">
-              <a:lnSpc>
-                <a:spcPct val="115000"/>
-              </a:lnSpc>
-              <a:spcAft>
-                <a:spcPts val="500"/>
-              </a:spcAft>
-            </a:pPr>
-            <a:r>
-              <a:rPr sz="1000" lang="zh-TW" dirty="0">
+              <a:spcBef>
+                <a:spcPts val="0"/>
+              </a:spcBef>
+              <a:spcAft>
+                <a:spcPts val="175"/>
+              </a:spcAft>
+            </a:pPr>
+            <a:r>
+              <a:rPr sz="1050" lang="zh-TW" dirty="0">
                 <a:solidFill>
                   <a:srgbClr val="000000"/>
                 </a:solidFill>
@@ -4564,7 +4564,7 @@
               <a:t>答案：</a:t>
             </a:r>
             <a:r>
-              <a:rPr sz="1000" b="1" lang="zh-TW" dirty="0">
+              <a:rPr sz="1050" b="1" lang="zh-TW" dirty="0">
                 <a:solidFill>
                   <a:srgbClr val="000000"/>
                 </a:solidFill>
@@ -4575,7 +4575,7 @@
               <a:t>四句都錯</a:t>
             </a:r>
             <a:r>
-              <a:rPr sz="1000" lang="zh-TW" dirty="0">
+              <a:rPr sz="1050" lang="zh-TW" dirty="0">
                 <a:solidFill>
                   <a:srgbClr val="000000"/>
                 </a:solidFill>
@@ -4589,15 +4589,15 @@
           </a:p>
           <a:p>
             <a:pPr algn="l">
-              <a:lnSpc>
-                <a:spcPct val="115000"/>
-              </a:lnSpc>
-              <a:spcAft>
-                <a:spcPts val="500"/>
-              </a:spcAft>
-            </a:pPr>
-            <a:r>
-              <a:rPr sz="1000" b="1" lang="zh-TW" dirty="0">
+              <a:spcBef>
+                <a:spcPts val="0"/>
+              </a:spcBef>
+              <a:spcAft>
+                <a:spcPts val="175"/>
+              </a:spcAft>
+            </a:pPr>
+            <a:r>
+              <a:rPr sz="1050" b="1" lang="zh-TW" dirty="0">
                 <a:solidFill>
                   <a:srgbClr val="000000"/>
                 </a:solidFill>
@@ -4608,7 +4608,7 @@
               <a:t>第一句</a:t>
             </a:r>
             <a:r>
-              <a:rPr sz="1000" lang="zh-TW" dirty="0">
+              <a:rPr sz="1050" lang="zh-TW" dirty="0">
                 <a:solidFill>
                   <a:srgbClr val="000000"/>
                 </a:solidFill>
@@ -4622,15 +4622,15 @@
           </a:p>
           <a:p>
             <a:pPr algn="l">
-              <a:lnSpc>
-                <a:spcPct val="115000"/>
-              </a:lnSpc>
-              <a:spcAft>
-                <a:spcPts val="500"/>
-              </a:spcAft>
-            </a:pPr>
-            <a:r>
-              <a:rPr sz="1000" b="1" lang="zh-TW" dirty="0">
+              <a:spcBef>
+                <a:spcPts val="0"/>
+              </a:spcBef>
+              <a:spcAft>
+                <a:spcPts val="175"/>
+              </a:spcAft>
+            </a:pPr>
+            <a:r>
+              <a:rPr sz="1050" b="1" lang="zh-TW" dirty="0">
                 <a:solidFill>
                   <a:srgbClr val="000000"/>
                 </a:solidFill>
@@ -4641,7 +4641,7 @@
               <a:t>第二句</a:t>
             </a:r>
             <a:r>
-              <a:rPr sz="1000" lang="zh-TW" dirty="0">
+              <a:rPr sz="1050" lang="zh-TW" dirty="0">
                 <a:solidFill>
                   <a:srgbClr val="000000"/>
                 </a:solidFill>
@@ -4652,7 +4652,7 @@
               <a:t>錯在把視野當成晶片的規格。視野是</a:t>
             </a:r>
             <a:r>
-              <a:rPr sz="1000" b="1" lang="zh-TW" dirty="0">
+              <a:rPr sz="1050" b="1" lang="zh-TW" dirty="0">
                 <a:solidFill>
                   <a:srgbClr val="000000"/>
                 </a:solidFill>
@@ -4663,7 +4663,7 @@
               <a:t>鏡頭</a:t>
             </a:r>
             <a:r>
-              <a:rPr sz="1000" lang="zh-TW" dirty="0">
+              <a:rPr sz="1050" lang="zh-TW" dirty="0">
                 <a:solidFill>
                   <a:srgbClr val="000000"/>
                 </a:solidFill>
@@ -4677,15 +4677,15 @@
           </a:p>
           <a:p>
             <a:pPr algn="l">
-              <a:lnSpc>
-                <a:spcPct val="115000"/>
-              </a:lnSpc>
-              <a:spcAft>
-                <a:spcPts val="500"/>
-              </a:spcAft>
-            </a:pPr>
-            <a:r>
-              <a:rPr sz="1000" b="1" lang="zh-TW" dirty="0">
+              <a:spcBef>
+                <a:spcPts val="0"/>
+              </a:spcBef>
+              <a:spcAft>
+                <a:spcPts val="175"/>
+              </a:spcAft>
+            </a:pPr>
+            <a:r>
+              <a:rPr sz="1050" b="1" lang="zh-TW" dirty="0">
                 <a:solidFill>
                   <a:srgbClr val="000000"/>
                 </a:solidFill>
@@ -4696,7 +4696,7 @@
               <a:t>第三句</a:t>
             </a:r>
             <a:r>
-              <a:rPr sz="1000" lang="zh-TW" dirty="0">
+              <a:rPr sz="1050" lang="zh-TW" dirty="0">
                 <a:solidFill>
                   <a:srgbClr val="000000"/>
                 </a:solidFill>
@@ -4707,7 +4707,7 @@
               <a:t>錯在直接拿點數比大小。每秒點數要</a:t>
             </a:r>
             <a:r>
-              <a:rPr sz="1000" b="1" lang="zh-TW" dirty="0">
+              <a:rPr sz="1050" b="1" lang="zh-TW" dirty="0">
                 <a:solidFill>
                   <a:srgbClr val="000000"/>
                 </a:solidFill>
@@ -4718,7 +4718,7 @@
               <a:t>先換算成角度</a:t>
             </a:r>
             <a:r>
-              <a:rPr sz="1000" lang="zh-TW" dirty="0">
+              <a:rPr sz="1050" lang="zh-TW" dirty="0">
                 <a:solidFill>
                   <a:srgbClr val="000000"/>
                 </a:solidFill>
@@ -4732,15 +4732,15 @@
           </a:p>
           <a:p>
             <a:pPr algn="l">
-              <a:lnSpc>
-                <a:spcPct val="115000"/>
-              </a:lnSpc>
-              <a:spcAft>
-                <a:spcPts val="500"/>
-              </a:spcAft>
-            </a:pPr>
-            <a:r>
-              <a:rPr sz="1000" b="1" lang="zh-TW" dirty="0">
+              <a:spcBef>
+                <a:spcPts val="0"/>
+              </a:spcBef>
+              <a:spcAft>
+                <a:spcPts val="175"/>
+              </a:spcAft>
+            </a:pPr>
+            <a:r>
+              <a:rPr sz="1050" b="1" lang="zh-TW" dirty="0">
                 <a:solidFill>
                   <a:srgbClr val="000000"/>
                 </a:solidFill>
@@ -4751,7 +4751,7 @@
               <a:t>第四句</a:t>
             </a:r>
             <a:r>
-              <a:rPr sz="1000" lang="zh-TW" dirty="0">
+              <a:rPr sz="1050" lang="zh-TW" dirty="0">
                 <a:solidFill>
                   <a:srgbClr val="000000"/>
                 </a:solidFill>
@@ -4765,15 +4765,15 @@
           </a:p>
           <a:p>
             <a:pPr algn="l">
-              <a:lnSpc>
-                <a:spcPct val="115000"/>
-              </a:lnSpc>
-              <a:spcAft>
-                <a:spcPts val="500"/>
-              </a:spcAft>
-            </a:pPr>
-            <a:r>
-              <a:rPr sz="1000" lang="zh-TW" dirty="0">
+              <a:spcBef>
+                <a:spcPts val="0"/>
+              </a:spcBef>
+              <a:spcAft>
+                <a:spcPts val="175"/>
+              </a:spcAft>
+            </a:pPr>
+            <a:r>
+              <a:rPr sz="1050" lang="zh-TW" dirty="0">
                 <a:solidFill>
                   <a:srgbClr val="000000"/>
                 </a:solidFill>
@@ -4787,15 +4787,15 @@
           </a:p>
           <a:p>
             <a:pPr algn="l">
-              <a:lnSpc>
-                <a:spcPct val="115000"/>
-              </a:lnSpc>
-              <a:spcAft>
-                <a:spcPts val="500"/>
-              </a:spcAft>
-            </a:pPr>
-            <a:r>
-              <a:rPr sz="1000" lang="zh-TW" dirty="0">
+              <a:spcBef>
+                <a:spcPts val="0"/>
+              </a:spcBef>
+              <a:spcAft>
+                <a:spcPts val="175"/>
+              </a:spcAft>
+            </a:pPr>
+            <a:r>
+              <a:rPr sz="1050" lang="zh-TW" dirty="0">
                 <a:solidFill>
                   <a:srgbClr val="000000"/>
                 </a:solidFill>
@@ -4829,11 +4829,11 @@
           <a:lstStyle/>
           <a:p>
             <a:pPr algn="l">
-              <a:lnSpc>
-                <a:spcPct val="115000"/>
-              </a:lnSpc>
-              <a:spcAft>
-                <a:spcPts val="500"/>
+              <a:spcBef>
+                <a:spcPts val="0"/>
+              </a:spcBef>
+              <a:spcAft>
+                <a:spcPts val="167"/>
               </a:spcAft>
             </a:pPr>
             <a:r>
@@ -4908,11 +4908,11 @@
           <a:lstStyle/>
           <a:p>
             <a:pPr algn="l">
-              <a:lnSpc>
-                <a:spcPct val="115000"/>
-              </a:lnSpc>
-              <a:spcAft>
-                <a:spcPts val="500"/>
+              <a:spcBef>
+                <a:spcPts val="0"/>
+              </a:spcBef>
+              <a:spcAft>
+                <a:spcPts val="167"/>
               </a:spcAft>
             </a:pPr>
             <a:r>
@@ -4941,11 +4941,11 @@
           </a:p>
           <a:p>
             <a:pPr algn="l">
-              <a:lnSpc>
-                <a:spcPct val="115000"/>
-              </a:lnSpc>
-              <a:spcAft>
-                <a:spcPts val="500"/>
+              <a:spcBef>
+                <a:spcPts val="0"/>
+              </a:spcBef>
+              <a:spcAft>
+                <a:spcPts val="167"/>
               </a:spcAft>
             </a:pPr>
             <a:r>
@@ -4963,11 +4963,11 @@
           </a:p>
           <a:p>
             <a:pPr algn="l">
-              <a:lnSpc>
-                <a:spcPct val="115000"/>
-              </a:lnSpc>
-              <a:spcAft>
-                <a:spcPts val="500"/>
+              <a:spcBef>
+                <a:spcPts val="0"/>
+              </a:spcBef>
+              <a:spcAft>
+                <a:spcPts val="167"/>
               </a:spcAft>
             </a:pPr>
             <a:r>
@@ -4996,11 +4996,11 @@
           </a:p>
           <a:p>
             <a:pPr algn="l">
-              <a:lnSpc>
-                <a:spcPct val="115000"/>
-              </a:lnSpc>
-              <a:spcAft>
-                <a:spcPts val="500"/>
+              <a:spcBef>
+                <a:spcPts val="0"/>
+              </a:spcBef>
+              <a:spcAft>
+                <a:spcPts val="167"/>
               </a:spcAft>
             </a:pPr>
             <a:r>
@@ -5018,11 +5018,11 @@
           </a:p>
           <a:p>
             <a:pPr algn="l">
-              <a:lnSpc>
-                <a:spcPct val="115000"/>
-              </a:lnSpc>
-              <a:spcAft>
-                <a:spcPts val="500"/>
+              <a:spcBef>
+                <a:spcPts val="0"/>
+              </a:spcBef>
+              <a:spcAft>
+                <a:spcPts val="167"/>
               </a:spcAft>
             </a:pPr>
             <a:r>
@@ -5051,11 +5051,11 @@
           </a:p>
           <a:p>
             <a:pPr algn="l">
-              <a:lnSpc>
-                <a:spcPct val="115000"/>
-              </a:lnSpc>
-              <a:spcAft>
-                <a:spcPts val="500"/>
+              <a:spcBef>
+                <a:spcPts val="0"/>
+              </a:spcBef>
+              <a:spcAft>
+                <a:spcPts val="167"/>
               </a:spcAft>
             </a:pPr>
             <a:r>
@@ -5073,11 +5073,11 @@
           </a:p>
           <a:p>
             <a:pPr algn="l">
-              <a:lnSpc>
-                <a:spcPct val="115000"/>
-              </a:lnSpc>
-              <a:spcAft>
-                <a:spcPts val="500"/>
+              <a:spcBef>
+                <a:spcPts val="0"/>
+              </a:spcBef>
+              <a:spcAft>
+                <a:spcPts val="167"/>
               </a:spcAft>
             </a:pPr>
             <a:r>
@@ -5117,11 +5117,11 @@
           </a:p>
           <a:p>
             <a:pPr algn="l">
-              <a:lnSpc>
-                <a:spcPct val="115000"/>
-              </a:lnSpc>
-              <a:spcAft>
-                <a:spcPts val="500"/>
+              <a:spcBef>
+                <a:spcPts val="0"/>
+              </a:spcBef>
+              <a:spcAft>
+                <a:spcPts val="167"/>
               </a:spcAft>
             </a:pPr>
             <a:r>
@@ -5161,11 +5161,11 @@
           </a:p>
           <a:p>
             <a:pPr algn="l">
-              <a:lnSpc>
-                <a:spcPct val="115000"/>
-              </a:lnSpc>
-              <a:spcAft>
-                <a:spcPts val="500"/>
+              <a:spcBef>
+                <a:spcPts val="0"/>
+              </a:spcBef>
+              <a:spcAft>
+                <a:spcPts val="167"/>
               </a:spcAft>
             </a:pPr>
             <a:r>
@@ -5249,11 +5249,11 @@
           </a:p>
           <a:p>
             <a:pPr algn="l">
-              <a:lnSpc>
-                <a:spcPct val="115000"/>
-              </a:lnSpc>
-              <a:spcAft>
-                <a:spcPts val="500"/>
+              <a:spcBef>
+                <a:spcPts val="0"/>
+              </a:spcBef>
+              <a:spcAft>
+                <a:spcPts val="167"/>
               </a:spcAft>
             </a:pPr>
             <a:r>
@@ -5271,11 +5271,11 @@
           </a:p>
           <a:p>
             <a:pPr algn="l">
-              <a:lnSpc>
-                <a:spcPct val="115000"/>
-              </a:lnSpc>
-              <a:spcAft>
-                <a:spcPts val="500"/>
+              <a:spcBef>
+                <a:spcPts val="0"/>
+              </a:spcBef>
+              <a:spcAft>
+                <a:spcPts val="167"/>
               </a:spcAft>
             </a:pPr>
             <a:r>
@@ -5304,11 +5304,11 @@
           </a:p>
           <a:p>
             <a:pPr algn="l">
-              <a:lnSpc>
-                <a:spcPct val="115000"/>
-              </a:lnSpc>
-              <a:spcAft>
-                <a:spcPts val="500"/>
+              <a:spcBef>
+                <a:spcPts val="0"/>
+              </a:spcBef>
+              <a:spcAft>
+                <a:spcPts val="167"/>
               </a:spcAft>
             </a:pPr>
             <a:r>
@@ -5337,11 +5337,11 @@
           </a:p>
           <a:p>
             <a:pPr algn="l">
-              <a:lnSpc>
-                <a:spcPct val="115000"/>
-              </a:lnSpc>
-              <a:spcAft>
-                <a:spcPts val="500"/>
+              <a:spcBef>
+                <a:spcPts val="0"/>
+              </a:spcBef>
+              <a:spcAft>
+                <a:spcPts val="167"/>
               </a:spcAft>
             </a:pPr>
             <a:r>
@@ -5379,11 +5379,11 @@
           <a:lstStyle/>
           <a:p>
             <a:pPr algn="l">
-              <a:lnSpc>
-                <a:spcPct val="115000"/>
-              </a:lnSpc>
-              <a:spcAft>
-                <a:spcPts val="500"/>
+              <a:spcBef>
+                <a:spcPts val="0"/>
+              </a:spcBef>
+              <a:spcAft>
+                <a:spcPts val="167"/>
               </a:spcAft>
             </a:pPr>
             <a:r>

--- a/第五週(10-08)/第五週_第3節_簡報.pptx
+++ b/第五週(10-08)/第五週_第3節_簡報.pptx
@@ -744,7 +744,7 @@
                 <a:ea typeface="Arial Unicode MS"/>
                 <a:cs typeface="Arial Unicode MS"/>
               </a:rPr>
-              <a:t>先把工具打開，然後看下一頁的四個步驟。</a:t>
+              <a:t>先把規格判讀台打開，然後看下一頁的四個步驟。</a:t>
             </a:r>
           </a:p>
         </p:txBody>

--- a/第五週(10-08)/第五週_第3節_簡報.pptx
+++ b/第五週(10-08)/第五週_第3節_簡報.pptx
@@ -4406,11 +4406,11 @@
                 <a:spcPts val="0"/>
               </a:spcBef>
               <a:spcAft>
-                <a:spcPts val="175"/>
-              </a:spcAft>
-            </a:pPr>
-            <a:r>
-              <a:rPr sz="1050" b="1" lang="zh-TW" dirty="0">
+                <a:spcPts val="150"/>
+              </a:spcAft>
+            </a:pPr>
+            <a:r>
+              <a:rPr sz="900" b="1" lang="zh-TW" dirty="0">
                 <a:solidFill>
                   <a:srgbClr val="000000"/>
                 </a:solidFill>
@@ -4421,7 +4421,7 @@
               <a:t>▍這一張要做什麼</a:t>
             </a:r>
             <a:r>
-              <a:rPr sz="1050" lang="zh-TW" dirty="0">
+              <a:rPr sz="900" lang="zh-TW" dirty="0">
                 <a:solidFill>
                   <a:srgbClr val="000000"/>
                 </a:solidFill>
@@ -4439,11 +4439,11 @@
                 <a:spcPts val="0"/>
               </a:spcBef>
               <a:spcAft>
-                <a:spcPts val="175"/>
-              </a:spcAft>
-            </a:pPr>
-            <a:r>
-              <a:rPr sz="1050" lang="zh-TW" dirty="0">
+                <a:spcPts val="150"/>
+              </a:spcAft>
+            </a:pPr>
+            <a:r>
+              <a:rPr sz="900" lang="zh-TW" dirty="0">
                 <a:solidFill>
                   <a:srgbClr val="000000"/>
                 </a:solidFill>
@@ -4461,11 +4461,11 @@
                 <a:spcPts val="0"/>
               </a:spcBef>
               <a:spcAft>
-                <a:spcPts val="175"/>
-              </a:spcAft>
-            </a:pPr>
-            <a:r>
-              <a:rPr sz="1050" b="1" lang="zh-TW" dirty="0">
+                <a:spcPts val="150"/>
+              </a:spcAft>
+            </a:pPr>
+            <a:r>
+              <a:rPr sz="900" b="1" lang="zh-TW" dirty="0">
                 <a:solidFill>
                   <a:srgbClr val="000000"/>
                 </a:solidFill>
@@ -4476,7 +4476,7 @@
               <a:t>▍畫面上圈這裡</a:t>
             </a:r>
             <a:r>
-              <a:rPr sz="1050" lang="zh-TW" dirty="0">
+              <a:rPr sz="900" lang="zh-TW" dirty="0">
                 <a:solidFill>
                   <a:srgbClr val="000000"/>
                 </a:solidFill>
@@ -4494,11 +4494,11 @@
                 <a:spcPts val="0"/>
               </a:spcBef>
               <a:spcAft>
-                <a:spcPts val="175"/>
-              </a:spcAft>
-            </a:pPr>
-            <a:r>
-              <a:rPr sz="1050" lang="zh-TW" dirty="0">
+                <a:spcPts val="150"/>
+              </a:spcAft>
+            </a:pPr>
+            <a:r>
+              <a:rPr sz="900" lang="zh-TW" dirty="0">
                 <a:solidFill>
                   <a:srgbClr val="000000"/>
                 </a:solidFill>
@@ -4516,11 +4516,11 @@
                 <a:spcPts val="0"/>
               </a:spcBef>
               <a:spcAft>
-                <a:spcPts val="175"/>
-              </a:spcAft>
-            </a:pPr>
-            <a:r>
-              <a:rPr sz="1050" b="1" lang="zh-TW" dirty="0">
+                <a:spcPts val="150"/>
+              </a:spcAft>
+            </a:pPr>
+            <a:r>
+              <a:rPr sz="900" b="1" lang="zh-TW" dirty="0">
                 <a:solidFill>
                   <a:srgbClr val="000000"/>
                 </a:solidFill>
@@ -4531,7 +4531,7 @@
               <a:t>▍以下照著唸</a:t>
             </a:r>
             <a:r>
-              <a:rPr sz="1050" lang="zh-TW" dirty="0">
+              <a:rPr sz="900" lang="zh-TW" dirty="0">
                 <a:solidFill>
                   <a:srgbClr val="000000"/>
                 </a:solidFill>
@@ -4549,11 +4549,11 @@
                 <a:spcPts val="0"/>
               </a:spcBef>
               <a:spcAft>
-                <a:spcPts val="175"/>
-              </a:spcAft>
-            </a:pPr>
-            <a:r>
-              <a:rPr sz="1050" lang="zh-TW" dirty="0">
+                <a:spcPts val="150"/>
+              </a:spcAft>
+            </a:pPr>
+            <a:r>
+              <a:rPr sz="900" lang="zh-TW" dirty="0">
                 <a:solidFill>
                   <a:srgbClr val="000000"/>
                 </a:solidFill>
@@ -4564,7 +4564,7 @@
               <a:t>答案：</a:t>
             </a:r>
             <a:r>
-              <a:rPr sz="1050" b="1" lang="zh-TW" dirty="0">
+              <a:rPr sz="900" b="1" lang="zh-TW" dirty="0">
                 <a:solidFill>
                   <a:srgbClr val="000000"/>
                 </a:solidFill>
@@ -4575,7 +4575,7 @@
               <a:t>四句都錯</a:t>
             </a:r>
             <a:r>
-              <a:rPr sz="1050" lang="zh-TW" dirty="0">
+              <a:rPr sz="900" lang="zh-TW" dirty="0">
                 <a:solidFill>
                   <a:srgbClr val="000000"/>
                 </a:solidFill>
@@ -4593,11 +4593,11 @@
                 <a:spcPts val="0"/>
               </a:spcBef>
               <a:spcAft>
-                <a:spcPts val="175"/>
-              </a:spcAft>
-            </a:pPr>
-            <a:r>
-              <a:rPr sz="1050" b="1" lang="zh-TW" dirty="0">
+                <a:spcPts val="150"/>
+              </a:spcAft>
+            </a:pPr>
+            <a:r>
+              <a:rPr sz="900" b="1" lang="zh-TW" dirty="0">
                 <a:solidFill>
                   <a:srgbClr val="000000"/>
                 </a:solidFill>
@@ -4608,7 +4608,7 @@
               <a:t>第一句</a:t>
             </a:r>
             <a:r>
-              <a:rPr sz="1050" lang="zh-TW" dirty="0">
+              <a:rPr sz="900" lang="zh-TW" dirty="0">
                 <a:solidFill>
                   <a:srgbClr val="000000"/>
                 </a:solidFill>
@@ -4626,11 +4626,11 @@
                 <a:spcPts val="0"/>
               </a:spcBef>
               <a:spcAft>
-                <a:spcPts val="175"/>
-              </a:spcAft>
-            </a:pPr>
-            <a:r>
-              <a:rPr sz="1050" b="1" lang="zh-TW" dirty="0">
+                <a:spcPts val="150"/>
+              </a:spcAft>
+            </a:pPr>
+            <a:r>
+              <a:rPr sz="900" b="1" lang="zh-TW" dirty="0">
                 <a:solidFill>
                   <a:srgbClr val="000000"/>
                 </a:solidFill>
@@ -4641,7 +4641,7 @@
               <a:t>第二句</a:t>
             </a:r>
             <a:r>
-              <a:rPr sz="1050" lang="zh-TW" dirty="0">
+              <a:rPr sz="900" lang="zh-TW" dirty="0">
                 <a:solidFill>
                   <a:srgbClr val="000000"/>
                 </a:solidFill>
@@ -4652,7 +4652,7 @@
               <a:t>錯在把視野當成晶片的規格。視野是</a:t>
             </a:r>
             <a:r>
-              <a:rPr sz="1050" b="1" lang="zh-TW" dirty="0">
+              <a:rPr sz="900" b="1" lang="zh-TW" dirty="0">
                 <a:solidFill>
                   <a:srgbClr val="000000"/>
                 </a:solidFill>
@@ -4663,7 +4663,7 @@
               <a:t>鏡頭</a:t>
             </a:r>
             <a:r>
-              <a:rPr sz="1050" lang="zh-TW" dirty="0">
+              <a:rPr sz="900" lang="zh-TW" dirty="0">
                 <a:solidFill>
                   <a:srgbClr val="000000"/>
                 </a:solidFill>
@@ -4681,11 +4681,11 @@
                 <a:spcPts val="0"/>
               </a:spcBef>
               <a:spcAft>
-                <a:spcPts val="175"/>
-              </a:spcAft>
-            </a:pPr>
-            <a:r>
-              <a:rPr sz="1050" b="1" lang="zh-TW" dirty="0">
+                <a:spcPts val="150"/>
+              </a:spcAft>
+            </a:pPr>
+            <a:r>
+              <a:rPr sz="900" b="1" lang="zh-TW" dirty="0">
                 <a:solidFill>
                   <a:srgbClr val="000000"/>
                 </a:solidFill>
@@ -4696,18 +4696,18 @@
               <a:t>第三句</a:t>
             </a:r>
             <a:r>
-              <a:rPr sz="1050" lang="zh-TW" dirty="0">
-                <a:solidFill>
-                  <a:srgbClr val="000000"/>
-                </a:solidFill>
-                <a:latin typeface="Arial Unicode MS"/>
-                <a:ea typeface="Arial Unicode MS"/>
-                <a:cs typeface="Arial Unicode MS"/>
-              </a:rPr>
-              <a:t>錯在直接拿點數比大小。每秒點數要</a:t>
-            </a:r>
-            <a:r>
-              <a:rPr sz="1050" b="1" lang="zh-TW" dirty="0">
+              <a:rPr sz="900" lang="zh-TW" dirty="0">
+                <a:solidFill>
+                  <a:srgbClr val="000000"/>
+                </a:solidFill>
+                <a:latin typeface="Arial Unicode MS"/>
+                <a:ea typeface="Arial Unicode MS"/>
+                <a:cs typeface="Arial Unicode MS"/>
+              </a:rPr>
+              <a:t>錯在拿兩顆不同的光達直接比點數。OS1 每秒兩百六十萬點，AT128P 只有一百五十萬，可是四十公尺的目標上，OS1 只有九個點、AT128P 有一百二十一個——因為 OS1 把點灑滿三百六十度。每秒點數要</a:t>
+            </a:r>
+            <a:r>
+              <a:rPr sz="900" b="1" lang="zh-TW" dirty="0">
                 <a:solidFill>
                   <a:srgbClr val="000000"/>
                 </a:solidFill>
@@ -4718,15 +4718,15 @@
               <a:t>先換算成角度</a:t>
             </a:r>
             <a:r>
-              <a:rPr sz="1050" lang="zh-TW" dirty="0">
-                <a:solidFill>
-                  <a:srgbClr val="000000"/>
-                </a:solidFill>
-                <a:latin typeface="Arial Unicode MS"/>
-                <a:ea typeface="Arial Unicode MS"/>
-                <a:cs typeface="Arial Unicode MS"/>
-              </a:rPr>
-              <a:t>，再換算成你關心的那個距離上的間距。OS1 每秒兩百六十萬點聽起來很多，可是灑滿三百六十度之後，四十公尺的人身上只剩九個點。
+              <a:rPr sz="900" lang="zh-TW" dirty="0">
+                <a:solidFill>
+                  <a:srgbClr val="000000"/>
+                </a:solidFill>
+                <a:latin typeface="Arial Unicode MS"/>
+                <a:ea typeface="Arial Unicode MS"/>
+                <a:cs typeface="Arial Unicode MS"/>
+              </a:rPr>
+              <a:t>，再換算成你關心的那個距離上的間距。
 </a:t>
             </a:r>
           </a:p>
@@ -4736,11 +4736,77 @@
                 <a:spcPts val="0"/>
               </a:spcBef>
               <a:spcAft>
-                <a:spcPts val="175"/>
-              </a:spcAft>
-            </a:pPr>
-            <a:r>
-              <a:rPr sz="1050" b="1" lang="zh-TW" dirty="0">
+                <a:spcPts val="150"/>
+              </a:spcAft>
+            </a:pPr>
+            <a:r>
+              <a:rPr sz="900" lang="zh-TW" dirty="0">
+                <a:solidFill>
+                  <a:srgbClr val="000000"/>
+                </a:solidFill>
+                <a:latin typeface="Arial Unicode MS"/>
+                <a:ea typeface="Arial Unicode MS"/>
+                <a:cs typeface="Arial Unicode MS"/>
+              </a:rPr>
+              <a:t>這裡要跟第一節第十一張分清楚：</a:t>
+            </a:r>
+            <a:r>
+              <a:rPr sz="900" b="1" lang="zh-TW" dirty="0">
+                <a:solidFill>
+                  <a:srgbClr val="000000"/>
+                </a:solidFill>
+                <a:latin typeface="Arial Unicode MS"/>
+                <a:ea typeface="Arial Unicode MS"/>
+                <a:cs typeface="Arial Unicode MS"/>
+              </a:rPr>
+              <a:t>同一顆</a:t>
+            </a:r>
+            <a:r>
+              <a:rPr sz="900" lang="zh-TW" dirty="0">
+                <a:solidFill>
+                  <a:srgbClr val="000000"/>
+                </a:solidFill>
+                <a:latin typeface="Arial Unicode MS"/>
+                <a:ea typeface="Arial Unicode MS"/>
+                <a:cs typeface="Arial Unicode MS"/>
+              </a:rPr>
+              <a:t>光達從 1024 切到 2048，點數加倍、確實看得比較清楚，那是對的。錯的是拿</a:t>
+            </a:r>
+            <a:r>
+              <a:rPr sz="900" b="1" lang="zh-TW" dirty="0">
+                <a:solidFill>
+                  <a:srgbClr val="000000"/>
+                </a:solidFill>
+                <a:latin typeface="Arial Unicode MS"/>
+                <a:ea typeface="Arial Unicode MS"/>
+                <a:cs typeface="Arial Unicode MS"/>
+              </a:rPr>
+              <a:t>兩顆不同的</a:t>
+            </a:r>
+            <a:r>
+              <a:rPr sz="900" lang="zh-TW" dirty="0">
+                <a:solidFill>
+                  <a:srgbClr val="000000"/>
+                </a:solidFill>
+                <a:latin typeface="Arial Unicode MS"/>
+                <a:ea typeface="Arial Unicode MS"/>
+                <a:cs typeface="Arial Unicode MS"/>
+              </a:rPr>
+              <a:t>光達比點數大小。
+</a:t>
+            </a:r>
+          </a:p>
+          <a:p>
+            <a:pPr algn="l">
+              <a:spcBef>
+                <a:spcPts val="0"/>
+              </a:spcBef>
+              <a:spcAft>
+                <a:spcPts val="150"/>
+              </a:spcAft>
+            </a:pPr>
+            <a:r>
+              <a:rPr sz="900" b="1" lang="zh-TW" dirty="0">
                 <a:solidFill>
                   <a:srgbClr val="000000"/>
                 </a:solidFill>
@@ -4751,7 +4817,7 @@
               <a:t>第四句</a:t>
             </a:r>
             <a:r>
-              <a:rPr sz="1050" lang="zh-TW" dirty="0">
+              <a:rPr sz="900" lang="zh-TW" dirty="0">
                 <a:solidFill>
                   <a:srgbClr val="000000"/>
                 </a:solidFill>
@@ -4769,11 +4835,11 @@
                 <a:spcPts val="0"/>
               </a:spcBef>
               <a:spcAft>
-                <a:spcPts val="175"/>
-              </a:spcAft>
-            </a:pPr>
-            <a:r>
-              <a:rPr sz="1050" lang="zh-TW" dirty="0">
+                <a:spcPts val="150"/>
+              </a:spcAft>
+            </a:pPr>
+            <a:r>
+              <a:rPr sz="900" lang="zh-TW" dirty="0">
                 <a:solidFill>
                   <a:srgbClr val="000000"/>
                 </a:solidFill>
@@ -4791,11 +4857,11 @@
                 <a:spcPts val="0"/>
               </a:spcBef>
               <a:spcAft>
-                <a:spcPts val="175"/>
-              </a:spcAft>
-            </a:pPr>
-            <a:r>
-              <a:rPr sz="1050" lang="zh-TW" dirty="0">
+                <a:spcPts val="150"/>
+              </a:spcAft>
+            </a:pPr>
+            <a:r>
+              <a:rPr sz="900" lang="zh-TW" dirty="0">
                 <a:solidFill>
                   <a:srgbClr val="000000"/>
                 </a:solidFill>
@@ -11453,7 +11519,7 @@
                 <a:ea typeface="Arial" pitchFamily="34" charset="-122"/>
                 <a:cs typeface="Arial" pitchFamily="34" charset="-120"/>
               </a:rPr>
-              <a:t>③ Số điểm mỗi giây càng lớn thì nhìn người ở xa càng rõ.</a:t>
+              <a:t>③ So hai lidar: con nào số điểm mỗi giây lớn hơn thì chắc chắn nhìn người ở xa rõ hơn.</a:t>
             </a:r>
             <a:endParaRPr lang="en-US" sz="1250" dirty="0"/>
           </a:p>
@@ -11473,7 +11539,7 @@
                 <a:ea typeface="微軟正黑體" pitchFamily="34" charset="-122"/>
                 <a:cs typeface="微軟正黑體" pitchFamily="34" charset="-120"/>
               </a:rPr>
-              <a:t>③ 每秒點數愈大，遠處的人就看得愈清楚。</a:t>
+              <a:t>③ 兩顆光達比每秒點數，點數大的那顆，遠處的人一定看得比較清楚。</a:t>
             </a:r>
             <a:endParaRPr lang="en-US" sz="1250" dirty="0"/>
           </a:p>
@@ -12019,7 +12085,7 @@
                 <a:ea typeface="Arial" pitchFamily="34" charset="-122"/>
                 <a:cs typeface="Arial" pitchFamily="34" charset="-120"/>
               </a:rPr>
-              <a:t>③ Điểm mỗi giây phải đổi ra góc mới dùng được.</a:t>
+              <a:t>③ OS1 nhiều điểm/giây hơn AT128P, nhưng ở 40 m lại ít điểm hơn hẳn.</a:t>
             </a:r>
             <a:endParaRPr lang="en-US" sz="1350" dirty="0"/>
           </a:p>
@@ -12039,7 +12105,7 @@
                 <a:ea typeface="微軟正黑體" pitchFamily="34" charset="-122"/>
                 <a:cs typeface="微軟正黑體" pitchFamily="34" charset="-120"/>
               </a:rPr>
-              <a:t>③ 每秒點數要先換算成角度才能用。</a:t>
+              <a:t>③ OS1 每秒點數比 AT128P 多，40 公尺的目標上卻少很多。</a:t>
             </a:r>
             <a:endParaRPr lang="en-US" sz="1350" dirty="0"/>
           </a:p>

--- a/第五週(10-08)/第五週_第3節_簡報.pptx
+++ b/第五週(10-08)/第五週_第3節_簡報.pptx
@@ -4748,7 +4748,7 @@
                 <a:ea typeface="Arial Unicode MS"/>
                 <a:cs typeface="Arial Unicode MS"/>
               </a:rPr>
-              <a:t>這裡要跟第一節第十一張分清楚：</a:t>
+              <a:t>這裡要跟第一節第十二張分清楚：</a:t>
             </a:r>
             <a:r>
               <a:rPr sz="900" b="1" lang="zh-TW" dirty="0">

--- a/第五週(10-08)/第五週_第3節_簡報.pptx
+++ b/第五週(10-08)/第五週_第3節_簡報.pptx
@@ -435,11 +435,11 @@
                 <a:spcPts val="0"/>
               </a:spcBef>
               <a:spcAft>
-                <a:spcPts val="200"/>
-              </a:spcAft>
-            </a:pPr>
-            <a:r>
-              <a:rPr sz="1200" b="1" lang="zh-TW" dirty="0">
+                <a:spcPts val="192"/>
+              </a:spcAft>
+            </a:pPr>
+            <a:r>
+              <a:rPr sz="1150" b="1" lang="zh-TW" dirty="0">
                 <a:solidFill>
                   <a:srgbClr val="000000"/>
                 </a:solidFill>
@@ -450,7 +450,7 @@
               <a:t>▍這一張要做什麼</a:t>
             </a:r>
             <a:r>
-              <a:rPr sz="1200" lang="zh-TW" dirty="0">
+              <a:rPr sz="1150" lang="zh-TW" dirty="0">
                 <a:solidFill>
                   <a:srgbClr val="000000"/>
                 </a:solidFill>
@@ -468,11 +468,11 @@
                 <a:spcPts val="0"/>
               </a:spcBef>
               <a:spcAft>
-                <a:spcPts val="200"/>
-              </a:spcAft>
-            </a:pPr>
-            <a:r>
-              <a:rPr sz="1200" lang="zh-TW" dirty="0">
+                <a:spcPts val="192"/>
+              </a:spcAft>
+            </a:pPr>
+            <a:r>
+              <a:rPr sz="1150" lang="zh-TW" dirty="0">
                 <a:solidFill>
                   <a:srgbClr val="000000"/>
                 </a:solidFill>
@@ -490,11 +490,11 @@
                 <a:spcPts val="0"/>
               </a:spcBef>
               <a:spcAft>
-                <a:spcPts val="200"/>
-              </a:spcAft>
-            </a:pPr>
-            <a:r>
-              <a:rPr sz="1200" b="1" lang="zh-TW" dirty="0">
+                <a:spcPts val="192"/>
+              </a:spcAft>
+            </a:pPr>
+            <a:r>
+              <a:rPr sz="1150" b="1" lang="zh-TW" dirty="0">
                 <a:solidFill>
                   <a:srgbClr val="000000"/>
                 </a:solidFill>
@@ -505,7 +505,7 @@
               <a:t>▍畫面上圈這裡</a:t>
             </a:r>
             <a:r>
-              <a:rPr sz="1200" lang="zh-TW" dirty="0">
+              <a:rPr sz="1150" lang="zh-TW" dirty="0">
                 <a:solidFill>
                   <a:srgbClr val="000000"/>
                 </a:solidFill>
@@ -523,11 +523,11 @@
                 <a:spcPts val="0"/>
               </a:spcBef>
               <a:spcAft>
-                <a:spcPts val="200"/>
-              </a:spcAft>
-            </a:pPr>
-            <a:r>
-              <a:rPr sz="1200" lang="zh-TW" dirty="0">
+                <a:spcPts val="192"/>
+              </a:spcAft>
+            </a:pPr>
+            <a:r>
+              <a:rPr sz="1150" lang="zh-TW" dirty="0">
                 <a:solidFill>
                   <a:srgbClr val="000000"/>
                 </a:solidFill>
@@ -545,11 +545,11 @@
                 <a:spcPts val="0"/>
               </a:spcBef>
               <a:spcAft>
-                <a:spcPts val="200"/>
-              </a:spcAft>
-            </a:pPr>
-            <a:r>
-              <a:rPr sz="1200" b="1" lang="zh-TW" dirty="0">
+                <a:spcPts val="192"/>
+              </a:spcAft>
+            </a:pPr>
+            <a:r>
+              <a:rPr sz="1150" b="1" lang="zh-TW" dirty="0">
                 <a:solidFill>
                   <a:srgbClr val="000000"/>
                 </a:solidFill>
@@ -560,7 +560,7 @@
               <a:t>▍以下照著唸</a:t>
             </a:r>
             <a:r>
-              <a:rPr sz="1200" lang="zh-TW" dirty="0">
+              <a:rPr sz="1150" lang="zh-TW" dirty="0">
                 <a:solidFill>
                   <a:srgbClr val="000000"/>
                 </a:solidFill>
@@ -578,11 +578,11 @@
                 <a:spcPts val="0"/>
               </a:spcBef>
               <a:spcAft>
-                <a:spcPts val="200"/>
-              </a:spcAft>
-            </a:pPr>
-            <a:r>
-              <a:rPr sz="1200" lang="zh-TW" dirty="0">
+                <a:spcPts val="192"/>
+              </a:spcAft>
+            </a:pPr>
+            <a:r>
+              <a:rPr sz="1150" lang="zh-TW" dirty="0">
                 <a:solidFill>
                   <a:srgbClr val="000000"/>
                 </a:solidFill>
@@ -600,11 +600,11 @@
                 <a:spcPts val="0"/>
               </a:spcBef>
               <a:spcAft>
-                <a:spcPts val="200"/>
-              </a:spcAft>
-            </a:pPr>
-            <a:r>
-              <a:rPr sz="1200" lang="zh-TW" dirty="0">
+                <a:spcPts val="192"/>
+              </a:spcAft>
+            </a:pPr>
+            <a:r>
+              <a:rPr sz="1150" lang="zh-TW" dirty="0">
                 <a:solidFill>
                   <a:srgbClr val="000000"/>
                 </a:solidFill>
@@ -622,11 +622,11 @@
                 <a:spcPts val="0"/>
               </a:spcBef>
               <a:spcAft>
-                <a:spcPts val="200"/>
-              </a:spcAft>
-            </a:pPr>
-            <a:r>
-              <a:rPr sz="1200" lang="zh-TW" dirty="0">
+                <a:spcPts val="192"/>
+              </a:spcAft>
+            </a:pPr>
+            <a:r>
+              <a:rPr sz="1150" lang="zh-TW" dirty="0">
                 <a:solidFill>
                   <a:srgbClr val="000000"/>
                 </a:solidFill>
@@ -637,7 +637,7 @@
               <a:t>規則很簡單：</a:t>
             </a:r>
             <a:r>
-              <a:rPr sz="1200" b="1" lang="zh-TW" dirty="0">
+              <a:rPr sz="1150" b="1" lang="zh-TW" dirty="0">
                 <a:solidFill>
                   <a:srgbClr val="000000"/>
                 </a:solidFill>
@@ -648,7 +648,7 @@
               <a:t>我給你一台車要在哪裡跑，你告訴我哪一顆感測器可以用、哪一顆不行，而且要講得出卡在哪一行。</a:t>
             </a:r>
             <a:r>
-              <a:rPr sz="1200" lang="zh-TW" dirty="0">
+              <a:rPr sz="1150" lang="zh-TW" dirty="0">
                 <a:solidFill>
                   <a:srgbClr val="000000"/>
                 </a:solidFill>
@@ -666,11 +666,11 @@
                 <a:spcPts val="0"/>
               </a:spcBef>
               <a:spcAft>
-                <a:spcPts val="200"/>
-              </a:spcAft>
-            </a:pPr>
-            <a:r>
-              <a:rPr sz="1200" lang="zh-TW" dirty="0">
+                <a:spcPts val="192"/>
+              </a:spcAft>
+            </a:pPr>
+            <a:r>
+              <a:rPr sz="1150" lang="zh-TW" dirty="0">
                 <a:solidFill>
                   <a:srgbClr val="000000"/>
                 </a:solidFill>
@@ -688,11 +688,11 @@
                 <a:spcPts val="0"/>
               </a:spcBef>
               <a:spcAft>
-                <a:spcPts val="200"/>
-              </a:spcAft>
-            </a:pPr>
-            <a:r>
-              <a:rPr sz="1200" lang="zh-TW" dirty="0">
+                <a:spcPts val="192"/>
+              </a:spcAft>
+            </a:pPr>
+            <a:r>
+              <a:rPr sz="1150" lang="zh-TW" dirty="0">
                 <a:solidFill>
                   <a:srgbClr val="000000"/>
                 </a:solidFill>
@@ -703,7 +703,7 @@
               <a:t>這一節是</a:t>
             </a:r>
             <a:r>
-              <a:rPr sz="1200" b="1" lang="zh-TW" dirty="0">
+              <a:rPr sz="1150" b="1" lang="zh-TW" dirty="0">
                 <a:solidFill>
                   <a:srgbClr val="000000"/>
                 </a:solidFill>
@@ -714,15 +714,37 @@
               <a:t>個人作業</a:t>
             </a:r>
             <a:r>
-              <a:rPr sz="1200" lang="zh-TW" dirty="0">
-                <a:solidFill>
-                  <a:srgbClr val="000000"/>
-                </a:solidFill>
-                <a:latin typeface="Arial Unicode MS"/>
-                <a:ea typeface="Arial Unicode MS"/>
-                <a:cs typeface="Arial Unicode MS"/>
-              </a:rPr>
-              <a:t>，每個人交一張紙。下課前交。
+              <a:rPr sz="1150" lang="zh-TW" dirty="0">
+                <a:solidFill>
+                  <a:srgbClr val="000000"/>
+                </a:solidFill>
+                <a:latin typeface="Arial Unicode MS"/>
+                <a:ea typeface="Arial Unicode MS"/>
+                <a:cs typeface="Arial Unicode MS"/>
+              </a:rPr>
+              <a:t>，每個人交一份。不用紙——</a:t>
+            </a:r>
+            <a:r>
+              <a:rPr sz="1150" b="1" lang="zh-TW" dirty="0">
+                <a:solidFill>
+                  <a:srgbClr val="000000"/>
+                </a:solidFill>
+                <a:latin typeface="Arial Unicode MS"/>
+                <a:ea typeface="Arial Unicode MS"/>
+                <a:cs typeface="Arial Unicode MS"/>
+              </a:rPr>
+              <a:t>在判讀台上作答，做完截圖上傳 LINE 群組</a:t>
+            </a:r>
+            <a:r>
+              <a:rPr sz="1150" lang="zh-TW" dirty="0">
+                <a:solidFill>
+                  <a:srgbClr val="000000"/>
+                </a:solidFill>
+                <a:latin typeface="Arial Unicode MS"/>
+                <a:ea typeface="Arial Unicode MS"/>
+                <a:cs typeface="Arial Unicode MS"/>
+              </a:rPr>
+              <a:t>，下課前交。
 </a:t>
             </a:r>
           </a:p>
@@ -732,11 +754,11 @@
                 <a:spcPts val="0"/>
               </a:spcBef>
               <a:spcAft>
-                <a:spcPts val="200"/>
-              </a:spcAft>
-            </a:pPr>
-            <a:r>
-              <a:rPr sz="1200" lang="zh-TW" dirty="0">
+                <a:spcPts val="192"/>
+              </a:spcAft>
+            </a:pPr>
+            <a:r>
+              <a:rPr sz="1150" lang="zh-TW" dirty="0">
                 <a:solidFill>
                   <a:srgbClr val="000000"/>
                 </a:solidFill>
@@ -853,11 +875,11 @@
                 <a:spcPts val="0"/>
               </a:spcBef>
               <a:spcAft>
-                <a:spcPts val="142"/>
-              </a:spcAft>
-            </a:pPr>
-            <a:r>
-              <a:rPr sz="850" b="1" lang="zh-TW" dirty="0">
+                <a:spcPts val="133"/>
+              </a:spcAft>
+            </a:pPr>
+            <a:r>
+              <a:rPr sz="800" b="1" lang="zh-TW" dirty="0">
                 <a:solidFill>
                   <a:srgbClr val="000000"/>
                 </a:solidFill>
@@ -868,7 +890,7 @@
               <a:t>▍這一張要做什麼</a:t>
             </a:r>
             <a:r>
-              <a:rPr sz="850" lang="zh-TW" dirty="0">
+              <a:rPr sz="800" lang="zh-TW" dirty="0">
                 <a:solidFill>
                   <a:srgbClr val="000000"/>
                 </a:solidFill>
@@ -886,11 +908,11 @@
                 <a:spcPts val="0"/>
               </a:spcBef>
               <a:spcAft>
-                <a:spcPts val="142"/>
-              </a:spcAft>
-            </a:pPr>
-            <a:r>
-              <a:rPr sz="850" lang="zh-TW" dirty="0">
+                <a:spcPts val="133"/>
+              </a:spcAft>
+            </a:pPr>
+            <a:r>
+              <a:rPr sz="800" lang="zh-TW" dirty="0">
                 <a:solidFill>
                   <a:srgbClr val="000000"/>
                 </a:solidFill>
@@ -908,11 +930,11 @@
                 <a:spcPts val="0"/>
               </a:spcBef>
               <a:spcAft>
-                <a:spcPts val="142"/>
-              </a:spcAft>
-            </a:pPr>
-            <a:r>
-              <a:rPr sz="850" b="1" lang="zh-TW" dirty="0">
+                <a:spcPts val="133"/>
+              </a:spcAft>
+            </a:pPr>
+            <a:r>
+              <a:rPr sz="800" b="1" lang="zh-TW" dirty="0">
                 <a:solidFill>
                   <a:srgbClr val="000000"/>
                 </a:solidFill>
@@ -923,7 +945,7 @@
               <a:t>▍畫面上圈這裡</a:t>
             </a:r>
             <a:r>
-              <a:rPr sz="850" lang="zh-TW" dirty="0">
+              <a:rPr sz="800" lang="zh-TW" dirty="0">
                 <a:solidFill>
                   <a:srgbClr val="000000"/>
                 </a:solidFill>
@@ -941,11 +963,11 @@
                 <a:spcPts val="0"/>
               </a:spcBef>
               <a:spcAft>
-                <a:spcPts val="142"/>
-              </a:spcAft>
-            </a:pPr>
-            <a:r>
-              <a:rPr sz="850" lang="zh-TW" dirty="0">
+                <a:spcPts val="133"/>
+              </a:spcAft>
+            </a:pPr>
+            <a:r>
+              <a:rPr sz="800" lang="zh-TW" dirty="0">
                 <a:solidFill>
                   <a:srgbClr val="000000"/>
                 </a:solidFill>
@@ -963,11 +985,11 @@
                 <a:spcPts val="0"/>
               </a:spcBef>
               <a:spcAft>
-                <a:spcPts val="142"/>
-              </a:spcAft>
-            </a:pPr>
-            <a:r>
-              <a:rPr sz="850" b="1" lang="zh-TW" dirty="0">
+                <a:spcPts val="133"/>
+              </a:spcAft>
+            </a:pPr>
+            <a:r>
+              <a:rPr sz="800" b="1" lang="zh-TW" dirty="0">
                 <a:solidFill>
                   <a:srgbClr val="000000"/>
                 </a:solidFill>
@@ -978,7 +1000,7 @@
               <a:t>▍以下照著唸</a:t>
             </a:r>
             <a:r>
-              <a:rPr sz="850" lang="zh-TW" dirty="0">
+              <a:rPr sz="800" lang="zh-TW" dirty="0">
                 <a:solidFill>
                   <a:srgbClr val="000000"/>
                 </a:solidFill>
@@ -996,11 +1018,11 @@
                 <a:spcPts val="0"/>
               </a:spcBef>
               <a:spcAft>
-                <a:spcPts val="142"/>
-              </a:spcAft>
-            </a:pPr>
-            <a:r>
-              <a:rPr sz="850" lang="zh-TW" dirty="0">
+                <a:spcPts val="133"/>
+              </a:spcAft>
+            </a:pPr>
+            <a:r>
+              <a:rPr sz="800" lang="zh-TW" dirty="0">
                 <a:solidFill>
                   <a:srgbClr val="000000"/>
                 </a:solidFill>
@@ -1018,11 +1040,11 @@
                 <a:spcPts val="0"/>
               </a:spcBef>
               <a:spcAft>
-                <a:spcPts val="142"/>
-              </a:spcAft>
-            </a:pPr>
-            <a:r>
-              <a:rPr sz="850" b="1" lang="zh-TW" dirty="0">
+                <a:spcPts val="133"/>
+              </a:spcAft>
+            </a:pPr>
+            <a:r>
+              <a:rPr sz="800" b="1" lang="zh-TW" dirty="0">
                 <a:solidFill>
                   <a:srgbClr val="000000"/>
                 </a:solidFill>
@@ -1033,7 +1055,7 @@
               <a:t>第一步，選型號。</a:t>
             </a:r>
             <a:r>
-              <a:rPr sz="850" lang="zh-TW" dirty="0">
+              <a:rPr sz="800" lang="zh-TW" dirty="0">
                 <a:solidFill>
                   <a:srgbClr val="000000"/>
                 </a:solidFill>
@@ -1044,7 +1066,7 @@
               <a:t>左邊四個按鈕，你要算哪一顆就按哪一顆。這裡我要請各位做一件事：</a:t>
             </a:r>
             <a:r>
-              <a:rPr sz="850" b="1" lang="zh-TW" dirty="0">
+              <a:rPr sz="800" b="1" lang="zh-TW" dirty="0">
                 <a:solidFill>
                   <a:srgbClr val="000000"/>
                 </a:solidFill>
@@ -1055,7 +1077,7 @@
               <a:t>把「只看英文原文」按下去</a:t>
             </a:r>
             <a:r>
-              <a:rPr sz="850" lang="zh-TW" dirty="0">
+              <a:rPr sz="800" lang="zh-TW" dirty="0">
                 <a:solidFill>
                   <a:srgbClr val="000000"/>
                 </a:solidFill>
@@ -1073,11 +1095,11 @@
                 <a:spcPts val="0"/>
               </a:spcBef>
               <a:spcAft>
-                <a:spcPts val="142"/>
-              </a:spcAft>
-            </a:pPr>
-            <a:r>
-              <a:rPr sz="850" lang="zh-TW" dirty="0">
+                <a:spcPts val="133"/>
+              </a:spcAft>
+            </a:pPr>
+            <a:r>
+              <a:rPr sz="800" lang="zh-TW" dirty="0">
                 <a:solidFill>
                   <a:srgbClr val="000000"/>
                 </a:solidFill>
@@ -1095,11 +1117,11 @@
                 <a:spcPts val="0"/>
               </a:spcBef>
               <a:spcAft>
-                <a:spcPts val="142"/>
-              </a:spcAft>
-            </a:pPr>
-            <a:r>
-              <a:rPr sz="850" b="1" lang="zh-TW" dirty="0">
+                <a:spcPts val="133"/>
+              </a:spcAft>
+            </a:pPr>
+            <a:r>
+              <a:rPr sz="800" b="1" lang="zh-TW" dirty="0">
                 <a:solidFill>
                   <a:srgbClr val="000000"/>
                 </a:solidFill>
@@ -1110,7 +1132,7 @@
               <a:t>第二步，找四個數字。</a:t>
             </a:r>
             <a:r>
-              <a:rPr sz="850" lang="zh-TW" dirty="0">
+              <a:rPr sz="800" lang="zh-TW" dirty="0">
                 <a:solidFill>
                   <a:srgbClr val="000000"/>
                 </a:solidFill>
@@ -1128,11 +1150,11 @@
                 <a:spcPts val="0"/>
               </a:spcBef>
               <a:spcAft>
-                <a:spcPts val="142"/>
-              </a:spcAft>
-            </a:pPr>
-            <a:r>
-              <a:rPr sz="850" b="1" lang="zh-TW" dirty="0">
+                <a:spcPts val="133"/>
+              </a:spcAft>
+            </a:pPr>
+            <a:r>
+              <a:rPr sz="800" b="1" lang="zh-TW" dirty="0">
                 <a:solidFill>
                   <a:srgbClr val="000000"/>
                 </a:solidFill>
@@ -1143,7 +1165,7 @@
               <a:t>第三步，選情境。</a:t>
             </a:r>
             <a:r>
-              <a:rPr sz="850" lang="zh-TW" dirty="0">
+              <a:rPr sz="800" lang="zh-TW" dirty="0">
                 <a:solidFill>
                   <a:srgbClr val="000000"/>
                 </a:solidFill>
@@ -1161,11 +1183,11 @@
                 <a:spcPts val="0"/>
               </a:spcBef>
               <a:spcAft>
-                <a:spcPts val="142"/>
-              </a:spcAft>
-            </a:pPr>
-            <a:r>
-              <a:rPr sz="850" b="1" lang="zh-TW" dirty="0">
+                <a:spcPts val="133"/>
+              </a:spcAft>
+            </a:pPr>
+            <a:r>
+              <a:rPr sz="800" b="1" lang="zh-TW" dirty="0">
                 <a:solidFill>
                   <a:srgbClr val="000000"/>
                 </a:solidFill>
@@ -1176,15 +1198,37 @@
               <a:t>第四步，寫結論。</a:t>
             </a:r>
             <a:r>
-              <a:rPr sz="850" lang="zh-TW" dirty="0">
-                <a:solidFill>
-                  <a:srgbClr val="000000"/>
-                </a:solidFill>
-                <a:latin typeface="Arial Unicode MS"/>
-                <a:ea typeface="Arial Unicode MS"/>
-                <a:cs typeface="Arial Unicode MS"/>
-              </a:rPr>
-              <a:t>這一步在紙上寫，不在電腦上。
+              <a:rPr sz="800" lang="zh-TW" dirty="0">
+                <a:solidFill>
+                  <a:srgbClr val="000000"/>
+                </a:solidFill>
+                <a:latin typeface="Arial Unicode MS"/>
+                <a:ea typeface="Arial Unicode MS"/>
+                <a:cs typeface="Arial Unicode MS"/>
+              </a:rPr>
+              <a:t>判讀台上有第四個分頁，叫</a:t>
+            </a:r>
+            <a:r>
+              <a:rPr sz="800" b="1" lang="zh-TW" dirty="0">
+                <a:solidFill>
+                  <a:srgbClr val="000000"/>
+                </a:solidFill>
+                <a:latin typeface="Arial Unicode MS"/>
+                <a:ea typeface="Arial Unicode MS"/>
+                <a:cs typeface="Arial Unicode MS"/>
+              </a:rPr>
+              <a:t>作業</a:t>
+            </a:r>
+            <a:r>
+              <a:rPr sz="800" lang="zh-TW" dirty="0">
+                <a:solidFill>
+                  <a:srgbClr val="000000"/>
+                </a:solidFill>
+                <a:latin typeface="Arial Unicode MS"/>
+                <a:ea typeface="Arial Unicode MS"/>
+                <a:cs typeface="Arial Unicode MS"/>
+              </a:rPr>
+              <a:t>，整份就在那裡填。
 </a:t>
             </a:r>
           </a:p>
@@ -1194,11 +1238,11 @@
                 <a:spcPts val="0"/>
               </a:spcBef>
               <a:spcAft>
-                <a:spcPts val="142"/>
-              </a:spcAft>
-            </a:pPr>
-            <a:r>
-              <a:rPr sz="850" lang="zh-TW" dirty="0">
+                <a:spcPts val="133"/>
+              </a:spcAft>
+            </a:pPr>
+            <a:r>
+              <a:rPr sz="800" lang="zh-TW" dirty="0">
                 <a:solidFill>
                   <a:srgbClr val="000000"/>
                 </a:solidFill>
@@ -1209,7 +1253,7 @@
               <a:t>我要看到的不是「夠」或「不夠」兩個字，是</a:t>
             </a:r>
             <a:r>
-              <a:rPr sz="850" b="1" lang="zh-TW" dirty="0">
+              <a:rPr sz="800" b="1" lang="zh-TW" dirty="0">
                 <a:solidFill>
                   <a:srgbClr val="000000"/>
                 </a:solidFill>
@@ -1220,7 +1264,7 @@
               <a:t>卡在哪一行</a:t>
             </a:r>
             <a:r>
-              <a:rPr sz="850" lang="zh-TW" dirty="0">
+              <a:rPr sz="800" lang="zh-TW" dirty="0">
                 <a:solidFill>
                   <a:srgbClr val="000000"/>
                 </a:solidFill>
@@ -1238,11 +1282,11 @@
                 <a:spcPts val="0"/>
               </a:spcBef>
               <a:spcAft>
-                <a:spcPts val="142"/>
-              </a:spcAft>
-            </a:pPr>
-            <a:r>
-              <a:rPr sz="850" lang="zh-TW" dirty="0">
+                <a:spcPts val="133"/>
+              </a:spcAft>
+            </a:pPr>
+            <a:r>
+              <a:rPr sz="800" lang="zh-TW" dirty="0">
                 <a:solidFill>
                   <a:srgbClr val="000000"/>
                 </a:solidFill>
@@ -1260,11 +1304,11 @@
                 <a:spcPts val="0"/>
               </a:spcBef>
               <a:spcAft>
-                <a:spcPts val="142"/>
-              </a:spcAft>
-            </a:pPr>
-            <a:r>
-              <a:rPr sz="850" lang="zh-TW" dirty="0">
+                <a:spcPts val="133"/>
+              </a:spcAft>
+            </a:pPr>
+            <a:r>
+              <a:rPr sz="800" lang="zh-TW" dirty="0">
                 <a:solidFill>
                   <a:srgbClr val="000000"/>
                 </a:solidFill>
@@ -1282,19 +1326,107 @@
                 <a:spcPts val="0"/>
               </a:spcBef>
               <a:spcAft>
-                <a:spcPts val="142"/>
-              </a:spcAft>
-            </a:pPr>
-            <a:r>
-              <a:rPr sz="850" lang="zh-TW" dirty="0">
-                <a:solidFill>
-                  <a:srgbClr val="000000"/>
-                </a:solidFill>
-                <a:latin typeface="Arial Unicode MS"/>
-                <a:ea typeface="Arial Unicode MS"/>
-                <a:cs typeface="Arial Unicode MS"/>
-              </a:rPr>
-              <a:t>各位手上那張紙我等一下發。現在先把工具打開，把對照關掉。</a:t>
+                <a:spcPts val="133"/>
+              </a:spcAft>
+            </a:pPr>
+            <a:r>
+              <a:rPr sz="800" lang="zh-TW" dirty="0">
+                <a:solidFill>
+                  <a:srgbClr val="000000"/>
+                </a:solidFill>
+                <a:latin typeface="Arial Unicode MS"/>
+                <a:ea typeface="Arial Unicode MS"/>
+                <a:cs typeface="Arial Unicode MS"/>
+              </a:rPr>
+              <a:t>我提醒三件事。第一，</a:t>
+            </a:r>
+            <a:r>
+              <a:rPr sz="800" b="1" lang="zh-TW" dirty="0">
+                <a:solidFill>
+                  <a:srgbClr val="000000"/>
+                </a:solidFill>
+                <a:latin typeface="Arial Unicode MS"/>
+                <a:ea typeface="Arial Unicode MS"/>
+                <a:cs typeface="Arial Unicode MS"/>
+              </a:rPr>
+              <a:t>先把姓名和學號填上去</a:t>
+            </a:r>
+            <a:r>
+              <a:rPr sz="800" lang="zh-TW" dirty="0">
+                <a:solidFill>
+                  <a:srgbClr val="000000"/>
+                </a:solidFill>
+                <a:latin typeface="Arial Unicode MS"/>
+                <a:ea typeface="Arial Unicode MS"/>
+                <a:cs typeface="Arial Unicode MS"/>
+              </a:rPr>
+              <a:t>，不然截圖我認不出是誰。第二，答案</a:t>
+            </a:r>
+            <a:r>
+              <a:rPr sz="800" b="1" lang="zh-TW" dirty="0">
+                <a:solidFill>
+                  <a:srgbClr val="000000"/>
+                </a:solidFill>
+                <a:latin typeface="Arial Unicode MS"/>
+                <a:ea typeface="Arial Unicode MS"/>
+                <a:cs typeface="Arial Unicode MS"/>
+              </a:rPr>
+              <a:t>存在你自己的手機裡</a:t>
+            </a:r>
+            <a:r>
+              <a:rPr sz="800" lang="zh-TW" dirty="0">
+                <a:solidFill>
+                  <a:srgbClr val="000000"/>
+                </a:solidFill>
+                <a:latin typeface="Arial Unicode MS"/>
+                <a:ea typeface="Arial Unicode MS"/>
+                <a:cs typeface="Arial Unicode MS"/>
+              </a:rPr>
+              <a:t>，切去別的分頁查規格、再切回來，填過的都還在。第三，做完按「</a:t>
+            </a:r>
+            <a:r>
+              <a:rPr sz="800" b="1" lang="zh-TW" dirty="0">
+                <a:solidFill>
+                  <a:srgbClr val="000000"/>
+                </a:solidFill>
+                <a:latin typeface="Arial Unicode MS"/>
+                <a:ea typeface="Arial Unicode MS"/>
+                <a:cs typeface="Arial Unicode MS"/>
+              </a:rPr>
+              <a:t>產生作答單</a:t>
+            </a:r>
+            <a:r>
+              <a:rPr sz="800" lang="zh-TW" dirty="0">
+                <a:solidFill>
+                  <a:srgbClr val="000000"/>
+                </a:solidFill>
+                <a:latin typeface="Arial Unicode MS"/>
+                <a:ea typeface="Arial Unicode MS"/>
+                <a:cs typeface="Arial Unicode MS"/>
+              </a:rPr>
+              <a:t>」，它會整理成一張乾淨的卡片，截那一張就好。
+</a:t>
+            </a:r>
+          </a:p>
+          <a:p>
+            <a:pPr algn="l">
+              <a:spcBef>
+                <a:spcPts val="0"/>
+              </a:spcBef>
+              <a:spcAft>
+                <a:spcPts val="133"/>
+              </a:spcAft>
+            </a:pPr>
+            <a:r>
+              <a:rPr sz="800" lang="zh-TW" dirty="0">
+                <a:solidFill>
+                  <a:srgbClr val="000000"/>
+                </a:solidFill>
+                <a:latin typeface="Arial Unicode MS"/>
+                <a:ea typeface="Arial Unicode MS"/>
+                <a:cs typeface="Arial Unicode MS"/>
+              </a:rPr>
+              <a:t>現在先把工具打開，把對照關掉。</a:t>
             </a:r>
           </a:p>
         </p:txBody>
@@ -1624,7 +1756,29 @@
                 <a:ea typeface="Arial Unicode MS"/>
                 <a:cs typeface="Arial Unicode MS"/>
               </a:rPr>
-              <a:t>請把四個型號都按一次，把判定結果抄在紙上。
+              <a:t>請把四個型號都按一次，把判定結果填到</a:t>
+            </a:r>
+            <a:r>
+              <a:rPr sz="800" b="1" lang="zh-TW" dirty="0">
+                <a:solidFill>
+                  <a:srgbClr val="000000"/>
+                </a:solidFill>
+                <a:latin typeface="Arial Unicode MS"/>
+                <a:ea typeface="Arial Unicode MS"/>
+                <a:cs typeface="Arial Unicode MS"/>
+              </a:rPr>
+              <a:t>作業分頁的十二格</a:t>
+            </a:r>
+            <a:r>
+              <a:rPr sz="800" lang="zh-TW" dirty="0">
+                <a:solidFill>
+                  <a:srgbClr val="000000"/>
+                </a:solidFill>
+                <a:latin typeface="Arial Unicode MS"/>
+                <a:ea typeface="Arial Unicode MS"/>
+                <a:cs typeface="Arial Unicode MS"/>
+              </a:rPr>
+              <a:t>裡。
 </a:t>
             </a:r>
           </a:p>
@@ -2515,7 +2669,7 @@
                 <a:ea typeface="Arial Unicode MS"/>
                 <a:cs typeface="Arial Unicode MS"/>
               </a:rPr>
-              <a:t>不過天下沒有白吃的午餐，所以紙上要寫第三件事：</a:t>
+              <a:t>不過天下沒有白吃的午餐，所以作業分頁第二題還要你寫：</a:t>
             </a:r>
             <a:r>
               <a:rPr sz="800" b="1" lang="zh-TW" dirty="0">
@@ -3241,7 +3395,29 @@
                 <a:ea typeface="Arial Unicode MS"/>
                 <a:cs typeface="Arial Unicode MS"/>
               </a:rPr>
-              <a:t>這句話請寫在紙上，這是今天最重要的一句。
+              <a:t>這句話請填在作業分頁的</a:t>
+            </a:r>
+            <a:r>
+              <a:rPr sz="800" b="1" lang="zh-TW" dirty="0">
+                <a:solidFill>
+                  <a:srgbClr val="000000"/>
+                </a:solidFill>
+                <a:latin typeface="Arial Unicode MS"/>
+                <a:ea typeface="Arial Unicode MS"/>
+                <a:cs typeface="Arial Unicode MS"/>
+              </a:rPr>
+              <a:t>結論句</a:t>
+            </a:r>
+            <a:r>
+              <a:rPr sz="800" lang="zh-TW" dirty="0">
+                <a:solidFill>
+                  <a:srgbClr val="000000"/>
+                </a:solidFill>
+                <a:latin typeface="Arial Unicode MS"/>
+                <a:ea typeface="Arial Unicode MS"/>
+                <a:cs typeface="Arial Unicode MS"/>
+              </a:rPr>
+              <a:t>那一格，這是今天最重要的一句。
 </a:t>
             </a:r>
           </a:p>
@@ -3263,7 +3439,7 @@
                 <a:ea typeface="Arial Unicode MS"/>
                 <a:cs typeface="Arial Unicode MS"/>
               </a:rPr>
-              <a:t>十分鐘，做完把紙交上來。</a:t>
+              <a:t>十分鐘，做完按「產生作答單」，截圖傳到 LINE 群組。</a:t>
             </a:r>
           </a:p>
         </p:txBody>
@@ -3527,7 +3703,7 @@
                 <a:ea typeface="Arial Unicode MS"/>
                 <a:cs typeface="Arial Unicode MS"/>
               </a:rPr>
-              <a:t>十分鐘到，紙先留著，我們一起把十二格看成一張表。
+              <a:t>十分鐘到，先別急著傳，我們一起把十二格看成一張表。
 </a:t>
             </a:r>
           </a:p>
@@ -4869,7 +5045,7 @@
                 <a:ea typeface="Arial Unicode MS"/>
                 <a:cs typeface="Arial Unicode MS"/>
               </a:rPr>
-              <a:t>紙都交上來了嗎？沒交的現在交。</a:t>
+              <a:t>作答單都傳上來了嗎？還沒傳的現在傳。記得先確認姓名有填到。</a:t>
             </a:r>
           </a:p>
         </p:txBody>
@@ -5353,7 +5529,7 @@
                 <a:ea typeface="Arial Unicode MS"/>
                 <a:cs typeface="Arial Unicode MS"/>
               </a:rPr>
-              <a:t>第一，把今天這張紙留著。</a:t>
+              <a:t>第一，把今天那張作答單的截圖留著。</a:t>
             </a:r>
             <a:r>
               <a:rPr sz="1000" lang="zh-TW" dirty="0">
@@ -7285,7 +7461,7 @@
                 <a:ea typeface="Arial" pitchFamily="34" charset="-122"/>
                 <a:cs typeface="Arial" pitchFamily="34" charset="-120"/>
               </a:rPr>
-              <a:t>Viết kết luận</a:t>
+              <a:t>Viết &amp; nộp</a:t>
             </a:r>
             <a:endParaRPr lang="en-US" sz="1400" dirty="0"/>
           </a:p>
@@ -7305,7 +7481,7 @@
                 <a:ea typeface="微軟正黑體" pitchFamily="34" charset="-122"/>
                 <a:cs typeface="微軟正黑體" pitchFamily="34" charset="-120"/>
               </a:rPr>
-              <a:t>寫結論</a:t>
+              <a:t>作答與上傳</a:t>
             </a:r>
             <a:endParaRPr lang="en-US" sz="1400" dirty="0"/>
           </a:p>
@@ -7347,7 +7523,7 @@
                 <a:ea typeface="Arial" pitchFamily="34" charset="-122"/>
                 <a:cs typeface="Arial" pitchFamily="34" charset="-120"/>
               </a:rPr>
-              <a:t>Đủ hay không</a:t>
+              <a:t>Điền ở tab «Bài nộp»</a:t>
             </a:r>
             <a:endParaRPr lang="en-US" sz="1050" dirty="0"/>
           </a:p>
@@ -7367,7 +7543,7 @@
                 <a:ea typeface="Arial" pitchFamily="34" charset="-122"/>
                 <a:cs typeface="Arial" pitchFamily="34" charset="-120"/>
               </a:rPr>
-              <a:t>Tắc ở dòng nào</a:t>
+              <a:t>Tạo phiếu → chụp → LINE</a:t>
             </a:r>
             <a:endParaRPr lang="en-US" sz="1050" dirty="0"/>
           </a:p>
@@ -7387,7 +7563,7 @@
                 <a:ea typeface="微軟正黑體" pitchFamily="34" charset="-122"/>
                 <a:cs typeface="微軟正黑體" pitchFamily="34" charset="-120"/>
               </a:rPr>
-              <a:t>夠或不夠</a:t>
+              <a:t>填在「作業」分頁</a:t>
             </a:r>
             <a:endParaRPr lang="en-US" sz="1050" dirty="0"/>
           </a:p>
@@ -7407,7 +7583,7 @@
                 <a:ea typeface="微軟正黑體" pitchFamily="34" charset="-122"/>
                 <a:cs typeface="微軟正黑體" pitchFamily="34" charset="-120"/>
               </a:rPr>
-              <a:t>卡在哪一行</a:t>
+              <a:t>產生作答單→截圖→LINE</a:t>
             </a:r>
             <a:endParaRPr lang="en-US" sz="1050" dirty="0"/>
           </a:p>
@@ -12609,7 +12785,7 @@
                 <a:ea typeface="微軟正黑體" pitchFamily="34" charset="-122"/>
                 <a:cs typeface="微軟正黑體" pitchFamily="34" charset="-120"/>
               </a:rPr>
-              <a:t>要帶：今天這張紙。下週會在同一張表上加一欄雷達。</a:t>
+              <a:t>作答單的截圖留著。下週會在同一張表上加一欄雷達。</a:t>
             </a:r>
             <a:endParaRPr lang="en-US" sz="1350" dirty="0"/>
           </a:p>

--- a/第五週(10-08)/第五週_第3節_簡報.pptx
+++ b/第五週(10-08)/第五週_第3節_簡報.pptx
@@ -1338,7 +1338,7 @@
                 <a:ea typeface="Arial Unicode MS"/>
                 <a:cs typeface="Arial Unicode MS"/>
               </a:rPr>
-              <a:t>我提醒三件事。第一，</a:t>
+              <a:t>我提醒四件事。第一，</a:t>
             </a:r>
             <a:r>
               <a:rPr sz="800" b="1" lang="zh-TW" dirty="0">
@@ -1382,7 +1382,29 @@
                 <a:ea typeface="Arial Unicode MS"/>
                 <a:cs typeface="Arial Unicode MS"/>
               </a:rPr>
-              <a:t>，切去別的分頁查規格、再切回來，填過的都還在。第三，做完按「</a:t>
+              <a:t>，切去別的分頁查規格、再切回來，填過的都還在。第三，十二格不用手抄——在試算那一頁按「</a:t>
+            </a:r>
+            <a:r>
+              <a:rPr sz="800" b="1" lang="zh-TW" dirty="0">
+                <a:solidFill>
+                  <a:srgbClr val="000000"/>
+                </a:solidFill>
+                <a:latin typeface="Arial Unicode MS"/>
+                <a:ea typeface="Arial Unicode MS"/>
+                <a:cs typeface="Arial Unicode MS"/>
+              </a:rPr>
+              <a:t>記進作業</a:t>
+            </a:r>
+            <a:r>
+              <a:rPr sz="800" lang="zh-TW" dirty="0">
+                <a:solidFill>
+                  <a:srgbClr val="000000"/>
+                </a:solidFill>
+                <a:latin typeface="Arial Unicode MS"/>
+                <a:ea typeface="Arial Unicode MS"/>
+                <a:cs typeface="Arial Unicode MS"/>
+              </a:rPr>
+              <a:t>」就會自動填進去，填錯還是可以自己改。第四，全部做完按「</a:t>
             </a:r>
             <a:r>
               <a:rPr sz="800" b="1" lang="zh-TW" dirty="0">
@@ -1756,7 +1778,7 @@
                 <a:ea typeface="Arial Unicode MS"/>
                 <a:cs typeface="Arial Unicode MS"/>
               </a:rPr>
-              <a:t>請把四個型號都按一次，把判定結果填到</a:t>
+              <a:t>請把四個型號都按一次。每按完一個，</a:t>
             </a:r>
             <a:r>
               <a:rPr sz="800" b="1" lang="zh-TW" dirty="0">
@@ -1767,7 +1789,7 @@
                 <a:ea typeface="Arial Unicode MS"/>
                 <a:cs typeface="Arial Unicode MS"/>
               </a:rPr>
-              <a:t>作業分頁的十二格</a:t>
+              <a:t>判定底下有一顆「記進作業」</a:t>
             </a:r>
             <a:r>
               <a:rPr sz="800" lang="zh-TW" dirty="0">
@@ -1778,7 +1800,7 @@
                 <a:ea typeface="Arial Unicode MS"/>
                 <a:cs typeface="Arial Unicode MS"/>
               </a:rPr>
-              <a:t>裡。
+              <a:t>，按下去那一格就填好了，不用自己切到作業分頁去抄。
 </a:t>
             </a:r>
           </a:p>

--- a/第五週(10-08)/第五週_第3節_簡報.pptx
+++ b/第五週(10-08)/第五週_第3節_簡報.pptx
@@ -2582,6 +2582,72 @@
                 <a:cs typeface="Arial Unicode MS"/>
               </a:rPr>
               <a:t>，判定從「不夠」變成「夠」。
+</a:t>
+            </a:r>
+          </a:p>
+          <a:p>
+            <a:pPr algn="l">
+              <a:spcBef>
+                <a:spcPts val="0"/>
+              </a:spcBef>
+              <a:spcAft>
+                <a:spcPts val="133"/>
+              </a:spcAft>
+            </a:pPr>
+            <a:r>
+              <a:rPr sz="800" lang="zh-TW" dirty="0">
+                <a:solidFill>
+                  <a:srgbClr val="000000"/>
+                </a:solidFill>
+                <a:latin typeface="Arial Unicode MS"/>
+                <a:ea typeface="Arial Unicode MS"/>
+                <a:cs typeface="Arial Unicode MS"/>
+              </a:rPr>
+              <a:t>這裡講清楚一件事，免得各位找錯地方：</a:t>
+            </a:r>
+            <a:r>
+              <a:rPr sz="800" b="1" lang="zh-TW" dirty="0">
+                <a:solidFill>
+                  <a:srgbClr val="000000"/>
+                </a:solidFill>
+                <a:latin typeface="Arial Unicode MS"/>
+                <a:ea typeface="Arial Unicode MS"/>
+                <a:cs typeface="Arial Unicode MS"/>
+              </a:rPr>
+              <a:t>右邊的小工具②也可以把每圈點數拉到 2048，也會看到九個點變十八個——可是那一區只是示範，不會改判定。</a:t>
+            </a:r>
+            <a:r>
+              <a:rPr sz="800" lang="zh-TW" dirty="0">
+                <a:solidFill>
+                  <a:srgbClr val="000000"/>
+                </a:solidFill>
+                <a:latin typeface="Arial Unicode MS"/>
+                <a:ea typeface="Arial Unicode MS"/>
+                <a:cs typeface="Arial Unicode MS"/>
+              </a:rPr>
+              <a:t>作業第二題要的是判定，所以一定要在</a:t>
+            </a:r>
+            <a:r>
+              <a:rPr sz="800" b="1" lang="zh-TW" dirty="0">
+                <a:solidFill>
+                  <a:srgbClr val="000000"/>
+                </a:solidFill>
+                <a:latin typeface="Arial Unicode MS"/>
+                <a:ea typeface="Arial Unicode MS"/>
+                <a:cs typeface="Arial Unicode MS"/>
+              </a:rPr>
+              <a:t>試算這一邊</a:t>
+            </a:r>
+            <a:r>
+              <a:rPr sz="800" lang="zh-TW" dirty="0">
+                <a:solidFill>
+                  <a:srgbClr val="000000"/>
+                </a:solidFill>
+                <a:latin typeface="Arial Unicode MS"/>
+                <a:ea typeface="Arial Unicode MS"/>
+                <a:cs typeface="Arial Unicode MS"/>
+              </a:rPr>
+              <a:t>改。改完之後，判定底下那顆按鈕會自己變成「記進作業第二題」，按下去就填好了；十二格那一題不會被動到，因為那一題問的是預設模式。
 </a:t>
             </a:r>
           </a:p>

--- a/第五週(10-08)/第五週_第3節_簡報.pptx
+++ b/第五週(10-08)/第五週_第3節_簡報.pptx
@@ -1294,19 +1294,19 @@
                 <a:ea typeface="Arial Unicode MS"/>
                 <a:cs typeface="Arial Unicode MS"/>
               </a:rPr>
-              <a:t>舉例來說，這樣寫才算：「LD-16 在河內尖峰不夠用，因為四十公尺的機車身上只有兩個點，雖然它的測距四十公尺是足夠的。」
-</a:t>
-            </a:r>
-          </a:p>
-          <a:p>
-            <a:pPr algn="l">
-              <a:spcBef>
-                <a:spcPts val="0"/>
-              </a:spcBef>
-              <a:spcAft>
-                <a:spcPts val="133"/>
-              </a:spcAft>
-            </a:pPr>
+              <a:t>結論句是</a:t>
+            </a:r>
+            <a:r>
+              <a:rPr sz="800" b="1" lang="zh-TW" dirty="0">
+                <a:solidFill>
+                  <a:srgbClr val="000000"/>
+                </a:solidFill>
+                <a:latin typeface="Arial Unicode MS"/>
+                <a:ea typeface="Arial Unicode MS"/>
+                <a:cs typeface="Arial Unicode MS"/>
+              </a:rPr>
+              <a:t>四選一</a:t>
+            </a:r>
             <a:r>
               <a:rPr sz="800" lang="zh-TW" dirty="0">
                 <a:solidFill>
@@ -1316,7 +1316,29 @@
                 <a:ea typeface="Arial Unicode MS"/>
                 <a:cs typeface="Arial Unicode MS"/>
               </a:rPr>
-              <a:t>這樣寫不算：「LD-16 不好用。」
+              <a:t>，不用自己打字。但是選項裡有陷阱：裡面有一句只寫「OS1 不好用」，也有一句把卡住的地方講錯——說它卡在測距，其實測距九十公尺是夠的，卡住的是點數。</a:t>
+            </a:r>
+            <a:r>
+              <a:rPr sz="800" b="1" lang="zh-TW" dirty="0">
+                <a:solidFill>
+                  <a:srgbClr val="000000"/>
+                </a:solidFill>
+                <a:latin typeface="Arial Unicode MS"/>
+                <a:ea typeface="Arial Unicode MS"/>
+                <a:cs typeface="Arial Unicode MS"/>
+              </a:rPr>
+              <a:t>要選的是那句把『卡在哪一行』講對的。</a:t>
+            </a:r>
+            <a:r>
+              <a:rPr sz="800" lang="zh-TW" dirty="0">
+                <a:solidFill>
+                  <a:srgbClr val="000000"/>
+                </a:solidFill>
+                <a:latin typeface="Arial Unicode MS"/>
+                <a:ea typeface="Arial Unicode MS"/>
+                <a:cs typeface="Arial Unicode MS"/>
+              </a:rPr>
+              <a:t>
 </a:t>
             </a:r>
           </a:p>
@@ -11354,7 +11376,7 @@
                 <a:ea typeface="Arial" pitchFamily="34" charset="-122"/>
                 <a:cs typeface="Arial" pitchFamily="34" charset="-120"/>
               </a:rPr>
-              <a:t>Bốn câu dưới đây. Đúng hay sai, nói một câu lý do.</a:t>
+              <a:t>Bốn câu sau: chọn đúng hay sai, rồi chọn một lý do.</a:t>
             </a:r>
             <a:endParaRPr lang="en-US" sz="2300" dirty="0"/>
           </a:p>
@@ -11374,7 +11396,7 @@
                 <a:ea typeface="微軟正黑體" pitchFamily="34" charset="-122"/>
                 <a:cs typeface="微軟正黑體" pitchFamily="34" charset="-120"/>
               </a:rPr>
-              <a:t>下面四句話。對或錯，再說一句理由。</a:t>
+              <a:t>下面四句話。選對或錯，再選一個理由。</a:t>
             </a:r>
             <a:endParaRPr lang="en-US" sz="2300" dirty="0"/>
           </a:p>

--- a/第五週(10-08)/第五週_第3節_簡報.pptx
+++ b/第五週(10-08)/第五週_第3節_簡報.pptx
@@ -2197,7 +2197,7 @@
                 <a:ea typeface="Arial Unicode MS"/>
                 <a:cs typeface="Arial Unicode MS"/>
               </a:rPr>
-              <a:t>第一步，選型號。</a:t>
+              <a:t>第一步，選情境。</a:t>
             </a:r>
             <a:r>
               <a:rPr sz="800" lang="zh-TW" dirty="0">
@@ -2208,7 +2208,7 @@
                 <a:ea typeface="Arial Unicode MS"/>
                 <a:cs typeface="Arial Unicode MS"/>
               </a:rPr>
-              <a:t>左邊四個按鈕，你要算哪一顆就按哪一顆。這裡我要請各位做一件事：</a:t>
+              <a:t>看畫面</a:t>
             </a:r>
             <a:r>
               <a:rPr sz="800" b="1" lang="zh-TW" dirty="0">
@@ -2219,6 +2219,138 @@
                 <a:ea typeface="Arial Unicode MS"/>
                 <a:cs typeface="Arial Unicode MS"/>
               </a:rPr>
+              <a:t>最上面那一條</a:t>
+            </a:r>
+            <a:r>
+              <a:rPr sz="800" lang="zh-TW" dirty="0">
+                <a:solidFill>
+                  <a:srgbClr val="000000"/>
+                </a:solidFill>
+                <a:latin typeface="Arial Unicode MS"/>
+                <a:ea typeface="Arial Unicode MS"/>
+                <a:cs typeface="Arial Unicode MS"/>
+              </a:rPr>
+              <a:t>，一直釘在那裡，捲到哪都看得到。三個按鈕：校園接駁、時速二十；河內尖峰、時速四十；國道、時速一百。</a:t>
+            </a:r>
+            <a:r>
+              <a:rPr sz="800" b="1" lang="zh-TW" dirty="0">
+                <a:solidFill>
+                  <a:srgbClr val="000000"/>
+                </a:solidFill>
+                <a:latin typeface="Arial Unicode MS"/>
+                <a:ea typeface="Arial Unicode MS"/>
+                <a:cs typeface="Arial Unicode MS"/>
+              </a:rPr>
+              <a:t>一題只要選一次</a:t>
+            </a:r>
+            <a:r>
+              <a:rPr sz="800" lang="zh-TW" dirty="0">
+                <a:solidFill>
+                  <a:srgbClr val="000000"/>
+                </a:solidFill>
+                <a:latin typeface="Arial Unicode MS"/>
+                <a:ea typeface="Arial Unicode MS"/>
+                <a:cs typeface="Arial Unicode MS"/>
+              </a:rPr>
+              <a:t>——選好了就不要再動它，等一下四顆型號都用同一個情境。旁邊會跟著印出這個情境的煞停距離和門檻，那就是等一下判定在比的數字。
+</a:t>
+            </a:r>
+          </a:p>
+          <a:p>
+            <a:pPr algn="l">
+              <a:spcBef>
+                <a:spcPts val="0"/>
+              </a:spcBef>
+              <a:spcAft>
+                <a:spcPts val="133"/>
+              </a:spcAft>
+            </a:pPr>
+            <a:r>
+              <a:rPr sz="800" b="1" lang="zh-TW" dirty="0">
+                <a:solidFill>
+                  <a:srgbClr val="000000"/>
+                </a:solidFill>
+                <a:latin typeface="Arial Unicode MS"/>
+                <a:ea typeface="Arial Unicode MS"/>
+                <a:cs typeface="Arial Unicode MS"/>
+              </a:rPr>
+              <a:t>第二步，選型號。</a:t>
+            </a:r>
+            <a:r>
+              <a:rPr sz="800" lang="zh-TW" dirty="0">
+                <a:solidFill>
+                  <a:srgbClr val="000000"/>
+                </a:solidFill>
+                <a:latin typeface="Arial Unicode MS"/>
+                <a:ea typeface="Arial Unicode MS"/>
+                <a:cs typeface="Arial Unicode MS"/>
+              </a:rPr>
+              <a:t>判定那一塊的</a:t>
+            </a:r>
+            <a:r>
+              <a:rPr sz="800" b="1" lang="zh-TW" dirty="0">
+                <a:solidFill>
+                  <a:srgbClr val="000000"/>
+                </a:solidFill>
+                <a:latin typeface="Arial Unicode MS"/>
+                <a:ea typeface="Arial Unicode MS"/>
+                <a:cs typeface="Arial Unicode MS"/>
+              </a:rPr>
+              <a:t>上面</a:t>
+            </a:r>
+            <a:r>
+              <a:rPr sz="800" lang="zh-TW" dirty="0">
+                <a:solidFill>
+                  <a:srgbClr val="000000"/>
+                </a:solidFill>
+                <a:latin typeface="Arial Unicode MS"/>
+                <a:ea typeface="Arial Unicode MS"/>
+                <a:cs typeface="Arial Unicode MS"/>
+              </a:rPr>
+              <a:t>有一排四顆按鈕，你要算哪一顆就按哪一顆，不用跑回左邊。情境固定、型號輪四顆——這就是今天每一題要做的事。
+</a:t>
+            </a:r>
+          </a:p>
+          <a:p>
+            <a:pPr algn="l">
+              <a:spcBef>
+                <a:spcPts val="0"/>
+              </a:spcBef>
+              <a:spcAft>
+                <a:spcPts val="133"/>
+              </a:spcAft>
+            </a:pPr>
+            <a:r>
+              <a:rPr sz="800" b="1" lang="zh-TW" dirty="0">
+                <a:solidFill>
+                  <a:srgbClr val="000000"/>
+                </a:solidFill>
+                <a:latin typeface="Arial Unicode MS"/>
+                <a:ea typeface="Arial Unicode MS"/>
+                <a:cs typeface="Arial Unicode MS"/>
+              </a:rPr>
+              <a:t>第三步，找四個數字、看判定。</a:t>
+            </a:r>
+            <a:r>
+              <a:rPr sz="800" lang="zh-TW" dirty="0">
+                <a:solidFill>
+                  <a:srgbClr val="000000"/>
+                </a:solidFill>
+                <a:latin typeface="Arial Unicode MS"/>
+                <a:ea typeface="Arial Unicode MS"/>
+                <a:cs typeface="Arial Unicode MS"/>
+              </a:rPr>
+              <a:t>四題還是上午那四個：垂直視野、對百分之十反射率的測距、解析度、更新率，選完按檢查。這裡我要請各位做一件事：</a:t>
+            </a:r>
+            <a:r>
+              <a:rPr sz="800" b="1" lang="zh-TW" dirty="0">
+                <a:solidFill>
+                  <a:srgbClr val="000000"/>
+                </a:solidFill>
+                <a:latin typeface="Arial Unicode MS"/>
+                <a:ea typeface="Arial Unicode MS"/>
+                <a:cs typeface="Arial Unicode MS"/>
+              </a:rPr>
               <a:t>把「只看英文原文」按下去</a:t>
             </a:r>
             <a:r>
@@ -2230,95 +2362,7 @@
                 <a:ea typeface="Arial Unicode MS"/>
                 <a:cs typeface="Arial Unicode MS"/>
               </a:rPr>
-              <a:t>。上午我讓對照開著，因為大家第一次讀；現在請各位試試看純原文。真的規格表上不會有中文。
-</a:t>
-            </a:r>
-          </a:p>
-          <a:p>
-            <a:pPr algn="l">
-              <a:spcBef>
-                <a:spcPts val="0"/>
-              </a:spcBef>
-              <a:spcAft>
-                <a:spcPts val="133"/>
-              </a:spcAft>
-            </a:pPr>
-            <a:r>
-              <a:rPr sz="800" lang="zh-TW" dirty="0">
-                <a:solidFill>
-                  <a:srgbClr val="000000"/>
-                </a:solidFill>
-                <a:latin typeface="Arial Unicode MS"/>
-                <a:ea typeface="Arial Unicode MS"/>
-                <a:cs typeface="Arial Unicode MS"/>
-              </a:rPr>
-              <a:t>看不懂的單字可以問我，或者按回「原文＋對照」確認一下，但是先自己試。
-</a:t>
-            </a:r>
-          </a:p>
-          <a:p>
-            <a:pPr algn="l">
-              <a:spcBef>
-                <a:spcPts val="0"/>
-              </a:spcBef>
-              <a:spcAft>
-                <a:spcPts val="133"/>
-              </a:spcAft>
-            </a:pPr>
-            <a:r>
-              <a:rPr sz="800" b="1" lang="zh-TW" dirty="0">
-                <a:solidFill>
-                  <a:srgbClr val="000000"/>
-                </a:solidFill>
-                <a:latin typeface="Arial Unicode MS"/>
-                <a:ea typeface="Arial Unicode MS"/>
-                <a:cs typeface="Arial Unicode MS"/>
-              </a:rPr>
-              <a:t>第二步，找四個數字。</a:t>
-            </a:r>
-            <a:r>
-              <a:rPr sz="800" lang="zh-TW" dirty="0">
-                <a:solidFill>
-                  <a:srgbClr val="000000"/>
-                </a:solidFill>
-                <a:latin typeface="Arial Unicode MS"/>
-                <a:ea typeface="Arial Unicode MS"/>
-                <a:cs typeface="Arial Unicode MS"/>
-              </a:rPr>
-              <a:t>就是上午那四題：垂直視野、對百分之十反射率的測距、解析度、更新率。選完按檢查。
-</a:t>
-            </a:r>
-          </a:p>
-          <a:p>
-            <a:pPr algn="l">
-              <a:spcBef>
-                <a:spcPts val="0"/>
-              </a:spcBef>
-              <a:spcAft>
-                <a:spcPts val="133"/>
-              </a:spcAft>
-            </a:pPr>
-            <a:r>
-              <a:rPr sz="800" b="1" lang="zh-TW" dirty="0">
-                <a:solidFill>
-                  <a:srgbClr val="000000"/>
-                </a:solidFill>
-                <a:latin typeface="Arial Unicode MS"/>
-                <a:ea typeface="Arial Unicode MS"/>
-                <a:cs typeface="Arial Unicode MS"/>
-              </a:rPr>
-              <a:t>第三步，選情境。</a:t>
-            </a:r>
-            <a:r>
-              <a:rPr sz="800" lang="zh-TW" dirty="0">
-                <a:solidFill>
-                  <a:srgbClr val="000000"/>
-                </a:solidFill>
-                <a:latin typeface="Arial Unicode MS"/>
-                <a:ea typeface="Arial Unicode MS"/>
-                <a:cs typeface="Arial Unicode MS"/>
-              </a:rPr>
-              <a:t>中間下面有三個按鈕：校園接駁、時速二十；河內尖峰、時速四十；國道、時速一百。
+              <a:t>。上午我讓對照開著，因為大家第一次讀；現在請各位試試看純原文，真的規格表上不會有中文。看不懂的單字可以問我，或者按回「原文＋對照」確認一下，但是先自己試。
 </a:t>
             </a:r>
           </a:p>
@@ -2571,7 +2615,29 @@
                 <a:ea typeface="Arial Unicode MS"/>
                 <a:cs typeface="Arial Unicode MS"/>
               </a:rPr>
-              <a:t>」就會自動填進去，填錯還是可以自己改。第四，全部做完按「</a:t>
+              <a:t>」就會自動填進去，按鈕下面還會告訴各位</a:t>
+            </a:r>
+            <a:r>
+              <a:rPr sz="800" b="1" lang="zh-TW" dirty="0">
+                <a:solidFill>
+                  <a:srgbClr val="000000"/>
+                </a:solidFill>
+                <a:latin typeface="Arial Unicode MS"/>
+                <a:ea typeface="Arial Unicode MS"/>
+                <a:cs typeface="Arial Unicode MS"/>
+              </a:rPr>
+              <a:t>十二格已經記了幾格</a:t>
+            </a:r>
+            <a:r>
+              <a:rPr sz="800" lang="zh-TW" dirty="0">
+                <a:solidFill>
+                  <a:srgbClr val="000000"/>
+                </a:solidFill>
+                <a:latin typeface="Arial Unicode MS"/>
+                <a:ea typeface="Arial Unicode MS"/>
+                <a:cs typeface="Arial Unicode MS"/>
+              </a:rPr>
+              <a:t>，填錯還是可以自己改。第四，全部做完按「</a:t>
             </a:r>
             <a:r>
               <a:rPr sz="800" b="1" lang="zh-TW" dirty="0">
@@ -8614,7 +8680,7 @@
                 <a:ea typeface="Arial" pitchFamily="34" charset="-122"/>
                 <a:cs typeface="Arial" pitchFamily="34" charset="-120"/>
               </a:rPr>
-              <a:t>Chọn model</a:t>
+              <a:t>Chọn tình huống</a:t>
             </a:r>
             <a:endParaRPr lang="en-US" sz="1400" dirty="0"/>
           </a:p>
@@ -8634,7 +8700,7 @@
                 <a:ea typeface="微軟正黑體" pitchFamily="34" charset="-122"/>
                 <a:cs typeface="微軟正黑體" pitchFamily="34" charset="-120"/>
               </a:rPr>
-              <a:t>選型號</a:t>
+              <a:t>選情境</a:t>
             </a:r>
             <a:endParaRPr lang="en-US" sz="1400" dirty="0"/>
           </a:p>
@@ -8676,7 +8742,7 @@
                 <a:ea typeface="Arial" pitchFamily="34" charset="-122"/>
                 <a:cs typeface="Arial" pitchFamily="34" charset="-120"/>
               </a:rPr>
-              <a:t>Đọc bảng</a:t>
+              <a:t>Ở thanh trên cùng</a:t>
             </a:r>
             <a:endParaRPr lang="en-US" sz="1050" dirty="0"/>
           </a:p>
@@ -8696,7 +8762,7 @@
                 <a:ea typeface="Arial" pitchFamily="34" charset="-122"/>
                 <a:cs typeface="Arial" pitchFamily="34" charset="-120"/>
               </a:rPr>
-              <a:t>Tắt phần dịch</a:t>
+              <a:t>Mỗi câu chỉ chọn một lần</a:t>
             </a:r>
             <a:endParaRPr lang="en-US" sz="1050" dirty="0"/>
           </a:p>
@@ -8716,7 +8782,7 @@
                 <a:ea typeface="微軟正黑體" pitchFamily="34" charset="-122"/>
                 <a:cs typeface="微軟正黑體" pitchFamily="34" charset="-120"/>
               </a:rPr>
-              <a:t>讀規格表</a:t>
+              <a:t>在最上面那一條</a:t>
             </a:r>
             <a:endParaRPr lang="en-US" sz="1050" dirty="0"/>
           </a:p>
@@ -8736,7 +8802,7 @@
                 <a:ea typeface="微軟正黑體" pitchFamily="34" charset="-122"/>
                 <a:cs typeface="微軟正黑體" pitchFamily="34" charset="-120"/>
               </a:rPr>
-              <a:t>把對照關掉</a:t>
+              <a:t>一題只要選一次</a:t>
             </a:r>
             <a:endParaRPr lang="en-US" sz="1050" dirty="0"/>
           </a:p>
@@ -8910,7 +8976,7 @@
                 <a:ea typeface="Arial" pitchFamily="34" charset="-122"/>
                 <a:cs typeface="Arial" pitchFamily="34" charset="-120"/>
               </a:rPr>
-              <a:t>Tìm bốn số</a:t>
+              <a:t>Chọn model</a:t>
             </a:r>
             <a:endParaRPr lang="en-US" sz="1400" dirty="0"/>
           </a:p>
@@ -8930,7 +8996,7 @@
                 <a:ea typeface="微軟正黑體" pitchFamily="34" charset="-122"/>
                 <a:cs typeface="微軟正黑體" pitchFamily="34" charset="-120"/>
               </a:rPr>
-              <a:t>找四個數字</a:t>
+              <a:t>選型號</a:t>
             </a:r>
             <a:endParaRPr lang="en-US" sz="1400" dirty="0"/>
           </a:p>
@@ -8972,7 +9038,7 @@
                 <a:ea typeface="Arial" pitchFamily="34" charset="-122"/>
                 <a:cs typeface="Arial" pitchFamily="34" charset="-120"/>
               </a:rPr>
-              <a:t>Góc nhìn · tầm đo</a:t>
+              <a:t>Hàng nút trên kết luận</a:t>
             </a:r>
             <a:endParaRPr lang="en-US" sz="1050" dirty="0"/>
           </a:p>
@@ -8992,7 +9058,7 @@
                 <a:ea typeface="Arial" pitchFamily="34" charset="-122"/>
                 <a:cs typeface="Arial" pitchFamily="34" charset="-120"/>
               </a:rPr>
-              <a:t>phân giải · tốc độ</a:t>
+              <a:t>Làm lần lượt bốn cái</a:t>
             </a:r>
             <a:endParaRPr lang="en-US" sz="1050" dirty="0"/>
           </a:p>
@@ -9012,7 +9078,7 @@
                 <a:ea typeface="微軟正黑體" pitchFamily="34" charset="-122"/>
                 <a:cs typeface="微軟正黑體" pitchFamily="34" charset="-120"/>
               </a:rPr>
-              <a:t>視野・測距</a:t>
+              <a:t>判定上方那一排</a:t>
             </a:r>
             <a:endParaRPr lang="en-US" sz="1050" dirty="0"/>
           </a:p>
@@ -9032,7 +9098,7 @@
                 <a:ea typeface="微軟正黑體" pitchFamily="34" charset="-122"/>
                 <a:cs typeface="微軟正黑體" pitchFamily="34" charset="-120"/>
               </a:rPr>
-              <a:t>解析度・更新率</a:t>
+              <a:t>四顆輪一遍</a:t>
             </a:r>
             <a:endParaRPr lang="en-US" sz="1050" dirty="0"/>
           </a:p>
@@ -9206,7 +9272,7 @@
                 <a:ea typeface="Arial" pitchFamily="34" charset="-122"/>
                 <a:cs typeface="Arial" pitchFamily="34" charset="-120"/>
               </a:rPr>
-              <a:t>Chọn tình huống</a:t>
+              <a:t>Tìm bốn số</a:t>
             </a:r>
             <a:endParaRPr lang="en-US" sz="1400" dirty="0"/>
           </a:p>
@@ -9226,7 +9292,7 @@
                 <a:ea typeface="微軟正黑體" pitchFamily="34" charset="-122"/>
                 <a:cs typeface="微軟正黑體" pitchFamily="34" charset="-120"/>
               </a:rPr>
-              <a:t>選情境</a:t>
+              <a:t>找四個數字</a:t>
             </a:r>
             <a:endParaRPr lang="en-US" sz="1400" dirty="0"/>
           </a:p>
@@ -9268,7 +9334,7 @@
                 <a:ea typeface="Arial" pitchFamily="34" charset="-122"/>
                 <a:cs typeface="Arial" pitchFamily="34" charset="-120"/>
               </a:rPr>
-              <a:t>Trường học · Hà Nội</a:t>
+              <a:t>Đọc bảng, tắt phần dịch</a:t>
             </a:r>
             <a:endParaRPr lang="en-US" sz="1050" dirty="0"/>
           </a:p>
@@ -9288,7 +9354,7 @@
                 <a:ea typeface="Arial" pitchFamily="34" charset="-122"/>
                 <a:cs typeface="Arial" pitchFamily="34" charset="-120"/>
               </a:rPr>
-              <a:t>Cao tốc</a:t>
+              <a:t>Góc nhìn · tầm đo · phân giải · tốc độ</a:t>
             </a:r>
             <a:endParaRPr lang="en-US" sz="1050" dirty="0"/>
           </a:p>
@@ -9308,7 +9374,7 @@
                 <a:ea typeface="微軟正黑體" pitchFamily="34" charset="-122"/>
                 <a:cs typeface="微軟正黑體" pitchFamily="34" charset="-120"/>
               </a:rPr>
-              <a:t>校園・河內</a:t>
+              <a:t>讀規格表，把對照關掉</a:t>
             </a:r>
             <a:endParaRPr lang="en-US" sz="1050" dirty="0"/>
           </a:p>
@@ -9328,7 +9394,7 @@
                 <a:ea typeface="微軟正黑體" pitchFamily="34" charset="-122"/>
                 <a:cs typeface="微軟正黑體" pitchFamily="34" charset="-120"/>
               </a:rPr>
-              <a:t>國道</a:t>
+              <a:t>視野・測距・解析度・更新率</a:t>
             </a:r>
             <a:endParaRPr lang="en-US" sz="1050" dirty="0"/>
           </a:p>

--- a/第五週(10-08)/第五週_第3節_簡報.pptx
+++ b/第五週(10-08)/第五週_第3節_簡報.pptx
@@ -436,30 +436,19 @@
                 <a:spcPts val="0"/>
               </a:spcBef>
               <a:spcAft>
-                <a:spcPts val="192"/>
+                <a:spcPts val="200"/>
               </a:spcAft>
             </a:pPr>
             <a:r>
-              <a:rPr sz="1150" b="1" lang="zh-TW" dirty="0">
-                <a:solidFill>
-                  <a:srgbClr val="000000"/>
-                </a:solidFill>
-                <a:latin typeface="Arial Unicode MS"/>
-                <a:ea typeface="Arial Unicode MS"/>
-                <a:cs typeface="Arial Unicode MS"/>
-              </a:rPr>
-              <a:t>▍這一張要做什麼</a:t>
-            </a:r>
-            <a:r>
-              <a:rPr sz="1150" lang="zh-TW" dirty="0">
-                <a:solidFill>
-                  <a:srgbClr val="000000"/>
-                </a:solidFill>
-                <a:latin typeface="Arial Unicode MS"/>
-                <a:ea typeface="Arial Unicode MS"/>
-                <a:cs typeface="Arial Unicode MS"/>
-              </a:rPr>
-              <a:t>
+              <a:rPr sz="1200" lang="zh-TW" dirty="0">
+                <a:solidFill>
+                  <a:srgbClr val="000000"/>
+                </a:solidFill>
+                <a:latin typeface="Arial Unicode MS"/>
+                <a:ea typeface="Arial Unicode MS"/>
+                <a:cs typeface="Arial Unicode MS"/>
+              </a:rPr>
+              <a:t>第三節，整節都在電腦上。
 </a:t>
             </a:r>
           </a:p>
@@ -469,19 +458,19 @@
                 <a:spcPts val="0"/>
               </a:spcBef>
               <a:spcAft>
-                <a:spcPts val="192"/>
+                <a:spcPts val="200"/>
               </a:spcAft>
             </a:pPr>
             <a:r>
-              <a:rPr sz="1150" lang="zh-TW" dirty="0">
-                <a:solidFill>
-                  <a:srgbClr val="000000"/>
-                </a:solidFill>
-                <a:latin typeface="Arial Unicode MS"/>
-                <a:ea typeface="Arial Unicode MS"/>
-                <a:cs typeface="Arial Unicode MS"/>
-              </a:rPr>
-              <a:t>第三節開場。整節上機，四個型號乘三個情境，每人交一張。
+              <a:rPr sz="1200" lang="zh-TW" dirty="0">
+                <a:solidFill>
+                  <a:srgbClr val="000000"/>
+                </a:solidFill>
+                <a:latin typeface="Arial Unicode MS"/>
+                <a:ea typeface="Arial Unicode MS"/>
+                <a:cs typeface="Arial Unicode MS"/>
+              </a:rPr>
+              <a:t>今天上午我們讀了兩頁規格表。這一節要把它用出來。
 </a:t>
             </a:r>
           </a:p>
@@ -491,22 +480,33 @@
                 <a:spcPts val="0"/>
               </a:spcBef>
               <a:spcAft>
-                <a:spcPts val="192"/>
+                <a:spcPts val="200"/>
               </a:spcAft>
             </a:pPr>
             <a:r>
-              <a:rPr sz="1150" b="1" lang="zh-TW" dirty="0">
-                <a:solidFill>
-                  <a:srgbClr val="000000"/>
-                </a:solidFill>
-                <a:latin typeface="Arial Unicode MS"/>
-                <a:ea typeface="Arial Unicode MS"/>
-                <a:cs typeface="Arial Unicode MS"/>
-              </a:rPr>
-              <a:t>▍畫面上圈這裡</a:t>
-            </a:r>
-            <a:r>
-              <a:rPr sz="1150" lang="zh-TW" dirty="0">
+              <a:rPr sz="1200" lang="zh-TW" dirty="0">
+                <a:solidFill>
+                  <a:srgbClr val="000000"/>
+                </a:solidFill>
+                <a:latin typeface="Arial Unicode MS"/>
+                <a:ea typeface="Arial Unicode MS"/>
+                <a:cs typeface="Arial Unicode MS"/>
+              </a:rPr>
+              <a:t>規則很簡單：</a:t>
+            </a:r>
+            <a:r>
+              <a:rPr sz="1200" b="1" lang="zh-TW" dirty="0">
+                <a:solidFill>
+                  <a:srgbClr val="000000"/>
+                </a:solidFill>
+                <a:latin typeface="Arial Unicode MS"/>
+                <a:ea typeface="Arial Unicode MS"/>
+                <a:cs typeface="Arial Unicode MS"/>
+              </a:rPr>
+              <a:t>我給你一台車要在哪裡跑，你告訴我哪一顆感測器可以用、哪一顆不行，而且要講得出卡在哪一行。</a:t>
+            </a:r>
+            <a:r>
+              <a:rPr sz="1200" lang="zh-TW" dirty="0">
                 <a:solidFill>
                   <a:srgbClr val="000000"/>
                 </a:solidFill>
@@ -524,19 +524,19 @@
                 <a:spcPts val="0"/>
               </a:spcBef>
               <a:spcAft>
-                <a:spcPts val="192"/>
+                <a:spcPts val="200"/>
               </a:spcAft>
             </a:pPr>
             <a:r>
-              <a:rPr sz="1150" lang="zh-TW" dirty="0">
-                <a:solidFill>
-                  <a:srgbClr val="000000"/>
-                </a:solidFill>
-                <a:latin typeface="Arial Unicode MS"/>
-                <a:ea typeface="Arial Unicode MS"/>
-                <a:cs typeface="Arial Unicode MS"/>
-              </a:rPr>
-              <a:t>圈主標「替一台指定的車選感測器」。說明今天交的是自己的判斷，不是抄答案。
+              <a:rPr sz="1200" lang="zh-TW" dirty="0">
+                <a:solidFill>
+                  <a:srgbClr val="000000"/>
+                </a:solidFill>
+                <a:latin typeface="Arial Unicode MS"/>
+                <a:ea typeface="Arial Unicode MS"/>
+                <a:cs typeface="Arial Unicode MS"/>
+              </a:rPr>
+              <a:t>四個型號，三個情境，總共十二格。各位不用全部算，我會指定。
 </a:t>
             </a:r>
           </a:p>
@@ -546,30 +546,63 @@
                 <a:spcPts val="0"/>
               </a:spcBef>
               <a:spcAft>
-                <a:spcPts val="192"/>
+                <a:spcPts val="200"/>
               </a:spcAft>
             </a:pPr>
             <a:r>
-              <a:rPr sz="1150" b="1" lang="zh-TW" dirty="0">
-                <a:solidFill>
-                  <a:srgbClr val="000000"/>
-                </a:solidFill>
-                <a:latin typeface="Arial Unicode MS"/>
-                <a:ea typeface="Arial Unicode MS"/>
-                <a:cs typeface="Arial Unicode MS"/>
-              </a:rPr>
-              <a:t>▍以下照著唸</a:t>
-            </a:r>
-            <a:r>
-              <a:rPr sz="1150" lang="zh-TW" dirty="0">
-                <a:solidFill>
-                  <a:srgbClr val="000000"/>
-                </a:solidFill>
-                <a:latin typeface="Arial Unicode MS"/>
-                <a:ea typeface="Arial Unicode MS"/>
-                <a:cs typeface="Arial Unicode MS"/>
-              </a:rPr>
-              <a:t>
+              <a:rPr sz="1200" lang="zh-TW" dirty="0">
+                <a:solidFill>
+                  <a:srgbClr val="000000"/>
+                </a:solidFill>
+                <a:latin typeface="Arial Unicode MS"/>
+                <a:ea typeface="Arial Unicode MS"/>
+                <a:cs typeface="Arial Unicode MS"/>
+              </a:rPr>
+              <a:t>這一節是</a:t>
+            </a:r>
+            <a:r>
+              <a:rPr sz="1200" b="1" lang="zh-TW" dirty="0">
+                <a:solidFill>
+                  <a:srgbClr val="000000"/>
+                </a:solidFill>
+                <a:latin typeface="Arial Unicode MS"/>
+                <a:ea typeface="Arial Unicode MS"/>
+                <a:cs typeface="Arial Unicode MS"/>
+              </a:rPr>
+              <a:t>個人作業</a:t>
+            </a:r>
+            <a:r>
+              <a:rPr sz="1200" lang="zh-TW" dirty="0">
+                <a:solidFill>
+                  <a:srgbClr val="000000"/>
+                </a:solidFill>
+                <a:latin typeface="Arial Unicode MS"/>
+                <a:ea typeface="Arial Unicode MS"/>
+                <a:cs typeface="Arial Unicode MS"/>
+              </a:rPr>
+              <a:t>，每個人交一份。不用紙——</a:t>
+            </a:r>
+            <a:r>
+              <a:rPr sz="1200" b="1" lang="zh-TW" dirty="0">
+                <a:solidFill>
+                  <a:srgbClr val="000000"/>
+                </a:solidFill>
+                <a:latin typeface="Arial Unicode MS"/>
+                <a:ea typeface="Arial Unicode MS"/>
+                <a:cs typeface="Arial Unicode MS"/>
+              </a:rPr>
+              <a:t>在判讀台上作答，做完截圖上傳 LINE 群組</a:t>
+            </a:r>
+            <a:r>
+              <a:rPr sz="1200" lang="zh-TW" dirty="0">
+                <a:solidFill>
+                  <a:srgbClr val="000000"/>
+                </a:solidFill>
+                <a:latin typeface="Arial Unicode MS"/>
+                <a:ea typeface="Arial Unicode MS"/>
+                <a:cs typeface="Arial Unicode MS"/>
+              </a:rPr>
+              <a:t>，下課前交。
 </a:t>
             </a:r>
           </a:p>
@@ -579,187 +612,11 @@
                 <a:spcPts val="0"/>
               </a:spcBef>
               <a:spcAft>
-                <a:spcPts val="192"/>
+                <a:spcPts val="200"/>
               </a:spcAft>
             </a:pPr>
             <a:r>
-              <a:rPr sz="1150" lang="zh-TW" dirty="0">
-                <a:solidFill>
-                  <a:srgbClr val="000000"/>
-                </a:solidFill>
-                <a:latin typeface="Arial Unicode MS"/>
-                <a:ea typeface="Arial Unicode MS"/>
-                <a:cs typeface="Arial Unicode MS"/>
-              </a:rPr>
-              <a:t>第三節，整節都在電腦上。
-</a:t>
-            </a:r>
-          </a:p>
-          <a:p>
-            <a:pPr algn="l">
-              <a:spcBef>
-                <a:spcPts val="0"/>
-              </a:spcBef>
-              <a:spcAft>
-                <a:spcPts val="192"/>
-              </a:spcAft>
-            </a:pPr>
-            <a:r>
-              <a:rPr sz="1150" lang="zh-TW" dirty="0">
-                <a:solidFill>
-                  <a:srgbClr val="000000"/>
-                </a:solidFill>
-                <a:latin typeface="Arial Unicode MS"/>
-                <a:ea typeface="Arial Unicode MS"/>
-                <a:cs typeface="Arial Unicode MS"/>
-              </a:rPr>
-              <a:t>今天上午我們讀了兩頁規格表。這一節要把它用出來。
-</a:t>
-            </a:r>
-          </a:p>
-          <a:p>
-            <a:pPr algn="l">
-              <a:spcBef>
-                <a:spcPts val="0"/>
-              </a:spcBef>
-              <a:spcAft>
-                <a:spcPts val="192"/>
-              </a:spcAft>
-            </a:pPr>
-            <a:r>
-              <a:rPr sz="1150" lang="zh-TW" dirty="0">
-                <a:solidFill>
-                  <a:srgbClr val="000000"/>
-                </a:solidFill>
-                <a:latin typeface="Arial Unicode MS"/>
-                <a:ea typeface="Arial Unicode MS"/>
-                <a:cs typeface="Arial Unicode MS"/>
-              </a:rPr>
-              <a:t>規則很簡單：</a:t>
-            </a:r>
-            <a:r>
-              <a:rPr sz="1150" b="1" lang="zh-TW" dirty="0">
-                <a:solidFill>
-                  <a:srgbClr val="000000"/>
-                </a:solidFill>
-                <a:latin typeface="Arial Unicode MS"/>
-                <a:ea typeface="Arial Unicode MS"/>
-                <a:cs typeface="Arial Unicode MS"/>
-              </a:rPr>
-              <a:t>我給你一台車要在哪裡跑，你告訴我哪一顆感測器可以用、哪一顆不行，而且要講得出卡在哪一行。</a:t>
-            </a:r>
-            <a:r>
-              <a:rPr sz="1150" lang="zh-TW" dirty="0">
-                <a:solidFill>
-                  <a:srgbClr val="000000"/>
-                </a:solidFill>
-                <a:latin typeface="Arial Unicode MS"/>
-                <a:ea typeface="Arial Unicode MS"/>
-                <a:cs typeface="Arial Unicode MS"/>
-              </a:rPr>
-              <a:t>
-</a:t>
-            </a:r>
-          </a:p>
-          <a:p>
-            <a:pPr algn="l">
-              <a:spcBef>
-                <a:spcPts val="0"/>
-              </a:spcBef>
-              <a:spcAft>
-                <a:spcPts val="192"/>
-              </a:spcAft>
-            </a:pPr>
-            <a:r>
-              <a:rPr sz="1150" lang="zh-TW" dirty="0">
-                <a:solidFill>
-                  <a:srgbClr val="000000"/>
-                </a:solidFill>
-                <a:latin typeface="Arial Unicode MS"/>
-                <a:ea typeface="Arial Unicode MS"/>
-                <a:cs typeface="Arial Unicode MS"/>
-              </a:rPr>
-              <a:t>四個型號，三個情境，總共十二格。各位不用全部算，我會指定。
-</a:t>
-            </a:r>
-          </a:p>
-          <a:p>
-            <a:pPr algn="l">
-              <a:spcBef>
-                <a:spcPts val="0"/>
-              </a:spcBef>
-              <a:spcAft>
-                <a:spcPts val="192"/>
-              </a:spcAft>
-            </a:pPr>
-            <a:r>
-              <a:rPr sz="1150" lang="zh-TW" dirty="0">
-                <a:solidFill>
-                  <a:srgbClr val="000000"/>
-                </a:solidFill>
-                <a:latin typeface="Arial Unicode MS"/>
-                <a:ea typeface="Arial Unicode MS"/>
-                <a:cs typeface="Arial Unicode MS"/>
-              </a:rPr>
-              <a:t>這一節是</a:t>
-            </a:r>
-            <a:r>
-              <a:rPr sz="1150" b="1" lang="zh-TW" dirty="0">
-                <a:solidFill>
-                  <a:srgbClr val="000000"/>
-                </a:solidFill>
-                <a:latin typeface="Arial Unicode MS"/>
-                <a:ea typeface="Arial Unicode MS"/>
-                <a:cs typeface="Arial Unicode MS"/>
-              </a:rPr>
-              <a:t>個人作業</a:t>
-            </a:r>
-            <a:r>
-              <a:rPr sz="1150" lang="zh-TW" dirty="0">
-                <a:solidFill>
-                  <a:srgbClr val="000000"/>
-                </a:solidFill>
-                <a:latin typeface="Arial Unicode MS"/>
-                <a:ea typeface="Arial Unicode MS"/>
-                <a:cs typeface="Arial Unicode MS"/>
-              </a:rPr>
-              <a:t>，每個人交一份。不用紙——</a:t>
-            </a:r>
-            <a:r>
-              <a:rPr sz="1150" b="1" lang="zh-TW" dirty="0">
-                <a:solidFill>
-                  <a:srgbClr val="000000"/>
-                </a:solidFill>
-                <a:latin typeface="Arial Unicode MS"/>
-                <a:ea typeface="Arial Unicode MS"/>
-                <a:cs typeface="Arial Unicode MS"/>
-              </a:rPr>
-              <a:t>在判讀台上作答，做完截圖上傳 LINE 群組</a:t>
-            </a:r>
-            <a:r>
-              <a:rPr sz="1150" lang="zh-TW" dirty="0">
-                <a:solidFill>
-                  <a:srgbClr val="000000"/>
-                </a:solidFill>
-                <a:latin typeface="Arial Unicode MS"/>
-                <a:ea typeface="Arial Unicode MS"/>
-                <a:cs typeface="Arial Unicode MS"/>
-              </a:rPr>
-              <a:t>，下課前交。
-</a:t>
-            </a:r>
-          </a:p>
-          <a:p>
-            <a:pPr algn="l">
-              <a:spcBef>
-                <a:spcPts val="0"/>
-              </a:spcBef>
-              <a:spcAft>
-                <a:spcPts val="192"/>
-              </a:spcAft>
-            </a:pPr>
-            <a:r>
-              <a:rPr sz="1150" lang="zh-TW" dirty="0">
+              <a:rPr sz="1200" lang="zh-TW" dirty="0">
                 <a:solidFill>
                   <a:srgbClr val="000000"/>
                 </a:solidFill>
@@ -876,30 +733,19 @@
                 <a:spcPts val="0"/>
               </a:spcBef>
               <a:spcAft>
-                <a:spcPts val="167"/>
+                <a:spcPts val="200"/>
               </a:spcAft>
             </a:pPr>
             <a:r>
-              <a:rPr sz="1000" b="1" lang="zh-TW" dirty="0">
-                <a:solidFill>
-                  <a:srgbClr val="000000"/>
-                </a:solidFill>
-                <a:latin typeface="Arial Unicode MS"/>
-                <a:ea typeface="Arial Unicode MS"/>
-                <a:cs typeface="Arial Unicode MS"/>
-              </a:rPr>
-              <a:t>▍這一張要做什麼</a:t>
-            </a:r>
-            <a:r>
-              <a:rPr sz="1000" lang="zh-TW" dirty="0">
-                <a:solidFill>
-                  <a:srgbClr val="000000"/>
-                </a:solidFill>
-                <a:latin typeface="Arial Unicode MS"/>
-                <a:ea typeface="Arial Unicode MS"/>
-                <a:cs typeface="Arial Unicode MS"/>
-              </a:rPr>
-              <a:t>
+              <a:rPr sz="1200" lang="zh-TW" dirty="0">
+                <a:solidFill>
+                  <a:srgbClr val="000000"/>
+                </a:solidFill>
+                <a:latin typeface="Arial Unicode MS"/>
+                <a:ea typeface="Arial Unicode MS"/>
+                <a:cs typeface="Arial Unicode MS"/>
+              </a:rPr>
+              <a:t>下週第六週，十月十五日，繼續第三章。
 </a:t>
             </a:r>
           </a:p>
@@ -909,19 +755,41 @@
                 <a:spcPts val="0"/>
               </a:spcBef>
               <a:spcAft>
-                <a:spcPts val="167"/>
+                <a:spcPts val="200"/>
               </a:spcAft>
             </a:pPr>
             <a:r>
-              <a:rPr sz="1000" lang="zh-TW" dirty="0">
-                <a:solidFill>
-                  <a:srgbClr val="000000"/>
-                </a:solidFill>
-                <a:latin typeface="Arial Unicode MS"/>
-                <a:ea typeface="Arial Unicode MS"/>
-                <a:cs typeface="Arial Unicode MS"/>
-              </a:rPr>
-              <a:t>下週預告：雷達、超音波、GNSS 與 IMU 的規格判讀。
+              <a:rPr sz="1200" lang="zh-TW" dirty="0">
+                <a:solidFill>
+                  <a:srgbClr val="000000"/>
+                </a:solidFill>
+                <a:latin typeface="Arial Unicode MS"/>
+                <a:ea typeface="Arial Unicode MS"/>
+                <a:cs typeface="Arial Unicode MS"/>
+              </a:rPr>
+              <a:t>我們把剩下三種感測器的規格表讀完：</a:t>
+            </a:r>
+            <a:r>
+              <a:rPr sz="1200" b="1" lang="zh-TW" dirty="0">
+                <a:solidFill>
+                  <a:srgbClr val="000000"/>
+                </a:solidFill>
+                <a:latin typeface="Arial Unicode MS"/>
+                <a:ea typeface="Arial Unicode MS"/>
+                <a:cs typeface="Arial Unicode MS"/>
+              </a:rPr>
+              <a:t>毫米波雷達、超音波、還有衛星定位加慣性感測器</a:t>
+            </a:r>
+            <a:r>
+              <a:rPr sz="1200" lang="zh-TW" dirty="0">
+                <a:solidFill>
+                  <a:srgbClr val="000000"/>
+                </a:solidFill>
+                <a:latin typeface="Arial Unicode MS"/>
+                <a:ea typeface="Arial Unicode MS"/>
+                <a:cs typeface="Arial Unicode MS"/>
+              </a:rPr>
+              <a:t>。
 </a:t>
             </a:r>
           </a:p>
@@ -931,22 +799,33 @@
                 <a:spcPts val="0"/>
               </a:spcBef>
               <a:spcAft>
-                <a:spcPts val="167"/>
+                <a:spcPts val="200"/>
               </a:spcAft>
             </a:pPr>
             <a:r>
-              <a:rPr sz="1000" b="1" lang="zh-TW" dirty="0">
-                <a:solidFill>
-                  <a:srgbClr val="000000"/>
-                </a:solidFill>
-                <a:latin typeface="Arial Unicode MS"/>
-                <a:ea typeface="Arial Unicode MS"/>
-                <a:cs typeface="Arial Unicode MS"/>
-              </a:rPr>
-              <a:t>▍畫面上圈這裡</a:t>
-            </a:r>
-            <a:r>
-              <a:rPr sz="1000" lang="zh-TW" dirty="0">
+              <a:rPr sz="1200" lang="zh-TW" dirty="0">
+                <a:solidFill>
+                  <a:srgbClr val="000000"/>
+                </a:solidFill>
+                <a:latin typeface="Arial Unicode MS"/>
+                <a:ea typeface="Arial Unicode MS"/>
+                <a:cs typeface="Arial Unicode MS"/>
+              </a:rPr>
+              <a:t>我先給各位一個預告，讓大家有心理準備：</a:t>
+            </a:r>
+            <a:r>
+              <a:rPr sz="1200" b="1" lang="zh-TW" dirty="0">
+                <a:solidFill>
+                  <a:srgbClr val="000000"/>
+                </a:solidFill>
+                <a:latin typeface="Arial Unicode MS"/>
+                <a:ea typeface="Arial Unicode MS"/>
+                <a:cs typeface="Arial Unicode MS"/>
+              </a:rPr>
+              <a:t>雷達的規格表跟今天看的完全不一樣。</a:t>
+            </a:r>
+            <a:r>
+              <a:rPr sz="1200" lang="zh-TW" dirty="0">
                 <a:solidFill>
                   <a:srgbClr val="000000"/>
                 </a:solidFill>
@@ -964,19 +843,85 @@
                 <a:spcPts val="0"/>
               </a:spcBef>
               <a:spcAft>
-                <a:spcPts val="167"/>
+                <a:spcPts val="200"/>
               </a:spcAft>
             </a:pPr>
             <a:r>
-              <a:rPr sz="1000" lang="zh-TW" dirty="0">
-                <a:solidFill>
-                  <a:srgbClr val="000000"/>
-                </a:solidFill>
-                <a:latin typeface="Arial Unicode MS"/>
-                <a:ea typeface="Arial Unicode MS"/>
-                <a:cs typeface="Arial Unicode MS"/>
-              </a:rPr>
-              <a:t>圈下週的四種感測器，說明同一支工具會再加型號。
+              <a:rPr sz="1200" lang="zh-TW" dirty="0">
+                <a:solidFill>
+                  <a:srgbClr val="000000"/>
+                </a:solidFill>
+                <a:latin typeface="Arial Unicode MS"/>
+                <a:ea typeface="Arial Unicode MS"/>
+                <a:cs typeface="Arial Unicode MS"/>
+              </a:rPr>
+              <a:t>它上面沒有「像素」，也沒有「線束數」。它有的是</a:t>
+            </a:r>
+            <a:r>
+              <a:rPr sz="1200" b="1" lang="zh-TW" dirty="0">
+                <a:solidFill>
+                  <a:srgbClr val="000000"/>
+                </a:solidFill>
+                <a:latin typeface="Arial Unicode MS"/>
+                <a:ea typeface="Arial Unicode MS"/>
+                <a:cs typeface="Arial Unicode MS"/>
+              </a:rPr>
+              <a:t>頻寬</a:t>
+            </a:r>
+            <a:r>
+              <a:rPr sz="1200" lang="zh-TW" dirty="0">
+                <a:solidFill>
+                  <a:srgbClr val="000000"/>
+                </a:solidFill>
+                <a:latin typeface="Arial Unicode MS"/>
+                <a:ea typeface="Arial Unicode MS"/>
+                <a:cs typeface="Arial Unicode MS"/>
+              </a:rPr>
+              <a:t>、</a:t>
+            </a:r>
+            <a:r>
+              <a:rPr sz="1200" b="1" lang="zh-TW" dirty="0">
+                <a:solidFill>
+                  <a:srgbClr val="000000"/>
+                </a:solidFill>
+                <a:latin typeface="Arial Unicode MS"/>
+                <a:ea typeface="Arial Unicode MS"/>
+                <a:cs typeface="Arial Unicode MS"/>
+              </a:rPr>
+              <a:t>都卜勒速度解析度</a:t>
+            </a:r>
+            <a:r>
+              <a:rPr sz="1200" lang="zh-TW" dirty="0">
+                <a:solidFill>
+                  <a:srgbClr val="000000"/>
+                </a:solidFill>
+                <a:latin typeface="Arial Unicode MS"/>
+                <a:ea typeface="Arial Unicode MS"/>
+                <a:cs typeface="Arial Unicode MS"/>
+              </a:rPr>
+              <a:t>、</a:t>
+            </a:r>
+            <a:r>
+              <a:rPr sz="1200" b="1" lang="zh-TW" dirty="0">
+                <a:solidFill>
+                  <a:srgbClr val="000000"/>
+                </a:solidFill>
+                <a:latin typeface="Arial Unicode MS"/>
+                <a:ea typeface="Arial Unicode MS"/>
+                <a:cs typeface="Arial Unicode MS"/>
+              </a:rPr>
+              <a:t>天線數</a:t>
+            </a:r>
+            <a:r>
+              <a:rPr sz="1200" lang="zh-TW" dirty="0">
+                <a:solidFill>
+                  <a:srgbClr val="000000"/>
+                </a:solidFill>
+                <a:latin typeface="Arial Unicode MS"/>
+                <a:ea typeface="Arial Unicode MS"/>
+                <a:cs typeface="Arial Unicode MS"/>
+              </a:rPr>
+              <a:t>。第三週我們講過雷達可以直接量速度，那個能力在規格表上就寫成一行數字。
 </a:t>
             </a:r>
           </a:p>
@@ -986,30 +931,19 @@
                 <a:spcPts val="0"/>
               </a:spcBef>
               <a:spcAft>
-                <a:spcPts val="167"/>
+                <a:spcPts val="200"/>
               </a:spcAft>
             </a:pPr>
             <a:r>
-              <a:rPr sz="1000" b="1" lang="zh-TW" dirty="0">
-                <a:solidFill>
-                  <a:srgbClr val="000000"/>
-                </a:solidFill>
-                <a:latin typeface="Arial Unicode MS"/>
-                <a:ea typeface="Arial Unicode MS"/>
-                <a:cs typeface="Arial Unicode MS"/>
-              </a:rPr>
-              <a:t>▍以下照著唸</a:t>
-            </a:r>
-            <a:r>
-              <a:rPr sz="1000" lang="zh-TW" dirty="0">
-                <a:solidFill>
-                  <a:srgbClr val="000000"/>
-                </a:solidFill>
-                <a:latin typeface="Arial Unicode MS"/>
-                <a:ea typeface="Arial Unicode MS"/>
-                <a:cs typeface="Arial Unicode MS"/>
-              </a:rPr>
-              <a:t>
+              <a:rPr sz="1200" lang="zh-TW" dirty="0">
+                <a:solidFill>
+                  <a:srgbClr val="000000"/>
+                </a:solidFill>
+                <a:latin typeface="Arial Unicode MS"/>
+                <a:ea typeface="Arial Unicode MS"/>
+                <a:cs typeface="Arial Unicode MS"/>
+              </a:rPr>
+              <a:t>兩件事要準備。
 </a:t>
             </a:r>
           </a:p>
@@ -1019,19 +953,30 @@
                 <a:spcPts val="0"/>
               </a:spcBef>
               <a:spcAft>
-                <a:spcPts val="167"/>
+                <a:spcPts val="200"/>
               </a:spcAft>
             </a:pPr>
             <a:r>
-              <a:rPr sz="1000" lang="zh-TW" dirty="0">
-                <a:solidFill>
-                  <a:srgbClr val="000000"/>
-                </a:solidFill>
-                <a:latin typeface="Arial Unicode MS"/>
-                <a:ea typeface="Arial Unicode MS"/>
-                <a:cs typeface="Arial Unicode MS"/>
-              </a:rPr>
-              <a:t>下週第六週，十月十五日，繼續第三章。
+              <a:rPr sz="1200" b="1" lang="zh-TW" dirty="0">
+                <a:solidFill>
+                  <a:srgbClr val="000000"/>
+                </a:solidFill>
+                <a:latin typeface="Arial Unicode MS"/>
+                <a:ea typeface="Arial Unicode MS"/>
+                <a:cs typeface="Arial Unicode MS"/>
+              </a:rPr>
+              <a:t>第一，把今天那張作答單的截圖留著。</a:t>
+            </a:r>
+            <a:r>
+              <a:rPr sz="1200" lang="zh-TW" dirty="0">
+                <a:solidFill>
+                  <a:srgbClr val="000000"/>
+                </a:solidFill>
+                <a:latin typeface="Arial Unicode MS"/>
+                <a:ea typeface="Arial Unicode MS"/>
+                <a:cs typeface="Arial Unicode MS"/>
+              </a:rPr>
+              <a:t>下週我們會在同一張表上加一欄雷達，直接比較。
 </a:t>
             </a:r>
           </a:p>
@@ -1041,41 +986,30 @@
                 <a:spcPts val="0"/>
               </a:spcBef>
               <a:spcAft>
-                <a:spcPts val="167"/>
+                <a:spcPts val="200"/>
               </a:spcAft>
             </a:pPr>
             <a:r>
-              <a:rPr sz="1000" lang="zh-TW" dirty="0">
-                <a:solidFill>
-                  <a:srgbClr val="000000"/>
-                </a:solidFill>
-                <a:latin typeface="Arial Unicode MS"/>
-                <a:ea typeface="Arial Unicode MS"/>
-                <a:cs typeface="Arial Unicode MS"/>
-              </a:rPr>
-              <a:t>我們把剩下三種感測器的規格表讀完：</a:t>
-            </a:r>
-            <a:r>
-              <a:rPr sz="1000" b="1" lang="zh-TW" dirty="0">
-                <a:solidFill>
-                  <a:srgbClr val="000000"/>
-                </a:solidFill>
-                <a:latin typeface="Arial Unicode MS"/>
-                <a:ea typeface="Arial Unicode MS"/>
-                <a:cs typeface="Arial Unicode MS"/>
-              </a:rPr>
-              <a:t>毫米波雷達、超音波、還有衛星定位加慣性感測器</a:t>
-            </a:r>
-            <a:r>
-              <a:rPr sz="1000" lang="zh-TW" dirty="0">
-                <a:solidFill>
-                  <a:srgbClr val="000000"/>
-                </a:solidFill>
-                <a:latin typeface="Arial Unicode MS"/>
-                <a:ea typeface="Arial Unicode MS"/>
-                <a:cs typeface="Arial Unicode MS"/>
-              </a:rPr>
-              <a:t>。
+              <a:rPr sz="1200" b="1" lang="zh-TW" dirty="0">
+                <a:solidFill>
+                  <a:srgbClr val="000000"/>
+                </a:solidFill>
+                <a:latin typeface="Arial Unicode MS"/>
+                <a:ea typeface="Arial Unicode MS"/>
+                <a:cs typeface="Arial Unicode MS"/>
+              </a:rPr>
+              <a:t>第二，上課前把講義 3.4 到 3.6 讀一遍。</a:t>
+            </a:r>
+            <a:r>
+              <a:rPr sz="1200" lang="zh-TW" dirty="0">
+                <a:solidFill>
+                  <a:srgbClr val="000000"/>
+                </a:solidFill>
+                <a:latin typeface="Arial Unicode MS"/>
+                <a:ea typeface="Arial Unicode MS"/>
+                <a:cs typeface="Arial Unicode MS"/>
+              </a:rPr>
+              <a:t>那幾節就是雷達和超音波的原理，先看過，上課會輕鬆很多。
 </a:t>
             </a:r>
           </a:p>
@@ -1085,231 +1019,11 @@
                 <a:spcPts val="0"/>
               </a:spcBef>
               <a:spcAft>
-                <a:spcPts val="167"/>
+                <a:spcPts val="200"/>
               </a:spcAft>
             </a:pPr>
             <a:r>
-              <a:rPr sz="1000" lang="zh-TW" dirty="0">
-                <a:solidFill>
-                  <a:srgbClr val="000000"/>
-                </a:solidFill>
-                <a:latin typeface="Arial Unicode MS"/>
-                <a:ea typeface="Arial Unicode MS"/>
-                <a:cs typeface="Arial Unicode MS"/>
-              </a:rPr>
-              <a:t>我先給各位一個預告，讓大家有心理準備：</a:t>
-            </a:r>
-            <a:r>
-              <a:rPr sz="1000" b="1" lang="zh-TW" dirty="0">
-                <a:solidFill>
-                  <a:srgbClr val="000000"/>
-                </a:solidFill>
-                <a:latin typeface="Arial Unicode MS"/>
-                <a:ea typeface="Arial Unicode MS"/>
-                <a:cs typeface="Arial Unicode MS"/>
-              </a:rPr>
-              <a:t>雷達的規格表跟今天看的完全不一樣。</a:t>
-            </a:r>
-            <a:r>
-              <a:rPr sz="1000" lang="zh-TW" dirty="0">
-                <a:solidFill>
-                  <a:srgbClr val="000000"/>
-                </a:solidFill>
-                <a:latin typeface="Arial Unicode MS"/>
-                <a:ea typeface="Arial Unicode MS"/>
-                <a:cs typeface="Arial Unicode MS"/>
-              </a:rPr>
-              <a:t>
-</a:t>
-            </a:r>
-          </a:p>
-          <a:p>
-            <a:pPr algn="l">
-              <a:spcBef>
-                <a:spcPts val="0"/>
-              </a:spcBef>
-              <a:spcAft>
-                <a:spcPts val="167"/>
-              </a:spcAft>
-            </a:pPr>
-            <a:r>
-              <a:rPr sz="1000" lang="zh-TW" dirty="0">
-                <a:solidFill>
-                  <a:srgbClr val="000000"/>
-                </a:solidFill>
-                <a:latin typeface="Arial Unicode MS"/>
-                <a:ea typeface="Arial Unicode MS"/>
-                <a:cs typeface="Arial Unicode MS"/>
-              </a:rPr>
-              <a:t>它上面沒有「像素」，也沒有「線束數」。它有的是</a:t>
-            </a:r>
-            <a:r>
-              <a:rPr sz="1000" b="1" lang="zh-TW" dirty="0">
-                <a:solidFill>
-                  <a:srgbClr val="000000"/>
-                </a:solidFill>
-                <a:latin typeface="Arial Unicode MS"/>
-                <a:ea typeface="Arial Unicode MS"/>
-                <a:cs typeface="Arial Unicode MS"/>
-              </a:rPr>
-              <a:t>頻寬</a:t>
-            </a:r>
-            <a:r>
-              <a:rPr sz="1000" lang="zh-TW" dirty="0">
-                <a:solidFill>
-                  <a:srgbClr val="000000"/>
-                </a:solidFill>
-                <a:latin typeface="Arial Unicode MS"/>
-                <a:ea typeface="Arial Unicode MS"/>
-                <a:cs typeface="Arial Unicode MS"/>
-              </a:rPr>
-              <a:t>、</a:t>
-            </a:r>
-            <a:r>
-              <a:rPr sz="1000" b="1" lang="zh-TW" dirty="0">
-                <a:solidFill>
-                  <a:srgbClr val="000000"/>
-                </a:solidFill>
-                <a:latin typeface="Arial Unicode MS"/>
-                <a:ea typeface="Arial Unicode MS"/>
-                <a:cs typeface="Arial Unicode MS"/>
-              </a:rPr>
-              <a:t>都卜勒速度解析度</a:t>
-            </a:r>
-            <a:r>
-              <a:rPr sz="1000" lang="zh-TW" dirty="0">
-                <a:solidFill>
-                  <a:srgbClr val="000000"/>
-                </a:solidFill>
-                <a:latin typeface="Arial Unicode MS"/>
-                <a:ea typeface="Arial Unicode MS"/>
-                <a:cs typeface="Arial Unicode MS"/>
-              </a:rPr>
-              <a:t>、</a:t>
-            </a:r>
-            <a:r>
-              <a:rPr sz="1000" b="1" lang="zh-TW" dirty="0">
-                <a:solidFill>
-                  <a:srgbClr val="000000"/>
-                </a:solidFill>
-                <a:latin typeface="Arial Unicode MS"/>
-                <a:ea typeface="Arial Unicode MS"/>
-                <a:cs typeface="Arial Unicode MS"/>
-              </a:rPr>
-              <a:t>天線數</a:t>
-            </a:r>
-            <a:r>
-              <a:rPr sz="1000" lang="zh-TW" dirty="0">
-                <a:solidFill>
-                  <a:srgbClr val="000000"/>
-                </a:solidFill>
-                <a:latin typeface="Arial Unicode MS"/>
-                <a:ea typeface="Arial Unicode MS"/>
-                <a:cs typeface="Arial Unicode MS"/>
-              </a:rPr>
-              <a:t>。第三週我們講過雷達可以直接量速度，那個能力在規格表上就寫成一行數字。
-</a:t>
-            </a:r>
-          </a:p>
-          <a:p>
-            <a:pPr algn="l">
-              <a:spcBef>
-                <a:spcPts val="0"/>
-              </a:spcBef>
-              <a:spcAft>
-                <a:spcPts val="167"/>
-              </a:spcAft>
-            </a:pPr>
-            <a:r>
-              <a:rPr sz="1000" lang="zh-TW" dirty="0">
-                <a:solidFill>
-                  <a:srgbClr val="000000"/>
-                </a:solidFill>
-                <a:latin typeface="Arial Unicode MS"/>
-                <a:ea typeface="Arial Unicode MS"/>
-                <a:cs typeface="Arial Unicode MS"/>
-              </a:rPr>
-              <a:t>兩件事要準備。
-</a:t>
-            </a:r>
-          </a:p>
-          <a:p>
-            <a:pPr algn="l">
-              <a:spcBef>
-                <a:spcPts val="0"/>
-              </a:spcBef>
-              <a:spcAft>
-                <a:spcPts val="167"/>
-              </a:spcAft>
-            </a:pPr>
-            <a:r>
-              <a:rPr sz="1000" b="1" lang="zh-TW" dirty="0">
-                <a:solidFill>
-                  <a:srgbClr val="000000"/>
-                </a:solidFill>
-                <a:latin typeface="Arial Unicode MS"/>
-                <a:ea typeface="Arial Unicode MS"/>
-                <a:cs typeface="Arial Unicode MS"/>
-              </a:rPr>
-              <a:t>第一，把今天那張作答單的截圖留著。</a:t>
-            </a:r>
-            <a:r>
-              <a:rPr sz="1000" lang="zh-TW" dirty="0">
-                <a:solidFill>
-                  <a:srgbClr val="000000"/>
-                </a:solidFill>
-                <a:latin typeface="Arial Unicode MS"/>
-                <a:ea typeface="Arial Unicode MS"/>
-                <a:cs typeface="Arial Unicode MS"/>
-              </a:rPr>
-              <a:t>下週我們會在同一張表上加一欄雷達，直接比較。
-</a:t>
-            </a:r>
-          </a:p>
-          <a:p>
-            <a:pPr algn="l">
-              <a:spcBef>
-                <a:spcPts val="0"/>
-              </a:spcBef>
-              <a:spcAft>
-                <a:spcPts val="167"/>
-              </a:spcAft>
-            </a:pPr>
-            <a:r>
-              <a:rPr sz="1000" b="1" lang="zh-TW" dirty="0">
-                <a:solidFill>
-                  <a:srgbClr val="000000"/>
-                </a:solidFill>
-                <a:latin typeface="Arial Unicode MS"/>
-                <a:ea typeface="Arial Unicode MS"/>
-                <a:cs typeface="Arial Unicode MS"/>
-              </a:rPr>
-              <a:t>第二，上課前把講義 3.4 到 3.6 讀一遍。</a:t>
-            </a:r>
-            <a:r>
-              <a:rPr sz="1000" lang="zh-TW" dirty="0">
-                <a:solidFill>
-                  <a:srgbClr val="000000"/>
-                </a:solidFill>
-                <a:latin typeface="Arial Unicode MS"/>
-                <a:ea typeface="Arial Unicode MS"/>
-                <a:cs typeface="Arial Unicode MS"/>
-              </a:rPr>
-              <a:t>那幾節就是雷達和超音波的原理，先看過，上課會輕鬆很多。
-</a:t>
-            </a:r>
-          </a:p>
-          <a:p>
-            <a:pPr algn="l">
-              <a:spcBef>
-                <a:spcPts val="0"/>
-              </a:spcBef>
-              <a:spcAft>
-                <a:spcPts val="167"/>
-              </a:spcAft>
-            </a:pPr>
-            <a:r>
-              <a:rPr sz="1000" lang="zh-TW" dirty="0">
+              <a:rPr sz="1200" lang="zh-TW" dirty="0">
                 <a:solidFill>
                   <a:srgbClr val="000000"/>
                 </a:solidFill>
@@ -1426,30 +1140,19 @@
                 <a:spcPts val="0"/>
               </a:spcBef>
               <a:spcAft>
-                <a:spcPts val="167"/>
+                <a:spcPts val="200"/>
               </a:spcAft>
             </a:pPr>
             <a:r>
-              <a:rPr sz="1000" b="1" lang="zh-TW" dirty="0">
-                <a:solidFill>
-                  <a:srgbClr val="000000"/>
-                </a:solidFill>
-                <a:latin typeface="Arial Unicode MS"/>
-                <a:ea typeface="Arial Unicode MS"/>
-                <a:cs typeface="Arial Unicode MS"/>
-              </a:rPr>
-              <a:t>▍這一張要做什麼</a:t>
-            </a:r>
-            <a:r>
-              <a:rPr sz="1000" lang="zh-TW" dirty="0">
-                <a:solidFill>
-                  <a:srgbClr val="000000"/>
-                </a:solidFill>
-                <a:latin typeface="Arial Unicode MS"/>
-                <a:ea typeface="Arial Unicode MS"/>
-                <a:cs typeface="Arial Unicode MS"/>
-              </a:rPr>
-              <a:t>
+              <a:rPr sz="1200" lang="zh-TW" dirty="0">
+                <a:solidFill>
+                  <a:srgbClr val="000000"/>
+                </a:solidFill>
+                <a:latin typeface="Arial Unicode MS"/>
+                <a:ea typeface="Arial Unicode MS"/>
+                <a:cs typeface="Arial Unicode MS"/>
+              </a:rPr>
+              <a:t>這一節整節都在用這個網頁，所以先花兩分鐘，確定每個人都打開得了。
 </a:t>
             </a:r>
           </a:p>
@@ -1459,19 +1162,63 @@
                 <a:spcPts val="0"/>
               </a:spcBef>
               <a:spcAft>
-                <a:spcPts val="167"/>
+                <a:spcPts val="200"/>
               </a:spcAft>
             </a:pPr>
             <a:r>
-              <a:rPr sz="1000" lang="zh-TW" dirty="0">
-                <a:solidFill>
-                  <a:srgbClr val="000000"/>
-                </a:solidFill>
-                <a:latin typeface="Arial Unicode MS"/>
-                <a:ea typeface="Arial Unicode MS"/>
-                <a:cs typeface="Arial Unicode MS"/>
-              </a:rPr>
-              <a:t>整節都要用這個工具。先確定每個人都打開得了，而且知道答案要填在「作業」分頁。
+              <a:rPr sz="1200" lang="zh-TW" dirty="0">
+                <a:solidFill>
+                  <a:srgbClr val="000000"/>
+                </a:solidFill>
+                <a:latin typeface="Arial Unicode MS"/>
+                <a:ea typeface="Arial Unicode MS"/>
+                <a:cs typeface="Arial Unicode MS"/>
+              </a:rPr>
+              <a:t>上一節下課前各位應該都還開著。</a:t>
+            </a:r>
+            <a:r>
+              <a:rPr sz="1200" b="1" lang="zh-TW" dirty="0">
+                <a:solidFill>
+                  <a:srgbClr val="000000"/>
+                </a:solidFill>
+                <a:latin typeface="Arial Unicode MS"/>
+                <a:ea typeface="Arial Unicode MS"/>
+                <a:cs typeface="Arial Unicode MS"/>
+              </a:rPr>
+              <a:t>分頁還留著的人直接切回去，不要重開。</a:t>
+            </a:r>
+            <a:r>
+              <a:rPr sz="1200" lang="zh-TW" dirty="0">
+                <a:solidFill>
+                  <a:srgbClr val="000000"/>
+                </a:solidFill>
+                <a:latin typeface="Arial Unicode MS"/>
+                <a:ea typeface="Arial Unicode MS"/>
+                <a:cs typeface="Arial Unicode MS"/>
+              </a:rPr>
+              <a:t>關掉的人兩個方法：手機相機對準右邊這個 QR，或者照左邊那串網址打。</a:t>
+            </a:r>
+            <a:r>
+              <a:rPr sz="1200" b="1" lang="zh-TW" dirty="0">
+                <a:solidFill>
+                  <a:srgbClr val="000000"/>
+                </a:solidFill>
+                <a:latin typeface="Arial Unicode MS"/>
+                <a:ea typeface="Arial Unicode MS"/>
+                <a:cs typeface="Arial Unicode MS"/>
+              </a:rPr>
+              <a:t>網址和第一節的完全一樣，沒有換過。</a:t>
+            </a:r>
+            <a:r>
+              <a:rPr sz="1200" lang="zh-TW" dirty="0">
+                <a:solidFill>
+                  <a:srgbClr val="000000"/>
+                </a:solidFill>
+                <a:latin typeface="Arial Unicode MS"/>
+                <a:ea typeface="Arial Unicode MS"/>
+                <a:cs typeface="Arial Unicode MS"/>
+              </a:rPr>
+              <a:t>
 </a:t>
             </a:r>
           </a:p>
@@ -1481,30 +1228,41 @@
                 <a:spcPts val="0"/>
               </a:spcBef>
               <a:spcAft>
-                <a:spcPts val="167"/>
+                <a:spcPts val="200"/>
               </a:spcAft>
             </a:pPr>
             <a:r>
-              <a:rPr sz="1000" b="1" lang="zh-TW" dirty="0">
-                <a:solidFill>
-                  <a:srgbClr val="000000"/>
-                </a:solidFill>
-                <a:latin typeface="Arial Unicode MS"/>
-                <a:ea typeface="Arial Unicode MS"/>
-                <a:cs typeface="Arial Unicode MS"/>
-              </a:rPr>
-              <a:t>▍畫面上圈這裡</a:t>
-            </a:r>
-            <a:r>
-              <a:rPr sz="1000" lang="zh-TW" dirty="0">
-                <a:solidFill>
-                  <a:srgbClr val="000000"/>
-                </a:solidFill>
-                <a:latin typeface="Arial Unicode MS"/>
-                <a:ea typeface="Arial Unicode MS"/>
-                <a:cs typeface="Arial Unicode MS"/>
-              </a:rPr>
-              <a:t>
+              <a:rPr sz="1200" lang="zh-TW" dirty="0">
+                <a:solidFill>
+                  <a:srgbClr val="000000"/>
+                </a:solidFill>
+                <a:latin typeface="Arial Unicode MS"/>
+                <a:ea typeface="Arial Unicode MS"/>
+                <a:cs typeface="Arial Unicode MS"/>
+              </a:rPr>
+              <a:t>我等全班。</a:t>
+            </a:r>
+            <a:r>
+              <a:rPr sz="1200" b="1" lang="zh-TW" dirty="0">
+                <a:solidFill>
+                  <a:srgbClr val="000000"/>
+                </a:solidFill>
+                <a:latin typeface="Arial Unicode MS"/>
+                <a:ea typeface="Arial Unicode MS"/>
+                <a:cs typeface="Arial Unicode MS"/>
+              </a:rPr>
+              <a:t>打開了的人舉手讓我看一下。</a:t>
+            </a:r>
+            <a:r>
+              <a:rPr sz="1200" lang="zh-TW" dirty="0">
+                <a:solidFill>
+                  <a:srgbClr val="000000"/>
+                </a:solidFill>
+                <a:latin typeface="Arial Unicode MS"/>
+                <a:ea typeface="Arial Unicode MS"/>
+                <a:cs typeface="Arial Unicode MS"/>
+              </a:rPr>
+              <a:t>……還沒開的，先跟旁邊的同學共用一台，不要卡在這裡，等一下我再過去看。
 </a:t>
             </a:r>
           </a:p>
@@ -1514,19 +1272,129 @@
                 <a:spcPts val="0"/>
               </a:spcBef>
               <a:spcAft>
-                <a:spcPts val="167"/>
+                <a:spcPts val="200"/>
               </a:spcAft>
             </a:pPr>
             <a:r>
-              <a:rPr sz="1000" lang="zh-TW" dirty="0">
-                <a:solidFill>
-                  <a:srgbClr val="000000"/>
-                </a:solidFill>
-                <a:latin typeface="Arial Unicode MS"/>
-                <a:ea typeface="Arial Unicode MS"/>
-                <a:cs typeface="Arial Unicode MS"/>
-              </a:rPr>
-              <a:t>等全班舉手說打開了再往下。打不開的人先兩人共用一台，不要卡住。順便圈右上角的語言鈕和「只看英文原文」。
+              <a:rPr sz="1200" lang="zh-TW" dirty="0">
+                <a:solidFill>
+                  <a:srgbClr val="000000"/>
+                </a:solidFill>
+                <a:latin typeface="Arial Unicode MS"/>
+                <a:ea typeface="Arial Unicode MS"/>
+                <a:cs typeface="Arial Unicode MS"/>
+              </a:rPr>
+              <a:t>打開之後先確認三件事。</a:t>
+            </a:r>
+            <a:r>
+              <a:rPr sz="1200" b="1" lang="zh-TW" dirty="0">
+                <a:solidFill>
+                  <a:srgbClr val="000000"/>
+                </a:solidFill>
+                <a:latin typeface="Arial Unicode MS"/>
+                <a:ea typeface="Arial Unicode MS"/>
+                <a:cs typeface="Arial Unicode MS"/>
+              </a:rPr>
+              <a:t>第一</a:t>
+            </a:r>
+            <a:r>
+              <a:rPr sz="1200" lang="zh-TW" dirty="0">
+                <a:solidFill>
+                  <a:srgbClr val="000000"/>
+                </a:solidFill>
+                <a:latin typeface="Arial Unicode MS"/>
+                <a:ea typeface="Arial Unicode MS"/>
+                <a:cs typeface="Arial Unicode MS"/>
+              </a:rPr>
+              <a:t>，右上角那個語言鈕——要看越南文的現在就切。</a:t>
+            </a:r>
+            <a:r>
+              <a:rPr sz="1200" b="1" lang="zh-TW" dirty="0">
+                <a:solidFill>
+                  <a:srgbClr val="000000"/>
+                </a:solidFill>
+                <a:latin typeface="Arial Unicode MS"/>
+                <a:ea typeface="Arial Unicode MS"/>
+                <a:cs typeface="Arial Unicode MS"/>
+              </a:rPr>
+              <a:t>第二</a:t>
+            </a:r>
+            <a:r>
+              <a:rPr sz="1200" lang="zh-TW" dirty="0">
+                <a:solidFill>
+                  <a:srgbClr val="000000"/>
+                </a:solidFill>
+                <a:latin typeface="Arial Unicode MS"/>
+                <a:ea typeface="Arial Unicode MS"/>
+                <a:cs typeface="Arial Unicode MS"/>
+              </a:rPr>
+              <a:t>，「只看英文原文」這個按鈕，這一節</a:t>
+            </a:r>
+            <a:r>
+              <a:rPr sz="1200" b="1" lang="zh-TW" dirty="0">
+                <a:solidFill>
+                  <a:srgbClr val="000000"/>
+                </a:solidFill>
+                <a:latin typeface="Arial Unicode MS"/>
+                <a:ea typeface="Arial Unicode MS"/>
+                <a:cs typeface="Arial Unicode MS"/>
+              </a:rPr>
+              <a:t>要按下去</a:t>
+            </a:r>
+            <a:r>
+              <a:rPr sz="1200" lang="zh-TW" dirty="0">
+                <a:solidFill>
+                  <a:srgbClr val="000000"/>
+                </a:solidFill>
+                <a:latin typeface="Arial Unicode MS"/>
+                <a:ea typeface="Arial Unicode MS"/>
+                <a:cs typeface="Arial Unicode MS"/>
+              </a:rPr>
+              <a:t>：今天是要各位讀真的規格表，不是讀翻譯。</a:t>
+            </a:r>
+            <a:r>
+              <a:rPr sz="1200" b="1" lang="zh-TW" dirty="0">
+                <a:solidFill>
+                  <a:srgbClr val="000000"/>
+                </a:solidFill>
+                <a:latin typeface="Arial Unicode MS"/>
+                <a:ea typeface="Arial Unicode MS"/>
+                <a:cs typeface="Arial Unicode MS"/>
+              </a:rPr>
+              <a:t>第三</a:t>
+            </a:r>
+            <a:r>
+              <a:rPr sz="1200" lang="zh-TW" dirty="0">
+                <a:solidFill>
+                  <a:srgbClr val="000000"/>
+                </a:solidFill>
+                <a:latin typeface="Arial Unicode MS"/>
+                <a:ea typeface="Arial Unicode MS"/>
+                <a:cs typeface="Arial Unicode MS"/>
+              </a:rPr>
+              <a:t>，往最後拉，有一個</a:t>
+            </a:r>
+            <a:r>
+              <a:rPr sz="1200" b="1" lang="zh-TW" dirty="0">
+                <a:solidFill>
+                  <a:srgbClr val="000000"/>
+                </a:solidFill>
+                <a:latin typeface="Arial Unicode MS"/>
+                <a:ea typeface="Arial Unicode MS"/>
+                <a:cs typeface="Arial Unicode MS"/>
+              </a:rPr>
+              <a:t>「作業」分頁</a:t>
+            </a:r>
+            <a:r>
+              <a:rPr sz="1200" lang="zh-TW" dirty="0">
+                <a:solidFill>
+                  <a:srgbClr val="000000"/>
+                </a:solidFill>
+                <a:latin typeface="Arial Unicode MS"/>
+                <a:ea typeface="Arial Unicode MS"/>
+                <a:cs typeface="Arial Unicode MS"/>
+              </a:rPr>
+              <a:t>，今天的答案全部填在那裡，不是寫在紙上。
 </a:t>
             </a:r>
           </a:p>
@@ -1536,30 +1404,41 @@
                 <a:spcPts val="0"/>
               </a:spcBef>
               <a:spcAft>
-                <a:spcPts val="167"/>
+                <a:spcPts val="200"/>
               </a:spcAft>
             </a:pPr>
             <a:r>
-              <a:rPr sz="1000" b="1" lang="zh-TW" dirty="0">
-                <a:solidFill>
-                  <a:srgbClr val="000000"/>
-                </a:solidFill>
-                <a:latin typeface="Arial Unicode MS"/>
-                <a:ea typeface="Arial Unicode MS"/>
-                <a:cs typeface="Arial Unicode MS"/>
-              </a:rPr>
-              <a:t>▍以下照著唸</a:t>
-            </a:r>
-            <a:r>
-              <a:rPr sz="1000" lang="zh-TW" dirty="0">
-                <a:solidFill>
-                  <a:srgbClr val="000000"/>
-                </a:solidFill>
-                <a:latin typeface="Arial Unicode MS"/>
-                <a:ea typeface="Arial Unicode MS"/>
-                <a:cs typeface="Arial Unicode MS"/>
-              </a:rPr>
-              <a:t>
+              <a:rPr sz="1200" lang="zh-TW" dirty="0">
+                <a:solidFill>
+                  <a:srgbClr val="000000"/>
+                </a:solidFill>
+                <a:latin typeface="Arial Unicode MS"/>
+                <a:ea typeface="Arial Unicode MS"/>
+                <a:cs typeface="Arial Unicode MS"/>
+              </a:rPr>
+              <a:t>請各位現在就點進「作業」分頁看一眼：裡面有姓名、學號，還有三個情境的欄位。等一下每做完一題就回來填。</a:t>
+            </a:r>
+            <a:r>
+              <a:rPr sz="1200" b="1" lang="zh-TW" dirty="0">
+                <a:solidFill>
+                  <a:srgbClr val="000000"/>
+                </a:solidFill>
+                <a:latin typeface="Arial Unicode MS"/>
+                <a:ea typeface="Arial Unicode MS"/>
+                <a:cs typeface="Arial Unicode MS"/>
+              </a:rPr>
+              <a:t>姓名學號現在先填好</a:t>
+            </a:r>
+            <a:r>
+              <a:rPr sz="1200" lang="zh-TW" dirty="0">
+                <a:solidFill>
+                  <a:srgbClr val="000000"/>
+                </a:solidFill>
+                <a:latin typeface="Arial Unicode MS"/>
+                <a:ea typeface="Arial Unicode MS"/>
+                <a:cs typeface="Arial Unicode MS"/>
+              </a:rPr>
+              <a:t>，不然等一下截圖我認不出是誰。
 </a:t>
             </a:r>
           </a:p>
@@ -1569,319 +1448,11 @@
                 <a:spcPts val="0"/>
               </a:spcBef>
               <a:spcAft>
-                <a:spcPts val="167"/>
+                <a:spcPts val="200"/>
               </a:spcAft>
             </a:pPr>
             <a:r>
-              <a:rPr sz="1000" lang="zh-TW" dirty="0">
-                <a:solidFill>
-                  <a:srgbClr val="000000"/>
-                </a:solidFill>
-                <a:latin typeface="Arial Unicode MS"/>
-                <a:ea typeface="Arial Unicode MS"/>
-                <a:cs typeface="Arial Unicode MS"/>
-              </a:rPr>
-              <a:t>這一節整節都在用這個網頁，所以先花兩分鐘，確定每個人都打開得了。
-</a:t>
-            </a:r>
-          </a:p>
-          <a:p>
-            <a:pPr algn="l">
-              <a:spcBef>
-                <a:spcPts val="0"/>
-              </a:spcBef>
-              <a:spcAft>
-                <a:spcPts val="167"/>
-              </a:spcAft>
-            </a:pPr>
-            <a:r>
-              <a:rPr sz="1000" lang="zh-TW" dirty="0">
-                <a:solidFill>
-                  <a:srgbClr val="000000"/>
-                </a:solidFill>
-                <a:latin typeface="Arial Unicode MS"/>
-                <a:ea typeface="Arial Unicode MS"/>
-                <a:cs typeface="Arial Unicode MS"/>
-              </a:rPr>
-              <a:t>上一節下課前各位應該都還開著。</a:t>
-            </a:r>
-            <a:r>
-              <a:rPr sz="1000" b="1" lang="zh-TW" dirty="0">
-                <a:solidFill>
-                  <a:srgbClr val="000000"/>
-                </a:solidFill>
-                <a:latin typeface="Arial Unicode MS"/>
-                <a:ea typeface="Arial Unicode MS"/>
-                <a:cs typeface="Arial Unicode MS"/>
-              </a:rPr>
-              <a:t>分頁還留著的人直接切回去，不要重開。</a:t>
-            </a:r>
-            <a:r>
-              <a:rPr sz="1000" lang="zh-TW" dirty="0">
-                <a:solidFill>
-                  <a:srgbClr val="000000"/>
-                </a:solidFill>
-                <a:latin typeface="Arial Unicode MS"/>
-                <a:ea typeface="Arial Unicode MS"/>
-                <a:cs typeface="Arial Unicode MS"/>
-              </a:rPr>
-              <a:t>關掉的人兩個方法：手機相機對準右邊這個 QR，或者照左邊那串網址打。</a:t>
-            </a:r>
-            <a:r>
-              <a:rPr sz="1000" b="1" lang="zh-TW" dirty="0">
-                <a:solidFill>
-                  <a:srgbClr val="000000"/>
-                </a:solidFill>
-                <a:latin typeface="Arial Unicode MS"/>
-                <a:ea typeface="Arial Unicode MS"/>
-                <a:cs typeface="Arial Unicode MS"/>
-              </a:rPr>
-              <a:t>網址和第一節的完全一樣，沒有換過。</a:t>
-            </a:r>
-            <a:r>
-              <a:rPr sz="1000" lang="zh-TW" dirty="0">
-                <a:solidFill>
-                  <a:srgbClr val="000000"/>
-                </a:solidFill>
-                <a:latin typeface="Arial Unicode MS"/>
-                <a:ea typeface="Arial Unicode MS"/>
-                <a:cs typeface="Arial Unicode MS"/>
-              </a:rPr>
-              <a:t>
-</a:t>
-            </a:r>
-          </a:p>
-          <a:p>
-            <a:pPr algn="l">
-              <a:spcBef>
-                <a:spcPts val="0"/>
-              </a:spcBef>
-              <a:spcAft>
-                <a:spcPts val="167"/>
-              </a:spcAft>
-            </a:pPr>
-            <a:r>
-              <a:rPr sz="1000" lang="zh-TW" dirty="0">
-                <a:solidFill>
-                  <a:srgbClr val="000000"/>
-                </a:solidFill>
-                <a:latin typeface="Arial Unicode MS"/>
-                <a:ea typeface="Arial Unicode MS"/>
-                <a:cs typeface="Arial Unicode MS"/>
-              </a:rPr>
-              <a:t>我等全班。</a:t>
-            </a:r>
-            <a:r>
-              <a:rPr sz="1000" b="1" lang="zh-TW" dirty="0">
-                <a:solidFill>
-                  <a:srgbClr val="000000"/>
-                </a:solidFill>
-                <a:latin typeface="Arial Unicode MS"/>
-                <a:ea typeface="Arial Unicode MS"/>
-                <a:cs typeface="Arial Unicode MS"/>
-              </a:rPr>
-              <a:t>打開了的人舉手讓我看一下。</a:t>
-            </a:r>
-            <a:r>
-              <a:rPr sz="1000" lang="zh-TW" dirty="0">
-                <a:solidFill>
-                  <a:srgbClr val="000000"/>
-                </a:solidFill>
-                <a:latin typeface="Arial Unicode MS"/>
-                <a:ea typeface="Arial Unicode MS"/>
-                <a:cs typeface="Arial Unicode MS"/>
-              </a:rPr>
-              <a:t>……還沒開的，先跟旁邊的同學共用一台，不要卡在這裡，等一下我再過去看。
-</a:t>
-            </a:r>
-          </a:p>
-          <a:p>
-            <a:pPr algn="l">
-              <a:spcBef>
-                <a:spcPts val="0"/>
-              </a:spcBef>
-              <a:spcAft>
-                <a:spcPts val="167"/>
-              </a:spcAft>
-            </a:pPr>
-            <a:r>
-              <a:rPr sz="1000" lang="zh-TW" dirty="0">
-                <a:solidFill>
-                  <a:srgbClr val="000000"/>
-                </a:solidFill>
-                <a:latin typeface="Arial Unicode MS"/>
-                <a:ea typeface="Arial Unicode MS"/>
-                <a:cs typeface="Arial Unicode MS"/>
-              </a:rPr>
-              <a:t>打開之後先確認三件事。</a:t>
-            </a:r>
-            <a:r>
-              <a:rPr sz="1000" b="1" lang="zh-TW" dirty="0">
-                <a:solidFill>
-                  <a:srgbClr val="000000"/>
-                </a:solidFill>
-                <a:latin typeface="Arial Unicode MS"/>
-                <a:ea typeface="Arial Unicode MS"/>
-                <a:cs typeface="Arial Unicode MS"/>
-              </a:rPr>
-              <a:t>第一</a:t>
-            </a:r>
-            <a:r>
-              <a:rPr sz="1000" lang="zh-TW" dirty="0">
-                <a:solidFill>
-                  <a:srgbClr val="000000"/>
-                </a:solidFill>
-                <a:latin typeface="Arial Unicode MS"/>
-                <a:ea typeface="Arial Unicode MS"/>
-                <a:cs typeface="Arial Unicode MS"/>
-              </a:rPr>
-              <a:t>，右上角那個語言鈕——要看越南文的現在就切。</a:t>
-            </a:r>
-            <a:r>
-              <a:rPr sz="1000" b="1" lang="zh-TW" dirty="0">
-                <a:solidFill>
-                  <a:srgbClr val="000000"/>
-                </a:solidFill>
-                <a:latin typeface="Arial Unicode MS"/>
-                <a:ea typeface="Arial Unicode MS"/>
-                <a:cs typeface="Arial Unicode MS"/>
-              </a:rPr>
-              <a:t>第二</a:t>
-            </a:r>
-            <a:r>
-              <a:rPr sz="1000" lang="zh-TW" dirty="0">
-                <a:solidFill>
-                  <a:srgbClr val="000000"/>
-                </a:solidFill>
-                <a:latin typeface="Arial Unicode MS"/>
-                <a:ea typeface="Arial Unicode MS"/>
-                <a:cs typeface="Arial Unicode MS"/>
-              </a:rPr>
-              <a:t>，「只看英文原文」這個按鈕，這一節</a:t>
-            </a:r>
-            <a:r>
-              <a:rPr sz="1000" b="1" lang="zh-TW" dirty="0">
-                <a:solidFill>
-                  <a:srgbClr val="000000"/>
-                </a:solidFill>
-                <a:latin typeface="Arial Unicode MS"/>
-                <a:ea typeface="Arial Unicode MS"/>
-                <a:cs typeface="Arial Unicode MS"/>
-              </a:rPr>
-              <a:t>要按下去</a:t>
-            </a:r>
-            <a:r>
-              <a:rPr sz="1000" lang="zh-TW" dirty="0">
-                <a:solidFill>
-                  <a:srgbClr val="000000"/>
-                </a:solidFill>
-                <a:latin typeface="Arial Unicode MS"/>
-                <a:ea typeface="Arial Unicode MS"/>
-                <a:cs typeface="Arial Unicode MS"/>
-              </a:rPr>
-              <a:t>：今天是要各位讀真的規格表，不是讀翻譯。</a:t>
-            </a:r>
-            <a:r>
-              <a:rPr sz="1000" b="1" lang="zh-TW" dirty="0">
-                <a:solidFill>
-                  <a:srgbClr val="000000"/>
-                </a:solidFill>
-                <a:latin typeface="Arial Unicode MS"/>
-                <a:ea typeface="Arial Unicode MS"/>
-                <a:cs typeface="Arial Unicode MS"/>
-              </a:rPr>
-              <a:t>第三</a:t>
-            </a:r>
-            <a:r>
-              <a:rPr sz="1000" lang="zh-TW" dirty="0">
-                <a:solidFill>
-                  <a:srgbClr val="000000"/>
-                </a:solidFill>
-                <a:latin typeface="Arial Unicode MS"/>
-                <a:ea typeface="Arial Unicode MS"/>
-                <a:cs typeface="Arial Unicode MS"/>
-              </a:rPr>
-              <a:t>，往最後拉，有一個</a:t>
-            </a:r>
-            <a:r>
-              <a:rPr sz="1000" b="1" lang="zh-TW" dirty="0">
-                <a:solidFill>
-                  <a:srgbClr val="000000"/>
-                </a:solidFill>
-                <a:latin typeface="Arial Unicode MS"/>
-                <a:ea typeface="Arial Unicode MS"/>
-                <a:cs typeface="Arial Unicode MS"/>
-              </a:rPr>
-              <a:t>「作業」分頁</a:t>
-            </a:r>
-            <a:r>
-              <a:rPr sz="1000" lang="zh-TW" dirty="0">
-                <a:solidFill>
-                  <a:srgbClr val="000000"/>
-                </a:solidFill>
-                <a:latin typeface="Arial Unicode MS"/>
-                <a:ea typeface="Arial Unicode MS"/>
-                <a:cs typeface="Arial Unicode MS"/>
-              </a:rPr>
-              <a:t>，今天的答案全部填在那裡，不是寫在紙上。
-</a:t>
-            </a:r>
-          </a:p>
-          <a:p>
-            <a:pPr algn="l">
-              <a:spcBef>
-                <a:spcPts val="0"/>
-              </a:spcBef>
-              <a:spcAft>
-                <a:spcPts val="167"/>
-              </a:spcAft>
-            </a:pPr>
-            <a:r>
-              <a:rPr sz="1000" lang="zh-TW" dirty="0">
-                <a:solidFill>
-                  <a:srgbClr val="000000"/>
-                </a:solidFill>
-                <a:latin typeface="Arial Unicode MS"/>
-                <a:ea typeface="Arial Unicode MS"/>
-                <a:cs typeface="Arial Unicode MS"/>
-              </a:rPr>
-              <a:t>請各位現在就點進「作業」分頁看一眼：裡面有姓名、學號，還有三個情境的欄位。等一下每做完一題就回來填。</a:t>
-            </a:r>
-            <a:r>
-              <a:rPr sz="1000" b="1" lang="zh-TW" dirty="0">
-                <a:solidFill>
-                  <a:srgbClr val="000000"/>
-                </a:solidFill>
-                <a:latin typeface="Arial Unicode MS"/>
-                <a:ea typeface="Arial Unicode MS"/>
-                <a:cs typeface="Arial Unicode MS"/>
-              </a:rPr>
-              <a:t>姓名學號現在先填好</a:t>
-            </a:r>
-            <a:r>
-              <a:rPr sz="1000" lang="zh-TW" dirty="0">
-                <a:solidFill>
-                  <a:srgbClr val="000000"/>
-                </a:solidFill>
-                <a:latin typeface="Arial Unicode MS"/>
-                <a:ea typeface="Arial Unicode MS"/>
-                <a:cs typeface="Arial Unicode MS"/>
-              </a:rPr>
-              <a:t>，不然等一下截圖我認不出是誰。
-</a:t>
-            </a:r>
-          </a:p>
-          <a:p>
-            <a:pPr algn="l">
-              <a:spcBef>
-                <a:spcPts val="0"/>
-              </a:spcBef>
-              <a:spcAft>
-                <a:spcPts val="167"/>
-              </a:spcAft>
-            </a:pPr>
-            <a:r>
-              <a:rPr sz="1000" lang="zh-TW" dirty="0">
+              <a:rPr sz="1200" lang="zh-TW" dirty="0">
                 <a:solidFill>
                   <a:srgbClr val="000000"/>
                 </a:solidFill>
@@ -1892,7 +1463,7 @@
               <a:t>最後講一句：這個網頁</a:t>
             </a:r>
             <a:r>
-              <a:rPr sz="1000" b="1" lang="zh-TW" dirty="0">
+              <a:rPr sz="1200" b="1" lang="zh-TW" dirty="0">
                 <a:solidFill>
                   <a:srgbClr val="000000"/>
                 </a:solidFill>
@@ -1903,7 +1474,7 @@
               <a:t>下課以後還會在</a:t>
             </a:r>
             <a:r>
-              <a:rPr sz="1000" lang="zh-TW" dirty="0">
+              <a:rPr sz="1200" lang="zh-TW" dirty="0">
                 <a:solidFill>
                   <a:srgbClr val="000000"/>
                 </a:solidFill>
@@ -2020,30 +1591,19 @@
                 <a:spcPts val="0"/>
               </a:spcBef>
               <a:spcAft>
-                <a:spcPts val="133"/>
+                <a:spcPts val="175"/>
               </a:spcAft>
             </a:pPr>
             <a:r>
-              <a:rPr sz="800" b="1" lang="zh-TW" dirty="0">
-                <a:solidFill>
-                  <a:srgbClr val="000000"/>
-                </a:solidFill>
-                <a:latin typeface="Arial Unicode MS"/>
-                <a:ea typeface="Arial Unicode MS"/>
-                <a:cs typeface="Arial Unicode MS"/>
-              </a:rPr>
-              <a:t>▍這一張要做什麼</a:t>
-            </a:r>
-            <a:r>
-              <a:rPr sz="800" lang="zh-TW" dirty="0">
-                <a:solidFill>
-                  <a:srgbClr val="000000"/>
-                </a:solidFill>
-                <a:latin typeface="Arial Unicode MS"/>
-                <a:ea typeface="Arial Unicode MS"/>
-                <a:cs typeface="Arial Unicode MS"/>
-              </a:rPr>
-              <a:t>
+              <a:rPr sz="1050" lang="zh-TW" dirty="0">
+                <a:solidFill>
+                  <a:srgbClr val="000000"/>
+                </a:solidFill>
+                <a:latin typeface="Arial Unicode MS"/>
+                <a:ea typeface="Arial Unicode MS"/>
+                <a:cs typeface="Arial Unicode MS"/>
+              </a:rPr>
+              <a:t>四個步驟，我一個一個說。
 </a:t>
             </a:r>
           </a:p>
@@ -2053,19 +1613,74 @@
                 <a:spcPts val="0"/>
               </a:spcBef>
               <a:spcAft>
-                <a:spcPts val="133"/>
+                <a:spcPts val="175"/>
               </a:spcAft>
             </a:pPr>
             <a:r>
-              <a:rPr sz="800" lang="zh-TW" dirty="0">
-                <a:solidFill>
-                  <a:srgbClr val="000000"/>
-                </a:solidFill>
-                <a:latin typeface="Arial Unicode MS"/>
-                <a:ea typeface="Arial Unicode MS"/>
-                <a:cs typeface="Arial Unicode MS"/>
-              </a:rPr>
-              <a:t>交代四個步驟與每一步要抄下來的數字。
+              <a:rPr sz="1050" b="1" lang="zh-TW" dirty="0">
+                <a:solidFill>
+                  <a:srgbClr val="000000"/>
+                </a:solidFill>
+                <a:latin typeface="Arial Unicode MS"/>
+                <a:ea typeface="Arial Unicode MS"/>
+                <a:cs typeface="Arial Unicode MS"/>
+              </a:rPr>
+              <a:t>第一步，選情境。</a:t>
+            </a:r>
+            <a:r>
+              <a:rPr sz="1050" lang="zh-TW" dirty="0">
+                <a:solidFill>
+                  <a:srgbClr val="000000"/>
+                </a:solidFill>
+                <a:latin typeface="Arial Unicode MS"/>
+                <a:ea typeface="Arial Unicode MS"/>
+                <a:cs typeface="Arial Unicode MS"/>
+              </a:rPr>
+              <a:t>看畫面</a:t>
+            </a:r>
+            <a:r>
+              <a:rPr sz="1050" b="1" lang="zh-TW" dirty="0">
+                <a:solidFill>
+                  <a:srgbClr val="000000"/>
+                </a:solidFill>
+                <a:latin typeface="Arial Unicode MS"/>
+                <a:ea typeface="Arial Unicode MS"/>
+                <a:cs typeface="Arial Unicode MS"/>
+              </a:rPr>
+              <a:t>最上面那一條</a:t>
+            </a:r>
+            <a:r>
+              <a:rPr sz="1050" lang="zh-TW" dirty="0">
+                <a:solidFill>
+                  <a:srgbClr val="000000"/>
+                </a:solidFill>
+                <a:latin typeface="Arial Unicode MS"/>
+                <a:ea typeface="Arial Unicode MS"/>
+                <a:cs typeface="Arial Unicode MS"/>
+              </a:rPr>
+              <a:t>，一直釘在那裡，捲到哪都看得到。三個按鈕：校園接駁、時速二十；河內尖峰、時速四十；國道、時速一百。</a:t>
+            </a:r>
+            <a:r>
+              <a:rPr sz="1050" b="1" lang="zh-TW" dirty="0">
+                <a:solidFill>
+                  <a:srgbClr val="000000"/>
+                </a:solidFill>
+                <a:latin typeface="Arial Unicode MS"/>
+                <a:ea typeface="Arial Unicode MS"/>
+                <a:cs typeface="Arial Unicode MS"/>
+              </a:rPr>
+              <a:t>一題只要選一次</a:t>
+            </a:r>
+            <a:r>
+              <a:rPr sz="1050" lang="zh-TW" dirty="0">
+                <a:solidFill>
+                  <a:srgbClr val="000000"/>
+                </a:solidFill>
+                <a:latin typeface="Arial Unicode MS"/>
+                <a:ea typeface="Arial Unicode MS"/>
+                <a:cs typeface="Arial Unicode MS"/>
+              </a:rPr>
+              <a:t>——選好了就不要再動它，等一下四顆型號都用同一個情境。旁邊會跟著印出這個情境的煞停距離和門檻，那就是等一下判定在比的數字。
 </a:t>
             </a:r>
           </a:p>
@@ -2075,30 +1690,52 @@
                 <a:spcPts val="0"/>
               </a:spcBef>
               <a:spcAft>
-                <a:spcPts val="133"/>
+                <a:spcPts val="175"/>
               </a:spcAft>
             </a:pPr>
             <a:r>
-              <a:rPr sz="800" b="1" lang="zh-TW" dirty="0">
-                <a:solidFill>
-                  <a:srgbClr val="000000"/>
-                </a:solidFill>
-                <a:latin typeface="Arial Unicode MS"/>
-                <a:ea typeface="Arial Unicode MS"/>
-                <a:cs typeface="Arial Unicode MS"/>
-              </a:rPr>
-              <a:t>▍畫面上圈這裡</a:t>
-            </a:r>
-            <a:r>
-              <a:rPr sz="800" lang="zh-TW" dirty="0">
-                <a:solidFill>
-                  <a:srgbClr val="000000"/>
-                </a:solidFill>
-                <a:latin typeface="Arial Unicode MS"/>
-                <a:ea typeface="Arial Unicode MS"/>
-                <a:cs typeface="Arial Unicode MS"/>
-              </a:rPr>
-              <a:t>
+              <a:rPr sz="1050" b="1" lang="zh-TW" dirty="0">
+                <a:solidFill>
+                  <a:srgbClr val="000000"/>
+                </a:solidFill>
+                <a:latin typeface="Arial Unicode MS"/>
+                <a:ea typeface="Arial Unicode MS"/>
+                <a:cs typeface="Arial Unicode MS"/>
+              </a:rPr>
+              <a:t>第二步，選型號。</a:t>
+            </a:r>
+            <a:r>
+              <a:rPr sz="1050" lang="zh-TW" dirty="0">
+                <a:solidFill>
+                  <a:srgbClr val="000000"/>
+                </a:solidFill>
+                <a:latin typeface="Arial Unicode MS"/>
+                <a:ea typeface="Arial Unicode MS"/>
+                <a:cs typeface="Arial Unicode MS"/>
+              </a:rPr>
+              <a:t>判定那一塊的</a:t>
+            </a:r>
+            <a:r>
+              <a:rPr sz="1050" b="1" lang="zh-TW" dirty="0">
+                <a:solidFill>
+                  <a:srgbClr val="000000"/>
+                </a:solidFill>
+                <a:latin typeface="Arial Unicode MS"/>
+                <a:ea typeface="Arial Unicode MS"/>
+                <a:cs typeface="Arial Unicode MS"/>
+              </a:rPr>
+              <a:t>上面</a:t>
+            </a:r>
+            <a:r>
+              <a:rPr sz="1050" lang="zh-TW" dirty="0">
+                <a:solidFill>
+                  <a:srgbClr val="000000"/>
+                </a:solidFill>
+                <a:latin typeface="Arial Unicode MS"/>
+                <a:ea typeface="Arial Unicode MS"/>
+                <a:cs typeface="Arial Unicode MS"/>
+              </a:rPr>
+              <a:t>有一排四顆按鈕，你要算哪一顆就按哪一顆，不用跑回左邊。情境固定、型號輪四顆——這就是今天每一題要做的事。
 </a:t>
             </a:r>
           </a:p>
@@ -2108,19 +1745,52 @@
                 <a:spcPts val="0"/>
               </a:spcBef>
               <a:spcAft>
-                <a:spcPts val="133"/>
+                <a:spcPts val="175"/>
               </a:spcAft>
             </a:pPr>
             <a:r>
-              <a:rPr sz="800" lang="zh-TW" dirty="0">
-                <a:solidFill>
-                  <a:srgbClr val="000000"/>
-                </a:solidFill>
-                <a:latin typeface="Arial Unicode MS"/>
-                <a:ea typeface="Arial Unicode MS"/>
-                <a:cs typeface="Arial Unicode MS"/>
-              </a:rPr>
-              <a:t>圈「每一步都有要抄下來的數字」。強調沒抄數字就等於沒做。
+              <a:rPr sz="1050" b="1" lang="zh-TW" dirty="0">
+                <a:solidFill>
+                  <a:srgbClr val="000000"/>
+                </a:solidFill>
+                <a:latin typeface="Arial Unicode MS"/>
+                <a:ea typeface="Arial Unicode MS"/>
+                <a:cs typeface="Arial Unicode MS"/>
+              </a:rPr>
+              <a:t>第三步，找四個數字、看判定。</a:t>
+            </a:r>
+            <a:r>
+              <a:rPr sz="1050" lang="zh-TW" dirty="0">
+                <a:solidFill>
+                  <a:srgbClr val="000000"/>
+                </a:solidFill>
+                <a:latin typeface="Arial Unicode MS"/>
+                <a:ea typeface="Arial Unicode MS"/>
+                <a:cs typeface="Arial Unicode MS"/>
+              </a:rPr>
+              <a:t>四題還是上午那四個：垂直視野、對百分之十反射率的測距、解析度、更新率，選完按檢查。這裡我要請各位做一件事：</a:t>
+            </a:r>
+            <a:r>
+              <a:rPr sz="1050" b="1" lang="zh-TW" dirty="0">
+                <a:solidFill>
+                  <a:srgbClr val="000000"/>
+                </a:solidFill>
+                <a:latin typeface="Arial Unicode MS"/>
+                <a:ea typeface="Arial Unicode MS"/>
+                <a:cs typeface="Arial Unicode MS"/>
+              </a:rPr>
+              <a:t>把「只看英文原文」按下去</a:t>
+            </a:r>
+            <a:r>
+              <a:rPr sz="1050" lang="zh-TW" dirty="0">
+                <a:solidFill>
+                  <a:srgbClr val="000000"/>
+                </a:solidFill>
+                <a:latin typeface="Arial Unicode MS"/>
+                <a:ea typeface="Arial Unicode MS"/>
+                <a:cs typeface="Arial Unicode MS"/>
+              </a:rPr>
+              <a:t>。上午我讓對照開著，因為大家第一次讀；現在請各位試試看純原文，真的規格表上不會有中文。看不懂的單字可以問我，或者按回「原文＋對照」確認一下，但是先自己試。
 </a:t>
             </a:r>
           </a:p>
@@ -2130,30 +1800,52 @@
                 <a:spcPts val="0"/>
               </a:spcBef>
               <a:spcAft>
-                <a:spcPts val="133"/>
+                <a:spcPts val="175"/>
               </a:spcAft>
             </a:pPr>
             <a:r>
-              <a:rPr sz="800" b="1" lang="zh-TW" dirty="0">
-                <a:solidFill>
-                  <a:srgbClr val="000000"/>
-                </a:solidFill>
-                <a:latin typeface="Arial Unicode MS"/>
-                <a:ea typeface="Arial Unicode MS"/>
-                <a:cs typeface="Arial Unicode MS"/>
-              </a:rPr>
-              <a:t>▍以下照著唸</a:t>
-            </a:r>
-            <a:r>
-              <a:rPr sz="800" lang="zh-TW" dirty="0">
-                <a:solidFill>
-                  <a:srgbClr val="000000"/>
-                </a:solidFill>
-                <a:latin typeface="Arial Unicode MS"/>
-                <a:ea typeface="Arial Unicode MS"/>
-                <a:cs typeface="Arial Unicode MS"/>
-              </a:rPr>
-              <a:t>
+              <a:rPr sz="1050" b="1" lang="zh-TW" dirty="0">
+                <a:solidFill>
+                  <a:srgbClr val="000000"/>
+                </a:solidFill>
+                <a:latin typeface="Arial Unicode MS"/>
+                <a:ea typeface="Arial Unicode MS"/>
+                <a:cs typeface="Arial Unicode MS"/>
+              </a:rPr>
+              <a:t>第四步，寫結論。</a:t>
+            </a:r>
+            <a:r>
+              <a:rPr sz="1050" lang="zh-TW" dirty="0">
+                <a:solidFill>
+                  <a:srgbClr val="000000"/>
+                </a:solidFill>
+                <a:latin typeface="Arial Unicode MS"/>
+                <a:ea typeface="Arial Unicode MS"/>
+                <a:cs typeface="Arial Unicode MS"/>
+              </a:rPr>
+              <a:t>判讀台上有第四個分頁，叫</a:t>
+            </a:r>
+            <a:r>
+              <a:rPr sz="1050" b="1" lang="zh-TW" dirty="0">
+                <a:solidFill>
+                  <a:srgbClr val="000000"/>
+                </a:solidFill>
+                <a:latin typeface="Arial Unicode MS"/>
+                <a:ea typeface="Arial Unicode MS"/>
+                <a:cs typeface="Arial Unicode MS"/>
+              </a:rPr>
+              <a:t>作業</a:t>
+            </a:r>
+            <a:r>
+              <a:rPr sz="1050" lang="zh-TW" dirty="0">
+                <a:solidFill>
+                  <a:srgbClr val="000000"/>
+                </a:solidFill>
+                <a:latin typeface="Arial Unicode MS"/>
+                <a:ea typeface="Arial Unicode MS"/>
+                <a:cs typeface="Arial Unicode MS"/>
+              </a:rPr>
+              <a:t>，整份就在那裡填。
 </a:t>
             </a:r>
           </a:p>
@@ -2163,19 +1855,41 @@
                 <a:spcPts val="0"/>
               </a:spcBef>
               <a:spcAft>
-                <a:spcPts val="133"/>
+                <a:spcPts val="175"/>
               </a:spcAft>
             </a:pPr>
             <a:r>
-              <a:rPr sz="800" lang="zh-TW" dirty="0">
-                <a:solidFill>
-                  <a:srgbClr val="000000"/>
-                </a:solidFill>
-                <a:latin typeface="Arial Unicode MS"/>
-                <a:ea typeface="Arial Unicode MS"/>
-                <a:cs typeface="Arial Unicode MS"/>
-              </a:rPr>
-              <a:t>四個步驟，我一個一個說。
+              <a:rPr sz="1050" lang="zh-TW" dirty="0">
+                <a:solidFill>
+                  <a:srgbClr val="000000"/>
+                </a:solidFill>
+                <a:latin typeface="Arial Unicode MS"/>
+                <a:ea typeface="Arial Unicode MS"/>
+                <a:cs typeface="Arial Unicode MS"/>
+              </a:rPr>
+              <a:t>我要看到的不是「夠」或「不夠」兩個字，是</a:t>
+            </a:r>
+            <a:r>
+              <a:rPr sz="1050" b="1" lang="zh-TW" dirty="0">
+                <a:solidFill>
+                  <a:srgbClr val="000000"/>
+                </a:solidFill>
+                <a:latin typeface="Arial Unicode MS"/>
+                <a:ea typeface="Arial Unicode MS"/>
+                <a:cs typeface="Arial Unicode MS"/>
+              </a:rPr>
+              <a:t>卡在哪一行</a:t>
+            </a:r>
+            <a:r>
+              <a:rPr sz="1050" lang="zh-TW" dirty="0">
+                <a:solidFill>
+                  <a:srgbClr val="000000"/>
+                </a:solidFill>
+                <a:latin typeface="Arial Unicode MS"/>
+                <a:ea typeface="Arial Unicode MS"/>
+                <a:cs typeface="Arial Unicode MS"/>
+              </a:rPr>
+              <a:t>。
 </a:t>
             </a:r>
           </a:p>
@@ -2185,74 +1899,63 @@
                 <a:spcPts val="0"/>
               </a:spcBef>
               <a:spcAft>
-                <a:spcPts val="133"/>
+                <a:spcPts val="175"/>
               </a:spcAft>
             </a:pPr>
             <a:r>
-              <a:rPr sz="800" b="1" lang="zh-TW" dirty="0">
-                <a:solidFill>
-                  <a:srgbClr val="000000"/>
-                </a:solidFill>
-                <a:latin typeface="Arial Unicode MS"/>
-                <a:ea typeface="Arial Unicode MS"/>
-                <a:cs typeface="Arial Unicode MS"/>
-              </a:rPr>
-              <a:t>第一步，選情境。</a:t>
-            </a:r>
-            <a:r>
-              <a:rPr sz="800" lang="zh-TW" dirty="0">
-                <a:solidFill>
-                  <a:srgbClr val="000000"/>
-                </a:solidFill>
-                <a:latin typeface="Arial Unicode MS"/>
-                <a:ea typeface="Arial Unicode MS"/>
-                <a:cs typeface="Arial Unicode MS"/>
-              </a:rPr>
-              <a:t>看畫面</a:t>
-            </a:r>
-            <a:r>
-              <a:rPr sz="800" b="1" lang="zh-TW" dirty="0">
-                <a:solidFill>
-                  <a:srgbClr val="000000"/>
-                </a:solidFill>
-                <a:latin typeface="Arial Unicode MS"/>
-                <a:ea typeface="Arial Unicode MS"/>
-                <a:cs typeface="Arial Unicode MS"/>
-              </a:rPr>
-              <a:t>最上面那一條</a:t>
-            </a:r>
-            <a:r>
-              <a:rPr sz="800" lang="zh-TW" dirty="0">
-                <a:solidFill>
-                  <a:srgbClr val="000000"/>
-                </a:solidFill>
-                <a:latin typeface="Arial Unicode MS"/>
-                <a:ea typeface="Arial Unicode MS"/>
-                <a:cs typeface="Arial Unicode MS"/>
-              </a:rPr>
-              <a:t>，一直釘在那裡，捲到哪都看得到。三個按鈕：校園接駁、時速二十；河內尖峰、時速四十；國道、時速一百。</a:t>
-            </a:r>
-            <a:r>
-              <a:rPr sz="800" b="1" lang="zh-TW" dirty="0">
-                <a:solidFill>
-                  <a:srgbClr val="000000"/>
-                </a:solidFill>
-                <a:latin typeface="Arial Unicode MS"/>
-                <a:ea typeface="Arial Unicode MS"/>
-                <a:cs typeface="Arial Unicode MS"/>
-              </a:rPr>
-              <a:t>一題只要選一次</a:t>
-            </a:r>
-            <a:r>
-              <a:rPr sz="800" lang="zh-TW" dirty="0">
-                <a:solidFill>
-                  <a:srgbClr val="000000"/>
-                </a:solidFill>
-                <a:latin typeface="Arial Unicode MS"/>
-                <a:ea typeface="Arial Unicode MS"/>
-                <a:cs typeface="Arial Unicode MS"/>
-              </a:rPr>
-              <a:t>——選好了就不要再動它，等一下四顆型號都用同一個情境。旁邊會跟著印出這個情境的煞停距離和門檻，那就是等一下判定在比的數字。
+              <a:rPr sz="1050" lang="zh-TW" dirty="0">
+                <a:solidFill>
+                  <a:srgbClr val="000000"/>
+                </a:solidFill>
+                <a:latin typeface="Arial Unicode MS"/>
+                <a:ea typeface="Arial Unicode MS"/>
+                <a:cs typeface="Arial Unicode MS"/>
+              </a:rPr>
+              <a:t>結論句是</a:t>
+            </a:r>
+            <a:r>
+              <a:rPr sz="1050" b="1" lang="zh-TW" dirty="0">
+                <a:solidFill>
+                  <a:srgbClr val="000000"/>
+                </a:solidFill>
+                <a:latin typeface="Arial Unicode MS"/>
+                <a:ea typeface="Arial Unicode MS"/>
+                <a:cs typeface="Arial Unicode MS"/>
+              </a:rPr>
+              <a:t>四選一</a:t>
+            </a:r>
+            <a:r>
+              <a:rPr sz="1050" lang="zh-TW" dirty="0">
+                <a:solidFill>
+                  <a:srgbClr val="000000"/>
+                </a:solidFill>
+                <a:latin typeface="Arial Unicode MS"/>
+                <a:ea typeface="Arial Unicode MS"/>
+                <a:cs typeface="Arial Unicode MS"/>
+              </a:rPr>
+              <a:t>，不用自己打字。但是選項裡有陷阱：裡面有一句只寫「OS1 不好用」，也有一句把卡住的地方講錯——說它卡在測距，其實測距九十公尺是夠的，卡住的是點數。</a:t>
+            </a:r>
+            <a:r>
+              <a:rPr sz="1050" b="1" lang="zh-TW" dirty="0">
+                <a:solidFill>
+                  <a:srgbClr val="000000"/>
+                </a:solidFill>
+                <a:latin typeface="Arial Unicode MS"/>
+                <a:ea typeface="Arial Unicode MS"/>
+                <a:cs typeface="Arial Unicode MS"/>
+              </a:rPr>
+              <a:t>要選的是那句把『卡在哪一行』講對的。</a:t>
+            </a:r>
+            <a:r>
+              <a:rPr sz="1050" lang="zh-TW" dirty="0">
+                <a:solidFill>
+                  <a:srgbClr val="000000"/>
+                </a:solidFill>
+                <a:latin typeface="Arial Unicode MS"/>
+                <a:ea typeface="Arial Unicode MS"/>
+                <a:cs typeface="Arial Unicode MS"/>
+              </a:rPr>
+              <a:t>
 </a:t>
             </a:r>
           </a:p>
@@ -2262,52 +1965,129 @@
                 <a:spcPts val="0"/>
               </a:spcBef>
               <a:spcAft>
-                <a:spcPts val="133"/>
+                <a:spcPts val="175"/>
               </a:spcAft>
             </a:pPr>
             <a:r>
-              <a:rPr sz="800" b="1" lang="zh-TW" dirty="0">
-                <a:solidFill>
-                  <a:srgbClr val="000000"/>
-                </a:solidFill>
-                <a:latin typeface="Arial Unicode MS"/>
-                <a:ea typeface="Arial Unicode MS"/>
-                <a:cs typeface="Arial Unicode MS"/>
-              </a:rPr>
-              <a:t>第二步，選型號。</a:t>
-            </a:r>
-            <a:r>
-              <a:rPr sz="800" lang="zh-TW" dirty="0">
-                <a:solidFill>
-                  <a:srgbClr val="000000"/>
-                </a:solidFill>
-                <a:latin typeface="Arial Unicode MS"/>
-                <a:ea typeface="Arial Unicode MS"/>
-                <a:cs typeface="Arial Unicode MS"/>
-              </a:rPr>
-              <a:t>判定那一塊的</a:t>
-            </a:r>
-            <a:r>
-              <a:rPr sz="800" b="1" lang="zh-TW" dirty="0">
-                <a:solidFill>
-                  <a:srgbClr val="000000"/>
-                </a:solidFill>
-                <a:latin typeface="Arial Unicode MS"/>
-                <a:ea typeface="Arial Unicode MS"/>
-                <a:cs typeface="Arial Unicode MS"/>
-              </a:rPr>
-              <a:t>上面</a:t>
-            </a:r>
-            <a:r>
-              <a:rPr sz="800" lang="zh-TW" dirty="0">
-                <a:solidFill>
-                  <a:srgbClr val="000000"/>
-                </a:solidFill>
-                <a:latin typeface="Arial Unicode MS"/>
-                <a:ea typeface="Arial Unicode MS"/>
-                <a:cs typeface="Arial Unicode MS"/>
-              </a:rPr>
-              <a:t>有一排四顆按鈕，你要算哪一顆就按哪一顆，不用跑回左邊。情境固定、型號輪四顆——這就是今天每一題要做的事。
+              <a:rPr sz="1050" lang="zh-TW" dirty="0">
+                <a:solidFill>
+                  <a:srgbClr val="000000"/>
+                </a:solidFill>
+                <a:latin typeface="Arial Unicode MS"/>
+                <a:ea typeface="Arial Unicode MS"/>
+                <a:cs typeface="Arial Unicode MS"/>
+              </a:rPr>
+              <a:t>我提醒四件事。第一，</a:t>
+            </a:r>
+            <a:r>
+              <a:rPr sz="1050" b="1" lang="zh-TW" dirty="0">
+                <a:solidFill>
+                  <a:srgbClr val="000000"/>
+                </a:solidFill>
+                <a:latin typeface="Arial Unicode MS"/>
+                <a:ea typeface="Arial Unicode MS"/>
+                <a:cs typeface="Arial Unicode MS"/>
+              </a:rPr>
+              <a:t>先把姓名和學號填上去</a:t>
+            </a:r>
+            <a:r>
+              <a:rPr sz="1050" lang="zh-TW" dirty="0">
+                <a:solidFill>
+                  <a:srgbClr val="000000"/>
+                </a:solidFill>
+                <a:latin typeface="Arial Unicode MS"/>
+                <a:ea typeface="Arial Unicode MS"/>
+                <a:cs typeface="Arial Unicode MS"/>
+              </a:rPr>
+              <a:t>，不然截圖我認不出是誰。第二，答案</a:t>
+            </a:r>
+            <a:r>
+              <a:rPr sz="1050" b="1" lang="zh-TW" dirty="0">
+                <a:solidFill>
+                  <a:srgbClr val="000000"/>
+                </a:solidFill>
+                <a:latin typeface="Arial Unicode MS"/>
+                <a:ea typeface="Arial Unicode MS"/>
+                <a:cs typeface="Arial Unicode MS"/>
+              </a:rPr>
+              <a:t>存在你自己的手機裡</a:t>
+            </a:r>
+            <a:r>
+              <a:rPr sz="1050" lang="zh-TW" dirty="0">
+                <a:solidFill>
+                  <a:srgbClr val="000000"/>
+                </a:solidFill>
+                <a:latin typeface="Arial Unicode MS"/>
+                <a:ea typeface="Arial Unicode MS"/>
+                <a:cs typeface="Arial Unicode MS"/>
+              </a:rPr>
+              <a:t>，切去別的分頁查規格、再切回來，填過的都還在。第三，十二格不用手抄——在試算那一頁按「</a:t>
+            </a:r>
+            <a:r>
+              <a:rPr sz="1050" b="1" lang="zh-TW" dirty="0">
+                <a:solidFill>
+                  <a:srgbClr val="000000"/>
+                </a:solidFill>
+                <a:latin typeface="Arial Unicode MS"/>
+                <a:ea typeface="Arial Unicode MS"/>
+                <a:cs typeface="Arial Unicode MS"/>
+              </a:rPr>
+              <a:t>記進作業</a:t>
+            </a:r>
+            <a:r>
+              <a:rPr sz="1050" lang="zh-TW" dirty="0">
+                <a:solidFill>
+                  <a:srgbClr val="000000"/>
+                </a:solidFill>
+                <a:latin typeface="Arial Unicode MS"/>
+                <a:ea typeface="Arial Unicode MS"/>
+                <a:cs typeface="Arial Unicode MS"/>
+              </a:rPr>
+              <a:t>」就會自動填進去，按鈕下面還會告訴各位</a:t>
+            </a:r>
+            <a:r>
+              <a:rPr sz="1050" b="1" lang="zh-TW" dirty="0">
+                <a:solidFill>
+                  <a:srgbClr val="000000"/>
+                </a:solidFill>
+                <a:latin typeface="Arial Unicode MS"/>
+                <a:ea typeface="Arial Unicode MS"/>
+                <a:cs typeface="Arial Unicode MS"/>
+              </a:rPr>
+              <a:t>十二格已經記了幾格</a:t>
+            </a:r>
+            <a:r>
+              <a:rPr sz="1050" lang="zh-TW" dirty="0">
+                <a:solidFill>
+                  <a:srgbClr val="000000"/>
+                </a:solidFill>
+                <a:latin typeface="Arial Unicode MS"/>
+                <a:ea typeface="Arial Unicode MS"/>
+                <a:cs typeface="Arial Unicode MS"/>
+              </a:rPr>
+              <a:t>，填錯還是可以自己改。第四，全部做完按「</a:t>
+            </a:r>
+            <a:r>
+              <a:rPr sz="1050" b="1" lang="zh-TW" dirty="0">
+                <a:solidFill>
+                  <a:srgbClr val="000000"/>
+                </a:solidFill>
+                <a:latin typeface="Arial Unicode MS"/>
+                <a:ea typeface="Arial Unicode MS"/>
+                <a:cs typeface="Arial Unicode MS"/>
+              </a:rPr>
+              <a:t>產生作答單</a:t>
+            </a:r>
+            <a:r>
+              <a:rPr sz="1050" lang="zh-TW" dirty="0">
+                <a:solidFill>
+                  <a:srgbClr val="000000"/>
+                </a:solidFill>
+                <a:latin typeface="Arial Unicode MS"/>
+                <a:ea typeface="Arial Unicode MS"/>
+                <a:cs typeface="Arial Unicode MS"/>
+              </a:rPr>
+              <a:t>」，它會整理成一張乾淨的卡片，截那一張就好。
 </a:t>
             </a:r>
           </a:p>
@@ -2317,363 +2097,11 @@
                 <a:spcPts val="0"/>
               </a:spcBef>
               <a:spcAft>
-                <a:spcPts val="133"/>
+                <a:spcPts val="175"/>
               </a:spcAft>
             </a:pPr>
             <a:r>
-              <a:rPr sz="800" b="1" lang="zh-TW" dirty="0">
-                <a:solidFill>
-                  <a:srgbClr val="000000"/>
-                </a:solidFill>
-                <a:latin typeface="Arial Unicode MS"/>
-                <a:ea typeface="Arial Unicode MS"/>
-                <a:cs typeface="Arial Unicode MS"/>
-              </a:rPr>
-              <a:t>第三步，找四個數字、看判定。</a:t>
-            </a:r>
-            <a:r>
-              <a:rPr sz="800" lang="zh-TW" dirty="0">
-                <a:solidFill>
-                  <a:srgbClr val="000000"/>
-                </a:solidFill>
-                <a:latin typeface="Arial Unicode MS"/>
-                <a:ea typeface="Arial Unicode MS"/>
-                <a:cs typeface="Arial Unicode MS"/>
-              </a:rPr>
-              <a:t>四題還是上午那四個：垂直視野、對百分之十反射率的測距、解析度、更新率，選完按檢查。這裡我要請各位做一件事：</a:t>
-            </a:r>
-            <a:r>
-              <a:rPr sz="800" b="1" lang="zh-TW" dirty="0">
-                <a:solidFill>
-                  <a:srgbClr val="000000"/>
-                </a:solidFill>
-                <a:latin typeface="Arial Unicode MS"/>
-                <a:ea typeface="Arial Unicode MS"/>
-                <a:cs typeface="Arial Unicode MS"/>
-              </a:rPr>
-              <a:t>把「只看英文原文」按下去</a:t>
-            </a:r>
-            <a:r>
-              <a:rPr sz="800" lang="zh-TW" dirty="0">
-                <a:solidFill>
-                  <a:srgbClr val="000000"/>
-                </a:solidFill>
-                <a:latin typeface="Arial Unicode MS"/>
-                <a:ea typeface="Arial Unicode MS"/>
-                <a:cs typeface="Arial Unicode MS"/>
-              </a:rPr>
-              <a:t>。上午我讓對照開著，因為大家第一次讀；現在請各位試試看純原文，真的規格表上不會有中文。看不懂的單字可以問我，或者按回「原文＋對照」確認一下，但是先自己試。
-</a:t>
-            </a:r>
-          </a:p>
-          <a:p>
-            <a:pPr algn="l">
-              <a:spcBef>
-                <a:spcPts val="0"/>
-              </a:spcBef>
-              <a:spcAft>
-                <a:spcPts val="133"/>
-              </a:spcAft>
-            </a:pPr>
-            <a:r>
-              <a:rPr sz="800" b="1" lang="zh-TW" dirty="0">
-                <a:solidFill>
-                  <a:srgbClr val="000000"/>
-                </a:solidFill>
-                <a:latin typeface="Arial Unicode MS"/>
-                <a:ea typeface="Arial Unicode MS"/>
-                <a:cs typeface="Arial Unicode MS"/>
-              </a:rPr>
-              <a:t>第四步，寫結論。</a:t>
-            </a:r>
-            <a:r>
-              <a:rPr sz="800" lang="zh-TW" dirty="0">
-                <a:solidFill>
-                  <a:srgbClr val="000000"/>
-                </a:solidFill>
-                <a:latin typeface="Arial Unicode MS"/>
-                <a:ea typeface="Arial Unicode MS"/>
-                <a:cs typeface="Arial Unicode MS"/>
-              </a:rPr>
-              <a:t>判讀台上有第四個分頁，叫</a:t>
-            </a:r>
-            <a:r>
-              <a:rPr sz="800" b="1" lang="zh-TW" dirty="0">
-                <a:solidFill>
-                  <a:srgbClr val="000000"/>
-                </a:solidFill>
-                <a:latin typeface="Arial Unicode MS"/>
-                <a:ea typeface="Arial Unicode MS"/>
-                <a:cs typeface="Arial Unicode MS"/>
-              </a:rPr>
-              <a:t>作業</a:t>
-            </a:r>
-            <a:r>
-              <a:rPr sz="800" lang="zh-TW" dirty="0">
-                <a:solidFill>
-                  <a:srgbClr val="000000"/>
-                </a:solidFill>
-                <a:latin typeface="Arial Unicode MS"/>
-                <a:ea typeface="Arial Unicode MS"/>
-                <a:cs typeface="Arial Unicode MS"/>
-              </a:rPr>
-              <a:t>，整份就在那裡填。
-</a:t>
-            </a:r>
-          </a:p>
-          <a:p>
-            <a:pPr algn="l">
-              <a:spcBef>
-                <a:spcPts val="0"/>
-              </a:spcBef>
-              <a:spcAft>
-                <a:spcPts val="133"/>
-              </a:spcAft>
-            </a:pPr>
-            <a:r>
-              <a:rPr sz="800" lang="zh-TW" dirty="0">
-                <a:solidFill>
-                  <a:srgbClr val="000000"/>
-                </a:solidFill>
-                <a:latin typeface="Arial Unicode MS"/>
-                <a:ea typeface="Arial Unicode MS"/>
-                <a:cs typeface="Arial Unicode MS"/>
-              </a:rPr>
-              <a:t>我要看到的不是「夠」或「不夠」兩個字，是</a:t>
-            </a:r>
-            <a:r>
-              <a:rPr sz="800" b="1" lang="zh-TW" dirty="0">
-                <a:solidFill>
-                  <a:srgbClr val="000000"/>
-                </a:solidFill>
-                <a:latin typeface="Arial Unicode MS"/>
-                <a:ea typeface="Arial Unicode MS"/>
-                <a:cs typeface="Arial Unicode MS"/>
-              </a:rPr>
-              <a:t>卡在哪一行</a:t>
-            </a:r>
-            <a:r>
-              <a:rPr sz="800" lang="zh-TW" dirty="0">
-                <a:solidFill>
-                  <a:srgbClr val="000000"/>
-                </a:solidFill>
-                <a:latin typeface="Arial Unicode MS"/>
-                <a:ea typeface="Arial Unicode MS"/>
-                <a:cs typeface="Arial Unicode MS"/>
-              </a:rPr>
-              <a:t>。
-</a:t>
-            </a:r>
-          </a:p>
-          <a:p>
-            <a:pPr algn="l">
-              <a:spcBef>
-                <a:spcPts val="0"/>
-              </a:spcBef>
-              <a:spcAft>
-                <a:spcPts val="133"/>
-              </a:spcAft>
-            </a:pPr>
-            <a:r>
-              <a:rPr sz="800" lang="zh-TW" dirty="0">
-                <a:solidFill>
-                  <a:srgbClr val="000000"/>
-                </a:solidFill>
-                <a:latin typeface="Arial Unicode MS"/>
-                <a:ea typeface="Arial Unicode MS"/>
-                <a:cs typeface="Arial Unicode MS"/>
-              </a:rPr>
-              <a:t>結論句是</a:t>
-            </a:r>
-            <a:r>
-              <a:rPr sz="800" b="1" lang="zh-TW" dirty="0">
-                <a:solidFill>
-                  <a:srgbClr val="000000"/>
-                </a:solidFill>
-                <a:latin typeface="Arial Unicode MS"/>
-                <a:ea typeface="Arial Unicode MS"/>
-                <a:cs typeface="Arial Unicode MS"/>
-              </a:rPr>
-              <a:t>四選一</a:t>
-            </a:r>
-            <a:r>
-              <a:rPr sz="800" lang="zh-TW" dirty="0">
-                <a:solidFill>
-                  <a:srgbClr val="000000"/>
-                </a:solidFill>
-                <a:latin typeface="Arial Unicode MS"/>
-                <a:ea typeface="Arial Unicode MS"/>
-                <a:cs typeface="Arial Unicode MS"/>
-              </a:rPr>
-              <a:t>，不用自己打字。但是選項裡有陷阱：裡面有一句只寫「OS1 不好用」，也有一句把卡住的地方講錯——說它卡在測距，其實測距九十公尺是夠的，卡住的是點數。</a:t>
-            </a:r>
-            <a:r>
-              <a:rPr sz="800" b="1" lang="zh-TW" dirty="0">
-                <a:solidFill>
-                  <a:srgbClr val="000000"/>
-                </a:solidFill>
-                <a:latin typeface="Arial Unicode MS"/>
-                <a:ea typeface="Arial Unicode MS"/>
-                <a:cs typeface="Arial Unicode MS"/>
-              </a:rPr>
-              <a:t>要選的是那句把『卡在哪一行』講對的。</a:t>
-            </a:r>
-            <a:r>
-              <a:rPr sz="800" lang="zh-TW" dirty="0">
-                <a:solidFill>
-                  <a:srgbClr val="000000"/>
-                </a:solidFill>
-                <a:latin typeface="Arial Unicode MS"/>
-                <a:ea typeface="Arial Unicode MS"/>
-                <a:cs typeface="Arial Unicode MS"/>
-              </a:rPr>
-              <a:t>
-</a:t>
-            </a:r>
-          </a:p>
-          <a:p>
-            <a:pPr algn="l">
-              <a:spcBef>
-                <a:spcPts val="0"/>
-              </a:spcBef>
-              <a:spcAft>
-                <a:spcPts val="133"/>
-              </a:spcAft>
-            </a:pPr>
-            <a:r>
-              <a:rPr sz="800" lang="zh-TW" dirty="0">
-                <a:solidFill>
-                  <a:srgbClr val="000000"/>
-                </a:solidFill>
-                <a:latin typeface="Arial Unicode MS"/>
-                <a:ea typeface="Arial Unicode MS"/>
-                <a:cs typeface="Arial Unicode MS"/>
-              </a:rPr>
-              <a:t>我提醒四件事。第一，</a:t>
-            </a:r>
-            <a:r>
-              <a:rPr sz="800" b="1" lang="zh-TW" dirty="0">
-                <a:solidFill>
-                  <a:srgbClr val="000000"/>
-                </a:solidFill>
-                <a:latin typeface="Arial Unicode MS"/>
-                <a:ea typeface="Arial Unicode MS"/>
-                <a:cs typeface="Arial Unicode MS"/>
-              </a:rPr>
-              <a:t>先把姓名和學號填上去</a:t>
-            </a:r>
-            <a:r>
-              <a:rPr sz="800" lang="zh-TW" dirty="0">
-                <a:solidFill>
-                  <a:srgbClr val="000000"/>
-                </a:solidFill>
-                <a:latin typeface="Arial Unicode MS"/>
-                <a:ea typeface="Arial Unicode MS"/>
-                <a:cs typeface="Arial Unicode MS"/>
-              </a:rPr>
-              <a:t>，不然截圖我認不出是誰。第二，答案</a:t>
-            </a:r>
-            <a:r>
-              <a:rPr sz="800" b="1" lang="zh-TW" dirty="0">
-                <a:solidFill>
-                  <a:srgbClr val="000000"/>
-                </a:solidFill>
-                <a:latin typeface="Arial Unicode MS"/>
-                <a:ea typeface="Arial Unicode MS"/>
-                <a:cs typeface="Arial Unicode MS"/>
-              </a:rPr>
-              <a:t>存在你自己的手機裡</a:t>
-            </a:r>
-            <a:r>
-              <a:rPr sz="800" lang="zh-TW" dirty="0">
-                <a:solidFill>
-                  <a:srgbClr val="000000"/>
-                </a:solidFill>
-                <a:latin typeface="Arial Unicode MS"/>
-                <a:ea typeface="Arial Unicode MS"/>
-                <a:cs typeface="Arial Unicode MS"/>
-              </a:rPr>
-              <a:t>，切去別的分頁查規格、再切回來，填過的都還在。第三，十二格不用手抄——在試算那一頁按「</a:t>
-            </a:r>
-            <a:r>
-              <a:rPr sz="800" b="1" lang="zh-TW" dirty="0">
-                <a:solidFill>
-                  <a:srgbClr val="000000"/>
-                </a:solidFill>
-                <a:latin typeface="Arial Unicode MS"/>
-                <a:ea typeface="Arial Unicode MS"/>
-                <a:cs typeface="Arial Unicode MS"/>
-              </a:rPr>
-              <a:t>記進作業</a:t>
-            </a:r>
-            <a:r>
-              <a:rPr sz="800" lang="zh-TW" dirty="0">
-                <a:solidFill>
-                  <a:srgbClr val="000000"/>
-                </a:solidFill>
-                <a:latin typeface="Arial Unicode MS"/>
-                <a:ea typeface="Arial Unicode MS"/>
-                <a:cs typeface="Arial Unicode MS"/>
-              </a:rPr>
-              <a:t>」就會自動填進去，按鈕下面還會告訴各位</a:t>
-            </a:r>
-            <a:r>
-              <a:rPr sz="800" b="1" lang="zh-TW" dirty="0">
-                <a:solidFill>
-                  <a:srgbClr val="000000"/>
-                </a:solidFill>
-                <a:latin typeface="Arial Unicode MS"/>
-                <a:ea typeface="Arial Unicode MS"/>
-                <a:cs typeface="Arial Unicode MS"/>
-              </a:rPr>
-              <a:t>十二格已經記了幾格</a:t>
-            </a:r>
-            <a:r>
-              <a:rPr sz="800" lang="zh-TW" dirty="0">
-                <a:solidFill>
-                  <a:srgbClr val="000000"/>
-                </a:solidFill>
-                <a:latin typeface="Arial Unicode MS"/>
-                <a:ea typeface="Arial Unicode MS"/>
-                <a:cs typeface="Arial Unicode MS"/>
-              </a:rPr>
-              <a:t>，填錯還是可以自己改。第四，全部做完按「</a:t>
-            </a:r>
-            <a:r>
-              <a:rPr sz="800" b="1" lang="zh-TW" dirty="0">
-                <a:solidFill>
-                  <a:srgbClr val="000000"/>
-                </a:solidFill>
-                <a:latin typeface="Arial Unicode MS"/>
-                <a:ea typeface="Arial Unicode MS"/>
-                <a:cs typeface="Arial Unicode MS"/>
-              </a:rPr>
-              <a:t>產生作答單</a:t>
-            </a:r>
-            <a:r>
-              <a:rPr sz="800" lang="zh-TW" dirty="0">
-                <a:solidFill>
-                  <a:srgbClr val="000000"/>
-                </a:solidFill>
-                <a:latin typeface="Arial Unicode MS"/>
-                <a:ea typeface="Arial Unicode MS"/>
-                <a:cs typeface="Arial Unicode MS"/>
-              </a:rPr>
-              <a:t>」，它會整理成一張乾淨的卡片，截那一張就好。
-</a:t>
-            </a:r>
-          </a:p>
-          <a:p>
-            <a:pPr algn="l">
-              <a:spcBef>
-                <a:spcPts val="0"/>
-              </a:spcBef>
-              <a:spcAft>
-                <a:spcPts val="133"/>
-              </a:spcAft>
-            </a:pPr>
-            <a:r>
-              <a:rPr sz="800" lang="zh-TW" dirty="0">
+              <a:rPr sz="1050" lang="zh-TW" dirty="0">
                 <a:solidFill>
                   <a:srgbClr val="000000"/>
                 </a:solidFill>
@@ -2790,30 +2218,19 @@
                 <a:spcPts val="0"/>
               </a:spcBef>
               <a:spcAft>
-                <a:spcPts val="133"/>
+                <a:spcPts val="175"/>
               </a:spcAft>
             </a:pPr>
             <a:r>
-              <a:rPr sz="800" b="1" lang="zh-TW" dirty="0">
-                <a:solidFill>
-                  <a:srgbClr val="000000"/>
-                </a:solidFill>
-                <a:latin typeface="Arial Unicode MS"/>
-                <a:ea typeface="Arial Unicode MS"/>
-                <a:cs typeface="Arial Unicode MS"/>
-              </a:rPr>
-              <a:t>▍這一張要做什麼</a:t>
-            </a:r>
-            <a:r>
-              <a:rPr sz="800" lang="zh-TW" dirty="0">
-                <a:solidFill>
-                  <a:srgbClr val="000000"/>
-                </a:solidFill>
-                <a:latin typeface="Arial Unicode MS"/>
-                <a:ea typeface="Arial Unicode MS"/>
-                <a:cs typeface="Arial Unicode MS"/>
-              </a:rPr>
-              <a:t>
+              <a:rPr sz="1050" lang="zh-TW" dirty="0">
+                <a:solidFill>
+                  <a:srgbClr val="000000"/>
+                </a:solidFill>
+                <a:latin typeface="Arial Unicode MS"/>
+                <a:ea typeface="Arial Unicode MS"/>
+                <a:cs typeface="Arial Unicode MS"/>
+              </a:rPr>
+              <a:t>第一題，十分鐘。
 </a:t>
             </a:r>
           </a:p>
@@ -2823,19 +2240,41 @@
                 <a:spcPts val="0"/>
               </a:spcBef>
               <a:spcAft>
-                <a:spcPts val="133"/>
+                <a:spcPts val="175"/>
               </a:spcAft>
             </a:pPr>
             <a:r>
-              <a:rPr sz="800" lang="zh-TW" dirty="0">
-                <a:solidFill>
-                  <a:srgbClr val="000000"/>
-                </a:solidFill>
-                <a:latin typeface="Arial Unicode MS"/>
-                <a:ea typeface="Arial Unicode MS"/>
-                <a:cs typeface="Arial Unicode MS"/>
-              </a:rPr>
-              <a:t>第一題：校園接駁，時速 20。四個型號都試一次，先建立基準。
+              <a:rPr sz="1050" lang="zh-TW" dirty="0">
+                <a:solidFill>
+                  <a:srgbClr val="000000"/>
+                </a:solidFill>
+                <a:latin typeface="Arial Unicode MS"/>
+                <a:ea typeface="Arial Unicode MS"/>
+                <a:cs typeface="Arial Unicode MS"/>
+              </a:rPr>
+              <a:t>情境是</a:t>
+            </a:r>
+            <a:r>
+              <a:rPr sz="1050" b="1" lang="zh-TW" dirty="0">
+                <a:solidFill>
+                  <a:srgbClr val="000000"/>
+                </a:solidFill>
+                <a:latin typeface="Arial Unicode MS"/>
+                <a:ea typeface="Arial Unicode MS"/>
+                <a:cs typeface="Arial Unicode MS"/>
+              </a:rPr>
+              <a:t>校園接駁小巴，時速二十，要在四十公尺外認出行人</a:t>
+            </a:r>
+            <a:r>
+              <a:rPr sz="1050" lang="zh-TW" dirty="0">
+                <a:solidFill>
+                  <a:srgbClr val="000000"/>
+                </a:solidFill>
+                <a:latin typeface="Arial Unicode MS"/>
+                <a:ea typeface="Arial Unicode MS"/>
+                <a:cs typeface="Arial Unicode MS"/>
+              </a:rPr>
+              <a:t>。
 </a:t>
             </a:r>
           </a:p>
@@ -2845,30 +2284,41 @@
                 <a:spcPts val="0"/>
               </a:spcBef>
               <a:spcAft>
-                <a:spcPts val="133"/>
+                <a:spcPts val="175"/>
               </a:spcAft>
             </a:pPr>
             <a:r>
-              <a:rPr sz="800" b="1" lang="zh-TW" dirty="0">
-                <a:solidFill>
-                  <a:srgbClr val="000000"/>
-                </a:solidFill>
-                <a:latin typeface="Arial Unicode MS"/>
-                <a:ea typeface="Arial Unicode MS"/>
-                <a:cs typeface="Arial Unicode MS"/>
-              </a:rPr>
-              <a:t>▍畫面上圈這裡</a:t>
-            </a:r>
-            <a:r>
-              <a:rPr sz="800" lang="zh-TW" dirty="0">
-                <a:solidFill>
-                  <a:srgbClr val="000000"/>
-                </a:solidFill>
-                <a:latin typeface="Arial Unicode MS"/>
-                <a:ea typeface="Arial Unicode MS"/>
-                <a:cs typeface="Arial Unicode MS"/>
-              </a:rPr>
-              <a:t>
+              <a:rPr sz="1050" lang="zh-TW" dirty="0">
+                <a:solidFill>
+                  <a:srgbClr val="000000"/>
+                </a:solidFill>
+                <a:latin typeface="Arial Unicode MS"/>
+                <a:ea typeface="Arial Unicode MS"/>
+                <a:cs typeface="Arial Unicode MS"/>
+              </a:rPr>
+              <a:t>請把四個型號都按一次。每按完一個，</a:t>
+            </a:r>
+            <a:r>
+              <a:rPr sz="1050" b="1" lang="zh-TW" dirty="0">
+                <a:solidFill>
+                  <a:srgbClr val="000000"/>
+                </a:solidFill>
+                <a:latin typeface="Arial Unicode MS"/>
+                <a:ea typeface="Arial Unicode MS"/>
+                <a:cs typeface="Arial Unicode MS"/>
+              </a:rPr>
+              <a:t>判定底下有一顆「記進作業」</a:t>
+            </a:r>
+            <a:r>
+              <a:rPr sz="1050" lang="zh-TW" dirty="0">
+                <a:solidFill>
+                  <a:srgbClr val="000000"/>
+                </a:solidFill>
+                <a:latin typeface="Arial Unicode MS"/>
+                <a:ea typeface="Arial Unicode MS"/>
+                <a:cs typeface="Arial Unicode MS"/>
+              </a:rPr>
+              <a:t>，按下去那一格就填好了，不用自己切到作業分頁去抄。
 </a:t>
             </a:r>
           </a:p>
@@ -2878,19 +2328,19 @@
                 <a:spcPts val="0"/>
               </a:spcBef>
               <a:spcAft>
-                <a:spcPts val="133"/>
+                <a:spcPts val="175"/>
               </a:spcAft>
             </a:pPr>
             <a:r>
-              <a:rPr sz="800" lang="zh-TW" dirty="0">
-                <a:solidFill>
-                  <a:srgbClr val="000000"/>
-                </a:solidFill>
-                <a:latin typeface="Arial Unicode MS"/>
-                <a:ea typeface="Arial Unicode MS"/>
-                <a:cs typeface="Arial Unicode MS"/>
-              </a:rPr>
-              <a:t>圈情境條件裡的時速與目標大小。這一題多數型號都會過，重點是熟悉流程。
+              <a:rPr sz="1050" lang="zh-TW" dirty="0">
+                <a:solidFill>
+                  <a:srgbClr val="000000"/>
+                </a:solidFill>
+                <a:latin typeface="Arial Unicode MS"/>
+                <a:ea typeface="Arial Unicode MS"/>
+                <a:cs typeface="Arial Unicode MS"/>
+              </a:rPr>
+              <a:t>我先講你們會看到什麼，這樣卡住的時候心裡有底。
 </a:t>
             </a:r>
           </a:p>
@@ -2900,30 +2350,41 @@
                 <a:spcPts val="0"/>
               </a:spcBef>
               <a:spcAft>
-                <a:spcPts val="133"/>
+                <a:spcPts val="175"/>
               </a:spcAft>
             </a:pPr>
             <a:r>
-              <a:rPr sz="800" b="1" lang="zh-TW" dirty="0">
-                <a:solidFill>
-                  <a:srgbClr val="000000"/>
-                </a:solidFill>
-                <a:latin typeface="Arial Unicode MS"/>
-                <a:ea typeface="Arial Unicode MS"/>
-                <a:cs typeface="Arial Unicode MS"/>
-              </a:rPr>
-              <a:t>▍以下照著唸</a:t>
-            </a:r>
-            <a:r>
-              <a:rPr sz="800" lang="zh-TW" dirty="0">
-                <a:solidFill>
-                  <a:srgbClr val="000000"/>
-                </a:solidFill>
-                <a:latin typeface="Arial Unicode MS"/>
-                <a:ea typeface="Arial Unicode MS"/>
-                <a:cs typeface="Arial Unicode MS"/>
-              </a:rPr>
-              <a:t>
+              <a:rPr sz="1050" lang="zh-TW" dirty="0">
+                <a:solidFill>
+                  <a:srgbClr val="000000"/>
+                </a:solidFill>
+                <a:latin typeface="Arial Unicode MS"/>
+                <a:ea typeface="Arial Unicode MS"/>
+                <a:cs typeface="Arial Unicode MS"/>
+              </a:rPr>
+              <a:t>時速二十的煞停距離是四點二公尺，加五公尺餘裕，所以感測器只要看得到</a:t>
+            </a:r>
+            <a:r>
+              <a:rPr sz="1050" b="1" lang="zh-TW" dirty="0">
+                <a:solidFill>
+                  <a:srgbClr val="000000"/>
+                </a:solidFill>
+                <a:latin typeface="Arial Unicode MS"/>
+                <a:ea typeface="Arial Unicode MS"/>
+                <a:cs typeface="Arial Unicode MS"/>
+              </a:rPr>
+              <a:t>九公尺</a:t>
+            </a:r>
+            <a:r>
+              <a:rPr sz="1050" lang="zh-TW" dirty="0">
+                <a:solidFill>
+                  <a:srgbClr val="000000"/>
+                </a:solidFill>
+                <a:latin typeface="Arial Unicode MS"/>
+                <a:ea typeface="Arial Unicode MS"/>
+                <a:cs typeface="Arial Unicode MS"/>
+              </a:rPr>
+              <a:t>就夠了。這個門檻很低，四顆的測距全部都過。
 </a:t>
             </a:r>
           </a:p>
@@ -2933,19 +2394,41 @@
                 <a:spcPts val="0"/>
               </a:spcBef>
               <a:spcAft>
-                <a:spcPts val="133"/>
+                <a:spcPts val="175"/>
               </a:spcAft>
             </a:pPr>
             <a:r>
-              <a:rPr sz="800" lang="zh-TW" dirty="0">
-                <a:solidFill>
-                  <a:srgbClr val="000000"/>
-                </a:solidFill>
-                <a:latin typeface="Arial Unicode MS"/>
-                <a:ea typeface="Arial Unicode MS"/>
-                <a:cs typeface="Arial Unicode MS"/>
-              </a:rPr>
-              <a:t>第一題，十分鐘。
+              <a:rPr sz="1050" lang="zh-TW" dirty="0">
+                <a:solidFill>
+                  <a:srgbClr val="000000"/>
+                </a:solidFill>
+                <a:latin typeface="Arial Unicode MS"/>
+                <a:ea typeface="Arial Unicode MS"/>
+                <a:cs typeface="Arial Unicode MS"/>
+              </a:rPr>
+              <a:t>所以卡住的不會是測距，而是</a:t>
+            </a:r>
+            <a:r>
+              <a:rPr sz="1050" b="1" lang="zh-TW" dirty="0">
+                <a:solidFill>
+                  <a:srgbClr val="000000"/>
+                </a:solidFill>
+                <a:latin typeface="Arial Unicode MS"/>
+                <a:ea typeface="Arial Unicode MS"/>
+                <a:cs typeface="Arial Unicode MS"/>
+              </a:rPr>
+              <a:t>點數</a:t>
+            </a:r>
+            <a:r>
+              <a:rPr sz="1050" lang="zh-TW" dirty="0">
+                <a:solidFill>
+                  <a:srgbClr val="000000"/>
+                </a:solidFill>
+                <a:latin typeface="Arial Unicode MS"/>
+                <a:ea typeface="Arial Unicode MS"/>
+                <a:cs typeface="Arial Unicode MS"/>
+              </a:rPr>
+              <a:t>。
 </a:t>
             </a:r>
           </a:p>
@@ -2955,41 +2438,19 @@
                 <a:spcPts val="0"/>
               </a:spcBef>
               <a:spcAft>
-                <a:spcPts val="133"/>
+                <a:spcPts val="175"/>
               </a:spcAft>
             </a:pPr>
             <a:r>
-              <a:rPr sz="800" lang="zh-TW" dirty="0">
-                <a:solidFill>
-                  <a:srgbClr val="000000"/>
-                </a:solidFill>
-                <a:latin typeface="Arial Unicode MS"/>
-                <a:ea typeface="Arial Unicode MS"/>
-                <a:cs typeface="Arial Unicode MS"/>
-              </a:rPr>
-              <a:t>情境是</a:t>
-            </a:r>
-            <a:r>
-              <a:rPr sz="800" b="1" lang="zh-TW" dirty="0">
-                <a:solidFill>
-                  <a:srgbClr val="000000"/>
-                </a:solidFill>
-                <a:latin typeface="Arial Unicode MS"/>
-                <a:ea typeface="Arial Unicode MS"/>
-                <a:cs typeface="Arial Unicode MS"/>
-              </a:rPr>
-              <a:t>校園接駁小巴，時速二十，要在四十公尺外認出行人</a:t>
-            </a:r>
-            <a:r>
-              <a:rPr sz="800" lang="zh-TW" dirty="0">
-                <a:solidFill>
-                  <a:srgbClr val="000000"/>
-                </a:solidFill>
-                <a:latin typeface="Arial Unicode MS"/>
-                <a:ea typeface="Arial Unicode MS"/>
-                <a:cs typeface="Arial Unicode MS"/>
-              </a:rPr>
-              <a:t>。
+              <a:rPr sz="1050" lang="zh-TW" dirty="0">
+                <a:solidFill>
+                  <a:srgbClr val="000000"/>
+                </a:solidFill>
+                <a:latin typeface="Arial Unicode MS"/>
+                <a:ea typeface="Arial Unicode MS"/>
+                <a:cs typeface="Arial Unicode MS"/>
+              </a:rPr>
+              <a:t>AT128P 在四十公尺的行人身上有八十四個點，過。相機的估距誤差在四十公尺是正負零點五八公尺，也過。
 </a:t>
             </a:r>
           </a:p>
@@ -2999,41 +2460,19 @@
                 <a:spcPts val="0"/>
               </a:spcBef>
               <a:spcAft>
-                <a:spcPts val="133"/>
+                <a:spcPts val="175"/>
               </a:spcAft>
             </a:pPr>
             <a:r>
-              <a:rPr sz="800" lang="zh-TW" dirty="0">
-                <a:solidFill>
-                  <a:srgbClr val="000000"/>
-                </a:solidFill>
-                <a:latin typeface="Arial Unicode MS"/>
-                <a:ea typeface="Arial Unicode MS"/>
-                <a:cs typeface="Arial Unicode MS"/>
-              </a:rPr>
-              <a:t>請把四個型號都按一次。每按完一個，</a:t>
-            </a:r>
-            <a:r>
-              <a:rPr sz="800" b="1" lang="zh-TW" dirty="0">
-                <a:solidFill>
-                  <a:srgbClr val="000000"/>
-                </a:solidFill>
-                <a:latin typeface="Arial Unicode MS"/>
-                <a:ea typeface="Arial Unicode MS"/>
-                <a:cs typeface="Arial Unicode MS"/>
-              </a:rPr>
-              <a:t>判定底下有一顆「記進作業」</a:t>
-            </a:r>
-            <a:r>
-              <a:rPr sz="800" lang="zh-TW" dirty="0">
-                <a:solidFill>
-                  <a:srgbClr val="000000"/>
-                </a:solidFill>
-                <a:latin typeface="Arial Unicode MS"/>
-                <a:ea typeface="Arial Unicode MS"/>
-                <a:cs typeface="Arial Unicode MS"/>
-              </a:rPr>
-              <a:t>，按下去那一格就填好了，不用自己切到作業分頁去抄。
+              <a:rPr sz="1050" lang="zh-TW" dirty="0">
+                <a:solidFill>
+                  <a:srgbClr val="000000"/>
+                </a:solidFill>
+                <a:latin typeface="Arial Unicode MS"/>
+                <a:ea typeface="Arial Unicode MS"/>
+                <a:cs typeface="Arial Unicode MS"/>
+              </a:rPr>
+              <a:t>OS1 只有六個點，不夠。LD-16 只有一個點，更不夠。
 </a:t>
             </a:r>
           </a:p>
@@ -3043,19 +2482,41 @@
                 <a:spcPts val="0"/>
               </a:spcBef>
               <a:spcAft>
-                <a:spcPts val="133"/>
+                <a:spcPts val="175"/>
               </a:spcAft>
             </a:pPr>
             <a:r>
-              <a:rPr sz="800" lang="zh-TW" dirty="0">
-                <a:solidFill>
-                  <a:srgbClr val="000000"/>
-                </a:solidFill>
-                <a:latin typeface="Arial Unicode MS"/>
-                <a:ea typeface="Arial Unicode MS"/>
-                <a:cs typeface="Arial Unicode MS"/>
-              </a:rPr>
-              <a:t>我先講你們會看到什麼，這樣卡住的時候心裡有底。
+              <a:rPr sz="1050" lang="zh-TW" dirty="0">
+                <a:solidFill>
+                  <a:srgbClr val="000000"/>
+                </a:solidFill>
+                <a:latin typeface="Arial Unicode MS"/>
+                <a:ea typeface="Arial Unicode MS"/>
+                <a:cs typeface="Arial Unicode MS"/>
+              </a:rPr>
+              <a:t>現在我要各位想一題：</a:t>
+            </a:r>
+            <a:r>
+              <a:rPr sz="1050" b="1" lang="zh-TW" dirty="0">
+                <a:solidFill>
+                  <a:srgbClr val="000000"/>
+                </a:solidFill>
+                <a:latin typeface="Arial Unicode MS"/>
+                <a:ea typeface="Arial Unicode MS"/>
+                <a:cs typeface="Arial Unicode MS"/>
+              </a:rPr>
+              <a:t>為什麼相機在這個情境反而夠用？</a:t>
+            </a:r>
+            <a:r>
+              <a:rPr sz="1050" lang="zh-TW" dirty="0">
+                <a:solidFill>
+                  <a:srgbClr val="000000"/>
+                </a:solidFill>
+                <a:latin typeface="Arial Unicode MS"/>
+                <a:ea typeface="Arial Unicode MS"/>
+                <a:cs typeface="Arial Unicode MS"/>
+              </a:rPr>
+              <a:t>
 </a:t>
             </a:r>
           </a:p>
@@ -3065,41 +2526,19 @@
                 <a:spcPts val="0"/>
               </a:spcBef>
               <a:spcAft>
-                <a:spcPts val="133"/>
+                <a:spcPts val="175"/>
               </a:spcAft>
             </a:pPr>
             <a:r>
-              <a:rPr sz="800" lang="zh-TW" dirty="0">
-                <a:solidFill>
-                  <a:srgbClr val="000000"/>
-                </a:solidFill>
-                <a:latin typeface="Arial Unicode MS"/>
-                <a:ea typeface="Arial Unicode MS"/>
-                <a:cs typeface="Arial Unicode MS"/>
-              </a:rPr>
-              <a:t>時速二十的煞停距離是四點二公尺，加五公尺餘裕，所以感測器只要看得到</a:t>
-            </a:r>
-            <a:r>
-              <a:rPr sz="800" b="1" lang="zh-TW" dirty="0">
-                <a:solidFill>
-                  <a:srgbClr val="000000"/>
-                </a:solidFill>
-                <a:latin typeface="Arial Unicode MS"/>
-                <a:ea typeface="Arial Unicode MS"/>
-                <a:cs typeface="Arial Unicode MS"/>
-              </a:rPr>
-              <a:t>九公尺</a:t>
-            </a:r>
-            <a:r>
-              <a:rPr sz="800" lang="zh-TW" dirty="0">
-                <a:solidFill>
-                  <a:srgbClr val="000000"/>
-                </a:solidFill>
-                <a:latin typeface="Arial Unicode MS"/>
-                <a:ea typeface="Arial Unicode MS"/>
-                <a:cs typeface="Arial Unicode MS"/>
-              </a:rPr>
-              <a:t>就夠了。這個門檻很低，四顆的測距全部都過。
+              <a:rPr sz="1050" lang="zh-TW" dirty="0">
+                <a:solidFill>
+                  <a:srgbClr val="000000"/>
+                </a:solidFill>
+                <a:latin typeface="Arial Unicode MS"/>
+                <a:ea typeface="Arial Unicode MS"/>
+                <a:cs typeface="Arial Unicode MS"/>
+              </a:rPr>
+              <a:t>因為相機的誤差是隨距離平方長的，四十公尺還算近，誤差只有半公尺多。而且校園裡車速慢，半公尺的誤差不會害你來不及煞車。
 </a:t>
             </a:r>
           </a:p>
@@ -3109,41 +2548,41 @@
                 <a:spcPts val="0"/>
               </a:spcBef>
               <a:spcAft>
-                <a:spcPts val="133"/>
+                <a:spcPts val="175"/>
               </a:spcAft>
             </a:pPr>
             <a:r>
-              <a:rPr sz="800" lang="zh-TW" dirty="0">
-                <a:solidFill>
-                  <a:srgbClr val="000000"/>
-                </a:solidFill>
-                <a:latin typeface="Arial Unicode MS"/>
-                <a:ea typeface="Arial Unicode MS"/>
-                <a:cs typeface="Arial Unicode MS"/>
-              </a:rPr>
-              <a:t>所以卡住的不會是測距，而是</a:t>
-            </a:r>
-            <a:r>
-              <a:rPr sz="800" b="1" lang="zh-TW" dirty="0">
-                <a:solidFill>
-                  <a:srgbClr val="000000"/>
-                </a:solidFill>
-                <a:latin typeface="Arial Unicode MS"/>
-                <a:ea typeface="Arial Unicode MS"/>
-                <a:cs typeface="Arial Unicode MS"/>
-              </a:rPr>
-              <a:t>點數</a:t>
-            </a:r>
-            <a:r>
-              <a:rPr sz="800" lang="zh-TW" dirty="0">
-                <a:solidFill>
-                  <a:srgbClr val="000000"/>
-                </a:solidFill>
-                <a:latin typeface="Arial Unicode MS"/>
-                <a:ea typeface="Arial Unicode MS"/>
-                <a:cs typeface="Arial Unicode MS"/>
-              </a:rPr>
-              <a:t>。
+              <a:rPr sz="1050" lang="zh-TW" dirty="0">
+                <a:solidFill>
+                  <a:srgbClr val="000000"/>
+                </a:solidFill>
+                <a:latin typeface="Arial Unicode MS"/>
+                <a:ea typeface="Arial Unicode MS"/>
+                <a:cs typeface="Arial Unicode MS"/>
+              </a:rPr>
+              <a:t>所以這一題的結論是：</a:t>
+            </a:r>
+            <a:r>
+              <a:rPr sz="1050" b="1" lang="zh-TW" dirty="0">
+                <a:solidFill>
+                  <a:srgbClr val="000000"/>
+                </a:solidFill>
+                <a:latin typeface="Arial Unicode MS"/>
+                <a:ea typeface="Arial Unicode MS"/>
+                <a:cs typeface="Arial Unicode MS"/>
+              </a:rPr>
+              <a:t>在慢速、近距離的場合，便宜的相機就很夠用。</a:t>
+            </a:r>
+            <a:r>
+              <a:rPr sz="1050" lang="zh-TW" dirty="0">
+                <a:solidFill>
+                  <a:srgbClr val="000000"/>
+                </a:solidFill>
+                <a:latin typeface="Arial Unicode MS"/>
+                <a:ea typeface="Arial Unicode MS"/>
+                <a:cs typeface="Arial Unicode MS"/>
+              </a:rPr>
+              <a:t>不是愈貴愈好，是看你要在哪裡跑。
 </a:t>
             </a:r>
           </a:p>
@@ -3153,165 +2592,11 @@
                 <a:spcPts val="0"/>
               </a:spcBef>
               <a:spcAft>
-                <a:spcPts val="133"/>
+                <a:spcPts val="175"/>
               </a:spcAft>
             </a:pPr>
             <a:r>
-              <a:rPr sz="800" lang="zh-TW" dirty="0">
-                <a:solidFill>
-                  <a:srgbClr val="000000"/>
-                </a:solidFill>
-                <a:latin typeface="Arial Unicode MS"/>
-                <a:ea typeface="Arial Unicode MS"/>
-                <a:cs typeface="Arial Unicode MS"/>
-              </a:rPr>
-              <a:t>AT128P 在四十公尺的行人身上有八十四個點，過。相機的估距誤差在四十公尺是正負零點五八公尺，也過。
-</a:t>
-            </a:r>
-          </a:p>
-          <a:p>
-            <a:pPr algn="l">
-              <a:spcBef>
-                <a:spcPts val="0"/>
-              </a:spcBef>
-              <a:spcAft>
-                <a:spcPts val="133"/>
-              </a:spcAft>
-            </a:pPr>
-            <a:r>
-              <a:rPr sz="800" lang="zh-TW" dirty="0">
-                <a:solidFill>
-                  <a:srgbClr val="000000"/>
-                </a:solidFill>
-                <a:latin typeface="Arial Unicode MS"/>
-                <a:ea typeface="Arial Unicode MS"/>
-                <a:cs typeface="Arial Unicode MS"/>
-              </a:rPr>
-              <a:t>OS1 只有六個點，不夠。LD-16 只有一個點，更不夠。
-</a:t>
-            </a:r>
-          </a:p>
-          <a:p>
-            <a:pPr algn="l">
-              <a:spcBef>
-                <a:spcPts val="0"/>
-              </a:spcBef>
-              <a:spcAft>
-                <a:spcPts val="133"/>
-              </a:spcAft>
-            </a:pPr>
-            <a:r>
-              <a:rPr sz="800" lang="zh-TW" dirty="0">
-                <a:solidFill>
-                  <a:srgbClr val="000000"/>
-                </a:solidFill>
-                <a:latin typeface="Arial Unicode MS"/>
-                <a:ea typeface="Arial Unicode MS"/>
-                <a:cs typeface="Arial Unicode MS"/>
-              </a:rPr>
-              <a:t>現在我要各位想一題：</a:t>
-            </a:r>
-            <a:r>
-              <a:rPr sz="800" b="1" lang="zh-TW" dirty="0">
-                <a:solidFill>
-                  <a:srgbClr val="000000"/>
-                </a:solidFill>
-                <a:latin typeface="Arial Unicode MS"/>
-                <a:ea typeface="Arial Unicode MS"/>
-                <a:cs typeface="Arial Unicode MS"/>
-              </a:rPr>
-              <a:t>為什麼相機在這個情境反而夠用？</a:t>
-            </a:r>
-            <a:r>
-              <a:rPr sz="800" lang="zh-TW" dirty="0">
-                <a:solidFill>
-                  <a:srgbClr val="000000"/>
-                </a:solidFill>
-                <a:latin typeface="Arial Unicode MS"/>
-                <a:ea typeface="Arial Unicode MS"/>
-                <a:cs typeface="Arial Unicode MS"/>
-              </a:rPr>
-              <a:t>
-</a:t>
-            </a:r>
-          </a:p>
-          <a:p>
-            <a:pPr algn="l">
-              <a:spcBef>
-                <a:spcPts val="0"/>
-              </a:spcBef>
-              <a:spcAft>
-                <a:spcPts val="133"/>
-              </a:spcAft>
-            </a:pPr>
-            <a:r>
-              <a:rPr sz="800" lang="zh-TW" dirty="0">
-                <a:solidFill>
-                  <a:srgbClr val="000000"/>
-                </a:solidFill>
-                <a:latin typeface="Arial Unicode MS"/>
-                <a:ea typeface="Arial Unicode MS"/>
-                <a:cs typeface="Arial Unicode MS"/>
-              </a:rPr>
-              <a:t>因為相機的誤差是隨距離平方長的，四十公尺還算近，誤差只有半公尺多。而且校園裡車速慢，半公尺的誤差不會害你來不及煞車。
-</a:t>
-            </a:r>
-          </a:p>
-          <a:p>
-            <a:pPr algn="l">
-              <a:spcBef>
-                <a:spcPts val="0"/>
-              </a:spcBef>
-              <a:spcAft>
-                <a:spcPts val="133"/>
-              </a:spcAft>
-            </a:pPr>
-            <a:r>
-              <a:rPr sz="800" lang="zh-TW" dirty="0">
-                <a:solidFill>
-                  <a:srgbClr val="000000"/>
-                </a:solidFill>
-                <a:latin typeface="Arial Unicode MS"/>
-                <a:ea typeface="Arial Unicode MS"/>
-                <a:cs typeface="Arial Unicode MS"/>
-              </a:rPr>
-              <a:t>所以這一題的結論是：</a:t>
-            </a:r>
-            <a:r>
-              <a:rPr sz="800" b="1" lang="zh-TW" dirty="0">
-                <a:solidFill>
-                  <a:srgbClr val="000000"/>
-                </a:solidFill>
-                <a:latin typeface="Arial Unicode MS"/>
-                <a:ea typeface="Arial Unicode MS"/>
-                <a:cs typeface="Arial Unicode MS"/>
-              </a:rPr>
-              <a:t>在慢速、近距離的場合，便宜的相機就很夠用。</a:t>
-            </a:r>
-            <a:r>
-              <a:rPr sz="800" lang="zh-TW" dirty="0">
-                <a:solidFill>
-                  <a:srgbClr val="000000"/>
-                </a:solidFill>
-                <a:latin typeface="Arial Unicode MS"/>
-                <a:ea typeface="Arial Unicode MS"/>
-                <a:cs typeface="Arial Unicode MS"/>
-              </a:rPr>
-              <a:t>不是愈貴愈好，是看你要在哪裡跑。
-</a:t>
-            </a:r>
-          </a:p>
-          <a:p>
-            <a:pPr algn="l">
-              <a:spcBef>
-                <a:spcPts val="0"/>
-              </a:spcBef>
-              <a:spcAft>
-                <a:spcPts val="133"/>
-              </a:spcAft>
-            </a:pPr>
-            <a:r>
-              <a:rPr sz="800" lang="zh-TW" dirty="0">
+              <a:rPr sz="1050" lang="zh-TW" dirty="0">
                 <a:solidFill>
                   <a:srgbClr val="000000"/>
                 </a:solidFill>
@@ -3428,30 +2713,19 @@
                 <a:spcPts val="0"/>
               </a:spcBef>
               <a:spcAft>
-                <a:spcPts val="133"/>
+                <a:spcPts val="142"/>
               </a:spcAft>
             </a:pPr>
             <a:r>
-              <a:rPr sz="800" b="1" lang="zh-TW" dirty="0">
-                <a:solidFill>
-                  <a:srgbClr val="000000"/>
-                </a:solidFill>
-                <a:latin typeface="Arial Unicode MS"/>
-                <a:ea typeface="Arial Unicode MS"/>
-                <a:cs typeface="Arial Unicode MS"/>
-              </a:rPr>
-              <a:t>▍這一張要做什麼</a:t>
-            </a:r>
-            <a:r>
-              <a:rPr sz="800" lang="zh-TW" dirty="0">
-                <a:solidFill>
-                  <a:srgbClr val="000000"/>
-                </a:solidFill>
-                <a:latin typeface="Arial Unicode MS"/>
-                <a:ea typeface="Arial Unicode MS"/>
-                <a:cs typeface="Arial Unicode MS"/>
-              </a:rPr>
-              <a:t>
+              <a:rPr sz="850" lang="zh-TW" dirty="0">
+                <a:solidFill>
+                  <a:srgbClr val="000000"/>
+                </a:solidFill>
+                <a:latin typeface="Arial Unicode MS"/>
+                <a:ea typeface="Arial Unicode MS"/>
+                <a:cs typeface="Arial Unicode MS"/>
+              </a:rPr>
+              <a:t>第二題，十分鐘。換情境，河內尖峰，時速四十，要在四十公尺外認出機車。
 </a:t>
             </a:r>
           </a:p>
@@ -3461,19 +2735,19 @@
                 <a:spcPts val="0"/>
               </a:spcBef>
               <a:spcAft>
-                <a:spcPts val="133"/>
+                <a:spcPts val="142"/>
               </a:spcAft>
             </a:pPr>
             <a:r>
-              <a:rPr sz="800" lang="zh-TW" dirty="0">
-                <a:solidFill>
-                  <a:srgbClr val="000000"/>
-                </a:solidFill>
-                <a:latin typeface="Arial Unicode MS"/>
-                <a:ea typeface="Arial Unicode MS"/>
-                <a:cs typeface="Arial Unicode MS"/>
-              </a:rPr>
-              <a:t>第二題：河內尖峰，時速 40。這一題會出現翻盤，是今天的亮點。
+              <a:rPr sz="850" lang="zh-TW" dirty="0">
+                <a:solidFill>
+                  <a:srgbClr val="000000"/>
+                </a:solidFill>
+                <a:latin typeface="Arial Unicode MS"/>
+                <a:ea typeface="Arial Unicode MS"/>
+                <a:cs typeface="Arial Unicode MS"/>
+              </a:rPr>
+              <a:t>一樣四個型號跑一次。
 </a:t>
             </a:r>
           </a:p>
@@ -3483,30 +2757,19 @@
                 <a:spcPts val="0"/>
               </a:spcBef>
               <a:spcAft>
-                <a:spcPts val="133"/>
+                <a:spcPts val="142"/>
               </a:spcAft>
             </a:pPr>
             <a:r>
-              <a:rPr sz="800" b="1" lang="zh-TW" dirty="0">
-                <a:solidFill>
-                  <a:srgbClr val="000000"/>
-                </a:solidFill>
-                <a:latin typeface="Arial Unicode MS"/>
-                <a:ea typeface="Arial Unicode MS"/>
-                <a:cs typeface="Arial Unicode MS"/>
-              </a:rPr>
-              <a:t>▍畫面上圈這裡</a:t>
-            </a:r>
-            <a:r>
-              <a:rPr sz="800" lang="zh-TW" dirty="0">
-                <a:solidFill>
-                  <a:srgbClr val="000000"/>
-                </a:solidFill>
-                <a:latin typeface="Arial Unicode MS"/>
-                <a:ea typeface="Arial Unicode MS"/>
-                <a:cs typeface="Arial Unicode MS"/>
-              </a:rPr>
-              <a:t>
+              <a:rPr sz="850" lang="zh-TW" dirty="0">
+                <a:solidFill>
+                  <a:srgbClr val="000000"/>
+                </a:solidFill>
+                <a:latin typeface="Arial Unicode MS"/>
+                <a:ea typeface="Arial Unicode MS"/>
+                <a:cs typeface="Arial Unicode MS"/>
+              </a:rPr>
+              <a:t>這一題有一格特別重要，我先講。
 </a:t>
             </a:r>
           </a:p>
@@ -3516,19 +2779,30 @@
                 <a:spcPts val="0"/>
               </a:spcBef>
               <a:spcAft>
-                <a:spcPts val="133"/>
+                <a:spcPts val="142"/>
               </a:spcAft>
             </a:pPr>
             <a:r>
-              <a:rPr sz="800" lang="zh-TW" dirty="0">
-                <a:solidFill>
-                  <a:srgbClr val="000000"/>
-                </a:solidFill>
-                <a:latin typeface="Arial Unicode MS"/>
-                <a:ea typeface="Arial Unicode MS"/>
-                <a:cs typeface="Arial Unicode MS"/>
-              </a:rPr>
-              <a:t>圈 OS1 那一列的點數判定。等他們卡住之後，再提示規格表上那行「可設定」。
+              <a:rPr sz="850" b="1" lang="zh-TW" dirty="0">
+                <a:solidFill>
+                  <a:srgbClr val="000000"/>
+                </a:solidFill>
+                <a:latin typeface="Arial Unicode MS"/>
+                <a:ea typeface="Arial Unicode MS"/>
+                <a:cs typeface="Arial Unicode MS"/>
+              </a:rPr>
+              <a:t>OS1 在這個情境下，是「不夠」，而且只差一點點。</a:t>
+            </a:r>
+            <a:r>
+              <a:rPr sz="850" lang="zh-TW" dirty="0">
+                <a:solidFill>
+                  <a:srgbClr val="000000"/>
+                </a:solidFill>
+                <a:latin typeface="Arial Unicode MS"/>
+                <a:ea typeface="Arial Unicode MS"/>
+                <a:cs typeface="Arial Unicode MS"/>
+              </a:rPr>
+              <a:t>四十公尺的機車身上九個點，門檻是十個。差一個點。
 </a:t>
             </a:r>
           </a:p>
@@ -3538,30 +2812,19 @@
                 <a:spcPts val="0"/>
               </a:spcBef>
               <a:spcAft>
-                <a:spcPts val="133"/>
+                <a:spcPts val="142"/>
               </a:spcAft>
             </a:pPr>
             <a:r>
-              <a:rPr sz="800" b="1" lang="zh-TW" dirty="0">
-                <a:solidFill>
-                  <a:srgbClr val="000000"/>
-                </a:solidFill>
-                <a:latin typeface="Arial Unicode MS"/>
-                <a:ea typeface="Arial Unicode MS"/>
-                <a:cs typeface="Arial Unicode MS"/>
-              </a:rPr>
-              <a:t>▍以下照著唸</a:t>
-            </a:r>
-            <a:r>
-              <a:rPr sz="800" lang="zh-TW" dirty="0">
-                <a:solidFill>
-                  <a:srgbClr val="000000"/>
-                </a:solidFill>
-                <a:latin typeface="Arial Unicode MS"/>
-                <a:ea typeface="Arial Unicode MS"/>
-                <a:cs typeface="Arial Unicode MS"/>
-              </a:rPr>
-              <a:t>
+              <a:rPr sz="850" lang="zh-TW" dirty="0">
+                <a:solidFill>
+                  <a:srgbClr val="000000"/>
+                </a:solidFill>
+                <a:latin typeface="Arial Unicode MS"/>
+                <a:ea typeface="Arial Unicode MS"/>
+                <a:cs typeface="Arial Unicode MS"/>
+              </a:rPr>
+              <a:t>現在請各位做一件事。在試算結果的上方，有一列小小的選單，寫著「這一顆的兩個數字在規格表上是可以設定的」。
 </a:t>
             </a:r>
           </a:p>
@@ -3571,19 +2834,63 @@
                 <a:spcPts val="0"/>
               </a:spcBef>
               <a:spcAft>
-                <a:spcPts val="133"/>
+                <a:spcPts val="142"/>
               </a:spcAft>
             </a:pPr>
             <a:r>
-              <a:rPr sz="800" lang="zh-TW" dirty="0">
-                <a:solidFill>
-                  <a:srgbClr val="000000"/>
-                </a:solidFill>
-                <a:latin typeface="Arial Unicode MS"/>
-                <a:ea typeface="Arial Unicode MS"/>
-                <a:cs typeface="Arial Unicode MS"/>
-              </a:rPr>
-              <a:t>第二題，十分鐘。換情境，河內尖峰，時速四十，要在四十公尺外認出機車。
+              <a:rPr sz="850" lang="zh-TW" dirty="0">
+                <a:solidFill>
+                  <a:srgbClr val="000000"/>
+                </a:solidFill>
+                <a:latin typeface="Arial Unicode MS"/>
+                <a:ea typeface="Arial Unicode MS"/>
+                <a:cs typeface="Arial Unicode MS"/>
+              </a:rPr>
+              <a:t>請把左邊那個從 </a:t>
+            </a:r>
+            <a:r>
+              <a:rPr sz="850" b="1" lang="zh-TW" dirty="0">
+                <a:solidFill>
+                  <a:srgbClr val="000000"/>
+                </a:solidFill>
+                <a:latin typeface="Arial Unicode MS"/>
+                <a:ea typeface="Arial Unicode MS"/>
+                <a:cs typeface="Arial Unicode MS"/>
+              </a:rPr>
+              <a:t>1024 點／圈</a:t>
+            </a:r>
+            <a:r>
+              <a:rPr sz="850" lang="zh-TW" dirty="0">
+                <a:solidFill>
+                  <a:srgbClr val="000000"/>
+                </a:solidFill>
+                <a:latin typeface="Arial Unicode MS"/>
+                <a:ea typeface="Arial Unicode MS"/>
+                <a:cs typeface="Arial Unicode MS"/>
+              </a:rPr>
+              <a:t> 改成 </a:t>
+            </a:r>
+            <a:r>
+              <a:rPr sz="850" b="1" lang="zh-TW" dirty="0">
+                <a:solidFill>
+                  <a:srgbClr val="000000"/>
+                </a:solidFill>
+                <a:latin typeface="Arial Unicode MS"/>
+                <a:ea typeface="Arial Unicode MS"/>
+                <a:cs typeface="Arial Unicode MS"/>
+              </a:rPr>
+              <a:t>2048 點／圈</a:t>
+            </a:r>
+            <a:r>
+              <a:rPr sz="850" lang="zh-TW" dirty="0">
+                <a:solidFill>
+                  <a:srgbClr val="000000"/>
+                </a:solidFill>
+                <a:latin typeface="Arial Unicode MS"/>
+                <a:ea typeface="Arial Unicode MS"/>
+                <a:cs typeface="Arial Unicode MS"/>
+              </a:rPr>
+              <a:t>。
 </a:t>
             </a:r>
           </a:p>
@@ -3593,19 +2900,19 @@
                 <a:spcPts val="0"/>
               </a:spcBef>
               <a:spcAft>
-                <a:spcPts val="133"/>
+                <a:spcPts val="142"/>
               </a:spcAft>
             </a:pPr>
             <a:r>
-              <a:rPr sz="800" lang="zh-TW" dirty="0">
-                <a:solidFill>
-                  <a:srgbClr val="000000"/>
-                </a:solidFill>
-                <a:latin typeface="Arial Unicode MS"/>
-                <a:ea typeface="Arial Unicode MS"/>
-                <a:cs typeface="Arial Unicode MS"/>
-              </a:rPr>
-              <a:t>一樣四個型號跑一次。
+              <a:rPr sz="850" lang="zh-TW" dirty="0">
+                <a:solidFill>
+                  <a:srgbClr val="000000"/>
+                </a:solidFill>
+                <a:latin typeface="Arial Unicode MS"/>
+                <a:ea typeface="Arial Unicode MS"/>
+                <a:cs typeface="Arial Unicode MS"/>
+              </a:rPr>
+              <a:t>改完之後看點數。
 </a:t>
             </a:r>
           </a:p>
@@ -3615,19 +2922,41 @@
                 <a:spcPts val="0"/>
               </a:spcBef>
               <a:spcAft>
-                <a:spcPts val="133"/>
+                <a:spcPts val="142"/>
               </a:spcAft>
             </a:pPr>
             <a:r>
-              <a:rPr sz="800" lang="zh-TW" dirty="0">
-                <a:solidFill>
-                  <a:srgbClr val="000000"/>
-                </a:solidFill>
-                <a:latin typeface="Arial Unicode MS"/>
-                <a:ea typeface="Arial Unicode MS"/>
-                <a:cs typeface="Arial Unicode MS"/>
-              </a:rPr>
-              <a:t>這一題有一格特別重要，我先講。
+              <a:rPr sz="850" lang="zh-TW" dirty="0">
+                <a:solidFill>
+                  <a:srgbClr val="000000"/>
+                </a:solidFill>
+                <a:latin typeface="Arial Unicode MS"/>
+                <a:ea typeface="Arial Unicode MS"/>
+                <a:cs typeface="Arial Unicode MS"/>
+              </a:rPr>
+              <a:t>九個點變成</a:t>
+            </a:r>
+            <a:r>
+              <a:rPr sz="850" b="1" lang="zh-TW" dirty="0">
+                <a:solidFill>
+                  <a:srgbClr val="000000"/>
+                </a:solidFill>
+                <a:latin typeface="Arial Unicode MS"/>
+                <a:ea typeface="Arial Unicode MS"/>
+                <a:cs typeface="Arial Unicode MS"/>
+              </a:rPr>
+              <a:t>十八個點</a:t>
+            </a:r>
+            <a:r>
+              <a:rPr sz="850" lang="zh-TW" dirty="0">
+                <a:solidFill>
+                  <a:srgbClr val="000000"/>
+                </a:solidFill>
+                <a:latin typeface="Arial Unicode MS"/>
+                <a:ea typeface="Arial Unicode MS"/>
+                <a:cs typeface="Arial Unicode MS"/>
+              </a:rPr>
+              <a:t>，判定從「不夠」變成「夠」。
 </a:t>
             </a:r>
           </a:p>
@@ -3637,30 +2966,63 @@
                 <a:spcPts val="0"/>
               </a:spcBef>
               <a:spcAft>
-                <a:spcPts val="133"/>
+                <a:spcPts val="142"/>
               </a:spcAft>
             </a:pPr>
             <a:r>
-              <a:rPr sz="800" b="1" lang="zh-TW" dirty="0">
-                <a:solidFill>
-                  <a:srgbClr val="000000"/>
-                </a:solidFill>
-                <a:latin typeface="Arial Unicode MS"/>
-                <a:ea typeface="Arial Unicode MS"/>
-                <a:cs typeface="Arial Unicode MS"/>
-              </a:rPr>
-              <a:t>OS1 在這個情境下，是「不夠」，而且只差一點點。</a:t>
-            </a:r>
-            <a:r>
-              <a:rPr sz="800" lang="zh-TW" dirty="0">
-                <a:solidFill>
-                  <a:srgbClr val="000000"/>
-                </a:solidFill>
-                <a:latin typeface="Arial Unicode MS"/>
-                <a:ea typeface="Arial Unicode MS"/>
-                <a:cs typeface="Arial Unicode MS"/>
-              </a:rPr>
-              <a:t>四十公尺的機車身上九個點，門檻是十個。差一個點。
+              <a:rPr sz="850" lang="zh-TW" dirty="0">
+                <a:solidFill>
+                  <a:srgbClr val="000000"/>
+                </a:solidFill>
+                <a:latin typeface="Arial Unicode MS"/>
+                <a:ea typeface="Arial Unicode MS"/>
+                <a:cs typeface="Arial Unicode MS"/>
+              </a:rPr>
+              <a:t>這裡講清楚一件事，免得各位找錯地方：</a:t>
+            </a:r>
+            <a:r>
+              <a:rPr sz="850" b="1" lang="zh-TW" dirty="0">
+                <a:solidFill>
+                  <a:srgbClr val="000000"/>
+                </a:solidFill>
+                <a:latin typeface="Arial Unicode MS"/>
+                <a:ea typeface="Arial Unicode MS"/>
+                <a:cs typeface="Arial Unicode MS"/>
+              </a:rPr>
+              <a:t>右邊的小工具②也可以把每圈點數拉到 2048，也會看到九個點變十八個——可是那一區只是示範，不會改判定。</a:t>
+            </a:r>
+            <a:r>
+              <a:rPr sz="850" lang="zh-TW" dirty="0">
+                <a:solidFill>
+                  <a:srgbClr val="000000"/>
+                </a:solidFill>
+                <a:latin typeface="Arial Unicode MS"/>
+                <a:ea typeface="Arial Unicode MS"/>
+                <a:cs typeface="Arial Unicode MS"/>
+              </a:rPr>
+              <a:t>作業第二題要的是判定，所以一定要在</a:t>
+            </a:r>
+            <a:r>
+              <a:rPr sz="850" b="1" lang="zh-TW" dirty="0">
+                <a:solidFill>
+                  <a:srgbClr val="000000"/>
+                </a:solidFill>
+                <a:latin typeface="Arial Unicode MS"/>
+                <a:ea typeface="Arial Unicode MS"/>
+                <a:cs typeface="Arial Unicode MS"/>
+              </a:rPr>
+              <a:t>試算這一邊</a:t>
+            </a:r>
+            <a:r>
+              <a:rPr sz="850" lang="zh-TW" dirty="0">
+                <a:solidFill>
+                  <a:srgbClr val="000000"/>
+                </a:solidFill>
+                <a:latin typeface="Arial Unicode MS"/>
+                <a:ea typeface="Arial Unicode MS"/>
+                <a:cs typeface="Arial Unicode MS"/>
+              </a:rPr>
+              <a:t>改。改完之後，判定底下那顆按鈕會自己變成「記進作業第二題」，按下去就填好了；十二格那一題不會被動到，因為那一題問的是預設模式。
 </a:t>
             </a:r>
           </a:p>
@@ -3670,19 +3032,41 @@
                 <a:spcPts val="0"/>
               </a:spcBef>
               <a:spcAft>
-                <a:spcPts val="133"/>
+                <a:spcPts val="142"/>
               </a:spcAft>
             </a:pPr>
             <a:r>
-              <a:rPr sz="800" lang="zh-TW" dirty="0">
-                <a:solidFill>
-                  <a:srgbClr val="000000"/>
-                </a:solidFill>
-                <a:latin typeface="Arial Unicode MS"/>
-                <a:ea typeface="Arial Unicode MS"/>
-                <a:cs typeface="Arial Unicode MS"/>
-              </a:rPr>
-              <a:t>現在請各位做一件事。在試算結果的上方，有一列小小的選單，寫著「這一顆的兩個數字在規格表上是可以設定的」。
+              <a:rPr sz="850" lang="zh-TW" dirty="0">
+                <a:solidFill>
+                  <a:srgbClr val="000000"/>
+                </a:solidFill>
+                <a:latin typeface="Arial Unicode MS"/>
+                <a:ea typeface="Arial Unicode MS"/>
+                <a:cs typeface="Arial Unicode MS"/>
+              </a:rPr>
+              <a:t>大家停一下想想這件事。</a:t>
+            </a:r>
+            <a:r>
+              <a:rPr sz="850" b="1" lang="zh-TW" dirty="0">
+                <a:solidFill>
+                  <a:srgbClr val="000000"/>
+                </a:solidFill>
+                <a:latin typeface="Arial Unicode MS"/>
+                <a:ea typeface="Arial Unicode MS"/>
+                <a:cs typeface="Arial Unicode MS"/>
+              </a:rPr>
+              <a:t>同一顆光達，沒有多花一毛錢，只是換了一個設定，結論就翻過來了。</a:t>
+            </a:r>
+            <a:r>
+              <a:rPr sz="850" lang="zh-TW" dirty="0">
+                <a:solidFill>
+                  <a:srgbClr val="000000"/>
+                </a:solidFill>
+                <a:latin typeface="Arial Unicode MS"/>
+                <a:ea typeface="Arial Unicode MS"/>
+                <a:cs typeface="Arial Unicode MS"/>
+              </a:rPr>
+              <a:t>
 </a:t>
             </a:r>
           </a:p>
@@ -3692,63 +3076,41 @@
                 <a:spcPts val="0"/>
               </a:spcBef>
               <a:spcAft>
-                <a:spcPts val="133"/>
+                <a:spcPts val="142"/>
               </a:spcAft>
             </a:pPr>
             <a:r>
-              <a:rPr sz="800" lang="zh-TW" dirty="0">
-                <a:solidFill>
-                  <a:srgbClr val="000000"/>
-                </a:solidFill>
-                <a:latin typeface="Arial Unicode MS"/>
-                <a:ea typeface="Arial Unicode MS"/>
-                <a:cs typeface="Arial Unicode MS"/>
-              </a:rPr>
-              <a:t>請把左邊那個從 </a:t>
-            </a:r>
-            <a:r>
-              <a:rPr sz="800" b="1" lang="zh-TW" dirty="0">
-                <a:solidFill>
-                  <a:srgbClr val="000000"/>
-                </a:solidFill>
-                <a:latin typeface="Arial Unicode MS"/>
-                <a:ea typeface="Arial Unicode MS"/>
-                <a:cs typeface="Arial Unicode MS"/>
-              </a:rPr>
-              <a:t>1024 點／圈</a:t>
-            </a:r>
-            <a:r>
-              <a:rPr sz="800" lang="zh-TW" dirty="0">
-                <a:solidFill>
-                  <a:srgbClr val="000000"/>
-                </a:solidFill>
-                <a:latin typeface="Arial Unicode MS"/>
-                <a:ea typeface="Arial Unicode MS"/>
-                <a:cs typeface="Arial Unicode MS"/>
-              </a:rPr>
-              <a:t> 改成 </a:t>
-            </a:r>
-            <a:r>
-              <a:rPr sz="800" b="1" lang="zh-TW" dirty="0">
-                <a:solidFill>
-                  <a:srgbClr val="000000"/>
-                </a:solidFill>
-                <a:latin typeface="Arial Unicode MS"/>
-                <a:ea typeface="Arial Unicode MS"/>
-                <a:cs typeface="Arial Unicode MS"/>
-              </a:rPr>
-              <a:t>2048 點／圈</a:t>
-            </a:r>
-            <a:r>
-              <a:rPr sz="800" lang="zh-TW" dirty="0">
-                <a:solidFill>
-                  <a:srgbClr val="000000"/>
-                </a:solidFill>
-                <a:latin typeface="Arial Unicode MS"/>
-                <a:ea typeface="Arial Unicode MS"/>
-                <a:cs typeface="Arial Unicode MS"/>
-              </a:rPr>
-              <a:t>。
+              <a:rPr sz="850" lang="zh-TW" dirty="0">
+                <a:solidFill>
+                  <a:srgbClr val="000000"/>
+                </a:solidFill>
+                <a:latin typeface="Arial Unicode MS"/>
+                <a:ea typeface="Arial Unicode MS"/>
+                <a:cs typeface="Arial Unicode MS"/>
+              </a:rPr>
+              <a:t>這就是上午我講「configurable 這個字很重要」的意思。規格表上有些數字是</a:t>
+            </a:r>
+            <a:r>
+              <a:rPr sz="850" b="1" lang="zh-TW" dirty="0">
+                <a:solidFill>
+                  <a:srgbClr val="000000"/>
+                </a:solidFill>
+                <a:latin typeface="Arial Unicode MS"/>
+                <a:ea typeface="Arial Unicode MS"/>
+                <a:cs typeface="Arial Unicode MS"/>
+              </a:rPr>
+              <a:t>模式</a:t>
+            </a:r>
+            <a:r>
+              <a:rPr sz="850" lang="zh-TW" dirty="0">
+                <a:solidFill>
+                  <a:srgbClr val="000000"/>
+                </a:solidFill>
+                <a:latin typeface="Arial Unicode MS"/>
+                <a:ea typeface="Arial Unicode MS"/>
+                <a:cs typeface="Arial Unicode MS"/>
+              </a:rPr>
+              <a:t>，不是固定值。你如果只看廠商標在封面上的那一組數字，就會把一顆其實夠用的感測器排除掉。
 </a:t>
             </a:r>
           </a:p>
@@ -3758,19 +3120,41 @@
                 <a:spcPts val="0"/>
               </a:spcBef>
               <a:spcAft>
-                <a:spcPts val="133"/>
+                <a:spcPts val="142"/>
               </a:spcAft>
             </a:pPr>
             <a:r>
-              <a:rPr sz="800" lang="zh-TW" dirty="0">
-                <a:solidFill>
-                  <a:srgbClr val="000000"/>
-                </a:solidFill>
-                <a:latin typeface="Arial Unicode MS"/>
-                <a:ea typeface="Arial Unicode MS"/>
-                <a:cs typeface="Arial Unicode MS"/>
-              </a:rPr>
-              <a:t>改完之後看點數。
+              <a:rPr sz="850" lang="zh-TW" dirty="0">
+                <a:solidFill>
+                  <a:srgbClr val="000000"/>
+                </a:solidFill>
+                <a:latin typeface="Arial Unicode MS"/>
+                <a:ea typeface="Arial Unicode MS"/>
+                <a:cs typeface="Arial Unicode MS"/>
+              </a:rPr>
+              <a:t>不過天下沒有白吃的午餐，所以作業分頁第二題還要你寫：</a:t>
+            </a:r>
+            <a:r>
+              <a:rPr sz="850" b="1" lang="zh-TW" dirty="0">
+                <a:solidFill>
+                  <a:srgbClr val="000000"/>
+                </a:solidFill>
+                <a:latin typeface="Arial Unicode MS"/>
+                <a:ea typeface="Arial Unicode MS"/>
+                <a:cs typeface="Arial Unicode MS"/>
+              </a:rPr>
+              <a:t>換這個模式要付什麼代價？</a:t>
+            </a:r>
+            <a:r>
+              <a:rPr sz="850" lang="zh-TW" dirty="0">
+                <a:solidFill>
+                  <a:srgbClr val="000000"/>
+                </a:solidFill>
+                <a:latin typeface="Arial Unicode MS"/>
+                <a:ea typeface="Arial Unicode MS"/>
+                <a:cs typeface="Arial Unicode MS"/>
+              </a:rPr>
+              <a:t>
 </a:t>
             </a:r>
           </a:p>
@@ -3780,41 +3164,19 @@
                 <a:spcPts val="0"/>
               </a:spcBef>
               <a:spcAft>
-                <a:spcPts val="133"/>
+                <a:spcPts val="142"/>
               </a:spcAft>
             </a:pPr>
             <a:r>
-              <a:rPr sz="800" lang="zh-TW" dirty="0">
-                <a:solidFill>
-                  <a:srgbClr val="000000"/>
-                </a:solidFill>
-                <a:latin typeface="Arial Unicode MS"/>
-                <a:ea typeface="Arial Unicode MS"/>
-                <a:cs typeface="Arial Unicode MS"/>
-              </a:rPr>
-              <a:t>九個點變成</a:t>
-            </a:r>
-            <a:r>
-              <a:rPr sz="800" b="1" lang="zh-TW" dirty="0">
-                <a:solidFill>
-                  <a:srgbClr val="000000"/>
-                </a:solidFill>
-                <a:latin typeface="Arial Unicode MS"/>
-                <a:ea typeface="Arial Unicode MS"/>
-                <a:cs typeface="Arial Unicode MS"/>
-              </a:rPr>
-              <a:t>十八個點</a:t>
-            </a:r>
-            <a:r>
-              <a:rPr sz="800" lang="zh-TW" dirty="0">
-                <a:solidFill>
-                  <a:srgbClr val="000000"/>
-                </a:solidFill>
-                <a:latin typeface="Arial Unicode MS"/>
-                <a:ea typeface="Arial Unicode MS"/>
-                <a:cs typeface="Arial Unicode MS"/>
-              </a:rPr>
-              <a:t>，判定從「不夠」變成「夠」。
+              <a:rPr sz="850" lang="zh-TW" dirty="0">
+                <a:solidFill>
+                  <a:srgbClr val="000000"/>
+                </a:solidFill>
+                <a:latin typeface="Arial Unicode MS"/>
+                <a:ea typeface="Arial Unicode MS"/>
+                <a:cs typeface="Arial Unicode MS"/>
+              </a:rPr>
+              <a:t>想一想：每一圈的點數加倍，那每一秒送回來的資料量也加倍。車上那台電腦要算得完才行。而且如果你同時想提高轉速，點數又會被分掉。
 </a:t>
             </a:r>
           </a:p>
@@ -3824,231 +3186,11 @@
                 <a:spcPts val="0"/>
               </a:spcBef>
               <a:spcAft>
-                <a:spcPts val="133"/>
+                <a:spcPts val="142"/>
               </a:spcAft>
             </a:pPr>
             <a:r>
-              <a:rPr sz="800" lang="zh-TW" dirty="0">
-                <a:solidFill>
-                  <a:srgbClr val="000000"/>
-                </a:solidFill>
-                <a:latin typeface="Arial Unicode MS"/>
-                <a:ea typeface="Arial Unicode MS"/>
-                <a:cs typeface="Arial Unicode MS"/>
-              </a:rPr>
-              <a:t>這裡講清楚一件事，免得各位找錯地方：</a:t>
-            </a:r>
-            <a:r>
-              <a:rPr sz="800" b="1" lang="zh-TW" dirty="0">
-                <a:solidFill>
-                  <a:srgbClr val="000000"/>
-                </a:solidFill>
-                <a:latin typeface="Arial Unicode MS"/>
-                <a:ea typeface="Arial Unicode MS"/>
-                <a:cs typeface="Arial Unicode MS"/>
-              </a:rPr>
-              <a:t>右邊的小工具②也可以把每圈點數拉到 2048，也會看到九個點變十八個——可是那一區只是示範，不會改判定。</a:t>
-            </a:r>
-            <a:r>
-              <a:rPr sz="800" lang="zh-TW" dirty="0">
-                <a:solidFill>
-                  <a:srgbClr val="000000"/>
-                </a:solidFill>
-                <a:latin typeface="Arial Unicode MS"/>
-                <a:ea typeface="Arial Unicode MS"/>
-                <a:cs typeface="Arial Unicode MS"/>
-              </a:rPr>
-              <a:t>作業第二題要的是判定，所以一定要在</a:t>
-            </a:r>
-            <a:r>
-              <a:rPr sz="800" b="1" lang="zh-TW" dirty="0">
-                <a:solidFill>
-                  <a:srgbClr val="000000"/>
-                </a:solidFill>
-                <a:latin typeface="Arial Unicode MS"/>
-                <a:ea typeface="Arial Unicode MS"/>
-                <a:cs typeface="Arial Unicode MS"/>
-              </a:rPr>
-              <a:t>試算這一邊</a:t>
-            </a:r>
-            <a:r>
-              <a:rPr sz="800" lang="zh-TW" dirty="0">
-                <a:solidFill>
-                  <a:srgbClr val="000000"/>
-                </a:solidFill>
-                <a:latin typeface="Arial Unicode MS"/>
-                <a:ea typeface="Arial Unicode MS"/>
-                <a:cs typeface="Arial Unicode MS"/>
-              </a:rPr>
-              <a:t>改。改完之後，判定底下那顆按鈕會自己變成「記進作業第二題」，按下去就填好了；十二格那一題不會被動到，因為那一題問的是預設模式。
-</a:t>
-            </a:r>
-          </a:p>
-          <a:p>
-            <a:pPr algn="l">
-              <a:spcBef>
-                <a:spcPts val="0"/>
-              </a:spcBef>
-              <a:spcAft>
-                <a:spcPts val="133"/>
-              </a:spcAft>
-            </a:pPr>
-            <a:r>
-              <a:rPr sz="800" lang="zh-TW" dirty="0">
-                <a:solidFill>
-                  <a:srgbClr val="000000"/>
-                </a:solidFill>
-                <a:latin typeface="Arial Unicode MS"/>
-                <a:ea typeface="Arial Unicode MS"/>
-                <a:cs typeface="Arial Unicode MS"/>
-              </a:rPr>
-              <a:t>大家停一下想想這件事。</a:t>
-            </a:r>
-            <a:r>
-              <a:rPr sz="800" b="1" lang="zh-TW" dirty="0">
-                <a:solidFill>
-                  <a:srgbClr val="000000"/>
-                </a:solidFill>
-                <a:latin typeface="Arial Unicode MS"/>
-                <a:ea typeface="Arial Unicode MS"/>
-                <a:cs typeface="Arial Unicode MS"/>
-              </a:rPr>
-              <a:t>同一顆光達，沒有多花一毛錢，只是換了一個設定，結論就翻過來了。</a:t>
-            </a:r>
-            <a:r>
-              <a:rPr sz="800" lang="zh-TW" dirty="0">
-                <a:solidFill>
-                  <a:srgbClr val="000000"/>
-                </a:solidFill>
-                <a:latin typeface="Arial Unicode MS"/>
-                <a:ea typeface="Arial Unicode MS"/>
-                <a:cs typeface="Arial Unicode MS"/>
-              </a:rPr>
-              <a:t>
-</a:t>
-            </a:r>
-          </a:p>
-          <a:p>
-            <a:pPr algn="l">
-              <a:spcBef>
-                <a:spcPts val="0"/>
-              </a:spcBef>
-              <a:spcAft>
-                <a:spcPts val="133"/>
-              </a:spcAft>
-            </a:pPr>
-            <a:r>
-              <a:rPr sz="800" lang="zh-TW" dirty="0">
-                <a:solidFill>
-                  <a:srgbClr val="000000"/>
-                </a:solidFill>
-                <a:latin typeface="Arial Unicode MS"/>
-                <a:ea typeface="Arial Unicode MS"/>
-                <a:cs typeface="Arial Unicode MS"/>
-              </a:rPr>
-              <a:t>這就是上午我講「configurable 這個字很重要」的意思。規格表上有些數字是</a:t>
-            </a:r>
-            <a:r>
-              <a:rPr sz="800" b="1" lang="zh-TW" dirty="0">
-                <a:solidFill>
-                  <a:srgbClr val="000000"/>
-                </a:solidFill>
-                <a:latin typeface="Arial Unicode MS"/>
-                <a:ea typeface="Arial Unicode MS"/>
-                <a:cs typeface="Arial Unicode MS"/>
-              </a:rPr>
-              <a:t>模式</a:t>
-            </a:r>
-            <a:r>
-              <a:rPr sz="800" lang="zh-TW" dirty="0">
-                <a:solidFill>
-                  <a:srgbClr val="000000"/>
-                </a:solidFill>
-                <a:latin typeface="Arial Unicode MS"/>
-                <a:ea typeface="Arial Unicode MS"/>
-                <a:cs typeface="Arial Unicode MS"/>
-              </a:rPr>
-              <a:t>，不是固定值。你如果只看廠商標在封面上的那一組數字，就會把一顆其實夠用的感測器排除掉。
-</a:t>
-            </a:r>
-          </a:p>
-          <a:p>
-            <a:pPr algn="l">
-              <a:spcBef>
-                <a:spcPts val="0"/>
-              </a:spcBef>
-              <a:spcAft>
-                <a:spcPts val="133"/>
-              </a:spcAft>
-            </a:pPr>
-            <a:r>
-              <a:rPr sz="800" lang="zh-TW" dirty="0">
-                <a:solidFill>
-                  <a:srgbClr val="000000"/>
-                </a:solidFill>
-                <a:latin typeface="Arial Unicode MS"/>
-                <a:ea typeface="Arial Unicode MS"/>
-                <a:cs typeface="Arial Unicode MS"/>
-              </a:rPr>
-              <a:t>不過天下沒有白吃的午餐，所以作業分頁第二題還要你寫：</a:t>
-            </a:r>
-            <a:r>
-              <a:rPr sz="800" b="1" lang="zh-TW" dirty="0">
-                <a:solidFill>
-                  <a:srgbClr val="000000"/>
-                </a:solidFill>
-                <a:latin typeface="Arial Unicode MS"/>
-                <a:ea typeface="Arial Unicode MS"/>
-                <a:cs typeface="Arial Unicode MS"/>
-              </a:rPr>
-              <a:t>換這個模式要付什麼代價？</a:t>
-            </a:r>
-            <a:r>
-              <a:rPr sz="800" lang="zh-TW" dirty="0">
-                <a:solidFill>
-                  <a:srgbClr val="000000"/>
-                </a:solidFill>
-                <a:latin typeface="Arial Unicode MS"/>
-                <a:ea typeface="Arial Unicode MS"/>
-                <a:cs typeface="Arial Unicode MS"/>
-              </a:rPr>
-              <a:t>
-</a:t>
-            </a:r>
-          </a:p>
-          <a:p>
-            <a:pPr algn="l">
-              <a:spcBef>
-                <a:spcPts val="0"/>
-              </a:spcBef>
-              <a:spcAft>
-                <a:spcPts val="133"/>
-              </a:spcAft>
-            </a:pPr>
-            <a:r>
-              <a:rPr sz="800" lang="zh-TW" dirty="0">
-                <a:solidFill>
-                  <a:srgbClr val="000000"/>
-                </a:solidFill>
-                <a:latin typeface="Arial Unicode MS"/>
-                <a:ea typeface="Arial Unicode MS"/>
-                <a:cs typeface="Arial Unicode MS"/>
-              </a:rPr>
-              <a:t>想一想：每一圈的點數加倍，那每一秒送回來的資料量也加倍。車上那台電腦要算得完才行。而且如果你同時想提高轉速，點數又會被分掉。
-</a:t>
-            </a:r>
-          </a:p>
-          <a:p>
-            <a:pPr algn="l">
-              <a:spcBef>
-                <a:spcPts val="0"/>
-              </a:spcBef>
-              <a:spcAft>
-                <a:spcPts val="133"/>
-              </a:spcAft>
-            </a:pPr>
-            <a:r>
-              <a:rPr sz="800" lang="zh-TW" dirty="0">
+              <a:rPr sz="850" lang="zh-TW" dirty="0">
                 <a:solidFill>
                   <a:srgbClr val="000000"/>
                 </a:solidFill>
@@ -4165,30 +3307,19 @@
                 <a:spcPts val="0"/>
               </a:spcBef>
               <a:spcAft>
-                <a:spcPts val="133"/>
+                <a:spcPts val="158"/>
               </a:spcAft>
             </a:pPr>
             <a:r>
-              <a:rPr sz="800" b="1" lang="zh-TW" dirty="0">
-                <a:solidFill>
-                  <a:srgbClr val="000000"/>
-                </a:solidFill>
-                <a:latin typeface="Arial Unicode MS"/>
-                <a:ea typeface="Arial Unicode MS"/>
-                <a:cs typeface="Arial Unicode MS"/>
-              </a:rPr>
-              <a:t>▍這一張要做什麼</a:t>
-            </a:r>
-            <a:r>
-              <a:rPr sz="800" lang="zh-TW" dirty="0">
-                <a:solidFill>
-                  <a:srgbClr val="000000"/>
-                </a:solidFill>
-                <a:latin typeface="Arial Unicode MS"/>
-                <a:ea typeface="Arial Unicode MS"/>
-                <a:cs typeface="Arial Unicode MS"/>
-              </a:rPr>
-              <a:t>
+              <a:rPr sz="950" lang="zh-TW" dirty="0">
+                <a:solidFill>
+                  <a:srgbClr val="000000"/>
+                </a:solidFill>
+                <a:latin typeface="Arial Unicode MS"/>
+                <a:ea typeface="Arial Unicode MS"/>
+                <a:cs typeface="Arial Unicode MS"/>
+              </a:rPr>
+              <a:t>第三題，十分鐘，最後一題。國道，時速一百，要在一百五十公尺外看到車。
 </a:t>
             </a:r>
           </a:p>
@@ -4198,19 +3329,63 @@
                 <a:spcPts val="0"/>
               </a:spcBef>
               <a:spcAft>
-                <a:spcPts val="133"/>
+                <a:spcPts val="158"/>
               </a:spcAft>
             </a:pPr>
             <a:r>
-              <a:rPr sz="800" lang="zh-TW" dirty="0">
-                <a:solidFill>
-                  <a:srgbClr val="000000"/>
-                </a:solidFill>
-                <a:latin typeface="Arial Unicode MS"/>
-                <a:ea typeface="Arial Unicode MS"/>
-                <a:cs typeface="Arial Unicode MS"/>
-              </a:rPr>
-              <a:t>第三題：國道，時速 100，150 公尺外要看到車。測距夠不等於看得清。
+              <a:rPr sz="950" lang="zh-TW" dirty="0">
+                <a:solidFill>
+                  <a:srgbClr val="000000"/>
+                </a:solidFill>
+                <a:latin typeface="Arial Unicode MS"/>
+                <a:ea typeface="Arial Unicode MS"/>
+                <a:cs typeface="Arial Unicode MS"/>
+              </a:rPr>
+              <a:t>先看煞停距離。工具會算給你：時速一百的煞停距離是</a:t>
+            </a:r>
+            <a:r>
+              <a:rPr sz="950" b="1" lang="zh-TW" dirty="0">
+                <a:solidFill>
+                  <a:srgbClr val="000000"/>
+                </a:solidFill>
+                <a:latin typeface="Arial Unicode MS"/>
+                <a:ea typeface="Arial Unicode MS"/>
+                <a:cs typeface="Arial Unicode MS"/>
+              </a:rPr>
+              <a:t>七十三公尺</a:t>
+            </a:r>
+            <a:r>
+              <a:rPr sz="950" lang="zh-TW" dirty="0">
+                <a:solidFill>
+                  <a:srgbClr val="000000"/>
+                </a:solidFill>
+                <a:latin typeface="Arial Unicode MS"/>
+                <a:ea typeface="Arial Unicode MS"/>
+                <a:cs typeface="Arial Unicode MS"/>
+              </a:rPr>
+              <a:t>，加五公尺餘裕，所以感測器至少要看到</a:t>
+            </a:r>
+            <a:r>
+              <a:rPr sz="950" b="1" lang="zh-TW" dirty="0">
+                <a:solidFill>
+                  <a:srgbClr val="000000"/>
+                </a:solidFill>
+                <a:latin typeface="Arial Unicode MS"/>
+                <a:ea typeface="Arial Unicode MS"/>
+                <a:cs typeface="Arial Unicode MS"/>
+              </a:rPr>
+              <a:t>七十八公尺</a:t>
+            </a:r>
+            <a:r>
+              <a:rPr sz="950" lang="zh-TW" dirty="0">
+                <a:solidFill>
+                  <a:srgbClr val="000000"/>
+                </a:solidFill>
+                <a:latin typeface="Arial Unicode MS"/>
+                <a:ea typeface="Arial Unicode MS"/>
+                <a:cs typeface="Arial Unicode MS"/>
+              </a:rPr>
+              <a:t>。
 </a:t>
             </a:r>
           </a:p>
@@ -4220,30 +3395,19 @@
                 <a:spcPts val="0"/>
               </a:spcBef>
               <a:spcAft>
-                <a:spcPts val="133"/>
+                <a:spcPts val="158"/>
               </a:spcAft>
             </a:pPr>
             <a:r>
-              <a:rPr sz="800" b="1" lang="zh-TW" dirty="0">
-                <a:solidFill>
-                  <a:srgbClr val="000000"/>
-                </a:solidFill>
-                <a:latin typeface="Arial Unicode MS"/>
-                <a:ea typeface="Arial Unicode MS"/>
-                <a:cs typeface="Arial Unicode MS"/>
-              </a:rPr>
-              <a:t>▍畫面上圈這裡</a:t>
-            </a:r>
-            <a:r>
-              <a:rPr sz="800" lang="zh-TW" dirty="0">
-                <a:solidFill>
-                  <a:srgbClr val="000000"/>
-                </a:solidFill>
-                <a:latin typeface="Arial Unicode MS"/>
-                <a:ea typeface="Arial Unicode MS"/>
-                <a:cs typeface="Arial Unicode MS"/>
-              </a:rPr>
-              <a:t>
+              <a:rPr sz="950" lang="zh-TW" dirty="0">
+                <a:solidFill>
+                  <a:srgbClr val="000000"/>
+                </a:solidFill>
+                <a:latin typeface="Arial Unicode MS"/>
+                <a:ea typeface="Arial Unicode MS"/>
+                <a:cs typeface="Arial Unicode MS"/>
+              </a:rPr>
+              <a:t>七十三公尺是什麼概念？大概是二十層樓那麼高、橫著放。這就是為什麼高速公路上不能跟車太近。
 </a:t>
             </a:r>
           </a:p>
@@ -4253,19 +3417,19 @@
                 <a:spcPts val="0"/>
               </a:spcBef>
               <a:spcAft>
-                <a:spcPts val="133"/>
+                <a:spcPts val="158"/>
               </a:spcAft>
             </a:pPr>
             <a:r>
-              <a:rPr sz="800" lang="zh-TW" dirty="0">
-                <a:solidFill>
-                  <a:srgbClr val="000000"/>
-                </a:solidFill>
-                <a:latin typeface="Arial Unicode MS"/>
-                <a:ea typeface="Arial Unicode MS"/>
-                <a:cs typeface="Arial Unicode MS"/>
-              </a:rPr>
-              <a:t>圈測距那一欄與點數那一欄，讓他們看到一個過、一個不過。
+              <a:rPr sz="950" lang="zh-TW" dirty="0">
+                <a:solidFill>
+                  <a:srgbClr val="000000"/>
+                </a:solidFill>
+                <a:latin typeface="Arial Unicode MS"/>
+                <a:ea typeface="Arial Unicode MS"/>
+                <a:cs typeface="Arial Unicode MS"/>
+              </a:rPr>
+              <a:t>現在四個型號跑一次，各位會看到很有意思的結果。
 </a:t>
             </a:r>
           </a:p>
@@ -4275,30 +3439,30 @@
                 <a:spcPts val="0"/>
               </a:spcBef>
               <a:spcAft>
-                <a:spcPts val="133"/>
+                <a:spcPts val="158"/>
               </a:spcAft>
             </a:pPr>
             <a:r>
-              <a:rPr sz="800" b="1" lang="zh-TW" dirty="0">
-                <a:solidFill>
-                  <a:srgbClr val="000000"/>
-                </a:solidFill>
-                <a:latin typeface="Arial Unicode MS"/>
-                <a:ea typeface="Arial Unicode MS"/>
-                <a:cs typeface="Arial Unicode MS"/>
-              </a:rPr>
-              <a:t>▍以下照著唸</a:t>
-            </a:r>
-            <a:r>
-              <a:rPr sz="800" lang="zh-TW" dirty="0">
-                <a:solidFill>
-                  <a:srgbClr val="000000"/>
-                </a:solidFill>
-                <a:latin typeface="Arial Unicode MS"/>
-                <a:ea typeface="Arial Unicode MS"/>
-                <a:cs typeface="Arial Unicode MS"/>
-              </a:rPr>
-              <a:t>
+              <a:rPr sz="950" b="1" lang="zh-TW" dirty="0">
+                <a:solidFill>
+                  <a:srgbClr val="000000"/>
+                </a:solidFill>
+                <a:latin typeface="Arial Unicode MS"/>
+                <a:ea typeface="Arial Unicode MS"/>
+                <a:cs typeface="Arial Unicode MS"/>
+              </a:rPr>
+              <a:t>LD-16 卡在測距。</a:t>
+            </a:r>
+            <a:r>
+              <a:rPr sz="950" lang="zh-TW" dirty="0">
+                <a:solidFill>
+                  <a:srgbClr val="000000"/>
+                </a:solidFill>
+                <a:latin typeface="Arial Unicode MS"/>
+                <a:ea typeface="Arial Unicode MS"/>
+                <a:cs typeface="Arial Unicode MS"/>
+              </a:rPr>
+              <a:t>它只有四十公尺，連門檻的七十八都到不了，直接出局。
 </a:t>
             </a:r>
           </a:p>
@@ -4308,19 +3472,30 @@
                 <a:spcPts val="0"/>
               </a:spcBef>
               <a:spcAft>
-                <a:spcPts val="133"/>
+                <a:spcPts val="158"/>
               </a:spcAft>
             </a:pPr>
             <a:r>
-              <a:rPr sz="800" lang="zh-TW" dirty="0">
-                <a:solidFill>
-                  <a:srgbClr val="000000"/>
-                </a:solidFill>
-                <a:latin typeface="Arial Unicode MS"/>
-                <a:ea typeface="Arial Unicode MS"/>
-                <a:cs typeface="Arial Unicode MS"/>
-              </a:rPr>
-              <a:t>第三題，十分鐘，最後一題。國道，時速一百，要在一百五十公尺外看到車。
+              <a:rPr sz="950" b="1" lang="zh-TW" dirty="0">
+                <a:solidFill>
+                  <a:srgbClr val="000000"/>
+                </a:solidFill>
+                <a:latin typeface="Arial Unicode MS"/>
+                <a:ea typeface="Arial Unicode MS"/>
+                <a:cs typeface="Arial Unicode MS"/>
+              </a:rPr>
+              <a:t>OS1 也卡在測距。</a:t>
+            </a:r>
+            <a:r>
+              <a:rPr sz="950" lang="zh-TW" dirty="0">
+                <a:solidFill>
+                  <a:srgbClr val="000000"/>
+                </a:solidFill>
+                <a:latin typeface="Arial Unicode MS"/>
+                <a:ea typeface="Arial Unicode MS"/>
+                <a:cs typeface="Arial Unicode MS"/>
+              </a:rPr>
+              <a:t>九十公尺，看起來有過門檻，可是一百五十公尺外的車它根本看不到——目標比它的測距還遠。
 </a:t>
             </a:r>
           </a:p>
@@ -4330,63 +3505,52 @@
                 <a:spcPts val="0"/>
               </a:spcBef>
               <a:spcAft>
-                <a:spcPts val="133"/>
+                <a:spcPts val="158"/>
               </a:spcAft>
             </a:pPr>
             <a:r>
-              <a:rPr sz="800" lang="zh-TW" dirty="0">
-                <a:solidFill>
-                  <a:srgbClr val="000000"/>
-                </a:solidFill>
-                <a:latin typeface="Arial Unicode MS"/>
-                <a:ea typeface="Arial Unicode MS"/>
-                <a:cs typeface="Arial Unicode MS"/>
-              </a:rPr>
-              <a:t>先看煞停距離。工具會算給你：時速一百的煞停距離是</a:t>
-            </a:r>
-            <a:r>
-              <a:rPr sz="800" b="1" lang="zh-TW" dirty="0">
-                <a:solidFill>
-                  <a:srgbClr val="000000"/>
-                </a:solidFill>
-                <a:latin typeface="Arial Unicode MS"/>
-                <a:ea typeface="Arial Unicode MS"/>
-                <a:cs typeface="Arial Unicode MS"/>
-              </a:rPr>
-              <a:t>七十三公尺</a:t>
-            </a:r>
-            <a:r>
-              <a:rPr sz="800" lang="zh-TW" dirty="0">
-                <a:solidFill>
-                  <a:srgbClr val="000000"/>
-                </a:solidFill>
-                <a:latin typeface="Arial Unicode MS"/>
-                <a:ea typeface="Arial Unicode MS"/>
-                <a:cs typeface="Arial Unicode MS"/>
-              </a:rPr>
-              <a:t>，加五公尺餘裕，所以感測器至少要看到</a:t>
-            </a:r>
-            <a:r>
-              <a:rPr sz="800" b="1" lang="zh-TW" dirty="0">
-                <a:solidFill>
-                  <a:srgbClr val="000000"/>
-                </a:solidFill>
-                <a:latin typeface="Arial Unicode MS"/>
-                <a:ea typeface="Arial Unicode MS"/>
-                <a:cs typeface="Arial Unicode MS"/>
-              </a:rPr>
-              <a:t>七十八公尺</a:t>
-            </a:r>
-            <a:r>
-              <a:rPr sz="800" lang="zh-TW" dirty="0">
-                <a:solidFill>
-                  <a:srgbClr val="000000"/>
-                </a:solidFill>
-                <a:latin typeface="Arial Unicode MS"/>
-                <a:ea typeface="Arial Unicode MS"/>
-                <a:cs typeface="Arial Unicode MS"/>
-              </a:rPr>
-              <a:t>。
+              <a:rPr sz="950" b="1" lang="zh-TW" dirty="0">
+                <a:solidFill>
+                  <a:srgbClr val="000000"/>
+                </a:solidFill>
+                <a:latin typeface="Arial Unicode MS"/>
+                <a:ea typeface="Arial Unicode MS"/>
+                <a:cs typeface="Arial Unicode MS"/>
+              </a:rPr>
+              <a:t>相機卡在別的地方。</a:t>
+            </a:r>
+            <a:r>
+              <a:rPr sz="950" lang="zh-TW" dirty="0">
+                <a:solidFill>
+                  <a:srgbClr val="000000"/>
+                </a:solidFill>
+                <a:latin typeface="Arial Unicode MS"/>
+                <a:ea typeface="Arial Unicode MS"/>
+                <a:cs typeface="Arial Unicode MS"/>
+              </a:rPr>
+              <a:t>它的問題不是看不到，是</a:t>
+            </a:r>
+            <a:r>
+              <a:rPr sz="950" b="1" lang="zh-TW" dirty="0">
+                <a:solidFill>
+                  <a:srgbClr val="000000"/>
+                </a:solidFill>
+                <a:latin typeface="Arial Unicode MS"/>
+                <a:ea typeface="Arial Unicode MS"/>
+                <a:cs typeface="Arial Unicode MS"/>
+              </a:rPr>
+              <a:t>看不準</a:t>
+            </a:r>
+            <a:r>
+              <a:rPr sz="950" lang="zh-TW" dirty="0">
+                <a:solidFill>
+                  <a:srgbClr val="000000"/>
+                </a:solidFill>
+                <a:latin typeface="Arial Unicode MS"/>
+                <a:ea typeface="Arial Unicode MS"/>
+                <a:cs typeface="Arial Unicode MS"/>
+              </a:rPr>
+              <a:t>。一百五十公尺處的估距誤差是正負五點三七公尺。五公尺是什麼概念？大概一台車的長度。你不知道前面那台車是在一百四十五還是一百五十五公尺，這樣沒辦法決定要不要煞車。
 </a:t>
             </a:r>
           </a:p>
@@ -4396,19 +3560,30 @@
                 <a:spcPts val="0"/>
               </a:spcBef>
               <a:spcAft>
-                <a:spcPts val="133"/>
+                <a:spcPts val="158"/>
               </a:spcAft>
             </a:pPr>
             <a:r>
-              <a:rPr sz="800" lang="zh-TW" dirty="0">
-                <a:solidFill>
-                  <a:srgbClr val="000000"/>
-                </a:solidFill>
-                <a:latin typeface="Arial Unicode MS"/>
-                <a:ea typeface="Arial Unicode MS"/>
-                <a:cs typeface="Arial Unicode MS"/>
-              </a:rPr>
-              <a:t>七十三公尺是什麼概念？大概是二十層樓那麼高、橫著放。這就是為什麼高速公路上不能跟車太近。
+              <a:rPr sz="950" b="1" lang="zh-TW" dirty="0">
+                <a:solidFill>
+                  <a:srgbClr val="000000"/>
+                </a:solidFill>
+                <a:latin typeface="Arial Unicode MS"/>
+                <a:ea typeface="Arial Unicode MS"/>
+                <a:cs typeface="Arial Unicode MS"/>
+              </a:rPr>
+              <a:t>AT128P 過了。</a:t>
+            </a:r>
+            <a:r>
+              <a:rPr sz="950" lang="zh-TW" dirty="0">
+                <a:solidFill>
+                  <a:srgbClr val="000000"/>
+                </a:solidFill>
+                <a:latin typeface="Arial Unicode MS"/>
+                <a:ea typeface="Arial Unicode MS"/>
+                <a:cs typeface="Arial Unicode MS"/>
+              </a:rPr>
+              <a:t>測距兩百一十公尺，綽綽有餘。
 </a:t>
             </a:r>
           </a:p>
@@ -4418,19 +3593,41 @@
                 <a:spcPts val="0"/>
               </a:spcBef>
               <a:spcAft>
-                <a:spcPts val="133"/>
+                <a:spcPts val="158"/>
               </a:spcAft>
             </a:pPr>
             <a:r>
-              <a:rPr sz="800" lang="zh-TW" dirty="0">
-                <a:solidFill>
-                  <a:srgbClr val="000000"/>
-                </a:solidFill>
-                <a:latin typeface="Arial Unicode MS"/>
-                <a:ea typeface="Arial Unicode MS"/>
-                <a:cs typeface="Arial Unicode MS"/>
-              </a:rPr>
-              <a:t>現在四個型號跑一次，各位會看到很有意思的結果。
+              <a:rPr sz="950" lang="zh-TW" dirty="0">
+                <a:solidFill>
+                  <a:srgbClr val="000000"/>
+                </a:solidFill>
+                <a:latin typeface="Arial Unicode MS"/>
+                <a:ea typeface="Arial Unicode MS"/>
+                <a:cs typeface="Arial Unicode MS"/>
+              </a:rPr>
+              <a:t>可是請各位看它的點數：一百五十公尺外那台車身上，只剩</a:t>
+            </a:r>
+            <a:r>
+              <a:rPr sz="950" b="1" lang="zh-TW" dirty="0">
+                <a:solidFill>
+                  <a:srgbClr val="000000"/>
+                </a:solidFill>
+                <a:latin typeface="Arial Unicode MS"/>
+                <a:ea typeface="Arial Unicode MS"/>
+                <a:cs typeface="Arial Unicode MS"/>
+              </a:rPr>
+              <a:t>十二個點</a:t>
+            </a:r>
+            <a:r>
+              <a:rPr sz="950" lang="zh-TW" dirty="0">
+                <a:solidFill>
+                  <a:srgbClr val="000000"/>
+                </a:solidFill>
+                <a:latin typeface="Arial Unicode MS"/>
+                <a:ea typeface="Arial Unicode MS"/>
+                <a:cs typeface="Arial Unicode MS"/>
+              </a:rPr>
+              <a:t>。
 </a:t>
             </a:r>
           </a:p>
@@ -4440,30 +3637,19 @@
                 <a:spcPts val="0"/>
               </a:spcBef>
               <a:spcAft>
-                <a:spcPts val="133"/>
+                <a:spcPts val="158"/>
               </a:spcAft>
             </a:pPr>
             <a:r>
-              <a:rPr sz="800" b="1" lang="zh-TW" dirty="0">
-                <a:solidFill>
-                  <a:srgbClr val="000000"/>
-                </a:solidFill>
-                <a:latin typeface="Arial Unicode MS"/>
-                <a:ea typeface="Arial Unicode MS"/>
-                <a:cs typeface="Arial Unicode MS"/>
-              </a:rPr>
-              <a:t>LD-16 卡在測距。</a:t>
-            </a:r>
-            <a:r>
-              <a:rPr sz="800" lang="zh-TW" dirty="0">
-                <a:solidFill>
-                  <a:srgbClr val="000000"/>
-                </a:solidFill>
-                <a:latin typeface="Arial Unicode MS"/>
-                <a:ea typeface="Arial Unicode MS"/>
-                <a:cs typeface="Arial Unicode MS"/>
-              </a:rPr>
-              <a:t>它只有四十公尺，連門檻的七十八都到不了，直接出局。
+              <a:rPr sz="950" lang="zh-TW" dirty="0">
+                <a:solidFill>
+                  <a:srgbClr val="000000"/>
+                </a:solidFill>
+                <a:latin typeface="Arial Unicode MS"/>
+                <a:ea typeface="Arial Unicode MS"/>
+                <a:cs typeface="Arial Unicode MS"/>
+              </a:rPr>
+              <a:t>十二個點。剛好在門檻上。一台車那麼大的東西，一百五十公尺外只剩十二個點，勉強看得出「那裡有個東西、大概多寬」，要認出是轎車還是貨車就很難了。
 </a:t>
             </a:r>
           </a:p>
@@ -4473,30 +3659,41 @@
                 <a:spcPts val="0"/>
               </a:spcBef>
               <a:spcAft>
-                <a:spcPts val="133"/>
+                <a:spcPts val="158"/>
               </a:spcAft>
             </a:pPr>
             <a:r>
-              <a:rPr sz="800" b="1" lang="zh-TW" dirty="0">
-                <a:solidFill>
-                  <a:srgbClr val="000000"/>
-                </a:solidFill>
-                <a:latin typeface="Arial Unicode MS"/>
-                <a:ea typeface="Arial Unicode MS"/>
-                <a:cs typeface="Arial Unicode MS"/>
-              </a:rPr>
-              <a:t>OS1 也卡在測距。</a:t>
-            </a:r>
-            <a:r>
-              <a:rPr sz="800" lang="zh-TW" dirty="0">
-                <a:solidFill>
-                  <a:srgbClr val="000000"/>
-                </a:solidFill>
-                <a:latin typeface="Arial Unicode MS"/>
-                <a:ea typeface="Arial Unicode MS"/>
-                <a:cs typeface="Arial Unicode MS"/>
-              </a:rPr>
-              <a:t>九十公尺，看起來有過門檻，可是一百五十公尺外的車它根本看不到——目標比它的測距還遠。
+              <a:rPr sz="950" lang="zh-TW" dirty="0">
+                <a:solidFill>
+                  <a:srgbClr val="000000"/>
+                </a:solidFill>
+                <a:latin typeface="Arial Unicode MS"/>
+                <a:ea typeface="Arial Unicode MS"/>
+                <a:cs typeface="Arial Unicode MS"/>
+              </a:rPr>
+              <a:t>所以這一題的結論是：</a:t>
+            </a:r>
+            <a:r>
+              <a:rPr sz="950" b="1" lang="zh-TW" dirty="0">
+                <a:solidFill>
+                  <a:srgbClr val="000000"/>
+                </a:solidFill>
+                <a:latin typeface="Arial Unicode MS"/>
+                <a:ea typeface="Arial Unicode MS"/>
+                <a:cs typeface="Arial Unicode MS"/>
+              </a:rPr>
+              <a:t>到了高速，「測得到遠」和「看得清楚」完全變成兩件事。</a:t>
+            </a:r>
+            <a:r>
+              <a:rPr sz="950" lang="zh-TW" dirty="0">
+                <a:solidFill>
+                  <a:srgbClr val="000000"/>
+                </a:solidFill>
+                <a:latin typeface="Arial Unicode MS"/>
+                <a:ea typeface="Arial Unicode MS"/>
+                <a:cs typeface="Arial Unicode MS"/>
+              </a:rPr>
+              <a:t>測距過關不代表能用。
 </a:t>
             </a:r>
           </a:p>
@@ -4506,52 +3703,41 @@
                 <a:spcPts val="0"/>
               </a:spcBef>
               <a:spcAft>
-                <a:spcPts val="133"/>
+                <a:spcPts val="158"/>
               </a:spcAft>
             </a:pPr>
             <a:r>
-              <a:rPr sz="800" b="1" lang="zh-TW" dirty="0">
-                <a:solidFill>
-                  <a:srgbClr val="000000"/>
-                </a:solidFill>
-                <a:latin typeface="Arial Unicode MS"/>
-                <a:ea typeface="Arial Unicode MS"/>
-                <a:cs typeface="Arial Unicode MS"/>
-              </a:rPr>
-              <a:t>相機卡在別的地方。</a:t>
-            </a:r>
-            <a:r>
-              <a:rPr sz="800" lang="zh-TW" dirty="0">
-                <a:solidFill>
-                  <a:srgbClr val="000000"/>
-                </a:solidFill>
-                <a:latin typeface="Arial Unicode MS"/>
-                <a:ea typeface="Arial Unicode MS"/>
-                <a:cs typeface="Arial Unicode MS"/>
-              </a:rPr>
-              <a:t>它的問題不是看不到，是</a:t>
-            </a:r>
-            <a:r>
-              <a:rPr sz="800" b="1" lang="zh-TW" dirty="0">
-                <a:solidFill>
-                  <a:srgbClr val="000000"/>
-                </a:solidFill>
-                <a:latin typeface="Arial Unicode MS"/>
-                <a:ea typeface="Arial Unicode MS"/>
-                <a:cs typeface="Arial Unicode MS"/>
-              </a:rPr>
-              <a:t>看不準</a:t>
-            </a:r>
-            <a:r>
-              <a:rPr sz="800" lang="zh-TW" dirty="0">
-                <a:solidFill>
-                  <a:srgbClr val="000000"/>
-                </a:solidFill>
-                <a:latin typeface="Arial Unicode MS"/>
-                <a:ea typeface="Arial Unicode MS"/>
-                <a:cs typeface="Arial Unicode MS"/>
-              </a:rPr>
-              <a:t>。一百五十公尺處的估距誤差是正負五點三七公尺。五公尺是什麼概念？大概一台車的長度。你不知道前面那台車是在一百四十五還是一百五十五公尺，這樣沒辦法決定要不要煞車。
+              <a:rPr sz="950" lang="zh-TW" dirty="0">
+                <a:solidFill>
+                  <a:srgbClr val="000000"/>
+                </a:solidFill>
+                <a:latin typeface="Arial Unicode MS"/>
+                <a:ea typeface="Arial Unicode MS"/>
+                <a:cs typeface="Arial Unicode MS"/>
+              </a:rPr>
+              <a:t>這句話請填在作業分頁的</a:t>
+            </a:r>
+            <a:r>
+              <a:rPr sz="950" b="1" lang="zh-TW" dirty="0">
+                <a:solidFill>
+                  <a:srgbClr val="000000"/>
+                </a:solidFill>
+                <a:latin typeface="Arial Unicode MS"/>
+                <a:ea typeface="Arial Unicode MS"/>
+                <a:cs typeface="Arial Unicode MS"/>
+              </a:rPr>
+              <a:t>結論句</a:t>
+            </a:r>
+            <a:r>
+              <a:rPr sz="950" lang="zh-TW" dirty="0">
+                <a:solidFill>
+                  <a:srgbClr val="000000"/>
+                </a:solidFill>
+                <a:latin typeface="Arial Unicode MS"/>
+                <a:ea typeface="Arial Unicode MS"/>
+                <a:cs typeface="Arial Unicode MS"/>
+              </a:rPr>
+              <a:t>那一格，這是今天最重要的一句。
 </a:t>
             </a:r>
           </a:p>
@@ -4561,198 +3747,11 @@
                 <a:spcPts val="0"/>
               </a:spcBef>
               <a:spcAft>
-                <a:spcPts val="133"/>
+                <a:spcPts val="158"/>
               </a:spcAft>
             </a:pPr>
             <a:r>
-              <a:rPr sz="800" b="1" lang="zh-TW" dirty="0">
-                <a:solidFill>
-                  <a:srgbClr val="000000"/>
-                </a:solidFill>
-                <a:latin typeface="Arial Unicode MS"/>
-                <a:ea typeface="Arial Unicode MS"/>
-                <a:cs typeface="Arial Unicode MS"/>
-              </a:rPr>
-              <a:t>AT128P 過了。</a:t>
-            </a:r>
-            <a:r>
-              <a:rPr sz="800" lang="zh-TW" dirty="0">
-                <a:solidFill>
-                  <a:srgbClr val="000000"/>
-                </a:solidFill>
-                <a:latin typeface="Arial Unicode MS"/>
-                <a:ea typeface="Arial Unicode MS"/>
-                <a:cs typeface="Arial Unicode MS"/>
-              </a:rPr>
-              <a:t>測距兩百一十公尺，綽綽有餘。
-</a:t>
-            </a:r>
-          </a:p>
-          <a:p>
-            <a:pPr algn="l">
-              <a:spcBef>
-                <a:spcPts val="0"/>
-              </a:spcBef>
-              <a:spcAft>
-                <a:spcPts val="133"/>
-              </a:spcAft>
-            </a:pPr>
-            <a:r>
-              <a:rPr sz="800" lang="zh-TW" dirty="0">
-                <a:solidFill>
-                  <a:srgbClr val="000000"/>
-                </a:solidFill>
-                <a:latin typeface="Arial Unicode MS"/>
-                <a:ea typeface="Arial Unicode MS"/>
-                <a:cs typeface="Arial Unicode MS"/>
-              </a:rPr>
-              <a:t>可是請各位看它的點數：一百五十公尺外那台車身上，只剩</a:t>
-            </a:r>
-            <a:r>
-              <a:rPr sz="800" b="1" lang="zh-TW" dirty="0">
-                <a:solidFill>
-                  <a:srgbClr val="000000"/>
-                </a:solidFill>
-                <a:latin typeface="Arial Unicode MS"/>
-                <a:ea typeface="Arial Unicode MS"/>
-                <a:cs typeface="Arial Unicode MS"/>
-              </a:rPr>
-              <a:t>十二個點</a:t>
-            </a:r>
-            <a:r>
-              <a:rPr sz="800" lang="zh-TW" dirty="0">
-                <a:solidFill>
-                  <a:srgbClr val="000000"/>
-                </a:solidFill>
-                <a:latin typeface="Arial Unicode MS"/>
-                <a:ea typeface="Arial Unicode MS"/>
-                <a:cs typeface="Arial Unicode MS"/>
-              </a:rPr>
-              <a:t>。
-</a:t>
-            </a:r>
-          </a:p>
-          <a:p>
-            <a:pPr algn="l">
-              <a:spcBef>
-                <a:spcPts val="0"/>
-              </a:spcBef>
-              <a:spcAft>
-                <a:spcPts val="133"/>
-              </a:spcAft>
-            </a:pPr>
-            <a:r>
-              <a:rPr sz="800" lang="zh-TW" dirty="0">
-                <a:solidFill>
-                  <a:srgbClr val="000000"/>
-                </a:solidFill>
-                <a:latin typeface="Arial Unicode MS"/>
-                <a:ea typeface="Arial Unicode MS"/>
-                <a:cs typeface="Arial Unicode MS"/>
-              </a:rPr>
-              <a:t>十二個點。剛好在門檻上。一台車那麼大的東西，一百五十公尺外只剩十二個點，勉強看得出「那裡有個東西、大概多寬」，要認出是轎車還是貨車就很難了。
-</a:t>
-            </a:r>
-          </a:p>
-          <a:p>
-            <a:pPr algn="l">
-              <a:spcBef>
-                <a:spcPts val="0"/>
-              </a:spcBef>
-              <a:spcAft>
-                <a:spcPts val="133"/>
-              </a:spcAft>
-            </a:pPr>
-            <a:r>
-              <a:rPr sz="800" lang="zh-TW" dirty="0">
-                <a:solidFill>
-                  <a:srgbClr val="000000"/>
-                </a:solidFill>
-                <a:latin typeface="Arial Unicode MS"/>
-                <a:ea typeface="Arial Unicode MS"/>
-                <a:cs typeface="Arial Unicode MS"/>
-              </a:rPr>
-              <a:t>所以這一題的結論是：</a:t>
-            </a:r>
-            <a:r>
-              <a:rPr sz="800" b="1" lang="zh-TW" dirty="0">
-                <a:solidFill>
-                  <a:srgbClr val="000000"/>
-                </a:solidFill>
-                <a:latin typeface="Arial Unicode MS"/>
-                <a:ea typeface="Arial Unicode MS"/>
-                <a:cs typeface="Arial Unicode MS"/>
-              </a:rPr>
-              <a:t>到了高速，「測得到遠」和「看得清楚」完全變成兩件事。</a:t>
-            </a:r>
-            <a:r>
-              <a:rPr sz="800" lang="zh-TW" dirty="0">
-                <a:solidFill>
-                  <a:srgbClr val="000000"/>
-                </a:solidFill>
-                <a:latin typeface="Arial Unicode MS"/>
-                <a:ea typeface="Arial Unicode MS"/>
-                <a:cs typeface="Arial Unicode MS"/>
-              </a:rPr>
-              <a:t>測距過關不代表能用。
-</a:t>
-            </a:r>
-          </a:p>
-          <a:p>
-            <a:pPr algn="l">
-              <a:spcBef>
-                <a:spcPts val="0"/>
-              </a:spcBef>
-              <a:spcAft>
-                <a:spcPts val="133"/>
-              </a:spcAft>
-            </a:pPr>
-            <a:r>
-              <a:rPr sz="800" lang="zh-TW" dirty="0">
-                <a:solidFill>
-                  <a:srgbClr val="000000"/>
-                </a:solidFill>
-                <a:latin typeface="Arial Unicode MS"/>
-                <a:ea typeface="Arial Unicode MS"/>
-                <a:cs typeface="Arial Unicode MS"/>
-              </a:rPr>
-              <a:t>這句話請填在作業分頁的</a:t>
-            </a:r>
-            <a:r>
-              <a:rPr sz="800" b="1" lang="zh-TW" dirty="0">
-                <a:solidFill>
-                  <a:srgbClr val="000000"/>
-                </a:solidFill>
-                <a:latin typeface="Arial Unicode MS"/>
-                <a:ea typeface="Arial Unicode MS"/>
-                <a:cs typeface="Arial Unicode MS"/>
-              </a:rPr>
-              <a:t>結論句</a:t>
-            </a:r>
-            <a:r>
-              <a:rPr sz="800" lang="zh-TW" dirty="0">
-                <a:solidFill>
-                  <a:srgbClr val="000000"/>
-                </a:solidFill>
-                <a:latin typeface="Arial Unicode MS"/>
-                <a:ea typeface="Arial Unicode MS"/>
-                <a:cs typeface="Arial Unicode MS"/>
-              </a:rPr>
-              <a:t>那一格，這是今天最重要的一句。
-</a:t>
-            </a:r>
-          </a:p>
-          <a:p>
-            <a:pPr algn="l">
-              <a:spcBef>
-                <a:spcPts val="0"/>
-              </a:spcBef>
-              <a:spcAft>
-                <a:spcPts val="133"/>
-              </a:spcAft>
-            </a:pPr>
-            <a:r>
-              <a:rPr sz="800" lang="zh-TW" dirty="0">
+              <a:rPr sz="950" lang="zh-TW" dirty="0">
                 <a:solidFill>
                   <a:srgbClr val="000000"/>
                 </a:solidFill>
@@ -4869,30 +3868,19 @@
                 <a:spcPts val="0"/>
               </a:spcBef>
               <a:spcAft>
-                <a:spcPts val="133"/>
+                <a:spcPts val="175"/>
               </a:spcAft>
             </a:pPr>
             <a:r>
-              <a:rPr sz="800" b="1" lang="zh-TW" dirty="0">
-                <a:solidFill>
-                  <a:srgbClr val="000000"/>
-                </a:solidFill>
-                <a:latin typeface="Arial Unicode MS"/>
-                <a:ea typeface="Arial Unicode MS"/>
-                <a:cs typeface="Arial Unicode MS"/>
-              </a:rPr>
-              <a:t>▍這一張要做什麼</a:t>
-            </a:r>
-            <a:r>
-              <a:rPr sz="800" lang="zh-TW" dirty="0">
-                <a:solidFill>
-                  <a:srgbClr val="000000"/>
-                </a:solidFill>
-                <a:latin typeface="Arial Unicode MS"/>
-                <a:ea typeface="Arial Unicode MS"/>
-                <a:cs typeface="Arial Unicode MS"/>
-              </a:rPr>
-              <a:t>
+              <a:rPr sz="1050" lang="zh-TW" dirty="0">
+                <a:solidFill>
+                  <a:srgbClr val="000000"/>
+                </a:solidFill>
+                <a:latin typeface="Arial Unicode MS"/>
+                <a:ea typeface="Arial Unicode MS"/>
+                <a:cs typeface="Arial Unicode MS"/>
+              </a:rPr>
+              <a:t>十分鐘到，先別急著傳，我們一起把十二格看成一張表。
 </a:t>
             </a:r>
           </a:p>
@@ -4902,19 +3890,30 @@
                 <a:spcPts val="0"/>
               </a:spcBef>
               <a:spcAft>
-                <a:spcPts val="133"/>
+                <a:spcPts val="175"/>
               </a:spcAft>
             </a:pPr>
             <a:r>
-              <a:rPr sz="800" lang="zh-TW" dirty="0">
-                <a:solidFill>
-                  <a:srgbClr val="000000"/>
-                </a:solidFill>
-                <a:latin typeface="Arial Unicode MS"/>
-                <a:ea typeface="Arial Unicode MS"/>
-                <a:cs typeface="Arial Unicode MS"/>
-              </a:rPr>
-              <a:t>把十二格合成一張表，得出結論：沒有一顆三個情境都贏。
+              <a:rPr sz="1050" b="1" lang="zh-TW" dirty="0">
+                <a:solidFill>
+                  <a:srgbClr val="000000"/>
+                </a:solidFill>
+                <a:latin typeface="Arial Unicode MS"/>
+                <a:ea typeface="Arial Unicode MS"/>
+                <a:cs typeface="Arial Unicode MS"/>
+              </a:rPr>
+              <a:t>AT128P 三個情境都過。相機是校園和河內過、國道不過。OS1 校園不過、河內換模式之後過、國道不過。LD-16 一個都沒過。</a:t>
+            </a:r>
+            <a:r>
+              <a:rPr sz="1050" lang="zh-TW" dirty="0">
+                <a:solidFill>
+                  <a:srgbClr val="000000"/>
+                </a:solidFill>
+                <a:latin typeface="Arial Unicode MS"/>
+                <a:ea typeface="Arial Unicode MS"/>
+                <a:cs typeface="Arial Unicode MS"/>
+              </a:rPr>
+              <a:t>
 </a:t>
             </a:r>
           </a:p>
@@ -4924,30 +3923,19 @@
                 <a:spcPts val="0"/>
               </a:spcBef>
               <a:spcAft>
-                <a:spcPts val="133"/>
+                <a:spcPts val="175"/>
               </a:spcAft>
             </a:pPr>
             <a:r>
-              <a:rPr sz="800" b="1" lang="zh-TW" dirty="0">
-                <a:solidFill>
-                  <a:srgbClr val="000000"/>
-                </a:solidFill>
-                <a:latin typeface="Arial Unicode MS"/>
-                <a:ea typeface="Arial Unicode MS"/>
-                <a:cs typeface="Arial Unicode MS"/>
-              </a:rPr>
-              <a:t>▍畫面上圈這裡</a:t>
-            </a:r>
-            <a:r>
-              <a:rPr sz="800" lang="zh-TW" dirty="0">
-                <a:solidFill>
-                  <a:srgbClr val="000000"/>
-                </a:solidFill>
-                <a:latin typeface="Arial Unicode MS"/>
-                <a:ea typeface="Arial Unicode MS"/>
-                <a:cs typeface="Arial Unicode MS"/>
-              </a:rPr>
-              <a:t>
+              <a:rPr sz="1050" lang="zh-TW" dirty="0">
+                <a:solidFill>
+                  <a:srgbClr val="000000"/>
+                </a:solidFill>
+                <a:latin typeface="Arial Unicode MS"/>
+                <a:ea typeface="Arial Unicode MS"/>
+                <a:cs typeface="Arial Unicode MS"/>
+              </a:rPr>
+              <a:t>所以結論很明顯，每一台車都裝 AT128P 就好了，對不對？
 </a:t>
             </a:r>
           </a:p>
@@ -4957,19 +3945,19 @@
                 <a:spcPts val="0"/>
               </a:spcBef>
               <a:spcAft>
-                <a:spcPts val="133"/>
+                <a:spcPts val="175"/>
               </a:spcAft>
             </a:pPr>
             <a:r>
-              <a:rPr sz="800" lang="zh-TW" dirty="0">
-                <a:solidFill>
-                  <a:srgbClr val="000000"/>
-                </a:solidFill>
-                <a:latin typeface="Arial Unicode MS"/>
-                <a:ea typeface="Arial Unicode MS"/>
-                <a:cs typeface="Arial Unicode MS"/>
-              </a:rPr>
-              <a:t>把三個情境各自的贏家圈起來，指出它們不是同一顆。
+              <a:rPr sz="1050" lang="zh-TW" dirty="0">
+                <a:solidFill>
+                  <a:srgbClr val="000000"/>
+                </a:solidFill>
+                <a:latin typeface="Arial Unicode MS"/>
+                <a:ea typeface="Arial Unicode MS"/>
+                <a:cs typeface="Arial Unicode MS"/>
+              </a:rPr>
+              <a:t>大家想三秒鐘。
 </a:t>
             </a:r>
           </a:p>
@@ -4979,30 +3967,19 @@
                 <a:spcPts val="0"/>
               </a:spcBef>
               <a:spcAft>
-                <a:spcPts val="133"/>
+                <a:spcPts val="175"/>
               </a:spcAft>
             </a:pPr>
             <a:r>
-              <a:rPr sz="800" b="1" lang="zh-TW" dirty="0">
-                <a:solidFill>
-                  <a:srgbClr val="000000"/>
-                </a:solidFill>
-                <a:latin typeface="Arial Unicode MS"/>
-                <a:ea typeface="Arial Unicode MS"/>
-                <a:cs typeface="Arial Unicode MS"/>
-              </a:rPr>
-              <a:t>▍以下照著唸</a:t>
-            </a:r>
-            <a:r>
-              <a:rPr sz="800" lang="zh-TW" dirty="0">
-                <a:solidFill>
-                  <a:srgbClr val="000000"/>
-                </a:solidFill>
-                <a:latin typeface="Arial Unicode MS"/>
-                <a:ea typeface="Arial Unicode MS"/>
-                <a:cs typeface="Arial Unicode MS"/>
-              </a:rPr>
-              <a:t>
+              <a:rPr sz="1050" lang="zh-TW" dirty="0">
+                <a:solidFill>
+                  <a:srgbClr val="000000"/>
+                </a:solidFill>
+                <a:latin typeface="Arial Unicode MS"/>
+                <a:ea typeface="Arial Unicode MS"/>
+                <a:cs typeface="Arial Unicode MS"/>
+              </a:rPr>
+              <a:t>不對，而且理由有三個。
 </a:t>
             </a:r>
           </a:p>
@@ -5012,19 +3989,30 @@
                 <a:spcPts val="0"/>
               </a:spcBef>
               <a:spcAft>
-                <a:spcPts val="133"/>
+                <a:spcPts val="175"/>
               </a:spcAft>
             </a:pPr>
             <a:r>
-              <a:rPr sz="800" lang="zh-TW" dirty="0">
-                <a:solidFill>
-                  <a:srgbClr val="000000"/>
-                </a:solidFill>
-                <a:latin typeface="Arial Unicode MS"/>
-                <a:ea typeface="Arial Unicode MS"/>
-                <a:cs typeface="Arial Unicode MS"/>
-              </a:rPr>
-              <a:t>十分鐘到，先別急著傳，我們一起把十二格看成一張表。
+              <a:rPr sz="1050" b="1" lang="zh-TW" dirty="0">
+                <a:solidFill>
+                  <a:srgbClr val="000000"/>
+                </a:solidFill>
+                <a:latin typeface="Arial Unicode MS"/>
+                <a:ea typeface="Arial Unicode MS"/>
+                <a:cs typeface="Arial Unicode MS"/>
+              </a:rPr>
+              <a:t>第一，錢。</a:t>
+            </a:r>
+            <a:r>
+              <a:rPr sz="1050" lang="zh-TW" dirty="0">
+                <a:solidFill>
+                  <a:srgbClr val="000000"/>
+                </a:solidFill>
+                <a:latin typeface="Arial Unicode MS"/>
+                <a:ea typeface="Arial Unicode MS"/>
+                <a:cs typeface="Arial Unicode MS"/>
+              </a:rPr>
+              <a:t>這一顆的價錢大概是一般相機的幾十倍。一台校園接駁車時速二十，裝這個是浪費。
 </a:t>
             </a:r>
           </a:p>
@@ -5034,30 +4022,52 @@
                 <a:spcPts val="0"/>
               </a:spcBef>
               <a:spcAft>
-                <a:spcPts val="133"/>
+                <a:spcPts val="175"/>
               </a:spcAft>
             </a:pPr>
             <a:r>
-              <a:rPr sz="800" b="1" lang="zh-TW" dirty="0">
-                <a:solidFill>
-                  <a:srgbClr val="000000"/>
-                </a:solidFill>
-                <a:latin typeface="Arial Unicode MS"/>
-                <a:ea typeface="Arial Unicode MS"/>
-                <a:cs typeface="Arial Unicode MS"/>
-              </a:rPr>
-              <a:t>AT128P 三個情境都過。相機是校園和河內過、國道不過。OS1 校園不過、河內換模式之後過、國道不過。LD-16 一個都沒過。</a:t>
-            </a:r>
-            <a:r>
-              <a:rPr sz="800" lang="zh-TW" dirty="0">
-                <a:solidFill>
-                  <a:srgbClr val="000000"/>
-                </a:solidFill>
-                <a:latin typeface="Arial Unicode MS"/>
-                <a:ea typeface="Arial Unicode MS"/>
-                <a:cs typeface="Arial Unicode MS"/>
-              </a:rPr>
-              <a:t>
+              <a:rPr sz="1050" b="1" lang="zh-TW" dirty="0">
+                <a:solidFill>
+                  <a:srgbClr val="000000"/>
+                </a:solidFill>
+                <a:latin typeface="Arial Unicode MS"/>
+                <a:ea typeface="Arial Unicode MS"/>
+                <a:cs typeface="Arial Unicode MS"/>
+              </a:rPr>
+              <a:t>第二，它只看前面一百二十度。</a:t>
+            </a:r>
+            <a:r>
+              <a:rPr sz="1050" lang="zh-TW" dirty="0">
+                <a:solidFill>
+                  <a:srgbClr val="000000"/>
+                </a:solidFill>
+                <a:latin typeface="Arial Unicode MS"/>
+                <a:ea typeface="Arial Unicode MS"/>
+                <a:cs typeface="Arial Unicode MS"/>
+              </a:rPr>
+              <a:t>河內的路口，機車是從</a:t>
+            </a:r>
+            <a:r>
+              <a:rPr sz="1050" b="1" lang="zh-TW" dirty="0">
+                <a:solidFill>
+                  <a:srgbClr val="000000"/>
+                </a:solidFill>
+                <a:latin typeface="Arial Unicode MS"/>
+                <a:ea typeface="Arial Unicode MS"/>
+                <a:cs typeface="Arial Unicode MS"/>
+              </a:rPr>
+              <a:t>兩側</a:t>
+            </a:r>
+            <a:r>
+              <a:rPr sz="1050" lang="zh-TW" dirty="0">
+                <a:solidFill>
+                  <a:srgbClr val="000000"/>
+                </a:solidFill>
+                <a:latin typeface="Arial Unicode MS"/>
+                <a:ea typeface="Arial Unicode MS"/>
+                <a:cs typeface="Arial Unicode MS"/>
+              </a:rPr>
+              <a:t>鑽出來的。AT128P 看不到兩側。所以就算你裝了它，還是得再裝別的東西補兩邊——這就回到第三週那張「每一種的弱點，由哪一種來補」的表。
 </a:t>
             </a:r>
           </a:p>
@@ -5067,19 +4077,30 @@
                 <a:spcPts val="0"/>
               </a:spcBef>
               <a:spcAft>
-                <a:spcPts val="133"/>
+                <a:spcPts val="175"/>
               </a:spcAft>
             </a:pPr>
             <a:r>
-              <a:rPr sz="800" lang="zh-TW" dirty="0">
-                <a:solidFill>
-                  <a:srgbClr val="000000"/>
-                </a:solidFill>
-                <a:latin typeface="Arial Unicode MS"/>
-                <a:ea typeface="Arial Unicode MS"/>
-                <a:cs typeface="Arial Unicode MS"/>
-              </a:rPr>
-              <a:t>所以結論很明顯，每一台車都裝 AT128P 就好了，對不對？
+              <a:rPr sz="1050" b="1" lang="zh-TW" dirty="0">
+                <a:solidFill>
+                  <a:srgbClr val="000000"/>
+                </a:solidFill>
+                <a:latin typeface="Arial Unicode MS"/>
+                <a:ea typeface="Arial Unicode MS"/>
+                <a:cs typeface="Arial Unicode MS"/>
+              </a:rPr>
+              <a:t>第三，裝不裝得下、電夠不夠。</a:t>
+            </a:r>
+            <a:r>
+              <a:rPr sz="1050" lang="zh-TW" dirty="0">
+                <a:solidFill>
+                  <a:srgbClr val="000000"/>
+                </a:solidFill>
+                <a:latin typeface="Arial Unicode MS"/>
+                <a:ea typeface="Arial Unicode MS"/>
+                <a:cs typeface="Arial Unicode MS"/>
+              </a:rPr>
+              <a:t>規格表上寫功耗十三點五瓦、重九百四十公克、尺寸十三公分乘十一公分。一台小車的前保險桿有沒有那個空間？電力系統撐不撐得住？這些在規格表的最後幾行，今天我們沒細講，但真的做車的時候會卡在這裡。
 </a:t>
             </a:r>
           </a:p>
@@ -5089,19 +4110,41 @@
                 <a:spcPts val="0"/>
               </a:spcBef>
               <a:spcAft>
-                <a:spcPts val="133"/>
+                <a:spcPts val="175"/>
               </a:spcAft>
             </a:pPr>
             <a:r>
-              <a:rPr sz="800" lang="zh-TW" dirty="0">
-                <a:solidFill>
-                  <a:srgbClr val="000000"/>
-                </a:solidFill>
-                <a:latin typeface="Arial Unicode MS"/>
-                <a:ea typeface="Arial Unicode MS"/>
-                <a:cs typeface="Arial Unicode MS"/>
-              </a:rPr>
-              <a:t>大家想三秒鐘。
+              <a:rPr sz="1050" lang="zh-TW" dirty="0">
+                <a:solidFill>
+                  <a:srgbClr val="000000"/>
+                </a:solidFill>
+                <a:latin typeface="Arial Unicode MS"/>
+                <a:ea typeface="Arial Unicode MS"/>
+                <a:cs typeface="Arial Unicode MS"/>
+              </a:rPr>
+              <a:t>所以今天的結論是：</a:t>
+            </a:r>
+            <a:r>
+              <a:rPr sz="1050" b="1" lang="zh-TW" dirty="0">
+                <a:solidFill>
+                  <a:srgbClr val="000000"/>
+                </a:solidFill>
+                <a:latin typeface="Arial Unicode MS"/>
+                <a:ea typeface="Arial Unicode MS"/>
+                <a:cs typeface="Arial Unicode MS"/>
+              </a:rPr>
+              <a:t>選感測器不是選最好的那一顆，是選一組剛好夠用的。</a:t>
+            </a:r>
+            <a:r>
+              <a:rPr sz="1050" lang="zh-TW" dirty="0">
+                <a:solidFill>
+                  <a:srgbClr val="000000"/>
+                </a:solidFill>
+                <a:latin typeface="Arial Unicode MS"/>
+                <a:ea typeface="Arial Unicode MS"/>
+                <a:cs typeface="Arial Unicode MS"/>
+              </a:rPr>
+              <a:t>
 </a:t>
             </a:r>
           </a:p>
@@ -5111,19 +4154,41 @@
                 <a:spcPts val="0"/>
               </a:spcBef>
               <a:spcAft>
-                <a:spcPts val="133"/>
+                <a:spcPts val="175"/>
               </a:spcAft>
             </a:pPr>
             <a:r>
-              <a:rPr sz="800" lang="zh-TW" dirty="0">
-                <a:solidFill>
-                  <a:srgbClr val="000000"/>
-                </a:solidFill>
-                <a:latin typeface="Arial Unicode MS"/>
-                <a:ea typeface="Arial Unicode MS"/>
-                <a:cs typeface="Arial Unicode MS"/>
-              </a:rPr>
-              <a:t>不對，而且理由有三個。
+              <a:rPr sz="1050" lang="zh-TW" dirty="0">
+                <a:solidFill>
+                  <a:srgbClr val="000000"/>
+                </a:solidFill>
+                <a:latin typeface="Arial Unicode MS"/>
+                <a:ea typeface="Arial Unicode MS"/>
+                <a:cs typeface="Arial Unicode MS"/>
+              </a:rPr>
+              <a:t>而「剛好夠用」要對著什麼講？對著你的 </a:t>
+            </a:r>
+            <a:r>
+              <a:rPr sz="1050" b="1" lang="zh-TW" dirty="0">
+                <a:solidFill>
+                  <a:srgbClr val="000000"/>
+                </a:solidFill>
+                <a:latin typeface="Arial Unicode MS"/>
+                <a:ea typeface="Arial Unicode MS"/>
+                <a:cs typeface="Arial Unicode MS"/>
+              </a:rPr>
+              <a:t>ODD</a:t>
+            </a:r>
+            <a:r>
+              <a:rPr sz="1050" lang="zh-TW" dirty="0">
+                <a:solidFill>
+                  <a:srgbClr val="000000"/>
+                </a:solidFill>
+                <a:latin typeface="Arial Unicode MS"/>
+                <a:ea typeface="Arial Unicode MS"/>
+                <a:cs typeface="Arial Unicode MS"/>
+              </a:rPr>
+              <a:t>——第二週學的那六格，你要在什麼速度、什麼路、什麼天氣下營運。
 </a:t>
             </a:r>
           </a:p>
@@ -5133,220 +4198,11 @@
                 <a:spcPts val="0"/>
               </a:spcBef>
               <a:spcAft>
-                <a:spcPts val="133"/>
+                <a:spcPts val="175"/>
               </a:spcAft>
             </a:pPr>
             <a:r>
-              <a:rPr sz="800" b="1" lang="zh-TW" dirty="0">
-                <a:solidFill>
-                  <a:srgbClr val="000000"/>
-                </a:solidFill>
-                <a:latin typeface="Arial Unicode MS"/>
-                <a:ea typeface="Arial Unicode MS"/>
-                <a:cs typeface="Arial Unicode MS"/>
-              </a:rPr>
-              <a:t>第一，錢。</a:t>
-            </a:r>
-            <a:r>
-              <a:rPr sz="800" lang="zh-TW" dirty="0">
-                <a:solidFill>
-                  <a:srgbClr val="000000"/>
-                </a:solidFill>
-                <a:latin typeface="Arial Unicode MS"/>
-                <a:ea typeface="Arial Unicode MS"/>
-                <a:cs typeface="Arial Unicode MS"/>
-              </a:rPr>
-              <a:t>這一顆的價錢大概是一般相機的幾十倍。一台校園接駁車時速二十，裝這個是浪費。
-</a:t>
-            </a:r>
-          </a:p>
-          <a:p>
-            <a:pPr algn="l">
-              <a:spcBef>
-                <a:spcPts val="0"/>
-              </a:spcBef>
-              <a:spcAft>
-                <a:spcPts val="133"/>
-              </a:spcAft>
-            </a:pPr>
-            <a:r>
-              <a:rPr sz="800" b="1" lang="zh-TW" dirty="0">
-                <a:solidFill>
-                  <a:srgbClr val="000000"/>
-                </a:solidFill>
-                <a:latin typeface="Arial Unicode MS"/>
-                <a:ea typeface="Arial Unicode MS"/>
-                <a:cs typeface="Arial Unicode MS"/>
-              </a:rPr>
-              <a:t>第二，它只看前面一百二十度。</a:t>
-            </a:r>
-            <a:r>
-              <a:rPr sz="800" lang="zh-TW" dirty="0">
-                <a:solidFill>
-                  <a:srgbClr val="000000"/>
-                </a:solidFill>
-                <a:latin typeface="Arial Unicode MS"/>
-                <a:ea typeface="Arial Unicode MS"/>
-                <a:cs typeface="Arial Unicode MS"/>
-              </a:rPr>
-              <a:t>河內的路口，機車是從</a:t>
-            </a:r>
-            <a:r>
-              <a:rPr sz="800" b="1" lang="zh-TW" dirty="0">
-                <a:solidFill>
-                  <a:srgbClr val="000000"/>
-                </a:solidFill>
-                <a:latin typeface="Arial Unicode MS"/>
-                <a:ea typeface="Arial Unicode MS"/>
-                <a:cs typeface="Arial Unicode MS"/>
-              </a:rPr>
-              <a:t>兩側</a:t>
-            </a:r>
-            <a:r>
-              <a:rPr sz="800" lang="zh-TW" dirty="0">
-                <a:solidFill>
-                  <a:srgbClr val="000000"/>
-                </a:solidFill>
-                <a:latin typeface="Arial Unicode MS"/>
-                <a:ea typeface="Arial Unicode MS"/>
-                <a:cs typeface="Arial Unicode MS"/>
-              </a:rPr>
-              <a:t>鑽出來的。AT128P 看不到兩側。所以就算你裝了它，還是得再裝別的東西補兩邊——這就回到第三週那張「每一種的弱點，由哪一種來補」的表。
-</a:t>
-            </a:r>
-          </a:p>
-          <a:p>
-            <a:pPr algn="l">
-              <a:spcBef>
-                <a:spcPts val="0"/>
-              </a:spcBef>
-              <a:spcAft>
-                <a:spcPts val="133"/>
-              </a:spcAft>
-            </a:pPr>
-            <a:r>
-              <a:rPr sz="800" b="1" lang="zh-TW" dirty="0">
-                <a:solidFill>
-                  <a:srgbClr val="000000"/>
-                </a:solidFill>
-                <a:latin typeface="Arial Unicode MS"/>
-                <a:ea typeface="Arial Unicode MS"/>
-                <a:cs typeface="Arial Unicode MS"/>
-              </a:rPr>
-              <a:t>第三，裝不裝得下、電夠不夠。</a:t>
-            </a:r>
-            <a:r>
-              <a:rPr sz="800" lang="zh-TW" dirty="0">
-                <a:solidFill>
-                  <a:srgbClr val="000000"/>
-                </a:solidFill>
-                <a:latin typeface="Arial Unicode MS"/>
-                <a:ea typeface="Arial Unicode MS"/>
-                <a:cs typeface="Arial Unicode MS"/>
-              </a:rPr>
-              <a:t>規格表上寫功耗十三點五瓦、重九百四十公克、尺寸十三公分乘十一公分。一台小車的前保險桿有沒有那個空間？電力系統撐不撐得住？這些在規格表的最後幾行，今天我們沒細講，但真的做車的時候會卡在這裡。
-</a:t>
-            </a:r>
-          </a:p>
-          <a:p>
-            <a:pPr algn="l">
-              <a:spcBef>
-                <a:spcPts val="0"/>
-              </a:spcBef>
-              <a:spcAft>
-                <a:spcPts val="133"/>
-              </a:spcAft>
-            </a:pPr>
-            <a:r>
-              <a:rPr sz="800" lang="zh-TW" dirty="0">
-                <a:solidFill>
-                  <a:srgbClr val="000000"/>
-                </a:solidFill>
-                <a:latin typeface="Arial Unicode MS"/>
-                <a:ea typeface="Arial Unicode MS"/>
-                <a:cs typeface="Arial Unicode MS"/>
-              </a:rPr>
-              <a:t>所以今天的結論是：</a:t>
-            </a:r>
-            <a:r>
-              <a:rPr sz="800" b="1" lang="zh-TW" dirty="0">
-                <a:solidFill>
-                  <a:srgbClr val="000000"/>
-                </a:solidFill>
-                <a:latin typeface="Arial Unicode MS"/>
-                <a:ea typeface="Arial Unicode MS"/>
-                <a:cs typeface="Arial Unicode MS"/>
-              </a:rPr>
-              <a:t>選感測器不是選最好的那一顆，是選一組剛好夠用的。</a:t>
-            </a:r>
-            <a:r>
-              <a:rPr sz="800" lang="zh-TW" dirty="0">
-                <a:solidFill>
-                  <a:srgbClr val="000000"/>
-                </a:solidFill>
-                <a:latin typeface="Arial Unicode MS"/>
-                <a:ea typeface="Arial Unicode MS"/>
-                <a:cs typeface="Arial Unicode MS"/>
-              </a:rPr>
-              <a:t>
-</a:t>
-            </a:r>
-          </a:p>
-          <a:p>
-            <a:pPr algn="l">
-              <a:spcBef>
-                <a:spcPts val="0"/>
-              </a:spcBef>
-              <a:spcAft>
-                <a:spcPts val="133"/>
-              </a:spcAft>
-            </a:pPr>
-            <a:r>
-              <a:rPr sz="800" lang="zh-TW" dirty="0">
-                <a:solidFill>
-                  <a:srgbClr val="000000"/>
-                </a:solidFill>
-                <a:latin typeface="Arial Unicode MS"/>
-                <a:ea typeface="Arial Unicode MS"/>
-                <a:cs typeface="Arial Unicode MS"/>
-              </a:rPr>
-              <a:t>而「剛好夠用」要對著什麼講？對著你的 </a:t>
-            </a:r>
-            <a:r>
-              <a:rPr sz="800" b="1" lang="zh-TW" dirty="0">
-                <a:solidFill>
-                  <a:srgbClr val="000000"/>
-                </a:solidFill>
-                <a:latin typeface="Arial Unicode MS"/>
-                <a:ea typeface="Arial Unicode MS"/>
-                <a:cs typeface="Arial Unicode MS"/>
-              </a:rPr>
-              <a:t>ODD</a:t>
-            </a:r>
-            <a:r>
-              <a:rPr sz="800" lang="zh-TW" dirty="0">
-                <a:solidFill>
-                  <a:srgbClr val="000000"/>
-                </a:solidFill>
-                <a:latin typeface="Arial Unicode MS"/>
-                <a:ea typeface="Arial Unicode MS"/>
-                <a:cs typeface="Arial Unicode MS"/>
-              </a:rPr>
-              <a:t>——第二週學的那六格，你要在什麼速度、什麼路、什麼天氣下營運。
-</a:t>
-            </a:r>
-          </a:p>
-          <a:p>
-            <a:pPr algn="l">
-              <a:spcBef>
-                <a:spcPts val="0"/>
-              </a:spcBef>
-              <a:spcAft>
-                <a:spcPts val="133"/>
-              </a:spcAft>
-            </a:pPr>
-            <a:r>
-              <a:rPr sz="800" lang="zh-TW" dirty="0">
+              <a:rPr sz="1050" lang="zh-TW" dirty="0">
                 <a:solidFill>
                   <a:srgbClr val="000000"/>
                 </a:solidFill>
@@ -5463,30 +4319,19 @@
                 <a:spcPts val="0"/>
               </a:spcBef>
               <a:spcAft>
-                <a:spcPts val="175"/>
+                <a:spcPts val="200"/>
               </a:spcAft>
             </a:pPr>
             <a:r>
-              <a:rPr sz="1050" b="1" lang="zh-TW" dirty="0">
-                <a:solidFill>
-                  <a:srgbClr val="000000"/>
-                </a:solidFill>
-                <a:latin typeface="Arial Unicode MS"/>
-                <a:ea typeface="Arial Unicode MS"/>
-                <a:cs typeface="Arial Unicode MS"/>
-              </a:rPr>
-              <a:t>▍這一張要做什麼</a:t>
-            </a:r>
-            <a:r>
-              <a:rPr sz="1050" lang="zh-TW" dirty="0">
-                <a:solidFill>
-                  <a:srgbClr val="000000"/>
-                </a:solidFill>
-                <a:latin typeface="Arial Unicode MS"/>
-                <a:ea typeface="Arial Unicode MS"/>
-                <a:cs typeface="Arial Unicode MS"/>
-              </a:rPr>
-              <a:t>
+              <a:rPr sz="1200" lang="zh-TW" dirty="0">
+                <a:solidFill>
+                  <a:srgbClr val="000000"/>
+                </a:solidFill>
+                <a:latin typeface="Arial Unicode MS"/>
+                <a:ea typeface="Arial Unicode MS"/>
+                <a:cs typeface="Arial Unicode MS"/>
+              </a:rPr>
+              <a:t>最後四分鐘，四句是非題。四人一組討論，每題一分鐘。
 </a:t>
             </a:r>
           </a:p>
@@ -5496,19 +4341,19 @@
                 <a:spcPts val="0"/>
               </a:spcBef>
               <a:spcAft>
-                <a:spcPts val="175"/>
+                <a:spcPts val="200"/>
               </a:spcAft>
             </a:pPr>
             <a:r>
-              <a:rPr sz="1050" lang="zh-TW" dirty="0">
-                <a:solidFill>
-                  <a:srgbClr val="000000"/>
-                </a:solidFill>
-                <a:latin typeface="Arial Unicode MS"/>
-                <a:ea typeface="Arial Unicode MS"/>
-                <a:cs typeface="Arial Unicode MS"/>
-              </a:rPr>
-              <a:t>四句是非題，當作本章總複習。
+              <a:rPr sz="1200" lang="zh-TW" dirty="0">
+                <a:solidFill>
+                  <a:srgbClr val="000000"/>
+                </a:solidFill>
+                <a:latin typeface="Arial Unicode MS"/>
+                <a:ea typeface="Arial Unicode MS"/>
+                <a:cs typeface="Arial Unicode MS"/>
+              </a:rPr>
+              <a:t>四句我先唸一次，唸完再開始討論。
 </a:t>
             </a:r>
           </a:p>
@@ -5518,30 +4363,19 @@
                 <a:spcPts val="0"/>
               </a:spcBef>
               <a:spcAft>
-                <a:spcPts val="175"/>
+                <a:spcPts val="200"/>
               </a:spcAft>
             </a:pPr>
             <a:r>
-              <a:rPr sz="1050" b="1" lang="zh-TW" dirty="0">
-                <a:solidFill>
-                  <a:srgbClr val="000000"/>
-                </a:solidFill>
-                <a:latin typeface="Arial Unicode MS"/>
-                <a:ea typeface="Arial Unicode MS"/>
-                <a:cs typeface="Arial Unicode MS"/>
-              </a:rPr>
-              <a:t>▍畫面上圈這裡</a:t>
-            </a:r>
-            <a:r>
-              <a:rPr sz="1050" lang="zh-TW" dirty="0">
-                <a:solidFill>
-                  <a:srgbClr val="000000"/>
-                </a:solidFill>
-                <a:latin typeface="Arial Unicode MS"/>
-                <a:ea typeface="Arial Unicode MS"/>
-                <a:cs typeface="Arial Unicode MS"/>
-              </a:rPr>
-              <a:t>
+              <a:rPr sz="1200" lang="zh-TW" dirty="0">
+                <a:solidFill>
+                  <a:srgbClr val="000000"/>
+                </a:solidFill>
+                <a:latin typeface="Arial Unicode MS"/>
+                <a:ea typeface="Arial Unicode MS"/>
+                <a:cs typeface="Arial Unicode MS"/>
+              </a:rPr>
+              <a:t>第一句：規格表寫「測距 200 公尺」，就表示 200 公尺內的東西都看得到。
 </a:t>
             </a:r>
           </a:p>
@@ -5551,19 +4385,19 @@
                 <a:spcPts val="0"/>
               </a:spcBef>
               <a:spcAft>
-                <a:spcPts val="175"/>
+                <a:spcPts val="200"/>
               </a:spcAft>
             </a:pPr>
             <a:r>
-              <a:rPr sz="1050" lang="zh-TW" dirty="0">
-                <a:solidFill>
-                  <a:srgbClr val="000000"/>
-                </a:solidFill>
-                <a:latin typeface="Arial Unicode MS"/>
-                <a:ea typeface="Arial Unicode MS"/>
-                <a:cs typeface="Arial Unicode MS"/>
-              </a:rPr>
-              <a:t>一句一句圈，每句給一分鐘先表態。
+              <a:rPr sz="1200" lang="zh-TW" dirty="0">
+                <a:solidFill>
+                  <a:srgbClr val="000000"/>
+                </a:solidFill>
+                <a:latin typeface="Arial Unicode MS"/>
+                <a:ea typeface="Arial Unicode MS"/>
+                <a:cs typeface="Arial Unicode MS"/>
+              </a:rPr>
+              <a:t>第二句：同一顆影像感測器，視野是固定的。
 </a:t>
             </a:r>
           </a:p>
@@ -5573,30 +4407,19 @@
                 <a:spcPts val="0"/>
               </a:spcBef>
               <a:spcAft>
-                <a:spcPts val="175"/>
+                <a:spcPts val="200"/>
               </a:spcAft>
             </a:pPr>
             <a:r>
-              <a:rPr sz="1050" b="1" lang="zh-TW" dirty="0">
-                <a:solidFill>
-                  <a:srgbClr val="000000"/>
-                </a:solidFill>
-                <a:latin typeface="Arial Unicode MS"/>
-                <a:ea typeface="Arial Unicode MS"/>
-                <a:cs typeface="Arial Unicode MS"/>
-              </a:rPr>
-              <a:t>▍以下照著唸</a:t>
-            </a:r>
-            <a:r>
-              <a:rPr sz="1050" lang="zh-TW" dirty="0">
-                <a:solidFill>
-                  <a:srgbClr val="000000"/>
-                </a:solidFill>
-                <a:latin typeface="Arial Unicode MS"/>
-                <a:ea typeface="Arial Unicode MS"/>
-                <a:cs typeface="Arial Unicode MS"/>
-              </a:rPr>
-              <a:t>
+              <a:rPr sz="1200" lang="zh-TW" dirty="0">
+                <a:solidFill>
+                  <a:srgbClr val="000000"/>
+                </a:solidFill>
+                <a:latin typeface="Arial Unicode MS"/>
+                <a:ea typeface="Arial Unicode MS"/>
+                <a:cs typeface="Arial Unicode MS"/>
+              </a:rPr>
+              <a:t>第三句：每秒點數愈大，遠處的人就看得愈清楚。
 </a:t>
             </a:r>
           </a:p>
@@ -5606,19 +4429,19 @@
                 <a:spcPts val="0"/>
               </a:spcBef>
               <a:spcAft>
-                <a:spcPts val="175"/>
+                <a:spcPts val="200"/>
               </a:spcAft>
             </a:pPr>
             <a:r>
-              <a:rPr sz="1050" lang="zh-TW" dirty="0">
-                <a:solidFill>
-                  <a:srgbClr val="000000"/>
-                </a:solidFill>
-                <a:latin typeface="Arial Unicode MS"/>
-                <a:ea typeface="Arial Unicode MS"/>
-                <a:cs typeface="Arial Unicode MS"/>
-              </a:rPr>
-              <a:t>最後四分鐘，四句是非題。四人一組討論，每題一分鐘。
+              <a:rPr sz="1200" lang="zh-TW" dirty="0">
+                <a:solidFill>
+                  <a:srgbClr val="000000"/>
+                </a:solidFill>
+                <a:latin typeface="Arial Unicode MS"/>
+                <a:ea typeface="Arial Unicode MS"/>
+                <a:cs typeface="Arial Unicode MS"/>
+              </a:rPr>
+              <a:t>第四句：兩顆感測器各自都好，合起來就一定好。
 </a:t>
             </a:r>
           </a:p>
@@ -5628,19 +4451,41 @@
                 <a:spcPts val="0"/>
               </a:spcBef>
               <a:spcAft>
-                <a:spcPts val="175"/>
+                <a:spcPts val="200"/>
               </a:spcAft>
             </a:pPr>
             <a:r>
-              <a:rPr sz="1050" lang="zh-TW" dirty="0">
-                <a:solidFill>
-                  <a:srgbClr val="000000"/>
-                </a:solidFill>
-                <a:latin typeface="Arial Unicode MS"/>
-                <a:ea typeface="Arial Unicode MS"/>
-                <a:cs typeface="Arial Unicode MS"/>
-              </a:rPr>
-              <a:t>四句我先唸一次，唸完再開始討論。
+              <a:rPr sz="1200" lang="zh-TW" dirty="0">
+                <a:solidFill>
+                  <a:srgbClr val="000000"/>
+                </a:solidFill>
+                <a:latin typeface="Arial Unicode MS"/>
+                <a:ea typeface="Arial Unicode MS"/>
+                <a:cs typeface="Arial Unicode MS"/>
+              </a:rPr>
+              <a:t>我給四個提示詞，分別是</a:t>
+            </a:r>
+            <a:r>
+              <a:rPr sz="1200" b="1" lang="zh-TW" dirty="0">
+                <a:solidFill>
+                  <a:srgbClr val="000000"/>
+                </a:solidFill>
+                <a:latin typeface="Arial Unicode MS"/>
+                <a:ea typeface="Arial Unicode MS"/>
+                <a:cs typeface="Arial Unicode MS"/>
+              </a:rPr>
+              <a:t>反射率、鏡頭、換算成角度、標定</a:t>
+            </a:r>
+            <a:r>
+              <a:rPr sz="1200" lang="zh-TW" dirty="0">
+                <a:solidFill>
+                  <a:srgbClr val="000000"/>
+                </a:solidFill>
+                <a:latin typeface="Arial Unicode MS"/>
+                <a:ea typeface="Arial Unicode MS"/>
+                <a:cs typeface="Arial Unicode MS"/>
+              </a:rPr>
+              <a:t>。
 </a:t>
             </a:r>
           </a:p>
@@ -5650,143 +4495,11 @@
                 <a:spcPts val="0"/>
               </a:spcBef>
               <a:spcAft>
-                <a:spcPts val="175"/>
+                <a:spcPts val="200"/>
               </a:spcAft>
             </a:pPr>
             <a:r>
-              <a:rPr sz="1050" lang="zh-TW" dirty="0">
-                <a:solidFill>
-                  <a:srgbClr val="000000"/>
-                </a:solidFill>
-                <a:latin typeface="Arial Unicode MS"/>
-                <a:ea typeface="Arial Unicode MS"/>
-                <a:cs typeface="Arial Unicode MS"/>
-              </a:rPr>
-              <a:t>第一句：規格表寫「測距 200 公尺」，就表示 200 公尺內的東西都看得到。
-</a:t>
-            </a:r>
-          </a:p>
-          <a:p>
-            <a:pPr algn="l">
-              <a:spcBef>
-                <a:spcPts val="0"/>
-              </a:spcBef>
-              <a:spcAft>
-                <a:spcPts val="175"/>
-              </a:spcAft>
-            </a:pPr>
-            <a:r>
-              <a:rPr sz="1050" lang="zh-TW" dirty="0">
-                <a:solidFill>
-                  <a:srgbClr val="000000"/>
-                </a:solidFill>
-                <a:latin typeface="Arial Unicode MS"/>
-                <a:ea typeface="Arial Unicode MS"/>
-                <a:cs typeface="Arial Unicode MS"/>
-              </a:rPr>
-              <a:t>第二句：同一顆影像感測器，視野是固定的。
-</a:t>
-            </a:r>
-          </a:p>
-          <a:p>
-            <a:pPr algn="l">
-              <a:spcBef>
-                <a:spcPts val="0"/>
-              </a:spcBef>
-              <a:spcAft>
-                <a:spcPts val="175"/>
-              </a:spcAft>
-            </a:pPr>
-            <a:r>
-              <a:rPr sz="1050" lang="zh-TW" dirty="0">
-                <a:solidFill>
-                  <a:srgbClr val="000000"/>
-                </a:solidFill>
-                <a:latin typeface="Arial Unicode MS"/>
-                <a:ea typeface="Arial Unicode MS"/>
-                <a:cs typeface="Arial Unicode MS"/>
-              </a:rPr>
-              <a:t>第三句：每秒點數愈大，遠處的人就看得愈清楚。
-</a:t>
-            </a:r>
-          </a:p>
-          <a:p>
-            <a:pPr algn="l">
-              <a:spcBef>
-                <a:spcPts val="0"/>
-              </a:spcBef>
-              <a:spcAft>
-                <a:spcPts val="175"/>
-              </a:spcAft>
-            </a:pPr>
-            <a:r>
-              <a:rPr sz="1050" lang="zh-TW" dirty="0">
-                <a:solidFill>
-                  <a:srgbClr val="000000"/>
-                </a:solidFill>
-                <a:latin typeface="Arial Unicode MS"/>
-                <a:ea typeface="Arial Unicode MS"/>
-                <a:cs typeface="Arial Unicode MS"/>
-              </a:rPr>
-              <a:t>第四句：兩顆感測器各自都好，合起來就一定好。
-</a:t>
-            </a:r>
-          </a:p>
-          <a:p>
-            <a:pPr algn="l">
-              <a:spcBef>
-                <a:spcPts val="0"/>
-              </a:spcBef>
-              <a:spcAft>
-                <a:spcPts val="175"/>
-              </a:spcAft>
-            </a:pPr>
-            <a:r>
-              <a:rPr sz="1050" lang="zh-TW" dirty="0">
-                <a:solidFill>
-                  <a:srgbClr val="000000"/>
-                </a:solidFill>
-                <a:latin typeface="Arial Unicode MS"/>
-                <a:ea typeface="Arial Unicode MS"/>
-                <a:cs typeface="Arial Unicode MS"/>
-              </a:rPr>
-              <a:t>我給四個提示詞，分別是</a:t>
-            </a:r>
-            <a:r>
-              <a:rPr sz="1050" b="1" lang="zh-TW" dirty="0">
-                <a:solidFill>
-                  <a:srgbClr val="000000"/>
-                </a:solidFill>
-                <a:latin typeface="Arial Unicode MS"/>
-                <a:ea typeface="Arial Unicode MS"/>
-                <a:cs typeface="Arial Unicode MS"/>
-              </a:rPr>
-              <a:t>反射率、鏡頭、換算成角度、標定</a:t>
-            </a:r>
-            <a:r>
-              <a:rPr sz="1050" lang="zh-TW" dirty="0">
-                <a:solidFill>
-                  <a:srgbClr val="000000"/>
-                </a:solidFill>
-                <a:latin typeface="Arial Unicode MS"/>
-                <a:ea typeface="Arial Unicode MS"/>
-                <a:cs typeface="Arial Unicode MS"/>
-              </a:rPr>
-              <a:t>。
-</a:t>
-            </a:r>
-          </a:p>
-          <a:p>
-            <a:pPr algn="l">
-              <a:spcBef>
-                <a:spcPts val="0"/>
-              </a:spcBef>
-              <a:spcAft>
-                <a:spcPts val="175"/>
-              </a:spcAft>
-            </a:pPr>
-            <a:r>
-              <a:rPr sz="1050" lang="zh-TW" dirty="0">
+              <a:rPr sz="1200" lang="zh-TW" dirty="0">
                 <a:solidFill>
                   <a:srgbClr val="000000"/>
                 </a:solidFill>
@@ -5903,30 +4616,41 @@
                 <a:spcPts val="0"/>
               </a:spcBef>
               <a:spcAft>
-                <a:spcPts val="150"/>
+                <a:spcPts val="200"/>
               </a:spcAft>
             </a:pPr>
             <a:r>
-              <a:rPr sz="900" b="1" lang="zh-TW" dirty="0">
-                <a:solidFill>
-                  <a:srgbClr val="000000"/>
-                </a:solidFill>
-                <a:latin typeface="Arial Unicode MS"/>
-                <a:ea typeface="Arial Unicode MS"/>
-                <a:cs typeface="Arial Unicode MS"/>
-              </a:rPr>
-              <a:t>▍這一張要做什麼</a:t>
-            </a:r>
-            <a:r>
-              <a:rPr sz="900" lang="zh-TW" dirty="0">
-                <a:solidFill>
-                  <a:srgbClr val="000000"/>
-                </a:solidFill>
-                <a:latin typeface="Arial Unicode MS"/>
-                <a:ea typeface="Arial Unicode MS"/>
-                <a:cs typeface="Arial Unicode MS"/>
-              </a:rPr>
-              <a:t>
+              <a:rPr sz="1200" lang="zh-TW" dirty="0">
+                <a:solidFill>
+                  <a:srgbClr val="000000"/>
+                </a:solidFill>
+                <a:latin typeface="Arial Unicode MS"/>
+                <a:ea typeface="Arial Unicode MS"/>
+                <a:cs typeface="Arial Unicode MS"/>
+              </a:rPr>
+              <a:t>答案：</a:t>
+            </a:r>
+            <a:r>
+              <a:rPr sz="1200" b="1" lang="zh-TW" dirty="0">
+                <a:solidFill>
+                  <a:srgbClr val="000000"/>
+                </a:solidFill>
+                <a:latin typeface="Arial Unicode MS"/>
+                <a:ea typeface="Arial Unicode MS"/>
+                <a:cs typeface="Arial Unicode MS"/>
+              </a:rPr>
+              <a:t>四句都錯</a:t>
+            </a:r>
+            <a:r>
+              <a:rPr sz="1200" lang="zh-TW" dirty="0">
+                <a:solidFill>
+                  <a:srgbClr val="000000"/>
+                </a:solidFill>
+                <a:latin typeface="Arial Unicode MS"/>
+                <a:ea typeface="Arial Unicode MS"/>
+                <a:cs typeface="Arial Unicode MS"/>
+              </a:rPr>
+              <a:t>，而且每一句錯的方式不一樣。
 </a:t>
             </a:r>
           </a:p>
@@ -5936,19 +4660,30 @@
                 <a:spcPts val="0"/>
               </a:spcBef>
               <a:spcAft>
-                <a:spcPts val="150"/>
+                <a:spcPts val="200"/>
               </a:spcAft>
             </a:pPr>
             <a:r>
-              <a:rPr sz="900" lang="zh-TW" dirty="0">
-                <a:solidFill>
-                  <a:srgbClr val="000000"/>
-                </a:solidFill>
-                <a:latin typeface="Arial Unicode MS"/>
-                <a:ea typeface="Arial Unicode MS"/>
-                <a:cs typeface="Arial Unicode MS"/>
-              </a:rPr>
-              <a:t>公布答案並解釋每一句錯在哪。
+              <a:rPr sz="1200" b="1" lang="zh-TW" dirty="0">
+                <a:solidFill>
+                  <a:srgbClr val="000000"/>
+                </a:solidFill>
+                <a:latin typeface="Arial Unicode MS"/>
+                <a:ea typeface="Arial Unicode MS"/>
+                <a:cs typeface="Arial Unicode MS"/>
+              </a:rPr>
+              <a:t>第一句</a:t>
+            </a:r>
+            <a:r>
+              <a:rPr sz="1200" lang="zh-TW" dirty="0">
+                <a:solidFill>
+                  <a:srgbClr val="000000"/>
+                </a:solidFill>
+                <a:latin typeface="Arial Unicode MS"/>
+                <a:ea typeface="Arial Unicode MS"/>
+                <a:cs typeface="Arial Unicode MS"/>
+              </a:rPr>
+              <a:t>錯在沒問條件。測距一定要追問是對百分之幾反射率量的。OS1 對白色的東西一百七十公尺，對黑色只剩九十。上午講過，廣告會寫大的那個。
 </a:t>
             </a:r>
           </a:p>
@@ -5958,30 +4693,52 @@
                 <a:spcPts val="0"/>
               </a:spcBef>
               <a:spcAft>
-                <a:spcPts val="150"/>
+                <a:spcPts val="200"/>
               </a:spcAft>
             </a:pPr>
             <a:r>
-              <a:rPr sz="900" b="1" lang="zh-TW" dirty="0">
-                <a:solidFill>
-                  <a:srgbClr val="000000"/>
-                </a:solidFill>
-                <a:latin typeface="Arial Unicode MS"/>
-                <a:ea typeface="Arial Unicode MS"/>
-                <a:cs typeface="Arial Unicode MS"/>
-              </a:rPr>
-              <a:t>▍畫面上圈這裡</a:t>
-            </a:r>
-            <a:r>
-              <a:rPr sz="900" lang="zh-TW" dirty="0">
-                <a:solidFill>
-                  <a:srgbClr val="000000"/>
-                </a:solidFill>
-                <a:latin typeface="Arial Unicode MS"/>
-                <a:ea typeface="Arial Unicode MS"/>
-                <a:cs typeface="Arial Unicode MS"/>
-              </a:rPr>
-              <a:t>
+              <a:rPr sz="1200" b="1" lang="zh-TW" dirty="0">
+                <a:solidFill>
+                  <a:srgbClr val="000000"/>
+                </a:solidFill>
+                <a:latin typeface="Arial Unicode MS"/>
+                <a:ea typeface="Arial Unicode MS"/>
+                <a:cs typeface="Arial Unicode MS"/>
+              </a:rPr>
+              <a:t>第二句</a:t>
+            </a:r>
+            <a:r>
+              <a:rPr sz="1200" lang="zh-TW" dirty="0">
+                <a:solidFill>
+                  <a:srgbClr val="000000"/>
+                </a:solidFill>
+                <a:latin typeface="Arial Unicode MS"/>
+                <a:ea typeface="Arial Unicode MS"/>
+                <a:cs typeface="Arial Unicode MS"/>
+              </a:rPr>
+              <a:t>錯在把視野當成晶片的規格。視野是</a:t>
+            </a:r>
+            <a:r>
+              <a:rPr sz="1200" b="1" lang="zh-TW" dirty="0">
+                <a:solidFill>
+                  <a:srgbClr val="000000"/>
+                </a:solidFill>
+                <a:latin typeface="Arial Unicode MS"/>
+                <a:ea typeface="Arial Unicode MS"/>
+                <a:cs typeface="Arial Unicode MS"/>
+              </a:rPr>
+              <a:t>鏡頭</a:t>
+            </a:r>
+            <a:r>
+              <a:rPr sz="1200" lang="zh-TW" dirty="0">
+                <a:solidFill>
+                  <a:srgbClr val="000000"/>
+                </a:solidFill>
+                <a:latin typeface="Arial Unicode MS"/>
+                <a:ea typeface="Arial Unicode MS"/>
+                <a:cs typeface="Arial Unicode MS"/>
+              </a:rPr>
+              <a:t>決定的。同一塊晶片，八公釐的鏡頭看四十二度，三點六公釐的看八十一度。
 </a:t>
             </a:r>
           </a:p>
@@ -5991,19 +4748,52 @@
                 <a:spcPts val="0"/>
               </a:spcBef>
               <a:spcAft>
-                <a:spcPts val="150"/>
+                <a:spcPts val="200"/>
               </a:spcAft>
             </a:pPr>
             <a:r>
-              <a:rPr sz="900" lang="zh-TW" dirty="0">
-                <a:solidFill>
-                  <a:srgbClr val="000000"/>
-                </a:solidFill>
-                <a:latin typeface="Arial Unicode MS"/>
-                <a:ea typeface="Arial Unicode MS"/>
-                <a:cs typeface="Arial Unicode MS"/>
-              </a:rPr>
-              <a:t>四句依序圈，每一句都回到今天自己抄下來的數字，不要只講道理。
+              <a:rPr sz="1200" b="1" lang="zh-TW" dirty="0">
+                <a:solidFill>
+                  <a:srgbClr val="000000"/>
+                </a:solidFill>
+                <a:latin typeface="Arial Unicode MS"/>
+                <a:ea typeface="Arial Unicode MS"/>
+                <a:cs typeface="Arial Unicode MS"/>
+              </a:rPr>
+              <a:t>第三句</a:t>
+            </a:r>
+            <a:r>
+              <a:rPr sz="1200" lang="zh-TW" dirty="0">
+                <a:solidFill>
+                  <a:srgbClr val="000000"/>
+                </a:solidFill>
+                <a:latin typeface="Arial Unicode MS"/>
+                <a:ea typeface="Arial Unicode MS"/>
+                <a:cs typeface="Arial Unicode MS"/>
+              </a:rPr>
+              <a:t>錯在拿兩顆不同的光達直接比點數。OS1 每秒兩百六十萬點，AT128P 只有一百五十萬，可是四十公尺的目標上，OS1 只有九個點、AT128P 有一百二十一個——因為 OS1 把點灑滿三百六十度。每秒點數要</a:t>
+            </a:r>
+            <a:r>
+              <a:rPr sz="1200" b="1" lang="zh-TW" dirty="0">
+                <a:solidFill>
+                  <a:srgbClr val="000000"/>
+                </a:solidFill>
+                <a:latin typeface="Arial Unicode MS"/>
+                <a:ea typeface="Arial Unicode MS"/>
+                <a:cs typeface="Arial Unicode MS"/>
+              </a:rPr>
+              <a:t>先換算成角度</a:t>
+            </a:r>
+            <a:r>
+              <a:rPr sz="1200" lang="zh-TW" dirty="0">
+                <a:solidFill>
+                  <a:srgbClr val="000000"/>
+                </a:solidFill>
+                <a:latin typeface="Arial Unicode MS"/>
+                <a:ea typeface="Arial Unicode MS"/>
+                <a:cs typeface="Arial Unicode MS"/>
+              </a:rPr>
+              <a:t>，再換算成你關心的那個距離上的間距。
 </a:t>
             </a:r>
           </a:p>
@@ -6013,30 +4803,63 @@
                 <a:spcPts val="0"/>
               </a:spcBef>
               <a:spcAft>
-                <a:spcPts val="150"/>
+                <a:spcPts val="200"/>
               </a:spcAft>
             </a:pPr>
             <a:r>
-              <a:rPr sz="900" b="1" lang="zh-TW" dirty="0">
-                <a:solidFill>
-                  <a:srgbClr val="000000"/>
-                </a:solidFill>
-                <a:latin typeface="Arial Unicode MS"/>
-                <a:ea typeface="Arial Unicode MS"/>
-                <a:cs typeface="Arial Unicode MS"/>
-              </a:rPr>
-              <a:t>▍以下照著唸</a:t>
-            </a:r>
-            <a:r>
-              <a:rPr sz="900" lang="zh-TW" dirty="0">
-                <a:solidFill>
-                  <a:srgbClr val="000000"/>
-                </a:solidFill>
-                <a:latin typeface="Arial Unicode MS"/>
-                <a:ea typeface="Arial Unicode MS"/>
-                <a:cs typeface="Arial Unicode MS"/>
-              </a:rPr>
-              <a:t>
+              <a:rPr sz="1200" lang="zh-TW" dirty="0">
+                <a:solidFill>
+                  <a:srgbClr val="000000"/>
+                </a:solidFill>
+                <a:latin typeface="Arial Unicode MS"/>
+                <a:ea typeface="Arial Unicode MS"/>
+                <a:cs typeface="Arial Unicode MS"/>
+              </a:rPr>
+              <a:t>這裡要跟第一節第十二張分清楚：</a:t>
+            </a:r>
+            <a:r>
+              <a:rPr sz="1200" b="1" lang="zh-TW" dirty="0">
+                <a:solidFill>
+                  <a:srgbClr val="000000"/>
+                </a:solidFill>
+                <a:latin typeface="Arial Unicode MS"/>
+                <a:ea typeface="Arial Unicode MS"/>
+                <a:cs typeface="Arial Unicode MS"/>
+              </a:rPr>
+              <a:t>同一顆</a:t>
+            </a:r>
+            <a:r>
+              <a:rPr sz="1200" lang="zh-TW" dirty="0">
+                <a:solidFill>
+                  <a:srgbClr val="000000"/>
+                </a:solidFill>
+                <a:latin typeface="Arial Unicode MS"/>
+                <a:ea typeface="Arial Unicode MS"/>
+                <a:cs typeface="Arial Unicode MS"/>
+              </a:rPr>
+              <a:t>光達從 1024 切到 2048，點數加倍、確實看得比較清楚，那是對的。錯的是拿</a:t>
+            </a:r>
+            <a:r>
+              <a:rPr sz="1200" b="1" lang="zh-TW" dirty="0">
+                <a:solidFill>
+                  <a:srgbClr val="000000"/>
+                </a:solidFill>
+                <a:latin typeface="Arial Unicode MS"/>
+                <a:ea typeface="Arial Unicode MS"/>
+                <a:cs typeface="Arial Unicode MS"/>
+              </a:rPr>
+              <a:t>兩顆不同的</a:t>
+            </a:r>
+            <a:r>
+              <a:rPr sz="1200" lang="zh-TW" dirty="0">
+                <a:solidFill>
+                  <a:srgbClr val="000000"/>
+                </a:solidFill>
+                <a:latin typeface="Arial Unicode MS"/>
+                <a:ea typeface="Arial Unicode MS"/>
+                <a:cs typeface="Arial Unicode MS"/>
+              </a:rPr>
+              <a:t>光達比點數大小。
 </a:t>
             </a:r>
           </a:p>
@@ -6046,41 +4869,30 @@
                 <a:spcPts val="0"/>
               </a:spcBef>
               <a:spcAft>
-                <a:spcPts val="150"/>
+                <a:spcPts val="200"/>
               </a:spcAft>
             </a:pPr>
             <a:r>
-              <a:rPr sz="900" lang="zh-TW" dirty="0">
-                <a:solidFill>
-                  <a:srgbClr val="000000"/>
-                </a:solidFill>
-                <a:latin typeface="Arial Unicode MS"/>
-                <a:ea typeface="Arial Unicode MS"/>
-                <a:cs typeface="Arial Unicode MS"/>
-              </a:rPr>
-              <a:t>答案：</a:t>
-            </a:r>
-            <a:r>
-              <a:rPr sz="900" b="1" lang="zh-TW" dirty="0">
-                <a:solidFill>
-                  <a:srgbClr val="000000"/>
-                </a:solidFill>
-                <a:latin typeface="Arial Unicode MS"/>
-                <a:ea typeface="Arial Unicode MS"/>
-                <a:cs typeface="Arial Unicode MS"/>
-              </a:rPr>
-              <a:t>四句都錯</a:t>
-            </a:r>
-            <a:r>
-              <a:rPr sz="900" lang="zh-TW" dirty="0">
-                <a:solidFill>
-                  <a:srgbClr val="000000"/>
-                </a:solidFill>
-                <a:latin typeface="Arial Unicode MS"/>
-                <a:ea typeface="Arial Unicode MS"/>
-                <a:cs typeface="Arial Unicode MS"/>
-              </a:rPr>
-              <a:t>，而且每一句錯的方式不一樣。
+              <a:rPr sz="1200" b="1" lang="zh-TW" dirty="0">
+                <a:solidFill>
+                  <a:srgbClr val="000000"/>
+                </a:solidFill>
+                <a:latin typeface="Arial Unicode MS"/>
+                <a:ea typeface="Arial Unicode MS"/>
+                <a:cs typeface="Arial Unicode MS"/>
+              </a:rPr>
+              <a:t>第四句</a:t>
+            </a:r>
+            <a:r>
+              <a:rPr sz="1200" lang="zh-TW" dirty="0">
+                <a:solidFill>
+                  <a:srgbClr val="000000"/>
+                </a:solidFill>
+                <a:latin typeface="Arial Unicode MS"/>
+                <a:ea typeface="Arial Unicode MS"/>
+                <a:cs typeface="Arial Unicode MS"/>
+              </a:rPr>
+              <a:t>錯在以為感測器是各自獨立的。還有標定和同步兩關：差一度，五十公尺外就差將近一公尺。
 </a:t>
             </a:r>
           </a:p>
@@ -6090,30 +4902,19 @@
                 <a:spcPts val="0"/>
               </a:spcBef>
               <a:spcAft>
-                <a:spcPts val="150"/>
+                <a:spcPts val="200"/>
               </a:spcAft>
             </a:pPr>
             <a:r>
-              <a:rPr sz="900" b="1" lang="zh-TW" dirty="0">
-                <a:solidFill>
-                  <a:srgbClr val="000000"/>
-                </a:solidFill>
-                <a:latin typeface="Arial Unicode MS"/>
-                <a:ea typeface="Arial Unicode MS"/>
-                <a:cs typeface="Arial Unicode MS"/>
-              </a:rPr>
-              <a:t>第一句</a:t>
-            </a:r>
-            <a:r>
-              <a:rPr sz="900" lang="zh-TW" dirty="0">
-                <a:solidFill>
-                  <a:srgbClr val="000000"/>
-                </a:solidFill>
-                <a:latin typeface="Arial Unicode MS"/>
-                <a:ea typeface="Arial Unicode MS"/>
-                <a:cs typeface="Arial Unicode MS"/>
-              </a:rPr>
-              <a:t>錯在沒問條件。測距一定要追問是對百分之幾反射率量的。OS1 對白色的東西一百七十公尺，對黑色只剩九十。上午講過，廣告會寫大的那個。
+              <a:rPr sz="1200" lang="zh-TW" dirty="0">
+                <a:solidFill>
+                  <a:srgbClr val="000000"/>
+                </a:solidFill>
+                <a:latin typeface="Arial Unicode MS"/>
+                <a:ea typeface="Arial Unicode MS"/>
+                <a:cs typeface="Arial Unicode MS"/>
+              </a:rPr>
+              <a:t>這四句話，就是今天三節課的總複習。
 </a:t>
             </a:r>
           </a:p>
@@ -6123,242 +4924,11 @@
                 <a:spcPts val="0"/>
               </a:spcBef>
               <a:spcAft>
-                <a:spcPts val="150"/>
+                <a:spcPts val="200"/>
               </a:spcAft>
             </a:pPr>
             <a:r>
-              <a:rPr sz="900" b="1" lang="zh-TW" dirty="0">
-                <a:solidFill>
-                  <a:srgbClr val="000000"/>
-                </a:solidFill>
-                <a:latin typeface="Arial Unicode MS"/>
-                <a:ea typeface="Arial Unicode MS"/>
-                <a:cs typeface="Arial Unicode MS"/>
-              </a:rPr>
-              <a:t>第二句</a:t>
-            </a:r>
-            <a:r>
-              <a:rPr sz="900" lang="zh-TW" dirty="0">
-                <a:solidFill>
-                  <a:srgbClr val="000000"/>
-                </a:solidFill>
-                <a:latin typeface="Arial Unicode MS"/>
-                <a:ea typeface="Arial Unicode MS"/>
-                <a:cs typeface="Arial Unicode MS"/>
-              </a:rPr>
-              <a:t>錯在把視野當成晶片的規格。視野是</a:t>
-            </a:r>
-            <a:r>
-              <a:rPr sz="900" b="1" lang="zh-TW" dirty="0">
-                <a:solidFill>
-                  <a:srgbClr val="000000"/>
-                </a:solidFill>
-                <a:latin typeface="Arial Unicode MS"/>
-                <a:ea typeface="Arial Unicode MS"/>
-                <a:cs typeface="Arial Unicode MS"/>
-              </a:rPr>
-              <a:t>鏡頭</a:t>
-            </a:r>
-            <a:r>
-              <a:rPr sz="900" lang="zh-TW" dirty="0">
-                <a:solidFill>
-                  <a:srgbClr val="000000"/>
-                </a:solidFill>
-                <a:latin typeface="Arial Unicode MS"/>
-                <a:ea typeface="Arial Unicode MS"/>
-                <a:cs typeface="Arial Unicode MS"/>
-              </a:rPr>
-              <a:t>決定的。同一塊晶片，八公釐的鏡頭看四十二度，三點六公釐的看八十一度。
-</a:t>
-            </a:r>
-          </a:p>
-          <a:p>
-            <a:pPr algn="l">
-              <a:spcBef>
-                <a:spcPts val="0"/>
-              </a:spcBef>
-              <a:spcAft>
-                <a:spcPts val="150"/>
-              </a:spcAft>
-            </a:pPr>
-            <a:r>
-              <a:rPr sz="900" b="1" lang="zh-TW" dirty="0">
-                <a:solidFill>
-                  <a:srgbClr val="000000"/>
-                </a:solidFill>
-                <a:latin typeface="Arial Unicode MS"/>
-                <a:ea typeface="Arial Unicode MS"/>
-                <a:cs typeface="Arial Unicode MS"/>
-              </a:rPr>
-              <a:t>第三句</a:t>
-            </a:r>
-            <a:r>
-              <a:rPr sz="900" lang="zh-TW" dirty="0">
-                <a:solidFill>
-                  <a:srgbClr val="000000"/>
-                </a:solidFill>
-                <a:latin typeface="Arial Unicode MS"/>
-                <a:ea typeface="Arial Unicode MS"/>
-                <a:cs typeface="Arial Unicode MS"/>
-              </a:rPr>
-              <a:t>錯在拿兩顆不同的光達直接比點數。OS1 每秒兩百六十萬點，AT128P 只有一百五十萬，可是四十公尺的目標上，OS1 只有九個點、AT128P 有一百二十一個——因為 OS1 把點灑滿三百六十度。每秒點數要</a:t>
-            </a:r>
-            <a:r>
-              <a:rPr sz="900" b="1" lang="zh-TW" dirty="0">
-                <a:solidFill>
-                  <a:srgbClr val="000000"/>
-                </a:solidFill>
-                <a:latin typeface="Arial Unicode MS"/>
-                <a:ea typeface="Arial Unicode MS"/>
-                <a:cs typeface="Arial Unicode MS"/>
-              </a:rPr>
-              <a:t>先換算成角度</a:t>
-            </a:r>
-            <a:r>
-              <a:rPr sz="900" lang="zh-TW" dirty="0">
-                <a:solidFill>
-                  <a:srgbClr val="000000"/>
-                </a:solidFill>
-                <a:latin typeface="Arial Unicode MS"/>
-                <a:ea typeface="Arial Unicode MS"/>
-                <a:cs typeface="Arial Unicode MS"/>
-              </a:rPr>
-              <a:t>，再換算成你關心的那個距離上的間距。
-</a:t>
-            </a:r>
-          </a:p>
-          <a:p>
-            <a:pPr algn="l">
-              <a:spcBef>
-                <a:spcPts val="0"/>
-              </a:spcBef>
-              <a:spcAft>
-                <a:spcPts val="150"/>
-              </a:spcAft>
-            </a:pPr>
-            <a:r>
-              <a:rPr sz="900" lang="zh-TW" dirty="0">
-                <a:solidFill>
-                  <a:srgbClr val="000000"/>
-                </a:solidFill>
-                <a:latin typeface="Arial Unicode MS"/>
-                <a:ea typeface="Arial Unicode MS"/>
-                <a:cs typeface="Arial Unicode MS"/>
-              </a:rPr>
-              <a:t>這裡要跟第一節第十二張分清楚：</a:t>
-            </a:r>
-            <a:r>
-              <a:rPr sz="900" b="1" lang="zh-TW" dirty="0">
-                <a:solidFill>
-                  <a:srgbClr val="000000"/>
-                </a:solidFill>
-                <a:latin typeface="Arial Unicode MS"/>
-                <a:ea typeface="Arial Unicode MS"/>
-                <a:cs typeface="Arial Unicode MS"/>
-              </a:rPr>
-              <a:t>同一顆</a:t>
-            </a:r>
-            <a:r>
-              <a:rPr sz="900" lang="zh-TW" dirty="0">
-                <a:solidFill>
-                  <a:srgbClr val="000000"/>
-                </a:solidFill>
-                <a:latin typeface="Arial Unicode MS"/>
-                <a:ea typeface="Arial Unicode MS"/>
-                <a:cs typeface="Arial Unicode MS"/>
-              </a:rPr>
-              <a:t>光達從 1024 切到 2048，點數加倍、確實看得比較清楚，那是對的。錯的是拿</a:t>
-            </a:r>
-            <a:r>
-              <a:rPr sz="900" b="1" lang="zh-TW" dirty="0">
-                <a:solidFill>
-                  <a:srgbClr val="000000"/>
-                </a:solidFill>
-                <a:latin typeface="Arial Unicode MS"/>
-                <a:ea typeface="Arial Unicode MS"/>
-                <a:cs typeface="Arial Unicode MS"/>
-              </a:rPr>
-              <a:t>兩顆不同的</a:t>
-            </a:r>
-            <a:r>
-              <a:rPr sz="900" lang="zh-TW" dirty="0">
-                <a:solidFill>
-                  <a:srgbClr val="000000"/>
-                </a:solidFill>
-                <a:latin typeface="Arial Unicode MS"/>
-                <a:ea typeface="Arial Unicode MS"/>
-                <a:cs typeface="Arial Unicode MS"/>
-              </a:rPr>
-              <a:t>光達比點數大小。
-</a:t>
-            </a:r>
-          </a:p>
-          <a:p>
-            <a:pPr algn="l">
-              <a:spcBef>
-                <a:spcPts val="0"/>
-              </a:spcBef>
-              <a:spcAft>
-                <a:spcPts val="150"/>
-              </a:spcAft>
-            </a:pPr>
-            <a:r>
-              <a:rPr sz="900" b="1" lang="zh-TW" dirty="0">
-                <a:solidFill>
-                  <a:srgbClr val="000000"/>
-                </a:solidFill>
-                <a:latin typeface="Arial Unicode MS"/>
-                <a:ea typeface="Arial Unicode MS"/>
-                <a:cs typeface="Arial Unicode MS"/>
-              </a:rPr>
-              <a:t>第四句</a:t>
-            </a:r>
-            <a:r>
-              <a:rPr sz="900" lang="zh-TW" dirty="0">
-                <a:solidFill>
-                  <a:srgbClr val="000000"/>
-                </a:solidFill>
-                <a:latin typeface="Arial Unicode MS"/>
-                <a:ea typeface="Arial Unicode MS"/>
-                <a:cs typeface="Arial Unicode MS"/>
-              </a:rPr>
-              <a:t>錯在以為感測器是各自獨立的。還有標定和同步兩關：差一度，五十公尺外就差將近一公尺。
-</a:t>
-            </a:r>
-          </a:p>
-          <a:p>
-            <a:pPr algn="l">
-              <a:spcBef>
-                <a:spcPts val="0"/>
-              </a:spcBef>
-              <a:spcAft>
-                <a:spcPts val="150"/>
-              </a:spcAft>
-            </a:pPr>
-            <a:r>
-              <a:rPr sz="900" lang="zh-TW" dirty="0">
-                <a:solidFill>
-                  <a:srgbClr val="000000"/>
-                </a:solidFill>
-                <a:latin typeface="Arial Unicode MS"/>
-                <a:ea typeface="Arial Unicode MS"/>
-                <a:cs typeface="Arial Unicode MS"/>
-              </a:rPr>
-              <a:t>這四句話，就是今天三節課的總複習。
-</a:t>
-            </a:r>
-          </a:p>
-          <a:p>
-            <a:pPr algn="l">
-              <a:spcBef>
-                <a:spcPts val="0"/>
-              </a:spcBef>
-              <a:spcAft>
-                <a:spcPts val="150"/>
-              </a:spcAft>
-            </a:pPr>
-            <a:r>
-              <a:rPr sz="900" lang="zh-TW" dirty="0">
+              <a:rPr sz="1200" lang="zh-TW" dirty="0">
                 <a:solidFill>
                   <a:srgbClr val="000000"/>
                 </a:solidFill>

--- a/第五週(10-08)/第五週_第3節_簡報.pptx
+++ b/第五週(10-08)/第五週_第3節_簡報.pptx
@@ -1152,7 +1152,29 @@
                 <a:ea typeface="Arial Unicode MS"/>
                 <a:cs typeface="Arial Unicode MS"/>
               </a:rPr>
-              <a:t>這一節整節都在用這個網頁，所以先花兩分鐘，確定每個人都打開得了。
+              <a:t>這一節要開</a:t>
+            </a:r>
+            <a:r>
+              <a:rPr sz="1200" b="1" lang="zh-TW" dirty="0">
+                <a:solidFill>
+                  <a:srgbClr val="000000"/>
+                </a:solidFill>
+                <a:latin typeface="Arial Unicode MS"/>
+                <a:ea typeface="Arial Unicode MS"/>
+                <a:cs typeface="Arial Unicode MS"/>
+              </a:rPr>
+              <a:t>兩個</a:t>
+            </a:r>
+            <a:r>
+              <a:rPr sz="1200" lang="zh-TW" dirty="0">
+                <a:solidFill>
+                  <a:srgbClr val="000000"/>
+                </a:solidFill>
+                <a:latin typeface="Arial Unicode MS"/>
+                <a:ea typeface="Arial Unicode MS"/>
+                <a:cs typeface="Arial Unicode MS"/>
+              </a:rPr>
+              <a:t>網頁，所以先花兩分鐘，確定每個人兩個都打開得了。
 </a:t>
             </a:r>
           </a:p>
@@ -1174,7 +1196,7 @@
                 <a:ea typeface="Arial Unicode MS"/>
                 <a:cs typeface="Arial Unicode MS"/>
               </a:rPr>
-              <a:t>上一節下課前各位應該都還開著。</a:t>
+              <a:t>右邊有兩個 QR。</a:t>
             </a:r>
             <a:r>
               <a:rPr sz="1200" b="1" lang="zh-TW" dirty="0">
@@ -1185,7 +1207,7 @@
                 <a:ea typeface="Arial Unicode MS"/>
                 <a:cs typeface="Arial Unicode MS"/>
               </a:rPr>
-              <a:t>分頁還留著的人直接切回去，不要重開。</a:t>
+              <a:t>左邊那個是規格判讀台</a:t>
             </a:r>
             <a:r>
               <a:rPr sz="1200" lang="zh-TW" dirty="0">
@@ -1196,7 +1218,7 @@
                 <a:ea typeface="Arial Unicode MS"/>
                 <a:cs typeface="Arial Unicode MS"/>
               </a:rPr>
-              <a:t>關掉的人兩個方法：手機相機對準右邊這個 QR，或者照左邊那串網址打。</a:t>
+              <a:t>，就是上午開過的，網址沒變，分頁還留著的人直接切回去。</a:t>
             </a:r>
             <a:r>
               <a:rPr sz="1200" b="1" lang="zh-TW" dirty="0">
@@ -1207,7 +1229,7 @@
                 <a:ea typeface="Arial Unicode MS"/>
                 <a:cs typeface="Arial Unicode MS"/>
               </a:rPr>
-              <a:t>網址和第一節的完全一樣，沒有換過。</a:t>
+              <a:t>右邊那個是作業頁，是新的</a:t>
             </a:r>
             <a:r>
               <a:rPr sz="1200" lang="zh-TW" dirty="0">
@@ -1218,7 +1240,7 @@
                 <a:ea typeface="Arial Unicode MS"/>
                 <a:cs typeface="Arial Unicode MS"/>
               </a:rPr>
-              <a:t>
+              <a:t>，今天的答案全部填在那裡。
 </a:t>
             </a:r>
           </a:p>
@@ -1240,29 +1262,7 @@
                 <a:ea typeface="Arial Unicode MS"/>
                 <a:cs typeface="Arial Unicode MS"/>
               </a:rPr>
-              <a:t>我等全班。</a:t>
-            </a:r>
-            <a:r>
-              <a:rPr sz="1200" b="1" lang="zh-TW" dirty="0">
-                <a:solidFill>
-                  <a:srgbClr val="000000"/>
-                </a:solidFill>
-                <a:latin typeface="Arial Unicode MS"/>
-                <a:ea typeface="Arial Unicode MS"/>
-                <a:cs typeface="Arial Unicode MS"/>
-              </a:rPr>
-              <a:t>打開了的人舉手讓我看一下。</a:t>
-            </a:r>
-            <a:r>
-              <a:rPr sz="1200" lang="zh-TW" dirty="0">
-                <a:solidFill>
-                  <a:srgbClr val="000000"/>
-                </a:solidFill>
-                <a:latin typeface="Arial Unicode MS"/>
-                <a:ea typeface="Arial Unicode MS"/>
-                <a:cs typeface="Arial Unicode MS"/>
-              </a:rPr>
-              <a:t>……還沒開的，先跟旁邊的同學共用一台，不要卡在這裡，等一下我再過去看。
+              <a:t>兩個網址前面完全一樣，差在最後一段：一個是 spec，一個是 hw。要用手打的人照左邊那串打。
 </a:t>
             </a:r>
           </a:p>
@@ -1284,7 +1284,7 @@
                 <a:ea typeface="Arial Unicode MS"/>
                 <a:cs typeface="Arial Unicode MS"/>
               </a:rPr>
-              <a:t>打開之後先確認三件事。</a:t>
+              <a:t>我等全班。</a:t>
             </a:r>
             <a:r>
               <a:rPr sz="1200" b="1" lang="zh-TW" dirty="0">
@@ -1295,7 +1295,7 @@
                 <a:ea typeface="Arial Unicode MS"/>
                 <a:cs typeface="Arial Unicode MS"/>
               </a:rPr>
-              <a:t>第一</a:t>
+              <a:t>兩個都開好了再舉手讓我看。</a:t>
             </a:r>
             <a:r>
               <a:rPr sz="1200" lang="zh-TW" dirty="0">
@@ -1306,95 +1306,7 @@
                 <a:ea typeface="Arial Unicode MS"/>
                 <a:cs typeface="Arial Unicode MS"/>
               </a:rPr>
-              <a:t>，右上角那個語言鈕——要看越南文的現在就切。</a:t>
-            </a:r>
-            <a:r>
-              <a:rPr sz="1200" b="1" lang="zh-TW" dirty="0">
-                <a:solidFill>
-                  <a:srgbClr val="000000"/>
-                </a:solidFill>
-                <a:latin typeface="Arial Unicode MS"/>
-                <a:ea typeface="Arial Unicode MS"/>
-                <a:cs typeface="Arial Unicode MS"/>
-              </a:rPr>
-              <a:t>第二</a:t>
-            </a:r>
-            <a:r>
-              <a:rPr sz="1200" lang="zh-TW" dirty="0">
-                <a:solidFill>
-                  <a:srgbClr val="000000"/>
-                </a:solidFill>
-                <a:latin typeface="Arial Unicode MS"/>
-                <a:ea typeface="Arial Unicode MS"/>
-                <a:cs typeface="Arial Unicode MS"/>
-              </a:rPr>
-              <a:t>，「只看英文原文」這個按鈕，這一節</a:t>
-            </a:r>
-            <a:r>
-              <a:rPr sz="1200" b="1" lang="zh-TW" dirty="0">
-                <a:solidFill>
-                  <a:srgbClr val="000000"/>
-                </a:solidFill>
-                <a:latin typeface="Arial Unicode MS"/>
-                <a:ea typeface="Arial Unicode MS"/>
-                <a:cs typeface="Arial Unicode MS"/>
-              </a:rPr>
-              <a:t>要按下去</a:t>
-            </a:r>
-            <a:r>
-              <a:rPr sz="1200" lang="zh-TW" dirty="0">
-                <a:solidFill>
-                  <a:srgbClr val="000000"/>
-                </a:solidFill>
-                <a:latin typeface="Arial Unicode MS"/>
-                <a:ea typeface="Arial Unicode MS"/>
-                <a:cs typeface="Arial Unicode MS"/>
-              </a:rPr>
-              <a:t>：今天是要各位讀真的規格表，不是讀翻譯。</a:t>
-            </a:r>
-            <a:r>
-              <a:rPr sz="1200" b="1" lang="zh-TW" dirty="0">
-                <a:solidFill>
-                  <a:srgbClr val="000000"/>
-                </a:solidFill>
-                <a:latin typeface="Arial Unicode MS"/>
-                <a:ea typeface="Arial Unicode MS"/>
-                <a:cs typeface="Arial Unicode MS"/>
-              </a:rPr>
-              <a:t>第三</a:t>
-            </a:r>
-            <a:r>
-              <a:rPr sz="1200" lang="zh-TW" dirty="0">
-                <a:solidFill>
-                  <a:srgbClr val="000000"/>
-                </a:solidFill>
-                <a:latin typeface="Arial Unicode MS"/>
-                <a:ea typeface="Arial Unicode MS"/>
-                <a:cs typeface="Arial Unicode MS"/>
-              </a:rPr>
-              <a:t>，往最後拉，有一個</a:t>
-            </a:r>
-            <a:r>
-              <a:rPr sz="1200" b="1" lang="zh-TW" dirty="0">
-                <a:solidFill>
-                  <a:srgbClr val="000000"/>
-                </a:solidFill>
-                <a:latin typeface="Arial Unicode MS"/>
-                <a:ea typeface="Arial Unicode MS"/>
-                <a:cs typeface="Arial Unicode MS"/>
-              </a:rPr>
-              <a:t>「作業」分頁</a:t>
-            </a:r>
-            <a:r>
-              <a:rPr sz="1200" lang="zh-TW" dirty="0">
-                <a:solidFill>
-                  <a:srgbClr val="000000"/>
-                </a:solidFill>
-                <a:latin typeface="Arial Unicode MS"/>
-                <a:ea typeface="Arial Unicode MS"/>
-                <a:cs typeface="Arial Unicode MS"/>
-              </a:rPr>
-              <a:t>，今天的答案全部填在那裡，不是寫在紙上。
+              <a:t>……還沒開的，先跟旁邊的同學共用一台，不要卡在這裡，等一下我再過去看。
 </a:t>
             </a:r>
           </a:p>
@@ -1416,7 +1328,7 @@
                 <a:ea typeface="Arial Unicode MS"/>
                 <a:cs typeface="Arial Unicode MS"/>
               </a:rPr>
-              <a:t>請各位現在就點進「作業」分頁看一眼：裡面有姓名、學號，還有三個情境的欄位。等一下每做完一題就回來填。</a:t>
+              <a:t>開好之後確認兩件事。</a:t>
             </a:r>
             <a:r>
               <a:rPr sz="1200" b="1" lang="zh-TW" dirty="0">
@@ -1427,7 +1339,7 @@
                 <a:ea typeface="Arial Unicode MS"/>
                 <a:cs typeface="Arial Unicode MS"/>
               </a:rPr>
-              <a:t>姓名學號現在先填好</a:t>
+              <a:t>第一</a:t>
             </a:r>
             <a:r>
               <a:rPr sz="1200" lang="zh-TW" dirty="0">
@@ -1438,7 +1350,51 @@
                 <a:ea typeface="Arial Unicode MS"/>
                 <a:cs typeface="Arial Unicode MS"/>
               </a:rPr>
-              <a:t>，不然等一下截圖我認不出是誰。
+              <a:t>，右上角那個語言鈕，兩頁都有，要看越南文的現在就切。</a:t>
+            </a:r>
+            <a:r>
+              <a:rPr sz="1200" b="1" lang="zh-TW" dirty="0">
+                <a:solidFill>
+                  <a:srgbClr val="000000"/>
+                </a:solidFill>
+                <a:latin typeface="Arial Unicode MS"/>
+                <a:ea typeface="Arial Unicode MS"/>
+                <a:cs typeface="Arial Unicode MS"/>
+              </a:rPr>
+              <a:t>第二</a:t>
+            </a:r>
+            <a:r>
+              <a:rPr sz="1200" lang="zh-TW" dirty="0">
+                <a:solidFill>
+                  <a:srgbClr val="000000"/>
+                </a:solidFill>
+                <a:latin typeface="Arial Unicode MS"/>
+                <a:ea typeface="Arial Unicode MS"/>
+                <a:cs typeface="Arial Unicode MS"/>
+              </a:rPr>
+              <a:t>，判讀台上的「只看英文原文」這一節</a:t>
+            </a:r>
+            <a:r>
+              <a:rPr sz="1200" b="1" lang="zh-TW" dirty="0">
+                <a:solidFill>
+                  <a:srgbClr val="000000"/>
+                </a:solidFill>
+                <a:latin typeface="Arial Unicode MS"/>
+                <a:ea typeface="Arial Unicode MS"/>
+                <a:cs typeface="Arial Unicode MS"/>
+              </a:rPr>
+              <a:t>要按下去</a:t>
+            </a:r>
+            <a:r>
+              <a:rPr sz="1200" lang="zh-TW" dirty="0">
+                <a:solidFill>
+                  <a:srgbClr val="000000"/>
+                </a:solidFill>
+                <a:latin typeface="Arial Unicode MS"/>
+                <a:ea typeface="Arial Unicode MS"/>
+                <a:cs typeface="Arial Unicode MS"/>
+              </a:rPr>
+              <a:t>：今天是要各位讀真的規格表，不是讀翻譯。
 </a:t>
             </a:r>
           </a:p>
@@ -1460,7 +1416,51 @@
                 <a:ea typeface="Arial Unicode MS"/>
                 <a:cs typeface="Arial Unicode MS"/>
               </a:rPr>
-              <a:t>最後講一句：這個網頁</a:t>
+              <a:t>現在請各位看作業頁。最上面有姓名和學號，</a:t>
+            </a:r>
+            <a:r>
+              <a:rPr sz="1200" b="1" lang="zh-TW" dirty="0">
+                <a:solidFill>
+                  <a:srgbClr val="000000"/>
+                </a:solidFill>
+                <a:latin typeface="Arial Unicode MS"/>
+                <a:ea typeface="Arial Unicode MS"/>
+                <a:cs typeface="Arial Unicode MS"/>
+              </a:rPr>
+              <a:t>現在就先填好</a:t>
+            </a:r>
+            <a:r>
+              <a:rPr sz="1200" lang="zh-TW" dirty="0">
+                <a:solidFill>
+                  <a:srgbClr val="000000"/>
+                </a:solidFill>
+                <a:latin typeface="Arial Unicode MS"/>
+                <a:ea typeface="Arial Unicode MS"/>
+                <a:cs typeface="Arial Unicode MS"/>
+              </a:rPr>
+              <a:t>，不然等一下截圖我認不出是誰。下面是四大題。
+</a:t>
+            </a:r>
+          </a:p>
+          <a:p>
+            <a:pPr algn="l">
+              <a:spcBef>
+                <a:spcPts val="0"/>
+              </a:spcBef>
+              <a:spcAft>
+                <a:spcPts val="200"/>
+              </a:spcAft>
+            </a:pPr>
+            <a:r>
+              <a:rPr sz="1200" lang="zh-TW" dirty="0">
+                <a:solidFill>
+                  <a:srgbClr val="000000"/>
+                </a:solidFill>
+                <a:latin typeface="Arial Unicode MS"/>
+                <a:ea typeface="Arial Unicode MS"/>
+                <a:cs typeface="Arial Unicode MS"/>
+              </a:rPr>
+              <a:t>最後講一句：這兩個網頁</a:t>
             </a:r>
             <a:r>
               <a:rPr sz="1200" b="1" lang="zh-TW" dirty="0">
@@ -1823,7 +1823,7 @@
                 <a:ea typeface="Arial Unicode MS"/>
                 <a:cs typeface="Arial Unicode MS"/>
               </a:rPr>
-              <a:t>判讀台上有第四個分頁，叫</a:t>
+              <a:t>切到</a:t>
             </a:r>
             <a:r>
               <a:rPr sz="1050" b="1" lang="zh-TW" dirty="0">
@@ -1834,7 +1834,7 @@
                 <a:ea typeface="Arial Unicode MS"/>
                 <a:cs typeface="Arial Unicode MS"/>
               </a:rPr>
-              <a:t>作業</a:t>
+              <a:t>作業那一頁</a:t>
             </a:r>
             <a:r>
               <a:rPr sz="1050" lang="zh-TW" dirty="0">
@@ -2021,7 +2021,7 @@
                 <a:ea typeface="Arial Unicode MS"/>
                 <a:cs typeface="Arial Unicode MS"/>
               </a:rPr>
-              <a:t>，切去別的分頁查規格、再切回來，填過的都還在。第三，十二格不用手抄——在試算那一頁按「</a:t>
+              <a:t>，切去判讀台查規格、再切回來，填過的都還在。第三，第一題那個十二格的表，</a:t>
             </a:r>
             <a:r>
               <a:rPr sz="1050" b="1" lang="zh-TW" dirty="0">
@@ -2032,7 +2032,7 @@
                 <a:ea typeface="Arial Unicode MS"/>
                 <a:cs typeface="Arial Unicode MS"/>
               </a:rPr>
-              <a:t>記進作業</a:t>
+              <a:t>點哪一格，那一格的判讀就在底下打開</a:t>
             </a:r>
             <a:r>
               <a:rPr sz="1050" lang="zh-TW" dirty="0">
@@ -2043,29 +2043,7 @@
                 <a:ea typeface="Arial Unicode MS"/>
                 <a:cs typeface="Arial Unicode MS"/>
               </a:rPr>
-              <a:t>」就會自動填進去，按鈕下面還會告訴各位</a:t>
-            </a:r>
-            <a:r>
-              <a:rPr sz="1050" b="1" lang="zh-TW" dirty="0">
-                <a:solidFill>
-                  <a:srgbClr val="000000"/>
-                </a:solidFill>
-                <a:latin typeface="Arial Unicode MS"/>
-                <a:ea typeface="Arial Unicode MS"/>
-                <a:cs typeface="Arial Unicode MS"/>
-              </a:rPr>
-              <a:t>十二格已經記了幾格</a:t>
-            </a:r>
-            <a:r>
-              <a:rPr sz="1050" lang="zh-TW" dirty="0">
-                <a:solidFill>
-                  <a:srgbClr val="000000"/>
-                </a:solidFill>
-                <a:latin typeface="Arial Unicode MS"/>
-                <a:ea typeface="Arial Unicode MS"/>
-                <a:cs typeface="Arial Unicode MS"/>
-              </a:rPr>
-              <a:t>，填錯還是可以自己改。第四，全部做完按「</a:t>
+              <a:t>——煞停門檻、三行規格、結論，全部都在，看完直接選夠或不夠，不必跑去判讀台。第四，全部做完按「</a:t>
             </a:r>
             <a:r>
               <a:rPr sz="1050" b="1" lang="zh-TW" dirty="0">
@@ -2296,7 +2274,7 @@
                 <a:ea typeface="Arial Unicode MS"/>
                 <a:cs typeface="Arial Unicode MS"/>
               </a:rPr>
-              <a:t>請把四個型號都按一次。每按完一個，</a:t>
+              <a:t>在作業那一頁，第一題是一張十二格的表：四個型號乘三個情境。現在做的是</a:t>
             </a:r>
             <a:r>
               <a:rPr sz="1050" b="1" lang="zh-TW" dirty="0">
@@ -2307,7 +2285,7 @@
                 <a:ea typeface="Arial Unicode MS"/>
                 <a:cs typeface="Arial Unicode MS"/>
               </a:rPr>
-              <a:t>判定底下有一顆「記進作業」</a:t>
+              <a:t>「校園 20」那一欄</a:t>
             </a:r>
             <a:r>
               <a:rPr sz="1050" lang="zh-TW" dirty="0">
@@ -2318,7 +2296,29 @@
                 <a:ea typeface="Arial Unicode MS"/>
                 <a:cs typeface="Arial Unicode MS"/>
               </a:rPr>
-              <a:t>，按下去那一格就填好了，不用自己切到作業分頁去抄。
+              <a:t>，四格。</a:t>
+            </a:r>
+            <a:r>
+              <a:rPr sz="1050" b="1" lang="zh-TW" dirty="0">
+                <a:solidFill>
+                  <a:srgbClr val="000000"/>
+                </a:solidFill>
+                <a:latin typeface="Arial Unicode MS"/>
+                <a:ea typeface="Arial Unicode MS"/>
+                <a:cs typeface="Arial Unicode MS"/>
+              </a:rPr>
+              <a:t>點下去那一格，判讀就在底下打開</a:t>
+            </a:r>
+            <a:r>
+              <a:rPr sz="1050" lang="zh-TW" dirty="0">
+                <a:solidFill>
+                  <a:srgbClr val="000000"/>
+                </a:solidFill>
+                <a:latin typeface="Arial Unicode MS"/>
+                <a:ea typeface="Arial Unicode MS"/>
+                <a:cs typeface="Arial Unicode MS"/>
+              </a:rPr>
+              <a:t>，看完直接選夠或不夠，再點下一格。
 </a:t>
             </a:r>
           </a:p>
@@ -2713,11 +2713,11 @@
                 <a:spcPts val="0"/>
               </a:spcBef>
               <a:spcAft>
-                <a:spcPts val="142"/>
+                <a:spcPts val="133"/>
               </a:spcAft>
             </a:pPr>
             <a:r>
-              <a:rPr sz="850" lang="zh-TW" dirty="0">
+              <a:rPr sz="800" lang="zh-TW" dirty="0">
                 <a:solidFill>
                   <a:srgbClr val="000000"/>
                 </a:solidFill>
@@ -2735,11 +2735,11 @@
                 <a:spcPts val="0"/>
               </a:spcBef>
               <a:spcAft>
-                <a:spcPts val="142"/>
+                <a:spcPts val="133"/>
               </a:spcAft>
             </a:pPr>
             <a:r>
-              <a:rPr sz="850" lang="zh-TW" dirty="0">
+              <a:rPr sz="800" lang="zh-TW" dirty="0">
                 <a:solidFill>
                   <a:srgbClr val="000000"/>
                 </a:solidFill>
@@ -2757,11 +2757,11 @@
                 <a:spcPts val="0"/>
               </a:spcBef>
               <a:spcAft>
-                <a:spcPts val="142"/>
+                <a:spcPts val="133"/>
               </a:spcAft>
             </a:pPr>
             <a:r>
-              <a:rPr sz="850" lang="zh-TW" dirty="0">
+              <a:rPr sz="800" lang="zh-TW" dirty="0">
                 <a:solidFill>
                   <a:srgbClr val="000000"/>
                 </a:solidFill>
@@ -2779,11 +2779,11 @@
                 <a:spcPts val="0"/>
               </a:spcBef>
               <a:spcAft>
-                <a:spcPts val="142"/>
+                <a:spcPts val="133"/>
               </a:spcAft>
             </a:pPr>
             <a:r>
-              <a:rPr sz="850" b="1" lang="zh-TW" dirty="0">
+              <a:rPr sz="800" b="1" lang="zh-TW" dirty="0">
                 <a:solidFill>
                   <a:srgbClr val="000000"/>
                 </a:solidFill>
@@ -2794,7 +2794,7 @@
               <a:t>OS1 在這個情境下，是「不夠」，而且只差一點點。</a:t>
             </a:r>
             <a:r>
-              <a:rPr sz="850" lang="zh-TW" dirty="0">
+              <a:rPr sz="800" lang="zh-TW" dirty="0">
                 <a:solidFill>
                   <a:srgbClr val="000000"/>
                 </a:solidFill>
@@ -2812,11 +2812,11 @@
                 <a:spcPts val="0"/>
               </a:spcBef>
               <a:spcAft>
-                <a:spcPts val="142"/>
+                <a:spcPts val="133"/>
               </a:spcAft>
             </a:pPr>
             <a:r>
-              <a:rPr sz="850" lang="zh-TW" dirty="0">
+              <a:rPr sz="800" lang="zh-TW" dirty="0">
                 <a:solidFill>
                   <a:srgbClr val="000000"/>
                 </a:solidFill>
@@ -2834,11 +2834,11 @@
                 <a:spcPts val="0"/>
               </a:spcBef>
               <a:spcAft>
-                <a:spcPts val="142"/>
+                <a:spcPts val="133"/>
               </a:spcAft>
             </a:pPr>
             <a:r>
-              <a:rPr sz="850" lang="zh-TW" dirty="0">
+              <a:rPr sz="800" lang="zh-TW" dirty="0">
                 <a:solidFill>
                   <a:srgbClr val="000000"/>
                 </a:solidFill>
@@ -2849,7 +2849,7 @@
               <a:t>請把左邊那個從 </a:t>
             </a:r>
             <a:r>
-              <a:rPr sz="850" b="1" lang="zh-TW" dirty="0">
+              <a:rPr sz="800" b="1" lang="zh-TW" dirty="0">
                 <a:solidFill>
                   <a:srgbClr val="000000"/>
                 </a:solidFill>
@@ -2860,7 +2860,7 @@
               <a:t>1024 點／圈</a:t>
             </a:r>
             <a:r>
-              <a:rPr sz="850" lang="zh-TW" dirty="0">
+              <a:rPr sz="800" lang="zh-TW" dirty="0">
                 <a:solidFill>
                   <a:srgbClr val="000000"/>
                 </a:solidFill>
@@ -2871,7 +2871,7 @@
               <a:t> 改成 </a:t>
             </a:r>
             <a:r>
-              <a:rPr sz="850" b="1" lang="zh-TW" dirty="0">
+              <a:rPr sz="800" b="1" lang="zh-TW" dirty="0">
                 <a:solidFill>
                   <a:srgbClr val="000000"/>
                 </a:solidFill>
@@ -2882,7 +2882,7 @@
               <a:t>2048 點／圈</a:t>
             </a:r>
             <a:r>
-              <a:rPr sz="850" lang="zh-TW" dirty="0">
+              <a:rPr sz="800" lang="zh-TW" dirty="0">
                 <a:solidFill>
                   <a:srgbClr val="000000"/>
                 </a:solidFill>
@@ -2900,11 +2900,11 @@
                 <a:spcPts val="0"/>
               </a:spcBef>
               <a:spcAft>
-                <a:spcPts val="142"/>
+                <a:spcPts val="133"/>
               </a:spcAft>
             </a:pPr>
             <a:r>
-              <a:rPr sz="850" lang="zh-TW" dirty="0">
+              <a:rPr sz="800" lang="zh-TW" dirty="0">
                 <a:solidFill>
                   <a:srgbClr val="000000"/>
                 </a:solidFill>
@@ -2922,11 +2922,11 @@
                 <a:spcPts val="0"/>
               </a:spcBef>
               <a:spcAft>
-                <a:spcPts val="142"/>
+                <a:spcPts val="133"/>
               </a:spcAft>
             </a:pPr>
             <a:r>
-              <a:rPr sz="850" lang="zh-TW" dirty="0">
+              <a:rPr sz="800" lang="zh-TW" dirty="0">
                 <a:solidFill>
                   <a:srgbClr val="000000"/>
                 </a:solidFill>
@@ -2937,7 +2937,7 @@
               <a:t>九個點變成</a:t>
             </a:r>
             <a:r>
-              <a:rPr sz="850" b="1" lang="zh-TW" dirty="0">
+              <a:rPr sz="800" b="1" lang="zh-TW" dirty="0">
                 <a:solidFill>
                   <a:srgbClr val="000000"/>
                 </a:solidFill>
@@ -2948,7 +2948,7 @@
               <a:t>十八個點</a:t>
             </a:r>
             <a:r>
-              <a:rPr sz="850" lang="zh-TW" dirty="0">
+              <a:rPr sz="800" lang="zh-TW" dirty="0">
                 <a:solidFill>
                   <a:srgbClr val="000000"/>
                 </a:solidFill>
@@ -2966,63 +2966,30 @@
                 <a:spcPts val="0"/>
               </a:spcBef>
               <a:spcAft>
-                <a:spcPts val="142"/>
+                <a:spcPts val="133"/>
               </a:spcAft>
             </a:pPr>
             <a:r>
-              <a:rPr sz="850" lang="zh-TW" dirty="0">
-                <a:solidFill>
-                  <a:srgbClr val="000000"/>
-                </a:solidFill>
-                <a:latin typeface="Arial Unicode MS"/>
-                <a:ea typeface="Arial Unicode MS"/>
-                <a:cs typeface="Arial Unicode MS"/>
-              </a:rPr>
-              <a:t>這裡講清楚一件事，免得各位找錯地方：</a:t>
-            </a:r>
-            <a:r>
-              <a:rPr sz="850" b="1" lang="zh-TW" dirty="0">
-                <a:solidFill>
-                  <a:srgbClr val="000000"/>
-                </a:solidFill>
-                <a:latin typeface="Arial Unicode MS"/>
-                <a:ea typeface="Arial Unicode MS"/>
-                <a:cs typeface="Arial Unicode MS"/>
-              </a:rPr>
-              <a:t>右邊的小工具②也可以把每圈點數拉到 2048，也會看到九個點變十八個——可是那一區只是示範，不會改判定。</a:t>
-            </a:r>
-            <a:r>
-              <a:rPr sz="850" lang="zh-TW" dirty="0">
-                <a:solidFill>
-                  <a:srgbClr val="000000"/>
-                </a:solidFill>
-                <a:latin typeface="Arial Unicode MS"/>
-                <a:ea typeface="Arial Unicode MS"/>
-                <a:cs typeface="Arial Unicode MS"/>
-              </a:rPr>
-              <a:t>作業第二題要的是判定，所以一定要在</a:t>
-            </a:r>
-            <a:r>
-              <a:rPr sz="850" b="1" lang="zh-TW" dirty="0">
-                <a:solidFill>
-                  <a:srgbClr val="000000"/>
-                </a:solidFill>
-                <a:latin typeface="Arial Unicode MS"/>
-                <a:ea typeface="Arial Unicode MS"/>
-                <a:cs typeface="Arial Unicode MS"/>
-              </a:rPr>
-              <a:t>試算這一邊</a:t>
-            </a:r>
-            <a:r>
-              <a:rPr sz="850" lang="zh-TW" dirty="0">
-                <a:solidFill>
-                  <a:srgbClr val="000000"/>
-                </a:solidFill>
-                <a:latin typeface="Arial Unicode MS"/>
-                <a:ea typeface="Arial Unicode MS"/>
-                <a:cs typeface="Arial Unicode MS"/>
-              </a:rPr>
-              <a:t>改。改完之後，判定底下那顆按鈕會自己變成「記進作業第二題」，按下去就填好了；十二格那一題不會被動到，因為那一題問的是預設模式。
+              <a:rPr sz="800" b="1" lang="zh-TW" dirty="0">
+                <a:solidFill>
+                  <a:srgbClr val="000000"/>
+                </a:solidFill>
+                <a:latin typeface="Arial Unicode MS"/>
+                <a:ea typeface="Arial Unicode MS"/>
+                <a:cs typeface="Arial Unicode MS"/>
+              </a:rPr>
+              <a:t>這一題在作業那一頁的第二題做，不要回判讀台。</a:t>
+            </a:r>
+            <a:r>
+              <a:rPr sz="800" lang="zh-TW" dirty="0">
+                <a:solidFill>
+                  <a:srgbClr val="000000"/>
+                </a:solidFill>
+                <a:latin typeface="Arial Unicode MS"/>
+                <a:ea typeface="Arial Unicode MS"/>
+                <a:cs typeface="Arial Unicode MS"/>
+              </a:rPr>
+              <a:t>第二題上面就有兩個下拉，左邊那個預設停在 1024，自己轉成 2048，底下的判讀會立刻跟著變。
 </a:t>
             </a:r>
           </a:p>
@@ -3032,33 +2999,55 @@
                 <a:spcPts val="0"/>
               </a:spcBef>
               <a:spcAft>
-                <a:spcPts val="142"/>
+                <a:spcPts val="133"/>
               </a:spcAft>
             </a:pPr>
             <a:r>
-              <a:rPr sz="850" lang="zh-TW" dirty="0">
-                <a:solidFill>
-                  <a:srgbClr val="000000"/>
-                </a:solidFill>
-                <a:latin typeface="Arial Unicode MS"/>
-                <a:ea typeface="Arial Unicode MS"/>
-                <a:cs typeface="Arial Unicode MS"/>
-              </a:rPr>
-              <a:t>大家停一下想想這件事。</a:t>
-            </a:r>
-            <a:r>
-              <a:rPr sz="850" b="1" lang="zh-TW" dirty="0">
-                <a:solidFill>
-                  <a:srgbClr val="000000"/>
-                </a:solidFill>
-                <a:latin typeface="Arial Unicode MS"/>
-                <a:ea typeface="Arial Unicode MS"/>
-                <a:cs typeface="Arial Unicode MS"/>
-              </a:rPr>
-              <a:t>同一顆光達，沒有多花一毛錢，只是換了一個設定，結論就翻過來了。</a:t>
-            </a:r>
-            <a:r>
-              <a:rPr sz="850" lang="zh-TW" dirty="0">
+              <a:rPr sz="800" lang="zh-TW" dirty="0">
+                <a:solidFill>
+                  <a:srgbClr val="000000"/>
+                </a:solidFill>
+                <a:latin typeface="Arial Unicode MS"/>
+                <a:ea typeface="Arial Unicode MS"/>
+                <a:cs typeface="Arial Unicode MS"/>
+              </a:rPr>
+              <a:t>順便講清楚一件事，免得各位找錯地方：判讀台右邊的</a:t>
+            </a:r>
+            <a:r>
+              <a:rPr sz="800" b="1" lang="zh-TW" dirty="0">
+                <a:solidFill>
+                  <a:srgbClr val="000000"/>
+                </a:solidFill>
+                <a:latin typeface="Arial Unicode MS"/>
+                <a:ea typeface="Arial Unicode MS"/>
+                <a:cs typeface="Arial Unicode MS"/>
+              </a:rPr>
+              <a:t>小工具②也可以把每圈點數拉到 2048</a:t>
+            </a:r>
+            <a:r>
+              <a:rPr sz="800" lang="zh-TW" dirty="0">
+                <a:solidFill>
+                  <a:srgbClr val="000000"/>
+                </a:solidFill>
+                <a:latin typeface="Arial Unicode MS"/>
+                <a:ea typeface="Arial Unicode MS"/>
+                <a:cs typeface="Arial Unicode MS"/>
+              </a:rPr>
+              <a:t>，也會看到九個點變十八個——</a:t>
+            </a:r>
+            <a:r>
+              <a:rPr sz="800" b="1" lang="zh-TW" dirty="0">
+                <a:solidFill>
+                  <a:srgbClr val="000000"/>
+                </a:solidFill>
+                <a:latin typeface="Arial Unicode MS"/>
+                <a:ea typeface="Arial Unicode MS"/>
+                <a:cs typeface="Arial Unicode MS"/>
+              </a:rPr>
+              <a:t>可是那一區只是示範，不會改判定。</a:t>
+            </a:r>
+            <a:r>
+              <a:rPr sz="800" lang="zh-TW" dirty="0">
                 <a:solidFill>
                   <a:srgbClr val="000000"/>
                 </a:solidFill>
@@ -3076,41 +3065,41 @@
                 <a:spcPts val="0"/>
               </a:spcBef>
               <a:spcAft>
-                <a:spcPts val="142"/>
+                <a:spcPts val="133"/>
               </a:spcAft>
             </a:pPr>
             <a:r>
-              <a:rPr sz="850" lang="zh-TW" dirty="0">
-                <a:solidFill>
-                  <a:srgbClr val="000000"/>
-                </a:solidFill>
-                <a:latin typeface="Arial Unicode MS"/>
-                <a:ea typeface="Arial Unicode MS"/>
-                <a:cs typeface="Arial Unicode MS"/>
-              </a:rPr>
-              <a:t>這就是上午我講「configurable 這個字很重要」的意思。規格表上有些數字是</a:t>
-            </a:r>
-            <a:r>
-              <a:rPr sz="850" b="1" lang="zh-TW" dirty="0">
-                <a:solidFill>
-                  <a:srgbClr val="000000"/>
-                </a:solidFill>
-                <a:latin typeface="Arial Unicode MS"/>
-                <a:ea typeface="Arial Unicode MS"/>
-                <a:cs typeface="Arial Unicode MS"/>
-              </a:rPr>
-              <a:t>模式</a:t>
-            </a:r>
-            <a:r>
-              <a:rPr sz="850" lang="zh-TW" dirty="0">
-                <a:solidFill>
-                  <a:srgbClr val="000000"/>
-                </a:solidFill>
-                <a:latin typeface="Arial Unicode MS"/>
-                <a:ea typeface="Arial Unicode MS"/>
-                <a:cs typeface="Arial Unicode MS"/>
-              </a:rPr>
-              <a:t>，不是固定值。你如果只看廠商標在封面上的那一組數字，就會把一顆其實夠用的感測器排除掉。
+              <a:rPr sz="800" lang="zh-TW" dirty="0">
+                <a:solidFill>
+                  <a:srgbClr val="000000"/>
+                </a:solidFill>
+                <a:latin typeface="Arial Unicode MS"/>
+                <a:ea typeface="Arial Unicode MS"/>
+                <a:cs typeface="Arial Unicode MS"/>
+              </a:rPr>
+              <a:t>大家停一下想想這件事。</a:t>
+            </a:r>
+            <a:r>
+              <a:rPr sz="800" b="1" lang="zh-TW" dirty="0">
+                <a:solidFill>
+                  <a:srgbClr val="000000"/>
+                </a:solidFill>
+                <a:latin typeface="Arial Unicode MS"/>
+                <a:ea typeface="Arial Unicode MS"/>
+                <a:cs typeface="Arial Unicode MS"/>
+              </a:rPr>
+              <a:t>同一顆光達，沒有多花一毛錢，只是換了一個設定，結論就翻過來了。</a:t>
+            </a:r>
+            <a:r>
+              <a:rPr sz="800" lang="zh-TW" dirty="0">
+                <a:solidFill>
+                  <a:srgbClr val="000000"/>
+                </a:solidFill>
+                <a:latin typeface="Arial Unicode MS"/>
+                <a:ea typeface="Arial Unicode MS"/>
+                <a:cs typeface="Arial Unicode MS"/>
+              </a:rPr>
+              <a:t>
 </a:t>
             </a:r>
           </a:p>
@@ -3120,41 +3109,41 @@
                 <a:spcPts val="0"/>
               </a:spcBef>
               <a:spcAft>
-                <a:spcPts val="142"/>
+                <a:spcPts val="133"/>
               </a:spcAft>
             </a:pPr>
             <a:r>
-              <a:rPr sz="850" lang="zh-TW" dirty="0">
-                <a:solidFill>
-                  <a:srgbClr val="000000"/>
-                </a:solidFill>
-                <a:latin typeface="Arial Unicode MS"/>
-                <a:ea typeface="Arial Unicode MS"/>
-                <a:cs typeface="Arial Unicode MS"/>
-              </a:rPr>
-              <a:t>不過天下沒有白吃的午餐，所以作業分頁第二題還要你寫：</a:t>
-            </a:r>
-            <a:r>
-              <a:rPr sz="850" b="1" lang="zh-TW" dirty="0">
-                <a:solidFill>
-                  <a:srgbClr val="000000"/>
-                </a:solidFill>
-                <a:latin typeface="Arial Unicode MS"/>
-                <a:ea typeface="Arial Unicode MS"/>
-                <a:cs typeface="Arial Unicode MS"/>
-              </a:rPr>
-              <a:t>換這個模式要付什麼代價？</a:t>
-            </a:r>
-            <a:r>
-              <a:rPr sz="850" lang="zh-TW" dirty="0">
-                <a:solidFill>
-                  <a:srgbClr val="000000"/>
-                </a:solidFill>
-                <a:latin typeface="Arial Unicode MS"/>
-                <a:ea typeface="Arial Unicode MS"/>
-                <a:cs typeface="Arial Unicode MS"/>
-              </a:rPr>
-              <a:t>
+              <a:rPr sz="800" lang="zh-TW" dirty="0">
+                <a:solidFill>
+                  <a:srgbClr val="000000"/>
+                </a:solidFill>
+                <a:latin typeface="Arial Unicode MS"/>
+                <a:ea typeface="Arial Unicode MS"/>
+                <a:cs typeface="Arial Unicode MS"/>
+              </a:rPr>
+              <a:t>這就是上午我講「configurable 這個字很重要」的意思。規格表上有些數字是</a:t>
+            </a:r>
+            <a:r>
+              <a:rPr sz="800" b="1" lang="zh-TW" dirty="0">
+                <a:solidFill>
+                  <a:srgbClr val="000000"/>
+                </a:solidFill>
+                <a:latin typeface="Arial Unicode MS"/>
+                <a:ea typeface="Arial Unicode MS"/>
+                <a:cs typeface="Arial Unicode MS"/>
+              </a:rPr>
+              <a:t>模式</a:t>
+            </a:r>
+            <a:r>
+              <a:rPr sz="800" lang="zh-TW" dirty="0">
+                <a:solidFill>
+                  <a:srgbClr val="000000"/>
+                </a:solidFill>
+                <a:latin typeface="Arial Unicode MS"/>
+                <a:ea typeface="Arial Unicode MS"/>
+                <a:cs typeface="Arial Unicode MS"/>
+              </a:rPr>
+              <a:t>，不是固定值。你如果只看廠商標在封面上的那一組數字，就會把一顆其實夠用的感測器排除掉。
 </a:t>
             </a:r>
           </a:p>
@@ -3164,19 +3153,41 @@
                 <a:spcPts val="0"/>
               </a:spcBef>
               <a:spcAft>
-                <a:spcPts val="142"/>
+                <a:spcPts val="133"/>
               </a:spcAft>
             </a:pPr>
             <a:r>
-              <a:rPr sz="850" lang="zh-TW" dirty="0">
-                <a:solidFill>
-                  <a:srgbClr val="000000"/>
-                </a:solidFill>
-                <a:latin typeface="Arial Unicode MS"/>
-                <a:ea typeface="Arial Unicode MS"/>
-                <a:cs typeface="Arial Unicode MS"/>
-              </a:rPr>
-              <a:t>想一想：每一圈的點數加倍，那每一秒送回來的資料量也加倍。車上那台電腦要算得完才行。而且如果你同時想提高轉速，點數又會被分掉。
+              <a:rPr sz="800" lang="zh-TW" dirty="0">
+                <a:solidFill>
+                  <a:srgbClr val="000000"/>
+                </a:solidFill>
+                <a:latin typeface="Arial Unicode MS"/>
+                <a:ea typeface="Arial Unicode MS"/>
+                <a:cs typeface="Arial Unicode MS"/>
+              </a:rPr>
+              <a:t>不過天下沒有白吃的午餐，所以第二題還要你選：</a:t>
+            </a:r>
+            <a:r>
+              <a:rPr sz="800" b="1" lang="zh-TW" dirty="0">
+                <a:solidFill>
+                  <a:srgbClr val="000000"/>
+                </a:solidFill>
+                <a:latin typeface="Arial Unicode MS"/>
+                <a:ea typeface="Arial Unicode MS"/>
+                <a:cs typeface="Arial Unicode MS"/>
+              </a:rPr>
+              <a:t>換這個模式要付什麼代價？</a:t>
+            </a:r>
+            <a:r>
+              <a:rPr sz="800" lang="zh-TW" dirty="0">
+                <a:solidFill>
+                  <a:srgbClr val="000000"/>
+                </a:solidFill>
+                <a:latin typeface="Arial Unicode MS"/>
+                <a:ea typeface="Arial Unicode MS"/>
+                <a:cs typeface="Arial Unicode MS"/>
+              </a:rPr>
+              <a:t>
 </a:t>
             </a:r>
           </a:p>
@@ -3186,11 +3197,33 @@
                 <a:spcPts val="0"/>
               </a:spcBef>
               <a:spcAft>
-                <a:spcPts val="142"/>
+                <a:spcPts val="133"/>
               </a:spcAft>
             </a:pPr>
             <a:r>
-              <a:rPr sz="850" lang="zh-TW" dirty="0">
+              <a:rPr sz="800" lang="zh-TW" dirty="0">
+                <a:solidFill>
+                  <a:srgbClr val="000000"/>
+                </a:solidFill>
+                <a:latin typeface="Arial Unicode MS"/>
+                <a:ea typeface="Arial Unicode MS"/>
+                <a:cs typeface="Arial Unicode MS"/>
+              </a:rPr>
+              <a:t>想一想：每一圈的點數加倍，那每一秒送回來的資料量也加倍。車上那台電腦要算得完才行。而且如果你同時想提高轉速，點數又會被分掉。
+</a:t>
+            </a:r>
+          </a:p>
+          <a:p>
+            <a:pPr algn="l">
+              <a:spcBef>
+                <a:spcPts val="0"/>
+              </a:spcBef>
+              <a:spcAft>
+                <a:spcPts val="133"/>
+              </a:spcAft>
+            </a:pPr>
+            <a:r>
+              <a:rPr sz="800" lang="zh-TW" dirty="0">
                 <a:solidFill>
                   <a:srgbClr val="000000"/>
                 </a:solidFill>
@@ -3715,7 +3748,7 @@
                 <a:ea typeface="Arial Unicode MS"/>
                 <a:cs typeface="Arial Unicode MS"/>
               </a:rPr>
-              <a:t>這句話請填在作業分頁的</a:t>
+              <a:t>這句話請填在作業的</a:t>
             </a:r>
             <a:r>
               <a:rPr sz="950" b="1" lang="zh-TW" dirty="0">
@@ -3726,7 +3759,7 @@
                 <a:ea typeface="Arial Unicode MS"/>
                 <a:cs typeface="Arial Unicode MS"/>
               </a:rPr>
-              <a:t>結論句</a:t>
+              <a:t>第三題結論句</a:t>
             </a:r>
             <a:r>
               <a:rPr sz="950" lang="zh-TW" dirty="0">
@@ -3737,7 +3770,7 @@
                 <a:ea typeface="Arial Unicode MS"/>
                 <a:cs typeface="Arial Unicode MS"/>
               </a:rPr>
-              <a:t>那一格，這是今天最重要的一句。
+              <a:t>，這是今天最重要的一句。
 </a:t>
             </a:r>
           </a:p>
@@ -6263,7 +6296,7 @@
                 <a:ea typeface="Arial" pitchFamily="34" charset="-122"/>
                 <a:cs typeface="Arial" pitchFamily="34" charset="-120"/>
               </a:rPr>
-              <a:t>Mở lại bàn đọc thông số</a:t>
+              <a:t>Mở hai trang: bàn đọc thông số và trang nộp bài</a:t>
             </a:r>
             <a:endParaRPr lang="en-US" sz="2200" dirty="0"/>
           </a:p>
@@ -6283,7 +6316,7 @@
                 <a:ea typeface="微軟正黑體" pitchFamily="34" charset="-122"/>
                 <a:cs typeface="微軟正黑體" pitchFamily="34" charset="-120"/>
               </a:rPr>
-              <a:t>再打開一次規格判讀台</a:t>
+              <a:t>開兩個網頁：規格判讀台、作業頁</a:t>
             </a:r>
             <a:endParaRPr lang="en-US" sz="2200" dirty="0"/>
           </a:p>
@@ -6297,12 +6330,12 @@
         </p:nvSpPr>
         <p:spPr>
           <a:xfrm>
-            <a:off x="6364224" y="1133856"/>
-            <a:ext cx="2404872" cy="2624328"/>
+            <a:off x="5257800" y="1133856"/>
+            <a:ext cx="1737360" cy="2267712"/>
           </a:xfrm>
           <a:prstGeom prst="roundRect">
             <a:avLst>
-              <a:gd name="adj" fmla="val 3802"/>
+              <a:gd name="adj" fmla="val 5263"/>
             </a:avLst>
           </a:prstGeom>
           <a:solidFill>
@@ -6316,9 +6349,71 @@
           </a:ln>
         </p:spPr>
       </p:sp>
+      <p:sp>
+        <p:nvSpPr>
+          <p:cNvPr id="4" name="Text 2"/>
+          <p:cNvSpPr txBox="1"/>
+          <p:nvPr/>
+        </p:nvSpPr>
+        <p:spPr>
+          <a:xfrm>
+            <a:off x="5294376" y="1207008"/>
+            <a:ext cx="1664208" cy="274320"/>
+          </a:xfrm>
+          <a:prstGeom prst="rect">
+            <a:avLst/>
+          </a:prstGeom>
+          <a:noFill/>
+          <a:ln/>
+        </p:spPr>
+        <p:txBody>
+          <a:bodyPr wrap="square" lIns="0" tIns="0" rIns="0" bIns="0" rtlCol="0" anchor="t"/>
+          <a:lstStyle/>
+          <a:p>
+            <a:pPr algn="ctr" indent="0" marL="0">
+              <a:lnSpc>
+                <a:spcPct val="102000"/>
+              </a:lnSpc>
+              <a:buNone/>
+            </a:pPr>
+            <a:r>
+              <a:rPr lang="en-US" sz="1000" b="1" dirty="0">
+                <a:solidFill>
+                  <a:srgbClr val="5F7183"/>
+                </a:solidFill>
+                <a:latin typeface="Arial" pitchFamily="34" charset="0"/>
+                <a:ea typeface="Arial" pitchFamily="34" charset="-122"/>
+                <a:cs typeface="Arial" pitchFamily="34" charset="-120"/>
+              </a:rPr>
+              <a:t>Bàn đọc thông số</a:t>
+            </a:r>
+            <a:endParaRPr lang="en-US" sz="1000" dirty="0"/>
+          </a:p>
+          <a:p>
+            <a:pPr algn="ctr" indent="0" marL="0">
+              <a:lnSpc>
+                <a:spcPct val="102000"/>
+              </a:lnSpc>
+              <a:buNone/>
+            </a:pPr>
+            <a:r>
+              <a:rPr lang="en-US" sz="1100" dirty="0">
+                <a:solidFill>
+                  <a:srgbClr val="0B1F3A"/>
+                </a:solidFill>
+                <a:latin typeface="微軟正黑體" pitchFamily="34" charset="0"/>
+                <a:ea typeface="微軟正黑體" pitchFamily="34" charset="-122"/>
+                <a:cs typeface="微軟正黑體" pitchFamily="34" charset="-120"/>
+              </a:rPr>
+              <a:t>規格判讀台</a:t>
+            </a:r>
+            <a:endParaRPr lang="en-US" sz="1000" dirty="0"/>
+          </a:p>
+        </p:txBody>
+      </p:sp>
       <p:pic>
         <p:nvPicPr>
-          <p:cNvPr id="4" name="Image 0" descr="/Users/tsengchenghsun/Class/carClass/Claude outputs/第五週(10-8)/src/img/w5_qr_spec.png">    </p:cNvPr>
+          <p:cNvPr id="5" name="Image 0" descr="/Users/tsengchenghsun/Class/carClass/Claude outputs/第五週(10-8)/src/img/w5_qr_spec.png">    </p:cNvPr>
           <p:cNvPicPr>
             <a:picLocks noChangeAspect="1"/>
           </p:cNvPicPr>
@@ -6332,8 +6427,8 @@
         </p:blipFill>
         <p:spPr>
           <a:xfrm>
-            <a:off x="6492240" y="1243584"/>
-            <a:ext cx="2148840" cy="2148840"/>
+            <a:off x="5385816" y="1554480"/>
+            <a:ext cx="1481328" cy="1481328"/>
           </a:xfrm>
           <a:prstGeom prst="rect">
             <a:avLst/>
@@ -6342,14 +6437,205 @@
       </p:pic>
       <p:sp>
         <p:nvSpPr>
-          <p:cNvPr id="5" name="Text 2"/>
+          <p:cNvPr id="6" name="Text 3"/>
           <p:cNvSpPr txBox="1"/>
           <p:nvPr/>
         </p:nvSpPr>
         <p:spPr>
           <a:xfrm>
-            <a:off x="6400800" y="3429000"/>
-            <a:ext cx="2331720" cy="310896"/>
+            <a:off x="5294376" y="3054096"/>
+            <a:ext cx="1664208" cy="274320"/>
+          </a:xfrm>
+          <a:prstGeom prst="rect">
+            <a:avLst/>
+          </a:prstGeom>
+          <a:noFill/>
+          <a:ln/>
+        </p:spPr>
+        <p:txBody>
+          <a:bodyPr wrap="square" lIns="0" tIns="0" rIns="0" bIns="0" rtlCol="0" anchor="ctr"/>
+          <a:lstStyle/>
+          <a:p>
+            <a:pPr algn="ctr" indent="0" marL="0">
+              <a:buNone/>
+            </a:pPr>
+            <a:r>
+              <a:rPr lang="en-US" sz="1050" b="1" dirty="0">
+                <a:solidFill>
+                  <a:srgbClr val="007F72"/>
+                </a:solidFill>
+                <a:latin typeface="Arial" pitchFamily="34" charset="0"/>
+                <a:ea typeface="Arial" pitchFamily="34" charset="-122"/>
+                <a:cs typeface="Arial" pitchFamily="34" charset="-120"/>
+              </a:rPr>
+              <a:t>…/week5/spec/</a:t>
+            </a:r>
+            <a:endParaRPr lang="en-US" sz="1050" dirty="0"/>
+          </a:p>
+        </p:txBody>
+      </p:sp>
+      <p:sp>
+        <p:nvSpPr>
+          <p:cNvPr id="7" name="Shape 4"/>
+          <p:cNvSpPr/>
+          <p:nvPr/>
+        </p:nvSpPr>
+        <p:spPr>
+          <a:xfrm>
+            <a:off x="6903720" y="1133856"/>
+            <a:ext cx="1737360" cy="2267712"/>
+          </a:xfrm>
+          <a:prstGeom prst="roundRect">
+            <a:avLst>
+              <a:gd name="adj" fmla="val 5263"/>
+            </a:avLst>
+          </a:prstGeom>
+          <a:solidFill>
+            <a:srgbClr val="FFFFFF"/>
+          </a:solidFill>
+          <a:ln w="12700">
+            <a:solidFill>
+              <a:srgbClr val="DBE3EA"/>
+            </a:solidFill>
+            <a:prstDash val="solid"/>
+          </a:ln>
+        </p:spPr>
+      </p:sp>
+      <p:sp>
+        <p:nvSpPr>
+          <p:cNvPr id="8" name="Text 5"/>
+          <p:cNvSpPr txBox="1"/>
+          <p:nvPr/>
+        </p:nvSpPr>
+        <p:spPr>
+          <a:xfrm>
+            <a:off x="6940296" y="1207008"/>
+            <a:ext cx="1664208" cy="274320"/>
+          </a:xfrm>
+          <a:prstGeom prst="rect">
+            <a:avLst/>
+          </a:prstGeom>
+          <a:noFill/>
+          <a:ln/>
+        </p:spPr>
+        <p:txBody>
+          <a:bodyPr wrap="square" lIns="0" tIns="0" rIns="0" bIns="0" rtlCol="0" anchor="t"/>
+          <a:lstStyle/>
+          <a:p>
+            <a:pPr algn="ctr" indent="0" marL="0">
+              <a:lnSpc>
+                <a:spcPct val="102000"/>
+              </a:lnSpc>
+              <a:buNone/>
+            </a:pPr>
+            <a:r>
+              <a:rPr lang="en-US" sz="1000" b="1" dirty="0">
+                <a:solidFill>
+                  <a:srgbClr val="5F7183"/>
+                </a:solidFill>
+                <a:latin typeface="Arial" pitchFamily="34" charset="0"/>
+                <a:ea typeface="Arial" pitchFamily="34" charset="-122"/>
+                <a:cs typeface="Arial" pitchFamily="34" charset="-120"/>
+              </a:rPr>
+              <a:t>Trang nộp bài</a:t>
+            </a:r>
+            <a:endParaRPr lang="en-US" sz="1000" dirty="0"/>
+          </a:p>
+          <a:p>
+            <a:pPr algn="ctr" indent="0" marL="0">
+              <a:lnSpc>
+                <a:spcPct val="102000"/>
+              </a:lnSpc>
+              <a:buNone/>
+            </a:pPr>
+            <a:r>
+              <a:rPr lang="en-US" sz="1100" dirty="0">
+                <a:solidFill>
+                  <a:srgbClr val="0B1F3A"/>
+                </a:solidFill>
+                <a:latin typeface="微軟正黑體" pitchFamily="34" charset="0"/>
+                <a:ea typeface="微軟正黑體" pitchFamily="34" charset="-122"/>
+                <a:cs typeface="微軟正黑體" pitchFamily="34" charset="-120"/>
+              </a:rPr>
+              <a:t>作業頁</a:t>
+            </a:r>
+            <a:endParaRPr lang="en-US" sz="1000" dirty="0"/>
+          </a:p>
+        </p:txBody>
+      </p:sp>
+      <p:pic>
+        <p:nvPicPr>
+          <p:cNvPr id="9" name="Image 1" descr="/Users/tsengchenghsun/Class/carClass/Claude outputs/第五週(10-8)/src/img/w5_qr_hw.png">    </p:cNvPr>
+          <p:cNvPicPr>
+            <a:picLocks noChangeAspect="1"/>
+          </p:cNvPicPr>
+          <p:nvPr/>
+        </p:nvPicPr>
+        <p:blipFill>
+          <a:blip r:embed="rId2"/>
+          <a:stretch>
+            <a:fillRect/>
+          </a:stretch>
+        </p:blipFill>
+        <p:spPr>
+          <a:xfrm>
+            <a:off x="7031736" y="1554480"/>
+            <a:ext cx="1481328" cy="1481328"/>
+          </a:xfrm>
+          <a:prstGeom prst="rect">
+            <a:avLst/>
+          </a:prstGeom>
+        </p:spPr>
+      </p:pic>
+      <p:sp>
+        <p:nvSpPr>
+          <p:cNvPr id="10" name="Text 6"/>
+          <p:cNvSpPr txBox="1"/>
+          <p:nvPr/>
+        </p:nvSpPr>
+        <p:spPr>
+          <a:xfrm>
+            <a:off x="6940296" y="3054096"/>
+            <a:ext cx="1664208" cy="274320"/>
+          </a:xfrm>
+          <a:prstGeom prst="rect">
+            <a:avLst/>
+          </a:prstGeom>
+          <a:noFill/>
+          <a:ln/>
+        </p:spPr>
+        <p:txBody>
+          <a:bodyPr wrap="square" lIns="0" tIns="0" rIns="0" bIns="0" rtlCol="0" anchor="ctr"/>
+          <a:lstStyle/>
+          <a:p>
+            <a:pPr algn="ctr" indent="0" marL="0">
+              <a:buNone/>
+            </a:pPr>
+            <a:r>
+              <a:rPr lang="en-US" sz="1050" b="1" dirty="0">
+                <a:solidFill>
+                  <a:srgbClr val="007F72"/>
+                </a:solidFill>
+                <a:latin typeface="Arial" pitchFamily="34" charset="0"/>
+                <a:ea typeface="Arial" pitchFamily="34" charset="-122"/>
+                <a:cs typeface="Arial" pitchFamily="34" charset="-120"/>
+              </a:rPr>
+              <a:t>…/week5/hw/</a:t>
+            </a:r>
+            <a:endParaRPr lang="en-US" sz="1050" dirty="0"/>
+          </a:p>
+        </p:txBody>
+      </p:sp>
+      <p:sp>
+        <p:nvSpPr>
+          <p:cNvPr id="11" name="Text 7"/>
+          <p:cNvSpPr txBox="1"/>
+          <p:nvPr/>
+        </p:nvSpPr>
+        <p:spPr>
+          <a:xfrm>
+            <a:off x="5257800" y="3346704"/>
+            <a:ext cx="3383280" cy="310896"/>
           </a:xfrm>
           <a:prstGeom prst="rect">
             <a:avLst/>
@@ -6376,7 +6662,7 @@
                 <a:ea typeface="Arial" pitchFamily="34" charset="-122"/>
                 <a:cs typeface="Arial" pitchFamily="34" charset="-120"/>
               </a:rPr>
-              <a:t>Quét mã QR bằng camera điện thoại</a:t>
+              <a:t>Quét hai mã, mở thành hai tab</a:t>
             </a:r>
             <a:endParaRPr lang="en-US" sz="1050" dirty="0"/>
           </a:p>
@@ -6396,7 +6682,7 @@
                 <a:ea typeface="微軟正黑體" pitchFamily="34" charset="-122"/>
                 <a:cs typeface="微軟正黑體" pitchFamily="34" charset="-120"/>
               </a:rPr>
-              <a:t>用手機相機掃這個 QR</a:t>
+              <a:t>兩個都掃，開成兩個分頁</a:t>
             </a:r>
             <a:endParaRPr lang="en-US" sz="1050" dirty="0"/>
           </a:p>
@@ -6404,14 +6690,14 @@
       </p:sp>
       <p:sp>
         <p:nvSpPr>
-          <p:cNvPr id="6" name="Shape 3"/>
+          <p:cNvPr id="12" name="Shape 8"/>
           <p:cNvSpPr/>
           <p:nvPr/>
         </p:nvSpPr>
         <p:spPr>
           <a:xfrm>
             <a:off x="502920" y="1133856"/>
-            <a:ext cx="5678424" cy="841248"/>
+            <a:ext cx="4443984" cy="841248"/>
           </a:xfrm>
           <a:prstGeom prst="roundRect">
             <a:avLst>
@@ -6426,14 +6712,14 @@
       </p:sp>
       <p:sp>
         <p:nvSpPr>
-          <p:cNvPr id="7" name="Text 4"/>
+          <p:cNvPr id="13" name="Text 9"/>
           <p:cNvSpPr txBox="1"/>
           <p:nvPr/>
         </p:nvSpPr>
         <p:spPr>
           <a:xfrm>
             <a:off x="649224" y="1225296"/>
-            <a:ext cx="5385816" cy="658368"/>
+            <a:ext cx="4151376" cy="658368"/>
           </a:xfrm>
           <a:prstGeom prst="rect">
             <a:avLst/>
@@ -6457,7 +6743,7 @@
                 <a:ea typeface="Arial" pitchFamily="34" charset="-122"/>
                 <a:cs typeface="Arial" pitchFamily="34" charset="-120"/>
               </a:rPr>
-              <a:t>https://ch-neural.github.io/</a:t>
+              <a:t>兩個網址前面都一樣：</a:t>
             </a:r>
             <a:endParaRPr lang="en-US" sz="1250" dirty="0"/>
           </a:p>
@@ -6474,15 +6760,32 @@
                 <a:ea typeface="Arial" pitchFamily="34" charset="-122"/>
                 <a:cs typeface="Arial" pitchFamily="34" charset="-120"/>
               </a:rPr>
-              <a:t>MITUST-Principles-of-Self-Driving-Cars/week5/spec/</a:t>
+              <a:t>https://ch-neural.github.io/</a:t>
             </a:r>
             <a:endParaRPr lang="en-US" sz="1250" dirty="0"/>
           </a:p>
+          <a:p>
+            <a:pPr algn="ctr" indent="0" marL="0">
+              <a:buNone/>
+            </a:pPr>
+            <a:r>
+              <a:rPr lang="en-US" sz="1250" b="1" dirty="0">
+                <a:solidFill>
+                  <a:srgbClr val="FFFFFF"/>
+                </a:solidFill>
+                <a:latin typeface="Arial" pitchFamily="34" charset="0"/>
+                <a:ea typeface="Arial" pitchFamily="34" charset="-122"/>
+                <a:cs typeface="Arial" pitchFamily="34" charset="-120"/>
+              </a:rPr>
+              <a:t>MITUST-Principles-of-Self-Driving-Cars/week5/</a:t>
+            </a:r>
+            <a:endParaRPr lang="en-US" sz="1250" dirty="0"/>
+          </a:p>
         </p:txBody>
       </p:sp>
       <p:sp>
         <p:nvSpPr>
-          <p:cNvPr id="8" name="Shape 5"/>
+          <p:cNvPr id="14" name="Shape 10"/>
           <p:cNvSpPr/>
           <p:nvPr/>
         </p:nvSpPr>
@@ -6502,7 +6805,7 @@
       </p:sp>
       <p:sp>
         <p:nvSpPr>
-          <p:cNvPr id="9" name="Text 6"/>
+          <p:cNvPr id="15" name="Text 11"/>
           <p:cNvSpPr txBox="1"/>
           <p:nvPr/>
         </p:nvSpPr>
@@ -6541,14 +6844,14 @@
       </p:sp>
       <p:sp>
         <p:nvSpPr>
-          <p:cNvPr id="10" name="Text 7"/>
+          <p:cNvPr id="16" name="Text 12"/>
           <p:cNvSpPr txBox="1"/>
           <p:nvPr/>
         </p:nvSpPr>
         <p:spPr>
           <a:xfrm>
             <a:off x="941832" y="2121408"/>
-            <a:ext cx="5166360" cy="457200"/>
+            <a:ext cx="3931920" cy="457200"/>
           </a:xfrm>
           <a:prstGeom prst="rect">
             <a:avLst/>
@@ -6575,7 +6878,7 @@
                 <a:ea typeface="Arial" pitchFamily="34" charset="-122"/>
                 <a:cs typeface="Arial" pitchFamily="34" charset="-120"/>
               </a:rPr>
-              <a:t>Vẫn là trang tiết 1 đã mở, địa chỉ không đổi — còn tab thì chuyển thẳng qua</a:t>
+              <a:t>Bàn đọc thông số: vẫn là trang tiết 1, địa chỉ không đổi</a:t>
             </a:r>
             <a:endParaRPr lang="en-US" sz="1150" dirty="0"/>
           </a:p>
@@ -6595,7 +6898,7 @@
                 <a:ea typeface="微軟正黑體" pitchFamily="34" charset="-122"/>
                 <a:cs typeface="微軟正黑體" pitchFamily="34" charset="-120"/>
               </a:rPr>
-              <a:t>就是第一節開過的那一個，網址沒變——分頁還在的人直接切回去</a:t>
+              <a:t>判讀台就是第一節那一個，網址沒變</a:t>
             </a:r>
             <a:endParaRPr lang="en-US" sz="1150" dirty="0"/>
           </a:p>
@@ -6603,7 +6906,7 @@
       </p:sp>
       <p:sp>
         <p:nvSpPr>
-          <p:cNvPr id="11" name="Shape 8"/>
+          <p:cNvPr id="17" name="Shape 13"/>
           <p:cNvSpPr/>
           <p:nvPr/>
         </p:nvSpPr>
@@ -6623,7 +6926,7 @@
       </p:sp>
       <p:sp>
         <p:nvSpPr>
-          <p:cNvPr id="12" name="Text 9"/>
+          <p:cNvPr id="18" name="Text 14"/>
           <p:cNvSpPr txBox="1"/>
           <p:nvPr/>
         </p:nvSpPr>
@@ -6662,14 +6965,14 @@
       </p:sp>
       <p:sp>
         <p:nvSpPr>
-          <p:cNvPr id="13" name="Text 10"/>
+          <p:cNvPr id="19" name="Text 15"/>
           <p:cNvSpPr txBox="1"/>
           <p:nvPr/>
         </p:nvSpPr>
         <p:spPr>
           <a:xfrm>
             <a:off x="941832" y="2708795"/>
-            <a:ext cx="5166360" cy="457200"/>
+            <a:ext cx="3931920" cy="457200"/>
           </a:xfrm>
           <a:prstGeom prst="rect">
             <a:avLst/>
@@ -6696,7 +6999,7 @@
                 <a:ea typeface="Arial" pitchFamily="34" charset="-122"/>
                 <a:cs typeface="Arial" pitchFamily="34" charset="-120"/>
               </a:rPr>
-              <a:t>Góc trên bên phải đổi được sang tiếng Việt; tiết này phải bật «chỉ tiếng Anh»</a:t>
+              <a:t>Trang nộp bài là trang MỚI — quét thêm mã thứ hai</a:t>
             </a:r>
             <a:endParaRPr lang="en-US" sz="1150" dirty="0"/>
           </a:p>
@@ -6716,7 +7019,7 @@
                 <a:ea typeface="微軟正黑體" pitchFamily="34" charset="-122"/>
                 <a:cs typeface="微軟正黑體" pitchFamily="34" charset="-120"/>
               </a:rPr>
-              <a:t>右上角可以切越南文；「只看英文原文」這一節要按下去</a:t>
+              <a:t>作業頁是新的，要再掃第二個 QR</a:t>
             </a:r>
             <a:endParaRPr lang="en-US" sz="1150" dirty="0"/>
           </a:p>
@@ -6724,13 +7027,13 @@
       </p:sp>
       <p:sp>
         <p:nvSpPr>
-          <p:cNvPr id="14" name="Shape 11"/>
+          <p:cNvPr id="20" name="Shape 16"/>
           <p:cNvSpPr/>
           <p:nvPr/>
         </p:nvSpPr>
         <p:spPr>
           <a:xfrm>
-            <a:off x="539496" y="3332758"/>
+            <a:off x="539496" y="3239147"/>
             <a:ext cx="292608" cy="292608"/>
           </a:xfrm>
           <a:prstGeom prst="ellipse">
@@ -6744,13 +7047,13 @@
       </p:sp>
       <p:sp>
         <p:nvSpPr>
-          <p:cNvPr id="15" name="Text 12"/>
+          <p:cNvPr id="21" name="Text 17"/>
           <p:cNvSpPr txBox="1"/>
           <p:nvPr/>
         </p:nvSpPr>
         <p:spPr>
           <a:xfrm>
-            <a:off x="539496" y="3341902"/>
+            <a:off x="539496" y="3248291"/>
             <a:ext cx="292608" cy="274320"/>
           </a:xfrm>
           <a:prstGeom prst="rect">
@@ -6783,14 +7086,14 @@
       </p:sp>
       <p:sp>
         <p:nvSpPr>
-          <p:cNvPr id="16" name="Text 13"/>
+          <p:cNvPr id="22" name="Text 18"/>
           <p:cNvSpPr txBox="1"/>
           <p:nvPr/>
         </p:nvSpPr>
         <p:spPr>
           <a:xfrm>
-            <a:off x="941832" y="3296182"/>
-            <a:ext cx="5166360" cy="457200"/>
+            <a:off x="941832" y="3202571"/>
+            <a:ext cx="3931920" cy="457200"/>
           </a:xfrm>
           <a:prstGeom prst="rect">
             <a:avLst/>
@@ -6817,7 +7120,7 @@
                 <a:ea typeface="Arial" pitchFamily="34" charset="-122"/>
                 <a:cs typeface="Arial" pitchFamily="34" charset="-120"/>
               </a:rPr>
-              <a:t>Đáp án điền ở tab «Bài nộp» cuối cùng, không viết ra giấy</a:t>
+              <a:t>Tiết này bật «chỉ tiếng Anh» trên bàn đọc thông số</a:t>
             </a:r>
             <a:endParaRPr lang="en-US" sz="1150" dirty="0"/>
           </a:p>
@@ -6837,7 +7140,7 @@
                 <a:ea typeface="微軟正黑體" pitchFamily="34" charset="-122"/>
                 <a:cs typeface="微軟正黑體" pitchFamily="34" charset="-120"/>
               </a:rPr>
-              <a:t>答案填在最後那個「作業」分頁，不是寫在紙上</a:t>
+              <a:t>判讀台的「只看英文原文」這一節要按下去</a:t>
             </a:r>
             <a:endParaRPr lang="en-US" sz="1150" dirty="0"/>
           </a:p>
@@ -6845,7 +7148,7 @@
       </p:sp>
       <p:sp>
         <p:nvSpPr>
-          <p:cNvPr id="17" name="Shape 14"/>
+          <p:cNvPr id="23" name="Shape 19"/>
           <p:cNvSpPr/>
           <p:nvPr/>
         </p:nvSpPr>
@@ -6872,7 +7175,7 @@
       </p:sp>
       <p:sp>
         <p:nvSpPr>
-          <p:cNvPr id="18" name="Text 15"/>
+          <p:cNvPr id="24" name="Text 20"/>
           <p:cNvSpPr txBox="1"/>
           <p:nvPr/>
         </p:nvSpPr>
@@ -6906,7 +7209,7 @@
                 <a:ea typeface="Arial" pitchFamily="34" charset="-122"/>
                 <a:cs typeface="Arial" pitchFamily="34" charset="-120"/>
               </a:rPr>
-              <a:t>Ai không mở được thì giơ tay — tạm hai người dùng chung một máy, đừng kẹt ở đây.</a:t>
+              <a:t>Mở cả hai rồi hãy giơ tay. Ai không mở được thì tạm hai người dùng chung một máy, đừng kẹt ở đây.</a:t>
             </a:r>
             <a:endParaRPr lang="en-US" sz="1200" dirty="0"/>
           </a:p>
@@ -6926,7 +7229,7 @@
                 <a:ea typeface="微軟正黑體" pitchFamily="34" charset="-122"/>
                 <a:cs typeface="微軟正黑體" pitchFamily="34" charset="-120"/>
               </a:rPr>
-              <a:t>打不開的人舉手——先兩個人共用一台，不要卡在這裡。</a:t>
+              <a:t>兩個都開好了再舉手。打不開的人先兩個人共用一台，不要卡在這裡。</a:t>
             </a:r>
             <a:endParaRPr lang="en-US" sz="1200" dirty="0"/>
           </a:p>
@@ -6934,14 +7237,14 @@
       </p:sp>
       <p:pic>
         <p:nvPicPr>
-          <p:cNvPr id="20" name="Image 1" descr="/Users/tsengchenghsun/Class/carClass/Claude outputs/第五週(10-8)/src/logo.png">    </p:cNvPr>
+          <p:cNvPr id="26" name="Image 2" descr="/Users/tsengchenghsun/Class/carClass/Claude outputs/第五週(10-8)/src/logo.png">    </p:cNvPr>
           <p:cNvPicPr>
             <a:picLocks noChangeAspect="1"/>
           </p:cNvPicPr>
           <p:nvPr/>
         </p:nvPicPr>
         <p:blipFill>
-          <a:blip r:embed="rId2"/>
+          <a:blip r:embed="rId3"/>
           <a:stretch>
             <a:fillRect/>
           </a:stretch>
@@ -6958,7 +7261,7 @@
       </p:pic>
       <p:sp>
         <p:nvSpPr>
-          <p:cNvPr id="21" name="Text 16"/>
+          <p:cNvPr id="27" name="Text 21"/>
           <p:cNvSpPr txBox="1"/>
           <p:nvPr/>
         </p:nvSpPr>
@@ -6997,7 +7300,7 @@
       </p:sp>
       <p:sp>
         <p:nvSpPr>
-          <p:cNvPr id="22" name="Text 17"/>
+          <p:cNvPr id="28" name="Text 22"/>
           <p:cNvSpPr txBox="1"/>
           <p:nvPr/>
         </p:nvSpPr>
@@ -8200,7 +8503,7 @@
                 <a:ea typeface="Arial" pitchFamily="34" charset="-122"/>
                 <a:cs typeface="Arial" pitchFamily="34" charset="-120"/>
               </a:rPr>
-              <a:t>Điền ở tab «Bài nộp»</a:t>
+              <a:t>Điền ở trang nộp bài</a:t>
             </a:r>
             <a:endParaRPr lang="en-US" sz="1050" dirty="0"/>
           </a:p>
@@ -8240,7 +8543,7 @@
                 <a:ea typeface="微軟正黑體" pitchFamily="34" charset="-122"/>
                 <a:cs typeface="微軟正黑體" pitchFamily="34" charset="-120"/>
               </a:rPr>
-              <a:t>填在「作業」分頁</a:t>
+              <a:t>填在作業那一頁</a:t>
             </a:r>
             <a:endParaRPr lang="en-US" sz="1050" dirty="0"/>
           </a:p>

--- a/第五週(10-08)/第五週_第3節_簡報.pptx
+++ b/第五週(10-08)/第五週_第3節_簡報.pptx
@@ -3165,7 +3165,139 @@
                 <a:ea typeface="Arial Unicode MS"/>
                 <a:cs typeface="Arial Unicode MS"/>
               </a:rPr>
-              <a:t>不過天下沒有白吃的午餐，所以第二題還要你選：</a:t>
+              <a:t>不過天下沒有白吃的午餐。各位現在做一件事：</a:t>
+            </a:r>
+            <a:r>
+              <a:rPr sz="800" b="1" lang="zh-TW" dirty="0">
+                <a:solidFill>
+                  <a:srgbClr val="000000"/>
+                </a:solidFill>
+                <a:latin typeface="Arial Unicode MS"/>
+                <a:ea typeface="Arial Unicode MS"/>
+                <a:cs typeface="Arial Unicode MS"/>
+              </a:rPr>
+              <a:t>把右邊那個轉速下拉打開看看。</a:t>
+            </a:r>
+            <a:r>
+              <a:rPr sz="800" lang="zh-TW" dirty="0">
+                <a:solidFill>
+                  <a:srgbClr val="000000"/>
+                </a:solidFill>
+                <a:latin typeface="Arial Unicode MS"/>
+                <a:ea typeface="Arial Unicode MS"/>
+                <a:cs typeface="Arial Unicode MS"/>
+              </a:rPr>
+              <a:t>
+</a:t>
+            </a:r>
+          </a:p>
+          <a:p>
+            <a:pPr algn="l">
+              <a:spcBef>
+                <a:spcPts val="0"/>
+              </a:spcBef>
+              <a:spcAft>
+                <a:spcPts val="133"/>
+              </a:spcAft>
+            </a:pPr>
+            <a:r>
+              <a:rPr sz="800" lang="zh-TW" dirty="0">
+                <a:solidFill>
+                  <a:srgbClr val="000000"/>
+                </a:solidFill>
+                <a:latin typeface="Arial Unicode MS"/>
+                <a:ea typeface="Arial Unicode MS"/>
+                <a:cs typeface="Arial Unicode MS"/>
+              </a:rPr>
+              <a:t>本來有 10 和 20 兩個選項，切到 2048 之後，</a:t>
+            </a:r>
+            <a:r>
+              <a:rPr sz="800" b="1" lang="zh-TW" dirty="0">
+                <a:solidFill>
+                  <a:srgbClr val="000000"/>
+                </a:solidFill>
+                <a:latin typeface="Arial Unicode MS"/>
+                <a:ea typeface="Arial Unicode MS"/>
+                <a:cs typeface="Arial Unicode MS"/>
+              </a:rPr>
+              <a:t>20 Hz 不見了</a:t>
+            </a:r>
+            <a:r>
+              <a:rPr sz="800" lang="zh-TW" dirty="0">
+                <a:solidFill>
+                  <a:srgbClr val="000000"/>
+                </a:solidFill>
+                <a:latin typeface="Arial Unicode MS"/>
+                <a:ea typeface="Arial Unicode MS"/>
+                <a:cs typeface="Arial Unicode MS"/>
+              </a:rPr>
+              <a:t>。如果你剛剛是停在 20 Hz，它還會自己跳回 10。
+</a:t>
+            </a:r>
+          </a:p>
+          <a:p>
+            <a:pPr algn="l">
+              <a:spcBef>
+                <a:spcPts val="0"/>
+              </a:spcBef>
+              <a:spcAft>
+                <a:spcPts val="133"/>
+              </a:spcAft>
+            </a:pPr>
+            <a:r>
+              <a:rPr sz="800" lang="zh-TW" dirty="0">
+                <a:solidFill>
+                  <a:srgbClr val="000000"/>
+                </a:solidFill>
+                <a:latin typeface="Arial Unicode MS"/>
+                <a:ea typeface="Arial Unicode MS"/>
+                <a:cs typeface="Arial Unicode MS"/>
+              </a:rPr>
+              <a:t>這不是網頁壞掉，是規格書就這樣寫的——上午第十二張那張表，最後一條是 </a:t>
+            </a:r>
+            <a:r>
+              <a:rPr sz="800" b="1" lang="zh-TW" dirty="0">
+                <a:solidFill>
+                  <a:srgbClr val="000000"/>
+                </a:solidFill>
+                <a:latin typeface="Arial Unicode MS"/>
+                <a:ea typeface="Arial Unicode MS"/>
+                <a:cs typeface="Arial Unicode MS"/>
+              </a:rPr>
+              <a:t>x 2048 @ 10 Hz</a:t>
+            </a:r>
+            <a:r>
+              <a:rPr sz="800" lang="zh-TW" dirty="0">
+                <a:solidFill>
+                  <a:srgbClr val="000000"/>
+                </a:solidFill>
+                <a:latin typeface="Arial Unicode MS"/>
+                <a:ea typeface="Arial Unicode MS"/>
+                <a:cs typeface="Arial Unicode MS"/>
+              </a:rPr>
+              <a:t>，只有 10 Hz。要最密的點，就得轉慢一點。
+</a:t>
+            </a:r>
+          </a:p>
+          <a:p>
+            <a:pPr algn="l">
+              <a:spcBef>
+                <a:spcPts val="0"/>
+              </a:spcBef>
+              <a:spcAft>
+                <a:spcPts val="133"/>
+              </a:spcAft>
+            </a:pPr>
+            <a:r>
+              <a:rPr sz="800" lang="zh-TW" dirty="0">
+                <a:solidFill>
+                  <a:srgbClr val="000000"/>
+                </a:solidFill>
+                <a:latin typeface="Arial Unicode MS"/>
+                <a:ea typeface="Arial Unicode MS"/>
+                <a:cs typeface="Arial Unicode MS"/>
+              </a:rPr>
+              <a:t>所以第二題還要你選：</a:t>
             </a:r>
             <a:r>
               <a:rPr sz="800" b="1" lang="zh-TW" dirty="0">

--- a/第五週(10-08)/第五週_第3節_簡報.pptx
+++ b/第五週(10-08)/第五週_第3節_簡報.pptx
@@ -2196,11 +2196,11 @@
                 <a:spcPts val="0"/>
               </a:spcBef>
               <a:spcAft>
-                <a:spcPts val="175"/>
+                <a:spcPts val="158"/>
               </a:spcAft>
             </a:pPr>
             <a:r>
-              <a:rPr sz="1050" lang="zh-TW" dirty="0">
+              <a:rPr sz="950" lang="zh-TW" dirty="0">
                 <a:solidFill>
                   <a:srgbClr val="000000"/>
                 </a:solidFill>
@@ -2218,11 +2218,11 @@
                 <a:spcPts val="0"/>
               </a:spcBef>
               <a:spcAft>
-                <a:spcPts val="175"/>
+                <a:spcPts val="158"/>
               </a:spcAft>
             </a:pPr>
             <a:r>
-              <a:rPr sz="1050" lang="zh-TW" dirty="0">
+              <a:rPr sz="950" lang="zh-TW" dirty="0">
                 <a:solidFill>
                   <a:srgbClr val="000000"/>
                 </a:solidFill>
@@ -2233,7 +2233,7 @@
               <a:t>情境是</a:t>
             </a:r>
             <a:r>
-              <a:rPr sz="1050" b="1" lang="zh-TW" dirty="0">
+              <a:rPr sz="950" b="1" lang="zh-TW" dirty="0">
                 <a:solidFill>
                   <a:srgbClr val="000000"/>
                 </a:solidFill>
@@ -2244,7 +2244,7 @@
               <a:t>校園接駁小巴，時速二十，要在四十公尺外認出行人</a:t>
             </a:r>
             <a:r>
-              <a:rPr sz="1050" lang="zh-TW" dirty="0">
+              <a:rPr sz="950" lang="zh-TW" dirty="0">
                 <a:solidFill>
                   <a:srgbClr val="000000"/>
                 </a:solidFill>
@@ -2262,11 +2262,11 @@
                 <a:spcPts val="0"/>
               </a:spcBef>
               <a:spcAft>
-                <a:spcPts val="175"/>
+                <a:spcPts val="158"/>
               </a:spcAft>
             </a:pPr>
             <a:r>
-              <a:rPr sz="1050" lang="zh-TW" dirty="0">
+              <a:rPr sz="950" lang="zh-TW" dirty="0">
                 <a:solidFill>
                   <a:srgbClr val="000000"/>
                 </a:solidFill>
@@ -2277,7 +2277,7 @@
               <a:t>在作業那一頁，第一題是一張十二格的表：四個型號乘三個情境。現在做的是</a:t>
             </a:r>
             <a:r>
-              <a:rPr sz="1050" b="1" lang="zh-TW" dirty="0">
+              <a:rPr sz="950" b="1" lang="zh-TW" dirty="0">
                 <a:solidFill>
                   <a:srgbClr val="000000"/>
                 </a:solidFill>
@@ -2288,7 +2288,7 @@
               <a:t>「校園 20」那一欄</a:t>
             </a:r>
             <a:r>
-              <a:rPr sz="1050" lang="zh-TW" dirty="0">
+              <a:rPr sz="950" lang="zh-TW" dirty="0">
                 <a:solidFill>
                   <a:srgbClr val="000000"/>
                 </a:solidFill>
@@ -2299,7 +2299,7 @@
               <a:t>，四格。</a:t>
             </a:r>
             <a:r>
-              <a:rPr sz="1050" b="1" lang="zh-TW" dirty="0">
+              <a:rPr sz="950" b="1" lang="zh-TW" dirty="0">
                 <a:solidFill>
                   <a:srgbClr val="000000"/>
                 </a:solidFill>
@@ -2310,7 +2310,7 @@
               <a:t>點下去那一格，判讀就在底下打開</a:t>
             </a:r>
             <a:r>
-              <a:rPr sz="1050" lang="zh-TW" dirty="0">
+              <a:rPr sz="950" lang="zh-TW" dirty="0">
                 <a:solidFill>
                   <a:srgbClr val="000000"/>
                 </a:solidFill>
@@ -2328,11 +2328,11 @@
                 <a:spcPts val="0"/>
               </a:spcBef>
               <a:spcAft>
-                <a:spcPts val="175"/>
+                <a:spcPts val="158"/>
               </a:spcAft>
             </a:pPr>
             <a:r>
-              <a:rPr sz="1050" lang="zh-TW" dirty="0">
+              <a:rPr sz="950" lang="zh-TW" dirty="0">
                 <a:solidFill>
                   <a:srgbClr val="000000"/>
                 </a:solidFill>
@@ -2350,41 +2350,63 @@
                 <a:spcPts val="0"/>
               </a:spcBef>
               <a:spcAft>
-                <a:spcPts val="175"/>
+                <a:spcPts val="158"/>
               </a:spcAft>
             </a:pPr>
             <a:r>
-              <a:rPr sz="1050" lang="zh-TW" dirty="0">
-                <a:solidFill>
-                  <a:srgbClr val="000000"/>
-                </a:solidFill>
-                <a:latin typeface="Arial Unicode MS"/>
-                <a:ea typeface="Arial Unicode MS"/>
-                <a:cs typeface="Arial Unicode MS"/>
-              </a:rPr>
-              <a:t>時速二十的煞停距離是四點二公尺，加五公尺餘裕，所以感測器只要看得到</a:t>
-            </a:r>
-            <a:r>
-              <a:rPr sz="1050" b="1" lang="zh-TW" dirty="0">
-                <a:solidFill>
-                  <a:srgbClr val="000000"/>
-                </a:solidFill>
-                <a:latin typeface="Arial Unicode MS"/>
-                <a:ea typeface="Arial Unicode MS"/>
-                <a:cs typeface="Arial Unicode MS"/>
-              </a:rPr>
-              <a:t>九公尺</a:t>
-            </a:r>
-            <a:r>
-              <a:rPr sz="1050" lang="zh-TW" dirty="0">
-                <a:solidFill>
-                  <a:srgbClr val="000000"/>
-                </a:solidFill>
-                <a:latin typeface="Arial Unicode MS"/>
-                <a:ea typeface="Arial Unicode MS"/>
-                <a:cs typeface="Arial Unicode MS"/>
-              </a:rPr>
-              <a:t>就夠了。這個門檻很低，四顆的測距全部都過。
+              <a:rPr sz="950" lang="zh-TW" dirty="0">
+                <a:solidFill>
+                  <a:srgbClr val="000000"/>
+                </a:solidFill>
+                <a:latin typeface="Arial Unicode MS"/>
+                <a:ea typeface="Arial Unicode MS"/>
+                <a:cs typeface="Arial Unicode MS"/>
+              </a:rPr>
+              <a:t>時速二十的煞停距離只有四點二公尺，加五公尺餘裕是九公尺。可是光會停還不夠——這一題要你</a:t>
+            </a:r>
+            <a:r>
+              <a:rPr sz="950" b="1" lang="zh-TW" dirty="0">
+                <a:solidFill>
+                  <a:srgbClr val="000000"/>
+                </a:solidFill>
+                <a:latin typeface="Arial Unicode MS"/>
+                <a:ea typeface="Arial Unicode MS"/>
+                <a:cs typeface="Arial Unicode MS"/>
+              </a:rPr>
+              <a:t>在四十公尺外就認出行人</a:t>
+            </a:r>
+            <a:r>
+              <a:rPr sz="950" lang="zh-TW" dirty="0">
+                <a:solidFill>
+                  <a:srgbClr val="000000"/>
+                </a:solidFill>
+                <a:latin typeface="Arial Unicode MS"/>
+                <a:ea typeface="Arial Unicode MS"/>
+                <a:cs typeface="Arial Unicode MS"/>
+              </a:rPr>
+              <a:t>，所以測距也得搆得到四十公尺。兩個取大的，門檻是</a:t>
+            </a:r>
+            <a:r>
+              <a:rPr sz="950" b="1" lang="zh-TW" dirty="0">
+                <a:solidFill>
+                  <a:srgbClr val="000000"/>
+                </a:solidFill>
+                <a:latin typeface="Arial Unicode MS"/>
+                <a:ea typeface="Arial Unicode MS"/>
+                <a:cs typeface="Arial Unicode MS"/>
+              </a:rPr>
+              <a:t>四十公尺</a:t>
+            </a:r>
+            <a:r>
+              <a:rPr sz="950" lang="zh-TW" dirty="0">
+                <a:solidFill>
+                  <a:srgbClr val="000000"/>
+                </a:solidFill>
+                <a:latin typeface="Arial Unicode MS"/>
+                <a:ea typeface="Arial Unicode MS"/>
+                <a:cs typeface="Arial Unicode MS"/>
+              </a:rPr>
+              <a:t>。
 </a:t>
             </a:r>
           </a:p>
@@ -2394,41 +2416,19 @@
                 <a:spcPts val="0"/>
               </a:spcBef>
               <a:spcAft>
-                <a:spcPts val="175"/>
+                <a:spcPts val="158"/>
               </a:spcAft>
             </a:pPr>
             <a:r>
-              <a:rPr sz="1050" lang="zh-TW" dirty="0">
-                <a:solidFill>
-                  <a:srgbClr val="000000"/>
-                </a:solidFill>
-                <a:latin typeface="Arial Unicode MS"/>
-                <a:ea typeface="Arial Unicode MS"/>
-                <a:cs typeface="Arial Unicode MS"/>
-              </a:rPr>
-              <a:t>所以卡住的不會是測距，而是</a:t>
-            </a:r>
-            <a:r>
-              <a:rPr sz="1050" b="1" lang="zh-TW" dirty="0">
-                <a:solidFill>
-                  <a:srgbClr val="000000"/>
-                </a:solidFill>
-                <a:latin typeface="Arial Unicode MS"/>
-                <a:ea typeface="Arial Unicode MS"/>
-                <a:cs typeface="Arial Unicode MS"/>
-              </a:rPr>
-              <a:t>點數</a:t>
-            </a:r>
-            <a:r>
-              <a:rPr sz="1050" lang="zh-TW" dirty="0">
-                <a:solidFill>
-                  <a:srgbClr val="000000"/>
-                </a:solidFill>
-                <a:latin typeface="Arial Unicode MS"/>
-                <a:ea typeface="Arial Unicode MS"/>
-                <a:cs typeface="Arial Unicode MS"/>
-              </a:rPr>
-              <a:t>。
+              <a:rPr sz="950" lang="zh-TW" dirty="0">
+                <a:solidFill>
+                  <a:srgbClr val="000000"/>
+                </a:solidFill>
+                <a:latin typeface="Arial Unicode MS"/>
+                <a:ea typeface="Arial Unicode MS"/>
+                <a:cs typeface="Arial Unicode MS"/>
+              </a:rPr>
+              <a:t>四顆的測距都過得了，LD-16 剛好四十，壓線過。
 </a:t>
             </a:r>
           </a:p>
@@ -2438,19 +2438,41 @@
                 <a:spcPts val="0"/>
               </a:spcBef>
               <a:spcAft>
-                <a:spcPts val="175"/>
+                <a:spcPts val="158"/>
               </a:spcAft>
             </a:pPr>
             <a:r>
-              <a:rPr sz="1050" lang="zh-TW" dirty="0">
-                <a:solidFill>
-                  <a:srgbClr val="000000"/>
-                </a:solidFill>
-                <a:latin typeface="Arial Unicode MS"/>
-                <a:ea typeface="Arial Unicode MS"/>
-                <a:cs typeface="Arial Unicode MS"/>
-              </a:rPr>
-              <a:t>AT128P 在四十公尺的行人身上有八十四個點，過。相機的估距誤差在四十公尺是正負零點五八公尺，也過。
+              <a:rPr sz="950" lang="zh-TW" dirty="0">
+                <a:solidFill>
+                  <a:srgbClr val="000000"/>
+                </a:solidFill>
+                <a:latin typeface="Arial Unicode MS"/>
+                <a:ea typeface="Arial Unicode MS"/>
+                <a:cs typeface="Arial Unicode MS"/>
+              </a:rPr>
+              <a:t>所以卡住的不會是測距，而是</a:t>
+            </a:r>
+            <a:r>
+              <a:rPr sz="950" b="1" lang="zh-TW" dirty="0">
+                <a:solidFill>
+                  <a:srgbClr val="000000"/>
+                </a:solidFill>
+                <a:latin typeface="Arial Unicode MS"/>
+                <a:ea typeface="Arial Unicode MS"/>
+                <a:cs typeface="Arial Unicode MS"/>
+              </a:rPr>
+              <a:t>點數</a:t>
+            </a:r>
+            <a:r>
+              <a:rPr sz="950" lang="zh-TW" dirty="0">
+                <a:solidFill>
+                  <a:srgbClr val="000000"/>
+                </a:solidFill>
+                <a:latin typeface="Arial Unicode MS"/>
+                <a:ea typeface="Arial Unicode MS"/>
+                <a:cs typeface="Arial Unicode MS"/>
+              </a:rPr>
+              <a:t>。
 </a:t>
             </a:r>
           </a:p>
@@ -2460,19 +2482,19 @@
                 <a:spcPts val="0"/>
               </a:spcBef>
               <a:spcAft>
-                <a:spcPts val="175"/>
+                <a:spcPts val="158"/>
               </a:spcAft>
             </a:pPr>
             <a:r>
-              <a:rPr sz="1050" lang="zh-TW" dirty="0">
-                <a:solidFill>
-                  <a:srgbClr val="000000"/>
-                </a:solidFill>
-                <a:latin typeface="Arial Unicode MS"/>
-                <a:ea typeface="Arial Unicode MS"/>
-                <a:cs typeface="Arial Unicode MS"/>
-              </a:rPr>
-              <a:t>OS1 只有六個點，不夠。LD-16 只有一個點，更不夠。
+              <a:rPr sz="950" lang="zh-TW" dirty="0">
+                <a:solidFill>
+                  <a:srgbClr val="000000"/>
+                </a:solidFill>
+                <a:latin typeface="Arial Unicode MS"/>
+                <a:ea typeface="Arial Unicode MS"/>
+                <a:cs typeface="Arial Unicode MS"/>
+              </a:rPr>
+              <a:t>AT128P 在四十公尺的行人身上有八十四個點，過。相機的估距誤差在四十公尺是正負零點三八公尺，也過。
 </a:t>
             </a:r>
           </a:p>
@@ -2482,41 +2504,19 @@
                 <a:spcPts val="0"/>
               </a:spcBef>
               <a:spcAft>
-                <a:spcPts val="175"/>
+                <a:spcPts val="158"/>
               </a:spcAft>
             </a:pPr>
             <a:r>
-              <a:rPr sz="1050" lang="zh-TW" dirty="0">
-                <a:solidFill>
-                  <a:srgbClr val="000000"/>
-                </a:solidFill>
-                <a:latin typeface="Arial Unicode MS"/>
-                <a:ea typeface="Arial Unicode MS"/>
-                <a:cs typeface="Arial Unicode MS"/>
-              </a:rPr>
-              <a:t>現在我要各位想一題：</a:t>
-            </a:r>
-            <a:r>
-              <a:rPr sz="1050" b="1" lang="zh-TW" dirty="0">
-                <a:solidFill>
-                  <a:srgbClr val="000000"/>
-                </a:solidFill>
-                <a:latin typeface="Arial Unicode MS"/>
-                <a:ea typeface="Arial Unicode MS"/>
-                <a:cs typeface="Arial Unicode MS"/>
-              </a:rPr>
-              <a:t>為什麼相機在這個情境反而夠用？</a:t>
-            </a:r>
-            <a:r>
-              <a:rPr sz="1050" lang="zh-TW" dirty="0">
-                <a:solidFill>
-                  <a:srgbClr val="000000"/>
-                </a:solidFill>
-                <a:latin typeface="Arial Unicode MS"/>
-                <a:ea typeface="Arial Unicode MS"/>
-                <a:cs typeface="Arial Unicode MS"/>
-              </a:rPr>
-              <a:t>
+              <a:rPr sz="950" lang="zh-TW" dirty="0">
+                <a:solidFill>
+                  <a:srgbClr val="000000"/>
+                </a:solidFill>
+                <a:latin typeface="Arial Unicode MS"/>
+                <a:ea typeface="Arial Unicode MS"/>
+                <a:cs typeface="Arial Unicode MS"/>
+              </a:rPr>
+              <a:t>OS1 只有六個點，不夠。LD-16 只有一個點，更不夠。
 </a:t>
             </a:r>
           </a:p>
@@ -2526,19 +2526,41 @@
                 <a:spcPts val="0"/>
               </a:spcBef>
               <a:spcAft>
-                <a:spcPts val="175"/>
+                <a:spcPts val="158"/>
               </a:spcAft>
             </a:pPr>
             <a:r>
-              <a:rPr sz="1050" lang="zh-TW" dirty="0">
-                <a:solidFill>
-                  <a:srgbClr val="000000"/>
-                </a:solidFill>
-                <a:latin typeface="Arial Unicode MS"/>
-                <a:ea typeface="Arial Unicode MS"/>
-                <a:cs typeface="Arial Unicode MS"/>
-              </a:rPr>
-              <a:t>因為相機的誤差是隨距離平方長的，四十公尺還算近，誤差只有半公尺多。而且校園裡車速慢，半公尺的誤差不會害你來不及煞車。
+              <a:rPr sz="950" lang="zh-TW" dirty="0">
+                <a:solidFill>
+                  <a:srgbClr val="000000"/>
+                </a:solidFill>
+                <a:latin typeface="Arial Unicode MS"/>
+                <a:ea typeface="Arial Unicode MS"/>
+                <a:cs typeface="Arial Unicode MS"/>
+              </a:rPr>
+              <a:t>現在我要各位想一題：</a:t>
+            </a:r>
+            <a:r>
+              <a:rPr sz="950" b="1" lang="zh-TW" dirty="0">
+                <a:solidFill>
+                  <a:srgbClr val="000000"/>
+                </a:solidFill>
+                <a:latin typeface="Arial Unicode MS"/>
+                <a:ea typeface="Arial Unicode MS"/>
+                <a:cs typeface="Arial Unicode MS"/>
+              </a:rPr>
+              <a:t>為什麼相機在這個情境反而夠用？</a:t>
+            </a:r>
+            <a:r>
+              <a:rPr sz="950" lang="zh-TW" dirty="0">
+                <a:solidFill>
+                  <a:srgbClr val="000000"/>
+                </a:solidFill>
+                <a:latin typeface="Arial Unicode MS"/>
+                <a:ea typeface="Arial Unicode MS"/>
+                <a:cs typeface="Arial Unicode MS"/>
+              </a:rPr>
+              <a:t>
 </a:t>
             </a:r>
           </a:p>
@@ -2548,41 +2570,19 @@
                 <a:spcPts val="0"/>
               </a:spcBef>
               <a:spcAft>
-                <a:spcPts val="175"/>
+                <a:spcPts val="158"/>
               </a:spcAft>
             </a:pPr>
             <a:r>
-              <a:rPr sz="1050" lang="zh-TW" dirty="0">
-                <a:solidFill>
-                  <a:srgbClr val="000000"/>
-                </a:solidFill>
-                <a:latin typeface="Arial Unicode MS"/>
-                <a:ea typeface="Arial Unicode MS"/>
-                <a:cs typeface="Arial Unicode MS"/>
-              </a:rPr>
-              <a:t>所以這一題的結論是：</a:t>
-            </a:r>
-            <a:r>
-              <a:rPr sz="1050" b="1" lang="zh-TW" dirty="0">
-                <a:solidFill>
-                  <a:srgbClr val="000000"/>
-                </a:solidFill>
-                <a:latin typeface="Arial Unicode MS"/>
-                <a:ea typeface="Arial Unicode MS"/>
-                <a:cs typeface="Arial Unicode MS"/>
-              </a:rPr>
-              <a:t>在慢速、近距離的場合，便宜的相機就很夠用。</a:t>
-            </a:r>
-            <a:r>
-              <a:rPr sz="1050" lang="zh-TW" dirty="0">
-                <a:solidFill>
-                  <a:srgbClr val="000000"/>
-                </a:solidFill>
-                <a:latin typeface="Arial Unicode MS"/>
-                <a:ea typeface="Arial Unicode MS"/>
-                <a:cs typeface="Arial Unicode MS"/>
-              </a:rPr>
-              <a:t>不是愈貴愈好，是看你要在哪裡跑。
+              <a:rPr sz="950" lang="zh-TW" dirty="0">
+                <a:solidFill>
+                  <a:srgbClr val="000000"/>
+                </a:solidFill>
+                <a:latin typeface="Arial Unicode MS"/>
+                <a:ea typeface="Arial Unicode MS"/>
+                <a:cs typeface="Arial Unicode MS"/>
+              </a:rPr>
+              <a:t>因為相機的誤差是隨距離平方長的，四十公尺還算近，誤差不到四十公分。而且校園裡車速慢，這點誤差不會害你來不及煞車。
 </a:t>
             </a:r>
           </a:p>
@@ -2592,11 +2592,55 @@
                 <a:spcPts val="0"/>
               </a:spcBef>
               <a:spcAft>
-                <a:spcPts val="175"/>
+                <a:spcPts val="158"/>
               </a:spcAft>
             </a:pPr>
             <a:r>
-              <a:rPr sz="1050" lang="zh-TW" dirty="0">
+              <a:rPr sz="950" lang="zh-TW" dirty="0">
+                <a:solidFill>
+                  <a:srgbClr val="000000"/>
+                </a:solidFill>
+                <a:latin typeface="Arial Unicode MS"/>
+                <a:ea typeface="Arial Unicode MS"/>
+                <a:cs typeface="Arial Unicode MS"/>
+              </a:rPr>
+              <a:t>所以這一題的結論是：</a:t>
+            </a:r>
+            <a:r>
+              <a:rPr sz="950" b="1" lang="zh-TW" dirty="0">
+                <a:solidFill>
+                  <a:srgbClr val="000000"/>
+                </a:solidFill>
+                <a:latin typeface="Arial Unicode MS"/>
+                <a:ea typeface="Arial Unicode MS"/>
+                <a:cs typeface="Arial Unicode MS"/>
+              </a:rPr>
+              <a:t>在慢速、近距離的場合，便宜的相機就很夠用。</a:t>
+            </a:r>
+            <a:r>
+              <a:rPr sz="950" lang="zh-TW" dirty="0">
+                <a:solidFill>
+                  <a:srgbClr val="000000"/>
+                </a:solidFill>
+                <a:latin typeface="Arial Unicode MS"/>
+                <a:ea typeface="Arial Unicode MS"/>
+                <a:cs typeface="Arial Unicode MS"/>
+              </a:rPr>
+              <a:t>不是愈貴愈好，是看你要在哪裡跑。
+</a:t>
+            </a:r>
+          </a:p>
+          <a:p>
+            <a:pPr algn="l">
+              <a:spcBef>
+                <a:spcPts val="0"/>
+              </a:spcBef>
+              <a:spcAft>
+                <a:spcPts val="158"/>
+              </a:spcAft>
+            </a:pPr>
+            <a:r>
+              <a:rPr sz="950" lang="zh-TW" dirty="0">
                 <a:solidFill>
                   <a:srgbClr val="000000"/>
                 </a:solidFill>
@@ -2824,7 +2868,51 @@
                 <a:ea typeface="Arial Unicode MS"/>
                 <a:cs typeface="Arial Unicode MS"/>
               </a:rPr>
-              <a:t>現在請各位做一件事。在試算結果的上方，有一列小小的選單，寫著「這一顆的兩個數字在規格表上是可以設定的」。
+              <a:t>現在請各位捲到</a:t>
+            </a:r>
+            <a:r>
+              <a:rPr sz="800" b="1" lang="zh-TW" dirty="0">
+                <a:solidFill>
+                  <a:srgbClr val="000000"/>
+                </a:solidFill>
+                <a:latin typeface="Arial Unicode MS"/>
+                <a:ea typeface="Arial Unicode MS"/>
+                <a:cs typeface="Arial Unicode MS"/>
+              </a:rPr>
+              <a:t>作業那一頁的第二題</a:t>
+            </a:r>
+            <a:r>
+              <a:rPr sz="800" lang="zh-TW" dirty="0">
+                <a:solidFill>
+                  <a:srgbClr val="000000"/>
+                </a:solidFill>
+                <a:latin typeface="Arial Unicode MS"/>
+                <a:ea typeface="Arial Unicode MS"/>
+                <a:cs typeface="Arial Unicode MS"/>
+              </a:rPr>
+              <a:t>。題目底下就有兩個下拉，左邊那個預設停在 </a:t>
+            </a:r>
+            <a:r>
+              <a:rPr sz="800" b="1" lang="zh-TW" dirty="0">
+                <a:solidFill>
+                  <a:srgbClr val="000000"/>
+                </a:solidFill>
+                <a:latin typeface="Arial Unicode MS"/>
+                <a:ea typeface="Arial Unicode MS"/>
+                <a:cs typeface="Arial Unicode MS"/>
+              </a:rPr>
+              <a:t>1024 點／圈</a:t>
+            </a:r>
+            <a:r>
+              <a:rPr sz="800" lang="zh-TW" dirty="0">
+                <a:solidFill>
+                  <a:srgbClr val="000000"/>
+                </a:solidFill>
+                <a:latin typeface="Arial Unicode MS"/>
+                <a:ea typeface="Arial Unicode MS"/>
+                <a:cs typeface="Arial Unicode MS"/>
+              </a:rPr>
+              <a:t>。
 </a:t>
             </a:r>
           </a:p>
@@ -2846,29 +2934,7 @@
                 <a:ea typeface="Arial Unicode MS"/>
                 <a:cs typeface="Arial Unicode MS"/>
               </a:rPr>
-              <a:t>請把左邊那個從 </a:t>
-            </a:r>
-            <a:r>
-              <a:rPr sz="800" b="1" lang="zh-TW" dirty="0">
-                <a:solidFill>
-                  <a:srgbClr val="000000"/>
-                </a:solidFill>
-                <a:latin typeface="Arial Unicode MS"/>
-                <a:ea typeface="Arial Unicode MS"/>
-                <a:cs typeface="Arial Unicode MS"/>
-              </a:rPr>
-              <a:t>1024 點／圈</a:t>
-            </a:r>
-            <a:r>
-              <a:rPr sz="800" lang="zh-TW" dirty="0">
-                <a:solidFill>
-                  <a:srgbClr val="000000"/>
-                </a:solidFill>
-                <a:latin typeface="Arial Unicode MS"/>
-                <a:ea typeface="Arial Unicode MS"/>
-                <a:cs typeface="Arial Unicode MS"/>
-              </a:rPr>
-              <a:t> 改成 </a:t>
+              <a:t>請把它改成 </a:t>
             </a:r>
             <a:r>
               <a:rPr sz="800" b="1" lang="zh-TW" dirty="0">
@@ -2970,6 +3036,17 @@
               </a:spcAft>
             </a:pPr>
             <a:r>
+              <a:rPr sz="800" lang="zh-TW" dirty="0">
+                <a:solidFill>
+                  <a:srgbClr val="000000"/>
+                </a:solidFill>
+                <a:latin typeface="Arial Unicode MS"/>
+                <a:ea typeface="Arial Unicode MS"/>
+                <a:cs typeface="Arial Unicode MS"/>
+              </a:rPr>
+              <a:t>順便講清楚一件事，免得各位找錯地方：判讀台右邊的</a:t>
+            </a:r>
+            <a:r>
               <a:rPr sz="800" b="1" lang="zh-TW" dirty="0">
                 <a:solidFill>
                   <a:srgbClr val="000000"/>
@@ -2978,7 +3055,7 @@
                 <a:ea typeface="Arial Unicode MS"/>
                 <a:cs typeface="Arial Unicode MS"/>
               </a:rPr>
-              <a:t>這一題在作業那一頁的第二題做，不要回判讀台。</a:t>
+              <a:t>小工具②也可以把每圈點數拉到 2048</a:t>
             </a:r>
             <a:r>
               <a:rPr sz="800" lang="zh-TW" dirty="0">
@@ -2989,29 +3066,7 @@
                 <a:ea typeface="Arial Unicode MS"/>
                 <a:cs typeface="Arial Unicode MS"/>
               </a:rPr>
-              <a:t>第二題上面就有兩個下拉，左邊那個預設停在 1024，自己轉成 2048，底下的判讀會立刻跟著變。
-</a:t>
-            </a:r>
-          </a:p>
-          <a:p>
-            <a:pPr algn="l">
-              <a:spcBef>
-                <a:spcPts val="0"/>
-              </a:spcBef>
-              <a:spcAft>
-                <a:spcPts val="133"/>
-              </a:spcAft>
-            </a:pPr>
-            <a:r>
-              <a:rPr sz="800" lang="zh-TW" dirty="0">
-                <a:solidFill>
-                  <a:srgbClr val="000000"/>
-                </a:solidFill>
-                <a:latin typeface="Arial Unicode MS"/>
-                <a:ea typeface="Arial Unicode MS"/>
-                <a:cs typeface="Arial Unicode MS"/>
-              </a:rPr>
-              <a:t>順便講清楚一件事，免得各位找錯地方：判讀台右邊的</a:t>
+              <a:t>，也會看到九個點變十八個——</a:t>
             </a:r>
             <a:r>
               <a:rPr sz="800" b="1" lang="zh-TW" dirty="0">
@@ -3022,29 +3077,7 @@
                 <a:ea typeface="Arial Unicode MS"/>
                 <a:cs typeface="Arial Unicode MS"/>
               </a:rPr>
-              <a:t>小工具②也可以把每圈點數拉到 2048</a:t>
-            </a:r>
-            <a:r>
-              <a:rPr sz="800" lang="zh-TW" dirty="0">
-                <a:solidFill>
-                  <a:srgbClr val="000000"/>
-                </a:solidFill>
-                <a:latin typeface="Arial Unicode MS"/>
-                <a:ea typeface="Arial Unicode MS"/>
-                <a:cs typeface="Arial Unicode MS"/>
-              </a:rPr>
-              <a:t>，也會看到九個點變十八個——</a:t>
-            </a:r>
-            <a:r>
-              <a:rPr sz="800" b="1" lang="zh-TW" dirty="0">
-                <a:solidFill>
-                  <a:srgbClr val="000000"/>
-                </a:solidFill>
-                <a:latin typeface="Arial Unicode MS"/>
-                <a:ea typeface="Arial Unicode MS"/>
-                <a:cs typeface="Arial Unicode MS"/>
-              </a:rPr>
-              <a:t>可是那一區只是示範，不會改判定。</a:t>
+              <a:t>可是那一區只是示範，不會改判定。這一題要在作業那一頁做。</a:t>
             </a:r>
             <a:r>
               <a:rPr sz="800" lang="zh-TW" dirty="0">
@@ -3472,11 +3505,11 @@
                 <a:spcPts val="0"/>
               </a:spcBef>
               <a:spcAft>
-                <a:spcPts val="158"/>
+                <a:spcPts val="142"/>
               </a:spcAft>
             </a:pPr>
             <a:r>
-              <a:rPr sz="950" lang="zh-TW" dirty="0">
+              <a:rPr sz="850" lang="zh-TW" dirty="0">
                 <a:solidFill>
                   <a:srgbClr val="000000"/>
                 </a:solidFill>
@@ -3494,11 +3527,11 @@
                 <a:spcPts val="0"/>
               </a:spcBef>
               <a:spcAft>
-                <a:spcPts val="158"/>
+                <a:spcPts val="142"/>
               </a:spcAft>
             </a:pPr>
             <a:r>
-              <a:rPr sz="950" lang="zh-TW" dirty="0">
+              <a:rPr sz="850" lang="zh-TW" dirty="0">
                 <a:solidFill>
                   <a:srgbClr val="000000"/>
                 </a:solidFill>
@@ -3509,7 +3542,7 @@
               <a:t>先看煞停距離。工具會算給你：時速一百的煞停距離是</a:t>
             </a:r>
             <a:r>
-              <a:rPr sz="950" b="1" lang="zh-TW" dirty="0">
+              <a:rPr sz="850" b="1" lang="zh-TW" dirty="0">
                 <a:solidFill>
                   <a:srgbClr val="000000"/>
                 </a:solidFill>
@@ -3520,37 +3553,15 @@
               <a:t>七十三公尺</a:t>
             </a:r>
             <a:r>
-              <a:rPr sz="950" lang="zh-TW" dirty="0">
-                <a:solidFill>
-                  <a:srgbClr val="000000"/>
-                </a:solidFill>
-                <a:latin typeface="Arial Unicode MS"/>
-                <a:ea typeface="Arial Unicode MS"/>
-                <a:cs typeface="Arial Unicode MS"/>
-              </a:rPr>
-              <a:t>，加五公尺餘裕，所以感測器至少要看到</a:t>
-            </a:r>
-            <a:r>
-              <a:rPr sz="950" b="1" lang="zh-TW" dirty="0">
-                <a:solidFill>
-                  <a:srgbClr val="000000"/>
-                </a:solidFill>
-                <a:latin typeface="Arial Unicode MS"/>
-                <a:ea typeface="Arial Unicode MS"/>
-                <a:cs typeface="Arial Unicode MS"/>
-              </a:rPr>
-              <a:t>七十八公尺</a:t>
-            </a:r>
-            <a:r>
-              <a:rPr sz="950" lang="zh-TW" dirty="0">
-                <a:solidFill>
-                  <a:srgbClr val="000000"/>
-                </a:solidFill>
-                <a:latin typeface="Arial Unicode MS"/>
-                <a:ea typeface="Arial Unicode MS"/>
-                <a:cs typeface="Arial Unicode MS"/>
-              </a:rPr>
-              <a:t>。
+              <a:rPr sz="850" lang="zh-TW" dirty="0">
+                <a:solidFill>
+                  <a:srgbClr val="000000"/>
+                </a:solidFill>
+                <a:latin typeface="Arial Unicode MS"/>
+                <a:ea typeface="Arial Unicode MS"/>
+                <a:cs typeface="Arial Unicode MS"/>
+              </a:rPr>
+              <a:t>，加五公尺餘裕是七十八公尺。
 </a:t>
             </a:r>
           </a:p>
@@ -3560,11 +3571,11 @@
                 <a:spcPts val="0"/>
               </a:spcBef>
               <a:spcAft>
-                <a:spcPts val="158"/>
+                <a:spcPts val="142"/>
               </a:spcAft>
             </a:pPr>
             <a:r>
-              <a:rPr sz="950" lang="zh-TW" dirty="0">
+              <a:rPr sz="850" lang="zh-TW" dirty="0">
                 <a:solidFill>
                   <a:srgbClr val="000000"/>
                 </a:solidFill>
@@ -3582,19 +3593,63 @@
                 <a:spcPts val="0"/>
               </a:spcBef>
               <a:spcAft>
-                <a:spcPts val="158"/>
+                <a:spcPts val="142"/>
               </a:spcAft>
             </a:pPr>
             <a:r>
-              <a:rPr sz="950" lang="zh-TW" dirty="0">
-                <a:solidFill>
-                  <a:srgbClr val="000000"/>
-                </a:solidFill>
-                <a:latin typeface="Arial Unicode MS"/>
-                <a:ea typeface="Arial Unicode MS"/>
-                <a:cs typeface="Arial Unicode MS"/>
-              </a:rPr>
-              <a:t>現在四個型號跑一次，各位會看到很有意思的結果。
+              <a:rPr sz="850" lang="zh-TW" dirty="0">
+                <a:solidFill>
+                  <a:srgbClr val="000000"/>
+                </a:solidFill>
+                <a:latin typeface="Arial Unicode MS"/>
+                <a:ea typeface="Arial Unicode MS"/>
+                <a:cs typeface="Arial Unicode MS"/>
+              </a:rPr>
+              <a:t>不過這一題的門檻不是七十八。題目要你</a:t>
+            </a:r>
+            <a:r>
+              <a:rPr sz="850" b="1" lang="zh-TW" dirty="0">
+                <a:solidFill>
+                  <a:srgbClr val="000000"/>
+                </a:solidFill>
+                <a:latin typeface="Arial Unicode MS"/>
+                <a:ea typeface="Arial Unicode MS"/>
+                <a:cs typeface="Arial Unicode MS"/>
+              </a:rPr>
+              <a:t>在一百五十公尺外看到車</a:t>
+            </a:r>
+            <a:r>
+              <a:rPr sz="850" lang="zh-TW" dirty="0">
+                <a:solidFill>
+                  <a:srgbClr val="000000"/>
+                </a:solidFill>
+                <a:latin typeface="Arial Unicode MS"/>
+                <a:ea typeface="Arial Unicode MS"/>
+                <a:cs typeface="Arial Unicode MS"/>
+              </a:rPr>
+              <a:t>，測距得搆得到那台車才行，所以門檻是</a:t>
+            </a:r>
+            <a:r>
+              <a:rPr sz="850" b="1" lang="zh-TW" dirty="0">
+                <a:solidFill>
+                  <a:srgbClr val="000000"/>
+                </a:solidFill>
+                <a:latin typeface="Arial Unicode MS"/>
+                <a:ea typeface="Arial Unicode MS"/>
+                <a:cs typeface="Arial Unicode MS"/>
+              </a:rPr>
+              <a:t>一百五十公尺</a:t>
+            </a:r>
+            <a:r>
+              <a:rPr sz="850" lang="zh-TW" dirty="0">
+                <a:solidFill>
+                  <a:srgbClr val="000000"/>
+                </a:solidFill>
+                <a:latin typeface="Arial Unicode MS"/>
+                <a:ea typeface="Arial Unicode MS"/>
+                <a:cs typeface="Arial Unicode MS"/>
+              </a:rPr>
+              <a:t>。
 </a:t>
             </a:r>
           </a:p>
@@ -3604,30 +3659,19 @@
                 <a:spcPts val="0"/>
               </a:spcBef>
               <a:spcAft>
-                <a:spcPts val="158"/>
+                <a:spcPts val="142"/>
               </a:spcAft>
             </a:pPr>
             <a:r>
-              <a:rPr sz="950" b="1" lang="zh-TW" dirty="0">
-                <a:solidFill>
-                  <a:srgbClr val="000000"/>
-                </a:solidFill>
-                <a:latin typeface="Arial Unicode MS"/>
-                <a:ea typeface="Arial Unicode MS"/>
-                <a:cs typeface="Arial Unicode MS"/>
-              </a:rPr>
-              <a:t>LD-16 卡在測距。</a:t>
-            </a:r>
-            <a:r>
-              <a:rPr sz="950" lang="zh-TW" dirty="0">
-                <a:solidFill>
-                  <a:srgbClr val="000000"/>
-                </a:solidFill>
-                <a:latin typeface="Arial Unicode MS"/>
-                <a:ea typeface="Arial Unicode MS"/>
-                <a:cs typeface="Arial Unicode MS"/>
-              </a:rPr>
-              <a:t>它只有四十公尺，連門檻的七十八都到不了，直接出局。
+              <a:rPr sz="850" lang="zh-TW" dirty="0">
+                <a:solidFill>
+                  <a:srgbClr val="000000"/>
+                </a:solidFill>
+                <a:latin typeface="Arial Unicode MS"/>
+                <a:ea typeface="Arial Unicode MS"/>
+                <a:cs typeface="Arial Unicode MS"/>
+              </a:rPr>
+              <a:t>現在四個型號跑一次，各位會看到很有意思的結果。
 </a:t>
             </a:r>
           </a:p>
@@ -3637,30 +3681,30 @@
                 <a:spcPts val="0"/>
               </a:spcBef>
               <a:spcAft>
-                <a:spcPts val="158"/>
+                <a:spcPts val="142"/>
               </a:spcAft>
             </a:pPr>
             <a:r>
-              <a:rPr sz="950" b="1" lang="zh-TW" dirty="0">
-                <a:solidFill>
-                  <a:srgbClr val="000000"/>
-                </a:solidFill>
-                <a:latin typeface="Arial Unicode MS"/>
-                <a:ea typeface="Arial Unicode MS"/>
-                <a:cs typeface="Arial Unicode MS"/>
-              </a:rPr>
-              <a:t>OS1 也卡在測距。</a:t>
-            </a:r>
-            <a:r>
-              <a:rPr sz="950" lang="zh-TW" dirty="0">
-                <a:solidFill>
-                  <a:srgbClr val="000000"/>
-                </a:solidFill>
-                <a:latin typeface="Arial Unicode MS"/>
-                <a:ea typeface="Arial Unicode MS"/>
-                <a:cs typeface="Arial Unicode MS"/>
-              </a:rPr>
-              <a:t>九十公尺，看起來有過門檻，可是一百五十公尺外的車它根本看不到——目標比它的測距還遠。
+              <a:rPr sz="850" b="1" lang="zh-TW" dirty="0">
+                <a:solidFill>
+                  <a:srgbClr val="000000"/>
+                </a:solidFill>
+                <a:latin typeface="Arial Unicode MS"/>
+                <a:ea typeface="Arial Unicode MS"/>
+                <a:cs typeface="Arial Unicode MS"/>
+              </a:rPr>
+              <a:t>LD-16 卡在測距。</a:t>
+            </a:r>
+            <a:r>
+              <a:rPr sz="850" lang="zh-TW" dirty="0">
+                <a:solidFill>
+                  <a:srgbClr val="000000"/>
+                </a:solidFill>
+                <a:latin typeface="Arial Unicode MS"/>
+                <a:ea typeface="Arial Unicode MS"/>
+                <a:cs typeface="Arial Unicode MS"/>
+              </a:rPr>
+              <a:t>它只有四十公尺，連門檻的七十八都到不了，直接出局。
 </a:t>
             </a:r>
           </a:p>
@@ -3670,52 +3714,30 @@
                 <a:spcPts val="0"/>
               </a:spcBef>
               <a:spcAft>
-                <a:spcPts val="158"/>
+                <a:spcPts val="142"/>
               </a:spcAft>
             </a:pPr>
             <a:r>
-              <a:rPr sz="950" b="1" lang="zh-TW" dirty="0">
-                <a:solidFill>
-                  <a:srgbClr val="000000"/>
-                </a:solidFill>
-                <a:latin typeface="Arial Unicode MS"/>
-                <a:ea typeface="Arial Unicode MS"/>
-                <a:cs typeface="Arial Unicode MS"/>
-              </a:rPr>
-              <a:t>相機卡在別的地方。</a:t>
-            </a:r>
-            <a:r>
-              <a:rPr sz="950" lang="zh-TW" dirty="0">
-                <a:solidFill>
-                  <a:srgbClr val="000000"/>
-                </a:solidFill>
-                <a:latin typeface="Arial Unicode MS"/>
-                <a:ea typeface="Arial Unicode MS"/>
-                <a:cs typeface="Arial Unicode MS"/>
-              </a:rPr>
-              <a:t>它的問題不是看不到，是</a:t>
-            </a:r>
-            <a:r>
-              <a:rPr sz="950" b="1" lang="zh-TW" dirty="0">
-                <a:solidFill>
-                  <a:srgbClr val="000000"/>
-                </a:solidFill>
-                <a:latin typeface="Arial Unicode MS"/>
-                <a:ea typeface="Arial Unicode MS"/>
-                <a:cs typeface="Arial Unicode MS"/>
-              </a:rPr>
-              <a:t>看不準</a:t>
-            </a:r>
-            <a:r>
-              <a:rPr sz="950" lang="zh-TW" dirty="0">
-                <a:solidFill>
-                  <a:srgbClr val="000000"/>
-                </a:solidFill>
-                <a:latin typeface="Arial Unicode MS"/>
-                <a:ea typeface="Arial Unicode MS"/>
-                <a:cs typeface="Arial Unicode MS"/>
-              </a:rPr>
-              <a:t>。一百五十公尺處的估距誤差是正負五點三七公尺。五公尺是什麼概念？大概一台車的長度。你不知道前面那台車是在一百四十五還是一百五十五公尺，這樣沒辦法決定要不要煞車。
+              <a:rPr sz="850" b="1" lang="zh-TW" dirty="0">
+                <a:solidFill>
+                  <a:srgbClr val="000000"/>
+                </a:solidFill>
+                <a:latin typeface="Arial Unicode MS"/>
+                <a:ea typeface="Arial Unicode MS"/>
+                <a:cs typeface="Arial Unicode MS"/>
+              </a:rPr>
+              <a:t>OS1 也卡在測距。</a:t>
+            </a:r>
+            <a:r>
+              <a:rPr sz="850" lang="zh-TW" dirty="0">
+                <a:solidFill>
+                  <a:srgbClr val="000000"/>
+                </a:solidFill>
+                <a:latin typeface="Arial Unicode MS"/>
+                <a:ea typeface="Arial Unicode MS"/>
+                <a:cs typeface="Arial Unicode MS"/>
+              </a:rPr>
+              <a:t>它只有九十公尺，可是這一題的車在一百五十公尺外——比它看得到的還遠。工具會告訴你門檻是一百五十公尺，差六十公尺。
 </a:t>
             </a:r>
           </a:p>
@@ -3725,30 +3747,52 @@
                 <a:spcPts val="0"/>
               </a:spcBef>
               <a:spcAft>
-                <a:spcPts val="158"/>
+                <a:spcPts val="142"/>
               </a:spcAft>
             </a:pPr>
             <a:r>
-              <a:rPr sz="950" b="1" lang="zh-TW" dirty="0">
-                <a:solidFill>
-                  <a:srgbClr val="000000"/>
-                </a:solidFill>
-                <a:latin typeface="Arial Unicode MS"/>
-                <a:ea typeface="Arial Unicode MS"/>
-                <a:cs typeface="Arial Unicode MS"/>
-              </a:rPr>
-              <a:t>AT128P 過了。</a:t>
-            </a:r>
-            <a:r>
-              <a:rPr sz="950" lang="zh-TW" dirty="0">
-                <a:solidFill>
-                  <a:srgbClr val="000000"/>
-                </a:solidFill>
-                <a:latin typeface="Arial Unicode MS"/>
-                <a:ea typeface="Arial Unicode MS"/>
-                <a:cs typeface="Arial Unicode MS"/>
-              </a:rPr>
-              <a:t>測距兩百一十公尺，綽綽有餘。
+              <a:rPr sz="850" b="1" lang="zh-TW" dirty="0">
+                <a:solidFill>
+                  <a:srgbClr val="000000"/>
+                </a:solidFill>
+                <a:latin typeface="Arial Unicode MS"/>
+                <a:ea typeface="Arial Unicode MS"/>
+                <a:cs typeface="Arial Unicode MS"/>
+              </a:rPr>
+              <a:t>相機卡在別的地方。</a:t>
+            </a:r>
+            <a:r>
+              <a:rPr sz="850" lang="zh-TW" dirty="0">
+                <a:solidFill>
+                  <a:srgbClr val="000000"/>
+                </a:solidFill>
+                <a:latin typeface="Arial Unicode MS"/>
+                <a:ea typeface="Arial Unicode MS"/>
+                <a:cs typeface="Arial Unicode MS"/>
+              </a:rPr>
+              <a:t>它的問題不是看不到，是</a:t>
+            </a:r>
+            <a:r>
+              <a:rPr sz="850" b="1" lang="zh-TW" dirty="0">
+                <a:solidFill>
+                  <a:srgbClr val="000000"/>
+                </a:solidFill>
+                <a:latin typeface="Arial Unicode MS"/>
+                <a:ea typeface="Arial Unicode MS"/>
+                <a:cs typeface="Arial Unicode MS"/>
+              </a:rPr>
+              <a:t>看不準</a:t>
+            </a:r>
+            <a:r>
+              <a:rPr sz="850" lang="zh-TW" dirty="0">
+                <a:solidFill>
+                  <a:srgbClr val="000000"/>
+                </a:solidFill>
+                <a:latin typeface="Arial Unicode MS"/>
+                <a:ea typeface="Arial Unicode MS"/>
+                <a:cs typeface="Arial Unicode MS"/>
+              </a:rPr>
+              <a:t>。一百五十公尺處的估距誤差是正負五點三七公尺。五公尺是什麼概念？大概一台車的長度。你不知道前面那台車是在一百四十五還是一百五十五公尺，這樣沒辦法決定要不要煞車。
 </a:t>
             </a:r>
           </a:p>
@@ -3758,41 +3802,30 @@
                 <a:spcPts val="0"/>
               </a:spcBef>
               <a:spcAft>
-                <a:spcPts val="158"/>
+                <a:spcPts val="142"/>
               </a:spcAft>
             </a:pPr>
             <a:r>
-              <a:rPr sz="950" lang="zh-TW" dirty="0">
-                <a:solidFill>
-                  <a:srgbClr val="000000"/>
-                </a:solidFill>
-                <a:latin typeface="Arial Unicode MS"/>
-                <a:ea typeface="Arial Unicode MS"/>
-                <a:cs typeface="Arial Unicode MS"/>
-              </a:rPr>
-              <a:t>可是請各位看它的點數：一百五十公尺外那台車身上，只剩</a:t>
-            </a:r>
-            <a:r>
-              <a:rPr sz="950" b="1" lang="zh-TW" dirty="0">
-                <a:solidFill>
-                  <a:srgbClr val="000000"/>
-                </a:solidFill>
-                <a:latin typeface="Arial Unicode MS"/>
-                <a:ea typeface="Arial Unicode MS"/>
-                <a:cs typeface="Arial Unicode MS"/>
-              </a:rPr>
-              <a:t>十二個點</a:t>
-            </a:r>
-            <a:r>
-              <a:rPr sz="950" lang="zh-TW" dirty="0">
-                <a:solidFill>
-                  <a:srgbClr val="000000"/>
-                </a:solidFill>
-                <a:latin typeface="Arial Unicode MS"/>
-                <a:ea typeface="Arial Unicode MS"/>
-                <a:cs typeface="Arial Unicode MS"/>
-              </a:rPr>
-              <a:t>。
+              <a:rPr sz="850" b="1" lang="zh-TW" dirty="0">
+                <a:solidFill>
+                  <a:srgbClr val="000000"/>
+                </a:solidFill>
+                <a:latin typeface="Arial Unicode MS"/>
+                <a:ea typeface="Arial Unicode MS"/>
+                <a:cs typeface="Arial Unicode MS"/>
+              </a:rPr>
+              <a:t>AT128P 過了。</a:t>
+            </a:r>
+            <a:r>
+              <a:rPr sz="850" lang="zh-TW" dirty="0">
+                <a:solidFill>
+                  <a:srgbClr val="000000"/>
+                </a:solidFill>
+                <a:latin typeface="Arial Unicode MS"/>
+                <a:ea typeface="Arial Unicode MS"/>
+                <a:cs typeface="Arial Unicode MS"/>
+              </a:rPr>
+              <a:t>測距兩百一十公尺，綽綽有餘。
 </a:t>
             </a:r>
           </a:p>
@@ -3802,19 +3835,41 @@
                 <a:spcPts val="0"/>
               </a:spcBef>
               <a:spcAft>
-                <a:spcPts val="158"/>
+                <a:spcPts val="142"/>
               </a:spcAft>
             </a:pPr>
             <a:r>
-              <a:rPr sz="950" lang="zh-TW" dirty="0">
-                <a:solidFill>
-                  <a:srgbClr val="000000"/>
-                </a:solidFill>
-                <a:latin typeface="Arial Unicode MS"/>
-                <a:ea typeface="Arial Unicode MS"/>
-                <a:cs typeface="Arial Unicode MS"/>
-              </a:rPr>
-              <a:t>十二個點。剛好在門檻上。一台車那麼大的東西，一百五十公尺外只剩十二個點，勉強看得出「那裡有個東西、大概多寬」，要認出是轎車還是貨車就很難了。
+              <a:rPr sz="850" lang="zh-TW" dirty="0">
+                <a:solidFill>
+                  <a:srgbClr val="000000"/>
+                </a:solidFill>
+                <a:latin typeface="Arial Unicode MS"/>
+                <a:ea typeface="Arial Unicode MS"/>
+                <a:cs typeface="Arial Unicode MS"/>
+              </a:rPr>
+              <a:t>可是請各位看它的點數：一百五十公尺外那台車身上，只剩</a:t>
+            </a:r>
+            <a:r>
+              <a:rPr sz="850" b="1" lang="zh-TW" dirty="0">
+                <a:solidFill>
+                  <a:srgbClr val="000000"/>
+                </a:solidFill>
+                <a:latin typeface="Arial Unicode MS"/>
+                <a:ea typeface="Arial Unicode MS"/>
+                <a:cs typeface="Arial Unicode MS"/>
+              </a:rPr>
+              <a:t>十二個點</a:t>
+            </a:r>
+            <a:r>
+              <a:rPr sz="850" lang="zh-TW" dirty="0">
+                <a:solidFill>
+                  <a:srgbClr val="000000"/>
+                </a:solidFill>
+                <a:latin typeface="Arial Unicode MS"/>
+                <a:ea typeface="Arial Unicode MS"/>
+                <a:cs typeface="Arial Unicode MS"/>
+              </a:rPr>
+              <a:t>。
 </a:t>
             </a:r>
           </a:p>
@@ -3824,41 +3879,19 @@
                 <a:spcPts val="0"/>
               </a:spcBef>
               <a:spcAft>
-                <a:spcPts val="158"/>
+                <a:spcPts val="142"/>
               </a:spcAft>
             </a:pPr>
             <a:r>
-              <a:rPr sz="950" lang="zh-TW" dirty="0">
-                <a:solidFill>
-                  <a:srgbClr val="000000"/>
-                </a:solidFill>
-                <a:latin typeface="Arial Unicode MS"/>
-                <a:ea typeface="Arial Unicode MS"/>
-                <a:cs typeface="Arial Unicode MS"/>
-              </a:rPr>
-              <a:t>所以這一題的結論是：</a:t>
-            </a:r>
-            <a:r>
-              <a:rPr sz="950" b="1" lang="zh-TW" dirty="0">
-                <a:solidFill>
-                  <a:srgbClr val="000000"/>
-                </a:solidFill>
-                <a:latin typeface="Arial Unicode MS"/>
-                <a:ea typeface="Arial Unicode MS"/>
-                <a:cs typeface="Arial Unicode MS"/>
-              </a:rPr>
-              <a:t>到了高速，「測得到遠」和「看得清楚」完全變成兩件事。</a:t>
-            </a:r>
-            <a:r>
-              <a:rPr sz="950" lang="zh-TW" dirty="0">
-                <a:solidFill>
-                  <a:srgbClr val="000000"/>
-                </a:solidFill>
-                <a:latin typeface="Arial Unicode MS"/>
-                <a:ea typeface="Arial Unicode MS"/>
-                <a:cs typeface="Arial Unicode MS"/>
-              </a:rPr>
-              <a:t>測距過關不代表能用。
+              <a:rPr sz="850" lang="zh-TW" dirty="0">
+                <a:solidFill>
+                  <a:srgbClr val="000000"/>
+                </a:solidFill>
+                <a:latin typeface="Arial Unicode MS"/>
+                <a:ea typeface="Arial Unicode MS"/>
+                <a:cs typeface="Arial Unicode MS"/>
+              </a:rPr>
+              <a:t>十二個點。剛好在門檻上。一台車那麼大的東西，一百五十公尺外只剩十二個點，勉強看得出「那裡有個東西、大概多寬」，要認出是轎車還是貨車就很難了。
 </a:t>
             </a:r>
           </a:p>
@@ -3868,41 +3901,41 @@
                 <a:spcPts val="0"/>
               </a:spcBef>
               <a:spcAft>
-                <a:spcPts val="158"/>
+                <a:spcPts val="142"/>
               </a:spcAft>
             </a:pPr>
             <a:r>
-              <a:rPr sz="950" lang="zh-TW" dirty="0">
-                <a:solidFill>
-                  <a:srgbClr val="000000"/>
-                </a:solidFill>
-                <a:latin typeface="Arial Unicode MS"/>
-                <a:ea typeface="Arial Unicode MS"/>
-                <a:cs typeface="Arial Unicode MS"/>
-              </a:rPr>
-              <a:t>這句話請填在作業的</a:t>
-            </a:r>
-            <a:r>
-              <a:rPr sz="950" b="1" lang="zh-TW" dirty="0">
-                <a:solidFill>
-                  <a:srgbClr val="000000"/>
-                </a:solidFill>
-                <a:latin typeface="Arial Unicode MS"/>
-                <a:ea typeface="Arial Unicode MS"/>
-                <a:cs typeface="Arial Unicode MS"/>
-              </a:rPr>
-              <a:t>第三題結論句</a:t>
-            </a:r>
-            <a:r>
-              <a:rPr sz="950" lang="zh-TW" dirty="0">
-                <a:solidFill>
-                  <a:srgbClr val="000000"/>
-                </a:solidFill>
-                <a:latin typeface="Arial Unicode MS"/>
-                <a:ea typeface="Arial Unicode MS"/>
-                <a:cs typeface="Arial Unicode MS"/>
-              </a:rPr>
-              <a:t>，這是今天最重要的一句。
+              <a:rPr sz="850" lang="zh-TW" dirty="0">
+                <a:solidFill>
+                  <a:srgbClr val="000000"/>
+                </a:solidFill>
+                <a:latin typeface="Arial Unicode MS"/>
+                <a:ea typeface="Arial Unicode MS"/>
+                <a:cs typeface="Arial Unicode MS"/>
+              </a:rPr>
+              <a:t>所以這一題的結論是：</a:t>
+            </a:r>
+            <a:r>
+              <a:rPr sz="850" b="1" lang="zh-TW" dirty="0">
+                <a:solidFill>
+                  <a:srgbClr val="000000"/>
+                </a:solidFill>
+                <a:latin typeface="Arial Unicode MS"/>
+                <a:ea typeface="Arial Unicode MS"/>
+                <a:cs typeface="Arial Unicode MS"/>
+              </a:rPr>
+              <a:t>到了高速，「測得到遠」和「看得清楚」完全變成兩件事。</a:t>
+            </a:r>
+            <a:r>
+              <a:rPr sz="850" lang="zh-TW" dirty="0">
+                <a:solidFill>
+                  <a:srgbClr val="000000"/>
+                </a:solidFill>
+                <a:latin typeface="Arial Unicode MS"/>
+                <a:ea typeface="Arial Unicode MS"/>
+                <a:cs typeface="Arial Unicode MS"/>
+              </a:rPr>
+              <a:t>測距過關不代表能用。這句話今天記起來。
 </a:t>
             </a:r>
           </a:p>
@@ -3912,11 +3945,77 @@
                 <a:spcPts val="0"/>
               </a:spcBef>
               <a:spcAft>
-                <a:spcPts val="158"/>
+                <a:spcPts val="142"/>
               </a:spcAft>
             </a:pPr>
             <a:r>
-              <a:rPr sz="950" lang="zh-TW" dirty="0">
+              <a:rPr sz="850" lang="zh-TW" dirty="0">
+                <a:solidFill>
+                  <a:srgbClr val="000000"/>
+                </a:solidFill>
+                <a:latin typeface="Arial Unicode MS"/>
+                <a:ea typeface="Arial Unicode MS"/>
+                <a:cs typeface="Arial Unicode MS"/>
+              </a:rPr>
+              <a:t>作業的</a:t>
+            </a:r>
+            <a:r>
+              <a:rPr sz="850" b="1" lang="zh-TW" dirty="0">
+                <a:solidFill>
+                  <a:srgbClr val="000000"/>
+                </a:solidFill>
+                <a:latin typeface="Arial Unicode MS"/>
+                <a:ea typeface="Arial Unicode MS"/>
+                <a:cs typeface="Arial Unicode MS"/>
+              </a:rPr>
+              <a:t>第三題</a:t>
+            </a:r>
+            <a:r>
+              <a:rPr sz="850" lang="zh-TW" dirty="0">
+                <a:solidFill>
+                  <a:srgbClr val="000000"/>
+                </a:solidFill>
+                <a:latin typeface="Arial Unicode MS"/>
+                <a:ea typeface="Arial Unicode MS"/>
+                <a:cs typeface="Arial Unicode MS"/>
+              </a:rPr>
+              <a:t>問的是另一格：請各位替 </a:t>
+            </a:r>
+            <a:r>
+              <a:rPr sz="850" b="1" lang="zh-TW" dirty="0">
+                <a:solidFill>
+                  <a:srgbClr val="000000"/>
+                </a:solidFill>
+                <a:latin typeface="Arial Unicode MS"/>
+                <a:ea typeface="Arial Unicode MS"/>
+                <a:cs typeface="Arial Unicode MS"/>
+              </a:rPr>
+              <a:t>OS1 在河內尖峰、原廠預設的那一格</a:t>
+            </a:r>
+            <a:r>
+              <a:rPr sz="850" lang="zh-TW" dirty="0">
+                <a:solidFill>
+                  <a:srgbClr val="000000"/>
+                </a:solidFill>
+                <a:latin typeface="Arial Unicode MS"/>
+                <a:ea typeface="Arial Unicode MS"/>
+                <a:cs typeface="Arial Unicode MS"/>
+              </a:rPr>
+              <a:t>寫一句結論。就是第一題中間那一欄的第一格，九個點那一格。四個選項選一個，選那句把「卡在哪一行」講對的。
+</a:t>
+            </a:r>
+          </a:p>
+          <a:p>
+            <a:pPr algn="l">
+              <a:spcBef>
+                <a:spcPts val="0"/>
+              </a:spcBef>
+              <a:spcAft>
+                <a:spcPts val="142"/>
+              </a:spcAft>
+            </a:pPr>
+            <a:r>
+              <a:rPr sz="850" lang="zh-TW" dirty="0">
                 <a:solidFill>
                   <a:srgbClr val="000000"/>
                 </a:solidFill>
@@ -4067,7 +4166,7 @@
                 <a:ea typeface="Arial Unicode MS"/>
                 <a:cs typeface="Arial Unicode MS"/>
               </a:rPr>
-              <a:t>AT128P 三個情境都過。相機是校園和河內過、國道不過。OS1 校園不過、河內換模式之後過、國道不過。LD-16 一個都沒過。</a:t>
+              <a:t>AT128P 三個情境都過。相機是校園和河內過、國道不過。LD-16 一個都沒過。OS1 在預設模式下三格都沒過</a:t>
             </a:r>
             <a:r>
               <a:rPr sz="1050" lang="zh-TW" dirty="0">
@@ -4078,7 +4177,7 @@
                 <a:ea typeface="Arial Unicode MS"/>
                 <a:cs typeface="Arial Unicode MS"/>
               </a:rPr>
-              <a:t>
+              <a:t>——河內那一格要換成 2048 才過，可是那是第二題，各位的十二格表上它還是「不夠」。
 </a:t>
             </a:r>
           </a:p>
@@ -4584,7 +4683,7 @@
                 <a:ea typeface="Arial Unicode MS"/>
                 <a:cs typeface="Arial Unicode MS"/>
               </a:rPr>
-              <a:t>第三句：每秒點數愈大，遠處的人就看得愈清楚。
+              <a:t>第三句：兩顆光達比每秒點數，點數大的那顆，遠處的人一定看得比較清楚。
 </a:t>
             </a:r>
           </a:p>
@@ -11420,7 +11519,7 @@
                 <a:ea typeface="Arial" pitchFamily="34" charset="-122"/>
                 <a:cs typeface="Arial" pitchFamily="34" charset="-120"/>
               </a:rPr>
-              <a:t>AT128P qua cả ba · camera hai · OS1 một · LD-16 không cái nào</a:t>
+              <a:t>AT128P cả ba · camera hai · OS1 không (Hà Nội phải đổi 2048 mới đủ) · LD-16 không</a:t>
             </a:r>
             <a:endParaRPr lang="en-US" sz="1000" dirty="0"/>
           </a:p>
@@ -11440,7 +11539,7 @@
                 <a:ea typeface="微軟正黑體" pitchFamily="34" charset="-122"/>
                 <a:cs typeface="微軟正黑體" pitchFamily="34" charset="-120"/>
               </a:rPr>
-              <a:t>AT128P 三個都過・相機兩個・OS1 一個・LD-16 都沒過</a:t>
+              <a:t>AT128P 三個都過・相機兩個・OS1 預設下零個（河內換 2048 才過）・LD-16 都沒過</a:t>
             </a:r>
             <a:endParaRPr lang="en-US" sz="1000" dirty="0"/>
           </a:p>
